--- a/presentation/round1_pitch.pptx
+++ b/presentation/round1_pitch.pptx
@@ -514,35 +514,40 @@
           <a:lstStyle/>
           <a:p>
             <a:r>
-              <a:t>[Hold for a beat before starting. Do not read the slide.]</a:t>
+              <a:t>[Beat before you start. Do not read the slide.]</a:t>
+            </a:r>
+          </a:p>
+          <a:p>
+            <a:r>
+              <a:t>[Convention for the whole deck: you are in Chleo's meeting. Speak to the room as "you",</a:t>
+            </a:r>
+          </a:p>
+          <a:p>
+            <a:r>
+              <a:t>never about her as "she". The only exception is Slide 11, where you step out.]</a:t>
             </a:r>
           </a:p>
           <a:p/>
           <a:p>
             <a:r>
-              <a:t>I met Chleo at a dinner. She runs a mid-size financial services firm, and she told me she</a:t>
-            </a:r>
-          </a:p>
-          <a:p>
-            <a:r>
-              <a:t>does not trust AI because she cannot see what it does.</a:t>
+              <a:t>We met at a dinner, and you told me you do not trust AI because you cannot see what it does.</a:t>
             </a:r>
           </a:p>
           <a:p/>
           <a:p>
             <a:r>
-              <a:t>So this is not a pitch about what AI could do for her. It is a pitch about one decision she</a:t>
-            </a:r>
-          </a:p>
-          <a:p>
-            <a:r>
-              <a:t>can watch happen.</a:t>
+              <a:t>So this is not a pitch about what AI could do for you. It is about one decision you can</a:t>
+            </a:r>
+          </a:p>
+          <a:p>
+            <a:r>
+              <a:t>watch happen.</a:t>
             </a:r>
           </a:p>
           <a:p/>
           <a:p>
             <a:r>
-              <a:t>Everything I am about to show you runs. The numbers are reproducible from the repository.</a:t>
+              <a:t>Everything here runs. Every number traces back to a repository you can open.</a:t>
             </a:r>
           </a:p>
         </p:txBody>
@@ -628,67 +633,56 @@
           <a:lstStyle/>
           <a:p>
             <a:r>
-              <a:t>Three phases, fixed fee, because a client whose objection is uncertainty should not be handed</a:t>
-            </a:r>
-          </a:p>
-          <a:p>
-            <a:r>
-              <a:t>an open-ended commitment.</a:t>
+              <a:t>[Slow on Phase 0. It is the unusual part and the part they will question.]</a:t>
             </a:r>
           </a:p>
           <a:p/>
           <a:p>
             <a:r>
-              <a:t>Phase 0 is two weeks and €5,600 — two of her handlers label 300 complaints. That produces</a:t>
-            </a:r>
-          </a:p>
-          <a:p>
-            <a:r>
-              <a:t>the ground truth she does not currently have. It is worth buying even if she never builds</a:t>
-            </a:r>
-          </a:p>
-          <a:p>
-            <a:r>
-              <a:t>any AI, because it tells her whether her own categories can be applied consistently by</a:t>
-            </a:r>
-          </a:p>
-          <a:p>
-            <a:r>
-              <a:t>anyone.</a:t>
+              <a:t>Fixed fee per phase, because you told me your problem is uncertainty and I am not going</a:t>
+            </a:r>
+          </a:p>
+          <a:p>
+            <a:r>
+              <a:t>to hand you an open-ended commitment.</a:t>
             </a:r>
           </a:p>
           <a:p/>
           <a:p>
             <a:r>
-              <a:t>Phase 1 is the pilot: it proposes, nobody acts on it, and we measure against her labels.</a:t>
+              <a:t>Phase 0 buys something odd: two of your own handlers labelling three hundred complaints,</a:t>
+            </a:r>
+          </a:p>
+          <a:p>
+            <a:r>
+              <a:t>before any AI at all. It is worth buying even if you never build this, because it tells</a:t>
+            </a:r>
+          </a:p>
+          <a:p>
+            <a:r>
+              <a:t>you whether your own categories can be applied consistently by anybody.</a:t>
             </a:r>
           </a:p>
           <a:p/>
           <a:p>
             <a:r>
-              <a:t>Phase 2 only happens if the pilot passes.</a:t>
+              <a:t>You are committing fourteen thousand to reach a decision — not twenty-four and a half to</a:t>
+            </a:r>
+          </a:p>
+          <a:p>
+            <a:r>
+              <a:t>a deployment. Phase 2 only happens if the pilot earns it.</a:t>
             </a:r>
           </a:p>
           <a:p/>
           <a:p>
             <a:r>
-              <a:t>She commits €14,000 to reach a decision, not €24,500 to a deployment.</a:t>
-            </a:r>
-          </a:p>
-          <a:p/>
-          <a:p>
-            <a:r>
-              <a:t>And the break-even is concrete: the running cost is covered if this prevents four ombudsman</a:t>
-            </a:r>
-          </a:p>
-          <a:p>
-            <a:r>
-              <a:t>referrals a year, at €760 each. Whether it does is what the pilot is for. I am not claiming</a:t>
-            </a:r>
-          </a:p>
-          <a:p>
-            <a:r>
-              <a:t>it does.</a:t>
+              <a:t>[If pressed on ROI:] The break-even is four avoided ombudsman referrals a year. I am not</a:t>
+            </a:r>
+          </a:p>
+          <a:p>
+            <a:r>
+              <a:t>claiming we hit it. That is what the pilot measures.</a:t>
             </a:r>
           </a:p>
         </p:txBody>
@@ -774,52 +768,40 @@
           <a:lstStyle/>
           <a:p>
             <a:r>
-              <a:t>[Step out of the pitch here. Change tone — this is to the room as assessors, not as Chleo.]</a:t>
+              <a:t>[Stop pitching. Drop the client voice — this is to you as assessors, not as Chleo.]</a:t>
             </a:r>
           </a:p>
           <a:p/>
           <a:p>
             <a:r>
-              <a:t>Three things I would genuinely like challenged.</a:t>
+              <a:t>The questions are on the slide, so I will not read them.</a:t>
             </a:r>
           </a:p>
           <a:p/>
           <a:p>
             <a:r>
-              <a:t>First — I lead with "this is not deployable yet, and here is the number." I think that is</a:t>
-            </a:r>
-          </a:p>
-          <a:p>
-            <a:r>
-              <a:t>stronger than a confident 85%. It might just lose the room.</a:t>
+              <a:t>The one I actually want pushed on is the first. I have built this pitch around admitting</a:t>
+            </a:r>
+          </a:p>
+          <a:p>
+            <a:r>
+              <a:t>a weak number early, on the bet that an honest sixty per cent buys more trust than a</a:t>
+            </a:r>
+          </a:p>
+          <a:p>
+            <a:r>
+              <a:t>confident eighty-five would.</a:t>
             </a:r>
           </a:p>
           <a:p/>
           <a:p>
             <a:r>
-              <a:t>Second — Phase 0 sells a labelling exercise before any AI at all. Does that read as rigour,</a:t>
-            </a:r>
-          </a:p>
-          <a:p>
-            <a:r>
-              <a:t>or as stalling?</a:t>
-            </a:r>
-          </a:p>
-          <a:p/>
-          <a:p>
-            <a:r>
-              <a:t>Third — I refuse two use cases on stage. Does that build authority, or does it sound</a:t>
-            </a:r>
-          </a:p>
-          <a:p>
-            <a:r>
-              <a:t>negative?</a:t>
-            </a:r>
-          </a:p>
-          <a:p/>
-          <a:p>
-            <a:r>
-              <a:t>If you only push me on one thing, push me on the first.</a:t>
+              <a:t>I think that is right. I am not certain it survives contact with a real client, and that</a:t>
+            </a:r>
+          </a:p>
+          <a:p>
+            <a:r>
+              <a:t>is the thing I would most like you to take apart.</a:t>
             </a:r>
           </a:p>
         </p:txBody>
@@ -905,62 +887,45 @@
           <a:lstStyle/>
           <a:p>
             <a:r>
-              <a:t>[Only if asked about data quality.]</a:t>
+              <a:t>[Only if data quality is questioned.]</a:t>
             </a:r>
           </a:p>
           <a:p/>
           <a:p>
             <a:r>
-              <a:t>Three things the data appeared to say that were false.</a:t>
+              <a:t>Three things the data appeared to say, and did not.</a:t>
             </a:r>
           </a:p>
           <a:p/>
           <a:p>
             <a:r>
-              <a:t>Complaints looked like they fell 73% in July. They did not — the CFPB only publishes a</a:t>
-            </a:r>
-          </a:p>
-          <a:p>
-            <a:r>
-              <a:t>complaint once the firm has responded, so recent weeks are structurally incomplete. I cut</a:t>
-            </a:r>
-          </a:p>
-          <a:p>
-            <a:r>
-              <a:t>the window at 27 June.</a:t>
+              <a:t>The July cliff is the one that would have caught me. The CFPB only publishes a complaint</a:t>
+            </a:r>
+          </a:p>
+          <a:p>
+            <a:r>
+              <a:t>once the firm has responded, so the newest weeks are always thin. Read naively it is a</a:t>
+            </a:r>
+          </a:p>
+          <a:p>
+            <a:r>
+              <a:t>73% collapse in complaints and a wonderful slide. It is an artefact — I cut the window at</a:t>
+            </a:r>
+          </a:p>
+          <a:p>
+            <a:r>
+              <a:t>27 June.</a:t>
             </a:r>
           </a:p>
           <a:p/>
           <a:p>
             <a:r>
-              <a:t>Handling time looked like a service metric. It is zero for 96% of records because it</a:t>
-            </a:r>
-          </a:p>
-          <a:p>
-            <a:r>
-              <a:t>measures the regulator's own routing, not any firm's speed. I dropped it.</a:t>
-            </a:r>
-          </a:p>
-          <a:p/>
-          <a:p>
-            <a:r>
-              <a:t>And two different timeliness fields were on screen together — 98.0% answered on time next to</a:t>
-            </a:r>
-          </a:p>
-          <a:p>
-            <a:r>
-              <a:t>0.6% "untimely" — which reads as a contradiction. They measure different things, so I</a:t>
-            </a:r>
-          </a:p>
-          <a:p>
-            <a:r>
-              <a:t>relabelled one.</a:t>
-            </a:r>
-          </a:p>
-          <a:p/>
-          <a:p>
-            <a:r>
-              <a:t>Each of those would have produced a confident wrong answer.</a:t>
+              <a:t>The other two are on the slide. The pattern is the point: each would have produced a</a:t>
+            </a:r>
+          </a:p>
+          <a:p>
+            <a:r>
+              <a:t>confident, wrong answer that no test would have caught.</a:t>
             </a:r>
           </a:p>
         </p:txBody>
@@ -1052,61 +1017,39 @@
           <a:p/>
           <a:p>
             <a:r>
-              <a:t>Preliminary view: limited risk. It classifies and routes; a human resolves. It is not Annex</a:t>
-            </a:r>
-          </a:p>
-          <a:p>
-            <a:r>
-              <a:t>III creditworthiness assessment.</a:t>
+              <a:t>Limited risk, and the reasoning is what matters: it classifies and routes, a human</a:t>
+            </a:r>
+          </a:p>
+          <a:p>
+            <a:r>
+              <a:t>resolves, and it never touches creditworthiness.</a:t>
             </a:r>
           </a:p>
           <a:p/>
           <a:p>
             <a:r>
-              <a:t>What keeps it there is the human decision boundary. If it ever routes autonomously, that is</a:t>
-            </a:r>
-          </a:p>
-          <a:p>
-            <a:r>
-              <a:t>a new assessment, not an upgrade.</a:t>
+              <a:t>What holds it there is the human decision boundary. If it ever routes autonomously that</a:t>
+            </a:r>
+          </a:p>
+          <a:p>
+            <a:r>
+              <a:t>is a new assessment, not an upgrade to this one.</a:t>
             </a:r>
           </a:p>
           <a:p/>
           <a:p>
             <a:r>
-              <a:t>GDPR applies regardless of tier — complaint text is personal data, so legal basis, retention</a:t>
-            </a:r>
-          </a:p>
-          <a:p>
-            <a:r>
-              <a:t>and a DPIA are Round 2 deliverables.</a:t>
-            </a:r>
-          </a:p>
-          <a:p/>
-          <a:p>
-            <a:r>
-              <a:t>The open risk I would flag now is model hosting region. An EU customer's complaint text must</a:t>
-            </a:r>
-          </a:p>
-          <a:p>
-            <a:r>
-              <a:t>not leave the EEA by accident.</a:t>
-            </a:r>
-          </a:p>
-          <a:p/>
-          <a:p>
-            <a:r>
-              <a:t>I am deliberately not giving you a final classification. Round 2 owes the step-by-step</a:t>
-            </a:r>
-          </a:p>
-          <a:p>
-            <a:r>
-              <a:t>reasoning. A confident tier label without that work is exactly the unearned certainty Chleo</a:t>
-            </a:r>
-          </a:p>
-          <a:p>
-            <a:r>
-              <a:t>is right to distrust.</a:t>
+              <a:t>I am deliberately not giving you a final classification today. Round 2 owes the</a:t>
+            </a:r>
+          </a:p>
+          <a:p>
+            <a:r>
+              <a:t>step-by-step reasoning. A confident tier label without that work is exactly the unearned</a:t>
+            </a:r>
+          </a:p>
+          <a:p>
+            <a:r>
+              <a:t>certainty you were right to distrust in the first place.</a:t>
             </a:r>
           </a:p>
         </p:txBody>
@@ -1192,39 +1135,29 @@
           <a:lstStyle/>
           <a:p>
             <a:r>
-              <a:t>[Only if challenged on sourcing.]</a:t>
+              <a:t>[Only if sourcing is challenged.]</a:t>
             </a:r>
           </a:p>
           <a:p/>
           <a:p>
             <a:r>
-              <a:t>The corpus is the CFPB public API. The complaint rate is FCA aggregate data for the second</a:t>
-            </a:r>
-          </a:p>
-          <a:p>
-            <a:r>
-              <a:t>half of 2025. The ombudsman fee is the published FOS figure. The token counts I measured</a:t>
-            </a:r>
-          </a:p>
-          <a:p>
-            <a:r>
-              <a:t>myself. The accuracy figure is 240 complaints, stratified, fixed seed.</a:t>
+              <a:t>Everything on these slides is either measured by me or cited to a regulator.</a:t>
             </a:r>
           </a:p>
           <a:p/>
           <a:p>
             <a:r>
-              <a:t>Everything on these slides is either measured or cited. Where a number is a judgement — the</a:t>
-            </a:r>
-          </a:p>
-          <a:p>
-            <a:r>
-              <a:t>triage minutes, the on-costs — it is labelled as a judgement in the cost model, not dressed</a:t>
-            </a:r>
-          </a:p>
-          <a:p>
-            <a:r>
-              <a:t>up as a measurement.</a:t>
+              <a:t>Where a figure is a judgement rather than a measurement — the minutes per complaint, the</a:t>
+            </a:r>
+          </a:p>
+          <a:p>
+            <a:r>
+              <a:t>employer on-costs — it is labelled as a judgement in the cost model. I have not dressed</a:t>
+            </a:r>
+          </a:p>
+          <a:p>
+            <a:r>
+              <a:t>an estimate up as a finding anywhere in this deck.</a:t>
             </a:r>
           </a:p>
         </p:txBody>
@@ -1310,46 +1243,46 @@
           <a:lstStyle/>
           <a:p>
             <a:r>
-              <a:t>Three things I took from that dinner.</a:t>
+              <a:t>[Point at the middle card, not the left one. The fear is the slide.]</a:t>
             </a:r>
           </a:p>
           <a:p/>
           <a:p>
             <a:r>
-              <a:t>Her firm: about 500 staff, a quarter of a million retail customers, EU-established.</a:t>
+              <a:t>You never asked me whether AI works. You asked what it is, and how you would see it.</a:t>
             </a:r>
           </a:p>
           <a:p/>
           <a:p>
             <a:r>
-              <a:t>Her fear, in her own words: AI is not transparent. She kept asking what "the AI" actually</a:t>
-            </a:r>
-          </a:p>
-          <a:p>
-            <a:r>
-              <a:t>is, and how she would sign up. Those are not naive questions. They are the right ones.</a:t>
+              <a:t>Those are the two questions your regulator will ask you as well, which is why I have built</a:t>
+            </a:r>
+          </a:p>
+          <a:p>
+            <a:r>
+              <a:t>the answer to them rather than a demo.</a:t>
             </a:r>
           </a:p>
           <a:p/>
           <a:p>
             <a:r>
-              <a:t>So the job is not to build her a platform. It is to find one place in her business where a</a:t>
-            </a:r>
-          </a:p>
-          <a:p>
-            <a:r>
-              <a:t>machine makes a decision, and she can watch it, and disagree with it.</a:t>
+              <a:t>So I am not proposing a platform. I am proposing one place in your business where you can</a:t>
+            </a:r>
+          </a:p>
+          <a:p>
+            <a:r>
+              <a:t>watch a machine decide — and overrule it.</a:t>
             </a:r>
           </a:p>
           <a:p/>
           <a:p>
             <a:r>
-              <a:t>[Q: Isn't she just uninformed? — No. She is asking for auditability, which is exactly what</a:t>
-            </a:r>
-          </a:p>
-          <a:p>
-            <a:r>
-              <a:t>her regulator will ask for too.]</a:t>
+              <a:t>[Q: Is this too small to matter? — Small is the point. You cannot audit something you</a:t>
+            </a:r>
+          </a:p>
+          <a:p>
+            <a:r>
+              <a:t>bought whole.]</a:t>
             </a:r>
           </a:p>
         </p:txBody>
@@ -1435,49 +1368,45 @@
           <a:lstStyle/>
           <a:p>
             <a:r>
-              <a:t>Three I would build. Complaint triage — it reads a complaint and proposes which team should</a:t>
-            </a:r>
-          </a:p>
-          <a:p>
-            <a:r>
-              <a:t>handle it. Anomaly flagging, where every flag carries its reason. And reporting assistance,</a:t>
-            </a:r>
-          </a:p>
-          <a:p>
-            <a:r>
-              <a:t>which drafts what a person then signs.</a:t>
+              <a:t>[Do not read the six items. Give them four seconds to scan, then talk about the ordering.]</a:t>
             </a:r>
           </a:p>
           <a:p/>
           <a:p>
             <a:r>
-              <a:t>Two I refuse. A customer-facing chatbot fails in public, in her customer's voice, and its</a:t>
-            </a:r>
-          </a:p>
-          <a:p>
-            <a:r>
-              <a:t>errors are unbounded. Credit scoring is Annex III high-risk under the EU AI Act — that is</a:t>
-            </a:r>
-          </a:p>
-          <a:p>
-            <a:r>
-              <a:t>conformity assessment and a fundamental-rights impact assessment before a single decision</a:t>
-            </a:r>
-          </a:p>
-          <a:p>
-            <a:r>
-              <a:t>goes live.</a:t>
+              <a:t>The three on the left are ranked by one thing only: how visible the reasoning is. Not by</a:t>
+            </a:r>
+          </a:p>
+          <a:p>
+            <a:r>
+              <a:t>which saves the most money.</a:t>
             </a:r>
           </a:p>
           <a:p/>
           <a:p>
             <a:r>
-              <a:t>[Land this line:] I think the fastest way to earn a sceptical CEO's trust is to be the</a:t>
-            </a:r>
-          </a:p>
-          <a:p>
-            <a:r>
-              <a:t>consultant who tells her what not to buy.</a:t>
+              <a:t>The two on the right I am refusing, and I want to be explicit about why. A chatbot fails</a:t>
+            </a:r>
+          </a:p>
+          <a:p>
+            <a:r>
+              <a:t>in public, in your customer's voice, with errors nobody can bound. Credit scoring is</a:t>
+            </a:r>
+          </a:p>
+          <a:p>
+            <a:r>
+              <a:t>Annex III high-risk under the AI Act — conformity assessment and a fundamental-rights</a:t>
+            </a:r>
+          </a:p>
+          <a:p>
+            <a:r>
+              <a:t>impact assessment before a single decision goes live.</a:t>
+            </a:r>
+          </a:p>
+          <a:p/>
+          <a:p>
+            <a:r>
+              <a:t>[Land this:] The fastest way to earn your trust is to tell you what not to buy.</a:t>
             </a:r>
           </a:p>
         </p:txBody>
@@ -1563,50 +1492,51 @@
           <a:lstStyle/>
           <a:p>
             <a:r>
-              <a:t>This is from her dashboard, built on 16,839 real complaints from the public CFPB database.</a:t>
+              <a:t>[Switch to the live dashboard now if the room is warm. Otherwise stay on the table.]</a:t>
             </a:r>
           </a:p>
           <a:p/>
           <a:p>
             <a:r>
-              <a:t>Deposits and cards are two thirds of the volume. But look at the last column — credit card</a:t>
-            </a:r>
-          </a:p>
-          <a:p>
-            <a:r>
-              <a:t>complaints end with money paid out 17.2% of the time, against 3.0% for vehicle loans. Nearly</a:t>
-            </a:r>
-          </a:p>
-          <a:p>
-            <a:r>
-              <a:t>six times.</a:t>
+              <a:t>Read the last column, not the first.</a:t>
             </a:r>
           </a:p>
           <a:p/>
           <a:p>
             <a:r>
-              <a:t>So where a complaint lands is not an administrative detail. It has money attached to it.</a:t>
-            </a:r>
-          </a:p>
-          <a:p>
-            <a:r>
-              <a:t>That is the argument for getting routing right, and it is her argument, not mine.</a:t>
+              <a:t>Deposits and cards are two thirds of your volume — but a card complaint ends with money</a:t>
+            </a:r>
+          </a:p>
+          <a:p>
+            <a:r>
+              <a:t>leaving the building 5.7 times more often than a vehicle loan complaint does.</a:t>
             </a:r>
           </a:p>
           <a:p/>
           <a:p>
             <a:r>
-              <a:t>[If asked about the data:] US regulatory data, used as a proxy for the shape of a complaint</a:t>
-            </a:r>
-          </a:p>
-          <a:p>
-            <a:r>
-              <a:t>inbox — the mix of issues and the language — not a forecast of her volumes. I say that on</a:t>
-            </a:r>
-          </a:p>
-          <a:p>
-            <a:r>
-              <a:t>the dashboard itself.</a:t>
+              <a:t>So which queue a complaint lands in is not administration. It is money. That is your</a:t>
+            </a:r>
+          </a:p>
+          <a:p>
+            <a:r>
+              <a:t>argument for accurate routing, and I am only pointing at it.</a:t>
+            </a:r>
+          </a:p>
+          <a:p/>
+          <a:p>
+            <a:r>
+              <a:t>[Q: Is this your data? — No. It is the US regulator's public complaint database, 16,839</a:t>
+            </a:r>
+          </a:p>
+          <a:p>
+            <a:r>
+              <a:t>complaints, used as a proxy for the shape of a complaint inbox — the mix and the</a:t>
+            </a:r>
+          </a:p>
+          <a:p>
+            <a:r>
+              <a:t>language. Not a forecast of your volumes. Your real numbers come from Phase 0.]</a:t>
             </a:r>
           </a:p>
         </p:txBody>
@@ -1692,35 +1622,35 @@
           <a:lstStyle/>
           <a:p>
             <a:r>
-              <a:t>This is the finding the whole proposal rests on.</a:t>
+              <a:t>[Let the 46.1% sit. This is the slide the whole proposal rests on.]</a:t>
             </a:r>
           </a:p>
           <a:p/>
           <a:p>
             <a:r>
-              <a:t>There are 64 issue categories. Five of them are 46% of everything that arrives.</a:t>
+              <a:t>Sixty-four categories exist. Five of them are nearly half your inbox.</a:t>
             </a:r>
           </a:p>
           <a:p/>
           <a:p>
             <a:r>
-              <a:t>That means the model does not have to be good at 64 things. It has to be good at five, and</a:t>
-            </a:r>
-          </a:p>
-          <a:p>
-            <a:r>
-              <a:t>it has to be willing to say "I don't know" about the rest.</a:t>
+              <a:t>That is what makes this buildable. I am not asking a model to be good at sixty-four</a:t>
+            </a:r>
+          </a:p>
+          <a:p>
+            <a:r>
+              <a:t>things — I am asking it to be good at five and to admit when it is outside them.</a:t>
             </a:r>
           </a:p>
           <a:p/>
           <a:p>
             <a:r>
-              <a:t>That is a scope Chleo can approve and a risk she can bound. It is the difference between</a:t>
-            </a:r>
-          </a:p>
-          <a:p>
-            <a:r>
-              <a:t>"AI for complaints" and something I can actually finish.</a:t>
+              <a:t>It is the difference between "AI for complaints", which I could not finish, and something</a:t>
+            </a:r>
+          </a:p>
+          <a:p>
+            <a:r>
+              <a:t>I can hand you working.</a:t>
             </a:r>
           </a:p>
         </p:txBody>
@@ -1806,57 +1736,62 @@
           <a:lstStyle/>
           <a:p>
             <a:r>
-              <a:t>[Switch to the live n8n window if time allows; otherwise narrate the diagram.]</a:t>
+              <a:t>[Switch to the live n8n window. If the demo is cold, narrate the chevrons and play the</a:t>
+            </a:r>
+          </a:p>
+          <a:p>
+            <a:r>
+              <a:t>recording.]</a:t>
             </a:r>
           </a:p>
           <a:p/>
           <a:p>
             <a:r>
-              <a:t>A complaint arrives. The model proposes a team. Four guards check that proposal. A handler</a:t>
-            </a:r>
-          </a:p>
-          <a:p>
-            <a:r>
-              <a:t>sees the reason and decides.</a:t>
+              <a:t>This is running now. Not a mockup.</a:t>
             </a:r>
           </a:p>
           <a:p/>
           <a:p>
             <a:r>
-              <a:t>Every branch ends at a person. Nothing is routed by the machine.</a:t>
+              <a:t>Here is the part that answers your actual question: you can open any step and read the</a:t>
+            </a:r>
+          </a:p>
+          <a:p>
+            <a:r>
+              <a:t>real data going through it. Not my description of what it did — the thing itself.</a:t>
             </a:r>
           </a:p>
           <a:p/>
           <a:p>
             <a:r>
-              <a:t>And this is the part that answers her actual question — in n8n she can open any step and</a:t>
-            </a:r>
-          </a:p>
-          <a:p>
-            <a:r>
-              <a:t>read the exact data going in and out. Not a description of what it did. The thing itself.</a:t>
+              <a:t>And notice where the chain ends. A person decides. The machine never routes anything on</a:t>
+            </a:r>
+          </a:p>
+          <a:p>
+            <a:r>
+              <a:t>its own.</a:t>
             </a:r>
           </a:p>
           <a:p/>
           <a:p>
             <a:r>
-              <a:t>The four guards: valid JSON, a queue that actually exists for that product, confidence above</a:t>
-            </a:r>
-          </a:p>
-          <a:p>
-            <a:r>
-              <a:t>0.70, and the quote must appear verbatim in the complaint. Any failure goes to a human with</a:t>
-            </a:r>
-          </a:p>
-          <a:p>
-            <a:r>
-              <a:t>the reason stated.</a:t>
+              <a:t>[If you have time, expand one guard:] The fourth check is the interesting one. The model</a:t>
+            </a:r>
+          </a:p>
+          <a:p>
+            <a:r>
+              <a:t>has to quote your customer's own words back, and we verify that quote is really in the</a:t>
+            </a:r>
+          </a:p>
+          <a:p>
+            <a:r>
+              <a:t>complaint before anyone sees it.</a:t>
             </a:r>
           </a:p>
           <a:p/>
           <a:p>
             <a:r>
-              <a:t>[Q: Why n8n and not code? — Because she can read it. That is the whole point.]</a:t>
+              <a:t>[Q: Why n8n rather than code? — Because you can read it. That is the entire reason.]</a:t>
             </a:r>
           </a:p>
         </p:txBody>
@@ -1942,45 +1877,45 @@
           <a:lstStyle/>
           <a:p>
             <a:r>
-              <a:t>60 decisions traced in LangSmith. Every one accounted for.</a:t>
+              <a:t>[Slow right down. This is the most important slide in the deck.]</a:t>
             </a:r>
           </a:p>
           <a:p/>
           <a:p>
             <a:r>
-              <a:t>52 passed all checks. Four were stopped because the model's confidence was too low. And four</a:t>
-            </a:r>
-          </a:p>
-          <a:p>
-            <a:r>
-              <a:t>were stopped because the justification quote it gave was not actually in the complaint.</a:t>
+              <a:t>Four times out of sixty, the model invented its justification — it produced a quote that</a:t>
+            </a:r>
+          </a:p>
+          <a:p>
+            <a:r>
+              <a:t>was not in the complaint at all. Confidently.</a:t>
             </a:r>
           </a:p>
           <a:p/>
           <a:p>
             <a:r>
-              <a:t>[Slow down here.] It made up its reason. Four times out of sixty. And the system caught</a:t>
-            </a:r>
-          </a:p>
-          <a:p>
-            <a:r>
-              <a:t>every one, because the guard checks the quote against the text rather than trusting it.</a:t>
+              <a:t>Every one was caught, because the system checks the quote against the text instead of</a:t>
+            </a:r>
+          </a:p>
+          <a:p>
+            <a:r>
+              <a:t>trusting it.</a:t>
             </a:r>
           </a:p>
           <a:p/>
           <a:p>
             <a:r>
-              <a:t>A system that explains itself convincingly but falsely is more dangerous than one that says</a:t>
-            </a:r>
-          </a:p>
-          <a:p>
-            <a:r>
-              <a:t>nothing at all. That is the failure mode Chleo should be afraid of, and it is the one we</a:t>
-            </a:r>
-          </a:p>
-          <a:p>
-            <a:r>
-              <a:t>instrument for.</a:t>
+              <a:t>That bottom row is the one to look at. Nothing was silently wrong. A system that explains</a:t>
+            </a:r>
+          </a:p>
+          <a:p>
+            <a:r>
+              <a:t>itself convincingly but falsely is far more dangerous than one that says nothing, and it</a:t>
+            </a:r>
+          </a:p>
+          <a:p>
+            <a:r>
+              <a:t>is the failure I have instrumented for.</a:t>
             </a:r>
           </a:p>
         </p:txBody>
@@ -2066,61 +2001,51 @@
           <a:lstStyle/>
           <a:p>
             <a:r>
-              <a:t>Here is the number I could have left off this deck.</a:t>
+              <a:t>[Do not soften this. Say the number plainly.]</a:t>
             </a:r>
           </a:p>
           <a:p/>
           <a:p>
             <a:r>
-              <a:t>60.5% correct team assignment. That is not deployable. I am telling you because the reason</a:t>
-            </a:r>
-          </a:p>
-          <a:p>
-            <a:r>
-              <a:t>matters more than the number.</a:t>
+              <a:t>Sixty per cent. That is not good enough to deploy, and I am showing you rather than</a:t>
+            </a:r>
+          </a:p>
+          <a:p>
+            <a:r>
+              <a:t>burying it, because the reason matters more than the number.</a:t>
             </a:r>
           </a:p>
           <a:p/>
           <a:p>
             <a:r>
-              <a:t>I tested whether the model was just weak. It agrees with itself 88 to 89% of the time — it</a:t>
-            </a:r>
-          </a:p>
-          <a:p>
-            <a:r>
-              <a:t>is stable. It disagrees with the public label systematically, not randomly.</a:t>
+              <a:t>I checked whether the model was simply weak. It agrees with itself nearly ninety per</a:t>
+            </a:r>
+          </a:p>
+          <a:p>
+            <a:r>
+              <a:t>cent of the time — it is stable. It disagrees with the public label systematically.</a:t>
             </a:r>
           </a:p>
           <a:p/>
           <a:p>
             <a:r>
-              <a:t>Then I looked at who assigns that label. It is chosen by the customer filing the complaint,</a:t>
-            </a:r>
-          </a:p>
-          <a:p>
-            <a:r>
-              <a:t>from a dropdown, with no training. It records which box a member of the public ticked. It is</a:t>
-            </a:r>
-          </a:p>
-          <a:p>
-            <a:r>
-              <a:t>not a record of which team should handle the case.</a:t>
+              <a:t>So I looked at who writes that label. Your customer does, from a dropdown, untrained. It</a:t>
+            </a:r>
+          </a:p>
+          <a:p>
+            <a:r>
+              <a:t>records which box a member of the public ticked. It is not a record of which team should</a:t>
+            </a:r>
+          </a:p>
+          <a:p>
+            <a:r>
+              <a:t>have handled the case.</a:t>
             </a:r>
           </a:p>
           <a:p/>
           <a:p>
             <a:r>
-              <a:t>So measuring a triage model against it measures agreement with untrained self-selection.</a:t>
-            </a:r>
-          </a:p>
-          <a:p>
-            <a:r>
-              <a:t>Any vendor quoting an accuracy figure built this way is quoting a number that does not mean</a:t>
-            </a:r>
-          </a:p>
-          <a:p>
-            <a:r>
-              <a:t>what it appears to mean.</a:t>
+              <a:t>Measured against it, any vendor's accuracy figure means less than it appears to.</a:t>
             </a:r>
           </a:p>
         </p:txBody>
@@ -2206,46 +2131,46 @@
           <a:lstStyle/>
           <a:p>
             <a:r>
-              <a:t>The API costs 29 cents a year. That is not a typo, and it is measured, not estimated —</a:t>
-            </a:r>
-          </a:p>
-          <a:p>
-            <a:r>
-              <a:t>684 input tokens and 49 output tokens per complaint, at list price.</a:t>
+              <a:t>[Pause on the first row. Let someone react to 29 cents.]</a:t>
             </a:r>
           </a:p>
           <a:p/>
           <a:p>
             <a:r>
-              <a:t>The platform is €1,800. The quarterly accuracy review is €5,600 — that is someone</a:t>
-            </a:r>
-          </a:p>
-          <a:p>
-            <a:r>
-              <a:t>accountable for watching it.</a:t>
+              <a:t>Twenty-nine cents a year. That is measured, not estimated.</a:t>
             </a:r>
           </a:p>
           <a:p/>
           <a:p>
             <a:r>
-              <a:t>97% of the running cost is human oversight. Four thousandths of one percent is the model.</a:t>
+              <a:t>What actually costs money is the review — someone accountable for watching it. That is</a:t>
+            </a:r>
+          </a:p>
+          <a:p>
+            <a:r>
+              <a:t>the £5,600 line, and I would not remove it.</a:t>
             </a:r>
           </a:p>
           <a:p/>
           <a:p>
             <a:r>
-              <a:t>Which means model choice is not a financial decision at her volume. It is an accuracy</a:t>
-            </a:r>
-          </a:p>
-          <a:p>
-            <a:r>
-              <a:t>decision. Even the model six times more expensive would cost about €5 a year.</a:t>
+              <a:t>Which means at your volume, choosing a model is not a budget decision at all. It is an</a:t>
+            </a:r>
+          </a:p>
+          <a:p>
+            <a:r>
+              <a:t>accuracy decision. The model six times more expensive would still cost about five euro a</a:t>
+            </a:r>
+          </a:p>
+          <a:p>
+            <a:r>
+              <a:t>year.</a:t>
             </a:r>
           </a:p>
           <a:p/>
           <a:p>
             <a:r>
-              <a:t>[Q: So why not use the best model always? — At this volume, you should. That is the point.]</a:t>
+              <a:t>[Q: So why not always use the best model? — At this volume you should. That is the point.]</a:t>
             </a:r>
           </a:p>
         </p:txBody>
@@ -2599,7 +2524,7 @@
     <p:bg>
       <p:bgPr>
         <a:solidFill>
-          <a:srgbClr val="141B33"/>
+          <a:srgbClr val="1D2A32"/>
         </a:solidFill>
       </p:bgPr>
     </p:bg>
@@ -2633,7 +2558,7 @@
           </a:prstGeom>
           <a:ln w="12700">
             <a:solidFill>
-              <a:srgbClr val="24405E"/>
+              <a:srgbClr val="445A69"/>
             </a:solidFill>
             <a:prstDash val="solid"/>
           </a:ln>
@@ -2729,9 +2654,9 @@
                 <a:solidFill>
                   <a:srgbClr val="FFFFFF"/>
                 </a:solidFill>
-                <a:latin typeface="Georgia" pitchFamily="34" charset="0"/>
-                <a:ea typeface="Georgia" pitchFamily="34" charset="-122"/>
-                <a:cs typeface="Georgia" pitchFamily="34" charset="-120"/>
+                <a:latin typeface="Trebuchet MS" pitchFamily="34" charset="0"/>
+                <a:ea typeface="Trebuchet MS" pitchFamily="34" charset="-122"/>
+                <a:cs typeface="Trebuchet MS" pitchFamily="34" charset="-120"/>
               </a:rPr>
               <a:t>Show her what the AI does</a:t>
             </a:r>
@@ -2766,11 +2691,11 @@
             <a:r>
               <a:rPr lang="en-US" sz="1900" i="1" dirty="0">
                 <a:solidFill>
-                  <a:srgbClr val="CFE2F8"/>
+                  <a:srgbClr val="C6D8E4"/>
                 </a:solidFill>
-                <a:latin typeface="Georgia" pitchFamily="34" charset="0"/>
-                <a:ea typeface="Georgia" pitchFamily="34" charset="-122"/>
-                <a:cs typeface="Georgia" pitchFamily="34" charset="-120"/>
+                <a:latin typeface="Trebuchet MS" pitchFamily="34" charset="0"/>
+                <a:ea typeface="Trebuchet MS" pitchFamily="34" charset="-122"/>
+                <a:cs typeface="Trebuchet MS" pitchFamily="34" charset="-120"/>
               </a:rPr>
               <a:t>Complaint triage for a mid-size financial services firm</a:t>
             </a:r>
@@ -2845,7 +2770,7 @@
             <a:r>
               <a:rPr lang="en-US" sz="1100" dirty="0">
                 <a:solidFill>
-                  <a:srgbClr val="6E7895"/>
+                  <a:srgbClr val="6B7C88"/>
                 </a:solidFill>
                 <a:latin typeface="Calibri" pitchFamily="34" charset="0"/>
                 <a:ea typeface="Calibri" pitchFamily="34" charset="-122"/>
@@ -2884,7 +2809,7 @@
             <a:r>
               <a:rPr lang="en-US" sz="900" dirty="0">
                 <a:solidFill>
-                  <a:srgbClr val="6E7895"/>
+                  <a:srgbClr val="6B7C88"/>
                 </a:solidFill>
                 <a:latin typeface="Calibri" pitchFamily="34" charset="0"/>
                 <a:ea typeface="Calibri" pitchFamily="34" charset="-122"/>
@@ -2898,7 +2823,7 @@
             <a:r>
               <a:rPr lang="en-US" sz="900" dirty="0">
                 <a:solidFill>
-                  <a:srgbClr val="6E7895"/>
+                  <a:srgbClr val="6B7C88"/>
                 </a:solidFill>
                 <a:latin typeface="Calibri" pitchFamily="34" charset="0"/>
                 <a:ea typeface="Calibri" pitchFamily="34" charset="-122"/>
@@ -2909,6 +2834,66 @@
             <a:endParaRPr lang="en-US" sz="900" dirty="0"/>
           </a:p>
         </p:txBody>
+      </p:sp>
+      <p:sp>
+        <p:nvSpPr>
+          <p:cNvPr id="10" name="Shape 8"/>
+          <p:cNvSpPr/>
+          <p:nvPr/>
+        </p:nvSpPr>
+        <p:spPr>
+          <a:xfrm>
+            <a:off x="9217152" y="-1645920"/>
+            <a:ext cx="3200400" cy="3246120"/>
+          </a:xfrm>
+          <a:prstGeom prst="rect">
+            <a:avLst/>
+          </a:prstGeom>
+          <a:solidFill>
+            <a:srgbClr val="1D2A32"/>
+          </a:solidFill>
+          <a:ln/>
+        </p:spPr>
+      </p:sp>
+      <p:sp>
+        <p:nvSpPr>
+          <p:cNvPr id="11" name="Shape 9"/>
+          <p:cNvSpPr/>
+          <p:nvPr/>
+        </p:nvSpPr>
+        <p:spPr>
+          <a:xfrm>
+            <a:off x="0" y="0"/>
+            <a:ext cx="146304" cy="6858000"/>
+          </a:xfrm>
+          <a:prstGeom prst="rect">
+            <a:avLst/>
+          </a:prstGeom>
+          <a:solidFill>
+            <a:srgbClr val="2A78D6"/>
+          </a:solidFill>
+          <a:ln/>
+        </p:spPr>
+      </p:sp>
+      <p:sp>
+        <p:nvSpPr>
+          <p:cNvPr id="12" name="Shape 10"/>
+          <p:cNvSpPr/>
+          <p:nvPr/>
+        </p:nvSpPr>
+        <p:spPr>
+          <a:xfrm>
+            <a:off x="0" y="0"/>
+            <a:ext cx="146304" cy="2880360"/>
+          </a:xfrm>
+          <a:prstGeom prst="rect">
+            <a:avLst/>
+          </a:prstGeom>
+          <a:solidFill>
+            <a:srgbClr val="8FBFF0"/>
+          </a:solidFill>
+          <a:ln/>
+        </p:spPr>
       </p:sp>
     </p:spTree>
   </p:cSld>
@@ -2969,7 +2954,7 @@
             <a:r>
               <a:rPr lang="en-US" sz="1050" b="1" spc="200" kern="0" dirty="0">
                 <a:solidFill>
-                  <a:srgbClr val="6E7895"/>
+                  <a:srgbClr val="6B7C88"/>
                 </a:solidFill>
                 <a:latin typeface="Calibri" pitchFamily="34" charset="0"/>
                 <a:ea typeface="Calibri" pitchFamily="34" charset="-122"/>
@@ -2996,7 +2981,7 @@
             <a:avLst/>
           </a:prstGeom>
           <a:solidFill>
-            <a:srgbClr val="0F1B2D"/>
+            <a:srgbClr val="24343F"/>
           </a:solidFill>
           <a:ln/>
         </p:spPr>
@@ -3052,11 +3037,11 @@
             <a:r>
               <a:rPr lang="en-US" sz="3000" b="1" dirty="0">
                 <a:solidFill>
-                  <a:srgbClr val="0F1B2D"/>
+                  <a:srgbClr val="24343F"/>
                 </a:solidFill>
-                <a:latin typeface="Georgia" pitchFamily="34" charset="0"/>
-                <a:ea typeface="Georgia" pitchFamily="34" charset="-122"/>
-                <a:cs typeface="Georgia" pitchFamily="34" charset="-120"/>
+                <a:latin typeface="Trebuchet MS" pitchFamily="34" charset="0"/>
+                <a:ea typeface="Trebuchet MS" pitchFamily="34" charset="-122"/>
+                <a:cs typeface="Trebuchet MS" pitchFamily="34" charset="-120"/>
               </a:rPr>
               <a:t>What I would do next, and what it costs</a:t>
             </a:r>
@@ -3079,7 +3064,7 @@
             <a:avLst/>
           </a:prstGeom>
           <a:solidFill>
-            <a:srgbClr val="EDF4FE"/>
+            <a:srgbClr val="EFF5F9"/>
           </a:solidFill>
           <a:ln/>
         </p:spPr>
@@ -3145,7 +3130,7 @@
             <a:r>
               <a:rPr lang="en-US" sz="1300" dirty="0">
                 <a:solidFill>
-                  <a:srgbClr val="1C2440"/>
+                  <a:srgbClr val="1B2730"/>
                 </a:solidFill>
                 <a:latin typeface="Calibri" pitchFamily="34" charset="0"/>
                 <a:ea typeface="Calibri" pitchFamily="34" charset="-122"/>
@@ -3174,7 +3159,7 @@
           <a:noFill/>
           <a:ln w="12700">
             <a:solidFill>
-              <a:srgbClr val="DCE2F0"/>
+              <a:srgbClr val="D9E3EA"/>
             </a:solidFill>
             <a:prstDash val="solid"/>
           </a:ln>
@@ -3235,7 +3220,7 @@
             <a:r>
               <a:rPr lang="en-US" sz="850" dirty="0">
                 <a:solidFill>
-                  <a:srgbClr val="6E7895"/>
+                  <a:srgbClr val="6B7C88"/>
                 </a:solidFill>
                 <a:latin typeface="Calibri" pitchFamily="34" charset="0"/>
                 <a:ea typeface="Calibri" pitchFamily="34" charset="-122"/>
@@ -3264,7 +3249,7 @@
           <a:noFill/>
           <a:ln w="25400">
             <a:solidFill>
-              <a:srgbClr val="CFE2F8"/>
+              <a:srgbClr val="C6D8E4"/>
             </a:solidFill>
             <a:prstDash val="solid"/>
           </a:ln>
@@ -3322,11 +3307,11 @@
             <a:r>
               <a:rPr lang="en-US" sz="2200" b="1" dirty="0">
                 <a:solidFill>
-                  <a:srgbClr val="141B33"/>
+                  <a:srgbClr val="1D2A32"/>
                 </a:solidFill>
-                <a:latin typeface="Georgia" pitchFamily="34" charset="0"/>
-                <a:ea typeface="Georgia" pitchFamily="34" charset="-122"/>
-                <a:cs typeface="Georgia" pitchFamily="34" charset="-120"/>
+                <a:latin typeface="Trebuchet MS" pitchFamily="34" charset="0"/>
+                <a:ea typeface="Trebuchet MS" pitchFamily="34" charset="-122"/>
+                <a:cs typeface="Trebuchet MS" pitchFamily="34" charset="-120"/>
               </a:rPr>
               <a:t>0</a:t>
             </a:r>
@@ -3353,7 +3338,7 @@
           </a:solidFill>
           <a:ln w="12700">
             <a:solidFill>
-              <a:srgbClr val="DCE2F0"/>
+              <a:srgbClr val="D9E3EA"/>
             </a:solidFill>
             <a:prstDash val="solid"/>
           </a:ln>
@@ -3393,11 +3378,11 @@
             <a:r>
               <a:rPr lang="en-US" sz="1250" b="1" dirty="0">
                 <a:solidFill>
-                  <a:srgbClr val="0F1B2D"/>
+                  <a:srgbClr val="24343F"/>
                 </a:solidFill>
-                <a:latin typeface="Georgia" pitchFamily="34" charset="0"/>
-                <a:ea typeface="Georgia" pitchFamily="34" charset="-122"/>
-                <a:cs typeface="Georgia" pitchFamily="34" charset="-120"/>
+                <a:latin typeface="Trebuchet MS" pitchFamily="34" charset="0"/>
+                <a:ea typeface="Trebuchet MS" pitchFamily="34" charset="-122"/>
+                <a:cs typeface="Trebuchet MS" pitchFamily="34" charset="-120"/>
               </a:rPr>
               <a:t>Discovery + labelling — €5,600</a:t>
             </a:r>
@@ -3432,7 +3417,7 @@
             <a:r>
               <a:rPr lang="en-US" sz="980" dirty="0">
                 <a:solidFill>
-                  <a:srgbClr val="1C2440"/>
+                  <a:srgbClr val="1B2730"/>
                 </a:solidFill>
                 <a:latin typeface="Calibri" pitchFamily="34" charset="0"/>
                 <a:ea typeface="Calibri" pitchFamily="34" charset="-122"/>
@@ -3459,7 +3444,7 @@
             <a:avLst/>
           </a:prstGeom>
           <a:solidFill>
-            <a:srgbClr val="0F1B2D"/>
+            <a:srgbClr val="24343F"/>
           </a:solidFill>
           <a:ln w="31750">
             <a:solidFill>
@@ -3498,9 +3483,9 @@
                 <a:solidFill>
                   <a:srgbClr val="FFFFFF"/>
                 </a:solidFill>
-                <a:latin typeface="Georgia" pitchFamily="34" charset="0"/>
-                <a:ea typeface="Georgia" pitchFamily="34" charset="-122"/>
-                <a:cs typeface="Georgia" pitchFamily="34" charset="-120"/>
+                <a:latin typeface="Trebuchet MS" pitchFamily="34" charset="0"/>
+                <a:ea typeface="Trebuchet MS" pitchFamily="34" charset="-122"/>
+                <a:cs typeface="Trebuchet MS" pitchFamily="34" charset="-120"/>
               </a:rPr>
               <a:t>1</a:t>
             </a:r>
@@ -3527,7 +3512,7 @@
           </a:solidFill>
           <a:ln w="12700">
             <a:solidFill>
-              <a:srgbClr val="DCE2F0"/>
+              <a:srgbClr val="D9E3EA"/>
             </a:solidFill>
             <a:prstDash val="solid"/>
           </a:ln>
@@ -3567,11 +3552,11 @@
             <a:r>
               <a:rPr lang="en-US" sz="1250" b="1" dirty="0">
                 <a:solidFill>
-                  <a:srgbClr val="0F1B2D"/>
+                  <a:srgbClr val="24343F"/>
                 </a:solidFill>
-                <a:latin typeface="Georgia" pitchFamily="34" charset="0"/>
-                <a:ea typeface="Georgia" pitchFamily="34" charset="-122"/>
-                <a:cs typeface="Georgia" pitchFamily="34" charset="-120"/>
+                <a:latin typeface="Trebuchet MS" pitchFamily="34" charset="0"/>
+                <a:ea typeface="Trebuchet MS" pitchFamily="34" charset="-122"/>
+                <a:cs typeface="Trebuchet MS" pitchFamily="34" charset="-120"/>
               </a:rPr>
               <a:t>Pilot, 60-day shadow run — €8,400</a:t>
             </a:r>
@@ -3606,7 +3591,7 @@
             <a:r>
               <a:rPr lang="en-US" sz="980" dirty="0">
                 <a:solidFill>
-                  <a:srgbClr val="1C2440"/>
+                  <a:srgbClr val="1B2730"/>
                 </a:solidFill>
                 <a:latin typeface="Calibri" pitchFamily="34" charset="0"/>
                 <a:ea typeface="Calibri" pitchFamily="34" charset="-122"/>
@@ -3633,7 +3618,7 @@
             <a:avLst/>
           </a:prstGeom>
           <a:solidFill>
-            <a:srgbClr val="0F1B2D"/>
+            <a:srgbClr val="24343F"/>
           </a:solidFill>
           <a:ln w="31750">
             <a:solidFill>
@@ -3672,9 +3657,9 @@
                 <a:solidFill>
                   <a:srgbClr val="FFFFFF"/>
                 </a:solidFill>
-                <a:latin typeface="Georgia" pitchFamily="34" charset="0"/>
-                <a:ea typeface="Georgia" pitchFamily="34" charset="-122"/>
-                <a:cs typeface="Georgia" pitchFamily="34" charset="-120"/>
+                <a:latin typeface="Trebuchet MS" pitchFamily="34" charset="0"/>
+                <a:ea typeface="Trebuchet MS" pitchFamily="34" charset="-122"/>
+                <a:cs typeface="Trebuchet MS" pitchFamily="34" charset="-120"/>
               </a:rPr>
               <a:t>2</a:t>
             </a:r>
@@ -3701,7 +3686,7 @@
           </a:solidFill>
           <a:ln w="12700">
             <a:solidFill>
-              <a:srgbClr val="DCE2F0"/>
+              <a:srgbClr val="D9E3EA"/>
             </a:solidFill>
             <a:prstDash val="solid"/>
           </a:ln>
@@ -3741,11 +3726,11 @@
             <a:r>
               <a:rPr lang="en-US" sz="1250" b="1" dirty="0">
                 <a:solidFill>
-                  <a:srgbClr val="0F1B2D"/>
+                  <a:srgbClr val="24343F"/>
                 </a:solidFill>
-                <a:latin typeface="Georgia" pitchFamily="34" charset="0"/>
-                <a:ea typeface="Georgia" pitchFamily="34" charset="-122"/>
-                <a:cs typeface="Georgia" pitchFamily="34" charset="-120"/>
+                <a:latin typeface="Trebuchet MS" pitchFamily="34" charset="0"/>
+                <a:ea typeface="Trebuchet MS" pitchFamily="34" charset="-122"/>
+                <a:cs typeface="Trebuchet MS" pitchFamily="34" charset="-120"/>
               </a:rPr>
               <a:t>Deployment, only if it passes — €10,500</a:t>
             </a:r>
@@ -3780,7 +3765,7 @@
             <a:r>
               <a:rPr lang="en-US" sz="980" dirty="0">
                 <a:solidFill>
-                  <a:srgbClr val="1C2440"/>
+                  <a:srgbClr val="1B2730"/>
                 </a:solidFill>
                 <a:latin typeface="Calibri" pitchFamily="34" charset="0"/>
                 <a:ea typeface="Calibri" pitchFamily="34" charset="-122"/>
@@ -3807,7 +3792,7 @@
             <a:avLst/>
           </a:prstGeom>
           <a:solidFill>
-            <a:srgbClr val="EDF4FE"/>
+            <a:srgbClr val="EFF5F9"/>
           </a:solidFill>
           <a:ln/>
         </p:spPr>
@@ -3899,7 +3884,7 @@
     <p:bg>
       <p:bgPr>
         <a:solidFill>
-          <a:srgbClr val="141B33"/>
+          <a:srgbClr val="1D2A32"/>
         </a:solidFill>
       </p:bgPr>
     </p:bg>
@@ -3971,7 +3956,7 @@
             <a:avLst/>
           </a:prstGeom>
           <a:solidFill>
-            <a:srgbClr val="0F1B2D"/>
+            <a:srgbClr val="24343F"/>
           </a:solidFill>
           <a:ln/>
         </p:spPr>
@@ -4029,9 +4014,9 @@
                 <a:solidFill>
                   <a:srgbClr val="FFFFFF"/>
                 </a:solidFill>
-                <a:latin typeface="Georgia" pitchFamily="34" charset="0"/>
-                <a:ea typeface="Georgia" pitchFamily="34" charset="-122"/>
-                <a:cs typeface="Georgia" pitchFamily="34" charset="-120"/>
+                <a:latin typeface="Trebuchet MS" pitchFamily="34" charset="0"/>
+                <a:ea typeface="Trebuchet MS" pitchFamily="34" charset="-122"/>
+                <a:cs typeface="Trebuchet MS" pitchFamily="34" charset="-120"/>
               </a:rPr>
               <a:t>Stepping out of the pitch — what I want your feedback on</a:t>
             </a:r>
@@ -4142,7 +4127,7 @@
             <a:r>
               <a:rPr lang="en-US" sz="1300" b="1" dirty="0">
                 <a:solidFill>
-                  <a:srgbClr val="A8CBF2"/>
+                  <a:srgbClr val="8FBFF0"/>
                 </a:solidFill>
               </a:rPr>
               <a:t>The one thing I most want challenged:  </a:t>
@@ -4221,7 +4206,7 @@
             <a:r>
               <a:rPr lang="en-US" sz="1050" b="1" spc="200" kern="0" dirty="0">
                 <a:solidFill>
-                  <a:srgbClr val="6E7895"/>
+                  <a:srgbClr val="6B7C88"/>
                 </a:solidFill>
                 <a:latin typeface="Calibri" pitchFamily="34" charset="0"/>
                 <a:ea typeface="Calibri" pitchFamily="34" charset="-122"/>
@@ -4248,7 +4233,7 @@
             <a:avLst/>
           </a:prstGeom>
           <a:solidFill>
-            <a:srgbClr val="0F1B2D"/>
+            <a:srgbClr val="24343F"/>
           </a:solidFill>
           <a:ln/>
         </p:spPr>
@@ -4304,11 +4289,11 @@
             <a:r>
               <a:rPr lang="en-US" sz="3000" b="1" dirty="0">
                 <a:solidFill>
-                  <a:srgbClr val="0F1B2D"/>
+                  <a:srgbClr val="24343F"/>
                 </a:solidFill>
-                <a:latin typeface="Georgia" pitchFamily="34" charset="0"/>
-                <a:ea typeface="Georgia" pitchFamily="34" charset="-122"/>
-                <a:cs typeface="Georgia" pitchFamily="34" charset="-120"/>
+                <a:latin typeface="Trebuchet MS" pitchFamily="34" charset="0"/>
+                <a:ea typeface="Trebuchet MS" pitchFamily="34" charset="-122"/>
+                <a:cs typeface="Trebuchet MS" pitchFamily="34" charset="-120"/>
               </a:rPr>
               <a:t>Backup — three corrections made before any analysis</a:t>
             </a:r>
@@ -4331,7 +4316,7 @@
             <a:avLst/>
           </a:prstGeom>
           <a:solidFill>
-            <a:srgbClr val="EDF4FE"/>
+            <a:srgbClr val="EFF5F9"/>
           </a:solidFill>
           <a:ln/>
         </p:spPr>
@@ -4397,13 +4382,13 @@
             <a:r>
               <a:rPr lang="en-US" sz="1300" dirty="0">
                 <a:solidFill>
-                  <a:srgbClr val="1C2440"/>
+                  <a:srgbClr val="1B2730"/>
                 </a:solidFill>
                 <a:latin typeface="Calibri" pitchFamily="34" charset="0"/>
                 <a:ea typeface="Calibri" pitchFamily="34" charset="-122"/>
                 <a:cs typeface="Calibri" pitchFamily="34" charset="-120"/>
               </a:rPr>
-              <a:t>Both would have produced a confident wrong answer.</a:t>
+              <a:t>Each one would have produced a confident wrong answer.</a:t>
             </a:r>
             <a:endParaRPr lang="en-US" sz="1050" dirty="0"/>
           </a:p>
@@ -4426,7 +4411,7 @@
           <a:noFill/>
           <a:ln w="12700">
             <a:solidFill>
-              <a:srgbClr val="DCE2F0"/>
+              <a:srgbClr val="D9E3EA"/>
             </a:solidFill>
             <a:prstDash val="solid"/>
           </a:ln>
@@ -4487,7 +4472,7 @@
             <a:r>
               <a:rPr lang="en-US" sz="850" dirty="0">
                 <a:solidFill>
-                  <a:srgbClr val="6E7895"/>
+                  <a:srgbClr val="6B7C88"/>
                 </a:solidFill>
                 <a:latin typeface="Calibri" pitchFamily="34" charset="0"/>
                 <a:ea typeface="Calibri" pitchFamily="34" charset="-122"/>
@@ -4548,7 +4533,7 @@
                   <a:tcPr marL="101600" marR="101600" marT="25400" marB="25400" anchor="ctr">
                     <a:lnL w="12700" cap="flat" cmpd="sng" algn="ctr">
                       <a:solidFill>
-                        <a:srgbClr val="DCE2F0"/>
+                        <a:srgbClr val="D9E3EA"/>
                       </a:solidFill>
                       <a:prstDash val="solid"/>
                       <a:round/>
@@ -4557,7 +4542,7 @@
                     </a:lnL>
                     <a:lnR w="12700" cap="flat" cmpd="sng" algn="ctr">
                       <a:solidFill>
-                        <a:srgbClr val="DCE2F0"/>
+                        <a:srgbClr val="D9E3EA"/>
                       </a:solidFill>
                       <a:prstDash val="solid"/>
                       <a:round/>
@@ -4566,7 +4551,7 @@
                     </a:lnR>
                     <a:lnT w="12700" cap="flat" cmpd="sng" algn="ctr">
                       <a:solidFill>
-                        <a:srgbClr val="DCE2F0"/>
+                        <a:srgbClr val="D9E3EA"/>
                       </a:solidFill>
                       <a:prstDash val="solid"/>
                       <a:round/>
@@ -4575,7 +4560,7 @@
                     </a:lnT>
                     <a:lnB w="12700" cap="flat" cmpd="sng" algn="ctr">
                       <a:solidFill>
-                        <a:srgbClr val="DCE2F0"/>
+                        <a:srgbClr val="D9E3EA"/>
                       </a:solidFill>
                       <a:prstDash val="solid"/>
                       <a:round/>
@@ -4583,7 +4568,7 @@
                       <a:tailEnd type="none" w="med" len="med"/>
                     </a:lnB>
                     <a:solidFill>
-                      <a:srgbClr val="24405E"/>
+                      <a:srgbClr val="445A69"/>
                     </a:solidFill>
                   </a:tcPr>
                 </a:tc>
@@ -4598,7 +4583,7 @@
                       <a:r>
                         <a:rPr lang="en-US" sz="1100" b="1" spc="100" kern="0" dirty="0">
                           <a:solidFill>
-                            <a:srgbClr val="141B33"/>
+                            <a:srgbClr val="1D2A32"/>
                           </a:solidFill>
                         </a:rPr>
                         <a:t>WHAT WAS ACTUALLY HAPPENING</a:t>
@@ -4609,7 +4594,7 @@
                   <a:tcPr marL="101600" marR="101600" marT="25400" marB="25400" anchor="ctr">
                     <a:lnL w="12700" cap="flat" cmpd="sng" algn="ctr">
                       <a:solidFill>
-                        <a:srgbClr val="DCE2F0"/>
+                        <a:srgbClr val="D9E3EA"/>
                       </a:solidFill>
                       <a:prstDash val="solid"/>
                       <a:round/>
@@ -4618,7 +4603,7 @@
                     </a:lnL>
                     <a:lnR w="12700" cap="flat" cmpd="sng" algn="ctr">
                       <a:solidFill>
-                        <a:srgbClr val="DCE2F0"/>
+                        <a:srgbClr val="D9E3EA"/>
                       </a:solidFill>
                       <a:prstDash val="solid"/>
                       <a:round/>
@@ -4627,7 +4612,7 @@
                     </a:lnR>
                     <a:lnT w="12700" cap="flat" cmpd="sng" algn="ctr">
                       <a:solidFill>
-                        <a:srgbClr val="DCE2F0"/>
+                        <a:srgbClr val="D9E3EA"/>
                       </a:solidFill>
                       <a:prstDash val="solid"/>
                       <a:round/>
@@ -4636,7 +4621,7 @@
                     </a:lnT>
                     <a:lnB w="12700" cap="flat" cmpd="sng" algn="ctr">
                       <a:solidFill>
-                        <a:srgbClr val="DCE2F0"/>
+                        <a:srgbClr val="D9E3EA"/>
                       </a:solidFill>
                       <a:prstDash val="solid"/>
                       <a:round/>
@@ -4661,7 +4646,7 @@
                       <a:r>
                         <a:rPr lang="en-US" sz="1050" b="1" dirty="0">
                           <a:solidFill>
-                            <a:srgbClr val="0F1B2D"/>
+                            <a:srgbClr val="24343F"/>
                           </a:solidFill>
                         </a:rPr>
                         <a:t>Complaints fell 73% in July</a:t>
@@ -4672,7 +4657,7 @@
                   <a:tcPr marL="101600" marR="101600" marT="25400" marB="25400" anchor="ctr">
                     <a:lnL w="12700" cap="flat" cmpd="sng" algn="ctr">
                       <a:solidFill>
-                        <a:srgbClr val="DCE2F0"/>
+                        <a:srgbClr val="D9E3EA"/>
                       </a:solidFill>
                       <a:prstDash val="solid"/>
                       <a:round/>
@@ -4681,7 +4666,7 @@
                     </a:lnL>
                     <a:lnR w="12700" cap="flat" cmpd="sng" algn="ctr">
                       <a:solidFill>
-                        <a:srgbClr val="DCE2F0"/>
+                        <a:srgbClr val="D9E3EA"/>
                       </a:solidFill>
                       <a:prstDash val="solid"/>
                       <a:round/>
@@ -4690,7 +4675,7 @@
                     </a:lnR>
                     <a:lnT w="12700" cap="flat" cmpd="sng" algn="ctr">
                       <a:solidFill>
-                        <a:srgbClr val="DCE2F0"/>
+                        <a:srgbClr val="D9E3EA"/>
                       </a:solidFill>
                       <a:prstDash val="solid"/>
                       <a:round/>
@@ -4699,7 +4684,7 @@
                     </a:lnT>
                     <a:lnB w="12700" cap="flat" cmpd="sng" algn="ctr">
                       <a:solidFill>
-                        <a:srgbClr val="DCE2F0"/>
+                        <a:srgbClr val="D9E3EA"/>
                       </a:solidFill>
                       <a:prstDash val="solid"/>
                       <a:round/>
@@ -4722,7 +4707,7 @@
                       <a:r>
                         <a:rPr lang="en-US" sz="1050" dirty="0">
                           <a:solidFill>
-                            <a:srgbClr val="1C2440"/>
+                            <a:srgbClr val="1B2730"/>
                           </a:solidFill>
                         </a:rPr>
                         <a:t>Publication lag — the CFPB only publishes once a firm responds. Window cut at 2026-06-27</a:t>
@@ -4733,7 +4718,7 @@
                   <a:tcPr marL="101600" marR="101600" marT="25400" marB="25400" anchor="ctr">
                     <a:lnL w="12700" cap="flat" cmpd="sng" algn="ctr">
                       <a:solidFill>
-                        <a:srgbClr val="DCE2F0"/>
+                        <a:srgbClr val="D9E3EA"/>
                       </a:solidFill>
                       <a:prstDash val="solid"/>
                       <a:round/>
@@ -4742,7 +4727,7 @@
                     </a:lnL>
                     <a:lnR w="12700" cap="flat" cmpd="sng" algn="ctr">
                       <a:solidFill>
-                        <a:srgbClr val="DCE2F0"/>
+                        <a:srgbClr val="D9E3EA"/>
                       </a:solidFill>
                       <a:prstDash val="solid"/>
                       <a:round/>
@@ -4751,7 +4736,7 @@
                     </a:lnR>
                     <a:lnT w="12700" cap="flat" cmpd="sng" algn="ctr">
                       <a:solidFill>
-                        <a:srgbClr val="DCE2F0"/>
+                        <a:srgbClr val="D9E3EA"/>
                       </a:solidFill>
                       <a:prstDash val="solid"/>
                       <a:round/>
@@ -4760,7 +4745,7 @@
                     </a:lnT>
                     <a:lnB w="12700" cap="flat" cmpd="sng" algn="ctr">
                       <a:solidFill>
-                        <a:srgbClr val="DCE2F0"/>
+                        <a:srgbClr val="D9E3EA"/>
                       </a:solidFill>
                       <a:prstDash val="solid"/>
                       <a:round/>
@@ -4785,7 +4770,7 @@
                       <a:r>
                         <a:rPr lang="en-US" sz="1050" b="1" dirty="0">
                           <a:solidFill>
-                            <a:srgbClr val="0F1B2D"/>
+                            <a:srgbClr val="24343F"/>
                           </a:solidFill>
                         </a:rPr>
                         <a:t>Handling time is 0 days</a:t>
@@ -4796,7 +4781,7 @@
                   <a:tcPr marL="101600" marR="101600" marT="25400" marB="25400" anchor="ctr">
                     <a:lnL w="12700" cap="flat" cmpd="sng" algn="ctr">
                       <a:solidFill>
-                        <a:srgbClr val="DCE2F0"/>
+                        <a:srgbClr val="D9E3EA"/>
                       </a:solidFill>
                       <a:prstDash val="solid"/>
                       <a:round/>
@@ -4805,7 +4790,7 @@
                     </a:lnL>
                     <a:lnR w="12700" cap="flat" cmpd="sng" algn="ctr">
                       <a:solidFill>
-                        <a:srgbClr val="DCE2F0"/>
+                        <a:srgbClr val="D9E3EA"/>
                       </a:solidFill>
                       <a:prstDash val="solid"/>
                       <a:round/>
@@ -4814,7 +4799,7 @@
                     </a:lnR>
                     <a:lnT w="12700" cap="flat" cmpd="sng" algn="ctr">
                       <a:solidFill>
-                        <a:srgbClr val="DCE2F0"/>
+                        <a:srgbClr val="D9E3EA"/>
                       </a:solidFill>
                       <a:prstDash val="solid"/>
                       <a:round/>
@@ -4823,7 +4808,7 @@
                     </a:lnT>
                     <a:lnB w="12700" cap="flat" cmpd="sng" algn="ctr">
                       <a:solidFill>
-                        <a:srgbClr val="DCE2F0"/>
+                        <a:srgbClr val="D9E3EA"/>
                       </a:solidFill>
                       <a:prstDash val="solid"/>
                       <a:round/>
@@ -4831,7 +4816,7 @@
                       <a:tailEnd type="none" w="med" len="med"/>
                     </a:lnB>
                     <a:solidFill>
-                      <a:srgbClr val="EDF4FE"/>
+                      <a:srgbClr val="EFF5F9"/>
                     </a:solidFill>
                   </a:tcPr>
                 </a:tc>
@@ -4846,7 +4831,7 @@
                       <a:r>
                         <a:rPr lang="en-US" sz="1050" dirty="0">
                           <a:solidFill>
-                            <a:srgbClr val="1C2440"/>
+                            <a:srgbClr val="1B2730"/>
                           </a:solidFill>
                         </a:rPr>
                         <a:t>It measures the regulator's routing, not any firm's speed. Metric dropped</a:t>
@@ -4857,7 +4842,7 @@
                   <a:tcPr marL="101600" marR="101600" marT="25400" marB="25400" anchor="ctr">
                     <a:lnL w="12700" cap="flat" cmpd="sng" algn="ctr">
                       <a:solidFill>
-                        <a:srgbClr val="DCE2F0"/>
+                        <a:srgbClr val="D9E3EA"/>
                       </a:solidFill>
                       <a:prstDash val="solid"/>
                       <a:round/>
@@ -4866,7 +4851,7 @@
                     </a:lnL>
                     <a:lnR w="12700" cap="flat" cmpd="sng" algn="ctr">
                       <a:solidFill>
-                        <a:srgbClr val="DCE2F0"/>
+                        <a:srgbClr val="D9E3EA"/>
                       </a:solidFill>
                       <a:prstDash val="solid"/>
                       <a:round/>
@@ -4875,7 +4860,7 @@
                     </a:lnR>
                     <a:lnT w="12700" cap="flat" cmpd="sng" algn="ctr">
                       <a:solidFill>
-                        <a:srgbClr val="DCE2F0"/>
+                        <a:srgbClr val="D9E3EA"/>
                       </a:solidFill>
                       <a:prstDash val="solid"/>
                       <a:round/>
@@ -4884,7 +4869,7 @@
                     </a:lnT>
                     <a:lnB w="12700" cap="flat" cmpd="sng" algn="ctr">
                       <a:solidFill>
-                        <a:srgbClr val="DCE2F0"/>
+                        <a:srgbClr val="D9E3EA"/>
                       </a:solidFill>
                       <a:prstDash val="solid"/>
                       <a:round/>
@@ -4892,7 +4877,7 @@
                       <a:tailEnd type="none" w="med" len="med"/>
                     </a:lnB>
                     <a:solidFill>
-                      <a:srgbClr val="EDF4FE"/>
+                      <a:srgbClr val="EFF5F9"/>
                     </a:solidFill>
                   </a:tcPr>
                 </a:tc>
@@ -4909,7 +4894,7 @@
                       <a:r>
                         <a:rPr lang="en-US" sz="1050" b="1" dirty="0">
                           <a:solidFill>
-                            <a:srgbClr val="0F1B2D"/>
+                            <a:srgbClr val="24343F"/>
                           </a:solidFill>
                         </a:rPr>
                         <a:t>Timeliness 98.0% vs 0.6% untimely</a:t>
@@ -4920,7 +4905,7 @@
                   <a:tcPr marL="101600" marR="101600" marT="25400" marB="25400" anchor="ctr">
                     <a:lnL w="12700" cap="flat" cmpd="sng" algn="ctr">
                       <a:solidFill>
-                        <a:srgbClr val="DCE2F0"/>
+                        <a:srgbClr val="D9E3EA"/>
                       </a:solidFill>
                       <a:prstDash val="solid"/>
                       <a:round/>
@@ -4929,7 +4914,7 @@
                     </a:lnL>
                     <a:lnR w="12700" cap="flat" cmpd="sng" algn="ctr">
                       <a:solidFill>
-                        <a:srgbClr val="DCE2F0"/>
+                        <a:srgbClr val="D9E3EA"/>
                       </a:solidFill>
                       <a:prstDash val="solid"/>
                       <a:round/>
@@ -4938,7 +4923,7 @@
                     </a:lnR>
                     <a:lnT w="12700" cap="flat" cmpd="sng" algn="ctr">
                       <a:solidFill>
-                        <a:srgbClr val="DCE2F0"/>
+                        <a:srgbClr val="D9E3EA"/>
                       </a:solidFill>
                       <a:prstDash val="solid"/>
                       <a:round/>
@@ -4947,7 +4932,7 @@
                     </a:lnT>
                     <a:lnB w="12700" cap="flat" cmpd="sng" algn="ctr">
                       <a:solidFill>
-                        <a:srgbClr val="DCE2F0"/>
+                        <a:srgbClr val="D9E3EA"/>
                       </a:solidFill>
                       <a:prstDash val="solid"/>
                       <a:round/>
@@ -4970,7 +4955,7 @@
                       <a:r>
                         <a:rPr lang="en-US" sz="1050" dirty="0">
                           <a:solidFill>
-                            <a:srgbClr val="1C2440"/>
+                            <a:srgbClr val="1B2730"/>
                           </a:solidFill>
                         </a:rPr>
                         <a:t>Two different fields. Relabelled so a CEO is not shown a contradiction</a:t>
@@ -4981,7 +4966,7 @@
                   <a:tcPr marL="101600" marR="101600" marT="25400" marB="25400" anchor="ctr">
                     <a:lnL w="12700" cap="flat" cmpd="sng" algn="ctr">
                       <a:solidFill>
-                        <a:srgbClr val="DCE2F0"/>
+                        <a:srgbClr val="D9E3EA"/>
                       </a:solidFill>
                       <a:prstDash val="solid"/>
                       <a:round/>
@@ -4990,7 +4975,7 @@
                     </a:lnL>
                     <a:lnR w="12700" cap="flat" cmpd="sng" algn="ctr">
                       <a:solidFill>
-                        <a:srgbClr val="DCE2F0"/>
+                        <a:srgbClr val="D9E3EA"/>
                       </a:solidFill>
                       <a:prstDash val="solid"/>
                       <a:round/>
@@ -4999,7 +4984,7 @@
                     </a:lnR>
                     <a:lnT w="12700" cap="flat" cmpd="sng" algn="ctr">
                       <a:solidFill>
-                        <a:srgbClr val="DCE2F0"/>
+                        <a:srgbClr val="D9E3EA"/>
                       </a:solidFill>
                       <a:prstDash val="solid"/>
                       <a:round/>
@@ -5008,7 +4993,7 @@
                     </a:lnT>
                     <a:lnB w="12700" cap="flat" cmpd="sng" algn="ctr">
                       <a:solidFill>
-                        <a:srgbClr val="DCE2F0"/>
+                        <a:srgbClr val="D9E3EA"/>
                       </a:solidFill>
                       <a:prstDash val="solid"/>
                       <a:round/>
@@ -5084,7 +5069,7 @@
             <a:r>
               <a:rPr lang="en-US" sz="1050" b="1" spc="200" kern="0" dirty="0">
                 <a:solidFill>
-                  <a:srgbClr val="6E7895"/>
+                  <a:srgbClr val="6B7C88"/>
                 </a:solidFill>
                 <a:latin typeface="Calibri" pitchFamily="34" charset="0"/>
                 <a:ea typeface="Calibri" pitchFamily="34" charset="-122"/>
@@ -5111,7 +5096,7 @@
             <a:avLst/>
           </a:prstGeom>
           <a:solidFill>
-            <a:srgbClr val="0F1B2D"/>
+            <a:srgbClr val="24343F"/>
           </a:solidFill>
           <a:ln/>
         </p:spPr>
@@ -5167,11 +5152,11 @@
             <a:r>
               <a:rPr lang="en-US" sz="3000" b="1" dirty="0">
                 <a:solidFill>
-                  <a:srgbClr val="0F1B2D"/>
+                  <a:srgbClr val="24343F"/>
                 </a:solidFill>
-                <a:latin typeface="Georgia" pitchFamily="34" charset="0"/>
-                <a:ea typeface="Georgia" pitchFamily="34" charset="-122"/>
-                <a:cs typeface="Georgia" pitchFamily="34" charset="-120"/>
+                <a:latin typeface="Trebuchet MS" pitchFamily="34" charset="0"/>
+                <a:ea typeface="Trebuchet MS" pitchFamily="34" charset="-122"/>
+                <a:cs typeface="Trebuchet MS" pitchFamily="34" charset="-120"/>
               </a:rPr>
               <a:t>Backup — the compliance position</a:t>
             </a:r>
@@ -5194,7 +5179,7 @@
             <a:avLst/>
           </a:prstGeom>
           <a:solidFill>
-            <a:srgbClr val="EDF4FE"/>
+            <a:srgbClr val="EFF5F9"/>
           </a:solidFill>
           <a:ln/>
         </p:spPr>
@@ -5260,7 +5245,7 @@
             <a:r>
               <a:rPr lang="en-US" sz="1300" dirty="0">
                 <a:solidFill>
-                  <a:srgbClr val="1C2440"/>
+                  <a:srgbClr val="1B2730"/>
                 </a:solidFill>
                 <a:latin typeface="Calibri" pitchFamily="34" charset="0"/>
                 <a:ea typeface="Calibri" pitchFamily="34" charset="-122"/>
@@ -5289,7 +5274,7 @@
           <a:noFill/>
           <a:ln w="12700">
             <a:solidFill>
-              <a:srgbClr val="DCE2F0"/>
+              <a:srgbClr val="D9E3EA"/>
             </a:solidFill>
             <a:prstDash val="solid"/>
           </a:ln>
@@ -5350,7 +5335,7 @@
             <a:r>
               <a:rPr lang="en-US" sz="850" dirty="0">
                 <a:solidFill>
-                  <a:srgbClr val="6E7895"/>
+                  <a:srgbClr val="6B7C88"/>
                 </a:solidFill>
                 <a:latin typeface="Calibri" pitchFamily="34" charset="0"/>
                 <a:ea typeface="Calibri" pitchFamily="34" charset="-122"/>
@@ -5411,7 +5396,7 @@
                   <a:tcPr marL="76200" marR="76200" marT="38100" marB="38100" anchor="ctr">
                     <a:lnL w="12700" cap="flat" cmpd="sng" algn="ctr">
                       <a:solidFill>
-                        <a:srgbClr val="DCE2F0"/>
+                        <a:srgbClr val="D9E3EA"/>
                       </a:solidFill>
                       <a:prstDash val="solid"/>
                       <a:round/>
@@ -5420,7 +5405,7 @@
                     </a:lnL>
                     <a:lnR w="12700" cap="flat" cmpd="sng" algn="ctr">
                       <a:solidFill>
-                        <a:srgbClr val="DCE2F0"/>
+                        <a:srgbClr val="D9E3EA"/>
                       </a:solidFill>
                       <a:prstDash val="solid"/>
                       <a:round/>
@@ -5429,7 +5414,7 @@
                     </a:lnR>
                     <a:lnT w="12700" cap="flat" cmpd="sng" algn="ctr">
                       <a:solidFill>
-                        <a:srgbClr val="DCE2F0"/>
+                        <a:srgbClr val="D9E3EA"/>
                       </a:solidFill>
                       <a:prstDash val="solid"/>
                       <a:round/>
@@ -5438,7 +5423,7 @@
                     </a:lnT>
                     <a:lnB w="12700" cap="flat" cmpd="sng" algn="ctr">
                       <a:solidFill>
-                        <a:srgbClr val="DCE2F0"/>
+                        <a:srgbClr val="D9E3EA"/>
                       </a:solidFill>
                       <a:prstDash val="solid"/>
                       <a:round/>
@@ -5446,7 +5431,7 @@
                       <a:tailEnd type="none" w="med" len="med"/>
                     </a:lnB>
                     <a:solidFill>
-                      <a:srgbClr val="24405E"/>
+                      <a:srgbClr val="445A69"/>
                     </a:solidFill>
                   </a:tcPr>
                 </a:tc>
@@ -5472,7 +5457,7 @@
                   <a:tcPr marL="76200" marR="76200" marT="38100" marB="38100" anchor="ctr">
                     <a:lnL w="12700" cap="flat" cmpd="sng" algn="ctr">
                       <a:solidFill>
-                        <a:srgbClr val="DCE2F0"/>
+                        <a:srgbClr val="D9E3EA"/>
                       </a:solidFill>
                       <a:prstDash val="solid"/>
                       <a:round/>
@@ -5481,7 +5466,7 @@
                     </a:lnL>
                     <a:lnR w="12700" cap="flat" cmpd="sng" algn="ctr">
                       <a:solidFill>
-                        <a:srgbClr val="DCE2F0"/>
+                        <a:srgbClr val="D9E3EA"/>
                       </a:solidFill>
                       <a:prstDash val="solid"/>
                       <a:round/>
@@ -5490,7 +5475,7 @@
                     </a:lnR>
                     <a:lnT w="12700" cap="flat" cmpd="sng" algn="ctr">
                       <a:solidFill>
-                        <a:srgbClr val="DCE2F0"/>
+                        <a:srgbClr val="D9E3EA"/>
                       </a:solidFill>
                       <a:prstDash val="solid"/>
                       <a:round/>
@@ -5499,7 +5484,7 @@
                     </a:lnT>
                     <a:lnB w="12700" cap="flat" cmpd="sng" algn="ctr">
                       <a:solidFill>
-                        <a:srgbClr val="DCE2F0"/>
+                        <a:srgbClr val="D9E3EA"/>
                       </a:solidFill>
                       <a:prstDash val="solid"/>
                       <a:round/>
@@ -5507,7 +5492,7 @@
                       <a:tailEnd type="none" w="med" len="med"/>
                     </a:lnB>
                     <a:solidFill>
-                      <a:srgbClr val="24405E"/>
+                      <a:srgbClr val="445A69"/>
                     </a:solidFill>
                   </a:tcPr>
                 </a:tc>
@@ -5524,7 +5509,7 @@
                       <a:r>
                         <a:rPr lang="en-US" sz="1050" b="1" dirty="0">
                           <a:solidFill>
-                            <a:srgbClr val="0F1B2D"/>
+                            <a:srgbClr val="24343F"/>
                           </a:solidFill>
                         </a:rPr>
                         <a:t>EU AI Act tier</a:t>
@@ -5535,7 +5520,7 @@
                   <a:tcPr marL="76200" marR="76200" marT="38100" marB="38100" anchor="ctr">
                     <a:lnL w="12700" cap="flat" cmpd="sng" algn="ctr">
                       <a:solidFill>
-                        <a:srgbClr val="DCE2F0"/>
+                        <a:srgbClr val="D9E3EA"/>
                       </a:solidFill>
                       <a:prstDash val="solid"/>
                       <a:round/>
@@ -5544,7 +5529,7 @@
                     </a:lnL>
                     <a:lnR w="12700" cap="flat" cmpd="sng" algn="ctr">
                       <a:solidFill>
-                        <a:srgbClr val="DCE2F0"/>
+                        <a:srgbClr val="D9E3EA"/>
                       </a:solidFill>
                       <a:prstDash val="solid"/>
                       <a:round/>
@@ -5553,7 +5538,7 @@
                     </a:lnR>
                     <a:lnT w="12700" cap="flat" cmpd="sng" algn="ctr">
                       <a:solidFill>
-                        <a:srgbClr val="DCE2F0"/>
+                        <a:srgbClr val="D9E3EA"/>
                       </a:solidFill>
                       <a:prstDash val="solid"/>
                       <a:round/>
@@ -5562,7 +5547,7 @@
                     </a:lnT>
                     <a:lnB w="12700" cap="flat" cmpd="sng" algn="ctr">
                       <a:solidFill>
-                        <a:srgbClr val="DCE2F0"/>
+                        <a:srgbClr val="D9E3EA"/>
                       </a:solidFill>
                       <a:prstDash val="solid"/>
                       <a:round/>
@@ -5585,7 +5570,7 @@
                       <a:r>
                         <a:rPr lang="en-US" sz="1050" dirty="0">
                           <a:solidFill>
-                            <a:srgbClr val="1C2440"/>
+                            <a:srgbClr val="1B2730"/>
                           </a:solidFill>
                         </a:rPr>
                         <a:t>Limited risk — it classifies and routes, a human resolves. Not Annex III creditworthiness</a:t>
@@ -5596,7 +5581,7 @@
                   <a:tcPr marL="76200" marR="76200" marT="38100" marB="38100" anchor="ctr">
                     <a:lnL w="12700" cap="flat" cmpd="sng" algn="ctr">
                       <a:solidFill>
-                        <a:srgbClr val="DCE2F0"/>
+                        <a:srgbClr val="D9E3EA"/>
                       </a:solidFill>
                       <a:prstDash val="solid"/>
                       <a:round/>
@@ -5605,7 +5590,7 @@
                     </a:lnL>
                     <a:lnR w="12700" cap="flat" cmpd="sng" algn="ctr">
                       <a:solidFill>
-                        <a:srgbClr val="DCE2F0"/>
+                        <a:srgbClr val="D9E3EA"/>
                       </a:solidFill>
                       <a:prstDash val="solid"/>
                       <a:round/>
@@ -5614,7 +5599,7 @@
                     </a:lnR>
                     <a:lnT w="12700" cap="flat" cmpd="sng" algn="ctr">
                       <a:solidFill>
-                        <a:srgbClr val="DCE2F0"/>
+                        <a:srgbClr val="D9E3EA"/>
                       </a:solidFill>
                       <a:prstDash val="solid"/>
                       <a:round/>
@@ -5623,7 +5608,7 @@
                     </a:lnT>
                     <a:lnB w="12700" cap="flat" cmpd="sng" algn="ctr">
                       <a:solidFill>
-                        <a:srgbClr val="DCE2F0"/>
+                        <a:srgbClr val="D9E3EA"/>
                       </a:solidFill>
                       <a:prstDash val="solid"/>
                       <a:round/>
@@ -5648,7 +5633,7 @@
                       <a:r>
                         <a:rPr lang="en-US" sz="1050" b="1" dirty="0">
                           <a:solidFill>
-                            <a:srgbClr val="0F1B2D"/>
+                            <a:srgbClr val="24343F"/>
                           </a:solidFill>
                         </a:rPr>
                         <a:t>What keeps it there</a:t>
@@ -5659,7 +5644,7 @@
                   <a:tcPr marL="76200" marR="76200" marT="38100" marB="38100" anchor="ctr">
                     <a:lnL w="12700" cap="flat" cmpd="sng" algn="ctr">
                       <a:solidFill>
-                        <a:srgbClr val="DCE2F0"/>
+                        <a:srgbClr val="D9E3EA"/>
                       </a:solidFill>
                       <a:prstDash val="solid"/>
                       <a:round/>
@@ -5668,7 +5653,7 @@
                     </a:lnL>
                     <a:lnR w="12700" cap="flat" cmpd="sng" algn="ctr">
                       <a:solidFill>
-                        <a:srgbClr val="DCE2F0"/>
+                        <a:srgbClr val="D9E3EA"/>
                       </a:solidFill>
                       <a:prstDash val="solid"/>
                       <a:round/>
@@ -5677,7 +5662,7 @@
                     </a:lnR>
                     <a:lnT w="12700" cap="flat" cmpd="sng" algn="ctr">
                       <a:solidFill>
-                        <a:srgbClr val="DCE2F0"/>
+                        <a:srgbClr val="D9E3EA"/>
                       </a:solidFill>
                       <a:prstDash val="solid"/>
                       <a:round/>
@@ -5686,7 +5671,7 @@
                     </a:lnT>
                     <a:lnB w="12700" cap="flat" cmpd="sng" algn="ctr">
                       <a:solidFill>
-                        <a:srgbClr val="DCE2F0"/>
+                        <a:srgbClr val="D9E3EA"/>
                       </a:solidFill>
                       <a:prstDash val="solid"/>
                       <a:round/>
@@ -5709,7 +5694,7 @@
                       <a:r>
                         <a:rPr lang="en-US" sz="1050" dirty="0">
                           <a:solidFill>
-                            <a:srgbClr val="1C2440"/>
+                            <a:srgbClr val="1B2730"/>
                           </a:solidFill>
                         </a:rPr>
                         <a:t>The human decision boundary. Autonomous routing is a new assessment, not an upgrade</a:t>
@@ -5720,7 +5705,7 @@
                   <a:tcPr marL="76200" marR="76200" marT="38100" marB="38100" anchor="ctr">
                     <a:lnL w="12700" cap="flat" cmpd="sng" algn="ctr">
                       <a:solidFill>
-                        <a:srgbClr val="DCE2F0"/>
+                        <a:srgbClr val="D9E3EA"/>
                       </a:solidFill>
                       <a:prstDash val="solid"/>
                       <a:round/>
@@ -5729,7 +5714,7 @@
                     </a:lnL>
                     <a:lnR w="12700" cap="flat" cmpd="sng" algn="ctr">
                       <a:solidFill>
-                        <a:srgbClr val="DCE2F0"/>
+                        <a:srgbClr val="D9E3EA"/>
                       </a:solidFill>
                       <a:prstDash val="solid"/>
                       <a:round/>
@@ -5738,7 +5723,7 @@
                     </a:lnR>
                     <a:lnT w="12700" cap="flat" cmpd="sng" algn="ctr">
                       <a:solidFill>
-                        <a:srgbClr val="DCE2F0"/>
+                        <a:srgbClr val="D9E3EA"/>
                       </a:solidFill>
                       <a:prstDash val="solid"/>
                       <a:round/>
@@ -5747,7 +5732,7 @@
                     </a:lnT>
                     <a:lnB w="12700" cap="flat" cmpd="sng" algn="ctr">
                       <a:solidFill>
-                        <a:srgbClr val="DCE2F0"/>
+                        <a:srgbClr val="D9E3EA"/>
                       </a:solidFill>
                       <a:prstDash val="solid"/>
                       <a:round/>
@@ -5772,7 +5757,7 @@
                       <a:r>
                         <a:rPr lang="en-US" sz="1050" b="1" dirty="0">
                           <a:solidFill>
-                            <a:srgbClr val="0F1B2D"/>
+                            <a:srgbClr val="24343F"/>
                           </a:solidFill>
                         </a:rPr>
                         <a:t>GDPR</a:t>
@@ -5783,7 +5768,7 @@
                   <a:tcPr marL="76200" marR="76200" marT="38100" marB="38100" anchor="ctr">
                     <a:lnL w="12700" cap="flat" cmpd="sng" algn="ctr">
                       <a:solidFill>
-                        <a:srgbClr val="DCE2F0"/>
+                        <a:srgbClr val="D9E3EA"/>
                       </a:solidFill>
                       <a:prstDash val="solid"/>
                       <a:round/>
@@ -5792,7 +5777,7 @@
                     </a:lnL>
                     <a:lnR w="12700" cap="flat" cmpd="sng" algn="ctr">
                       <a:solidFill>
-                        <a:srgbClr val="DCE2F0"/>
+                        <a:srgbClr val="D9E3EA"/>
                       </a:solidFill>
                       <a:prstDash val="solid"/>
                       <a:round/>
@@ -5801,7 +5786,7 @@
                     </a:lnR>
                     <a:lnT w="12700" cap="flat" cmpd="sng" algn="ctr">
                       <a:solidFill>
-                        <a:srgbClr val="DCE2F0"/>
+                        <a:srgbClr val="D9E3EA"/>
                       </a:solidFill>
                       <a:prstDash val="solid"/>
                       <a:round/>
@@ -5810,7 +5795,7 @@
                     </a:lnT>
                     <a:lnB w="12700" cap="flat" cmpd="sng" algn="ctr">
                       <a:solidFill>
-                        <a:srgbClr val="DCE2F0"/>
+                        <a:srgbClr val="D9E3EA"/>
                       </a:solidFill>
                       <a:prstDash val="solid"/>
                       <a:round/>
@@ -5833,7 +5818,7 @@
                       <a:r>
                         <a:rPr lang="en-US" sz="1050" dirty="0">
                           <a:solidFill>
-                            <a:srgbClr val="1C2440"/>
+                            <a:srgbClr val="1B2730"/>
                           </a:solidFill>
                         </a:rPr>
                         <a:t>Complaint text is personal data. Legal basis, retention and a DPIA are Round 2</a:t>
@@ -5844,7 +5829,7 @@
                   <a:tcPr marL="76200" marR="76200" marT="38100" marB="38100" anchor="ctr">
                     <a:lnL w="12700" cap="flat" cmpd="sng" algn="ctr">
                       <a:solidFill>
-                        <a:srgbClr val="DCE2F0"/>
+                        <a:srgbClr val="D9E3EA"/>
                       </a:solidFill>
                       <a:prstDash val="solid"/>
                       <a:round/>
@@ -5853,7 +5838,7 @@
                     </a:lnL>
                     <a:lnR w="12700" cap="flat" cmpd="sng" algn="ctr">
                       <a:solidFill>
-                        <a:srgbClr val="DCE2F0"/>
+                        <a:srgbClr val="D9E3EA"/>
                       </a:solidFill>
                       <a:prstDash val="solid"/>
                       <a:round/>
@@ -5862,7 +5847,7 @@
                     </a:lnR>
                     <a:lnT w="12700" cap="flat" cmpd="sng" algn="ctr">
                       <a:solidFill>
-                        <a:srgbClr val="DCE2F0"/>
+                        <a:srgbClr val="D9E3EA"/>
                       </a:solidFill>
                       <a:prstDash val="solid"/>
                       <a:round/>
@@ -5871,7 +5856,7 @@
                     </a:lnT>
                     <a:lnB w="12700" cap="flat" cmpd="sng" algn="ctr">
                       <a:solidFill>
-                        <a:srgbClr val="DCE2F0"/>
+                        <a:srgbClr val="D9E3EA"/>
                       </a:solidFill>
                       <a:prstDash val="solid"/>
                       <a:round/>
@@ -5896,7 +5881,7 @@
                       <a:r>
                         <a:rPr lang="en-US" sz="1050" b="1" dirty="0">
                           <a:solidFill>
-                            <a:srgbClr val="0F1B2D"/>
+                            <a:srgbClr val="24343F"/>
                           </a:solidFill>
                         </a:rPr>
                         <a:t>Open risk</a:t>
@@ -5907,7 +5892,7 @@
                   <a:tcPr marL="76200" marR="76200" marT="38100" marB="38100" anchor="ctr">
                     <a:lnL w="12700" cap="flat" cmpd="sng" algn="ctr">
                       <a:solidFill>
-                        <a:srgbClr val="DCE2F0"/>
+                        <a:srgbClr val="D9E3EA"/>
                       </a:solidFill>
                       <a:prstDash val="solid"/>
                       <a:round/>
@@ -5916,7 +5901,7 @@
                     </a:lnL>
                     <a:lnR w="12700" cap="flat" cmpd="sng" algn="ctr">
                       <a:solidFill>
-                        <a:srgbClr val="DCE2F0"/>
+                        <a:srgbClr val="D9E3EA"/>
                       </a:solidFill>
                       <a:prstDash val="solid"/>
                       <a:round/>
@@ -5925,7 +5910,7 @@
                     </a:lnR>
                     <a:lnT w="12700" cap="flat" cmpd="sng" algn="ctr">
                       <a:solidFill>
-                        <a:srgbClr val="DCE2F0"/>
+                        <a:srgbClr val="D9E3EA"/>
                       </a:solidFill>
                       <a:prstDash val="solid"/>
                       <a:round/>
@@ -5934,7 +5919,7 @@
                     </a:lnT>
                     <a:lnB w="12700" cap="flat" cmpd="sng" algn="ctr">
                       <a:solidFill>
-                        <a:srgbClr val="DCE2F0"/>
+                        <a:srgbClr val="D9E3EA"/>
                       </a:solidFill>
                       <a:prstDash val="solid"/>
                       <a:round/>
@@ -5957,7 +5942,7 @@
                       <a:r>
                         <a:rPr lang="en-US" sz="1050" dirty="0">
                           <a:solidFill>
-                            <a:srgbClr val="1C2440"/>
+                            <a:srgbClr val="1B2730"/>
                           </a:solidFill>
                         </a:rPr>
                         <a:t>Model hosting region — an EU customer's text must not leave the EEA by accident</a:t>
@@ -5968,7 +5953,7 @@
                   <a:tcPr marL="76200" marR="76200" marT="38100" marB="38100" anchor="ctr">
                     <a:lnL w="12700" cap="flat" cmpd="sng" algn="ctr">
                       <a:solidFill>
-                        <a:srgbClr val="DCE2F0"/>
+                        <a:srgbClr val="D9E3EA"/>
                       </a:solidFill>
                       <a:prstDash val="solid"/>
                       <a:round/>
@@ -5977,7 +5962,7 @@
                     </a:lnL>
                     <a:lnR w="12700" cap="flat" cmpd="sng" algn="ctr">
                       <a:solidFill>
-                        <a:srgbClr val="DCE2F0"/>
+                        <a:srgbClr val="D9E3EA"/>
                       </a:solidFill>
                       <a:prstDash val="solid"/>
                       <a:round/>
@@ -5986,7 +5971,7 @@
                     </a:lnR>
                     <a:lnT w="12700" cap="flat" cmpd="sng" algn="ctr">
                       <a:solidFill>
-                        <a:srgbClr val="DCE2F0"/>
+                        <a:srgbClr val="D9E3EA"/>
                       </a:solidFill>
                       <a:prstDash val="solid"/>
                       <a:round/>
@@ -5995,7 +5980,7 @@
                     </a:lnT>
                     <a:lnB w="12700" cap="flat" cmpd="sng" algn="ctr">
                       <a:solidFill>
-                        <a:srgbClr val="DCE2F0"/>
+                        <a:srgbClr val="D9E3EA"/>
                       </a:solidFill>
                       <a:prstDash val="solid"/>
                       <a:round/>
@@ -6071,7 +6056,7 @@
             <a:r>
               <a:rPr lang="en-US" sz="1050" b="1" spc="200" kern="0" dirty="0">
                 <a:solidFill>
-                  <a:srgbClr val="6E7895"/>
+                  <a:srgbClr val="6B7C88"/>
                 </a:solidFill>
                 <a:latin typeface="Calibri" pitchFamily="34" charset="0"/>
                 <a:ea typeface="Calibri" pitchFamily="34" charset="-122"/>
@@ -6098,7 +6083,7 @@
             <a:avLst/>
           </a:prstGeom>
           <a:solidFill>
-            <a:srgbClr val="0F1B2D"/>
+            <a:srgbClr val="24343F"/>
           </a:solidFill>
           <a:ln/>
         </p:spPr>
@@ -6154,11 +6139,11 @@
             <a:r>
               <a:rPr lang="en-US" sz="3000" b="1" dirty="0">
                 <a:solidFill>
-                  <a:srgbClr val="0F1B2D"/>
+                  <a:srgbClr val="24343F"/>
                 </a:solidFill>
-                <a:latin typeface="Georgia" pitchFamily="34" charset="0"/>
-                <a:ea typeface="Georgia" pitchFamily="34" charset="-122"/>
-                <a:cs typeface="Georgia" pitchFamily="34" charset="-120"/>
+                <a:latin typeface="Trebuchet MS" pitchFamily="34" charset="0"/>
+                <a:ea typeface="Trebuchet MS" pitchFamily="34" charset="-122"/>
+                <a:cs typeface="Trebuchet MS" pitchFamily="34" charset="-120"/>
               </a:rPr>
               <a:t>Backup — every number, and where it came from</a:t>
             </a:r>
@@ -6181,7 +6166,7 @@
             <a:avLst/>
           </a:prstGeom>
           <a:solidFill>
-            <a:srgbClr val="EDF4FE"/>
+            <a:srgbClr val="EFF5F9"/>
           </a:solidFill>
           <a:ln/>
         </p:spPr>
@@ -6247,7 +6232,7 @@
             <a:r>
               <a:rPr lang="en-US" sz="1300" dirty="0">
                 <a:solidFill>
-                  <a:srgbClr val="1C2440"/>
+                  <a:srgbClr val="1B2730"/>
                 </a:solidFill>
                 <a:latin typeface="Calibri" pitchFamily="34" charset="0"/>
                 <a:ea typeface="Calibri" pitchFamily="34" charset="-122"/>
@@ -6276,7 +6261,7 @@
           <a:noFill/>
           <a:ln w="12700">
             <a:solidFill>
-              <a:srgbClr val="DCE2F0"/>
+              <a:srgbClr val="D9E3EA"/>
             </a:solidFill>
             <a:prstDash val="solid"/>
           </a:ln>
@@ -6337,7 +6322,7 @@
             <a:r>
               <a:rPr lang="en-US" sz="850" dirty="0">
                 <a:solidFill>
-                  <a:srgbClr val="6E7895"/>
+                  <a:srgbClr val="6B7C88"/>
                 </a:solidFill>
                 <a:latin typeface="Calibri" pitchFamily="34" charset="0"/>
                 <a:ea typeface="Calibri" pitchFamily="34" charset="-122"/>
@@ -6399,7 +6384,7 @@
                   <a:tcPr marL="76200" marR="76200" marT="38100" marB="38100" anchor="ctr">
                     <a:lnL w="12700" cap="flat" cmpd="sng" algn="ctr">
                       <a:solidFill>
-                        <a:srgbClr val="DCE2F0"/>
+                        <a:srgbClr val="D9E3EA"/>
                       </a:solidFill>
                       <a:prstDash val="solid"/>
                       <a:round/>
@@ -6408,7 +6393,7 @@
                     </a:lnL>
                     <a:lnR w="12700" cap="flat" cmpd="sng" algn="ctr">
                       <a:solidFill>
-                        <a:srgbClr val="DCE2F0"/>
+                        <a:srgbClr val="D9E3EA"/>
                       </a:solidFill>
                       <a:prstDash val="solid"/>
                       <a:round/>
@@ -6417,7 +6402,7 @@
                     </a:lnR>
                     <a:lnT w="12700" cap="flat" cmpd="sng" algn="ctr">
                       <a:solidFill>
-                        <a:srgbClr val="DCE2F0"/>
+                        <a:srgbClr val="D9E3EA"/>
                       </a:solidFill>
                       <a:prstDash val="solid"/>
                       <a:round/>
@@ -6426,7 +6411,7 @@
                     </a:lnT>
                     <a:lnB w="12700" cap="flat" cmpd="sng" algn="ctr">
                       <a:solidFill>
-                        <a:srgbClr val="DCE2F0"/>
+                        <a:srgbClr val="D9E3EA"/>
                       </a:solidFill>
                       <a:prstDash val="solid"/>
                       <a:round/>
@@ -6434,7 +6419,7 @@
                       <a:tailEnd type="none" w="med" len="med"/>
                     </a:lnB>
                     <a:solidFill>
-                      <a:srgbClr val="24405E"/>
+                      <a:srgbClr val="445A69"/>
                     </a:solidFill>
                   </a:tcPr>
                 </a:tc>
@@ -6460,7 +6445,7 @@
                   <a:tcPr marL="76200" marR="76200" marT="38100" marB="38100" anchor="ctr">
                     <a:lnL w="12700" cap="flat" cmpd="sng" algn="ctr">
                       <a:solidFill>
-                        <a:srgbClr val="DCE2F0"/>
+                        <a:srgbClr val="D9E3EA"/>
                       </a:solidFill>
                       <a:prstDash val="solid"/>
                       <a:round/>
@@ -6469,7 +6454,7 @@
                     </a:lnL>
                     <a:lnR w="12700" cap="flat" cmpd="sng" algn="ctr">
                       <a:solidFill>
-                        <a:srgbClr val="DCE2F0"/>
+                        <a:srgbClr val="D9E3EA"/>
                       </a:solidFill>
                       <a:prstDash val="solid"/>
                       <a:round/>
@@ -6478,7 +6463,7 @@
                     </a:lnR>
                     <a:lnT w="12700" cap="flat" cmpd="sng" algn="ctr">
                       <a:solidFill>
-                        <a:srgbClr val="DCE2F0"/>
+                        <a:srgbClr val="D9E3EA"/>
                       </a:solidFill>
                       <a:prstDash val="solid"/>
                       <a:round/>
@@ -6487,7 +6472,7 @@
                     </a:lnT>
                     <a:lnB w="12700" cap="flat" cmpd="sng" algn="ctr">
                       <a:solidFill>
-                        <a:srgbClr val="DCE2F0"/>
+                        <a:srgbClr val="D9E3EA"/>
                       </a:solidFill>
                       <a:prstDash val="solid"/>
                       <a:round/>
@@ -6495,7 +6480,7 @@
                       <a:tailEnd type="none" w="med" len="med"/>
                     </a:lnB>
                     <a:solidFill>
-                      <a:srgbClr val="24405E"/>
+                      <a:srgbClr val="445A69"/>
                     </a:solidFill>
                   </a:tcPr>
                 </a:tc>
@@ -6521,7 +6506,7 @@
                   <a:tcPr marL="76200" marR="76200" marT="38100" marB="38100" anchor="ctr">
                     <a:lnL w="12700" cap="flat" cmpd="sng" algn="ctr">
                       <a:solidFill>
-                        <a:srgbClr val="DCE2F0"/>
+                        <a:srgbClr val="D9E3EA"/>
                       </a:solidFill>
                       <a:prstDash val="solid"/>
                       <a:round/>
@@ -6530,7 +6515,7 @@
                     </a:lnL>
                     <a:lnR w="12700" cap="flat" cmpd="sng" algn="ctr">
                       <a:solidFill>
-                        <a:srgbClr val="DCE2F0"/>
+                        <a:srgbClr val="D9E3EA"/>
                       </a:solidFill>
                       <a:prstDash val="solid"/>
                       <a:round/>
@@ -6539,7 +6524,7 @@
                     </a:lnR>
                     <a:lnT w="12700" cap="flat" cmpd="sng" algn="ctr">
                       <a:solidFill>
-                        <a:srgbClr val="DCE2F0"/>
+                        <a:srgbClr val="D9E3EA"/>
                       </a:solidFill>
                       <a:prstDash val="solid"/>
                       <a:round/>
@@ -6548,7 +6533,7 @@
                     </a:lnT>
                     <a:lnB w="12700" cap="flat" cmpd="sng" algn="ctr">
                       <a:solidFill>
-                        <a:srgbClr val="DCE2F0"/>
+                        <a:srgbClr val="D9E3EA"/>
                       </a:solidFill>
                       <a:prstDash val="solid"/>
                       <a:round/>
@@ -6556,7 +6541,7 @@
                       <a:tailEnd type="none" w="med" len="med"/>
                     </a:lnB>
                     <a:solidFill>
-                      <a:srgbClr val="24405E"/>
+                      <a:srgbClr val="445A69"/>
                     </a:solidFill>
                   </a:tcPr>
                 </a:tc>
@@ -6573,7 +6558,7 @@
                       <a:r>
                         <a:rPr lang="en-US" sz="1050" b="1" dirty="0">
                           <a:solidFill>
-                            <a:srgbClr val="0F1B2D"/>
+                            <a:srgbClr val="24343F"/>
                           </a:solidFill>
                         </a:rPr>
                         <a:t>Complaint corpus</a:t>
@@ -6584,7 +6569,7 @@
                   <a:tcPr marL="76200" marR="76200" marT="38100" marB="38100" anchor="ctr">
                     <a:lnL w="12700" cap="flat" cmpd="sng" algn="ctr">
                       <a:solidFill>
-                        <a:srgbClr val="DCE2F0"/>
+                        <a:srgbClr val="D9E3EA"/>
                       </a:solidFill>
                       <a:prstDash val="solid"/>
                       <a:round/>
@@ -6593,7 +6578,7 @@
                     </a:lnL>
                     <a:lnR w="12700" cap="flat" cmpd="sng" algn="ctr">
                       <a:solidFill>
-                        <a:srgbClr val="DCE2F0"/>
+                        <a:srgbClr val="D9E3EA"/>
                       </a:solidFill>
                       <a:prstDash val="solid"/>
                       <a:round/>
@@ -6602,7 +6587,7 @@
                     </a:lnR>
                     <a:lnT w="12700" cap="flat" cmpd="sng" algn="ctr">
                       <a:solidFill>
-                        <a:srgbClr val="DCE2F0"/>
+                        <a:srgbClr val="D9E3EA"/>
                       </a:solidFill>
                       <a:prstDash val="solid"/>
                       <a:round/>
@@ -6611,7 +6596,7 @@
                     </a:lnT>
                     <a:lnB w="12700" cap="flat" cmpd="sng" algn="ctr">
                       <a:solidFill>
-                        <a:srgbClr val="DCE2F0"/>
+                        <a:srgbClr val="D9E3EA"/>
                       </a:solidFill>
                       <a:prstDash val="solid"/>
                       <a:round/>
@@ -6634,7 +6619,7 @@
                       <a:r>
                         <a:rPr lang="en-US" sz="1050" dirty="0">
                           <a:solidFill>
-                            <a:srgbClr val="1C2440"/>
+                            <a:srgbClr val="1B2730"/>
                           </a:solidFill>
                         </a:rPr>
                         <a:t>16,839</a:t>
@@ -6645,7 +6630,7 @@
                   <a:tcPr marL="76200" marR="76200" marT="38100" marB="38100" anchor="ctr">
                     <a:lnL w="12700" cap="flat" cmpd="sng" algn="ctr">
                       <a:solidFill>
-                        <a:srgbClr val="DCE2F0"/>
+                        <a:srgbClr val="D9E3EA"/>
                       </a:solidFill>
                       <a:prstDash val="solid"/>
                       <a:round/>
@@ -6654,7 +6639,7 @@
                     </a:lnL>
                     <a:lnR w="12700" cap="flat" cmpd="sng" algn="ctr">
                       <a:solidFill>
-                        <a:srgbClr val="DCE2F0"/>
+                        <a:srgbClr val="D9E3EA"/>
                       </a:solidFill>
                       <a:prstDash val="solid"/>
                       <a:round/>
@@ -6663,7 +6648,7 @@
                     </a:lnR>
                     <a:lnT w="12700" cap="flat" cmpd="sng" algn="ctr">
                       <a:solidFill>
-                        <a:srgbClr val="DCE2F0"/>
+                        <a:srgbClr val="D9E3EA"/>
                       </a:solidFill>
                       <a:prstDash val="solid"/>
                       <a:round/>
@@ -6672,7 +6657,7 @@
                     </a:lnT>
                     <a:lnB w="12700" cap="flat" cmpd="sng" algn="ctr">
                       <a:solidFill>
-                        <a:srgbClr val="DCE2F0"/>
+                        <a:srgbClr val="D9E3EA"/>
                       </a:solidFill>
                       <a:prstDash val="solid"/>
                       <a:round/>
@@ -6695,7 +6680,7 @@
                       <a:r>
                         <a:rPr lang="en-US" sz="1050" dirty="0">
                           <a:solidFill>
-                            <a:srgbClr val="1C2440"/>
+                            <a:srgbClr val="1B2730"/>
                           </a:solidFill>
                         </a:rPr>
                         <a:t>CFPB public API, 2026-05-01 to 06-27</a:t>
@@ -6706,7 +6691,7 @@
                   <a:tcPr marL="76200" marR="76200" marT="38100" marB="38100" anchor="ctr">
                     <a:lnL w="12700" cap="flat" cmpd="sng" algn="ctr">
                       <a:solidFill>
-                        <a:srgbClr val="DCE2F0"/>
+                        <a:srgbClr val="D9E3EA"/>
                       </a:solidFill>
                       <a:prstDash val="solid"/>
                       <a:round/>
@@ -6715,7 +6700,7 @@
                     </a:lnL>
                     <a:lnR w="12700" cap="flat" cmpd="sng" algn="ctr">
                       <a:solidFill>
-                        <a:srgbClr val="DCE2F0"/>
+                        <a:srgbClr val="D9E3EA"/>
                       </a:solidFill>
                       <a:prstDash val="solid"/>
                       <a:round/>
@@ -6724,7 +6709,7 @@
                     </a:lnR>
                     <a:lnT w="12700" cap="flat" cmpd="sng" algn="ctr">
                       <a:solidFill>
-                        <a:srgbClr val="DCE2F0"/>
+                        <a:srgbClr val="D9E3EA"/>
                       </a:solidFill>
                       <a:prstDash val="solid"/>
                       <a:round/>
@@ -6733,7 +6718,7 @@
                     </a:lnT>
                     <a:lnB w="12700" cap="flat" cmpd="sng" algn="ctr">
                       <a:solidFill>
-                        <a:srgbClr val="DCE2F0"/>
+                        <a:srgbClr val="D9E3EA"/>
                       </a:solidFill>
                       <a:prstDash val="solid"/>
                       <a:round/>
@@ -6758,7 +6743,7 @@
                       <a:r>
                         <a:rPr lang="en-US" sz="1050" b="1" dirty="0">
                           <a:solidFill>
-                            <a:srgbClr val="0F1B2D"/>
+                            <a:srgbClr val="24343F"/>
                           </a:solidFill>
                         </a:rPr>
                         <a:t>Complaint rate</a:t>
@@ -6769,7 +6754,7 @@
                   <a:tcPr marL="76200" marR="76200" marT="38100" marB="38100" anchor="ctr">
                     <a:lnL w="12700" cap="flat" cmpd="sng" algn="ctr">
                       <a:solidFill>
-                        <a:srgbClr val="DCE2F0"/>
+                        <a:srgbClr val="D9E3EA"/>
                       </a:solidFill>
                       <a:prstDash val="solid"/>
                       <a:round/>
@@ -6778,7 +6763,7 @@
                     </a:lnL>
                     <a:lnR w="12700" cap="flat" cmpd="sng" algn="ctr">
                       <a:solidFill>
-                        <a:srgbClr val="DCE2F0"/>
+                        <a:srgbClr val="D9E3EA"/>
                       </a:solidFill>
                       <a:prstDash val="solid"/>
                       <a:round/>
@@ -6787,7 +6772,7 @@
                     </a:lnR>
                     <a:lnT w="12700" cap="flat" cmpd="sng" algn="ctr">
                       <a:solidFill>
-                        <a:srgbClr val="DCE2F0"/>
+                        <a:srgbClr val="D9E3EA"/>
                       </a:solidFill>
                       <a:prstDash val="solid"/>
                       <a:round/>
@@ -6796,7 +6781,7 @@
                     </a:lnT>
                     <a:lnB w="12700" cap="flat" cmpd="sng" algn="ctr">
                       <a:solidFill>
-                        <a:srgbClr val="DCE2F0"/>
+                        <a:srgbClr val="D9E3EA"/>
                       </a:solidFill>
                       <a:prstDash val="solid"/>
                       <a:round/>
@@ -6819,7 +6804,7 @@
                       <a:r>
                         <a:rPr lang="en-US" sz="1050" dirty="0">
                           <a:solidFill>
-                            <a:srgbClr val="1C2440"/>
+                            <a:srgbClr val="1B2730"/>
                           </a:solidFill>
                         </a:rPr>
                         <a:t>3.7 per 1,000 accounts</a:t>
@@ -6830,7 +6815,7 @@
                   <a:tcPr marL="76200" marR="76200" marT="38100" marB="38100" anchor="ctr">
                     <a:lnL w="12700" cap="flat" cmpd="sng" algn="ctr">
                       <a:solidFill>
-                        <a:srgbClr val="DCE2F0"/>
+                        <a:srgbClr val="D9E3EA"/>
                       </a:solidFill>
                       <a:prstDash val="solid"/>
                       <a:round/>
@@ -6839,7 +6824,7 @@
                     </a:lnL>
                     <a:lnR w="12700" cap="flat" cmpd="sng" algn="ctr">
                       <a:solidFill>
-                        <a:srgbClr val="DCE2F0"/>
+                        <a:srgbClr val="D9E3EA"/>
                       </a:solidFill>
                       <a:prstDash val="solid"/>
                       <a:round/>
@@ -6848,7 +6833,7 @@
                     </a:lnR>
                     <a:lnT w="12700" cap="flat" cmpd="sng" algn="ctr">
                       <a:solidFill>
-                        <a:srgbClr val="DCE2F0"/>
+                        <a:srgbClr val="D9E3EA"/>
                       </a:solidFill>
                       <a:prstDash val="solid"/>
                       <a:round/>
@@ -6857,7 +6842,7 @@
                     </a:lnT>
                     <a:lnB w="12700" cap="flat" cmpd="sng" algn="ctr">
                       <a:solidFill>
-                        <a:srgbClr val="DCE2F0"/>
+                        <a:srgbClr val="D9E3EA"/>
                       </a:solidFill>
                       <a:prstDash val="solid"/>
                       <a:round/>
@@ -6880,7 +6865,7 @@
                       <a:r>
                         <a:rPr lang="en-US" sz="1050" dirty="0">
                           <a:solidFill>
-                            <a:srgbClr val="1C2440"/>
+                            <a:srgbClr val="1B2730"/>
                           </a:solidFill>
                         </a:rPr>
                         <a:t>FCA aggregate complaints 2025 H2</a:t>
@@ -6891,7 +6876,7 @@
                   <a:tcPr marL="76200" marR="76200" marT="38100" marB="38100" anchor="ctr">
                     <a:lnL w="12700" cap="flat" cmpd="sng" algn="ctr">
                       <a:solidFill>
-                        <a:srgbClr val="DCE2F0"/>
+                        <a:srgbClr val="D9E3EA"/>
                       </a:solidFill>
                       <a:prstDash val="solid"/>
                       <a:round/>
@@ -6900,7 +6885,7 @@
                     </a:lnL>
                     <a:lnR w="12700" cap="flat" cmpd="sng" algn="ctr">
                       <a:solidFill>
-                        <a:srgbClr val="DCE2F0"/>
+                        <a:srgbClr val="D9E3EA"/>
                       </a:solidFill>
                       <a:prstDash val="solid"/>
                       <a:round/>
@@ -6909,7 +6894,7 @@
                     </a:lnR>
                     <a:lnT w="12700" cap="flat" cmpd="sng" algn="ctr">
                       <a:solidFill>
-                        <a:srgbClr val="DCE2F0"/>
+                        <a:srgbClr val="D9E3EA"/>
                       </a:solidFill>
                       <a:prstDash val="solid"/>
                       <a:round/>
@@ -6918,7 +6903,7 @@
                     </a:lnT>
                     <a:lnB w="12700" cap="flat" cmpd="sng" algn="ctr">
                       <a:solidFill>
-                        <a:srgbClr val="DCE2F0"/>
+                        <a:srgbClr val="D9E3EA"/>
                       </a:solidFill>
                       <a:prstDash val="solid"/>
                       <a:round/>
@@ -6943,7 +6928,7 @@
                       <a:r>
                         <a:rPr lang="en-US" sz="1050" b="1" dirty="0">
                           <a:solidFill>
-                            <a:srgbClr val="0F1B2D"/>
+                            <a:srgbClr val="24343F"/>
                           </a:solidFill>
                         </a:rPr>
                         <a:t>Ombudsman case fee</a:t>
@@ -6954,7 +6939,7 @@
                   <a:tcPr marL="76200" marR="76200" marT="38100" marB="38100" anchor="ctr">
                     <a:lnL w="12700" cap="flat" cmpd="sng" algn="ctr">
                       <a:solidFill>
-                        <a:srgbClr val="DCE2F0"/>
+                        <a:srgbClr val="D9E3EA"/>
                       </a:solidFill>
                       <a:prstDash val="solid"/>
                       <a:round/>
@@ -6963,7 +6948,7 @@
                     </a:lnL>
                     <a:lnR w="12700" cap="flat" cmpd="sng" algn="ctr">
                       <a:solidFill>
-                        <a:srgbClr val="DCE2F0"/>
+                        <a:srgbClr val="D9E3EA"/>
                       </a:solidFill>
                       <a:prstDash val="solid"/>
                       <a:round/>
@@ -6972,7 +6957,7 @@
                     </a:lnR>
                     <a:lnT w="12700" cap="flat" cmpd="sng" algn="ctr">
                       <a:solidFill>
-                        <a:srgbClr val="DCE2F0"/>
+                        <a:srgbClr val="D9E3EA"/>
                       </a:solidFill>
                       <a:prstDash val="solid"/>
                       <a:round/>
@@ -6981,7 +6966,7 @@
                     </a:lnT>
                     <a:lnB w="12700" cap="flat" cmpd="sng" algn="ctr">
                       <a:solidFill>
-                        <a:srgbClr val="DCE2F0"/>
+                        <a:srgbClr val="D9E3EA"/>
                       </a:solidFill>
                       <a:prstDash val="solid"/>
                       <a:round/>
@@ -7004,7 +6989,7 @@
                       <a:r>
                         <a:rPr lang="en-US" sz="1050" dirty="0">
                           <a:solidFill>
-                            <a:srgbClr val="1C2440"/>
+                            <a:srgbClr val="1B2730"/>
                           </a:solidFill>
                         </a:rPr>
                         <a:t>£650, 3 free</a:t>
@@ -7015,7 +7000,7 @@
                   <a:tcPr marL="76200" marR="76200" marT="38100" marB="38100" anchor="ctr">
                     <a:lnL w="12700" cap="flat" cmpd="sng" algn="ctr">
                       <a:solidFill>
-                        <a:srgbClr val="DCE2F0"/>
+                        <a:srgbClr val="D9E3EA"/>
                       </a:solidFill>
                       <a:prstDash val="solid"/>
                       <a:round/>
@@ -7024,7 +7009,7 @@
                     </a:lnL>
                     <a:lnR w="12700" cap="flat" cmpd="sng" algn="ctr">
                       <a:solidFill>
-                        <a:srgbClr val="DCE2F0"/>
+                        <a:srgbClr val="D9E3EA"/>
                       </a:solidFill>
                       <a:prstDash val="solid"/>
                       <a:round/>
@@ -7033,7 +7018,7 @@
                     </a:lnR>
                     <a:lnT w="12700" cap="flat" cmpd="sng" algn="ctr">
                       <a:solidFill>
-                        <a:srgbClr val="DCE2F0"/>
+                        <a:srgbClr val="D9E3EA"/>
                       </a:solidFill>
                       <a:prstDash val="solid"/>
                       <a:round/>
@@ -7042,7 +7027,7 @@
                     </a:lnT>
                     <a:lnB w="12700" cap="flat" cmpd="sng" algn="ctr">
                       <a:solidFill>
-                        <a:srgbClr val="DCE2F0"/>
+                        <a:srgbClr val="D9E3EA"/>
                       </a:solidFill>
                       <a:prstDash val="solid"/>
                       <a:round/>
@@ -7065,7 +7050,7 @@
                       <a:r>
                         <a:rPr lang="en-US" sz="1050" dirty="0">
                           <a:solidFill>
-                            <a:srgbClr val="1C2440"/>
+                            <a:srgbClr val="1B2730"/>
                           </a:solidFill>
                         </a:rPr>
                         <a:t>Financial Ombudsman Service 2025/26</a:t>
@@ -7076,7 +7061,7 @@
                   <a:tcPr marL="76200" marR="76200" marT="38100" marB="38100" anchor="ctr">
                     <a:lnL w="12700" cap="flat" cmpd="sng" algn="ctr">
                       <a:solidFill>
-                        <a:srgbClr val="DCE2F0"/>
+                        <a:srgbClr val="D9E3EA"/>
                       </a:solidFill>
                       <a:prstDash val="solid"/>
                       <a:round/>
@@ -7085,7 +7070,7 @@
                     </a:lnL>
                     <a:lnR w="12700" cap="flat" cmpd="sng" algn="ctr">
                       <a:solidFill>
-                        <a:srgbClr val="DCE2F0"/>
+                        <a:srgbClr val="D9E3EA"/>
                       </a:solidFill>
                       <a:prstDash val="solid"/>
                       <a:round/>
@@ -7094,7 +7079,7 @@
                     </a:lnR>
                     <a:lnT w="12700" cap="flat" cmpd="sng" algn="ctr">
                       <a:solidFill>
-                        <a:srgbClr val="DCE2F0"/>
+                        <a:srgbClr val="D9E3EA"/>
                       </a:solidFill>
                       <a:prstDash val="solid"/>
                       <a:round/>
@@ -7103,7 +7088,7 @@
                     </a:lnT>
                     <a:lnB w="12700" cap="flat" cmpd="sng" algn="ctr">
                       <a:solidFill>
-                        <a:srgbClr val="DCE2F0"/>
+                        <a:srgbClr val="D9E3EA"/>
                       </a:solidFill>
                       <a:prstDash val="solid"/>
                       <a:round/>
@@ -7128,7 +7113,7 @@
                       <a:r>
                         <a:rPr lang="en-US" sz="1050" b="1" dirty="0">
                           <a:solidFill>
-                            <a:srgbClr val="0F1B2D"/>
+                            <a:srgbClr val="24343F"/>
                           </a:solidFill>
                         </a:rPr>
                         <a:t>Tokens per complaint</a:t>
@@ -7139,7 +7124,7 @@
                   <a:tcPr marL="76200" marR="76200" marT="38100" marB="38100" anchor="ctr">
                     <a:lnL w="12700" cap="flat" cmpd="sng" algn="ctr">
                       <a:solidFill>
-                        <a:srgbClr val="DCE2F0"/>
+                        <a:srgbClr val="D9E3EA"/>
                       </a:solidFill>
                       <a:prstDash val="solid"/>
                       <a:round/>
@@ -7148,7 +7133,7 @@
                     </a:lnL>
                     <a:lnR w="12700" cap="flat" cmpd="sng" algn="ctr">
                       <a:solidFill>
-                        <a:srgbClr val="DCE2F0"/>
+                        <a:srgbClr val="D9E3EA"/>
                       </a:solidFill>
                       <a:prstDash val="solid"/>
                       <a:round/>
@@ -7157,7 +7142,7 @@
                     </a:lnR>
                     <a:lnT w="12700" cap="flat" cmpd="sng" algn="ctr">
                       <a:solidFill>
-                        <a:srgbClr val="DCE2F0"/>
+                        <a:srgbClr val="D9E3EA"/>
                       </a:solidFill>
                       <a:prstDash val="solid"/>
                       <a:round/>
@@ -7166,7 +7151,7 @@
                     </a:lnT>
                     <a:lnB w="12700" cap="flat" cmpd="sng" algn="ctr">
                       <a:solidFill>
-                        <a:srgbClr val="DCE2F0"/>
+                        <a:srgbClr val="D9E3EA"/>
                       </a:solidFill>
                       <a:prstDash val="solid"/>
                       <a:round/>
@@ -7189,7 +7174,7 @@
                       <a:r>
                         <a:rPr lang="en-US" sz="1050" dirty="0">
                           <a:solidFill>
-                            <a:srgbClr val="1C2440"/>
+                            <a:srgbClr val="1B2730"/>
                           </a:solidFill>
                         </a:rPr>
                         <a:t>684 in / 49 out</a:t>
@@ -7200,7 +7185,7 @@
                   <a:tcPr marL="76200" marR="76200" marT="38100" marB="38100" anchor="ctr">
                     <a:lnL w="12700" cap="flat" cmpd="sng" algn="ctr">
                       <a:solidFill>
-                        <a:srgbClr val="DCE2F0"/>
+                        <a:srgbClr val="D9E3EA"/>
                       </a:solidFill>
                       <a:prstDash val="solid"/>
                       <a:round/>
@@ -7209,7 +7194,7 @@
                     </a:lnL>
                     <a:lnR w="12700" cap="flat" cmpd="sng" algn="ctr">
                       <a:solidFill>
-                        <a:srgbClr val="DCE2F0"/>
+                        <a:srgbClr val="D9E3EA"/>
                       </a:solidFill>
                       <a:prstDash val="solid"/>
                       <a:round/>
@@ -7218,7 +7203,7 @@
                     </a:lnR>
                     <a:lnT w="12700" cap="flat" cmpd="sng" algn="ctr">
                       <a:solidFill>
-                        <a:srgbClr val="DCE2F0"/>
+                        <a:srgbClr val="D9E3EA"/>
                       </a:solidFill>
                       <a:prstDash val="solid"/>
                       <a:round/>
@@ -7227,7 +7212,7 @@
                     </a:lnT>
                     <a:lnB w="12700" cap="flat" cmpd="sng" algn="ctr">
                       <a:solidFill>
-                        <a:srgbClr val="DCE2F0"/>
+                        <a:srgbClr val="D9E3EA"/>
                       </a:solidFill>
                       <a:prstDash val="solid"/>
                       <a:round/>
@@ -7250,7 +7235,7 @@
                       <a:r>
                         <a:rPr lang="en-US" sz="1050" dirty="0">
                           <a:solidFill>
-                            <a:srgbClr val="1C2440"/>
+                            <a:srgbClr val="1B2730"/>
                           </a:solidFill>
                         </a:rPr>
                         <a:t>Measured, n=12</a:t>
@@ -7261,7 +7246,7 @@
                   <a:tcPr marL="76200" marR="76200" marT="38100" marB="38100" anchor="ctr">
                     <a:lnL w="12700" cap="flat" cmpd="sng" algn="ctr">
                       <a:solidFill>
-                        <a:srgbClr val="DCE2F0"/>
+                        <a:srgbClr val="D9E3EA"/>
                       </a:solidFill>
                       <a:prstDash val="solid"/>
                       <a:round/>
@@ -7270,7 +7255,7 @@
                     </a:lnL>
                     <a:lnR w="12700" cap="flat" cmpd="sng" algn="ctr">
                       <a:solidFill>
-                        <a:srgbClr val="DCE2F0"/>
+                        <a:srgbClr val="D9E3EA"/>
                       </a:solidFill>
                       <a:prstDash val="solid"/>
                       <a:round/>
@@ -7279,7 +7264,7 @@
                     </a:lnR>
                     <a:lnT w="12700" cap="flat" cmpd="sng" algn="ctr">
                       <a:solidFill>
-                        <a:srgbClr val="DCE2F0"/>
+                        <a:srgbClr val="D9E3EA"/>
                       </a:solidFill>
                       <a:prstDash val="solid"/>
                       <a:round/>
@@ -7288,7 +7273,7 @@
                     </a:lnT>
                     <a:lnB w="12700" cap="flat" cmpd="sng" algn="ctr">
                       <a:solidFill>
-                        <a:srgbClr val="DCE2F0"/>
+                        <a:srgbClr val="D9E3EA"/>
                       </a:solidFill>
                       <a:prstDash val="solid"/>
                       <a:round/>
@@ -7313,7 +7298,7 @@
                       <a:r>
                         <a:rPr lang="en-US" sz="1050" b="1" dirty="0">
                           <a:solidFill>
-                            <a:srgbClr val="0F1B2D"/>
+                            <a:srgbClr val="24343F"/>
                           </a:solidFill>
                         </a:rPr>
                         <a:t>Team accuracy</a:t>
@@ -7324,7 +7309,7 @@
                   <a:tcPr marL="76200" marR="76200" marT="38100" marB="38100" anchor="ctr">
                     <a:lnL w="12700" cap="flat" cmpd="sng" algn="ctr">
                       <a:solidFill>
-                        <a:srgbClr val="DCE2F0"/>
+                        <a:srgbClr val="D9E3EA"/>
                       </a:solidFill>
                       <a:prstDash val="solid"/>
                       <a:round/>
@@ -7333,7 +7318,7 @@
                     </a:lnL>
                     <a:lnR w="12700" cap="flat" cmpd="sng" algn="ctr">
                       <a:solidFill>
-                        <a:srgbClr val="DCE2F0"/>
+                        <a:srgbClr val="D9E3EA"/>
                       </a:solidFill>
                       <a:prstDash val="solid"/>
                       <a:round/>
@@ -7342,7 +7327,7 @@
                     </a:lnR>
                     <a:lnT w="12700" cap="flat" cmpd="sng" algn="ctr">
                       <a:solidFill>
-                        <a:srgbClr val="DCE2F0"/>
+                        <a:srgbClr val="D9E3EA"/>
                       </a:solidFill>
                       <a:prstDash val="solid"/>
                       <a:round/>
@@ -7351,7 +7336,7 @@
                     </a:lnT>
                     <a:lnB w="12700" cap="flat" cmpd="sng" algn="ctr">
                       <a:solidFill>
-                        <a:srgbClr val="DCE2F0"/>
+                        <a:srgbClr val="D9E3EA"/>
                       </a:solidFill>
                       <a:prstDash val="solid"/>
                       <a:round/>
@@ -7374,7 +7359,7 @@
                       <a:r>
                         <a:rPr lang="en-US" sz="1050" dirty="0">
                           <a:solidFill>
-                            <a:srgbClr val="1C2440"/>
+                            <a:srgbClr val="1B2730"/>
                           </a:solidFill>
                         </a:rPr>
                         <a:t>60.5%</a:t>
@@ -7385,7 +7370,7 @@
                   <a:tcPr marL="76200" marR="76200" marT="38100" marB="38100" anchor="ctr">
                     <a:lnL w="12700" cap="flat" cmpd="sng" algn="ctr">
                       <a:solidFill>
-                        <a:srgbClr val="DCE2F0"/>
+                        <a:srgbClr val="D9E3EA"/>
                       </a:solidFill>
                       <a:prstDash val="solid"/>
                       <a:round/>
@@ -7394,7 +7379,7 @@
                     </a:lnL>
                     <a:lnR w="12700" cap="flat" cmpd="sng" algn="ctr">
                       <a:solidFill>
-                        <a:srgbClr val="DCE2F0"/>
+                        <a:srgbClr val="D9E3EA"/>
                       </a:solidFill>
                       <a:prstDash val="solid"/>
                       <a:round/>
@@ -7403,7 +7388,7 @@
                     </a:lnR>
                     <a:lnT w="12700" cap="flat" cmpd="sng" algn="ctr">
                       <a:solidFill>
-                        <a:srgbClr val="DCE2F0"/>
+                        <a:srgbClr val="D9E3EA"/>
                       </a:solidFill>
                       <a:prstDash val="solid"/>
                       <a:round/>
@@ -7412,7 +7397,7 @@
                     </a:lnT>
                     <a:lnB w="12700" cap="flat" cmpd="sng" algn="ctr">
                       <a:solidFill>
-                        <a:srgbClr val="DCE2F0"/>
+                        <a:srgbClr val="D9E3EA"/>
                       </a:solidFill>
                       <a:prstDash val="solid"/>
                       <a:round/>
@@ -7435,7 +7420,7 @@
                       <a:r>
                         <a:rPr lang="en-US" sz="1050" dirty="0">
                           <a:solidFill>
-                            <a:srgbClr val="1C2440"/>
+                            <a:srgbClr val="1B2730"/>
                           </a:solidFill>
                         </a:rPr>
                         <a:t>gpt-4o, 240 complaints, seed 42</a:t>
@@ -7446,7 +7431,7 @@
                   <a:tcPr marL="76200" marR="76200" marT="38100" marB="38100" anchor="ctr">
                     <a:lnL w="12700" cap="flat" cmpd="sng" algn="ctr">
                       <a:solidFill>
-                        <a:srgbClr val="DCE2F0"/>
+                        <a:srgbClr val="D9E3EA"/>
                       </a:solidFill>
                       <a:prstDash val="solid"/>
                       <a:round/>
@@ -7455,7 +7440,7 @@
                     </a:lnL>
                     <a:lnR w="12700" cap="flat" cmpd="sng" algn="ctr">
                       <a:solidFill>
-                        <a:srgbClr val="DCE2F0"/>
+                        <a:srgbClr val="D9E3EA"/>
                       </a:solidFill>
                       <a:prstDash val="solid"/>
                       <a:round/>
@@ -7464,7 +7449,7 @@
                     </a:lnR>
                     <a:lnT w="12700" cap="flat" cmpd="sng" algn="ctr">
                       <a:solidFill>
-                        <a:srgbClr val="DCE2F0"/>
+                        <a:srgbClr val="D9E3EA"/>
                       </a:solidFill>
                       <a:prstDash val="solid"/>
                       <a:round/>
@@ -7473,7 +7458,7 @@
                     </a:lnT>
                     <a:lnB w="12700" cap="flat" cmpd="sng" algn="ctr">
                       <a:solidFill>
-                        <a:srgbClr val="DCE2F0"/>
+                        <a:srgbClr val="D9E3EA"/>
                       </a:solidFill>
                       <a:prstDash val="solid"/>
                       <a:round/>
@@ -7549,7 +7534,7 @@
             <a:r>
               <a:rPr lang="en-US" sz="1050" b="1" spc="200" kern="0" dirty="0">
                 <a:solidFill>
-                  <a:srgbClr val="6E7895"/>
+                  <a:srgbClr val="6B7C88"/>
                 </a:solidFill>
                 <a:latin typeface="Calibri" pitchFamily="34" charset="0"/>
                 <a:ea typeface="Calibri" pitchFamily="34" charset="-122"/>
@@ -7576,7 +7561,7 @@
             <a:avLst/>
           </a:prstGeom>
           <a:solidFill>
-            <a:srgbClr val="0F1B2D"/>
+            <a:srgbClr val="24343F"/>
           </a:solidFill>
           <a:ln/>
         </p:spPr>
@@ -7632,11 +7617,11 @@
             <a:r>
               <a:rPr lang="en-US" sz="3000" b="1" dirty="0">
                 <a:solidFill>
-                  <a:srgbClr val="0F1B2D"/>
+                  <a:srgbClr val="24343F"/>
                 </a:solidFill>
-                <a:latin typeface="Georgia" pitchFamily="34" charset="0"/>
-                <a:ea typeface="Georgia" pitchFamily="34" charset="-122"/>
-                <a:cs typeface="Georgia" pitchFamily="34" charset="-120"/>
+                <a:latin typeface="Trebuchet MS" pitchFamily="34" charset="0"/>
+                <a:ea typeface="Trebuchet MS" pitchFamily="34" charset="-122"/>
+                <a:cs typeface="Trebuchet MS" pitchFamily="34" charset="-120"/>
               </a:rPr>
               <a:t>Chleo's objection is trust, not capability</a:t>
             </a:r>
@@ -7659,7 +7644,7 @@
             <a:avLst/>
           </a:prstGeom>
           <a:solidFill>
-            <a:srgbClr val="EDF4FE"/>
+            <a:srgbClr val="EFF5F9"/>
           </a:solidFill>
           <a:ln/>
         </p:spPr>
@@ -7725,7 +7710,7 @@
             <a:r>
               <a:rPr lang="en-US" sz="1300" dirty="0">
                 <a:solidFill>
-                  <a:srgbClr val="1C2440"/>
+                  <a:srgbClr val="1B2730"/>
                 </a:solidFill>
                 <a:latin typeface="Calibri" pitchFamily="34" charset="0"/>
                 <a:ea typeface="Calibri" pitchFamily="34" charset="-122"/>
@@ -7754,7 +7739,7 @@
           <a:noFill/>
           <a:ln w="12700">
             <a:solidFill>
-              <a:srgbClr val="DCE2F0"/>
+              <a:srgbClr val="D9E3EA"/>
             </a:solidFill>
             <a:prstDash val="solid"/>
           </a:ln>
@@ -7815,7 +7800,7 @@
             <a:r>
               <a:rPr lang="en-US" sz="850" dirty="0">
                 <a:solidFill>
-                  <a:srgbClr val="6E7895"/>
+                  <a:srgbClr val="6B7C88"/>
                 </a:solidFill>
                 <a:latin typeface="Calibri" pitchFamily="34" charset="0"/>
                 <a:ea typeface="Calibri" pitchFamily="34" charset="-122"/>
@@ -7846,7 +7831,7 @@
           </a:solidFill>
           <a:ln w="12700">
             <a:solidFill>
-              <a:srgbClr val="DCE2F0"/>
+              <a:srgbClr val="D9E3EA"/>
             </a:solidFill>
             <a:prstDash val="solid"/>
           </a:ln>
@@ -7886,7 +7871,7 @@
             <a:r>
               <a:rPr lang="en-US" sz="950" b="1" spc="150" kern="0" dirty="0">
                 <a:solidFill>
-                  <a:srgbClr val="24405E"/>
+                  <a:srgbClr val="445A69"/>
                 </a:solidFill>
                 <a:latin typeface="Calibri" pitchFamily="34" charset="0"/>
                 <a:ea typeface="Calibri" pitchFamily="34" charset="-122"/>
@@ -7925,11 +7910,11 @@
             <a:r>
               <a:rPr lang="en-US" sz="1600" b="1" dirty="0">
                 <a:solidFill>
-                  <a:srgbClr val="0F1B2D"/>
+                  <a:srgbClr val="24343F"/>
                 </a:solidFill>
-                <a:latin typeface="Georgia" pitchFamily="34" charset="0"/>
-                <a:ea typeface="Georgia" pitchFamily="34" charset="-122"/>
-                <a:cs typeface="Georgia" pitchFamily="34" charset="-120"/>
+                <a:latin typeface="Trebuchet MS" pitchFamily="34" charset="0"/>
+                <a:ea typeface="Trebuchet MS" pitchFamily="34" charset="-122"/>
+                <a:cs typeface="Trebuchet MS" pitchFamily="34" charset="-120"/>
               </a:rPr>
               <a:t>Mid-size, EU</a:t>
             </a:r>
@@ -7964,7 +7949,7 @@
             <a:r>
               <a:rPr lang="en-US" sz="1100" dirty="0">
                 <a:solidFill>
-                  <a:srgbClr val="1C2440"/>
+                  <a:srgbClr val="1B2730"/>
                 </a:solidFill>
                 <a:latin typeface="Calibri" pitchFamily="34" charset="0"/>
                 <a:ea typeface="Calibri" pitchFamily="34" charset="-122"/>
@@ -7991,7 +7976,7 @@
             <a:avLst/>
           </a:prstGeom>
           <a:solidFill>
-            <a:srgbClr val="0F1B2D"/>
+            <a:srgbClr val="24343F"/>
           </a:solidFill>
           <a:ln/>
           <a:effectLst>
@@ -8071,9 +8056,9 @@
                 <a:solidFill>
                   <a:srgbClr val="FFFFFF"/>
                 </a:solidFill>
-                <a:latin typeface="Georgia" pitchFamily="34" charset="0"/>
-                <a:ea typeface="Georgia" pitchFamily="34" charset="-122"/>
-                <a:cs typeface="Georgia" pitchFamily="34" charset="-120"/>
+                <a:latin typeface="Trebuchet MS" pitchFamily="34" charset="0"/>
+                <a:ea typeface="Trebuchet MS" pitchFamily="34" charset="-122"/>
+                <a:cs typeface="Trebuchet MS" pitchFamily="34" charset="-120"/>
               </a:rPr>
               <a:t>“AI is not transparent”</a:t>
             </a:r>
@@ -8139,7 +8124,7 @@
           </a:solidFill>
           <a:ln w="12700">
             <a:solidFill>
-              <a:srgbClr val="DCE2F0"/>
+              <a:srgbClr val="D9E3EA"/>
             </a:solidFill>
             <a:prstDash val="solid"/>
           </a:ln>
@@ -8179,7 +8164,7 @@
             <a:r>
               <a:rPr lang="en-US" sz="950" b="1" spc="150" kern="0" dirty="0">
                 <a:solidFill>
-                  <a:srgbClr val="24405E"/>
+                  <a:srgbClr val="445A69"/>
                 </a:solidFill>
                 <a:latin typeface="Calibri" pitchFamily="34" charset="0"/>
                 <a:ea typeface="Calibri" pitchFamily="34" charset="-122"/>
@@ -8218,11 +8203,11 @@
             <a:r>
               <a:rPr lang="en-US" sz="1600" b="1" dirty="0">
                 <a:solidFill>
-                  <a:srgbClr val="0F1B2D"/>
+                  <a:srgbClr val="24343F"/>
                 </a:solidFill>
-                <a:latin typeface="Georgia" pitchFamily="34" charset="0"/>
-                <a:ea typeface="Georgia" pitchFamily="34" charset="-122"/>
-                <a:cs typeface="Georgia" pitchFamily="34" charset="-120"/>
+                <a:latin typeface="Trebuchet MS" pitchFamily="34" charset="0"/>
+                <a:ea typeface="Trebuchet MS" pitchFamily="34" charset="-122"/>
+                <a:cs typeface="Trebuchet MS" pitchFamily="34" charset="-120"/>
               </a:rPr>
               <a:t>Make one decision visible</a:t>
             </a:r>
@@ -8257,7 +8242,7 @@
             <a:r>
               <a:rPr lang="en-US" sz="1100" dirty="0">
                 <a:solidFill>
-                  <a:srgbClr val="1C2440"/>
+                  <a:srgbClr val="1B2730"/>
                 </a:solidFill>
                 <a:latin typeface="Calibri" pitchFamily="34" charset="0"/>
                 <a:ea typeface="Calibri" pitchFamily="34" charset="-122"/>
@@ -8328,7 +8313,7 @@
             <a:r>
               <a:rPr lang="en-US" sz="1050" b="1" spc="200" kern="0" dirty="0">
                 <a:solidFill>
-                  <a:srgbClr val="6E7895"/>
+                  <a:srgbClr val="6B7C88"/>
                 </a:solidFill>
                 <a:latin typeface="Calibri" pitchFamily="34" charset="0"/>
                 <a:ea typeface="Calibri" pitchFamily="34" charset="-122"/>
@@ -8355,7 +8340,7 @@
             <a:avLst/>
           </a:prstGeom>
           <a:solidFill>
-            <a:srgbClr val="0F1B2D"/>
+            <a:srgbClr val="24343F"/>
           </a:solidFill>
           <a:ln/>
         </p:spPr>
@@ -8411,11 +8396,11 @@
             <a:r>
               <a:rPr lang="en-US" sz="3000" b="1" dirty="0">
                 <a:solidFill>
-                  <a:srgbClr val="0F1B2D"/>
+                  <a:srgbClr val="24343F"/>
                 </a:solidFill>
-                <a:latin typeface="Georgia" pitchFamily="34" charset="0"/>
-                <a:ea typeface="Georgia" pitchFamily="34" charset="-122"/>
-                <a:cs typeface="Georgia" pitchFamily="34" charset="-120"/>
+                <a:latin typeface="Trebuchet MS" pitchFamily="34" charset="0"/>
+                <a:ea typeface="Trebuchet MS" pitchFamily="34" charset="-122"/>
+                <a:cs typeface="Trebuchet MS" pitchFamily="34" charset="-120"/>
               </a:rPr>
               <a:t>Three use cases — and two I will not build</a:t>
             </a:r>
@@ -8438,7 +8423,7 @@
             <a:avLst/>
           </a:prstGeom>
           <a:solidFill>
-            <a:srgbClr val="EDF4FE"/>
+            <a:srgbClr val="EFF5F9"/>
           </a:solidFill>
           <a:ln/>
         </p:spPr>
@@ -8504,7 +8489,7 @@
             <a:r>
               <a:rPr lang="en-US" sz="1300" dirty="0">
                 <a:solidFill>
-                  <a:srgbClr val="1C2440"/>
+                  <a:srgbClr val="1B2730"/>
                 </a:solidFill>
                 <a:latin typeface="Calibri" pitchFamily="34" charset="0"/>
                 <a:ea typeface="Calibri" pitchFamily="34" charset="-122"/>
@@ -8533,7 +8518,7 @@
           <a:noFill/>
           <a:ln w="12700">
             <a:solidFill>
-              <a:srgbClr val="DCE2F0"/>
+              <a:srgbClr val="D9E3EA"/>
             </a:solidFill>
             <a:prstDash val="solid"/>
           </a:ln>
@@ -8594,7 +8579,7 @@
             <a:r>
               <a:rPr lang="en-US" sz="850" dirty="0">
                 <a:solidFill>
-                  <a:srgbClr val="6E7895"/>
+                  <a:srgbClr val="6B7C88"/>
                 </a:solidFill>
                 <a:latin typeface="Calibri" pitchFamily="34" charset="0"/>
                 <a:ea typeface="Calibri" pitchFamily="34" charset="-122"/>
@@ -8625,7 +8610,7 @@
           </a:solidFill>
           <a:ln w="12700">
             <a:solidFill>
-              <a:srgbClr val="DCE2F0"/>
+              <a:srgbClr val="D9E3EA"/>
             </a:solidFill>
             <a:prstDash val="solid"/>
           </a:ln>
@@ -8653,7 +8638,7 @@
             <a:avLst/>
           </a:prstGeom>
           <a:solidFill>
-            <a:srgbClr val="0F1B2D"/>
+            <a:srgbClr val="24343F"/>
           </a:solidFill>
           <a:ln/>
         </p:spPr>
@@ -8728,7 +8713,7 @@
             <a:r>
               <a:rPr lang="en-US" sz="1150" dirty="0">
                 <a:solidFill>
-                  <a:srgbClr val="1C2440"/>
+                  <a:srgbClr val="1B2730"/>
                 </a:solidFill>
                 <a:latin typeface="Calibri" pitchFamily="34" charset="0"/>
                 <a:ea typeface="Calibri" pitchFamily="34" charset="-122"/>
@@ -8749,7 +8734,7 @@
             <a:r>
               <a:rPr lang="en-US" sz="1150" dirty="0">
                 <a:solidFill>
-                  <a:srgbClr val="1C2440"/>
+                  <a:srgbClr val="1B2730"/>
                 </a:solidFill>
                 <a:latin typeface="Calibri" pitchFamily="34" charset="0"/>
                 <a:ea typeface="Calibri" pitchFamily="34" charset="-122"/>
@@ -8770,7 +8755,7 @@
             <a:r>
               <a:rPr lang="en-US" sz="1150" dirty="0">
                 <a:solidFill>
-                  <a:srgbClr val="1C2440"/>
+                  <a:srgbClr val="1B2730"/>
                 </a:solidFill>
                 <a:latin typeface="Calibri" pitchFamily="34" charset="0"/>
                 <a:ea typeface="Calibri" pitchFamily="34" charset="-122"/>
@@ -8801,7 +8786,7 @@
           </a:solidFill>
           <a:ln w="12700">
             <a:solidFill>
-              <a:srgbClr val="DCE2F0"/>
+              <a:srgbClr val="D9E3EA"/>
             </a:solidFill>
             <a:prstDash val="solid"/>
           </a:ln>
@@ -8829,7 +8814,7 @@
             <a:avLst/>
           </a:prstGeom>
           <a:solidFill>
-            <a:srgbClr val="24405E"/>
+            <a:srgbClr val="445A69"/>
           </a:solidFill>
           <a:ln/>
         </p:spPr>
@@ -8904,7 +8889,7 @@
             <a:r>
               <a:rPr lang="en-US" sz="1150" dirty="0">
                 <a:solidFill>
-                  <a:srgbClr val="6E7895"/>
+                  <a:srgbClr val="6B7C88"/>
                 </a:solidFill>
                 <a:latin typeface="Calibri" pitchFamily="34" charset="0"/>
                 <a:ea typeface="Calibri" pitchFamily="34" charset="-122"/>
@@ -8925,7 +8910,7 @@
             <a:r>
               <a:rPr lang="en-US" sz="1150" dirty="0">
                 <a:solidFill>
-                  <a:srgbClr val="6E7895"/>
+                  <a:srgbClr val="6B7C88"/>
                 </a:solidFill>
                 <a:latin typeface="Calibri" pitchFamily="34" charset="0"/>
                 <a:ea typeface="Calibri" pitchFamily="34" charset="-122"/>
@@ -8946,7 +8931,7 @@
             <a:r>
               <a:rPr lang="en-US" sz="1150" dirty="0">
                 <a:solidFill>
-                  <a:srgbClr val="6E7895"/>
+                  <a:srgbClr val="6B7C88"/>
                 </a:solidFill>
                 <a:latin typeface="Calibri" pitchFamily="34" charset="0"/>
                 <a:ea typeface="Calibri" pitchFamily="34" charset="-122"/>
@@ -9017,7 +9002,7 @@
             <a:r>
               <a:rPr lang="en-US" sz="1050" b="1" spc="200" kern="0" dirty="0">
                 <a:solidFill>
-                  <a:srgbClr val="6E7895"/>
+                  <a:srgbClr val="6B7C88"/>
                 </a:solidFill>
                 <a:latin typeface="Calibri" pitchFamily="34" charset="0"/>
                 <a:ea typeface="Calibri" pitchFamily="34" charset="-122"/>
@@ -9044,7 +9029,7 @@
             <a:avLst/>
           </a:prstGeom>
           <a:solidFill>
-            <a:srgbClr val="0F1B2D"/>
+            <a:srgbClr val="24343F"/>
           </a:solidFill>
           <a:ln/>
         </p:spPr>
@@ -9100,11 +9085,11 @@
             <a:r>
               <a:rPr lang="en-US" sz="3000" b="1" dirty="0">
                 <a:solidFill>
-                  <a:srgbClr val="0F1B2D"/>
+                  <a:srgbClr val="24343F"/>
                 </a:solidFill>
-                <a:latin typeface="Georgia" pitchFamily="34" charset="0"/>
-                <a:ea typeface="Georgia" pitchFamily="34" charset="-122"/>
-                <a:cs typeface="Georgia" pitchFamily="34" charset="-120"/>
+                <a:latin typeface="Trebuchet MS" pitchFamily="34" charset="0"/>
+                <a:ea typeface="Trebuchet MS" pitchFamily="34" charset="-122"/>
+                <a:cs typeface="Trebuchet MS" pitchFamily="34" charset="-120"/>
               </a:rPr>
               <a:t>Volume and cost are not the same picture</a:t>
             </a:r>
@@ -9127,7 +9112,7 @@
             <a:avLst/>
           </a:prstGeom>
           <a:solidFill>
-            <a:srgbClr val="EDF4FE"/>
+            <a:srgbClr val="EFF5F9"/>
           </a:solidFill>
           <a:ln/>
         </p:spPr>
@@ -9193,7 +9178,7 @@
             <a:r>
               <a:rPr lang="en-US" sz="1300" dirty="0">
                 <a:solidFill>
-                  <a:srgbClr val="1C2440"/>
+                  <a:srgbClr val="1B2730"/>
                 </a:solidFill>
                 <a:latin typeface="Calibri" pitchFamily="34" charset="0"/>
                 <a:ea typeface="Calibri" pitchFamily="34" charset="-122"/>
@@ -9222,7 +9207,7 @@
           <a:noFill/>
           <a:ln w="12700">
             <a:solidFill>
-              <a:srgbClr val="DCE2F0"/>
+              <a:srgbClr val="D9E3EA"/>
             </a:solidFill>
             <a:prstDash val="solid"/>
           </a:ln>
@@ -9283,7 +9268,7 @@
             <a:r>
               <a:rPr lang="en-US" sz="850" dirty="0">
                 <a:solidFill>
-                  <a:srgbClr val="6E7895"/>
+                  <a:srgbClr val="6B7C88"/>
                 </a:solidFill>
                 <a:latin typeface="Calibri" pitchFamily="34" charset="0"/>
                 <a:ea typeface="Calibri" pitchFamily="34" charset="-122"/>
@@ -9346,7 +9331,7 @@
                   <a:tcPr marL="76200" marR="76200" marT="38100" marB="38100" anchor="ctr">
                     <a:lnL w="12700" cap="flat" cmpd="sng" algn="ctr">
                       <a:solidFill>
-                        <a:srgbClr val="DCE2F0"/>
+                        <a:srgbClr val="D9E3EA"/>
                       </a:solidFill>
                       <a:prstDash val="solid"/>
                       <a:round/>
@@ -9355,7 +9340,7 @@
                     </a:lnL>
                     <a:lnR w="12700" cap="flat" cmpd="sng" algn="ctr">
                       <a:solidFill>
-                        <a:srgbClr val="DCE2F0"/>
+                        <a:srgbClr val="D9E3EA"/>
                       </a:solidFill>
                       <a:prstDash val="solid"/>
                       <a:round/>
@@ -9364,7 +9349,7 @@
                     </a:lnR>
                     <a:lnT w="12700" cap="flat" cmpd="sng" algn="ctr">
                       <a:solidFill>
-                        <a:srgbClr val="DCE2F0"/>
+                        <a:srgbClr val="D9E3EA"/>
                       </a:solidFill>
                       <a:prstDash val="solid"/>
                       <a:round/>
@@ -9373,7 +9358,7 @@
                     </a:lnT>
                     <a:lnB w="12700" cap="flat" cmpd="sng" algn="ctr">
                       <a:solidFill>
-                        <a:srgbClr val="DCE2F0"/>
+                        <a:srgbClr val="D9E3EA"/>
                       </a:solidFill>
                       <a:prstDash val="solid"/>
                       <a:round/>
@@ -9381,7 +9366,7 @@
                       <a:tailEnd type="none" w="med" len="med"/>
                     </a:lnB>
                     <a:solidFill>
-                      <a:srgbClr val="24405E"/>
+                      <a:srgbClr val="445A69"/>
                     </a:solidFill>
                   </a:tcPr>
                 </a:tc>
@@ -9407,7 +9392,7 @@
                   <a:tcPr marL="76200" marR="76200" marT="38100" marB="38100" anchor="ctr">
                     <a:lnL w="12700" cap="flat" cmpd="sng" algn="ctr">
                       <a:solidFill>
-                        <a:srgbClr val="DCE2F0"/>
+                        <a:srgbClr val="D9E3EA"/>
                       </a:solidFill>
                       <a:prstDash val="solid"/>
                       <a:round/>
@@ -9416,7 +9401,7 @@
                     </a:lnL>
                     <a:lnR w="12700" cap="flat" cmpd="sng" algn="ctr">
                       <a:solidFill>
-                        <a:srgbClr val="DCE2F0"/>
+                        <a:srgbClr val="D9E3EA"/>
                       </a:solidFill>
                       <a:prstDash val="solid"/>
                       <a:round/>
@@ -9425,7 +9410,7 @@
                     </a:lnR>
                     <a:lnT w="12700" cap="flat" cmpd="sng" algn="ctr">
                       <a:solidFill>
-                        <a:srgbClr val="DCE2F0"/>
+                        <a:srgbClr val="D9E3EA"/>
                       </a:solidFill>
                       <a:prstDash val="solid"/>
                       <a:round/>
@@ -9434,7 +9419,7 @@
                     </a:lnT>
                     <a:lnB w="12700" cap="flat" cmpd="sng" algn="ctr">
                       <a:solidFill>
-                        <a:srgbClr val="DCE2F0"/>
+                        <a:srgbClr val="D9E3EA"/>
                       </a:solidFill>
                       <a:prstDash val="solid"/>
                       <a:round/>
@@ -9442,7 +9427,7 @@
                       <a:tailEnd type="none" w="med" len="med"/>
                     </a:lnB>
                     <a:solidFill>
-                      <a:srgbClr val="24405E"/>
+                      <a:srgbClr val="445A69"/>
                     </a:solidFill>
                   </a:tcPr>
                 </a:tc>
@@ -9468,7 +9453,7 @@
                   <a:tcPr marL="76200" marR="76200" marT="38100" marB="38100" anchor="ctr">
                     <a:lnL w="12700" cap="flat" cmpd="sng" algn="ctr">
                       <a:solidFill>
-                        <a:srgbClr val="DCE2F0"/>
+                        <a:srgbClr val="D9E3EA"/>
                       </a:solidFill>
                       <a:prstDash val="solid"/>
                       <a:round/>
@@ -9477,7 +9462,7 @@
                     </a:lnL>
                     <a:lnR w="12700" cap="flat" cmpd="sng" algn="ctr">
                       <a:solidFill>
-                        <a:srgbClr val="DCE2F0"/>
+                        <a:srgbClr val="D9E3EA"/>
                       </a:solidFill>
                       <a:prstDash val="solid"/>
                       <a:round/>
@@ -9486,7 +9471,7 @@
                     </a:lnR>
                     <a:lnT w="12700" cap="flat" cmpd="sng" algn="ctr">
                       <a:solidFill>
-                        <a:srgbClr val="DCE2F0"/>
+                        <a:srgbClr val="D9E3EA"/>
                       </a:solidFill>
                       <a:prstDash val="solid"/>
                       <a:round/>
@@ -9495,7 +9480,7 @@
                     </a:lnT>
                     <a:lnB w="12700" cap="flat" cmpd="sng" algn="ctr">
                       <a:solidFill>
-                        <a:srgbClr val="DCE2F0"/>
+                        <a:srgbClr val="D9E3EA"/>
                       </a:solidFill>
                       <a:prstDash val="solid"/>
                       <a:round/>
@@ -9503,7 +9488,7 @@
                       <a:tailEnd type="none" w="med" len="med"/>
                     </a:lnB>
                     <a:solidFill>
-                      <a:srgbClr val="24405E"/>
+                      <a:srgbClr val="445A69"/>
                     </a:solidFill>
                   </a:tcPr>
                 </a:tc>
@@ -9529,7 +9514,7 @@
                   <a:tcPr marL="76200" marR="76200" marT="38100" marB="38100" anchor="ctr">
                     <a:lnL w="12700" cap="flat" cmpd="sng" algn="ctr">
                       <a:solidFill>
-                        <a:srgbClr val="DCE2F0"/>
+                        <a:srgbClr val="D9E3EA"/>
                       </a:solidFill>
                       <a:prstDash val="solid"/>
                       <a:round/>
@@ -9538,7 +9523,7 @@
                     </a:lnL>
                     <a:lnR w="12700" cap="flat" cmpd="sng" algn="ctr">
                       <a:solidFill>
-                        <a:srgbClr val="DCE2F0"/>
+                        <a:srgbClr val="D9E3EA"/>
                       </a:solidFill>
                       <a:prstDash val="solid"/>
                       <a:round/>
@@ -9547,7 +9532,7 @@
                     </a:lnR>
                     <a:lnT w="12700" cap="flat" cmpd="sng" algn="ctr">
                       <a:solidFill>
-                        <a:srgbClr val="DCE2F0"/>
+                        <a:srgbClr val="D9E3EA"/>
                       </a:solidFill>
                       <a:prstDash val="solid"/>
                       <a:round/>
@@ -9556,7 +9541,7 @@
                     </a:lnT>
                     <a:lnB w="12700" cap="flat" cmpd="sng" algn="ctr">
                       <a:solidFill>
-                        <a:srgbClr val="DCE2F0"/>
+                        <a:srgbClr val="D9E3EA"/>
                       </a:solidFill>
                       <a:prstDash val="solid"/>
                       <a:round/>
@@ -9564,7 +9549,7 @@
                       <a:tailEnd type="none" w="med" len="med"/>
                     </a:lnB>
                     <a:solidFill>
-                      <a:srgbClr val="24405E"/>
+                      <a:srgbClr val="445A69"/>
                     </a:solidFill>
                   </a:tcPr>
                 </a:tc>
@@ -9581,7 +9566,7 @@
                       <a:r>
                         <a:rPr lang="en-US" sz="1050" b="1" dirty="0">
                           <a:solidFill>
-                            <a:srgbClr val="0F1B2D"/>
+                            <a:srgbClr val="24343F"/>
                           </a:solidFill>
                         </a:rPr>
                         <a:t>Checking or savings</a:t>
@@ -9592,7 +9577,7 @@
                   <a:tcPr marL="76200" marR="76200" marT="38100" marB="38100" anchor="ctr">
                     <a:lnL w="12700" cap="flat" cmpd="sng" algn="ctr">
                       <a:solidFill>
-                        <a:srgbClr val="DCE2F0"/>
+                        <a:srgbClr val="D9E3EA"/>
                       </a:solidFill>
                       <a:prstDash val="solid"/>
                       <a:round/>
@@ -9601,7 +9586,7 @@
                     </a:lnL>
                     <a:lnR w="12700" cap="flat" cmpd="sng" algn="ctr">
                       <a:solidFill>
-                        <a:srgbClr val="DCE2F0"/>
+                        <a:srgbClr val="D9E3EA"/>
                       </a:solidFill>
                       <a:prstDash val="solid"/>
                       <a:round/>
@@ -9610,7 +9595,7 @@
                     </a:lnR>
                     <a:lnT w="12700" cap="flat" cmpd="sng" algn="ctr">
                       <a:solidFill>
-                        <a:srgbClr val="DCE2F0"/>
+                        <a:srgbClr val="D9E3EA"/>
                       </a:solidFill>
                       <a:prstDash val="solid"/>
                       <a:round/>
@@ -9619,7 +9604,7 @@
                     </a:lnT>
                     <a:lnB w="12700" cap="flat" cmpd="sng" algn="ctr">
                       <a:solidFill>
-                        <a:srgbClr val="DCE2F0"/>
+                        <a:srgbClr val="D9E3EA"/>
                       </a:solidFill>
                       <a:prstDash val="solid"/>
                       <a:round/>
@@ -9642,7 +9627,7 @@
                       <a:r>
                         <a:rPr lang="en-US" sz="1050" dirty="0">
                           <a:solidFill>
-                            <a:srgbClr val="1C2440"/>
+                            <a:srgbClr val="1B2730"/>
                           </a:solidFill>
                         </a:rPr>
                         <a:t>5,835</a:t>
@@ -9653,7 +9638,7 @@
                   <a:tcPr marL="76200" marR="76200" marT="38100" marB="38100" anchor="ctr">
                     <a:lnL w="12700" cap="flat" cmpd="sng" algn="ctr">
                       <a:solidFill>
-                        <a:srgbClr val="DCE2F0"/>
+                        <a:srgbClr val="D9E3EA"/>
                       </a:solidFill>
                       <a:prstDash val="solid"/>
                       <a:round/>
@@ -9662,7 +9647,7 @@
                     </a:lnL>
                     <a:lnR w="12700" cap="flat" cmpd="sng" algn="ctr">
                       <a:solidFill>
-                        <a:srgbClr val="DCE2F0"/>
+                        <a:srgbClr val="D9E3EA"/>
                       </a:solidFill>
                       <a:prstDash val="solid"/>
                       <a:round/>
@@ -9671,7 +9656,7 @@
                     </a:lnR>
                     <a:lnT w="12700" cap="flat" cmpd="sng" algn="ctr">
                       <a:solidFill>
-                        <a:srgbClr val="DCE2F0"/>
+                        <a:srgbClr val="D9E3EA"/>
                       </a:solidFill>
                       <a:prstDash val="solid"/>
                       <a:round/>
@@ -9680,7 +9665,7 @@
                     </a:lnT>
                     <a:lnB w="12700" cap="flat" cmpd="sng" algn="ctr">
                       <a:solidFill>
-                        <a:srgbClr val="DCE2F0"/>
+                        <a:srgbClr val="D9E3EA"/>
                       </a:solidFill>
                       <a:prstDash val="solid"/>
                       <a:round/>
@@ -9703,7 +9688,7 @@
                       <a:r>
                         <a:rPr lang="en-US" sz="1050" dirty="0">
                           <a:solidFill>
-                            <a:srgbClr val="1C2440"/>
+                            <a:srgbClr val="1B2730"/>
                           </a:solidFill>
                         </a:rPr>
                         <a:t>34.7%</a:t>
@@ -9714,7 +9699,7 @@
                   <a:tcPr marL="76200" marR="76200" marT="38100" marB="38100" anchor="ctr">
                     <a:lnL w="12700" cap="flat" cmpd="sng" algn="ctr">
                       <a:solidFill>
-                        <a:srgbClr val="DCE2F0"/>
+                        <a:srgbClr val="D9E3EA"/>
                       </a:solidFill>
                       <a:prstDash val="solid"/>
                       <a:round/>
@@ -9723,7 +9708,7 @@
                     </a:lnL>
                     <a:lnR w="12700" cap="flat" cmpd="sng" algn="ctr">
                       <a:solidFill>
-                        <a:srgbClr val="DCE2F0"/>
+                        <a:srgbClr val="D9E3EA"/>
                       </a:solidFill>
                       <a:prstDash val="solid"/>
                       <a:round/>
@@ -9732,7 +9717,7 @@
                     </a:lnR>
                     <a:lnT w="12700" cap="flat" cmpd="sng" algn="ctr">
                       <a:solidFill>
-                        <a:srgbClr val="DCE2F0"/>
+                        <a:srgbClr val="D9E3EA"/>
                       </a:solidFill>
                       <a:prstDash val="solid"/>
                       <a:round/>
@@ -9741,7 +9726,7 @@
                     </a:lnT>
                     <a:lnB w="12700" cap="flat" cmpd="sng" algn="ctr">
                       <a:solidFill>
-                        <a:srgbClr val="DCE2F0"/>
+                        <a:srgbClr val="D9E3EA"/>
                       </a:solidFill>
                       <a:prstDash val="solid"/>
                       <a:round/>
@@ -9764,7 +9749,7 @@
                       <a:r>
                         <a:rPr lang="en-US" sz="1050" dirty="0">
                           <a:solidFill>
-                            <a:srgbClr val="1C2440"/>
+                            <a:srgbClr val="1B2730"/>
                           </a:solidFill>
                         </a:rPr>
                         <a:t>14.0%</a:t>
@@ -9775,7 +9760,7 @@
                   <a:tcPr marL="76200" marR="76200" marT="38100" marB="38100" anchor="ctr">
                     <a:lnL w="12700" cap="flat" cmpd="sng" algn="ctr">
                       <a:solidFill>
-                        <a:srgbClr val="DCE2F0"/>
+                        <a:srgbClr val="D9E3EA"/>
                       </a:solidFill>
                       <a:prstDash val="solid"/>
                       <a:round/>
@@ -9784,7 +9769,7 @@
                     </a:lnL>
                     <a:lnR w="12700" cap="flat" cmpd="sng" algn="ctr">
                       <a:solidFill>
-                        <a:srgbClr val="DCE2F0"/>
+                        <a:srgbClr val="D9E3EA"/>
                       </a:solidFill>
                       <a:prstDash val="solid"/>
                       <a:round/>
@@ -9793,7 +9778,7 @@
                     </a:lnR>
                     <a:lnT w="12700" cap="flat" cmpd="sng" algn="ctr">
                       <a:solidFill>
-                        <a:srgbClr val="DCE2F0"/>
+                        <a:srgbClr val="D9E3EA"/>
                       </a:solidFill>
                       <a:prstDash val="solid"/>
                       <a:round/>
@@ -9802,7 +9787,7 @@
                     </a:lnT>
                     <a:lnB w="12700" cap="flat" cmpd="sng" algn="ctr">
                       <a:solidFill>
-                        <a:srgbClr val="DCE2F0"/>
+                        <a:srgbClr val="D9E3EA"/>
                       </a:solidFill>
                       <a:prstDash val="solid"/>
                       <a:round/>
@@ -9827,7 +9812,7 @@
                       <a:r>
                         <a:rPr lang="en-US" sz="1050" b="1" dirty="0">
                           <a:solidFill>
-                            <a:srgbClr val="0F1B2D"/>
+                            <a:srgbClr val="24343F"/>
                           </a:solidFill>
                         </a:rPr>
                         <a:t>Credit card</a:t>
@@ -9838,7 +9823,7 @@
                   <a:tcPr marL="76200" marR="76200" marT="38100" marB="38100" anchor="ctr">
                     <a:lnL w="12700" cap="flat" cmpd="sng" algn="ctr">
                       <a:solidFill>
-                        <a:srgbClr val="DCE2F0"/>
+                        <a:srgbClr val="D9E3EA"/>
                       </a:solidFill>
                       <a:prstDash val="solid"/>
                       <a:round/>
@@ -9847,7 +9832,7 @@
                     </a:lnL>
                     <a:lnR w="12700" cap="flat" cmpd="sng" algn="ctr">
                       <a:solidFill>
-                        <a:srgbClr val="DCE2F0"/>
+                        <a:srgbClr val="D9E3EA"/>
                       </a:solidFill>
                       <a:prstDash val="solid"/>
                       <a:round/>
@@ -9856,7 +9841,7 @@
                     </a:lnR>
                     <a:lnT w="12700" cap="flat" cmpd="sng" algn="ctr">
                       <a:solidFill>
-                        <a:srgbClr val="DCE2F0"/>
+                        <a:srgbClr val="D9E3EA"/>
                       </a:solidFill>
                       <a:prstDash val="solid"/>
                       <a:round/>
@@ -9865,7 +9850,7 @@
                     </a:lnT>
                     <a:lnB w="12700" cap="flat" cmpd="sng" algn="ctr">
                       <a:solidFill>
-                        <a:srgbClr val="DCE2F0"/>
+                        <a:srgbClr val="D9E3EA"/>
                       </a:solidFill>
                       <a:prstDash val="solid"/>
                       <a:round/>
@@ -9888,7 +9873,7 @@
                       <a:r>
                         <a:rPr lang="en-US" sz="1050" dirty="0">
                           <a:solidFill>
-                            <a:srgbClr val="1C2440"/>
+                            <a:srgbClr val="1B2730"/>
                           </a:solidFill>
                         </a:rPr>
                         <a:t>5,382</a:t>
@@ -9899,7 +9884,7 @@
                   <a:tcPr marL="76200" marR="76200" marT="38100" marB="38100" anchor="ctr">
                     <a:lnL w="12700" cap="flat" cmpd="sng" algn="ctr">
                       <a:solidFill>
-                        <a:srgbClr val="DCE2F0"/>
+                        <a:srgbClr val="D9E3EA"/>
                       </a:solidFill>
                       <a:prstDash val="solid"/>
                       <a:round/>
@@ -9908,7 +9893,7 @@
                     </a:lnL>
                     <a:lnR w="12700" cap="flat" cmpd="sng" algn="ctr">
                       <a:solidFill>
-                        <a:srgbClr val="DCE2F0"/>
+                        <a:srgbClr val="D9E3EA"/>
                       </a:solidFill>
                       <a:prstDash val="solid"/>
                       <a:round/>
@@ -9917,7 +9902,7 @@
                     </a:lnR>
                     <a:lnT w="12700" cap="flat" cmpd="sng" algn="ctr">
                       <a:solidFill>
-                        <a:srgbClr val="DCE2F0"/>
+                        <a:srgbClr val="D9E3EA"/>
                       </a:solidFill>
                       <a:prstDash val="solid"/>
                       <a:round/>
@@ -9926,7 +9911,7 @@
                     </a:lnT>
                     <a:lnB w="12700" cap="flat" cmpd="sng" algn="ctr">
                       <a:solidFill>
-                        <a:srgbClr val="DCE2F0"/>
+                        <a:srgbClr val="D9E3EA"/>
                       </a:solidFill>
                       <a:prstDash val="solid"/>
                       <a:round/>
@@ -9949,7 +9934,7 @@
                       <a:r>
                         <a:rPr lang="en-US" sz="1050" dirty="0">
                           <a:solidFill>
-                            <a:srgbClr val="1C2440"/>
+                            <a:srgbClr val="1B2730"/>
                           </a:solidFill>
                         </a:rPr>
                         <a:t>32.0%</a:t>
@@ -9960,7 +9945,7 @@
                   <a:tcPr marL="76200" marR="76200" marT="38100" marB="38100" anchor="ctr">
                     <a:lnL w="12700" cap="flat" cmpd="sng" algn="ctr">
                       <a:solidFill>
-                        <a:srgbClr val="DCE2F0"/>
+                        <a:srgbClr val="D9E3EA"/>
                       </a:solidFill>
                       <a:prstDash val="solid"/>
                       <a:round/>
@@ -9969,7 +9954,7 @@
                     </a:lnL>
                     <a:lnR w="12700" cap="flat" cmpd="sng" algn="ctr">
                       <a:solidFill>
-                        <a:srgbClr val="DCE2F0"/>
+                        <a:srgbClr val="D9E3EA"/>
                       </a:solidFill>
                       <a:prstDash val="solid"/>
                       <a:round/>
@@ -9978,7 +9963,7 @@
                     </a:lnR>
                     <a:lnT w="12700" cap="flat" cmpd="sng" algn="ctr">
                       <a:solidFill>
-                        <a:srgbClr val="DCE2F0"/>
+                        <a:srgbClr val="D9E3EA"/>
                       </a:solidFill>
                       <a:prstDash val="solid"/>
                       <a:round/>
@@ -9987,7 +9972,7 @@
                     </a:lnT>
                     <a:lnB w="12700" cap="flat" cmpd="sng" algn="ctr">
                       <a:solidFill>
-                        <a:srgbClr val="DCE2F0"/>
+                        <a:srgbClr val="D9E3EA"/>
                       </a:solidFill>
                       <a:prstDash val="solid"/>
                       <a:round/>
@@ -10010,7 +9995,7 @@
                       <a:r>
                         <a:rPr lang="en-US" sz="1050" dirty="0">
                           <a:solidFill>
-                            <a:srgbClr val="1C2440"/>
+                            <a:srgbClr val="1B2730"/>
                           </a:solidFill>
                         </a:rPr>
                         <a:t>17.2%</a:t>
@@ -10021,7 +10006,7 @@
                   <a:tcPr marL="76200" marR="76200" marT="38100" marB="38100" anchor="ctr">
                     <a:lnL w="12700" cap="flat" cmpd="sng" algn="ctr">
                       <a:solidFill>
-                        <a:srgbClr val="DCE2F0"/>
+                        <a:srgbClr val="D9E3EA"/>
                       </a:solidFill>
                       <a:prstDash val="solid"/>
                       <a:round/>
@@ -10030,7 +10015,7 @@
                     </a:lnL>
                     <a:lnR w="12700" cap="flat" cmpd="sng" algn="ctr">
                       <a:solidFill>
-                        <a:srgbClr val="DCE2F0"/>
+                        <a:srgbClr val="D9E3EA"/>
                       </a:solidFill>
                       <a:prstDash val="solid"/>
                       <a:round/>
@@ -10039,7 +10024,7 @@
                     </a:lnR>
                     <a:lnT w="12700" cap="flat" cmpd="sng" algn="ctr">
                       <a:solidFill>
-                        <a:srgbClr val="DCE2F0"/>
+                        <a:srgbClr val="D9E3EA"/>
                       </a:solidFill>
                       <a:prstDash val="solid"/>
                       <a:round/>
@@ -10048,7 +10033,7 @@
                     </a:lnT>
                     <a:lnB w="12700" cap="flat" cmpd="sng" algn="ctr">
                       <a:solidFill>
-                        <a:srgbClr val="DCE2F0"/>
+                        <a:srgbClr val="D9E3EA"/>
                       </a:solidFill>
                       <a:prstDash val="solid"/>
                       <a:round/>
@@ -10073,7 +10058,7 @@
                       <a:r>
                         <a:rPr lang="en-US" sz="1050" b="1" dirty="0">
                           <a:solidFill>
-                            <a:srgbClr val="0F1B2D"/>
+                            <a:srgbClr val="24343F"/>
                           </a:solidFill>
                         </a:rPr>
                         <a:t>Money transfer</a:t>
@@ -10084,7 +10069,7 @@
                   <a:tcPr marL="76200" marR="76200" marT="38100" marB="38100" anchor="ctr">
                     <a:lnL w="12700" cap="flat" cmpd="sng" algn="ctr">
                       <a:solidFill>
-                        <a:srgbClr val="DCE2F0"/>
+                        <a:srgbClr val="D9E3EA"/>
                       </a:solidFill>
                       <a:prstDash val="solid"/>
                       <a:round/>
@@ -10093,7 +10078,7 @@
                     </a:lnL>
                     <a:lnR w="12700" cap="flat" cmpd="sng" algn="ctr">
                       <a:solidFill>
-                        <a:srgbClr val="DCE2F0"/>
+                        <a:srgbClr val="D9E3EA"/>
                       </a:solidFill>
                       <a:prstDash val="solid"/>
                       <a:round/>
@@ -10102,7 +10087,7 @@
                     </a:lnR>
                     <a:lnT w="12700" cap="flat" cmpd="sng" algn="ctr">
                       <a:solidFill>
-                        <a:srgbClr val="DCE2F0"/>
+                        <a:srgbClr val="D9E3EA"/>
                       </a:solidFill>
                       <a:prstDash val="solid"/>
                       <a:round/>
@@ -10111,7 +10096,7 @@
                     </a:lnT>
                     <a:lnB w="12700" cap="flat" cmpd="sng" algn="ctr">
                       <a:solidFill>
-                        <a:srgbClr val="DCE2F0"/>
+                        <a:srgbClr val="D9E3EA"/>
                       </a:solidFill>
                       <a:prstDash val="solid"/>
                       <a:round/>
@@ -10134,7 +10119,7 @@
                       <a:r>
                         <a:rPr lang="en-US" sz="1050" dirty="0">
                           <a:solidFill>
-                            <a:srgbClr val="1C2440"/>
+                            <a:srgbClr val="1B2730"/>
                           </a:solidFill>
                         </a:rPr>
                         <a:t>2,551</a:t>
@@ -10145,7 +10130,7 @@
                   <a:tcPr marL="76200" marR="76200" marT="38100" marB="38100" anchor="ctr">
                     <a:lnL w="12700" cap="flat" cmpd="sng" algn="ctr">
                       <a:solidFill>
-                        <a:srgbClr val="DCE2F0"/>
+                        <a:srgbClr val="D9E3EA"/>
                       </a:solidFill>
                       <a:prstDash val="solid"/>
                       <a:round/>
@@ -10154,7 +10139,7 @@
                     </a:lnL>
                     <a:lnR w="12700" cap="flat" cmpd="sng" algn="ctr">
                       <a:solidFill>
-                        <a:srgbClr val="DCE2F0"/>
+                        <a:srgbClr val="D9E3EA"/>
                       </a:solidFill>
                       <a:prstDash val="solid"/>
                       <a:round/>
@@ -10163,7 +10148,7 @@
                     </a:lnR>
                     <a:lnT w="12700" cap="flat" cmpd="sng" algn="ctr">
                       <a:solidFill>
-                        <a:srgbClr val="DCE2F0"/>
+                        <a:srgbClr val="D9E3EA"/>
                       </a:solidFill>
                       <a:prstDash val="solid"/>
                       <a:round/>
@@ -10172,7 +10157,7 @@
                     </a:lnT>
                     <a:lnB w="12700" cap="flat" cmpd="sng" algn="ctr">
                       <a:solidFill>
-                        <a:srgbClr val="DCE2F0"/>
+                        <a:srgbClr val="D9E3EA"/>
                       </a:solidFill>
                       <a:prstDash val="solid"/>
                       <a:round/>
@@ -10195,7 +10180,7 @@
                       <a:r>
                         <a:rPr lang="en-US" sz="1050" dirty="0">
                           <a:solidFill>
-                            <a:srgbClr val="1C2440"/>
+                            <a:srgbClr val="1B2730"/>
                           </a:solidFill>
                         </a:rPr>
                         <a:t>15.1%</a:t>
@@ -10206,7 +10191,7 @@
                   <a:tcPr marL="76200" marR="76200" marT="38100" marB="38100" anchor="ctr">
                     <a:lnL w="12700" cap="flat" cmpd="sng" algn="ctr">
                       <a:solidFill>
-                        <a:srgbClr val="DCE2F0"/>
+                        <a:srgbClr val="D9E3EA"/>
                       </a:solidFill>
                       <a:prstDash val="solid"/>
                       <a:round/>
@@ -10215,7 +10200,7 @@
                     </a:lnL>
                     <a:lnR w="12700" cap="flat" cmpd="sng" algn="ctr">
                       <a:solidFill>
-                        <a:srgbClr val="DCE2F0"/>
+                        <a:srgbClr val="D9E3EA"/>
                       </a:solidFill>
                       <a:prstDash val="solid"/>
                       <a:round/>
@@ -10224,7 +10209,7 @@
                     </a:lnR>
                     <a:lnT w="12700" cap="flat" cmpd="sng" algn="ctr">
                       <a:solidFill>
-                        <a:srgbClr val="DCE2F0"/>
+                        <a:srgbClr val="D9E3EA"/>
                       </a:solidFill>
                       <a:prstDash val="solid"/>
                       <a:round/>
@@ -10233,7 +10218,7 @@
                     </a:lnT>
                     <a:lnB w="12700" cap="flat" cmpd="sng" algn="ctr">
                       <a:solidFill>
-                        <a:srgbClr val="DCE2F0"/>
+                        <a:srgbClr val="D9E3EA"/>
                       </a:solidFill>
                       <a:prstDash val="solid"/>
                       <a:round/>
@@ -10256,7 +10241,7 @@
                       <a:r>
                         <a:rPr lang="en-US" sz="1050" dirty="0">
                           <a:solidFill>
-                            <a:srgbClr val="1C2440"/>
+                            <a:srgbClr val="1B2730"/>
                           </a:solidFill>
                         </a:rPr>
                         <a:t>10.6%</a:t>
@@ -10267,7 +10252,7 @@
                   <a:tcPr marL="76200" marR="76200" marT="38100" marB="38100" anchor="ctr">
                     <a:lnL w="12700" cap="flat" cmpd="sng" algn="ctr">
                       <a:solidFill>
-                        <a:srgbClr val="DCE2F0"/>
+                        <a:srgbClr val="D9E3EA"/>
                       </a:solidFill>
                       <a:prstDash val="solid"/>
                       <a:round/>
@@ -10276,7 +10261,7 @@
                     </a:lnL>
                     <a:lnR w="12700" cap="flat" cmpd="sng" algn="ctr">
                       <a:solidFill>
-                        <a:srgbClr val="DCE2F0"/>
+                        <a:srgbClr val="D9E3EA"/>
                       </a:solidFill>
                       <a:prstDash val="solid"/>
                       <a:round/>
@@ -10285,7 +10270,7 @@
                     </a:lnR>
                     <a:lnT w="12700" cap="flat" cmpd="sng" algn="ctr">
                       <a:solidFill>
-                        <a:srgbClr val="DCE2F0"/>
+                        <a:srgbClr val="D9E3EA"/>
                       </a:solidFill>
                       <a:prstDash val="solid"/>
                       <a:round/>
@@ -10294,7 +10279,7 @@
                     </a:lnT>
                     <a:lnB w="12700" cap="flat" cmpd="sng" algn="ctr">
                       <a:solidFill>
-                        <a:srgbClr val="DCE2F0"/>
+                        <a:srgbClr val="D9E3EA"/>
                       </a:solidFill>
                       <a:prstDash val="solid"/>
                       <a:round/>
@@ -10319,7 +10304,7 @@
                       <a:r>
                         <a:rPr lang="en-US" sz="1050" b="1" dirty="0">
                           <a:solidFill>
-                            <a:srgbClr val="0F1B2D"/>
+                            <a:srgbClr val="24343F"/>
                           </a:solidFill>
                         </a:rPr>
                         <a:t>Vehicle loan</a:t>
@@ -10330,7 +10315,7 @@
                   <a:tcPr marL="76200" marR="76200" marT="38100" marB="38100" anchor="ctr">
                     <a:lnL w="12700" cap="flat" cmpd="sng" algn="ctr">
                       <a:solidFill>
-                        <a:srgbClr val="DCE2F0"/>
+                        <a:srgbClr val="D9E3EA"/>
                       </a:solidFill>
                       <a:prstDash val="solid"/>
                       <a:round/>
@@ -10339,7 +10324,7 @@
                     </a:lnL>
                     <a:lnR w="12700" cap="flat" cmpd="sng" algn="ctr">
                       <a:solidFill>
-                        <a:srgbClr val="DCE2F0"/>
+                        <a:srgbClr val="D9E3EA"/>
                       </a:solidFill>
                       <a:prstDash val="solid"/>
                       <a:round/>
@@ -10348,7 +10333,7 @@
                     </a:lnR>
                     <a:lnT w="12700" cap="flat" cmpd="sng" algn="ctr">
                       <a:solidFill>
-                        <a:srgbClr val="DCE2F0"/>
+                        <a:srgbClr val="D9E3EA"/>
                       </a:solidFill>
                       <a:prstDash val="solid"/>
                       <a:round/>
@@ -10357,7 +10342,7 @@
                     </a:lnT>
                     <a:lnB w="12700" cap="flat" cmpd="sng" algn="ctr">
                       <a:solidFill>
-                        <a:srgbClr val="DCE2F0"/>
+                        <a:srgbClr val="D9E3EA"/>
                       </a:solidFill>
                       <a:prstDash val="solid"/>
                       <a:round/>
@@ -10380,7 +10365,7 @@
                       <a:r>
                         <a:rPr lang="en-US" sz="1050" dirty="0">
                           <a:solidFill>
-                            <a:srgbClr val="1C2440"/>
+                            <a:srgbClr val="1B2730"/>
                           </a:solidFill>
                         </a:rPr>
                         <a:t>1,523</a:t>
@@ -10391,7 +10376,7 @@
                   <a:tcPr marL="76200" marR="76200" marT="38100" marB="38100" anchor="ctr">
                     <a:lnL w="12700" cap="flat" cmpd="sng" algn="ctr">
                       <a:solidFill>
-                        <a:srgbClr val="DCE2F0"/>
+                        <a:srgbClr val="D9E3EA"/>
                       </a:solidFill>
                       <a:prstDash val="solid"/>
                       <a:round/>
@@ -10400,7 +10385,7 @@
                     </a:lnL>
                     <a:lnR w="12700" cap="flat" cmpd="sng" algn="ctr">
                       <a:solidFill>
-                        <a:srgbClr val="DCE2F0"/>
+                        <a:srgbClr val="D9E3EA"/>
                       </a:solidFill>
                       <a:prstDash val="solid"/>
                       <a:round/>
@@ -10409,7 +10394,7 @@
                     </a:lnR>
                     <a:lnT w="12700" cap="flat" cmpd="sng" algn="ctr">
                       <a:solidFill>
-                        <a:srgbClr val="DCE2F0"/>
+                        <a:srgbClr val="D9E3EA"/>
                       </a:solidFill>
                       <a:prstDash val="solid"/>
                       <a:round/>
@@ -10418,7 +10403,7 @@
                     </a:lnT>
                     <a:lnB w="12700" cap="flat" cmpd="sng" algn="ctr">
                       <a:solidFill>
-                        <a:srgbClr val="DCE2F0"/>
+                        <a:srgbClr val="D9E3EA"/>
                       </a:solidFill>
                       <a:prstDash val="solid"/>
                       <a:round/>
@@ -10441,7 +10426,7 @@
                       <a:r>
                         <a:rPr lang="en-US" sz="1050" dirty="0">
                           <a:solidFill>
-                            <a:srgbClr val="1C2440"/>
+                            <a:srgbClr val="1B2730"/>
                           </a:solidFill>
                         </a:rPr>
                         <a:t>9.0%</a:t>
@@ -10452,7 +10437,7 @@
                   <a:tcPr marL="76200" marR="76200" marT="38100" marB="38100" anchor="ctr">
                     <a:lnL w="12700" cap="flat" cmpd="sng" algn="ctr">
                       <a:solidFill>
-                        <a:srgbClr val="DCE2F0"/>
+                        <a:srgbClr val="D9E3EA"/>
                       </a:solidFill>
                       <a:prstDash val="solid"/>
                       <a:round/>
@@ -10461,7 +10446,7 @@
                     </a:lnL>
                     <a:lnR w="12700" cap="flat" cmpd="sng" algn="ctr">
                       <a:solidFill>
-                        <a:srgbClr val="DCE2F0"/>
+                        <a:srgbClr val="D9E3EA"/>
                       </a:solidFill>
                       <a:prstDash val="solid"/>
                       <a:round/>
@@ -10470,7 +10455,7 @@
                     </a:lnR>
                     <a:lnT w="12700" cap="flat" cmpd="sng" algn="ctr">
                       <a:solidFill>
-                        <a:srgbClr val="DCE2F0"/>
+                        <a:srgbClr val="D9E3EA"/>
                       </a:solidFill>
                       <a:prstDash val="solid"/>
                       <a:round/>
@@ -10479,7 +10464,7 @@
                     </a:lnT>
                     <a:lnB w="12700" cap="flat" cmpd="sng" algn="ctr">
                       <a:solidFill>
-                        <a:srgbClr val="DCE2F0"/>
+                        <a:srgbClr val="D9E3EA"/>
                       </a:solidFill>
                       <a:prstDash val="solid"/>
                       <a:round/>
@@ -10502,7 +10487,7 @@
                       <a:r>
                         <a:rPr lang="en-US" sz="1050" dirty="0">
                           <a:solidFill>
-                            <a:srgbClr val="1C2440"/>
+                            <a:srgbClr val="1B2730"/>
                           </a:solidFill>
                         </a:rPr>
                         <a:t>3.0%</a:t>
@@ -10513,7 +10498,7 @@
                   <a:tcPr marL="76200" marR="76200" marT="38100" marB="38100" anchor="ctr">
                     <a:lnL w="12700" cap="flat" cmpd="sng" algn="ctr">
                       <a:solidFill>
-                        <a:srgbClr val="DCE2F0"/>
+                        <a:srgbClr val="D9E3EA"/>
                       </a:solidFill>
                       <a:prstDash val="solid"/>
                       <a:round/>
@@ -10522,7 +10507,7 @@
                     </a:lnL>
                     <a:lnR w="12700" cap="flat" cmpd="sng" algn="ctr">
                       <a:solidFill>
-                        <a:srgbClr val="DCE2F0"/>
+                        <a:srgbClr val="D9E3EA"/>
                       </a:solidFill>
                       <a:prstDash val="solid"/>
                       <a:round/>
@@ -10531,7 +10516,7 @@
                     </a:lnR>
                     <a:lnT w="12700" cap="flat" cmpd="sng" algn="ctr">
                       <a:solidFill>
-                        <a:srgbClr val="DCE2F0"/>
+                        <a:srgbClr val="D9E3EA"/>
                       </a:solidFill>
                       <a:prstDash val="solid"/>
                       <a:round/>
@@ -10540,7 +10525,7 @@
                     </a:lnT>
                     <a:lnB w="12700" cap="flat" cmpd="sng" algn="ctr">
                       <a:solidFill>
-                        <a:srgbClr val="DCE2F0"/>
+                        <a:srgbClr val="D9E3EA"/>
                       </a:solidFill>
                       <a:prstDash val="solid"/>
                       <a:round/>
@@ -10572,7 +10557,7 @@
             <a:avLst/>
           </a:prstGeom>
           <a:solidFill>
-            <a:srgbClr val="EDF4FE"/>
+            <a:srgbClr val="EFF5F9"/>
           </a:solidFill>
           <a:ln/>
         </p:spPr>
@@ -10695,7 +10680,7 @@
             <a:r>
               <a:rPr lang="en-US" sz="1050" b="1" spc="200" kern="0" dirty="0">
                 <a:solidFill>
-                  <a:srgbClr val="6E7895"/>
+                  <a:srgbClr val="6B7C88"/>
                 </a:solidFill>
                 <a:latin typeface="Calibri" pitchFamily="34" charset="0"/>
                 <a:ea typeface="Calibri" pitchFamily="34" charset="-122"/>
@@ -10722,7 +10707,7 @@
             <a:avLst/>
           </a:prstGeom>
           <a:solidFill>
-            <a:srgbClr val="0F1B2D"/>
+            <a:srgbClr val="24343F"/>
           </a:solidFill>
           <a:ln/>
         </p:spPr>
@@ -10778,11 +10763,11 @@
             <a:r>
               <a:rPr lang="en-US" sz="3000" b="1" dirty="0">
                 <a:solidFill>
-                  <a:srgbClr val="0F1B2D"/>
+                  <a:srgbClr val="24343F"/>
                 </a:solidFill>
-                <a:latin typeface="Georgia" pitchFamily="34" charset="0"/>
-                <a:ea typeface="Georgia" pitchFamily="34" charset="-122"/>
-                <a:cs typeface="Georgia" pitchFamily="34" charset="-120"/>
+                <a:latin typeface="Trebuchet MS" pitchFamily="34" charset="0"/>
+                <a:ea typeface="Trebuchet MS" pitchFamily="34" charset="-122"/>
+                <a:cs typeface="Trebuchet MS" pitchFamily="34" charset="-120"/>
               </a:rPr>
               <a:t>Five categories are half of everything that arrives</a:t>
             </a:r>
@@ -10805,7 +10790,7 @@
             <a:avLst/>
           </a:prstGeom>
           <a:solidFill>
-            <a:srgbClr val="EDF4FE"/>
+            <a:srgbClr val="EFF5F9"/>
           </a:solidFill>
           <a:ln/>
         </p:spPr>
@@ -10871,7 +10856,7 @@
             <a:r>
               <a:rPr lang="en-US" sz="1300" dirty="0">
                 <a:solidFill>
-                  <a:srgbClr val="1C2440"/>
+                  <a:srgbClr val="1B2730"/>
                 </a:solidFill>
                 <a:latin typeface="Calibri" pitchFamily="34" charset="0"/>
                 <a:ea typeface="Calibri" pitchFamily="34" charset="-122"/>
@@ -10900,7 +10885,7 @@
           <a:noFill/>
           <a:ln w="12700">
             <a:solidFill>
-              <a:srgbClr val="DCE2F0"/>
+              <a:srgbClr val="D9E3EA"/>
             </a:solidFill>
             <a:prstDash val="solid"/>
           </a:ln>
@@ -10961,7 +10946,7 @@
             <a:r>
               <a:rPr lang="en-US" sz="850" dirty="0">
                 <a:solidFill>
-                  <a:srgbClr val="6E7895"/>
+                  <a:srgbClr val="6B7C88"/>
                 </a:solidFill>
                 <a:latin typeface="Calibri" pitchFamily="34" charset="0"/>
                 <a:ea typeface="Calibri" pitchFamily="34" charset="-122"/>
@@ -10988,7 +10973,7 @@
             <a:avLst/>
           </a:prstGeom>
           <a:solidFill>
-            <a:srgbClr val="0F1B2D"/>
+            <a:srgbClr val="24343F"/>
           </a:solidFill>
           <a:ln/>
         </p:spPr>
@@ -11047,7 +11032,7 @@
             <a:avLst/>
           </a:prstGeom>
           <a:solidFill>
-            <a:srgbClr val="0F1B2D">
+            <a:srgbClr val="24343F">
               <a:alpha val="94000"/>
             </a:srgbClr>
           </a:solidFill>
@@ -11108,7 +11093,7 @@
             <a:avLst/>
           </a:prstGeom>
           <a:solidFill>
-            <a:srgbClr val="0F1B2D">
+            <a:srgbClr val="24343F">
               <a:alpha val="88000"/>
             </a:srgbClr>
           </a:solidFill>
@@ -11169,7 +11154,7 @@
             <a:avLst/>
           </a:prstGeom>
           <a:solidFill>
-            <a:srgbClr val="0F1B2D">
+            <a:srgbClr val="24343F">
               <a:alpha val="82000"/>
             </a:srgbClr>
           </a:solidFill>
@@ -11230,7 +11215,7 @@
             <a:avLst/>
           </a:prstGeom>
           <a:solidFill>
-            <a:srgbClr val="0F1B2D">
+            <a:srgbClr val="24343F">
               <a:alpha val="76000"/>
             </a:srgbClr>
           </a:solidFill>
@@ -11291,7 +11276,7 @@
             <a:avLst/>
           </a:prstGeom>
           <a:solidFill>
-            <a:srgbClr val="0F1B2D"/>
+            <a:srgbClr val="24343F"/>
           </a:solidFill>
           <a:ln/>
           <a:effectLst>
@@ -11332,9 +11317,9 @@
                 <a:solidFill>
                   <a:srgbClr val="2A78D6"/>
                 </a:solidFill>
-                <a:latin typeface="Georgia" pitchFamily="34" charset="0"/>
-                <a:ea typeface="Georgia" pitchFamily="34" charset="-122"/>
-                <a:cs typeface="Georgia" pitchFamily="34" charset="-120"/>
+                <a:latin typeface="Trebuchet MS" pitchFamily="34" charset="0"/>
+                <a:ea typeface="Trebuchet MS" pitchFamily="34" charset="-122"/>
+                <a:cs typeface="Trebuchet MS" pitchFamily="34" charset="-120"/>
               </a:rPr>
               <a:t>46.1%
 </a:t>
@@ -11357,7 +11342,7 @@
             <a:r>
               <a:rPr lang="en-US" sz="1200" i="1" dirty="0">
                 <a:solidFill>
-                  <a:srgbClr val="A8CBF2"/>
+                  <a:srgbClr val="8FBFF0"/>
                 </a:solidFill>
               </a:rPr>
               <a:t>That is what makes the scope small enough to be honest about.</a:t>
@@ -11425,7 +11410,7 @@
             <a:r>
               <a:rPr lang="en-US" sz="1050" b="1" spc="200" kern="0" dirty="0">
                 <a:solidFill>
-                  <a:srgbClr val="6E7895"/>
+                  <a:srgbClr val="6B7C88"/>
                 </a:solidFill>
                 <a:latin typeface="Calibri" pitchFamily="34" charset="0"/>
                 <a:ea typeface="Calibri" pitchFamily="34" charset="-122"/>
@@ -11452,7 +11437,7 @@
             <a:avLst/>
           </a:prstGeom>
           <a:solidFill>
-            <a:srgbClr val="0F1B2D"/>
+            <a:srgbClr val="24343F"/>
           </a:solidFill>
           <a:ln/>
         </p:spPr>
@@ -11508,11 +11493,11 @@
             <a:r>
               <a:rPr lang="en-US" sz="3000" b="1" dirty="0">
                 <a:solidFill>
-                  <a:srgbClr val="0F1B2D"/>
+                  <a:srgbClr val="24343F"/>
                 </a:solidFill>
-                <a:latin typeface="Georgia" pitchFamily="34" charset="0"/>
-                <a:ea typeface="Georgia" pitchFamily="34" charset="-122"/>
-                <a:cs typeface="Georgia" pitchFamily="34" charset="-120"/>
+                <a:latin typeface="Trebuchet MS" pitchFamily="34" charset="0"/>
+                <a:ea typeface="Trebuchet MS" pitchFamily="34" charset="-122"/>
+                <a:cs typeface="Trebuchet MS" pitchFamily="34" charset="-120"/>
               </a:rPr>
               <a:t>You can watch it decide — and every branch ends at a person</a:t>
             </a:r>
@@ -11535,7 +11520,7 @@
             <a:avLst/>
           </a:prstGeom>
           <a:solidFill>
-            <a:srgbClr val="EDF4FE"/>
+            <a:srgbClr val="EFF5F9"/>
           </a:solidFill>
           <a:ln/>
         </p:spPr>
@@ -11601,7 +11586,7 @@
             <a:r>
               <a:rPr lang="en-US" sz="1300" dirty="0">
                 <a:solidFill>
-                  <a:srgbClr val="1C2440"/>
+                  <a:srgbClr val="1B2730"/>
                 </a:solidFill>
                 <a:latin typeface="Calibri" pitchFamily="34" charset="0"/>
                 <a:ea typeface="Calibri" pitchFamily="34" charset="-122"/>
@@ -11630,7 +11615,7 @@
           <a:noFill/>
           <a:ln w="12700">
             <a:solidFill>
-              <a:srgbClr val="DCE2F0"/>
+              <a:srgbClr val="D9E3EA"/>
             </a:solidFill>
             <a:prstDash val="solid"/>
           </a:ln>
@@ -11691,7 +11676,7 @@
             <a:r>
               <a:rPr lang="en-US" sz="850" dirty="0">
                 <a:solidFill>
-                  <a:srgbClr val="6E7895"/>
+                  <a:srgbClr val="6B7C88"/>
                 </a:solidFill>
                 <a:latin typeface="Calibri" pitchFamily="34" charset="0"/>
                 <a:ea typeface="Calibri" pitchFamily="34" charset="-122"/>
@@ -11718,7 +11703,7 @@
             <a:avLst/>
           </a:prstGeom>
           <a:solidFill>
-            <a:srgbClr val="0F1B2D"/>
+            <a:srgbClr val="24343F"/>
           </a:solidFill>
           <a:ln/>
         </p:spPr>
@@ -11777,7 +11762,7 @@
             <a:avLst/>
           </a:prstGeom>
           <a:solidFill>
-            <a:srgbClr val="0F1B2D"/>
+            <a:srgbClr val="24343F"/>
           </a:solidFill>
           <a:ln/>
         </p:spPr>
@@ -11836,7 +11821,7 @@
             <a:avLst/>
           </a:prstGeom>
           <a:solidFill>
-            <a:srgbClr val="0F1B2D"/>
+            <a:srgbClr val="24343F"/>
           </a:solidFill>
           <a:ln/>
         </p:spPr>
@@ -11927,7 +11912,7 @@
             <a:r>
               <a:rPr lang="en-US" sz="1050" b="1" dirty="0">
                 <a:solidFill>
-                  <a:srgbClr val="141B33"/>
+                  <a:srgbClr val="1D2A32"/>
                 </a:solidFill>
                 <a:latin typeface="Calibri" pitchFamily="34" charset="0"/>
                 <a:ea typeface="Calibri" pitchFamily="34" charset="-122"/>
@@ -11954,7 +11939,7 @@
             <a:avLst/>
           </a:prstGeom>
           <a:solidFill>
-            <a:srgbClr val="EDF4FE"/>
+            <a:srgbClr val="EFF5F9"/>
           </a:solidFill>
           <a:ln/>
         </p:spPr>
@@ -12091,7 +12076,7 @@
             <a:r>
               <a:rPr lang="en-US" sz="1050" b="1" spc="200" kern="0" dirty="0">
                 <a:solidFill>
-                  <a:srgbClr val="6E7895"/>
+                  <a:srgbClr val="6B7C88"/>
                 </a:solidFill>
                 <a:latin typeface="Calibri" pitchFamily="34" charset="0"/>
                 <a:ea typeface="Calibri" pitchFamily="34" charset="-122"/>
@@ -12118,7 +12103,7 @@
             <a:avLst/>
           </a:prstGeom>
           <a:solidFill>
-            <a:srgbClr val="0F1B2D"/>
+            <a:srgbClr val="24343F"/>
           </a:solidFill>
           <a:ln/>
         </p:spPr>
@@ -12174,11 +12159,11 @@
             <a:r>
               <a:rPr lang="en-US" sz="3000" b="1" dirty="0">
                 <a:solidFill>
-                  <a:srgbClr val="0F1B2D"/>
+                  <a:srgbClr val="24343F"/>
                 </a:solidFill>
-                <a:latin typeface="Georgia" pitchFamily="34" charset="0"/>
-                <a:ea typeface="Georgia" pitchFamily="34" charset="-122"/>
-                <a:cs typeface="Georgia" pitchFamily="34" charset="-120"/>
+                <a:latin typeface="Trebuchet MS" pitchFamily="34" charset="0"/>
+                <a:ea typeface="Trebuchet MS" pitchFamily="34" charset="-122"/>
+                <a:cs typeface="Trebuchet MS" pitchFamily="34" charset="-120"/>
               </a:rPr>
               <a:t>It caught itself fabricating a reason — four times</a:t>
             </a:r>
@@ -12201,7 +12186,7 @@
             <a:avLst/>
           </a:prstGeom>
           <a:solidFill>
-            <a:srgbClr val="EDF4FE"/>
+            <a:srgbClr val="EFF5F9"/>
           </a:solidFill>
           <a:ln/>
         </p:spPr>
@@ -12267,7 +12252,7 @@
             <a:r>
               <a:rPr lang="en-US" sz="1300" dirty="0">
                 <a:solidFill>
-                  <a:srgbClr val="1C2440"/>
+                  <a:srgbClr val="1B2730"/>
                 </a:solidFill>
                 <a:latin typeface="Calibri" pitchFamily="34" charset="0"/>
                 <a:ea typeface="Calibri" pitchFamily="34" charset="-122"/>
@@ -12296,7 +12281,7 @@
           <a:noFill/>
           <a:ln w="12700">
             <a:solidFill>
-              <a:srgbClr val="DCE2F0"/>
+              <a:srgbClr val="D9E3EA"/>
             </a:solidFill>
             <a:prstDash val="solid"/>
           </a:ln>
@@ -12357,7 +12342,7 @@
             <a:r>
               <a:rPr lang="en-US" sz="850" dirty="0">
                 <a:solidFill>
-                  <a:srgbClr val="6E7895"/>
+                  <a:srgbClr val="6B7C88"/>
                 </a:solidFill>
                 <a:latin typeface="Calibri" pitchFamily="34" charset="0"/>
                 <a:ea typeface="Calibri" pitchFamily="34" charset="-122"/>
@@ -12418,7 +12403,7 @@
                   <a:tcPr marL="101600" marR="101600" marT="25400" marB="25400" anchor="ctr">
                     <a:lnL w="12700" cap="flat" cmpd="sng" algn="ctr">
                       <a:solidFill>
-                        <a:srgbClr val="DCE2F0"/>
+                        <a:srgbClr val="D9E3EA"/>
                       </a:solidFill>
                       <a:prstDash val="solid"/>
                       <a:round/>
@@ -12427,7 +12412,7 @@
                     </a:lnL>
                     <a:lnR w="12700" cap="flat" cmpd="sng" algn="ctr">
                       <a:solidFill>
-                        <a:srgbClr val="DCE2F0"/>
+                        <a:srgbClr val="D9E3EA"/>
                       </a:solidFill>
                       <a:prstDash val="solid"/>
                       <a:round/>
@@ -12436,7 +12421,7 @@
                     </a:lnR>
                     <a:lnT w="12700" cap="flat" cmpd="sng" algn="ctr">
                       <a:solidFill>
-                        <a:srgbClr val="DCE2F0"/>
+                        <a:srgbClr val="D9E3EA"/>
                       </a:solidFill>
                       <a:prstDash val="solid"/>
                       <a:round/>
@@ -12445,7 +12430,7 @@
                     </a:lnT>
                     <a:lnB w="12700" cap="flat" cmpd="sng" algn="ctr">
                       <a:solidFill>
-                        <a:srgbClr val="DCE2F0"/>
+                        <a:srgbClr val="D9E3EA"/>
                       </a:solidFill>
                       <a:prstDash val="solid"/>
                       <a:round/>
@@ -12453,7 +12438,7 @@
                       <a:tailEnd type="none" w="med" len="med"/>
                     </a:lnB>
                     <a:solidFill>
-                      <a:srgbClr val="24405E"/>
+                      <a:srgbClr val="445A69"/>
                     </a:solidFill>
                   </a:tcPr>
                 </a:tc>
@@ -12468,7 +12453,7 @@
                       <a:r>
                         <a:rPr lang="en-US" sz="1100" b="1" spc="100" kern="0" dirty="0">
                           <a:solidFill>
-                            <a:srgbClr val="141B33"/>
+                            <a:srgbClr val="1D2A32"/>
                           </a:solidFill>
                         </a:rPr>
                         <a:t>HOW OFTEN, IN 60 DECISIONS</a:t>
@@ -12479,7 +12464,7 @@
                   <a:tcPr marL="101600" marR="101600" marT="25400" marB="25400" anchor="ctr">
                     <a:lnL w="12700" cap="flat" cmpd="sng" algn="ctr">
                       <a:solidFill>
-                        <a:srgbClr val="DCE2F0"/>
+                        <a:srgbClr val="D9E3EA"/>
                       </a:solidFill>
                       <a:prstDash val="solid"/>
                       <a:round/>
@@ -12488,7 +12473,7 @@
                     </a:lnL>
                     <a:lnR w="12700" cap="flat" cmpd="sng" algn="ctr">
                       <a:solidFill>
-                        <a:srgbClr val="DCE2F0"/>
+                        <a:srgbClr val="D9E3EA"/>
                       </a:solidFill>
                       <a:prstDash val="solid"/>
                       <a:round/>
@@ -12497,7 +12482,7 @@
                     </a:lnR>
                     <a:lnT w="12700" cap="flat" cmpd="sng" algn="ctr">
                       <a:solidFill>
-                        <a:srgbClr val="DCE2F0"/>
+                        <a:srgbClr val="D9E3EA"/>
                       </a:solidFill>
                       <a:prstDash val="solid"/>
                       <a:round/>
@@ -12506,7 +12491,7 @@
                     </a:lnT>
                     <a:lnB w="12700" cap="flat" cmpd="sng" algn="ctr">
                       <a:solidFill>
-                        <a:srgbClr val="DCE2F0"/>
+                        <a:srgbClr val="D9E3EA"/>
                       </a:solidFill>
                       <a:prstDash val="solid"/>
                       <a:round/>
@@ -12531,7 +12516,7 @@
                       <a:r>
                         <a:rPr lang="en-US" sz="1050" b="1" dirty="0">
                           <a:solidFill>
-                            <a:srgbClr val="0F1B2D"/>
+                            <a:srgbClr val="24343F"/>
                           </a:solidFill>
                         </a:rPr>
                         <a:t>Proposed a team, all checks passed</a:t>
@@ -12542,7 +12527,7 @@
                   <a:tcPr marL="101600" marR="101600" marT="25400" marB="25400" anchor="ctr">
                     <a:lnL w="12700" cap="flat" cmpd="sng" algn="ctr">
                       <a:solidFill>
-                        <a:srgbClr val="DCE2F0"/>
+                        <a:srgbClr val="D9E3EA"/>
                       </a:solidFill>
                       <a:prstDash val="solid"/>
                       <a:round/>
@@ -12551,7 +12536,7 @@
                     </a:lnL>
                     <a:lnR w="12700" cap="flat" cmpd="sng" algn="ctr">
                       <a:solidFill>
-                        <a:srgbClr val="DCE2F0"/>
+                        <a:srgbClr val="D9E3EA"/>
                       </a:solidFill>
                       <a:prstDash val="solid"/>
                       <a:round/>
@@ -12560,7 +12545,7 @@
                     </a:lnR>
                     <a:lnT w="12700" cap="flat" cmpd="sng" algn="ctr">
                       <a:solidFill>
-                        <a:srgbClr val="DCE2F0"/>
+                        <a:srgbClr val="D9E3EA"/>
                       </a:solidFill>
                       <a:prstDash val="solid"/>
                       <a:round/>
@@ -12569,7 +12554,7 @@
                     </a:lnT>
                     <a:lnB w="12700" cap="flat" cmpd="sng" algn="ctr">
                       <a:solidFill>
-                        <a:srgbClr val="DCE2F0"/>
+                        <a:srgbClr val="D9E3EA"/>
                       </a:solidFill>
                       <a:prstDash val="solid"/>
                       <a:round/>
@@ -12592,7 +12577,7 @@
                       <a:r>
                         <a:rPr lang="en-US" sz="1050" dirty="0">
                           <a:solidFill>
-                            <a:srgbClr val="1C2440"/>
+                            <a:srgbClr val="1B2730"/>
                           </a:solidFill>
                         </a:rPr>
                         <a:t>52</a:t>
@@ -12603,7 +12588,7 @@
                   <a:tcPr marL="101600" marR="101600" marT="25400" marB="25400" anchor="ctr">
                     <a:lnL w="12700" cap="flat" cmpd="sng" algn="ctr">
                       <a:solidFill>
-                        <a:srgbClr val="DCE2F0"/>
+                        <a:srgbClr val="D9E3EA"/>
                       </a:solidFill>
                       <a:prstDash val="solid"/>
                       <a:round/>
@@ -12612,7 +12597,7 @@
                     </a:lnL>
                     <a:lnR w="12700" cap="flat" cmpd="sng" algn="ctr">
                       <a:solidFill>
-                        <a:srgbClr val="DCE2F0"/>
+                        <a:srgbClr val="D9E3EA"/>
                       </a:solidFill>
                       <a:prstDash val="solid"/>
                       <a:round/>
@@ -12621,7 +12606,7 @@
                     </a:lnR>
                     <a:lnT w="12700" cap="flat" cmpd="sng" algn="ctr">
                       <a:solidFill>
-                        <a:srgbClr val="DCE2F0"/>
+                        <a:srgbClr val="D9E3EA"/>
                       </a:solidFill>
                       <a:prstDash val="solid"/>
                       <a:round/>
@@ -12630,7 +12615,7 @@
                     </a:lnT>
                     <a:lnB w="12700" cap="flat" cmpd="sng" algn="ctr">
                       <a:solidFill>
-                        <a:srgbClr val="DCE2F0"/>
+                        <a:srgbClr val="D9E3EA"/>
                       </a:solidFill>
                       <a:prstDash val="solid"/>
                       <a:round/>
@@ -12655,7 +12640,7 @@
                       <a:r>
                         <a:rPr lang="en-US" sz="1050" b="1" dirty="0">
                           <a:solidFill>
-                            <a:srgbClr val="0F1B2D"/>
+                            <a:srgbClr val="24343F"/>
                           </a:solidFill>
                         </a:rPr>
                         <a:t>Quote was not actually in the complaint</a:t>
@@ -12666,7 +12651,7 @@
                   <a:tcPr marL="101600" marR="101600" marT="25400" marB="25400" anchor="ctr">
                     <a:lnL w="12700" cap="flat" cmpd="sng" algn="ctr">
                       <a:solidFill>
-                        <a:srgbClr val="DCE2F0"/>
+                        <a:srgbClr val="D9E3EA"/>
                       </a:solidFill>
                       <a:prstDash val="solid"/>
                       <a:round/>
@@ -12675,7 +12660,7 @@
                     </a:lnL>
                     <a:lnR w="12700" cap="flat" cmpd="sng" algn="ctr">
                       <a:solidFill>
-                        <a:srgbClr val="DCE2F0"/>
+                        <a:srgbClr val="D9E3EA"/>
                       </a:solidFill>
                       <a:prstDash val="solid"/>
                       <a:round/>
@@ -12684,7 +12669,7 @@
                     </a:lnR>
                     <a:lnT w="12700" cap="flat" cmpd="sng" algn="ctr">
                       <a:solidFill>
-                        <a:srgbClr val="DCE2F0"/>
+                        <a:srgbClr val="D9E3EA"/>
                       </a:solidFill>
                       <a:prstDash val="solid"/>
                       <a:round/>
@@ -12693,7 +12678,7 @@
                     </a:lnT>
                     <a:lnB w="12700" cap="flat" cmpd="sng" algn="ctr">
                       <a:solidFill>
-                        <a:srgbClr val="DCE2F0"/>
+                        <a:srgbClr val="D9E3EA"/>
                       </a:solidFill>
                       <a:prstDash val="solid"/>
                       <a:round/>
@@ -12701,7 +12686,7 @@
                       <a:tailEnd type="none" w="med" len="med"/>
                     </a:lnB>
                     <a:solidFill>
-                      <a:srgbClr val="EDF4FE"/>
+                      <a:srgbClr val="EFF5F9"/>
                     </a:solidFill>
                   </a:tcPr>
                 </a:tc>
@@ -12716,7 +12701,7 @@
                       <a:r>
                         <a:rPr lang="en-US" sz="1050" dirty="0">
                           <a:solidFill>
-                            <a:srgbClr val="1C2440"/>
+                            <a:srgbClr val="1B2730"/>
                           </a:solidFill>
                         </a:rPr>
                         <a:t>4  —  caught, sent to a human</a:t>
@@ -12727,7 +12712,7 @@
                   <a:tcPr marL="101600" marR="101600" marT="25400" marB="25400" anchor="ctr">
                     <a:lnL w="12700" cap="flat" cmpd="sng" algn="ctr">
                       <a:solidFill>
-                        <a:srgbClr val="DCE2F0"/>
+                        <a:srgbClr val="D9E3EA"/>
                       </a:solidFill>
                       <a:prstDash val="solid"/>
                       <a:round/>
@@ -12736,7 +12721,7 @@
                     </a:lnL>
                     <a:lnR w="12700" cap="flat" cmpd="sng" algn="ctr">
                       <a:solidFill>
-                        <a:srgbClr val="DCE2F0"/>
+                        <a:srgbClr val="D9E3EA"/>
                       </a:solidFill>
                       <a:prstDash val="solid"/>
                       <a:round/>
@@ -12745,7 +12730,7 @@
                     </a:lnR>
                     <a:lnT w="12700" cap="flat" cmpd="sng" algn="ctr">
                       <a:solidFill>
-                        <a:srgbClr val="DCE2F0"/>
+                        <a:srgbClr val="D9E3EA"/>
                       </a:solidFill>
                       <a:prstDash val="solid"/>
                       <a:round/>
@@ -12754,7 +12739,7 @@
                     </a:lnT>
                     <a:lnB w="12700" cap="flat" cmpd="sng" algn="ctr">
                       <a:solidFill>
-                        <a:srgbClr val="DCE2F0"/>
+                        <a:srgbClr val="D9E3EA"/>
                       </a:solidFill>
                       <a:prstDash val="solid"/>
                       <a:round/>
@@ -12762,7 +12747,7 @@
                       <a:tailEnd type="none" w="med" len="med"/>
                     </a:lnB>
                     <a:solidFill>
-                      <a:srgbClr val="EDF4FE"/>
+                      <a:srgbClr val="EFF5F9"/>
                     </a:solidFill>
                   </a:tcPr>
                 </a:tc>
@@ -12779,7 +12764,7 @@
                       <a:r>
                         <a:rPr lang="en-US" sz="1050" b="1" dirty="0">
                           <a:solidFill>
-                            <a:srgbClr val="0F1B2D"/>
+                            <a:srgbClr val="24343F"/>
                           </a:solidFill>
                         </a:rPr>
                         <a:t>Confidence below the 0.70 threshold</a:t>
@@ -12790,7 +12775,7 @@
                   <a:tcPr marL="101600" marR="101600" marT="25400" marB="25400" anchor="ctr">
                     <a:lnL w="12700" cap="flat" cmpd="sng" algn="ctr">
                       <a:solidFill>
-                        <a:srgbClr val="DCE2F0"/>
+                        <a:srgbClr val="D9E3EA"/>
                       </a:solidFill>
                       <a:prstDash val="solid"/>
                       <a:round/>
@@ -12799,7 +12784,7 @@
                     </a:lnL>
                     <a:lnR w="12700" cap="flat" cmpd="sng" algn="ctr">
                       <a:solidFill>
-                        <a:srgbClr val="DCE2F0"/>
+                        <a:srgbClr val="D9E3EA"/>
                       </a:solidFill>
                       <a:prstDash val="solid"/>
                       <a:round/>
@@ -12808,7 +12793,7 @@
                     </a:lnR>
                     <a:lnT w="12700" cap="flat" cmpd="sng" algn="ctr">
                       <a:solidFill>
-                        <a:srgbClr val="DCE2F0"/>
+                        <a:srgbClr val="D9E3EA"/>
                       </a:solidFill>
                       <a:prstDash val="solid"/>
                       <a:round/>
@@ -12817,7 +12802,7 @@
                     </a:lnT>
                     <a:lnB w="12700" cap="flat" cmpd="sng" algn="ctr">
                       <a:solidFill>
-                        <a:srgbClr val="DCE2F0"/>
+                        <a:srgbClr val="D9E3EA"/>
                       </a:solidFill>
                       <a:prstDash val="solid"/>
                       <a:round/>
@@ -12840,7 +12825,7 @@
                       <a:r>
                         <a:rPr lang="en-US" sz="1050" dirty="0">
                           <a:solidFill>
-                            <a:srgbClr val="1C2440"/>
+                            <a:srgbClr val="1B2730"/>
                           </a:solidFill>
                         </a:rPr>
                         <a:t>4  —  caught, sent to a human</a:t>
@@ -12851,7 +12836,7 @@
                   <a:tcPr marL="101600" marR="101600" marT="25400" marB="25400" anchor="ctr">
                     <a:lnL w="12700" cap="flat" cmpd="sng" algn="ctr">
                       <a:solidFill>
-                        <a:srgbClr val="DCE2F0"/>
+                        <a:srgbClr val="D9E3EA"/>
                       </a:solidFill>
                       <a:prstDash val="solid"/>
                       <a:round/>
@@ -12860,7 +12845,7 @@
                     </a:lnL>
                     <a:lnR w="12700" cap="flat" cmpd="sng" algn="ctr">
                       <a:solidFill>
-                        <a:srgbClr val="DCE2F0"/>
+                        <a:srgbClr val="D9E3EA"/>
                       </a:solidFill>
                       <a:prstDash val="solid"/>
                       <a:round/>
@@ -12869,7 +12854,7 @@
                     </a:lnR>
                     <a:lnT w="12700" cap="flat" cmpd="sng" algn="ctr">
                       <a:solidFill>
-                        <a:srgbClr val="DCE2F0"/>
+                        <a:srgbClr val="D9E3EA"/>
                       </a:solidFill>
                       <a:prstDash val="solid"/>
                       <a:round/>
@@ -12878,7 +12863,7 @@
                     </a:lnT>
                     <a:lnB w="12700" cap="flat" cmpd="sng" algn="ctr">
                       <a:solidFill>
-                        <a:srgbClr val="DCE2F0"/>
+                        <a:srgbClr val="D9E3EA"/>
                       </a:solidFill>
                       <a:prstDash val="solid"/>
                       <a:round/>
@@ -12903,7 +12888,7 @@
                       <a:r>
                         <a:rPr lang="en-US" sz="1050" b="1" dirty="0">
                           <a:solidFill>
-                            <a:srgbClr val="0F1B2D"/>
+                            <a:srgbClr val="24343F"/>
                           </a:solidFill>
                         </a:rPr>
                         <a:t>Silently wrong, with no record</a:t>
@@ -12914,7 +12899,7 @@
                   <a:tcPr marL="101600" marR="101600" marT="25400" marB="25400" anchor="ctr">
                     <a:lnL w="12700" cap="flat" cmpd="sng" algn="ctr">
                       <a:solidFill>
-                        <a:srgbClr val="DCE2F0"/>
+                        <a:srgbClr val="D9E3EA"/>
                       </a:solidFill>
                       <a:prstDash val="solid"/>
                       <a:round/>
@@ -12923,7 +12908,7 @@
                     </a:lnL>
                     <a:lnR w="12700" cap="flat" cmpd="sng" algn="ctr">
                       <a:solidFill>
-                        <a:srgbClr val="DCE2F0"/>
+                        <a:srgbClr val="D9E3EA"/>
                       </a:solidFill>
                       <a:prstDash val="solid"/>
                       <a:round/>
@@ -12932,7 +12917,7 @@
                     </a:lnR>
                     <a:lnT w="12700" cap="flat" cmpd="sng" algn="ctr">
                       <a:solidFill>
-                        <a:srgbClr val="DCE2F0"/>
+                        <a:srgbClr val="D9E3EA"/>
                       </a:solidFill>
                       <a:prstDash val="solid"/>
                       <a:round/>
@@ -12941,7 +12926,7 @@
                     </a:lnT>
                     <a:lnB w="12700" cap="flat" cmpd="sng" algn="ctr">
                       <a:solidFill>
-                        <a:srgbClr val="DCE2F0"/>
+                        <a:srgbClr val="D9E3EA"/>
                       </a:solidFill>
                       <a:prstDash val="solid"/>
                       <a:round/>
@@ -12949,7 +12934,7 @@
                       <a:tailEnd type="none" w="med" len="med"/>
                     </a:lnB>
                     <a:solidFill>
-                      <a:srgbClr val="EDF4FE"/>
+                      <a:srgbClr val="EFF5F9"/>
                     </a:solidFill>
                   </a:tcPr>
                 </a:tc>
@@ -12964,7 +12949,7 @@
                       <a:r>
                         <a:rPr lang="en-US" sz="1050" dirty="0">
                           <a:solidFill>
-                            <a:srgbClr val="1C2440"/>
+                            <a:srgbClr val="1B2730"/>
                           </a:solidFill>
                         </a:rPr>
                         <a:t>0</a:t>
@@ -12975,7 +12960,7 @@
                   <a:tcPr marL="101600" marR="101600" marT="25400" marB="25400" anchor="ctr">
                     <a:lnL w="12700" cap="flat" cmpd="sng" algn="ctr">
                       <a:solidFill>
-                        <a:srgbClr val="DCE2F0"/>
+                        <a:srgbClr val="D9E3EA"/>
                       </a:solidFill>
                       <a:prstDash val="solid"/>
                       <a:round/>
@@ -12984,7 +12969,7 @@
                     </a:lnL>
                     <a:lnR w="12700" cap="flat" cmpd="sng" algn="ctr">
                       <a:solidFill>
-                        <a:srgbClr val="DCE2F0"/>
+                        <a:srgbClr val="D9E3EA"/>
                       </a:solidFill>
                       <a:prstDash val="solid"/>
                       <a:round/>
@@ -12993,7 +12978,7 @@
                     </a:lnR>
                     <a:lnT w="12700" cap="flat" cmpd="sng" algn="ctr">
                       <a:solidFill>
-                        <a:srgbClr val="DCE2F0"/>
+                        <a:srgbClr val="D9E3EA"/>
                       </a:solidFill>
                       <a:prstDash val="solid"/>
                       <a:round/>
@@ -13002,7 +12987,7 @@
                     </a:lnT>
                     <a:lnB w="12700" cap="flat" cmpd="sng" algn="ctr">
                       <a:solidFill>
-                        <a:srgbClr val="DCE2F0"/>
+                        <a:srgbClr val="D9E3EA"/>
                       </a:solidFill>
                       <a:prstDash val="solid"/>
                       <a:round/>
@@ -13010,7 +12995,7 @@
                       <a:tailEnd type="none" w="med" len="med"/>
                     </a:lnB>
                     <a:solidFill>
-                      <a:srgbClr val="EDF4FE"/>
+                      <a:srgbClr val="EFF5F9"/>
                     </a:solidFill>
                   </a:tcPr>
                 </a:tc>
@@ -13034,7 +13019,7 @@
             <a:avLst/>
           </a:prstGeom>
           <a:solidFill>
-            <a:srgbClr val="0F1B2D"/>
+            <a:srgbClr val="24343F"/>
           </a:solidFill>
           <a:ln/>
         </p:spPr>
@@ -13157,7 +13142,7 @@
             <a:r>
               <a:rPr lang="en-US" sz="1050" b="1" spc="200" kern="0" dirty="0">
                 <a:solidFill>
-                  <a:srgbClr val="6E7895"/>
+                  <a:srgbClr val="6B7C88"/>
                 </a:solidFill>
                 <a:latin typeface="Calibri" pitchFamily="34" charset="0"/>
                 <a:ea typeface="Calibri" pitchFamily="34" charset="-122"/>
@@ -13184,7 +13169,7 @@
             <a:avLst/>
           </a:prstGeom>
           <a:solidFill>
-            <a:srgbClr val="0F1B2D"/>
+            <a:srgbClr val="24343F"/>
           </a:solidFill>
           <a:ln/>
         </p:spPr>
@@ -13240,11 +13225,11 @@
             <a:r>
               <a:rPr lang="en-US" sz="3000" b="1" dirty="0">
                 <a:solidFill>
-                  <a:srgbClr val="0F1B2D"/>
+                  <a:srgbClr val="24343F"/>
                 </a:solidFill>
-                <a:latin typeface="Georgia" pitchFamily="34" charset="0"/>
-                <a:ea typeface="Georgia" pitchFamily="34" charset="-122"/>
-                <a:cs typeface="Georgia" pitchFamily="34" charset="-120"/>
+                <a:latin typeface="Trebuchet MS" pitchFamily="34" charset="0"/>
+                <a:ea typeface="Trebuchet MS" pitchFamily="34" charset="-122"/>
+                <a:cs typeface="Trebuchet MS" pitchFamily="34" charset="-120"/>
               </a:rPr>
               <a:t>What it cannot do yet, and why that is not the model's fault</a:t>
             </a:r>
@@ -13267,7 +13252,7 @@
             <a:avLst/>
           </a:prstGeom>
           <a:solidFill>
-            <a:srgbClr val="EDF4FE"/>
+            <a:srgbClr val="EFF5F9"/>
           </a:solidFill>
           <a:ln/>
         </p:spPr>
@@ -13333,7 +13318,7 @@
             <a:r>
               <a:rPr lang="en-US" sz="1300" dirty="0">
                 <a:solidFill>
-                  <a:srgbClr val="1C2440"/>
+                  <a:srgbClr val="1B2730"/>
                 </a:solidFill>
                 <a:latin typeface="Calibri" pitchFamily="34" charset="0"/>
                 <a:ea typeface="Calibri" pitchFamily="34" charset="-122"/>
@@ -13362,7 +13347,7 @@
           <a:noFill/>
           <a:ln w="12700">
             <a:solidFill>
-              <a:srgbClr val="DCE2F0"/>
+              <a:srgbClr val="D9E3EA"/>
             </a:solidFill>
             <a:prstDash val="solid"/>
           </a:ln>
@@ -13423,7 +13408,7 @@
             <a:r>
               <a:rPr lang="en-US" sz="850" dirty="0">
                 <a:solidFill>
-                  <a:srgbClr val="6E7895"/>
+                  <a:srgbClr val="6B7C88"/>
                 </a:solidFill>
                 <a:latin typeface="Calibri" pitchFamily="34" charset="0"/>
                 <a:ea typeface="Calibri" pitchFamily="34" charset="-122"/>
@@ -13454,7 +13439,7 @@
           </a:solidFill>
           <a:ln w="12700">
             <a:solidFill>
-              <a:srgbClr val="DCE2F0"/>
+              <a:srgbClr val="D9E3EA"/>
             </a:solidFill>
             <a:prstDash val="solid"/>
           </a:ln>
@@ -13482,7 +13467,7 @@
             <a:avLst/>
           </a:prstGeom>
           <a:solidFill>
-            <a:srgbClr val="0F1B2D"/>
+            <a:srgbClr val="24343F"/>
           </a:solidFill>
           <a:ln/>
         </p:spPr>
@@ -13557,7 +13542,7 @@
             <a:r>
               <a:rPr lang="en-US" sz="1150" dirty="0">
                 <a:solidFill>
-                  <a:srgbClr val="1C2440"/>
+                  <a:srgbClr val="1B2730"/>
                 </a:solidFill>
                 <a:latin typeface="Calibri" pitchFamily="34" charset="0"/>
                 <a:ea typeface="Calibri" pitchFamily="34" charset="-122"/>
@@ -13578,7 +13563,7 @@
             <a:r>
               <a:rPr lang="en-US" sz="1150" dirty="0">
                 <a:solidFill>
-                  <a:srgbClr val="1C2440"/>
+                  <a:srgbClr val="1B2730"/>
                 </a:solidFill>
                 <a:latin typeface="Calibri" pitchFamily="34" charset="0"/>
                 <a:ea typeface="Calibri" pitchFamily="34" charset="-122"/>
@@ -13599,7 +13584,7 @@
             <a:r>
               <a:rPr lang="en-US" sz="1150" dirty="0">
                 <a:solidFill>
-                  <a:srgbClr val="1C2440"/>
+                  <a:srgbClr val="1B2730"/>
                 </a:solidFill>
                 <a:latin typeface="Calibri" pitchFamily="34" charset="0"/>
                 <a:ea typeface="Calibri" pitchFamily="34" charset="-122"/>
@@ -13630,7 +13615,7 @@
           </a:solidFill>
           <a:ln w="12700">
             <a:solidFill>
-              <a:srgbClr val="DCE2F0"/>
+              <a:srgbClr val="D9E3EA"/>
             </a:solidFill>
             <a:prstDash val="solid"/>
           </a:ln>
@@ -13658,7 +13643,7 @@
             <a:avLst/>
           </a:prstGeom>
           <a:solidFill>
-            <a:srgbClr val="24405E"/>
+            <a:srgbClr val="445A69"/>
           </a:solidFill>
           <a:ln/>
         </p:spPr>
@@ -13733,7 +13718,7 @@
             <a:r>
               <a:rPr lang="en-US" sz="1150" dirty="0">
                 <a:solidFill>
-                  <a:srgbClr val="6E7895"/>
+                  <a:srgbClr val="6B7C88"/>
                 </a:solidFill>
                 <a:latin typeface="Calibri" pitchFamily="34" charset="0"/>
                 <a:ea typeface="Calibri" pitchFamily="34" charset="-122"/>
@@ -13754,7 +13739,7 @@
             <a:r>
               <a:rPr lang="en-US" sz="1150" dirty="0">
                 <a:solidFill>
-                  <a:srgbClr val="6E7895"/>
+                  <a:srgbClr val="6B7C88"/>
                 </a:solidFill>
                 <a:latin typeface="Calibri" pitchFamily="34" charset="0"/>
                 <a:ea typeface="Calibri" pitchFamily="34" charset="-122"/>
@@ -13775,7 +13760,7 @@
             <a:r>
               <a:rPr lang="en-US" sz="1150" dirty="0">
                 <a:solidFill>
-                  <a:srgbClr val="6E7895"/>
+                  <a:srgbClr val="6B7C88"/>
                 </a:solidFill>
                 <a:latin typeface="Calibri" pitchFamily="34" charset="0"/>
                 <a:ea typeface="Calibri" pitchFamily="34" charset="-122"/>
@@ -13846,7 +13831,7 @@
             <a:r>
               <a:rPr lang="en-US" sz="1050" b="1" spc="200" kern="0" dirty="0">
                 <a:solidFill>
-                  <a:srgbClr val="6E7895"/>
+                  <a:srgbClr val="6B7C88"/>
                 </a:solidFill>
                 <a:latin typeface="Calibri" pitchFamily="34" charset="0"/>
                 <a:ea typeface="Calibri" pitchFamily="34" charset="-122"/>
@@ -13873,7 +13858,7 @@
             <a:avLst/>
           </a:prstGeom>
           <a:solidFill>
-            <a:srgbClr val="0F1B2D"/>
+            <a:srgbClr val="24343F"/>
           </a:solidFill>
           <a:ln/>
         </p:spPr>
@@ -13929,11 +13914,11 @@
             <a:r>
               <a:rPr lang="en-US" sz="3000" b="1" dirty="0">
                 <a:solidFill>
-                  <a:srgbClr val="0F1B2D"/>
+                  <a:srgbClr val="24343F"/>
                 </a:solidFill>
-                <a:latin typeface="Georgia" pitchFamily="34" charset="0"/>
-                <a:ea typeface="Georgia" pitchFamily="34" charset="-122"/>
-                <a:cs typeface="Georgia" pitchFamily="34" charset="-120"/>
+                <a:latin typeface="Trebuchet MS" pitchFamily="34" charset="0"/>
+                <a:ea typeface="Trebuchet MS" pitchFamily="34" charset="-122"/>
+                <a:cs typeface="Trebuchet MS" pitchFamily="34" charset="-120"/>
               </a:rPr>
               <a:t>The model is not the cost. Oversight is.</a:t>
             </a:r>
@@ -13956,7 +13941,7 @@
             <a:avLst/>
           </a:prstGeom>
           <a:solidFill>
-            <a:srgbClr val="EDF4FE"/>
+            <a:srgbClr val="EFF5F9"/>
           </a:solidFill>
           <a:ln/>
         </p:spPr>
@@ -14022,7 +14007,7 @@
             <a:r>
               <a:rPr lang="en-US" sz="1300" dirty="0">
                 <a:solidFill>
-                  <a:srgbClr val="1C2440"/>
+                  <a:srgbClr val="1B2730"/>
                 </a:solidFill>
                 <a:latin typeface="Calibri" pitchFamily="34" charset="0"/>
                 <a:ea typeface="Calibri" pitchFamily="34" charset="-122"/>
@@ -14051,7 +14036,7 @@
           <a:noFill/>
           <a:ln w="12700">
             <a:solidFill>
-              <a:srgbClr val="DCE2F0"/>
+              <a:srgbClr val="D9E3EA"/>
             </a:solidFill>
             <a:prstDash val="solid"/>
           </a:ln>
@@ -14112,7 +14097,7 @@
             <a:r>
               <a:rPr lang="en-US" sz="850" dirty="0">
                 <a:solidFill>
-                  <a:srgbClr val="6E7895"/>
+                  <a:srgbClr val="6B7C88"/>
                 </a:solidFill>
                 <a:latin typeface="Calibri" pitchFamily="34" charset="0"/>
                 <a:ea typeface="Calibri" pitchFamily="34" charset="-122"/>
@@ -14174,7 +14159,7 @@
                   <a:tcPr marL="76200" marR="76200" marT="38100" marB="38100" anchor="ctr">
                     <a:lnL w="12700" cap="flat" cmpd="sng" algn="ctr">
                       <a:solidFill>
-                        <a:srgbClr val="DCE2F0"/>
+                        <a:srgbClr val="D9E3EA"/>
                       </a:solidFill>
                       <a:prstDash val="solid"/>
                       <a:round/>
@@ -14183,7 +14168,7 @@
                     </a:lnL>
                     <a:lnR w="12700" cap="flat" cmpd="sng" algn="ctr">
                       <a:solidFill>
-                        <a:srgbClr val="DCE2F0"/>
+                        <a:srgbClr val="D9E3EA"/>
                       </a:solidFill>
                       <a:prstDash val="solid"/>
                       <a:round/>
@@ -14192,7 +14177,7 @@
                     </a:lnR>
                     <a:lnT w="12700" cap="flat" cmpd="sng" algn="ctr">
                       <a:solidFill>
-                        <a:srgbClr val="DCE2F0"/>
+                        <a:srgbClr val="D9E3EA"/>
                       </a:solidFill>
                       <a:prstDash val="solid"/>
                       <a:round/>
@@ -14201,7 +14186,7 @@
                     </a:lnT>
                     <a:lnB w="12700" cap="flat" cmpd="sng" algn="ctr">
                       <a:solidFill>
-                        <a:srgbClr val="DCE2F0"/>
+                        <a:srgbClr val="D9E3EA"/>
                       </a:solidFill>
                       <a:prstDash val="solid"/>
                       <a:round/>
@@ -14209,7 +14194,7 @@
                       <a:tailEnd type="none" w="med" len="med"/>
                     </a:lnB>
                     <a:solidFill>
-                      <a:srgbClr val="24405E"/>
+                      <a:srgbClr val="445A69"/>
                     </a:solidFill>
                   </a:tcPr>
                 </a:tc>
@@ -14235,7 +14220,7 @@
                   <a:tcPr marL="76200" marR="76200" marT="38100" marB="38100" anchor="ctr">
                     <a:lnL w="12700" cap="flat" cmpd="sng" algn="ctr">
                       <a:solidFill>
-                        <a:srgbClr val="DCE2F0"/>
+                        <a:srgbClr val="D9E3EA"/>
                       </a:solidFill>
                       <a:prstDash val="solid"/>
                       <a:round/>
@@ -14244,7 +14229,7 @@
                     </a:lnL>
                     <a:lnR w="12700" cap="flat" cmpd="sng" algn="ctr">
                       <a:solidFill>
-                        <a:srgbClr val="DCE2F0"/>
+                        <a:srgbClr val="D9E3EA"/>
                       </a:solidFill>
                       <a:prstDash val="solid"/>
                       <a:round/>
@@ -14253,7 +14238,7 @@
                     </a:lnR>
                     <a:lnT w="12700" cap="flat" cmpd="sng" algn="ctr">
                       <a:solidFill>
-                        <a:srgbClr val="DCE2F0"/>
+                        <a:srgbClr val="D9E3EA"/>
                       </a:solidFill>
                       <a:prstDash val="solid"/>
                       <a:round/>
@@ -14262,7 +14247,7 @@
                     </a:lnT>
                     <a:lnB w="12700" cap="flat" cmpd="sng" algn="ctr">
                       <a:solidFill>
-                        <a:srgbClr val="DCE2F0"/>
+                        <a:srgbClr val="D9E3EA"/>
                       </a:solidFill>
                       <a:prstDash val="solid"/>
                       <a:round/>
@@ -14270,7 +14255,7 @@
                       <a:tailEnd type="none" w="med" len="med"/>
                     </a:lnB>
                     <a:solidFill>
-                      <a:srgbClr val="24405E"/>
+                      <a:srgbClr val="445A69"/>
                     </a:solidFill>
                   </a:tcPr>
                 </a:tc>
@@ -14296,7 +14281,7 @@
                   <a:tcPr marL="76200" marR="76200" marT="38100" marB="38100" anchor="ctr">
                     <a:lnL w="12700" cap="flat" cmpd="sng" algn="ctr">
                       <a:solidFill>
-                        <a:srgbClr val="DCE2F0"/>
+                        <a:srgbClr val="D9E3EA"/>
                       </a:solidFill>
                       <a:prstDash val="solid"/>
                       <a:round/>
@@ -14305,7 +14290,7 @@
                     </a:lnL>
                     <a:lnR w="12700" cap="flat" cmpd="sng" algn="ctr">
                       <a:solidFill>
-                        <a:srgbClr val="DCE2F0"/>
+                        <a:srgbClr val="D9E3EA"/>
                       </a:solidFill>
                       <a:prstDash val="solid"/>
                       <a:round/>
@@ -14314,7 +14299,7 @@
                     </a:lnR>
                     <a:lnT w="12700" cap="flat" cmpd="sng" algn="ctr">
                       <a:solidFill>
-                        <a:srgbClr val="DCE2F0"/>
+                        <a:srgbClr val="D9E3EA"/>
                       </a:solidFill>
                       <a:prstDash val="solid"/>
                       <a:round/>
@@ -14323,7 +14308,7 @@
                     </a:lnT>
                     <a:lnB w="12700" cap="flat" cmpd="sng" algn="ctr">
                       <a:solidFill>
-                        <a:srgbClr val="DCE2F0"/>
+                        <a:srgbClr val="D9E3EA"/>
                       </a:solidFill>
                       <a:prstDash val="solid"/>
                       <a:round/>
@@ -14331,7 +14316,7 @@
                       <a:tailEnd type="none" w="med" len="med"/>
                     </a:lnB>
                     <a:solidFill>
-                      <a:srgbClr val="24405E"/>
+                      <a:srgbClr val="445A69"/>
                     </a:solidFill>
                   </a:tcPr>
                 </a:tc>
@@ -14348,7 +14333,7 @@
                       <a:r>
                         <a:rPr lang="en-US" sz="1050" b="1" dirty="0">
                           <a:solidFill>
-                            <a:srgbClr val="0F1B2D"/>
+                            <a:srgbClr val="24343F"/>
                           </a:solidFill>
                         </a:rPr>
                         <a:t>LLM API</a:t>
@@ -14359,7 +14344,7 @@
                   <a:tcPr marL="76200" marR="76200" marT="38100" marB="38100" anchor="ctr">
                     <a:lnL w="12700" cap="flat" cmpd="sng" algn="ctr">
                       <a:solidFill>
-                        <a:srgbClr val="DCE2F0"/>
+                        <a:srgbClr val="D9E3EA"/>
                       </a:solidFill>
                       <a:prstDash val="solid"/>
                       <a:round/>
@@ -14368,7 +14353,7 @@
                     </a:lnL>
                     <a:lnR w="12700" cap="flat" cmpd="sng" algn="ctr">
                       <a:solidFill>
-                        <a:srgbClr val="DCE2F0"/>
+                        <a:srgbClr val="D9E3EA"/>
                       </a:solidFill>
                       <a:prstDash val="solid"/>
                       <a:round/>
@@ -14377,7 +14362,7 @@
                     </a:lnR>
                     <a:lnT w="12700" cap="flat" cmpd="sng" algn="ctr">
                       <a:solidFill>
-                        <a:srgbClr val="DCE2F0"/>
+                        <a:srgbClr val="D9E3EA"/>
                       </a:solidFill>
                       <a:prstDash val="solid"/>
                       <a:round/>
@@ -14386,7 +14371,7 @@
                     </a:lnT>
                     <a:lnB w="12700" cap="flat" cmpd="sng" algn="ctr">
                       <a:solidFill>
-                        <a:srgbClr val="DCE2F0"/>
+                        <a:srgbClr val="D9E3EA"/>
                       </a:solidFill>
                       <a:prstDash val="solid"/>
                       <a:round/>
@@ -14409,7 +14394,7 @@
                       <a:r>
                         <a:rPr lang="en-US" sz="1050" dirty="0">
                           <a:solidFill>
-                            <a:srgbClr val="1C2440"/>
+                            <a:srgbClr val="1B2730"/>
                           </a:solidFill>
                         </a:rPr>
                         <a:t>€0.29</a:t>
@@ -14420,7 +14405,7 @@
                   <a:tcPr marL="76200" marR="76200" marT="38100" marB="38100" anchor="ctr">
                     <a:lnL w="12700" cap="flat" cmpd="sng" algn="ctr">
                       <a:solidFill>
-                        <a:srgbClr val="DCE2F0"/>
+                        <a:srgbClr val="D9E3EA"/>
                       </a:solidFill>
                       <a:prstDash val="solid"/>
                       <a:round/>
@@ -14429,7 +14414,7 @@
                     </a:lnL>
                     <a:lnR w="12700" cap="flat" cmpd="sng" algn="ctr">
                       <a:solidFill>
-                        <a:srgbClr val="DCE2F0"/>
+                        <a:srgbClr val="D9E3EA"/>
                       </a:solidFill>
                       <a:prstDash val="solid"/>
                       <a:round/>
@@ -14438,7 +14423,7 @@
                     </a:lnR>
                     <a:lnT w="12700" cap="flat" cmpd="sng" algn="ctr">
                       <a:solidFill>
-                        <a:srgbClr val="DCE2F0"/>
+                        <a:srgbClr val="D9E3EA"/>
                       </a:solidFill>
                       <a:prstDash val="solid"/>
                       <a:round/>
@@ -14447,7 +14432,7 @@
                     </a:lnT>
                     <a:lnB w="12700" cap="flat" cmpd="sng" algn="ctr">
                       <a:solidFill>
-                        <a:srgbClr val="DCE2F0"/>
+                        <a:srgbClr val="D9E3EA"/>
                       </a:solidFill>
                       <a:prstDash val="solid"/>
                       <a:round/>
@@ -14470,7 +14455,7 @@
                       <a:r>
                         <a:rPr lang="en-US" sz="1050" dirty="0">
                           <a:solidFill>
-                            <a:srgbClr val="1C2440"/>
+                            <a:srgbClr val="1B2730"/>
                           </a:solidFill>
                         </a:rPr>
                         <a:t>684 input + 49 output tokens per complaint, measured</a:t>
@@ -14481,7 +14466,7 @@
                   <a:tcPr marL="76200" marR="76200" marT="38100" marB="38100" anchor="ctr">
                     <a:lnL w="12700" cap="flat" cmpd="sng" algn="ctr">
                       <a:solidFill>
-                        <a:srgbClr val="DCE2F0"/>
+                        <a:srgbClr val="D9E3EA"/>
                       </a:solidFill>
                       <a:prstDash val="solid"/>
                       <a:round/>
@@ -14490,7 +14475,7 @@
                     </a:lnL>
                     <a:lnR w="12700" cap="flat" cmpd="sng" algn="ctr">
                       <a:solidFill>
-                        <a:srgbClr val="DCE2F0"/>
+                        <a:srgbClr val="D9E3EA"/>
                       </a:solidFill>
                       <a:prstDash val="solid"/>
                       <a:round/>
@@ -14499,7 +14484,7 @@
                     </a:lnR>
                     <a:lnT w="12700" cap="flat" cmpd="sng" algn="ctr">
                       <a:solidFill>
-                        <a:srgbClr val="DCE2F0"/>
+                        <a:srgbClr val="D9E3EA"/>
                       </a:solidFill>
                       <a:prstDash val="solid"/>
                       <a:round/>
@@ -14508,7 +14493,7 @@
                     </a:lnT>
                     <a:lnB w="12700" cap="flat" cmpd="sng" algn="ctr">
                       <a:solidFill>
-                        <a:srgbClr val="DCE2F0"/>
+                        <a:srgbClr val="D9E3EA"/>
                       </a:solidFill>
                       <a:prstDash val="solid"/>
                       <a:round/>
@@ -14533,7 +14518,7 @@
                       <a:r>
                         <a:rPr lang="en-US" sz="1050" b="1" dirty="0">
                           <a:solidFill>
-                            <a:srgbClr val="0F1B2D"/>
+                            <a:srgbClr val="24343F"/>
                           </a:solidFill>
                         </a:rPr>
                         <a:t>Platform and monitoring</a:t>
@@ -14544,7 +14529,7 @@
                   <a:tcPr marL="76200" marR="76200" marT="38100" marB="38100" anchor="ctr">
                     <a:lnL w="12700" cap="flat" cmpd="sng" algn="ctr">
                       <a:solidFill>
-                        <a:srgbClr val="DCE2F0"/>
+                        <a:srgbClr val="D9E3EA"/>
                       </a:solidFill>
                       <a:prstDash val="solid"/>
                       <a:round/>
@@ -14553,7 +14538,7 @@
                     </a:lnL>
                     <a:lnR w="12700" cap="flat" cmpd="sng" algn="ctr">
                       <a:solidFill>
-                        <a:srgbClr val="DCE2F0"/>
+                        <a:srgbClr val="D9E3EA"/>
                       </a:solidFill>
                       <a:prstDash val="solid"/>
                       <a:round/>
@@ -14562,7 +14547,7 @@
                     </a:lnR>
                     <a:lnT w="12700" cap="flat" cmpd="sng" algn="ctr">
                       <a:solidFill>
-                        <a:srgbClr val="DCE2F0"/>
+                        <a:srgbClr val="D9E3EA"/>
                       </a:solidFill>
                       <a:prstDash val="solid"/>
                       <a:round/>
@@ -14571,7 +14556,7 @@
                     </a:lnT>
                     <a:lnB w="12700" cap="flat" cmpd="sng" algn="ctr">
                       <a:solidFill>
-                        <a:srgbClr val="DCE2F0"/>
+                        <a:srgbClr val="D9E3EA"/>
                       </a:solidFill>
                       <a:prstDash val="solid"/>
                       <a:round/>
@@ -14594,7 +14579,7 @@
                       <a:r>
                         <a:rPr lang="en-US" sz="1050" dirty="0">
                           <a:solidFill>
-                            <a:srgbClr val="1C2440"/>
+                            <a:srgbClr val="1B2730"/>
                           </a:solidFill>
                         </a:rPr>
                         <a:t>€1,800</a:t>
@@ -14605,7 +14590,7 @@
                   <a:tcPr marL="76200" marR="76200" marT="38100" marB="38100" anchor="ctr">
                     <a:lnL w="12700" cap="flat" cmpd="sng" algn="ctr">
                       <a:solidFill>
-                        <a:srgbClr val="DCE2F0"/>
+                        <a:srgbClr val="D9E3EA"/>
                       </a:solidFill>
                       <a:prstDash val="solid"/>
                       <a:round/>
@@ -14614,7 +14599,7 @@
                     </a:lnL>
                     <a:lnR w="12700" cap="flat" cmpd="sng" algn="ctr">
                       <a:solidFill>
-                        <a:srgbClr val="DCE2F0"/>
+                        <a:srgbClr val="D9E3EA"/>
                       </a:solidFill>
                       <a:prstDash val="solid"/>
                       <a:round/>
@@ -14623,7 +14608,7 @@
                     </a:lnR>
                     <a:lnT w="12700" cap="flat" cmpd="sng" algn="ctr">
                       <a:solidFill>
-                        <a:srgbClr val="DCE2F0"/>
+                        <a:srgbClr val="D9E3EA"/>
                       </a:solidFill>
                       <a:prstDash val="solid"/>
                       <a:round/>
@@ -14632,7 +14617,7 @@
                     </a:lnT>
                     <a:lnB w="12700" cap="flat" cmpd="sng" algn="ctr">
                       <a:solidFill>
-                        <a:srgbClr val="DCE2F0"/>
+                        <a:srgbClr val="D9E3EA"/>
                       </a:solidFill>
                       <a:prstDash val="solid"/>
                       <a:round/>
@@ -14655,7 +14640,7 @@
                       <a:r>
                         <a:rPr lang="en-US" sz="1050" dirty="0">
                           <a:solidFill>
-                            <a:srgbClr val="1C2440"/>
+                            <a:srgbClr val="1B2730"/>
                           </a:solidFill>
                         </a:rPr>
                         <a:t>n8n hosting, LangSmith, logging</a:t>
@@ -14666,7 +14651,7 @@
                   <a:tcPr marL="76200" marR="76200" marT="38100" marB="38100" anchor="ctr">
                     <a:lnL w="12700" cap="flat" cmpd="sng" algn="ctr">
                       <a:solidFill>
-                        <a:srgbClr val="DCE2F0"/>
+                        <a:srgbClr val="D9E3EA"/>
                       </a:solidFill>
                       <a:prstDash val="solid"/>
                       <a:round/>
@@ -14675,7 +14660,7 @@
                     </a:lnL>
                     <a:lnR w="12700" cap="flat" cmpd="sng" algn="ctr">
                       <a:solidFill>
-                        <a:srgbClr val="DCE2F0"/>
+                        <a:srgbClr val="D9E3EA"/>
                       </a:solidFill>
                       <a:prstDash val="solid"/>
                       <a:round/>
@@ -14684,7 +14669,7 @@
                     </a:lnR>
                     <a:lnT w="12700" cap="flat" cmpd="sng" algn="ctr">
                       <a:solidFill>
-                        <a:srgbClr val="DCE2F0"/>
+                        <a:srgbClr val="D9E3EA"/>
                       </a:solidFill>
                       <a:prstDash val="solid"/>
                       <a:round/>
@@ -14693,7 +14678,7 @@
                     </a:lnT>
                     <a:lnB w="12700" cap="flat" cmpd="sng" algn="ctr">
                       <a:solidFill>
-                        <a:srgbClr val="DCE2F0"/>
+                        <a:srgbClr val="D9E3EA"/>
                       </a:solidFill>
                       <a:prstDash val="solid"/>
                       <a:round/>
@@ -14718,7 +14703,7 @@
                       <a:r>
                         <a:rPr lang="en-US" sz="1050" b="1" dirty="0">
                           <a:solidFill>
-                            <a:srgbClr val="0F1B2D"/>
+                            <a:srgbClr val="24343F"/>
                           </a:solidFill>
                         </a:rPr>
                         <a:t>Quarterly accuracy review</a:t>
@@ -14729,7 +14714,7 @@
                   <a:tcPr marL="76200" marR="76200" marT="38100" marB="38100" anchor="ctr">
                     <a:lnL w="12700" cap="flat" cmpd="sng" algn="ctr">
                       <a:solidFill>
-                        <a:srgbClr val="DCE2F0"/>
+                        <a:srgbClr val="D9E3EA"/>
                       </a:solidFill>
                       <a:prstDash val="solid"/>
                       <a:round/>
@@ -14738,7 +14723,7 @@
                     </a:lnL>
                     <a:lnR w="12700" cap="flat" cmpd="sng" algn="ctr">
                       <a:solidFill>
-                        <a:srgbClr val="DCE2F0"/>
+                        <a:srgbClr val="D9E3EA"/>
                       </a:solidFill>
                       <a:prstDash val="solid"/>
                       <a:round/>
@@ -14747,7 +14732,7 @@
                     </a:lnR>
                     <a:lnT w="12700" cap="flat" cmpd="sng" algn="ctr">
                       <a:solidFill>
-                        <a:srgbClr val="DCE2F0"/>
+                        <a:srgbClr val="D9E3EA"/>
                       </a:solidFill>
                       <a:prstDash val="solid"/>
                       <a:round/>
@@ -14756,7 +14741,7 @@
                     </a:lnT>
                     <a:lnB w="12700" cap="flat" cmpd="sng" algn="ctr">
                       <a:solidFill>
-                        <a:srgbClr val="DCE2F0"/>
+                        <a:srgbClr val="D9E3EA"/>
                       </a:solidFill>
                       <a:prstDash val="solid"/>
                       <a:round/>
@@ -14779,7 +14764,7 @@
                       <a:r>
                         <a:rPr lang="en-US" sz="1050" dirty="0">
                           <a:solidFill>
-                            <a:srgbClr val="1C2440"/>
+                            <a:srgbClr val="1B2730"/>
                           </a:solidFill>
                         </a:rPr>
                         <a:t>€5,600</a:t>
@@ -14790,7 +14775,7 @@
                   <a:tcPr marL="76200" marR="76200" marT="38100" marB="38100" anchor="ctr">
                     <a:lnL w="12700" cap="flat" cmpd="sng" algn="ctr">
                       <a:solidFill>
-                        <a:srgbClr val="DCE2F0"/>
+                        <a:srgbClr val="D9E3EA"/>
                       </a:solidFill>
                       <a:prstDash val="solid"/>
                       <a:round/>
@@ -14799,7 +14784,7 @@
                     </a:lnL>
                     <a:lnR w="12700" cap="flat" cmpd="sng" algn="ctr">
                       <a:solidFill>
-                        <a:srgbClr val="DCE2F0"/>
+                        <a:srgbClr val="D9E3EA"/>
                       </a:solidFill>
                       <a:prstDash val="solid"/>
                       <a:round/>
@@ -14808,7 +14793,7 @@
                     </a:lnR>
                     <a:lnT w="12700" cap="flat" cmpd="sng" algn="ctr">
                       <a:solidFill>
-                        <a:srgbClr val="DCE2F0"/>
+                        <a:srgbClr val="D9E3EA"/>
                       </a:solidFill>
                       <a:prstDash val="solid"/>
                       <a:round/>
@@ -14817,7 +14802,7 @@
                     </a:lnT>
                     <a:lnB w="12700" cap="flat" cmpd="sng" algn="ctr">
                       <a:solidFill>
-                        <a:srgbClr val="DCE2F0"/>
+                        <a:srgbClr val="D9E3EA"/>
                       </a:solidFill>
                       <a:prstDash val="solid"/>
                       <a:round/>
@@ -14840,7 +14825,7 @@
                       <a:r>
                         <a:rPr lang="en-US" sz="1050" dirty="0">
                           <a:solidFill>
-                            <a:srgbClr val="1C2440"/>
+                            <a:srgbClr val="1B2730"/>
                           </a:solidFill>
                         </a:rPr>
                         <a:t>Someone accountable for watching it</a:t>
@@ -14851,7 +14836,7 @@
                   <a:tcPr marL="76200" marR="76200" marT="38100" marB="38100" anchor="ctr">
                     <a:lnL w="12700" cap="flat" cmpd="sng" algn="ctr">
                       <a:solidFill>
-                        <a:srgbClr val="DCE2F0"/>
+                        <a:srgbClr val="D9E3EA"/>
                       </a:solidFill>
                       <a:prstDash val="solid"/>
                       <a:round/>
@@ -14860,7 +14845,7 @@
                     </a:lnL>
                     <a:lnR w="12700" cap="flat" cmpd="sng" algn="ctr">
                       <a:solidFill>
-                        <a:srgbClr val="DCE2F0"/>
+                        <a:srgbClr val="D9E3EA"/>
                       </a:solidFill>
                       <a:prstDash val="solid"/>
                       <a:round/>
@@ -14869,7 +14854,7 @@
                     </a:lnR>
                     <a:lnT w="12700" cap="flat" cmpd="sng" algn="ctr">
                       <a:solidFill>
-                        <a:srgbClr val="DCE2F0"/>
+                        <a:srgbClr val="D9E3EA"/>
                       </a:solidFill>
                       <a:prstDash val="solid"/>
                       <a:round/>
@@ -14878,7 +14863,7 @@
                     </a:lnT>
                     <a:lnB w="12700" cap="flat" cmpd="sng" algn="ctr">
                       <a:solidFill>
-                        <a:srgbClr val="DCE2F0"/>
+                        <a:srgbClr val="D9E3EA"/>
                       </a:solidFill>
                       <a:prstDash val="solid"/>
                       <a:round/>
@@ -14903,7 +14888,7 @@
                       <a:r>
                         <a:rPr lang="en-US" sz="1050" b="1" dirty="0">
                           <a:solidFill>
-                            <a:srgbClr val="0F1B2D"/>
+                            <a:srgbClr val="24343F"/>
                           </a:solidFill>
                         </a:rPr>
                         <a:t>Total</a:t>
@@ -14914,7 +14899,7 @@
                   <a:tcPr marL="76200" marR="76200" marT="38100" marB="38100" anchor="ctr">
                     <a:lnL w="12700" cap="flat" cmpd="sng" algn="ctr">
                       <a:solidFill>
-                        <a:srgbClr val="DCE2F0"/>
+                        <a:srgbClr val="D9E3EA"/>
                       </a:solidFill>
                       <a:prstDash val="solid"/>
                       <a:round/>
@@ -14923,7 +14908,7 @@
                     </a:lnL>
                     <a:lnR w="12700" cap="flat" cmpd="sng" algn="ctr">
                       <a:solidFill>
-                        <a:srgbClr val="DCE2F0"/>
+                        <a:srgbClr val="D9E3EA"/>
                       </a:solidFill>
                       <a:prstDash val="solid"/>
                       <a:round/>
@@ -14932,7 +14917,7 @@
                     </a:lnR>
                     <a:lnT w="12700" cap="flat" cmpd="sng" algn="ctr">
                       <a:solidFill>
-                        <a:srgbClr val="DCE2F0"/>
+                        <a:srgbClr val="D9E3EA"/>
                       </a:solidFill>
                       <a:prstDash val="solid"/>
                       <a:round/>
@@ -14941,7 +14926,7 @@
                     </a:lnT>
                     <a:lnB w="12700" cap="flat" cmpd="sng" algn="ctr">
                       <a:solidFill>
-                        <a:srgbClr val="DCE2F0"/>
+                        <a:srgbClr val="D9E3EA"/>
                       </a:solidFill>
                       <a:prstDash val="solid"/>
                       <a:round/>
@@ -14964,7 +14949,7 @@
                       <a:r>
                         <a:rPr lang="en-US" sz="1050" dirty="0">
                           <a:solidFill>
-                            <a:srgbClr val="1C2440"/>
+                            <a:srgbClr val="1B2730"/>
                           </a:solidFill>
                         </a:rPr>
                         <a:t>€7,400</a:t>
@@ -14975,7 +14960,7 @@
                   <a:tcPr marL="76200" marR="76200" marT="38100" marB="38100" anchor="ctr">
                     <a:lnL w="12700" cap="flat" cmpd="sng" algn="ctr">
                       <a:solidFill>
-                        <a:srgbClr val="DCE2F0"/>
+                        <a:srgbClr val="D9E3EA"/>
                       </a:solidFill>
                       <a:prstDash val="solid"/>
                       <a:round/>
@@ -14984,7 +14969,7 @@
                     </a:lnL>
                     <a:lnR w="12700" cap="flat" cmpd="sng" algn="ctr">
                       <a:solidFill>
-                        <a:srgbClr val="DCE2F0"/>
+                        <a:srgbClr val="D9E3EA"/>
                       </a:solidFill>
                       <a:prstDash val="solid"/>
                       <a:round/>
@@ -14993,7 +14978,7 @@
                     </a:lnR>
                     <a:lnT w="12700" cap="flat" cmpd="sng" algn="ctr">
                       <a:solidFill>
-                        <a:srgbClr val="DCE2F0"/>
+                        <a:srgbClr val="D9E3EA"/>
                       </a:solidFill>
                       <a:prstDash val="solid"/>
                       <a:round/>
@@ -15002,7 +14987,7 @@
                     </a:lnT>
                     <a:lnB w="12700" cap="flat" cmpd="sng" algn="ctr">
                       <a:solidFill>
-                        <a:srgbClr val="DCE2F0"/>
+                        <a:srgbClr val="D9E3EA"/>
                       </a:solidFill>
                       <a:prstDash val="solid"/>
                       <a:round/>
@@ -15025,7 +15010,7 @@
                       <a:r>
                         <a:rPr lang="en-US" sz="1050" dirty="0">
                           <a:solidFill>
-                            <a:srgbClr val="1C2440"/>
+                            <a:srgbClr val="1B2730"/>
                           </a:solidFill>
                         </a:rPr>
                         <a:t>Against a realistic labour saving of €4,578</a:t>
@@ -15036,7 +15021,7 @@
                   <a:tcPr marL="76200" marR="76200" marT="38100" marB="38100" anchor="ctr">
                     <a:lnL w="12700" cap="flat" cmpd="sng" algn="ctr">
                       <a:solidFill>
-                        <a:srgbClr val="DCE2F0"/>
+                        <a:srgbClr val="D9E3EA"/>
                       </a:solidFill>
                       <a:prstDash val="solid"/>
                       <a:round/>
@@ -15045,7 +15030,7 @@
                     </a:lnL>
                     <a:lnR w="12700" cap="flat" cmpd="sng" algn="ctr">
                       <a:solidFill>
-                        <a:srgbClr val="DCE2F0"/>
+                        <a:srgbClr val="D9E3EA"/>
                       </a:solidFill>
                       <a:prstDash val="solid"/>
                       <a:round/>
@@ -15054,7 +15039,7 @@
                     </a:lnR>
                     <a:lnT w="12700" cap="flat" cmpd="sng" algn="ctr">
                       <a:solidFill>
-                        <a:srgbClr val="DCE2F0"/>
+                        <a:srgbClr val="D9E3EA"/>
                       </a:solidFill>
                       <a:prstDash val="solid"/>
                       <a:round/>
@@ -15063,7 +15048,7 @@
                     </a:lnT>
                     <a:lnB w="12700" cap="flat" cmpd="sng" algn="ctr">
                       <a:solidFill>
-                        <a:srgbClr val="DCE2F0"/>
+                        <a:srgbClr val="D9E3EA"/>
                       </a:solidFill>
                       <a:prstDash val="solid"/>
                       <a:round/>
@@ -15095,7 +15080,7 @@
             <a:avLst/>
           </a:prstGeom>
           <a:solidFill>
-            <a:srgbClr val="EDF4FE"/>
+            <a:srgbClr val="EFF5F9"/>
           </a:solidFill>
           <a:ln/>
         </p:spPr>

--- a/presentation/round1_pitch.pptx
+++ b/presentation/round1_pitch.pptx
@@ -522,35 +522,35 @@
           </a:p>
           <a:p>
             <a:r>
-              <a:t>[Convention for the whole deck: you are in Chleo's meeting. Speak to the room as "you",</a:t>
-            </a:r>
-          </a:p>
-          <a:p>
-            <a:r>
-              <a:t>never about her as "she". The only exception is Slide 11, where you step out.]</a:t>
+              <a:t>[Whole deck: you are in Chleo's meeting. Speak to the room as "you", never about her as</a:t>
+            </a:r>
+          </a:p>
+          <a:p>
+            <a:r>
+              <a:t>"she". The one exception is slide 14, where you step out.]</a:t>
             </a:r>
           </a:p>
           <a:p/>
           <a:p>
             <a:r>
-              <a:t>We met at a dinner, and you told me you do not trust AI because you cannot see what it does.</a:t>
+              <a:t>We met at a dinner, and you told me you don't trust AI because you can't see what it does.</a:t>
             </a:r>
           </a:p>
           <a:p/>
           <a:p>
             <a:r>
-              <a:t>So this is not a pitch about what AI could do for you. It is about one decision you can</a:t>
-            </a:r>
-          </a:p>
-          <a:p>
-            <a:r>
-              <a:t>watch happen.</a:t>
+              <a:t>So this isn't a pitch about what AI could do for you. It's about one decision you can watch</a:t>
+            </a:r>
+          </a:p>
+          <a:p>
+            <a:r>
+              <a:t>happen. Everything here runs, and every number traces back to a repository you can open.</a:t>
             </a:r>
           </a:p>
           <a:p/>
           <a:p>
             <a:r>
-              <a:t>Everything here runs. Every number traces back to a repository you can open.</a:t>
+              <a:t>Let me start with what you said.</a:t>
             </a:r>
           </a:p>
         </p:txBody>
@@ -636,35 +636,35 @@
           <a:lstStyle/>
           <a:p>
             <a:r>
-              <a:t>[Do not rush this. It is the proof behind the previous slide.]</a:t>
+              <a:t>One of those four, on the record.</a:t>
             </a:r>
           </a:p>
           <a:p/>
           <a:p>
             <a:r>
-              <a:t>One of the four, on the record.</a:t>
+              <a:t>Eighty per cent confident, a plausible team — and the sentence it quoted simply wasn't in</a:t>
+            </a:r>
+          </a:p>
+          <a:p>
+            <a:r>
+              <a:t>the complaint. So it was stopped, and went to a person with the reason written down.</a:t>
             </a:r>
           </a:p>
           <a:p/>
           <a:p>
             <a:r>
-              <a:t>Eighty per cent confident, an entirely plausible queue. But look near the bottom — evidence</a:t>
-            </a:r>
-          </a:p>
-          <a:p>
-            <a:r>
-              <a:t>is not verbatim. So it was stopped, with a reason code, and went to a person.</a:t>
+              <a:t>That record exists for all sixty decisions, including every one where nothing happened.</a:t>
+            </a:r>
+          </a:p>
+          <a:p>
+            <a:r>
+              <a:t>That's what I mean by watching it.</a:t>
             </a:r>
           </a:p>
           <a:p/>
           <a:p>
             <a:r>
-              <a:t>That record exists for all sixty decisions, including every one where nothing happened.</a:t>
-            </a:r>
-          </a:p>
-          <a:p>
-            <a:r>
-              <a:t>That is what I mean by watching it.</a:t>
+              <a:t>Which brings me to the number I could have left out of this deck.</a:t>
             </a:r>
           </a:p>
         </p:txBody>
@@ -750,35 +750,46 @@
           <a:lstStyle/>
           <a:p>
             <a:r>
-              <a:t>[Do not soften this. Say the number plainly.]</a:t>
+              <a:t>[Don't soften this. Say it plainly.]</a:t>
             </a:r>
           </a:p>
           <a:p/>
           <a:p>
             <a:r>
-              <a:t>Sixty per cent. Not good enough to deploy, and I am showing you rather than burying it.</a:t>
+              <a:t>Sixty per cent of the time it picks the right team. Not good enough to deploy.</a:t>
             </a:r>
           </a:p>
           <a:p/>
           <a:p>
             <a:r>
-              <a:t>I checked whether the model was simply weak. It agrees with itself nearly ninety per cent</a:t>
-            </a:r>
-          </a:p>
-          <a:p>
-            <a:r>
-              <a:t>of the time — stable, but systematically at odds with the public label.</a:t>
+              <a:t>I'm showing you because the reason matters more than the number. Ask it the same complaint</a:t>
+            </a:r>
+          </a:p>
+          <a:p>
+            <a:r>
+              <a:t>twice and it answers the same way nine times in ten — so it's consistent. It just</a:t>
+            </a:r>
+          </a:p>
+          <a:p>
+            <a:r>
+              <a:t>disagrees with the official label.</a:t>
             </a:r>
           </a:p>
           <a:p/>
           <a:p>
             <a:r>
-              <a:t>So I looked at who writes that label. Your customer does, from a dropdown, untrained. It</a:t>
-            </a:r>
-          </a:p>
-          <a:p>
-            <a:r>
-              <a:t>records which box a member of the public ticked, not which team should have handled it.</a:t>
+              <a:t>And who writes that label? Your customer does, from a dropdown, untrained.</a:t>
+            </a:r>
+          </a:p>
+          <a:p/>
+          <a:p>
+            <a:r>
+              <a:t>So the fix isn't a cleverer model. It's better labels — which changes what I'd ask you to</a:t>
+            </a:r>
+          </a:p>
+          <a:p>
+            <a:r>
+              <a:t>buy. But first, what it costs.</a:t>
             </a:r>
           </a:p>
         </p:txBody>
@@ -864,46 +875,41 @@
           <a:lstStyle/>
           <a:p>
             <a:r>
-              <a:t>[Pause on the first row. Let someone react to 29 cents.]</a:t>
+              <a:t>Twenty-nine cents a year. Measured, not estimated.</a:t>
             </a:r>
           </a:p>
           <a:p/>
           <a:p>
             <a:r>
-              <a:t>Twenty-nine cents a year. That is measured, not estimated.</a:t>
+              <a:t>What actually costs money is the review — someone accountable for watching it. That's the</a:t>
+            </a:r>
+          </a:p>
+          <a:p>
+            <a:r>
+              <a:t>five thousand six hundred line, and I wouldn't remove it.</a:t>
             </a:r>
           </a:p>
           <a:p/>
           <a:p>
             <a:r>
-              <a:t>What actually costs money is the review — someone accountable for watching it. That is</a:t>
-            </a:r>
-          </a:p>
-          <a:p>
-            <a:r>
-              <a:t>the £5,600 line, and I would not remove it.</a:t>
+              <a:t>So at your volume, choosing a model isn't a budget decision. It's an accuracy decision —</a:t>
+            </a:r>
+          </a:p>
+          <a:p>
+            <a:r>
+              <a:t>the one six times more expensive would still cost about five euro a year.</a:t>
             </a:r>
           </a:p>
           <a:p/>
           <a:p>
             <a:r>
-              <a:t>Which means at your volume, choosing a model is not a budget decision at all. It is an</a:t>
-            </a:r>
-          </a:p>
-          <a:p>
-            <a:r>
-              <a:t>accuracy decision. The model six times more expensive would still cost about five euro a</a:t>
-            </a:r>
-          </a:p>
-          <a:p>
-            <a:r>
-              <a:t>year.</a:t>
+              <a:t>Which makes what I'm asking for small.</a:t>
             </a:r>
           </a:p>
           <a:p/>
           <a:p>
             <a:r>
-              <a:t>[Q: So why not always use the best model? — At this volume you should. That is the point.]</a:t>
+              <a:t>[Q: So why not always use the best model? — At this volume you should. That's the point.]</a:t>
             </a:r>
           </a:p>
         </p:txBody>
@@ -989,29 +995,29 @@
           <a:lstStyle/>
           <a:p>
             <a:r>
-              <a:t>[Slow on Phase 0. It is the unusual part and the part they will question.]</a:t>
+              <a:t>Fixed fee per phase, because your problem is uncertainty.</a:t>
             </a:r>
           </a:p>
           <a:p/>
           <a:p>
             <a:r>
-              <a:t>Fixed fee per phase, because your problem is uncertainty.</a:t>
+              <a:t>Phase 0 buys something odd: two of your handlers labelling three hundred complaints before</a:t>
+            </a:r>
+          </a:p>
+          <a:p>
+            <a:r>
+              <a:t>any AI at all. Those are the better labels — worth buying even if you never build this,</a:t>
+            </a:r>
+          </a:p>
+          <a:p>
+            <a:r>
+              <a:t>because it tells you whether your categories can be applied consistently by anybody.</a:t>
             </a:r>
           </a:p>
           <a:p/>
           <a:p>
             <a:r>
-              <a:t>Phase 0 buys something odd: two of your handlers labelling three hundred complaints before</a:t>
-            </a:r>
-          </a:p>
-          <a:p>
-            <a:r>
-              <a:t>any AI at all. Worth buying even if you never build this — it tells you whether your</a:t>
-            </a:r>
-          </a:p>
-          <a:p>
-            <a:r>
-              <a:t>categories can be applied consistently by anybody.</a:t>
+              <a:t>For your operations team that's about six days, and nothing changes about who decides.</a:t>
             </a:r>
           </a:p>
           <a:p/>
@@ -1023,12 +1029,12 @@
           <a:p/>
           <a:p>
             <a:r>
-              <a:t>[If pressed on ROI:] The break-even is four avoided ombudsman referrals a year. I am not</a:t>
-            </a:r>
-          </a:p>
-          <a:p>
-            <a:r>
-              <a:t>claiming we hit it. That is what the pilot measures.</a:t>
+              <a:t>[If pressed on ROI: break-even is four avoided ombudsman referrals a year. I'm not</a:t>
+            </a:r>
+          </a:p>
+          <a:p>
+            <a:r>
+              <a:t>claiming we hit it. That's what the pilot measures.]</a:t>
             </a:r>
           </a:p>
         </p:txBody>
@@ -1120,7 +1126,7 @@
           <a:p/>
           <a:p>
             <a:r>
-              <a:t>The questions are on the slide, so I will not read them.</a:t>
+              <a:t>The questions are on the slide, so I won't read them.</a:t>
             </a:r>
           </a:p>
           <a:p/>
@@ -1137,7 +1143,7 @@
           <a:p/>
           <a:p>
             <a:r>
-              <a:t>I think that is right. I am not certain it survives contact with a real client.</a:t>
+              <a:t>I think that's right. I'm not certain it survives contact with a real client.</a:t>
             </a:r>
           </a:p>
         </p:txBody>
@@ -1229,28 +1235,28 @@
           <a:p/>
           <a:p>
             <a:r>
-              <a:t>Three things the data appeared to say, and did not.</a:t>
+              <a:t>Three things the data appeared to say, and didn't.</a:t>
             </a:r>
           </a:p>
           <a:p/>
           <a:p>
             <a:r>
-              <a:t>The July cliff is the one that would have caught me. The CFPB only publishes a complaint</a:t>
-            </a:r>
-          </a:p>
-          <a:p>
-            <a:r>
-              <a:t>once the firm has responded, so the newest weeks are always thin. Read naively it is a</a:t>
-            </a:r>
-          </a:p>
-          <a:p>
-            <a:r>
-              <a:t>73% collapse in complaints and a wonderful slide. It is an artefact — I cut the window at</a:t>
-            </a:r>
-          </a:p>
-          <a:p>
-            <a:r>
-              <a:t>27 June.</a:t>
+              <a:t>The July cliff is the one that would have caught me. The regulator only publishes a</a:t>
+            </a:r>
+          </a:p>
+          <a:p>
+            <a:r>
+              <a:t>complaint once the firm has responded, so the newest weeks are always thin. Read naively</a:t>
+            </a:r>
+          </a:p>
+          <a:p>
+            <a:r>
+              <a:t>that's a 73% collapse in complaints and a wonderful slide. It's an artefact — I cut the</a:t>
+            </a:r>
+          </a:p>
+          <a:p>
+            <a:r>
+              <a:t>window at 27 June.</a:t>
             </a:r>
           </a:p>
           <a:p/>
@@ -1347,7 +1353,7 @@
           <a:lstStyle/>
           <a:p>
             <a:r>
-              <a:t>[Only if the legal seat asks.]</a:t>
+              <a:t>[Only if the legal seat wants more than the line on slide 7.]</a:t>
             </a:r>
           </a:p>
           <a:p/>
@@ -1364,28 +1370,28 @@
           <a:p/>
           <a:p>
             <a:r>
-              <a:t>What holds it there is the human decision boundary. If it ever routes autonomously that</a:t>
-            </a:r>
-          </a:p>
-          <a:p>
-            <a:r>
-              <a:t>is a new assessment, not an upgrade to this one.</a:t>
+              <a:t>What holds it there is the human decision boundary. If it ever routes on its own, that's a</a:t>
+            </a:r>
+          </a:p>
+          <a:p>
+            <a:r>
+              <a:t>new assessment, not an upgrade to this one.</a:t>
             </a:r>
           </a:p>
           <a:p/>
           <a:p>
             <a:r>
-              <a:t>I am deliberately not giving you a final classification today. Round 2 owes the</a:t>
-            </a:r>
-          </a:p>
-          <a:p>
-            <a:r>
-              <a:t>step-by-step reasoning. A confident tier label without that work is exactly the unearned</a:t>
-            </a:r>
-          </a:p>
-          <a:p>
-            <a:r>
-              <a:t>certainty you were right to distrust in the first place.</a:t>
+              <a:t>I'm deliberately not giving you a final classification today. Round 2 owes the</a:t>
+            </a:r>
+          </a:p>
+          <a:p>
+            <a:r>
+              <a:t>step-by-step reasoning. A confident label without that work is exactly the unearned</a:t>
+            </a:r>
+          </a:p>
+          <a:p>
+            <a:r>
+              <a:t>certainty you were right to distrust.</a:t>
             </a:r>
           </a:p>
         </p:txBody>
@@ -1488,12 +1494,12 @@
           </a:p>
           <a:p>
             <a:r>
-              <a:t>employer on-costs — it is labelled as a judgement in the cost model. I have not dressed</a:t>
-            </a:r>
-          </a:p>
-          <a:p>
-            <a:r>
-              <a:t>an estimate up as a finding anywhere in this deck.</a:t>
+              <a:t>employer on-costs — it's labelled as a judgement in the cost model. I haven't dressed an</a:t>
+            </a:r>
+          </a:p>
+          <a:p>
+            <a:r>
+              <a:t>estimate up as a finding anywhere.</a:t>
             </a:r>
           </a:p>
         </p:txBody>
@@ -1579,7 +1585,7 @@
           <a:lstStyle/>
           <a:p>
             <a:r>
-              <a:t>[Point at the middle card, not the left one. The fear is the slide.]</a:t>
+              <a:t>[Point at the middle card. The fear is the slide.]</a:t>
             </a:r>
           </a:p>
           <a:p/>
@@ -1588,32 +1594,32 @@
               <a:t>You never asked me whether AI works. You asked what it is, and how you would see it.</a:t>
             </a:r>
           </a:p>
+          <a:p>
+            <a:r>
+              <a:t>Those are the two questions your regulator will ask you as well.</a:t>
+            </a:r>
+          </a:p>
           <a:p/>
           <a:p>
             <a:r>
-              <a:t>Those are the two questions your regulator will ask you as well, which is why I have built</a:t>
-            </a:r>
-          </a:p>
-          <a:p>
-            <a:r>
-              <a:t>the answer to them rather than a demo.</a:t>
+              <a:t>So I'm not proposing a platform. I'm proposing one place in your business where you can</a:t>
+            </a:r>
+          </a:p>
+          <a:p>
+            <a:r>
+              <a:t>watch a machine decide — and overrule it.</a:t>
             </a:r>
           </a:p>
           <a:p/>
           <a:p>
             <a:r>
-              <a:t>So I am not proposing a platform. I am proposing one place in your business where you can</a:t>
-            </a:r>
-          </a:p>
-          <a:p>
-            <a:r>
-              <a:t>watch a machine decide — and overrule it.</a:t>
+              <a:t>There were three candidates for that place.</a:t>
             </a:r>
           </a:p>
           <a:p/>
           <a:p>
             <a:r>
-              <a:t>[Q: Is this too small to matter? — Small is the point. You cannot audit something you</a:t>
+              <a:t>[Q: Isn't this too small to matter? — Small is the point. You can't audit something you</a:t>
             </a:r>
           </a:p>
           <a:p>
@@ -1704,35 +1710,46 @@
           <a:lstStyle/>
           <a:p>
             <a:r>
-              <a:t>[Do not read the six items. Give them four seconds to scan, then talk about the ordering.]</a:t>
+              <a:t>[Four seconds to scan. Don't read the six items.]</a:t>
             </a:r>
           </a:p>
           <a:p/>
           <a:p>
             <a:r>
-              <a:t>The left column is ranked by one thing: how visible the reasoning is. Not by which saves</a:t>
-            </a:r>
-          </a:p>
-          <a:p>
-            <a:r>
-              <a:t>most.</a:t>
+              <a:t>Ranked by one thing: how visible the reasoning is. Not by which saves most. Complaint</a:t>
+            </a:r>
+          </a:p>
+          <a:p>
+            <a:r>
+              <a:t>triage is first because you can watch it work.</a:t>
             </a:r>
           </a:p>
           <a:p/>
           <a:p>
             <a:r>
-              <a:t>The two on the right I am refusing. A chatbot fails in public, in your customer's voice,</a:t>
-            </a:r>
-          </a:p>
-          <a:p>
-            <a:r>
-              <a:t>with errors nobody can bound. Credit scoring is Annex III high-risk under the AI Act.</a:t>
+              <a:t>The right column is what I'm refusing. A chatbot fails in public, in your customer's</a:t>
+            </a:r>
+          </a:p>
+          <a:p>
+            <a:r>
+              <a:t>voice. Credit scoring is high-risk under the AI Act — months of conformity work before a</a:t>
+            </a:r>
+          </a:p>
+          <a:p>
+            <a:r>
+              <a:t>single decision goes live.</a:t>
             </a:r>
           </a:p>
           <a:p/>
           <a:p>
             <a:r>
               <a:t>[Land this:] The fastest way to earn your trust is to tell you what not to buy.</a:t>
+            </a:r>
+          </a:p>
+          <a:p/>
+          <a:p>
+            <a:r>
+              <a:t>So: complaint triage. Here's what your complaints actually look like.</a:t>
             </a:r>
           </a:p>
         </p:txBody>
@@ -1818,40 +1835,40 @@
           <a:lstStyle/>
           <a:p>
             <a:r>
-              <a:t>[Switch to the live dashboard here if you can. This slide is the fallback, and it is a</a:t>
-            </a:r>
-          </a:p>
-          <a:p>
-            <a:r>
-              <a:t>real screenshot of the same thing — use it if the demo is cold.]</a:t>
+              <a:t>[Switch to the live dashboard here if you can. This slide is the fallback — it's a real</a:t>
+            </a:r>
+          </a:p>
+          <a:p>
+            <a:r>
+              <a:t>screenshot of the same thing.]</a:t>
             </a:r>
           </a:p>
           <a:p/>
           <a:p>
             <a:r>
-              <a:t>Four numbers across the top. Only the third is in money.</a:t>
+              <a:t>Nearly seventeen thousand real complaints, on one screen.</a:t>
             </a:r>
           </a:p>
           <a:p/>
           <a:p>
             <a:r>
-              <a:t>Hold on to the fourth: 46% of what arrives could be sorted automatically. Not "AI will</a:t>
-            </a:r>
-          </a:p>
-          <a:p>
-            <a:r>
-              <a:t>transform complaints" — a share of something you already do.</a:t>
+              <a:t>Four numbers across the top, and only the third is in money. Hold on to the fourth: 46% of</a:t>
+            </a:r>
+          </a:p>
+          <a:p>
+            <a:r>
+              <a:t>what arrives could be sorted automatically — a share of something you already do, not a</a:t>
+            </a:r>
+          </a:p>
+          <a:p>
+            <a:r>
+              <a:t>promise about transformation.</a:t>
             </a:r>
           </a:p>
           <a:p/>
           <a:p>
             <a:r>
-              <a:t>Every panel says what it means in plain English underneath. No statistics language</a:t>
-            </a:r>
-          </a:p>
-          <a:p>
-            <a:r>
-              <a:t>anywhere, deliberately.</a:t>
+              <a:t>Two things in here matter more than the rest.</a:t>
             </a:r>
           </a:p>
         </p:txBody>
@@ -1937,51 +1954,51 @@
           <a:lstStyle/>
           <a:p>
             <a:r>
-              <a:t>[Switch to the live dashboard now if the room is warm. Otherwise stay on the table.]</a:t>
+              <a:t>The first one. Read the last column, not the first.</a:t>
             </a:r>
           </a:p>
           <a:p/>
           <a:p>
             <a:r>
-              <a:t>Read the last column, not the first.</a:t>
+              <a:t>Deposits and cards are two thirds of your volume — but money leaves the building 5.7 times</a:t>
+            </a:r>
+          </a:p>
+          <a:p>
+            <a:r>
+              <a:t>more often on a card complaint than a vehicle loan.</a:t>
             </a:r>
           </a:p>
           <a:p/>
           <a:p>
             <a:r>
-              <a:t>Deposits and cards are two thirds of your volume — but a card complaint ends with money</a:t>
-            </a:r>
-          </a:p>
-          <a:p>
-            <a:r>
-              <a:t>leaving the building 5.7 times more often than a vehicle loan complaint does.</a:t>
+              <a:t>So which queue a complaint lands in isn't administration. It's money. That's your argument</a:t>
+            </a:r>
+          </a:p>
+          <a:p>
+            <a:r>
+              <a:t>for accurate routing, not mine.</a:t>
             </a:r>
           </a:p>
           <a:p/>
           <a:p>
             <a:r>
-              <a:t>So which queue a complaint lands in is not administration. It is money. That is your</a:t>
-            </a:r>
-          </a:p>
-          <a:p>
-            <a:r>
-              <a:t>argument for accurate routing, and I am only pointing at it.</a:t>
+              <a:t>The second thing is what makes this buildable at all.</a:t>
             </a:r>
           </a:p>
           <a:p/>
           <a:p>
             <a:r>
-              <a:t>[Q: Is this your data? — No. It is the US regulator's public complaint database, 16,839</a:t>
-            </a:r>
-          </a:p>
-          <a:p>
-            <a:r>
-              <a:t>complaints, used as a proxy for the shape of a complaint inbox — the mix and the</a:t>
-            </a:r>
-          </a:p>
-          <a:p>
-            <a:r>
-              <a:t>language. Not a forecast of your volumes. Your real numbers come from Phase 0.]</a:t>
+              <a:t>[Q: Is this your data? — No. It's the US regulator's public database, used as a proxy for</a:t>
+            </a:r>
+          </a:p>
+          <a:p>
+            <a:r>
+              <a:t>the shape of a complaint inbox, not a forecast of your volumes. Your real numbers come</a:t>
+            </a:r>
+          </a:p>
+          <a:p>
+            <a:r>
+              <a:t>from Phase 0.]</a:t>
             </a:r>
           </a:p>
         </p:txBody>
@@ -2067,35 +2084,35 @@
           <a:lstStyle/>
           <a:p>
             <a:r>
-              <a:t>[Let the 46.1% sit. This is the slide the whole proposal rests on.]</a:t>
+              <a:t>Sixty-four categories exist. Five of them are nearly half your inbox.</a:t>
             </a:r>
           </a:p>
           <a:p/>
           <a:p>
             <a:r>
-              <a:t>Sixty-four categories exist. Five of them are nearly half your inbox.</a:t>
+              <a:t>So I'm not asking a machine to be good at sixty-four things. I'm asking it to be good at</a:t>
+            </a:r>
+          </a:p>
+          <a:p>
+            <a:r>
+              <a:t>five, and to admit when it's outside them.</a:t>
             </a:r>
           </a:p>
           <a:p/>
           <a:p>
             <a:r>
-              <a:t>That is what makes this buildable. I am not asking a model to be good at sixty-four</a:t>
-            </a:r>
-          </a:p>
-          <a:p>
-            <a:r>
-              <a:t>things — I am asking it to be good at five and to admit when it is outside them.</a:t>
+              <a:t>That's the difference between "AI for complaints", which I couldn't finish, and something</a:t>
+            </a:r>
+          </a:p>
+          <a:p>
+            <a:r>
+              <a:t>I can hand you working.</a:t>
             </a:r>
           </a:p>
           <a:p/>
           <a:p>
             <a:r>
-              <a:t>It is the difference between "AI for complaints", which I could not finish, and something</a:t>
-            </a:r>
-          </a:p>
-          <a:p>
-            <a:r>
-              <a:t>I can hand you working.</a:t>
+              <a:t>Here's how it works.</a:t>
             </a:r>
           </a:p>
         </p:txBody>
@@ -2181,56 +2198,35 @@
           <a:lstStyle/>
           <a:p>
             <a:r>
-              <a:t>[Switch to the live n8n window. If the demo is cold, narrate the chevrons and play the</a:t>
-            </a:r>
-          </a:p>
-          <a:p>
-            <a:r>
-              <a:t>recording.]</a:t>
+              <a:t>Four steps, and notice where the chain ends — a person decides. The machine never routes</a:t>
+            </a:r>
+          </a:p>
+          <a:p>
+            <a:r>
+              <a:t>anything itself.</a:t>
             </a:r>
           </a:p>
           <a:p/>
           <a:p>
             <a:r>
-              <a:t>Four steps, and notice where the chain ends. A person decides. The machine never routes</a:t>
-            </a:r>
-          </a:p>
-          <a:p>
-            <a:r>
-              <a:t>anything on its own.</a:t>
+              <a:t>The third box is the work: the model's answer is a claim, not a result. Four checks before</a:t>
+            </a:r>
+          </a:p>
+          <a:p>
+            <a:r>
+              <a:t>anyone sees it, and they're on the slide.</a:t>
             </a:r>
           </a:p>
           <a:p/>
           <a:p>
             <a:r>
-              <a:t>The third box is where the work is. The model's answer is treated as a claim, not a</a:t>
-            </a:r>
-          </a:p>
-          <a:p>
-            <a:r>
-              <a:t>result — it gets checked before anyone sees it.</a:t>
+              <a:t>That human boundary is also what keeps this limited-risk under the AI Act.</a:t>
             </a:r>
           </a:p>
           <a:p/>
           <a:p>
             <a:r>
-              <a:t>[If you have time, expand one guard:] The fourth check is the interesting one. The model</a:t>
-            </a:r>
-          </a:p>
-          <a:p>
-            <a:r>
-              <a:t>has to quote your customer's own words back, and we verify that quote is really in the</a:t>
-            </a:r>
-          </a:p>
-          <a:p>
-            <a:r>
-              <a:t>complaint before anyone sees it.</a:t>
-            </a:r>
-          </a:p>
-          <a:p/>
-          <a:p>
-            <a:r>
-              <a:t>[Q: Why n8n rather than code? — Because you can read it. That is the entire reason.]</a:t>
+              <a:t>Let me show you it running.</a:t>
             </a:r>
           </a:p>
         </p:txBody>
@@ -2322,29 +2318,30 @@
           <a:p/>
           <a:p>
             <a:r>
-              <a:t>Green ticks all the way across, on a real complaint from the corpus.</a:t>
+              <a:t>Green ticks all the way across, on a real complaint.</a:t>
             </a:r>
           </a:p>
           <a:p/>
           <a:p>
             <a:r>
-              <a:t>The bottom panel is the interesting part — the proposed team, the confidence, and the</a:t>
-            </a:r>
-          </a:p>
-          <a:p>
-            <a:r>
-              <a:t>customer's own words it relied on. It sent this one to Disputes and fraud, exactly where</a:t>
-            </a:r>
-          </a:p>
-          <a:p>
-            <a:r>
-              <a:t>the regulator's label put it.</a:t>
+              <a:t>The bottom panel is the interesting part. It sent this one to Disputes and fraud —</a:t>
+            </a:r>
+          </a:p>
+          <a:p>
+            <a:r>
+              <a:t>exactly where the regulator's own label put it.</a:t>
             </a:r>
           </a:p>
           <a:p/>
           <a:p>
             <a:r>
-              <a:t>Nothing here is a mockup. Click any node, read its real input and output.</a:t>
+              <a:t>Nothing here is a mockup. Click any node and you read its real input and output.</a:t>
+            </a:r>
+          </a:p>
+          <a:p/>
+          <a:p>
+            <a:r>
+              <a:t>That's one that worked. Here's what happens when it doesn't.</a:t>
             </a:r>
           </a:p>
         </p:txBody>
@@ -2436,34 +2433,34 @@
           <a:p/>
           <a:p>
             <a:r>
-              <a:t>Four times out of sixty, the model invented its justification — confidently quoting words</a:t>
-            </a:r>
-          </a:p>
-          <a:p>
-            <a:r>
-              <a:t>that were not in the complaint.</a:t>
+              <a:t>Four times out of sixty, the model made up its justification. It confidently quoted words</a:t>
+            </a:r>
+          </a:p>
+          <a:p>
+            <a:r>
+              <a:t>that were not in the complaint at all.</a:t>
             </a:r>
           </a:p>
           <a:p/>
           <a:p>
             <a:r>
-              <a:t>Every one was caught, because the system checks the quote against the text rather than</a:t>
-            </a:r>
-          </a:p>
-          <a:p>
-            <a:r>
-              <a:t>trusting it.</a:t>
+              <a:t>Every one was caught, because the system checks the quote against the text instead of</a:t>
+            </a:r>
+          </a:p>
+          <a:p>
+            <a:r>
+              <a:t>trusting it. Bottom row — nothing was silently wrong.</a:t>
             </a:r>
           </a:p>
           <a:p/>
           <a:p>
             <a:r>
-              <a:t>Look at the bottom row. Nothing was silently wrong. A system that explains itself</a:t>
-            </a:r>
-          </a:p>
-          <a:p>
-            <a:r>
-              <a:t>convincingly but falsely is the failure I instrument for.</a:t>
+              <a:t>A system that explains itself convincingly but falsely is more dangerous than one that</a:t>
+            </a:r>
+          </a:p>
+          <a:p>
+            <a:r>
+              <a:t>says nothing. Let me show you one.</a:t>
             </a:r>
           </a:p>
         </p:txBody>
@@ -3570,7 +3567,7 @@
                   <a:srgbClr val="C6D8E4"/>
                 </a:solidFill>
               </a:rPr>
-              <a:t>The model was 0.8 confident and named a plausible queue</a:t>
+              <a:t>It was 80% confident and named a completely plausible team</a:t>
             </a:r>
             <a:endParaRPr lang="en-US" sz="1250" dirty="0"/>
           </a:p>
@@ -3588,7 +3585,7 @@
                   <a:srgbClr val="C6D8E4"/>
                 </a:solidFill>
               </a:rPr>
-              <a:t>But evidence_is_verbatim is false — its quote was not in the complaint</a:t>
+              <a:t>But the sentence it quoted was not in the complaint (evidence_is_verbatim: false)</a:t>
             </a:r>
             <a:endParaRPr lang="en-US" sz="1250" dirty="0"/>
           </a:p>
@@ -3606,7 +3603,7 @@
                   <a:srgbClr val="C6D8E4"/>
                 </a:solidFill>
               </a:rPr>
-              <a:t>reason_code: REJECT_EVIDENCE_NOT_VERBATIM. Routed to a person instead</a:t>
+              <a:t>So it was stopped and sent to a person, with the reason written down</a:t>
             </a:r>
             <a:endParaRPr lang="en-US" sz="1250" dirty="0"/>
           </a:p>
@@ -3624,7 +3621,7 @@
                   <a:srgbClr val="C6D8E4"/>
                 </a:solidFill>
               </a:rPr>
-              <a:t>This is the record for every decision, including the ones where nothing happened.</a:t>
+              <a:t>This record exists for every decision — including the ones where nothing happened.</a:t>
             </a:r>
             <a:endParaRPr lang="en-US" sz="1250" dirty="0"/>
           </a:p>
@@ -4271,7 +4268,7 @@
                 <a:ea typeface="Calibri" pitchFamily="34" charset="-122"/>
                 <a:cs typeface="Calibri" pitchFamily="34" charset="-120"/>
               </a:rPr>
-              <a:t>The model agrees with itself 88–89% of the time — it is stable</a:t>
+              <a:t>Ask it the same complaint twice and it answers the same way ~9 times in 10</a:t>
             </a:r>
             <a:endParaRPr lang="en-US" sz="1150" dirty="0"/>
           </a:p>
@@ -4292,7 +4289,7 @@
                 <a:ea typeface="Calibri" pitchFamily="34" charset="-122"/>
                 <a:cs typeface="Calibri" pitchFamily="34" charset="-120"/>
               </a:rPr>
-              <a:t>It disagrees with the public label systematically, not randomly</a:t>
+              <a:t>So it is consistent — it just disagrees with the official label</a:t>
             </a:r>
             <a:endParaRPr lang="en-US" sz="1150" dirty="0"/>
           </a:p>
@@ -4883,7 +4880,7 @@
                             <a:srgbClr val="24343F"/>
                           </a:solidFill>
                         </a:rPr>
-                        <a:t>LLM API</a:t>
+                        <a:t>The AI itself</a:t>
                       </a:r>
                       <a:endParaRPr lang="en-US" sz="1050" dirty="0"/>
                     </a:p>
@@ -5005,7 +5002,7 @@
                             <a:srgbClr val="1B2730"/>
                           </a:solidFill>
                         </a:rPr>
-                        <a:t>684 input + 49 output tokens per complaint, measured</a:t>
+                        <a:t>Measured on real complaints, at published prices</a:t>
                       </a:r>
                       <a:endParaRPr lang="en-US" sz="1050" dirty="0"/>
                     </a:p>
@@ -15115,7 +15112,7 @@
                 <a:ea typeface="Calibri" pitchFamily="34" charset="-122"/>
                 <a:cs typeface="Calibri" pitchFamily="34" charset="-120"/>
               </a:rPr>
-              <a:t>Four guards check it</a:t>
+              <a:t>Four checks run</a:t>
             </a:r>
             <a:endParaRPr lang="en-US" sz="1050" dirty="0"/>
           </a:p>
@@ -15267,7 +15264,7 @@
                 <a:ea typeface="Calibri" pitchFamily="34" charset="-122"/>
                 <a:cs typeface="Calibri" pitchFamily="34" charset="-120"/>
               </a:rPr>
-              <a:t>It must return valid JSON, name a queue that exists for that product, clear 0.70 confidence, and quote the complaint verbatim. Any failure goes to a human, with the reason stated.</a:t>
+              <a:t>Before anyone sees it, four things are checked: that it answered properly, that the team it picked exists for that product, that it was confident enough, and that the sentence it quoted is really in the complaint. Any failure goes to a person, with the reason stated.</a:t>
             </a:r>
             <a:endParaRPr lang="en-US" sz="1250" dirty="0"/>
           </a:p>

--- a/presentation/round1_pitch.pptx
+++ b/presentation/round1_pitch.pptx
@@ -636,35 +636,45 @@
           <a:lstStyle/>
           <a:p>
             <a:r>
-              <a:t>One of those four, on the record.</a:t>
+              <a:t>[Don't soften this. Say it plainly.]</a:t>
             </a:r>
           </a:p>
           <a:p/>
           <a:p>
             <a:r>
-              <a:t>Eighty per cent confident, a plausible team — and the sentence it quoted simply wasn't in</a:t>
-            </a:r>
-          </a:p>
-          <a:p>
-            <a:r>
-              <a:t>the complaint. So it was stopped, and went to a person with the reason written down.</a:t>
+              <a:t>Sixty per cent of the time it picks the right team — measured on that same public data.</a:t>
+            </a:r>
+          </a:p>
+          <a:p>
+            <a:r>
+              <a:t>Not good enough to deploy.</a:t>
             </a:r>
           </a:p>
           <a:p/>
           <a:p>
             <a:r>
-              <a:t>That record exists for all sixty decisions, including every one where nothing happened.</a:t>
-            </a:r>
-          </a:p>
-          <a:p>
-            <a:r>
-              <a:t>That's what I mean by watching it.</a:t>
+              <a:t>I'm showing you because the reason matters more. Ask it the same complaint twice and it</a:t>
+            </a:r>
+          </a:p>
+          <a:p>
+            <a:r>
+              <a:t>answers the same way nine times in ten — so it's consistent. It just disagrees with the</a:t>
+            </a:r>
+          </a:p>
+          <a:p>
+            <a:r>
+              <a:t>official label. And who writes that label? Your customer does, from a dropdown, untrained.</a:t>
             </a:r>
           </a:p>
           <a:p/>
           <a:p>
             <a:r>
-              <a:t>Which brings me to the number I could have left out of this deck.</a:t>
+              <a:t>So the fix isn't a cleverer model. It's better labels — which changes what I'd ask you to</a:t>
+            </a:r>
+          </a:p>
+          <a:p>
+            <a:r>
+              <a:t>buy. But first, what it costs.</a:t>
             </a:r>
           </a:p>
         </p:txBody>
@@ -750,46 +760,46 @@
           <a:lstStyle/>
           <a:p>
             <a:r>
-              <a:t>[Don't soften this. Say it plainly.]</a:t>
+              <a:t>Twenty-nine cents a year. Measured, not estimated.</a:t>
             </a:r>
           </a:p>
           <a:p/>
           <a:p>
             <a:r>
-              <a:t>Sixty per cent of the time it picks the right team. Not good enough to deploy.</a:t>
+              <a:t>What costs money is the review — someone accountable for watching it. That's the five</a:t>
+            </a:r>
+          </a:p>
+          <a:p>
+            <a:r>
+              <a:t>thousand six hundred line, and I wouldn't remove it.</a:t>
             </a:r>
           </a:p>
           <a:p/>
           <a:p>
             <a:r>
-              <a:t>I'm showing you because the reason matters more than the number. Ask it the same complaint</a:t>
-            </a:r>
-          </a:p>
-          <a:p>
-            <a:r>
-              <a:t>twice and it answers the same way nine times in ten — so it's consistent. It just</a:t>
-            </a:r>
-          </a:p>
-          <a:p>
-            <a:r>
-              <a:t>disagrees with the official label.</a:t>
+              <a:t>Those euros assume a firm your size, so treat them as an order of magnitude. The ratio is</a:t>
+            </a:r>
+          </a:p>
+          <a:p>
+            <a:r>
+              <a:t>what survives whatever your real volume turns out to be: choosing a model isn't a budget</a:t>
+            </a:r>
+          </a:p>
+          <a:p>
+            <a:r>
+              <a:t>decision, it's an accuracy one.</a:t>
             </a:r>
           </a:p>
           <a:p/>
           <a:p>
             <a:r>
-              <a:t>And who writes that label? Your customer does, from a dropdown, untrained.</a:t>
+              <a:t>Which makes what I'm asking for small.</a:t>
             </a:r>
           </a:p>
           <a:p/>
           <a:p>
             <a:r>
-              <a:t>So the fix isn't a cleverer model. It's better labels — which changes what I'd ask you to</a:t>
-            </a:r>
-          </a:p>
-          <a:p>
-            <a:r>
-              <a:t>buy. But first, what it costs.</a:t>
+              <a:t>[Q: So why not always use the best model? — At this volume you should. That's the point.]</a:t>
             </a:r>
           </a:p>
         </p:txBody>
@@ -875,41 +885,46 @@
           <a:lstStyle/>
           <a:p>
             <a:r>
-              <a:t>Twenty-nine cents a year. Measured, not estimated.</a:t>
+              <a:t>Fixed fee per phase, because your problem is uncertainty.</a:t>
             </a:r>
           </a:p>
           <a:p/>
           <a:p>
             <a:r>
-              <a:t>What actually costs money is the review — someone accountable for watching it. That's the</a:t>
-            </a:r>
-          </a:p>
-          <a:p>
-            <a:r>
-              <a:t>five thousand six hundred line, and I wouldn't remove it.</a:t>
+              <a:t>Phase 0 buys something odd: two of your handlers labelling three hundred complaints before</a:t>
+            </a:r>
+          </a:p>
+          <a:p>
+            <a:r>
+              <a:t>any AI at all. Those are the better labels — and it's worth buying even if you never build</a:t>
+            </a:r>
+          </a:p>
+          <a:p>
+            <a:r>
+              <a:t>this, because it tells you whether your categories can be applied consistently by anybody.</a:t>
             </a:r>
           </a:p>
           <a:p/>
           <a:p>
             <a:r>
-              <a:t>So at your volume, choosing a model isn't a budget decision. It's an accuracy decision —</a:t>
-            </a:r>
-          </a:p>
-          <a:p>
-            <a:r>
-              <a:t>the one six times more expensive would still cost about five euro a year.</a:t>
+              <a:t>For operations that's about six days, and nothing changes about who decides.</a:t>
             </a:r>
           </a:p>
           <a:p/>
           <a:p>
             <a:r>
-              <a:t>Which makes what I'm asking for small.</a:t>
+              <a:t>Fourteen thousand to reach a decision, not twenty-four and a half to a deployment.</a:t>
             </a:r>
           </a:p>
           <a:p/>
           <a:p>
             <a:r>
-              <a:t>[Q: So why not always use the best model? — At this volume you should. That's the point.]</a:t>
+              <a:t>[If pressed on ROI: break-even is four avoided ombudsman referrals a year. I'm not</a:t>
+            </a:r>
+          </a:p>
+          <a:p>
+            <a:r>
+              <a:t>claiming we hit it. That's what the pilot measures.]</a:t>
             </a:r>
           </a:p>
         </p:txBody>
@@ -995,46 +1010,30 @@
           <a:lstStyle/>
           <a:p>
             <a:r>
-              <a:t>Fixed fee per phase, because your problem is uncertainty.</a:t>
+              <a:t>[Stop pitching. Drop the client voice — this is to you as assessors, not as Chleo.]</a:t>
             </a:r>
           </a:p>
           <a:p/>
           <a:p>
             <a:r>
-              <a:t>Phase 0 buys something odd: two of your handlers labelling three hundred complaints before</a:t>
-            </a:r>
-          </a:p>
-          <a:p>
-            <a:r>
-              <a:t>any AI at all. Those are the better labels — worth buying even if you never build this,</a:t>
-            </a:r>
-          </a:p>
-          <a:p>
-            <a:r>
-              <a:t>because it tells you whether your categories can be applied consistently by anybody.</a:t>
+              <a:t>The questions are on the slide, so I won't read them.</a:t>
             </a:r>
           </a:p>
           <a:p/>
           <a:p>
             <a:r>
-              <a:t>For your operations team that's about six days, and nothing changes about who decides.</a:t>
+              <a:t>Push me on the first. I built this pitch around admitting a weak number early, betting</a:t>
+            </a:r>
+          </a:p>
+          <a:p>
+            <a:r>
+              <a:t>that an honest sixty per cent buys more trust than a confident eighty-five.</a:t>
             </a:r>
           </a:p>
           <a:p/>
           <a:p>
             <a:r>
-              <a:t>Fourteen thousand to reach a decision, not twenty-four and a half to a deployment.</a:t>
-            </a:r>
-          </a:p>
-          <a:p/>
-          <a:p>
-            <a:r>
-              <a:t>[If pressed on ROI: break-even is four avoided ombudsman referrals a year. I'm not</a:t>
-            </a:r>
-          </a:p>
-          <a:p>
-            <a:r>
-              <a:t>claiming we hit it. That's what the pilot measures.]</a:t>
+              <a:t>I think that's right. I'm not certain it survives contact with a real client.</a:t>
             </a:r>
           </a:p>
         </p:txBody>
@@ -1120,30 +1119,29 @@
           <a:lstStyle/>
           <a:p>
             <a:r>
-              <a:t>[Stop pitching. Drop the client voice — this is to you as assessors, not as Chleo.]</a:t>
+              <a:t>[Only if the room asks where the money actually goes.]</a:t>
             </a:r>
           </a:p>
           <a:p/>
           <a:p>
             <a:r>
-              <a:t>The questions are on the slide, so I won't read them.</a:t>
+              <a:t>Deposits and cards are two thirds of the volume in this data — but money leaves the</a:t>
+            </a:r>
+          </a:p>
+          <a:p>
+            <a:r>
+              <a:t>building 5.7 times more often on a card complaint than on a vehicle loan.</a:t>
             </a:r>
           </a:p>
           <a:p/>
           <a:p>
             <a:r>
-              <a:t>Push me on the first. I built this pitch around admitting a weak number early, betting</a:t>
-            </a:r>
-          </a:p>
-          <a:p>
-            <a:r>
-              <a:t>that an honest sixty per cent buys more trust than a confident eighty-five.</a:t>
-            </a:r>
-          </a:p>
-          <a:p/>
-          <a:p>
-            <a:r>
-              <a:t>I think that's right. I'm not certain it survives contact with a real client.</a:t>
+              <a:t>That ratio should hold for you, because it comes from how the products work, not from who</a:t>
+            </a:r>
+          </a:p>
+          <a:p>
+            <a:r>
+              <a:t>the firm is. Which is why accurate routing is worth paying for.</a:t>
             </a:r>
           </a:p>
         </p:txBody>
@@ -1716,28 +1714,28 @@
           <a:p/>
           <a:p>
             <a:r>
-              <a:t>Ranked by one thing: how visible the reasoning is. Not by which saves most. Complaint</a:t>
-            </a:r>
-          </a:p>
-          <a:p>
-            <a:r>
-              <a:t>triage is first because you can watch it work.</a:t>
+              <a:t>Ranked by one thing: how visible the reasoning is. Not by which saves most. Triage is</a:t>
+            </a:r>
+          </a:p>
+          <a:p>
+            <a:r>
+              <a:t>first because you can watch it work.</a:t>
             </a:r>
           </a:p>
           <a:p/>
           <a:p>
             <a:r>
-              <a:t>The right column is what I'm refusing. A chatbot fails in public, in your customer's</a:t>
-            </a:r>
-          </a:p>
-          <a:p>
-            <a:r>
-              <a:t>voice. Credit scoring is high-risk under the AI Act — months of conformity work before a</a:t>
-            </a:r>
-          </a:p>
-          <a:p>
-            <a:r>
-              <a:t>single decision goes live.</a:t>
+              <a:t>The right column is what I'm refusing. A chatbot fails in public, in your customer's voice.</a:t>
+            </a:r>
+          </a:p>
+          <a:p>
+            <a:r>
+              <a:t>Credit scoring is high-risk under the AI Act — months of conformity work before a single</a:t>
+            </a:r>
+          </a:p>
+          <a:p>
+            <a:r>
+              <a:t>decision goes live.</a:t>
             </a:r>
           </a:p>
           <a:p/>
@@ -1749,7 +1747,12 @@
           <a:p/>
           <a:p>
             <a:r>
-              <a:t>So: complaint triage. Here's what your complaints actually look like.</a:t>
+              <a:t>So: triage. To show you what that looks like I needed complaint data, and you haven't given</a:t>
+            </a:r>
+          </a:p>
+          <a:p>
+            <a:r>
+              <a:t>me any — so I went and got the next best thing.</a:t>
             </a:r>
           </a:p>
         </p:txBody>
@@ -1846,29 +1849,39 @@
           <a:p/>
           <a:p>
             <a:r>
-              <a:t>Nearly seventeen thousand real complaints, on one screen.</a:t>
+              <a:t>Whose numbers these are is on the right, and it matters: they are not yours. Seventeen</a:t>
+            </a:r>
+          </a:p>
+          <a:p>
+            <a:r>
+              <a:t>thousand real complaints from the public regulator database, standing in until Phase 0</a:t>
+            </a:r>
+          </a:p>
+          <a:p>
+            <a:r>
+              <a:t>measures the real thing. The shape transfers — the mix, the language, how cases end. The</a:t>
+            </a:r>
+          </a:p>
+          <a:p>
+            <a:r>
+              <a:t>volume does not, and I'm not going to pretend otherwise.</a:t>
             </a:r>
           </a:p>
           <a:p/>
           <a:p>
             <a:r>
-              <a:t>Four numbers across the top, and only the third is in money. Hold on to the fourth: 46% of</a:t>
-            </a:r>
-          </a:p>
-          <a:p>
-            <a:r>
-              <a:t>what arrives could be sorted automatically — a share of something you already do, not a</a:t>
-            </a:r>
-          </a:p>
-          <a:p>
-            <a:r>
-              <a:t>promise about transformation.</a:t>
+              <a:t>Four numbers across the top, only the third in money. Hold on to the fourth: 46% of what</a:t>
+            </a:r>
+          </a:p>
+          <a:p>
+            <a:r>
+              <a:t>arrives could be sorted automatically.</a:t>
             </a:r>
           </a:p>
           <a:p/>
           <a:p>
             <a:r>
-              <a:t>Two things in here matter more than the rest.</a:t>
+              <a:t>One thing in here matters more than the rest.</a:t>
             </a:r>
           </a:p>
         </p:txBody>
@@ -1954,51 +1967,35 @@
           <a:lstStyle/>
           <a:p>
             <a:r>
-              <a:t>The first one. Read the last column, not the first.</a:t>
+              <a:t>Sixty-four categories exist. Five are nearly half of every complaint in the data — and</a:t>
+            </a:r>
+          </a:p>
+          <a:p>
+            <a:r>
+              <a:t>that concentration is a property of complaint books, not of one firm.</a:t>
             </a:r>
           </a:p>
           <a:p/>
           <a:p>
             <a:r>
-              <a:t>Deposits and cards are two thirds of your volume — but money leaves the building 5.7 times</a:t>
-            </a:r>
-          </a:p>
-          <a:p>
-            <a:r>
-              <a:t>more often on a card complaint than a vehicle loan.</a:t>
+              <a:t>So I'm not asking a machine to be good at sixty-four things. I'm asking it to be good at</a:t>
+            </a:r>
+          </a:p>
+          <a:p>
+            <a:r>
+              <a:t>five, and to admit when it's outside them.</a:t>
             </a:r>
           </a:p>
           <a:p/>
           <a:p>
             <a:r>
-              <a:t>So which queue a complaint lands in isn't administration. It's money. That's your argument</a:t>
-            </a:r>
-          </a:p>
-          <a:p>
-            <a:r>
-              <a:t>for accurate routing, not mine.</a:t>
+              <a:t>That's the difference between "AI for complaints" and something I can hand you working.</a:t>
             </a:r>
           </a:p>
           <a:p/>
           <a:p>
             <a:r>
-              <a:t>The second thing is what makes this buildable at all.</a:t>
-            </a:r>
-          </a:p>
-          <a:p/>
-          <a:p>
-            <a:r>
-              <a:t>[Q: Is this your data? — No. It's the US regulator's public database, used as a proxy for</a:t>
-            </a:r>
-          </a:p>
-          <a:p>
-            <a:r>
-              <a:t>the shape of a complaint inbox, not a forecast of your volumes. Your real numbers come</a:t>
-            </a:r>
-          </a:p>
-          <a:p>
-            <a:r>
-              <a:t>from Phase 0.]</a:t>
+              <a:t>Here's how it works.</a:t>
             </a:r>
           </a:p>
         </p:txBody>
@@ -2084,35 +2081,35 @@
           <a:lstStyle/>
           <a:p>
             <a:r>
-              <a:t>Sixty-four categories exist. Five of them are nearly half your inbox.</a:t>
+              <a:t>Four steps, and notice where the chain ends — a person decides. The machine never routes</a:t>
+            </a:r>
+          </a:p>
+          <a:p>
+            <a:r>
+              <a:t>anything itself.</a:t>
             </a:r>
           </a:p>
           <a:p/>
           <a:p>
             <a:r>
-              <a:t>So I'm not asking a machine to be good at sixty-four things. I'm asking it to be good at</a:t>
-            </a:r>
-          </a:p>
-          <a:p>
-            <a:r>
-              <a:t>five, and to admit when it's outside them.</a:t>
+              <a:t>The third box is the work: the model's answer is a claim, not a result. Four checks before</a:t>
+            </a:r>
+          </a:p>
+          <a:p>
+            <a:r>
+              <a:t>anyone sees it, and they're on the slide.</a:t>
             </a:r>
           </a:p>
           <a:p/>
           <a:p>
             <a:r>
-              <a:t>That's the difference between "AI for complaints", which I couldn't finish, and something</a:t>
-            </a:r>
-          </a:p>
-          <a:p>
-            <a:r>
-              <a:t>I can hand you working.</a:t>
+              <a:t>That human boundary is also what keeps this limited-risk under the AI Act.</a:t>
             </a:r>
           </a:p>
           <a:p/>
           <a:p>
             <a:r>
-              <a:t>Here's how it works.</a:t>
+              <a:t>Let me show you it running.</a:t>
             </a:r>
           </a:p>
         </p:txBody>
@@ -2198,35 +2195,36 @@
           <a:lstStyle/>
           <a:p>
             <a:r>
-              <a:t>Four steps, and notice where the chain ends — a person decides. The machine never routes</a:t>
-            </a:r>
-          </a:p>
-          <a:p>
-            <a:r>
-              <a:t>anything itself.</a:t>
+              <a:t>[Switch to the live n8n window. This screenshot is the fallback if the demo is cold.]</a:t>
             </a:r>
           </a:p>
           <a:p/>
           <a:p>
             <a:r>
-              <a:t>The third box is the work: the model's answer is a claim, not a result. Four checks before</a:t>
-            </a:r>
-          </a:p>
-          <a:p>
-            <a:r>
-              <a:t>anyone sees it, and they're on the slide.</a:t>
+              <a:t>Green ticks all the way across, on a real complaint.</a:t>
             </a:r>
           </a:p>
           <a:p/>
           <a:p>
             <a:r>
-              <a:t>That human boundary is also what keeps this limited-risk under the AI Act.</a:t>
+              <a:t>The bottom panel is the interesting part. It sent this one to Disputes and fraud —</a:t>
+            </a:r>
+          </a:p>
+          <a:p>
+            <a:r>
+              <a:t>exactly where the regulator's own label put it.</a:t>
             </a:r>
           </a:p>
           <a:p/>
           <a:p>
             <a:r>
-              <a:t>Let me show you it running.</a:t>
+              <a:t>Nothing here is a mockup. Click any node and you read its real input and output.</a:t>
+            </a:r>
+          </a:p>
+          <a:p/>
+          <a:p>
+            <a:r>
+              <a:t>That's one that worked. Here's what happens when it doesn't.</a:t>
             </a:r>
           </a:p>
         </p:txBody>
@@ -2312,36 +2310,40 @@
           <a:lstStyle/>
           <a:p>
             <a:r>
-              <a:t>[Switch to the live n8n window. This screenshot is the fallback if the demo is cold.]</a:t>
+              <a:t>[Slow right down. This is the most important slide in the deck.]</a:t>
             </a:r>
           </a:p>
           <a:p/>
           <a:p>
             <a:r>
-              <a:t>Green ticks all the way across, on a real complaint.</a:t>
+              <a:t>Four times out of sixty, the model made up its justification. It confidently quoted words</a:t>
+            </a:r>
+          </a:p>
+          <a:p>
+            <a:r>
+              <a:t>that were not in the complaint at all.</a:t>
             </a:r>
           </a:p>
           <a:p/>
           <a:p>
             <a:r>
-              <a:t>The bottom panel is the interesting part. It sent this one to Disputes and fraud —</a:t>
-            </a:r>
-          </a:p>
-          <a:p>
-            <a:r>
-              <a:t>exactly where the regulator's own label put it.</a:t>
+              <a:t>Every one was caught, because the system checks the quote against the text instead of</a:t>
+            </a:r>
+          </a:p>
+          <a:p>
+            <a:r>
+              <a:t>trusting it. Bottom row — nothing was silently wrong.</a:t>
             </a:r>
           </a:p>
           <a:p/>
           <a:p>
             <a:r>
-              <a:t>Nothing here is a mockup. Click any node and you read its real input and output.</a:t>
-            </a:r>
-          </a:p>
-          <a:p/>
-          <a:p>
-            <a:r>
-              <a:t>That's one that worked. Here's what happens when it doesn't.</a:t>
+              <a:t>A system that explains itself convincingly but falsely is more dangerous than one that</a:t>
+            </a:r>
+          </a:p>
+          <a:p>
+            <a:r>
+              <a:t>says nothing. Let me show you one.</a:t>
             </a:r>
           </a:p>
         </p:txBody>
@@ -2427,40 +2429,35 @@
           <a:lstStyle/>
           <a:p>
             <a:r>
-              <a:t>[Slow right down. This is the most important slide in the deck.]</a:t>
+              <a:t>One of those four, on the record.</a:t>
             </a:r>
           </a:p>
           <a:p/>
           <a:p>
             <a:r>
-              <a:t>Four times out of sixty, the model made up its justification. It confidently quoted words</a:t>
-            </a:r>
-          </a:p>
-          <a:p>
-            <a:r>
-              <a:t>that were not in the complaint at all.</a:t>
+              <a:t>Eighty per cent confident, a plausible team — and the sentence it quoted simply wasn't in</a:t>
+            </a:r>
+          </a:p>
+          <a:p>
+            <a:r>
+              <a:t>the complaint. So it was stopped, and went to a person with the reason written down.</a:t>
             </a:r>
           </a:p>
           <a:p/>
           <a:p>
             <a:r>
-              <a:t>Every one was caught, because the system checks the quote against the text instead of</a:t>
-            </a:r>
-          </a:p>
-          <a:p>
-            <a:r>
-              <a:t>trusting it. Bottom row — nothing was silently wrong.</a:t>
+              <a:t>That record exists for all sixty decisions, including every one where nothing happened.</a:t>
+            </a:r>
+          </a:p>
+          <a:p>
+            <a:r>
+              <a:t>That's what I mean by watching it.</a:t>
             </a:r>
           </a:p>
           <a:p/>
           <a:p>
             <a:r>
-              <a:t>A system that explains itself convincingly but falsely is more dangerous than one that</a:t>
-            </a:r>
-          </a:p>
-          <a:p>
-            <a:r>
-              <a:t>says nothing. Let me show you one.</a:t>
+              <a:t>Which brings me to the number I could have left out of this deck.</a:t>
             </a:r>
           </a:p>
         </p:txBody>
@@ -3333,7 +3330,7 @@
                 <a:ea typeface="Trebuchet MS" pitchFamily="34" charset="-122"/>
                 <a:cs typeface="Trebuchet MS" pitchFamily="34" charset="-120"/>
               </a:rPr>
-              <a:t>One of those four, opened up</a:t>
+              <a:t>What it cannot do yet, and why that is not the model's fault</a:t>
             </a:r>
             <a:endParaRPr lang="en-US" sz="3000" dirty="0"/>
           </a:p>
@@ -3342,6 +3339,99 @@
       <p:sp>
         <p:nvSpPr>
           <p:cNvPr id="6" name="Shape 3"/>
+          <p:cNvSpPr/>
+          <p:nvPr/>
+        </p:nvSpPr>
+        <p:spPr>
+          <a:xfrm>
+            <a:off x="566928" y="1481328"/>
+            <a:ext cx="11055096" cy="676656"/>
+          </a:xfrm>
+          <a:prstGeom prst="rect">
+            <a:avLst/>
+          </a:prstGeom>
+          <a:solidFill>
+            <a:srgbClr val="EFF5F9"/>
+          </a:solidFill>
+          <a:ln/>
+        </p:spPr>
+      </p:sp>
+      <p:sp>
+        <p:nvSpPr>
+          <p:cNvPr id="7" name="Shape 4"/>
+          <p:cNvSpPr/>
+          <p:nvPr/>
+        </p:nvSpPr>
+        <p:spPr>
+          <a:xfrm>
+            <a:off x="566928" y="1481328"/>
+            <a:ext cx="82296" cy="676656"/>
+          </a:xfrm>
+          <a:prstGeom prst="rect">
+            <a:avLst/>
+          </a:prstGeom>
+          <a:solidFill>
+            <a:srgbClr val="2A78D6"/>
+          </a:solidFill>
+          <a:ln/>
+        </p:spPr>
+      </p:sp>
+      <p:sp>
+        <p:nvSpPr>
+          <p:cNvPr id="8" name="Text 5"/>
+          <p:cNvSpPr/>
+          <p:nvPr/>
+        </p:nvSpPr>
+        <p:spPr>
+          <a:xfrm>
+            <a:off x="822960" y="1481328"/>
+            <a:ext cx="10597896" cy="676656"/>
+          </a:xfrm>
+          <a:prstGeom prst="rect">
+            <a:avLst/>
+          </a:prstGeom>
+          <a:noFill/>
+          <a:ln/>
+        </p:spPr>
+        <p:txBody>
+          <a:bodyPr wrap="square" lIns="0" tIns="0" rIns="0" bIns="0" rtlCol="0" anchor="ctr"/>
+          <a:lstStyle/>
+          <a:p>
+            <a:pPr indent="0" marL="0">
+              <a:buNone/>
+            </a:pPr>
+            <a:r>
+              <a:rPr lang="en-US" sz="1050" b="1" spc="100" kern="0" dirty="0">
+                <a:solidFill>
+                  <a:srgbClr val="2A78D6"/>
+                </a:solidFill>
+                <a:latin typeface="Calibri" pitchFamily="34" charset="0"/>
+                <a:ea typeface="Calibri" pitchFamily="34" charset="-122"/>
+                <a:cs typeface="Calibri" pitchFamily="34" charset="-120"/>
+              </a:rPr>
+              <a:t>TAKEAWAY   </a:t>
+            </a:r>
+            <a:pPr indent="0" marL="0">
+              <a:buNone/>
+            </a:pPr>
+            <a:r>
+              <a:rPr lang="en-US" sz="1300" dirty="0">
+                <a:solidFill>
+                  <a:srgbClr val="1B2730"/>
+                </a:solidFill>
+                <a:latin typeface="Calibri" pitchFamily="34" charset="0"/>
+                <a:ea typeface="Calibri" pitchFamily="34" charset="-122"/>
+                <a:cs typeface="Calibri" pitchFamily="34" charset="-120"/>
+              </a:rPr>
+              <a:t>60.5% team accuracy. Not deployable — and the reason changes what you should buy first.</a:t>
+            </a:r>
+            <a:endParaRPr lang="en-US" sz="1050" dirty="0"/>
+          </a:p>
+        </p:txBody>
+      </p:sp>
+      <p:sp>
+        <p:nvSpPr>
+          <p:cNvPr id="9" name="Shape 6"/>
           <p:cNvSpPr/>
           <p:nvPr/>
         </p:nvSpPr>
@@ -3364,7 +3454,7 @@
       </p:sp>
       <p:sp>
         <p:nvSpPr>
-          <p:cNvPr id="7" name="Text 4"/>
+          <p:cNvPr id="10" name="Text 7"/>
           <p:cNvSpPr/>
           <p:nvPr/>
         </p:nvSpPr>
@@ -3392,7 +3482,7 @@
       </p:sp>
       <p:sp>
         <p:nvSpPr>
-          <p:cNvPr id="8" name="Text 5"/>
+          <p:cNvPr id="11" name="Text 8"/>
           <p:cNvSpPr/>
           <p:nvPr/>
         </p:nvSpPr>
@@ -3429,48 +3519,29 @@
           </a:p>
         </p:txBody>
       </p:sp>
-      <p:pic>
-        <p:nvPicPr>
-          <p:cNvPr id="9" name="Image 1" descr="/Users/nnanyelugoahukannah/Learning/Ironhack/PROJECT-Capstone-AI-Consulting/langsmith/screenshots/trace-detail-guard-fired.png">    </p:cNvPr>
-          <p:cNvPicPr>
-            <a:picLocks noChangeAspect="1"/>
-          </p:cNvPicPr>
-          <p:nvPr/>
-        </p:nvPicPr>
-        <p:blipFill>
-          <a:blip r:embed="rId2"/>
-          <a:stretch>
-            <a:fillRect/>
-          </a:stretch>
-        </p:blipFill>
-        <p:spPr>
-          <a:xfrm>
-            <a:off x="566928" y="1481328"/>
-            <a:ext cx="6964710" cy="4873752"/>
-          </a:xfrm>
-          <a:prstGeom prst="rect">
-            <a:avLst/>
-          </a:prstGeom>
-        </p:spPr>
-      </p:pic>
-      <p:sp>
-        <p:nvSpPr>
-          <p:cNvPr id="10" name="Shape 6"/>
-          <p:cNvSpPr/>
-          <p:nvPr/>
-        </p:nvSpPr>
-        <p:spPr>
-          <a:xfrm>
-            <a:off x="7824246" y="1481328"/>
-            <a:ext cx="3797778" cy="4873752"/>
+      <p:sp>
+        <p:nvSpPr>
+          <p:cNvPr id="12" name="Shape 9"/>
+          <p:cNvSpPr/>
+          <p:nvPr/>
+        </p:nvSpPr>
+        <p:spPr>
+          <a:xfrm>
+            <a:off x="566928" y="2395728"/>
+            <a:ext cx="5390388" cy="1874520"/>
           </a:xfrm>
           <a:prstGeom prst="rect">
             <a:avLst/>
           </a:prstGeom>
           <a:solidFill>
-            <a:srgbClr val="24343F"/>
+            <a:srgbClr val="FFFFFF"/>
           </a:solidFill>
-          <a:ln/>
+          <a:ln w="12700">
+            <a:solidFill>
+              <a:srgbClr val="D9E3EA"/>
+            </a:solidFill>
+            <a:prstDash val="solid"/>
+          </a:ln>
           <a:effectLst>
             <a:outerShdw sx="100000" sy="100000" kx="0" ky="0" algn="bl" rotWithShape="0" blurRad="88900" dist="38100" dir="8100000">
               <a:srgbClr val="1C2440">
@@ -3482,14 +3553,34 @@
       </p:sp>
       <p:sp>
         <p:nvSpPr>
-          <p:cNvPr id="11" name="Text 7"/>
-          <p:cNvSpPr/>
-          <p:nvPr/>
-        </p:nvSpPr>
-        <p:spPr>
-          <a:xfrm>
-            <a:off x="8061990" y="1700784"/>
-            <a:ext cx="3340578" cy="310896"/>
+          <p:cNvPr id="13" name="Shape 10"/>
+          <p:cNvSpPr/>
+          <p:nvPr/>
+        </p:nvSpPr>
+        <p:spPr>
+          <a:xfrm>
+            <a:off x="566928" y="2395728"/>
+            <a:ext cx="5390388" cy="457200"/>
+          </a:xfrm>
+          <a:prstGeom prst="rect">
+            <a:avLst/>
+          </a:prstGeom>
+          <a:solidFill>
+            <a:srgbClr val="24343F"/>
+          </a:solidFill>
+          <a:ln/>
+        </p:spPr>
+      </p:sp>
+      <p:sp>
+        <p:nvSpPr>
+          <p:cNvPr id="14" name="Text 11"/>
+          <p:cNvSpPr/>
+          <p:nvPr/>
+        </p:nvSpPr>
+        <p:spPr>
+          <a:xfrm>
+            <a:off x="768096" y="2395728"/>
+            <a:ext cx="5024628" cy="457200"/>
           </a:xfrm>
           <a:prstGeom prst="rect">
             <a:avLst/>
@@ -3505,21 +3596,7 @@
               <a:buNone/>
             </a:pPr>
             <a:r>
-              <a:rPr lang="en-US" sz="1100" dirty="0">
-                <a:solidFill>
-                  <a:srgbClr val="2A78D6"/>
-                </a:solidFill>
-                <a:latin typeface="Calibri" pitchFamily="34" charset="0"/>
-                <a:ea typeface="Calibri" pitchFamily="34" charset="-122"/>
-                <a:cs typeface="Calibri" pitchFamily="34" charset="-120"/>
-              </a:rPr>
-              <a:t>■ </a:t>
-            </a:r>
-            <a:pPr indent="0" marL="0">
-              <a:buNone/>
-            </a:pPr>
-            <a:r>
-              <a:rPr lang="en-US" sz="1300" b="1" dirty="0">
+              <a:rPr lang="en-US" sz="1300" b="1" spc="200" kern="0" dirty="0">
                 <a:solidFill>
                   <a:srgbClr val="FFFFFF"/>
                 </a:solidFill>
@@ -3527,22 +3604,22 @@
                 <a:ea typeface="Calibri" pitchFamily="34" charset="-122"/>
                 <a:cs typeface="Calibri" pitchFamily="34" charset="-120"/>
               </a:rPr>
-              <a:t>Why this one was stopped</a:t>
-            </a:r>
-            <a:endParaRPr lang="en-US" sz="1100" dirty="0"/>
+              <a:t>What I measured</a:t>
+            </a:r>
+            <a:endParaRPr lang="en-US" sz="1300" dirty="0"/>
           </a:p>
         </p:txBody>
       </p:sp>
       <p:sp>
         <p:nvSpPr>
-          <p:cNvPr id="12" name="Text 8"/>
-          <p:cNvSpPr/>
-          <p:nvPr/>
-        </p:nvSpPr>
-        <p:spPr>
-          <a:xfrm>
-            <a:off x="8061990" y="2139696"/>
-            <a:ext cx="3322290" cy="3959352"/>
+          <p:cNvPr id="15" name="Text 12"/>
+          <p:cNvSpPr/>
+          <p:nvPr/>
+        </p:nvSpPr>
+        <p:spPr>
+          <a:xfrm>
+            <a:off x="768096" y="2962656"/>
+            <a:ext cx="4988052" cy="1143000"/>
           </a:xfrm>
           <a:prstGeom prst="rect">
             <a:avLst/>
@@ -3551,79 +3628,246 @@
           <a:ln/>
         </p:spPr>
         <p:txBody>
-          <a:bodyPr wrap="square" rtlCol="0" anchor="t"/>
+          <a:bodyPr wrap="square" lIns="0" tIns="0" rIns="0" bIns="0" rtlCol="0" anchor="t"/>
           <a:lstStyle/>
           <a:p>
             <a:pPr marL="152400" indent="-152400">
               <a:spcAft>
-                <a:spcPts val="500"/>
+                <a:spcPts val="600"/>
               </a:spcAft>
               <a:buSzPct val="100000"/>
               <a:buChar char="•"/>
             </a:pPr>
             <a:r>
-              <a:rPr lang="en-US" sz="1250" dirty="0">
+              <a:rPr lang="en-US" sz="1150" dirty="0">
                 <a:solidFill>
-                  <a:srgbClr val="C6D8E4"/>
+                  <a:srgbClr val="1B2730"/>
                 </a:solidFill>
+                <a:latin typeface="Calibri" pitchFamily="34" charset="0"/>
+                <a:ea typeface="Calibri" pitchFamily="34" charset="-122"/>
+                <a:cs typeface="Calibri" pitchFamily="34" charset="-120"/>
               </a:rPr>
-              <a:t>It was 80% confident and named a completely plausible team</a:t>
-            </a:r>
-            <a:endParaRPr lang="en-US" sz="1250" dirty="0"/>
+              <a:t>60.5% correct team (gpt-4o, 240 complaints)</a:t>
+            </a:r>
+            <a:endParaRPr lang="en-US" sz="1150" dirty="0"/>
           </a:p>
           <a:p>
             <a:pPr marL="152400" indent="-152400">
               <a:spcAft>
-                <a:spcPts val="500"/>
+                <a:spcPts val="600"/>
               </a:spcAft>
               <a:buSzPct val="100000"/>
               <a:buChar char="•"/>
             </a:pPr>
             <a:r>
-              <a:rPr lang="en-US" sz="1250" dirty="0">
+              <a:rPr lang="en-US" sz="1150" dirty="0">
                 <a:solidFill>
-                  <a:srgbClr val="C6D8E4"/>
+                  <a:srgbClr val="1B2730"/>
                 </a:solidFill>
+                <a:latin typeface="Calibri" pitchFamily="34" charset="0"/>
+                <a:ea typeface="Calibri" pitchFamily="34" charset="-122"/>
+                <a:cs typeface="Calibri" pitchFamily="34" charset="-120"/>
               </a:rPr>
-              <a:t>But the sentence it quoted was not in the complaint (evidence_is_verbatim: false)</a:t>
-            </a:r>
-            <a:endParaRPr lang="en-US" sz="1250" dirty="0"/>
+              <a:t>A 6× more expensive model buys 4 points</a:t>
+            </a:r>
+            <a:endParaRPr lang="en-US" sz="1150" dirty="0"/>
           </a:p>
           <a:p>
             <a:pPr marL="152400" indent="-152400">
               <a:spcAft>
-                <a:spcPts val="500"/>
+                <a:spcPts val="600"/>
               </a:spcAft>
               <a:buSzPct val="100000"/>
               <a:buChar char="•"/>
             </a:pPr>
             <a:r>
-              <a:rPr lang="en-US" sz="1250" dirty="0">
+              <a:rPr lang="en-US" sz="1150" dirty="0">
                 <a:solidFill>
-                  <a:srgbClr val="C6D8E4"/>
+                  <a:srgbClr val="1B2730"/>
                 </a:solidFill>
+                <a:latin typeface="Calibri" pitchFamily="34" charset="0"/>
+                <a:ea typeface="Calibri" pitchFamily="34" charset="-122"/>
+                <a:cs typeface="Calibri" pitchFamily="34" charset="-120"/>
               </a:rPr>
-              <a:t>So it was stopped and sent to a person, with the reason written down</a:t>
-            </a:r>
-            <a:endParaRPr lang="en-US" sz="1250" dirty="0"/>
-          </a:p>
+              <a:t>So the bottleneck is not the model</a:t>
+            </a:r>
+            <a:endParaRPr lang="en-US" sz="1150" dirty="0"/>
+          </a:p>
+        </p:txBody>
+      </p:sp>
+      <p:sp>
+        <p:nvSpPr>
+          <p:cNvPr id="16" name="Shape 13"/>
+          <p:cNvSpPr/>
+          <p:nvPr/>
+        </p:nvSpPr>
+        <p:spPr>
+          <a:xfrm>
+            <a:off x="6231636" y="2395728"/>
+            <a:ext cx="5390388" cy="1874520"/>
+          </a:xfrm>
+          <a:prstGeom prst="rect">
+            <a:avLst/>
+          </a:prstGeom>
+          <a:solidFill>
+            <a:srgbClr val="FFFFFF"/>
+          </a:solidFill>
+          <a:ln w="12700">
+            <a:solidFill>
+              <a:srgbClr val="D9E3EA"/>
+            </a:solidFill>
+            <a:prstDash val="solid"/>
+          </a:ln>
+          <a:effectLst>
+            <a:outerShdw sx="100000" sy="100000" kx="0" ky="0" algn="bl" rotWithShape="0" blurRad="88900" dist="38100" dir="8100000">
+              <a:srgbClr val="1C2440">
+                <a:alpha val="13000"/>
+              </a:srgbClr>
+            </a:outerShdw>
+          </a:effectLst>
+        </p:spPr>
+      </p:sp>
+      <p:sp>
+        <p:nvSpPr>
+          <p:cNvPr id="17" name="Shape 14"/>
+          <p:cNvSpPr/>
+          <p:nvPr/>
+        </p:nvSpPr>
+        <p:spPr>
+          <a:xfrm>
+            <a:off x="6231636" y="2395728"/>
+            <a:ext cx="5390388" cy="457200"/>
+          </a:xfrm>
+          <a:prstGeom prst="rect">
+            <a:avLst/>
+          </a:prstGeom>
+          <a:solidFill>
+            <a:srgbClr val="445A69"/>
+          </a:solidFill>
+          <a:ln/>
+        </p:spPr>
+      </p:sp>
+      <p:sp>
+        <p:nvSpPr>
+          <p:cNvPr id="18" name="Text 15"/>
+          <p:cNvSpPr/>
+          <p:nvPr/>
+        </p:nvSpPr>
+        <p:spPr>
+          <a:xfrm>
+            <a:off x="6432804" y="2395728"/>
+            <a:ext cx="5024628" cy="457200"/>
+          </a:xfrm>
+          <a:prstGeom prst="rect">
+            <a:avLst/>
+          </a:prstGeom>
+          <a:noFill/>
+          <a:ln/>
+        </p:spPr>
+        <p:txBody>
+          <a:bodyPr wrap="square" lIns="0" tIns="0" rIns="0" bIns="0" rtlCol="0" anchor="ctr"/>
+          <a:lstStyle/>
+          <a:p>
+            <a:pPr indent="0" marL="0">
+              <a:buNone/>
+            </a:pPr>
+            <a:r>
+              <a:rPr lang="en-US" sz="1300" b="1" spc="200" kern="0" dirty="0">
+                <a:solidFill>
+                  <a:srgbClr val="FFFFFF"/>
+                </a:solidFill>
+                <a:latin typeface="Calibri" pitchFamily="34" charset="0"/>
+                <a:ea typeface="Calibri" pitchFamily="34" charset="-122"/>
+                <a:cs typeface="Calibri" pitchFamily="34" charset="-120"/>
+              </a:rPr>
+              <a:t>Why the number is what it is</a:t>
+            </a:r>
+            <a:endParaRPr lang="en-US" sz="1300" dirty="0"/>
+          </a:p>
+        </p:txBody>
+      </p:sp>
+      <p:sp>
+        <p:nvSpPr>
+          <p:cNvPr id="19" name="Text 16"/>
+          <p:cNvSpPr/>
+          <p:nvPr/>
+        </p:nvSpPr>
+        <p:spPr>
+          <a:xfrm>
+            <a:off x="6432804" y="2962656"/>
+            <a:ext cx="4988052" cy="1143000"/>
+          </a:xfrm>
+          <a:prstGeom prst="rect">
+            <a:avLst/>
+          </a:prstGeom>
+          <a:noFill/>
+          <a:ln/>
+        </p:spPr>
+        <p:txBody>
+          <a:bodyPr wrap="square" lIns="0" tIns="0" rIns="0" bIns="0" rtlCol="0" anchor="t"/>
+          <a:lstStyle/>
           <a:p>
             <a:pPr marL="152400" indent="-152400">
               <a:spcAft>
-                <a:spcPts val="500"/>
+                <a:spcPts val="600"/>
               </a:spcAft>
               <a:buSzPct val="100000"/>
               <a:buChar char="•"/>
             </a:pPr>
             <a:r>
-              <a:rPr lang="en-US" sz="1250" dirty="0">
+              <a:rPr lang="en-US" sz="1150" dirty="0">
                 <a:solidFill>
-                  <a:srgbClr val="C6D8E4"/>
+                  <a:srgbClr val="6B7C88"/>
                 </a:solidFill>
+                <a:latin typeface="Calibri" pitchFamily="34" charset="0"/>
+                <a:ea typeface="Calibri" pitchFamily="34" charset="-122"/>
+                <a:cs typeface="Calibri" pitchFamily="34" charset="-120"/>
               </a:rPr>
-              <a:t>This record exists for every decision — including the ones where nothing happened.</a:t>
-            </a:r>
-            <a:endParaRPr lang="en-US" sz="1250" dirty="0"/>
+              <a:t>Ask it the same complaint twice and it answers the same way ~9 times in 10</a:t>
+            </a:r>
+            <a:endParaRPr lang="en-US" sz="1150" dirty="0"/>
+          </a:p>
+          <a:p>
+            <a:pPr marL="152400" indent="-152400">
+              <a:spcAft>
+                <a:spcPts val="600"/>
+              </a:spcAft>
+              <a:buSzPct val="100000"/>
+              <a:buChar char="•"/>
+            </a:pPr>
+            <a:r>
+              <a:rPr lang="en-US" sz="1150" dirty="0">
+                <a:solidFill>
+                  <a:srgbClr val="6B7C88"/>
+                </a:solidFill>
+                <a:latin typeface="Calibri" pitchFamily="34" charset="0"/>
+                <a:ea typeface="Calibri" pitchFamily="34" charset="-122"/>
+                <a:cs typeface="Calibri" pitchFamily="34" charset="-120"/>
+              </a:rPr>
+              <a:t>So it is consistent — it just disagrees with the official label</a:t>
+            </a:r>
+            <a:endParaRPr lang="en-US" sz="1150" dirty="0"/>
+          </a:p>
+          <a:p>
+            <a:pPr marL="152400" indent="-152400">
+              <a:spcAft>
+                <a:spcPts val="600"/>
+              </a:spcAft>
+              <a:buSzPct val="100000"/>
+              <a:buChar char="•"/>
+            </a:pPr>
+            <a:r>
+              <a:rPr lang="en-US" sz="1150" dirty="0">
+                <a:solidFill>
+                  <a:srgbClr val="6B7C88"/>
+                </a:solidFill>
+                <a:latin typeface="Calibri" pitchFamily="34" charset="0"/>
+                <a:ea typeface="Calibri" pitchFamily="34" charset="-122"/>
+                <a:cs typeface="Calibri" pitchFamily="34" charset="-120"/>
+              </a:rPr>
+              <a:t>That label was picked by the customer filing the complaint, from a menu, untrained</a:t>
+            </a:r>
+            <a:endParaRPr lang="en-US" sz="1150" dirty="0"/>
           </a:p>
         </p:txBody>
       </p:sp>
@@ -3775,7 +4019,7 @@
                 <a:ea typeface="Trebuchet MS" pitchFamily="34" charset="-122"/>
                 <a:cs typeface="Trebuchet MS" pitchFamily="34" charset="-120"/>
               </a:rPr>
-              <a:t>What it cannot do yet, and why that is not the model's fault</a:t>
+              <a:t>The model is not the cost. Oversight is.</a:t>
             </a:r>
             <a:endParaRPr lang="en-US" sz="3000" dirty="0"/>
           </a:p>
@@ -3868,7 +4112,7 @@
                 <a:ea typeface="Calibri" pitchFamily="34" charset="-122"/>
                 <a:cs typeface="Calibri" pitchFamily="34" charset="-120"/>
               </a:rPr>
-              <a:t>60.5% team accuracy. Not deployable — and the reason changes what you should buy first.</a:t>
+              <a:t>97% of the running cost is human review and platform. 0.004% is the model.</a:t>
             </a:r>
             <a:endParaRPr lang="en-US" sz="1050" dirty="0"/>
           </a:p>
@@ -3964,698 +4208,9 @@
           </a:p>
         </p:txBody>
       </p:sp>
-      <p:sp>
-        <p:nvSpPr>
-          <p:cNvPr id="12" name="Shape 9"/>
-          <p:cNvSpPr/>
-          <p:nvPr/>
-        </p:nvSpPr>
-        <p:spPr>
-          <a:xfrm>
-            <a:off x="566928" y="2395728"/>
-            <a:ext cx="5390388" cy="1874520"/>
-          </a:xfrm>
-          <a:prstGeom prst="rect">
-            <a:avLst/>
-          </a:prstGeom>
-          <a:solidFill>
-            <a:srgbClr val="FFFFFF"/>
-          </a:solidFill>
-          <a:ln w="12700">
-            <a:solidFill>
-              <a:srgbClr val="D9E3EA"/>
-            </a:solidFill>
-            <a:prstDash val="solid"/>
-          </a:ln>
-          <a:effectLst>
-            <a:outerShdw sx="100000" sy="100000" kx="0" ky="0" algn="bl" rotWithShape="0" blurRad="88900" dist="38100" dir="8100000">
-              <a:srgbClr val="1C2440">
-                <a:alpha val="13000"/>
-              </a:srgbClr>
-            </a:outerShdw>
-          </a:effectLst>
-        </p:spPr>
-      </p:sp>
-      <p:sp>
-        <p:nvSpPr>
-          <p:cNvPr id="13" name="Shape 10"/>
-          <p:cNvSpPr/>
-          <p:nvPr/>
-        </p:nvSpPr>
-        <p:spPr>
-          <a:xfrm>
-            <a:off x="566928" y="2395728"/>
-            <a:ext cx="5390388" cy="457200"/>
-          </a:xfrm>
-          <a:prstGeom prst="rect">
-            <a:avLst/>
-          </a:prstGeom>
-          <a:solidFill>
-            <a:srgbClr val="24343F"/>
-          </a:solidFill>
-          <a:ln/>
-        </p:spPr>
-      </p:sp>
-      <p:sp>
-        <p:nvSpPr>
-          <p:cNvPr id="14" name="Text 11"/>
-          <p:cNvSpPr/>
-          <p:nvPr/>
-        </p:nvSpPr>
-        <p:spPr>
-          <a:xfrm>
-            <a:off x="768096" y="2395728"/>
-            <a:ext cx="5024628" cy="457200"/>
-          </a:xfrm>
-          <a:prstGeom prst="rect">
-            <a:avLst/>
-          </a:prstGeom>
-          <a:noFill/>
-          <a:ln/>
-        </p:spPr>
-        <p:txBody>
-          <a:bodyPr wrap="square" lIns="0" tIns="0" rIns="0" bIns="0" rtlCol="0" anchor="ctr"/>
-          <a:lstStyle/>
-          <a:p>
-            <a:pPr indent="0" marL="0">
-              <a:buNone/>
-            </a:pPr>
-            <a:r>
-              <a:rPr lang="en-US" sz="1300" b="1" spc="200" kern="0" dirty="0">
-                <a:solidFill>
-                  <a:srgbClr val="FFFFFF"/>
-                </a:solidFill>
-                <a:latin typeface="Calibri" pitchFamily="34" charset="0"/>
-                <a:ea typeface="Calibri" pitchFamily="34" charset="-122"/>
-                <a:cs typeface="Calibri" pitchFamily="34" charset="-120"/>
-              </a:rPr>
-              <a:t>What I measured</a:t>
-            </a:r>
-            <a:endParaRPr lang="en-US" sz="1300" dirty="0"/>
-          </a:p>
-        </p:txBody>
-      </p:sp>
-      <p:sp>
-        <p:nvSpPr>
-          <p:cNvPr id="15" name="Text 12"/>
-          <p:cNvSpPr/>
-          <p:nvPr/>
-        </p:nvSpPr>
-        <p:spPr>
-          <a:xfrm>
-            <a:off x="768096" y="2962656"/>
-            <a:ext cx="4988052" cy="1143000"/>
-          </a:xfrm>
-          <a:prstGeom prst="rect">
-            <a:avLst/>
-          </a:prstGeom>
-          <a:noFill/>
-          <a:ln/>
-        </p:spPr>
-        <p:txBody>
-          <a:bodyPr wrap="square" lIns="0" tIns="0" rIns="0" bIns="0" rtlCol="0" anchor="t"/>
-          <a:lstStyle/>
-          <a:p>
-            <a:pPr marL="152400" indent="-152400">
-              <a:spcAft>
-                <a:spcPts val="600"/>
-              </a:spcAft>
-              <a:buSzPct val="100000"/>
-              <a:buChar char="•"/>
-            </a:pPr>
-            <a:r>
-              <a:rPr lang="en-US" sz="1150" dirty="0">
-                <a:solidFill>
-                  <a:srgbClr val="1B2730"/>
-                </a:solidFill>
-                <a:latin typeface="Calibri" pitchFamily="34" charset="0"/>
-                <a:ea typeface="Calibri" pitchFamily="34" charset="-122"/>
-                <a:cs typeface="Calibri" pitchFamily="34" charset="-120"/>
-              </a:rPr>
-              <a:t>60.5% correct team (gpt-4o, 240 complaints)</a:t>
-            </a:r>
-            <a:endParaRPr lang="en-US" sz="1150" dirty="0"/>
-          </a:p>
-          <a:p>
-            <a:pPr marL="152400" indent="-152400">
-              <a:spcAft>
-                <a:spcPts val="600"/>
-              </a:spcAft>
-              <a:buSzPct val="100000"/>
-              <a:buChar char="•"/>
-            </a:pPr>
-            <a:r>
-              <a:rPr lang="en-US" sz="1150" dirty="0">
-                <a:solidFill>
-                  <a:srgbClr val="1B2730"/>
-                </a:solidFill>
-                <a:latin typeface="Calibri" pitchFamily="34" charset="0"/>
-                <a:ea typeface="Calibri" pitchFamily="34" charset="-122"/>
-                <a:cs typeface="Calibri" pitchFamily="34" charset="-120"/>
-              </a:rPr>
-              <a:t>A 6× more expensive model buys 4 points</a:t>
-            </a:r>
-            <a:endParaRPr lang="en-US" sz="1150" dirty="0"/>
-          </a:p>
-          <a:p>
-            <a:pPr marL="152400" indent="-152400">
-              <a:spcAft>
-                <a:spcPts val="600"/>
-              </a:spcAft>
-              <a:buSzPct val="100000"/>
-              <a:buChar char="•"/>
-            </a:pPr>
-            <a:r>
-              <a:rPr lang="en-US" sz="1150" dirty="0">
-                <a:solidFill>
-                  <a:srgbClr val="1B2730"/>
-                </a:solidFill>
-                <a:latin typeface="Calibri" pitchFamily="34" charset="0"/>
-                <a:ea typeface="Calibri" pitchFamily="34" charset="-122"/>
-                <a:cs typeface="Calibri" pitchFamily="34" charset="-120"/>
-              </a:rPr>
-              <a:t>So the bottleneck is not the model</a:t>
-            </a:r>
-            <a:endParaRPr lang="en-US" sz="1150" dirty="0"/>
-          </a:p>
-        </p:txBody>
-      </p:sp>
-      <p:sp>
-        <p:nvSpPr>
-          <p:cNvPr id="16" name="Shape 13"/>
-          <p:cNvSpPr/>
-          <p:nvPr/>
-        </p:nvSpPr>
-        <p:spPr>
-          <a:xfrm>
-            <a:off x="6231636" y="2395728"/>
-            <a:ext cx="5390388" cy="1874520"/>
-          </a:xfrm>
-          <a:prstGeom prst="rect">
-            <a:avLst/>
-          </a:prstGeom>
-          <a:solidFill>
-            <a:srgbClr val="FFFFFF"/>
-          </a:solidFill>
-          <a:ln w="12700">
-            <a:solidFill>
-              <a:srgbClr val="D9E3EA"/>
-            </a:solidFill>
-            <a:prstDash val="solid"/>
-          </a:ln>
-          <a:effectLst>
-            <a:outerShdw sx="100000" sy="100000" kx="0" ky="0" algn="bl" rotWithShape="0" blurRad="88900" dist="38100" dir="8100000">
-              <a:srgbClr val="1C2440">
-                <a:alpha val="13000"/>
-              </a:srgbClr>
-            </a:outerShdw>
-          </a:effectLst>
-        </p:spPr>
-      </p:sp>
-      <p:sp>
-        <p:nvSpPr>
-          <p:cNvPr id="17" name="Shape 14"/>
-          <p:cNvSpPr/>
-          <p:nvPr/>
-        </p:nvSpPr>
-        <p:spPr>
-          <a:xfrm>
-            <a:off x="6231636" y="2395728"/>
-            <a:ext cx="5390388" cy="457200"/>
-          </a:xfrm>
-          <a:prstGeom prst="rect">
-            <a:avLst/>
-          </a:prstGeom>
-          <a:solidFill>
-            <a:srgbClr val="445A69"/>
-          </a:solidFill>
-          <a:ln/>
-        </p:spPr>
-      </p:sp>
-      <p:sp>
-        <p:nvSpPr>
-          <p:cNvPr id="18" name="Text 15"/>
-          <p:cNvSpPr/>
-          <p:nvPr/>
-        </p:nvSpPr>
-        <p:spPr>
-          <a:xfrm>
-            <a:off x="6432804" y="2395728"/>
-            <a:ext cx="5024628" cy="457200"/>
-          </a:xfrm>
-          <a:prstGeom prst="rect">
-            <a:avLst/>
-          </a:prstGeom>
-          <a:noFill/>
-          <a:ln/>
-        </p:spPr>
-        <p:txBody>
-          <a:bodyPr wrap="square" lIns="0" tIns="0" rIns="0" bIns="0" rtlCol="0" anchor="ctr"/>
-          <a:lstStyle/>
-          <a:p>
-            <a:pPr indent="0" marL="0">
-              <a:buNone/>
-            </a:pPr>
-            <a:r>
-              <a:rPr lang="en-US" sz="1300" b="1" spc="200" kern="0" dirty="0">
-                <a:solidFill>
-                  <a:srgbClr val="FFFFFF"/>
-                </a:solidFill>
-                <a:latin typeface="Calibri" pitchFamily="34" charset="0"/>
-                <a:ea typeface="Calibri" pitchFamily="34" charset="-122"/>
-                <a:cs typeface="Calibri" pitchFamily="34" charset="-120"/>
-              </a:rPr>
-              <a:t>Why the number is what it is</a:t>
-            </a:r>
-            <a:endParaRPr lang="en-US" sz="1300" dirty="0"/>
-          </a:p>
-        </p:txBody>
-      </p:sp>
-      <p:sp>
-        <p:nvSpPr>
-          <p:cNvPr id="19" name="Text 16"/>
-          <p:cNvSpPr/>
-          <p:nvPr/>
-        </p:nvSpPr>
-        <p:spPr>
-          <a:xfrm>
-            <a:off x="6432804" y="2962656"/>
-            <a:ext cx="4988052" cy="1143000"/>
-          </a:xfrm>
-          <a:prstGeom prst="rect">
-            <a:avLst/>
-          </a:prstGeom>
-          <a:noFill/>
-          <a:ln/>
-        </p:spPr>
-        <p:txBody>
-          <a:bodyPr wrap="square" lIns="0" tIns="0" rIns="0" bIns="0" rtlCol="0" anchor="t"/>
-          <a:lstStyle/>
-          <a:p>
-            <a:pPr marL="152400" indent="-152400">
-              <a:spcAft>
-                <a:spcPts val="600"/>
-              </a:spcAft>
-              <a:buSzPct val="100000"/>
-              <a:buChar char="•"/>
-            </a:pPr>
-            <a:r>
-              <a:rPr lang="en-US" sz="1150" dirty="0">
-                <a:solidFill>
-                  <a:srgbClr val="6B7C88"/>
-                </a:solidFill>
-                <a:latin typeface="Calibri" pitchFamily="34" charset="0"/>
-                <a:ea typeface="Calibri" pitchFamily="34" charset="-122"/>
-                <a:cs typeface="Calibri" pitchFamily="34" charset="-120"/>
-              </a:rPr>
-              <a:t>Ask it the same complaint twice and it answers the same way ~9 times in 10</a:t>
-            </a:r>
-            <a:endParaRPr lang="en-US" sz="1150" dirty="0"/>
-          </a:p>
-          <a:p>
-            <a:pPr marL="152400" indent="-152400">
-              <a:spcAft>
-                <a:spcPts val="600"/>
-              </a:spcAft>
-              <a:buSzPct val="100000"/>
-              <a:buChar char="•"/>
-            </a:pPr>
-            <a:r>
-              <a:rPr lang="en-US" sz="1150" dirty="0">
-                <a:solidFill>
-                  <a:srgbClr val="6B7C88"/>
-                </a:solidFill>
-                <a:latin typeface="Calibri" pitchFamily="34" charset="0"/>
-                <a:ea typeface="Calibri" pitchFamily="34" charset="-122"/>
-                <a:cs typeface="Calibri" pitchFamily="34" charset="-120"/>
-              </a:rPr>
-              <a:t>So it is consistent — it just disagrees with the official label</a:t>
-            </a:r>
-            <a:endParaRPr lang="en-US" sz="1150" dirty="0"/>
-          </a:p>
-          <a:p>
-            <a:pPr marL="152400" indent="-152400">
-              <a:spcAft>
-                <a:spcPts val="600"/>
-              </a:spcAft>
-              <a:buSzPct val="100000"/>
-              <a:buChar char="•"/>
-            </a:pPr>
-            <a:r>
-              <a:rPr lang="en-US" sz="1150" dirty="0">
-                <a:solidFill>
-                  <a:srgbClr val="6B7C88"/>
-                </a:solidFill>
-                <a:latin typeface="Calibri" pitchFamily="34" charset="0"/>
-                <a:ea typeface="Calibri" pitchFamily="34" charset="-122"/>
-                <a:cs typeface="Calibri" pitchFamily="34" charset="-120"/>
-              </a:rPr>
-              <a:t>That label was picked by the customer filing the complaint, from a menu, untrained</a:t>
-            </a:r>
-            <a:endParaRPr lang="en-US" sz="1150" dirty="0"/>
-          </a:p>
-        </p:txBody>
-      </p:sp>
-    </p:spTree>
-  </p:cSld>
-  <p:clrMapOvr>
-    <a:masterClrMapping/>
-  </p:clrMapOvr>
-</p:sld>
-</file>
-
-<file path=ppt/slides/slide12.xml><?xml version="1.0" encoding="utf-8"?>
-<p:sld xmlns:a="http://schemas.openxmlformats.org/drawingml/2006/main" xmlns:r="http://schemas.openxmlformats.org/officeDocument/2006/relationships" xmlns:p="http://schemas.openxmlformats.org/presentationml/2006/main">
-  <p:cSld name="Slide 12">
-    <p:bg>
-      <p:bgPr>
-        <a:solidFill>
-          <a:srgbClr val="FFFFFF"/>
-        </a:solidFill>
-      </p:bgPr>
-    </p:bg>
-    <p:spTree>
-      <p:nvGrpSpPr>
-        <p:cNvPr id="1" name=""/>
-        <p:cNvGrpSpPr/>
-        <p:nvPr/>
-      </p:nvGrpSpPr>
-      <p:grpSpPr>
-        <a:xfrm>
-          <a:off x="0" y="0"/>
-          <a:ext cx="0" cy="0"/>
-          <a:chOff x="0" y="0"/>
-          <a:chExt cx="0" cy="0"/>
-        </a:xfrm>
-      </p:grpSpPr>
-      <p:sp>
-        <p:nvSpPr>
-          <p:cNvPr id="2" name="Text 0"/>
-          <p:cNvSpPr/>
-          <p:nvPr/>
-        </p:nvSpPr>
-        <p:spPr>
-          <a:xfrm>
-            <a:off x="566928" y="310896"/>
-            <a:ext cx="11055096" cy="274320"/>
-          </a:xfrm>
-          <a:prstGeom prst="rect">
-            <a:avLst/>
-          </a:prstGeom>
-          <a:noFill/>
-          <a:ln/>
-        </p:spPr>
-        <p:txBody>
-          <a:bodyPr wrap="square" lIns="0" tIns="0" rIns="0" bIns="0" rtlCol="0" anchor="ctr"/>
-          <a:lstStyle/>
-          <a:p>
-            <a:pPr indent="0" marL="0">
-              <a:buNone/>
-            </a:pPr>
-            <a:r>
-              <a:rPr lang="en-US" sz="1050" b="1" spc="200" kern="0" dirty="0">
-                <a:solidFill>
-                  <a:srgbClr val="6B7C88"/>
-                </a:solidFill>
-                <a:latin typeface="Calibri" pitchFamily="34" charset="0"/>
-                <a:ea typeface="Calibri" pitchFamily="34" charset="-122"/>
-                <a:cs typeface="Calibri" pitchFamily="34" charset="-120"/>
-              </a:rPr>
-              <a:t>CAPSTONE ROUND 1  ·  AI CONSULTING PITCH</a:t>
-            </a:r>
-            <a:endParaRPr lang="en-US" sz="1050" dirty="0"/>
-          </a:p>
-        </p:txBody>
-      </p:sp>
-      <p:sp>
-        <p:nvSpPr>
-          <p:cNvPr id="3" name="Shape 1"/>
-          <p:cNvSpPr/>
-          <p:nvPr/>
-        </p:nvSpPr>
-        <p:spPr>
-          <a:xfrm>
-            <a:off x="566928" y="658368"/>
-            <a:ext cx="566928" cy="566928"/>
-          </a:xfrm>
-          <a:prstGeom prst="ellipse">
-            <a:avLst/>
-          </a:prstGeom>
-          <a:solidFill>
-            <a:srgbClr val="24343F"/>
-          </a:solidFill>
-          <a:ln/>
-        </p:spPr>
-      </p:sp>
-      <p:pic>
-        <p:nvPicPr>
-          <p:cNvPr id="4" name="Image 0" descr="preencoded.png">    </p:cNvPr>
-          <p:cNvPicPr>
-            <a:picLocks noChangeAspect="1"/>
-          </p:cNvPicPr>
-          <p:nvPr/>
-        </p:nvPicPr>
-        <p:blipFill>
-          <a:blip r:embed="rId1"/>
-          <a:stretch>
-            <a:fillRect/>
-          </a:stretch>
-        </p:blipFill>
-        <p:spPr>
-          <a:xfrm>
-            <a:off x="708660" y="800100"/>
-            <a:ext cx="283464" cy="283464"/>
-          </a:xfrm>
-          <a:prstGeom prst="rect">
-            <a:avLst/>
-          </a:prstGeom>
-        </p:spPr>
-      </p:pic>
-      <p:sp>
-        <p:nvSpPr>
-          <p:cNvPr id="5" name="Text 2"/>
-          <p:cNvSpPr/>
-          <p:nvPr/>
-        </p:nvSpPr>
-        <p:spPr>
-          <a:xfrm>
-            <a:off x="1316736" y="621792"/>
-            <a:ext cx="10305288" cy="658368"/>
-          </a:xfrm>
-          <a:prstGeom prst="rect">
-            <a:avLst/>
-          </a:prstGeom>
-          <a:noFill/>
-          <a:ln/>
-        </p:spPr>
-        <p:txBody>
-          <a:bodyPr wrap="square" lIns="0" tIns="0" rIns="0" bIns="0" rtlCol="0" anchor="ctr"/>
-          <a:lstStyle/>
-          <a:p>
-            <a:pPr indent="0" marL="0">
-              <a:buNone/>
-            </a:pPr>
-            <a:r>
-              <a:rPr lang="en-US" sz="3000" b="1" dirty="0">
-                <a:solidFill>
-                  <a:srgbClr val="24343F"/>
-                </a:solidFill>
-                <a:latin typeface="Trebuchet MS" pitchFamily="34" charset="0"/>
-                <a:ea typeface="Trebuchet MS" pitchFamily="34" charset="-122"/>
-                <a:cs typeface="Trebuchet MS" pitchFamily="34" charset="-120"/>
-              </a:rPr>
-              <a:t>The model is not the cost. Oversight is.</a:t>
-            </a:r>
-            <a:endParaRPr lang="en-US" sz="3000" dirty="0"/>
-          </a:p>
-        </p:txBody>
-      </p:sp>
-      <p:sp>
-        <p:nvSpPr>
-          <p:cNvPr id="6" name="Shape 3"/>
-          <p:cNvSpPr/>
-          <p:nvPr/>
-        </p:nvSpPr>
-        <p:spPr>
-          <a:xfrm>
-            <a:off x="566928" y="1481328"/>
-            <a:ext cx="11055096" cy="676656"/>
-          </a:xfrm>
-          <a:prstGeom prst="rect">
-            <a:avLst/>
-          </a:prstGeom>
-          <a:solidFill>
-            <a:srgbClr val="EFF5F9"/>
-          </a:solidFill>
-          <a:ln/>
-        </p:spPr>
-      </p:sp>
-      <p:sp>
-        <p:nvSpPr>
-          <p:cNvPr id="7" name="Shape 4"/>
-          <p:cNvSpPr/>
-          <p:nvPr/>
-        </p:nvSpPr>
-        <p:spPr>
-          <a:xfrm>
-            <a:off x="566928" y="1481328"/>
-            <a:ext cx="82296" cy="676656"/>
-          </a:xfrm>
-          <a:prstGeom prst="rect">
-            <a:avLst/>
-          </a:prstGeom>
-          <a:solidFill>
-            <a:srgbClr val="2A78D6"/>
-          </a:solidFill>
-          <a:ln/>
-        </p:spPr>
-      </p:sp>
-      <p:sp>
-        <p:nvSpPr>
-          <p:cNvPr id="8" name="Text 5"/>
-          <p:cNvSpPr/>
-          <p:nvPr/>
-        </p:nvSpPr>
-        <p:spPr>
-          <a:xfrm>
-            <a:off x="822960" y="1481328"/>
-            <a:ext cx="10597896" cy="676656"/>
-          </a:xfrm>
-          <a:prstGeom prst="rect">
-            <a:avLst/>
-          </a:prstGeom>
-          <a:noFill/>
-          <a:ln/>
-        </p:spPr>
-        <p:txBody>
-          <a:bodyPr wrap="square" lIns="0" tIns="0" rIns="0" bIns="0" rtlCol="0" anchor="ctr"/>
-          <a:lstStyle/>
-          <a:p>
-            <a:pPr indent="0" marL="0">
-              <a:buNone/>
-            </a:pPr>
-            <a:r>
-              <a:rPr lang="en-US" sz="1050" b="1" spc="100" kern="0" dirty="0">
-                <a:solidFill>
-                  <a:srgbClr val="2A78D6"/>
-                </a:solidFill>
-                <a:latin typeface="Calibri" pitchFamily="34" charset="0"/>
-                <a:ea typeface="Calibri" pitchFamily="34" charset="-122"/>
-                <a:cs typeface="Calibri" pitchFamily="34" charset="-120"/>
-              </a:rPr>
-              <a:t>TAKEAWAY   </a:t>
-            </a:r>
-            <a:pPr indent="0" marL="0">
-              <a:buNone/>
-            </a:pPr>
-            <a:r>
-              <a:rPr lang="en-US" sz="1300" dirty="0">
-                <a:solidFill>
-                  <a:srgbClr val="1B2730"/>
-                </a:solidFill>
-                <a:latin typeface="Calibri" pitchFamily="34" charset="0"/>
-                <a:ea typeface="Calibri" pitchFamily="34" charset="-122"/>
-                <a:cs typeface="Calibri" pitchFamily="34" charset="-120"/>
-              </a:rPr>
-              <a:t>97% of the running cost is human review and platform. 0.004% is the model.</a:t>
-            </a:r>
-            <a:endParaRPr lang="en-US" sz="1050" dirty="0"/>
-          </a:p>
-        </p:txBody>
-      </p:sp>
-      <p:sp>
-        <p:nvSpPr>
-          <p:cNvPr id="9" name="Shape 6"/>
-          <p:cNvSpPr/>
-          <p:nvPr/>
-        </p:nvSpPr>
-        <p:spPr>
-          <a:xfrm>
-            <a:off x="566928" y="6437376"/>
-            <a:ext cx="11055096" cy="0"/>
-          </a:xfrm>
-          <a:prstGeom prst="line">
-            <a:avLst/>
-          </a:prstGeom>
-          <a:noFill/>
-          <a:ln w="12700">
-            <a:solidFill>
-              <a:srgbClr val="D9E3EA"/>
-            </a:solidFill>
-            <a:prstDash val="solid"/>
-          </a:ln>
-        </p:spPr>
-      </p:sp>
-      <p:sp>
-        <p:nvSpPr>
-          <p:cNvPr id="10" name="Text 7"/>
-          <p:cNvSpPr/>
-          <p:nvPr/>
-        </p:nvSpPr>
-        <p:spPr>
-          <a:xfrm>
-            <a:off x="566928" y="6473952"/>
-            <a:ext cx="7315200" cy="274320"/>
-          </a:xfrm>
-          <a:prstGeom prst="rect">
-            <a:avLst/>
-          </a:prstGeom>
-          <a:noFill/>
-          <a:ln/>
-        </p:spPr>
-        <p:txBody>
-          <a:bodyPr wrap="square" lIns="0" tIns="0" rIns="0" bIns="0" rtlCol="0" anchor="ctr"/>
-          <a:lstStyle/>
-          <a:p>
-            <a:pPr indent="0" marL="0">
-              <a:buNone/>
-            </a:pPr>
-            <a:endParaRPr lang="en-US" sz="850" dirty="0"/>
-          </a:p>
-        </p:txBody>
-      </p:sp>
-      <p:sp>
-        <p:nvSpPr>
-          <p:cNvPr id="11" name="Text 8"/>
-          <p:cNvSpPr/>
-          <p:nvPr/>
-        </p:nvSpPr>
-        <p:spPr>
-          <a:xfrm>
-            <a:off x="10524744" y="6473952"/>
-            <a:ext cx="1097280" cy="274320"/>
-          </a:xfrm>
-          <a:prstGeom prst="rect">
-            <a:avLst/>
-          </a:prstGeom>
-          <a:noFill/>
-          <a:ln/>
-        </p:spPr>
-        <p:txBody>
-          <a:bodyPr wrap="square" lIns="0" tIns="0" rIns="0" bIns="0" rtlCol="0" anchor="ctr"/>
-          <a:lstStyle/>
-          <a:p>
-            <a:pPr algn="r" indent="0" marL="0">
-              <a:buNone/>
-            </a:pPr>
-            <a:r>
-              <a:rPr lang="en-US" sz="850" dirty="0">
-                <a:solidFill>
-                  <a:srgbClr val="6B7C88"/>
-                </a:solidFill>
-                <a:latin typeface="Calibri" pitchFamily="34" charset="0"/>
-                <a:ea typeface="Calibri" pitchFamily="34" charset="-122"/>
-                <a:cs typeface="Calibri" pitchFamily="34" charset="-120"/>
-              </a:rPr>
-              <a:t>11</a:t>
-            </a:r>
-            <a:endParaRPr lang="en-US" sz="850" dirty="0"/>
-          </a:p>
-        </p:txBody>
-      </p:sp>
       <p:graphicFrame>
         <p:nvGraphicFramePr>
-          <p:cNvPr id="13" name="Table 0"/>
+          <p:cNvPr id="12" name="Table 0"/>
           <p:cNvGraphicFramePr>
             <a:graphicFrameLocks noGrp="1"/>
           </p:cNvGraphicFramePr>
@@ -5682,7 +5237,7 @@
                 <a:ea typeface="Calibri" pitchFamily="34" charset="-122"/>
                 <a:cs typeface="Calibri" pitchFamily="34" charset="-120"/>
               </a:rPr>
-              <a:t>Model choice is not a financial decision at your volume — it is an accuracy decision.</a:t>
+              <a:t>At the volume the regulator's own complaint rate implies for a firm your size, model choice is not a financial decision — it is an accuracy decision.</a:t>
             </a:r>
             <a:endParaRPr lang="en-US" sz="1250" dirty="0"/>
           </a:p>
@@ -5696,9 +5251,9 @@
 </p:sld>
 </file>
 
-<file path=ppt/slides/slide13.xml><?xml version="1.0" encoding="utf-8"?>
+<file path=ppt/slides/slide12.xml><?xml version="1.0" encoding="utf-8"?>
 <p:sld xmlns:a="http://schemas.openxmlformats.org/drawingml/2006/main" xmlns:r="http://schemas.openxmlformats.org/officeDocument/2006/relationships" xmlns:p="http://schemas.openxmlformats.org/presentationml/2006/main">
-  <p:cSld name="Slide 13">
+  <p:cSld name="Slide 12">
     <p:bg>
       <p:bgPr>
         <a:solidFill>
@@ -6019,7 +5574,7 @@
                 <a:ea typeface="Calibri" pitchFamily="34" charset="-122"/>
                 <a:cs typeface="Calibri" pitchFamily="34" charset="-120"/>
               </a:rPr>
-              <a:t>12</a:t>
+              <a:t>11</a:t>
             </a:r>
             <a:endParaRPr lang="en-US" sz="850" dirty="0"/>
           </a:p>
@@ -6671,9 +6226,9 @@
 </p:sld>
 </file>
 
-<file path=ppt/slides/slide14.xml><?xml version="1.0" encoding="utf-8"?>
+<file path=ppt/slides/slide13.xml><?xml version="1.0" encoding="utf-8"?>
 <p:sld xmlns:a="http://schemas.openxmlformats.org/drawingml/2006/main" xmlns:r="http://schemas.openxmlformats.org/officeDocument/2006/relationships" xmlns:p="http://schemas.openxmlformats.org/presentationml/2006/main">
-  <p:cSld name="Slide 14">
+  <p:cSld name="Slide 13">
     <p:bg>
       <p:bgPr>
         <a:solidFill>
@@ -6937,6 +6492,1684 @@
               <a:t>that an honest 60.5% is a stronger pitch than a confident 85%.</a:t>
             </a:r>
             <a:endParaRPr lang="en-US" sz="1300" dirty="0"/>
+          </a:p>
+        </p:txBody>
+      </p:sp>
+    </p:spTree>
+  </p:cSld>
+  <p:clrMapOvr>
+    <a:masterClrMapping/>
+  </p:clrMapOvr>
+</p:sld>
+</file>
+
+<file path=ppt/slides/slide14.xml><?xml version="1.0" encoding="utf-8"?>
+<p:sld xmlns:a="http://schemas.openxmlformats.org/drawingml/2006/main" xmlns:r="http://schemas.openxmlformats.org/officeDocument/2006/relationships" xmlns:p="http://schemas.openxmlformats.org/presentationml/2006/main">
+  <p:cSld name="Slide 14">
+    <p:bg>
+      <p:bgPr>
+        <a:solidFill>
+          <a:srgbClr val="FFFFFF"/>
+        </a:solidFill>
+      </p:bgPr>
+    </p:bg>
+    <p:spTree>
+      <p:nvGrpSpPr>
+        <p:cNvPr id="1" name=""/>
+        <p:cNvGrpSpPr/>
+        <p:nvPr/>
+      </p:nvGrpSpPr>
+      <p:grpSpPr>
+        <a:xfrm>
+          <a:off x="0" y="0"/>
+          <a:ext cx="0" cy="0"/>
+          <a:chOff x="0" y="0"/>
+          <a:chExt cx="0" cy="0"/>
+        </a:xfrm>
+      </p:grpSpPr>
+      <p:sp>
+        <p:nvSpPr>
+          <p:cNvPr id="2" name="Text 0"/>
+          <p:cNvSpPr/>
+          <p:nvPr/>
+        </p:nvSpPr>
+        <p:spPr>
+          <a:xfrm>
+            <a:off x="566928" y="310896"/>
+            <a:ext cx="11055096" cy="274320"/>
+          </a:xfrm>
+          <a:prstGeom prst="rect">
+            <a:avLst/>
+          </a:prstGeom>
+          <a:noFill/>
+          <a:ln/>
+        </p:spPr>
+        <p:txBody>
+          <a:bodyPr wrap="square" lIns="0" tIns="0" rIns="0" bIns="0" rtlCol="0" anchor="ctr"/>
+          <a:lstStyle/>
+          <a:p>
+            <a:pPr indent="0" marL="0">
+              <a:buNone/>
+            </a:pPr>
+            <a:r>
+              <a:rPr lang="en-US" sz="1050" b="1" spc="200" kern="0" dirty="0">
+                <a:solidFill>
+                  <a:srgbClr val="6B7C88"/>
+                </a:solidFill>
+                <a:latin typeface="Calibri" pitchFamily="34" charset="0"/>
+                <a:ea typeface="Calibri" pitchFamily="34" charset="-122"/>
+                <a:cs typeface="Calibri" pitchFamily="34" charset="-120"/>
+              </a:rPr>
+              <a:t>CAPSTONE ROUND 1  ·  AI CONSULTING PITCH</a:t>
+            </a:r>
+            <a:endParaRPr lang="en-US" sz="1050" dirty="0"/>
+          </a:p>
+        </p:txBody>
+      </p:sp>
+      <p:sp>
+        <p:nvSpPr>
+          <p:cNvPr id="3" name="Shape 1"/>
+          <p:cNvSpPr/>
+          <p:nvPr/>
+        </p:nvSpPr>
+        <p:spPr>
+          <a:xfrm>
+            <a:off x="566928" y="658368"/>
+            <a:ext cx="566928" cy="566928"/>
+          </a:xfrm>
+          <a:prstGeom prst="ellipse">
+            <a:avLst/>
+          </a:prstGeom>
+          <a:solidFill>
+            <a:srgbClr val="24343F"/>
+          </a:solidFill>
+          <a:ln/>
+        </p:spPr>
+      </p:sp>
+      <p:pic>
+        <p:nvPicPr>
+          <p:cNvPr id="4" name="Image 0" descr="preencoded.png">    </p:cNvPr>
+          <p:cNvPicPr>
+            <a:picLocks noChangeAspect="1"/>
+          </p:cNvPicPr>
+          <p:nvPr/>
+        </p:nvPicPr>
+        <p:blipFill>
+          <a:blip r:embed="rId1"/>
+          <a:stretch>
+            <a:fillRect/>
+          </a:stretch>
+        </p:blipFill>
+        <p:spPr>
+          <a:xfrm>
+            <a:off x="708660" y="800100"/>
+            <a:ext cx="283464" cy="283464"/>
+          </a:xfrm>
+          <a:prstGeom prst="rect">
+            <a:avLst/>
+          </a:prstGeom>
+        </p:spPr>
+      </p:pic>
+      <p:sp>
+        <p:nvSpPr>
+          <p:cNvPr id="5" name="Text 2"/>
+          <p:cNvSpPr/>
+          <p:nvPr/>
+        </p:nvSpPr>
+        <p:spPr>
+          <a:xfrm>
+            <a:off x="1316736" y="621792"/>
+            <a:ext cx="10305288" cy="658368"/>
+          </a:xfrm>
+          <a:prstGeom prst="rect">
+            <a:avLst/>
+          </a:prstGeom>
+          <a:noFill/>
+          <a:ln/>
+        </p:spPr>
+        <p:txBody>
+          <a:bodyPr wrap="square" lIns="0" tIns="0" rIns="0" bIns="0" rtlCol="0" anchor="ctr"/>
+          <a:lstStyle/>
+          <a:p>
+            <a:pPr indent="0" marL="0">
+              <a:buNone/>
+            </a:pPr>
+            <a:r>
+              <a:rPr lang="en-US" sz="3000" b="1" dirty="0">
+                <a:solidFill>
+                  <a:srgbClr val="24343F"/>
+                </a:solidFill>
+                <a:latin typeface="Trebuchet MS" pitchFamily="34" charset="0"/>
+                <a:ea typeface="Trebuchet MS" pitchFamily="34" charset="-122"/>
+                <a:cs typeface="Trebuchet MS" pitchFamily="34" charset="-120"/>
+              </a:rPr>
+              <a:t>Backup — volume and cost are not the same picture</a:t>
+            </a:r>
+            <a:endParaRPr lang="en-US" sz="3000" dirty="0"/>
+          </a:p>
+        </p:txBody>
+      </p:sp>
+      <p:sp>
+        <p:nvSpPr>
+          <p:cNvPr id="6" name="Shape 3"/>
+          <p:cNvSpPr/>
+          <p:nvPr/>
+        </p:nvSpPr>
+        <p:spPr>
+          <a:xfrm>
+            <a:off x="566928" y="1481328"/>
+            <a:ext cx="11055096" cy="676656"/>
+          </a:xfrm>
+          <a:prstGeom prst="rect">
+            <a:avLst/>
+          </a:prstGeom>
+          <a:solidFill>
+            <a:srgbClr val="EFF5F9"/>
+          </a:solidFill>
+          <a:ln/>
+        </p:spPr>
+      </p:sp>
+      <p:sp>
+        <p:nvSpPr>
+          <p:cNvPr id="7" name="Shape 4"/>
+          <p:cNvSpPr/>
+          <p:nvPr/>
+        </p:nvSpPr>
+        <p:spPr>
+          <a:xfrm>
+            <a:off x="566928" y="1481328"/>
+            <a:ext cx="82296" cy="676656"/>
+          </a:xfrm>
+          <a:prstGeom prst="rect">
+            <a:avLst/>
+          </a:prstGeom>
+          <a:solidFill>
+            <a:srgbClr val="2A78D6"/>
+          </a:solidFill>
+          <a:ln/>
+        </p:spPr>
+      </p:sp>
+      <p:sp>
+        <p:nvSpPr>
+          <p:cNvPr id="8" name="Text 5"/>
+          <p:cNvSpPr/>
+          <p:nvPr/>
+        </p:nvSpPr>
+        <p:spPr>
+          <a:xfrm>
+            <a:off x="822960" y="1481328"/>
+            <a:ext cx="10597896" cy="676656"/>
+          </a:xfrm>
+          <a:prstGeom prst="rect">
+            <a:avLst/>
+          </a:prstGeom>
+          <a:noFill/>
+          <a:ln/>
+        </p:spPr>
+        <p:txBody>
+          <a:bodyPr wrap="square" lIns="0" tIns="0" rIns="0" bIns="0" rtlCol="0" anchor="ctr"/>
+          <a:lstStyle/>
+          <a:p>
+            <a:pPr indent="0" marL="0">
+              <a:buNone/>
+            </a:pPr>
+            <a:r>
+              <a:rPr lang="en-US" sz="1050" b="1" spc="100" kern="0" dirty="0">
+                <a:solidFill>
+                  <a:srgbClr val="2A78D6"/>
+                </a:solidFill>
+                <a:latin typeface="Calibri" pitchFamily="34" charset="0"/>
+                <a:ea typeface="Calibri" pitchFamily="34" charset="-122"/>
+                <a:cs typeface="Calibri" pitchFamily="34" charset="-120"/>
+              </a:rPr>
+              <a:t>TAKEAWAY   </a:t>
+            </a:r>
+            <a:pPr indent="0" marL="0">
+              <a:buNone/>
+            </a:pPr>
+            <a:r>
+              <a:rPr lang="en-US" sz="1300" dirty="0">
+                <a:solidFill>
+                  <a:srgbClr val="1B2730"/>
+                </a:solidFill>
+                <a:latin typeface="Calibri" pitchFamily="34" charset="0"/>
+                <a:ea typeface="Calibri" pitchFamily="34" charset="-122"/>
+                <a:cs typeface="Calibri" pitchFamily="34" charset="-120"/>
+              </a:rPr>
+              <a:t>Where a complaint lands has money attached to it — cards pay out 5.7× more often than vehicle loans.</a:t>
+            </a:r>
+            <a:endParaRPr lang="en-US" sz="1050" dirty="0"/>
+          </a:p>
+        </p:txBody>
+      </p:sp>
+      <p:sp>
+        <p:nvSpPr>
+          <p:cNvPr id="9" name="Shape 6"/>
+          <p:cNvSpPr/>
+          <p:nvPr/>
+        </p:nvSpPr>
+        <p:spPr>
+          <a:xfrm>
+            <a:off x="566928" y="6437376"/>
+            <a:ext cx="11055096" cy="0"/>
+          </a:xfrm>
+          <a:prstGeom prst="line">
+            <a:avLst/>
+          </a:prstGeom>
+          <a:noFill/>
+          <a:ln w="12700">
+            <a:solidFill>
+              <a:srgbClr val="D9E3EA"/>
+            </a:solidFill>
+            <a:prstDash val="solid"/>
+          </a:ln>
+        </p:spPr>
+      </p:sp>
+      <p:sp>
+        <p:nvSpPr>
+          <p:cNvPr id="10" name="Text 7"/>
+          <p:cNvSpPr/>
+          <p:nvPr/>
+        </p:nvSpPr>
+        <p:spPr>
+          <a:xfrm>
+            <a:off x="566928" y="6473952"/>
+            <a:ext cx="7315200" cy="274320"/>
+          </a:xfrm>
+          <a:prstGeom prst="rect">
+            <a:avLst/>
+          </a:prstGeom>
+          <a:noFill/>
+          <a:ln/>
+        </p:spPr>
+        <p:txBody>
+          <a:bodyPr wrap="square" lIns="0" tIns="0" rIns="0" bIns="0" rtlCol="0" anchor="ctr"/>
+          <a:lstStyle/>
+          <a:p>
+            <a:pPr indent="0" marL="0">
+              <a:buNone/>
+            </a:pPr>
+            <a:endParaRPr lang="en-US" sz="850" dirty="0"/>
+          </a:p>
+        </p:txBody>
+      </p:sp>
+      <p:sp>
+        <p:nvSpPr>
+          <p:cNvPr id="11" name="Text 8"/>
+          <p:cNvSpPr/>
+          <p:nvPr/>
+        </p:nvSpPr>
+        <p:spPr>
+          <a:xfrm>
+            <a:off x="10524744" y="6473952"/>
+            <a:ext cx="1097280" cy="274320"/>
+          </a:xfrm>
+          <a:prstGeom prst="rect">
+            <a:avLst/>
+          </a:prstGeom>
+          <a:noFill/>
+          <a:ln/>
+        </p:spPr>
+        <p:txBody>
+          <a:bodyPr wrap="square" lIns="0" tIns="0" rIns="0" bIns="0" rtlCol="0" anchor="ctr"/>
+          <a:lstStyle/>
+          <a:p>
+            <a:pPr algn="r" indent="0" marL="0">
+              <a:buNone/>
+            </a:pPr>
+            <a:r>
+              <a:rPr lang="en-US" sz="850" dirty="0">
+                <a:solidFill>
+                  <a:srgbClr val="6B7C88"/>
+                </a:solidFill>
+                <a:latin typeface="Calibri" pitchFamily="34" charset="0"/>
+                <a:ea typeface="Calibri" pitchFamily="34" charset="-122"/>
+                <a:cs typeface="Calibri" pitchFamily="34" charset="-120"/>
+              </a:rPr>
+              <a:t>12</a:t>
+            </a:r>
+            <a:endParaRPr lang="en-US" sz="850" dirty="0"/>
+          </a:p>
+        </p:txBody>
+      </p:sp>
+      <p:graphicFrame>
+        <p:nvGraphicFramePr>
+          <p:cNvPr id="15" name="Table 0"/>
+          <p:cNvGraphicFramePr>
+            <a:graphicFrameLocks noGrp="1"/>
+          </p:cNvGraphicFramePr>
+          <p:nvPr>
+            <p:extLst>
+              <p:ext uri="{D42A27DB-BD31-4B8C-83A1-F6EECF244321}">
+                <p14:modId xmlns:p14="http://schemas.microsoft.com/office/powerpoint/2010/main" val="1579011935"/>
+              </p:ext>
+            </p:extLst>
+          </p:nvPr>
+        </p:nvGraphicFramePr>
+        <p:xfrm>
+          <a:off x="566928" y="2395728"/>
+          <a:ext cx="11055096" cy="914400"/>
+        </p:xfrm>
+        <a:graphic>
+          <a:graphicData uri="http://schemas.openxmlformats.org/drawingml/2006/table">
+            <a:tbl>
+              <a:tblPr/>
+              <a:tblGrid>
+                <a:gridCol w="3749040"/>
+                <a:gridCol w="1371600"/>
+                <a:gridCol w="1188720"/>
+                <a:gridCol w="2377440"/>
+              </a:tblGrid>
+              <a:tr h="329184">
+                <a:tc>
+                  <a:txBody>
+                    <a:bodyPr/>
+                    <a:lstStyle/>
+                    <a:p>
+                      <a:pPr indent="0" marL="0">
+                        <a:buNone/>
+                      </a:pPr>
+                      <a:r>
+                        <a:rPr lang="en-US" sz="1100" b="1" dirty="0">
+                          <a:solidFill>
+                            <a:srgbClr val="FFFFFF"/>
+                          </a:solidFill>
+                        </a:rPr>
+                        <a:t>Product</a:t>
+                      </a:r>
+                      <a:endParaRPr lang="en-US" sz="1100" dirty="0"/>
+                    </a:p>
+                  </a:txBody>
+                  <a:tcPr marL="76200" marR="76200" marT="38100" marB="38100" anchor="ctr">
+                    <a:lnL w="12700" cap="flat" cmpd="sng" algn="ctr">
+                      <a:solidFill>
+                        <a:srgbClr val="D9E3EA"/>
+                      </a:solidFill>
+                      <a:prstDash val="solid"/>
+                      <a:round/>
+                      <a:headEnd type="none" w="med" len="med"/>
+                      <a:tailEnd type="none" w="med" len="med"/>
+                    </a:lnL>
+                    <a:lnR w="12700" cap="flat" cmpd="sng" algn="ctr">
+                      <a:solidFill>
+                        <a:srgbClr val="D9E3EA"/>
+                      </a:solidFill>
+                      <a:prstDash val="solid"/>
+                      <a:round/>
+                      <a:headEnd type="none" w="med" len="med"/>
+                      <a:tailEnd type="none" w="med" len="med"/>
+                    </a:lnR>
+                    <a:lnT w="12700" cap="flat" cmpd="sng" algn="ctr">
+                      <a:solidFill>
+                        <a:srgbClr val="D9E3EA"/>
+                      </a:solidFill>
+                      <a:prstDash val="solid"/>
+                      <a:round/>
+                      <a:headEnd type="none" w="med" len="med"/>
+                      <a:tailEnd type="none" w="med" len="med"/>
+                    </a:lnT>
+                    <a:lnB w="12700" cap="flat" cmpd="sng" algn="ctr">
+                      <a:solidFill>
+                        <a:srgbClr val="D9E3EA"/>
+                      </a:solidFill>
+                      <a:prstDash val="solid"/>
+                      <a:round/>
+                      <a:headEnd type="none" w="med" len="med"/>
+                      <a:tailEnd type="none" w="med" len="med"/>
+                    </a:lnB>
+                    <a:solidFill>
+                      <a:srgbClr val="445A69"/>
+                    </a:solidFill>
+                  </a:tcPr>
+                </a:tc>
+                <a:tc>
+                  <a:txBody>
+                    <a:bodyPr/>
+                    <a:lstStyle/>
+                    <a:p>
+                      <a:pPr indent="0" marL="0">
+                        <a:buNone/>
+                      </a:pPr>
+                      <a:r>
+                        <a:rPr lang="en-US" sz="1100" b="1" dirty="0">
+                          <a:solidFill>
+                            <a:srgbClr val="FFFFFF"/>
+                          </a:solidFill>
+                        </a:rPr>
+                        <a:t>Complaints</a:t>
+                      </a:r>
+                      <a:endParaRPr lang="en-US" sz="1100" dirty="0"/>
+                    </a:p>
+                  </a:txBody>
+                  <a:tcPr marL="76200" marR="76200" marT="38100" marB="38100" anchor="ctr">
+                    <a:lnL w="12700" cap="flat" cmpd="sng" algn="ctr">
+                      <a:solidFill>
+                        <a:srgbClr val="D9E3EA"/>
+                      </a:solidFill>
+                      <a:prstDash val="solid"/>
+                      <a:round/>
+                      <a:headEnd type="none" w="med" len="med"/>
+                      <a:tailEnd type="none" w="med" len="med"/>
+                    </a:lnL>
+                    <a:lnR w="12700" cap="flat" cmpd="sng" algn="ctr">
+                      <a:solidFill>
+                        <a:srgbClr val="D9E3EA"/>
+                      </a:solidFill>
+                      <a:prstDash val="solid"/>
+                      <a:round/>
+                      <a:headEnd type="none" w="med" len="med"/>
+                      <a:tailEnd type="none" w="med" len="med"/>
+                    </a:lnR>
+                    <a:lnT w="12700" cap="flat" cmpd="sng" algn="ctr">
+                      <a:solidFill>
+                        <a:srgbClr val="D9E3EA"/>
+                      </a:solidFill>
+                      <a:prstDash val="solid"/>
+                      <a:round/>
+                      <a:headEnd type="none" w="med" len="med"/>
+                      <a:tailEnd type="none" w="med" len="med"/>
+                    </a:lnT>
+                    <a:lnB w="12700" cap="flat" cmpd="sng" algn="ctr">
+                      <a:solidFill>
+                        <a:srgbClr val="D9E3EA"/>
+                      </a:solidFill>
+                      <a:prstDash val="solid"/>
+                      <a:round/>
+                      <a:headEnd type="none" w="med" len="med"/>
+                      <a:tailEnd type="none" w="med" len="med"/>
+                    </a:lnB>
+                    <a:solidFill>
+                      <a:srgbClr val="445A69"/>
+                    </a:solidFill>
+                  </a:tcPr>
+                </a:tc>
+                <a:tc>
+                  <a:txBody>
+                    <a:bodyPr/>
+                    <a:lstStyle/>
+                    <a:p>
+                      <a:pPr indent="0" marL="0">
+                        <a:buNone/>
+                      </a:pPr>
+                      <a:r>
+                        <a:rPr lang="en-US" sz="1100" b="1" dirty="0">
+                          <a:solidFill>
+                            <a:srgbClr val="FFFFFF"/>
+                          </a:solidFill>
+                        </a:rPr>
+                        <a:t>Share</a:t>
+                      </a:r>
+                      <a:endParaRPr lang="en-US" sz="1100" dirty="0"/>
+                    </a:p>
+                  </a:txBody>
+                  <a:tcPr marL="76200" marR="76200" marT="38100" marB="38100" anchor="ctr">
+                    <a:lnL w="12700" cap="flat" cmpd="sng" algn="ctr">
+                      <a:solidFill>
+                        <a:srgbClr val="D9E3EA"/>
+                      </a:solidFill>
+                      <a:prstDash val="solid"/>
+                      <a:round/>
+                      <a:headEnd type="none" w="med" len="med"/>
+                      <a:tailEnd type="none" w="med" len="med"/>
+                    </a:lnL>
+                    <a:lnR w="12700" cap="flat" cmpd="sng" algn="ctr">
+                      <a:solidFill>
+                        <a:srgbClr val="D9E3EA"/>
+                      </a:solidFill>
+                      <a:prstDash val="solid"/>
+                      <a:round/>
+                      <a:headEnd type="none" w="med" len="med"/>
+                      <a:tailEnd type="none" w="med" len="med"/>
+                    </a:lnR>
+                    <a:lnT w="12700" cap="flat" cmpd="sng" algn="ctr">
+                      <a:solidFill>
+                        <a:srgbClr val="D9E3EA"/>
+                      </a:solidFill>
+                      <a:prstDash val="solid"/>
+                      <a:round/>
+                      <a:headEnd type="none" w="med" len="med"/>
+                      <a:tailEnd type="none" w="med" len="med"/>
+                    </a:lnT>
+                    <a:lnB w="12700" cap="flat" cmpd="sng" algn="ctr">
+                      <a:solidFill>
+                        <a:srgbClr val="D9E3EA"/>
+                      </a:solidFill>
+                      <a:prstDash val="solid"/>
+                      <a:round/>
+                      <a:headEnd type="none" w="med" len="med"/>
+                      <a:tailEnd type="none" w="med" len="med"/>
+                    </a:lnB>
+                    <a:solidFill>
+                      <a:srgbClr val="445A69"/>
+                    </a:solidFill>
+                  </a:tcPr>
+                </a:tc>
+                <a:tc>
+                  <a:txBody>
+                    <a:bodyPr/>
+                    <a:lstStyle/>
+                    <a:p>
+                      <a:pPr indent="0" marL="0">
+                        <a:buNone/>
+                      </a:pPr>
+                      <a:r>
+                        <a:rPr lang="en-US" sz="1100" b="1" dirty="0">
+                          <a:solidFill>
+                            <a:srgbClr val="FFFFFF"/>
+                          </a:solidFill>
+                        </a:rPr>
+                        <a:t>Closed with money paid</a:t>
+                      </a:r>
+                      <a:endParaRPr lang="en-US" sz="1100" dirty="0"/>
+                    </a:p>
+                  </a:txBody>
+                  <a:tcPr marL="76200" marR="76200" marT="38100" marB="38100" anchor="ctr">
+                    <a:lnL w="12700" cap="flat" cmpd="sng" algn="ctr">
+                      <a:solidFill>
+                        <a:srgbClr val="D9E3EA"/>
+                      </a:solidFill>
+                      <a:prstDash val="solid"/>
+                      <a:round/>
+                      <a:headEnd type="none" w="med" len="med"/>
+                      <a:tailEnd type="none" w="med" len="med"/>
+                    </a:lnL>
+                    <a:lnR w="12700" cap="flat" cmpd="sng" algn="ctr">
+                      <a:solidFill>
+                        <a:srgbClr val="D9E3EA"/>
+                      </a:solidFill>
+                      <a:prstDash val="solid"/>
+                      <a:round/>
+                      <a:headEnd type="none" w="med" len="med"/>
+                      <a:tailEnd type="none" w="med" len="med"/>
+                    </a:lnR>
+                    <a:lnT w="12700" cap="flat" cmpd="sng" algn="ctr">
+                      <a:solidFill>
+                        <a:srgbClr val="D9E3EA"/>
+                      </a:solidFill>
+                      <a:prstDash val="solid"/>
+                      <a:round/>
+                      <a:headEnd type="none" w="med" len="med"/>
+                      <a:tailEnd type="none" w="med" len="med"/>
+                    </a:lnT>
+                    <a:lnB w="12700" cap="flat" cmpd="sng" algn="ctr">
+                      <a:solidFill>
+                        <a:srgbClr val="D9E3EA"/>
+                      </a:solidFill>
+                      <a:prstDash val="solid"/>
+                      <a:round/>
+                      <a:headEnd type="none" w="med" len="med"/>
+                      <a:tailEnd type="none" w="med" len="med"/>
+                    </a:lnB>
+                    <a:solidFill>
+                      <a:srgbClr val="445A69"/>
+                    </a:solidFill>
+                  </a:tcPr>
+                </a:tc>
+              </a:tr>
+              <a:tr h="384048">
+                <a:tc>
+                  <a:txBody>
+                    <a:bodyPr/>
+                    <a:lstStyle/>
+                    <a:p>
+                      <a:pPr indent="0" marL="0">
+                        <a:buNone/>
+                      </a:pPr>
+                      <a:r>
+                        <a:rPr lang="en-US" sz="1050" b="1" dirty="0">
+                          <a:solidFill>
+                            <a:srgbClr val="24343F"/>
+                          </a:solidFill>
+                        </a:rPr>
+                        <a:t>Checking or savings</a:t>
+                      </a:r>
+                      <a:endParaRPr lang="en-US" sz="1050" dirty="0"/>
+                    </a:p>
+                  </a:txBody>
+                  <a:tcPr marL="76200" marR="76200" marT="38100" marB="38100" anchor="ctr">
+                    <a:lnL w="12700" cap="flat" cmpd="sng" algn="ctr">
+                      <a:solidFill>
+                        <a:srgbClr val="D9E3EA"/>
+                      </a:solidFill>
+                      <a:prstDash val="solid"/>
+                      <a:round/>
+                      <a:headEnd type="none" w="med" len="med"/>
+                      <a:tailEnd type="none" w="med" len="med"/>
+                    </a:lnL>
+                    <a:lnR w="12700" cap="flat" cmpd="sng" algn="ctr">
+                      <a:solidFill>
+                        <a:srgbClr val="D9E3EA"/>
+                      </a:solidFill>
+                      <a:prstDash val="solid"/>
+                      <a:round/>
+                      <a:headEnd type="none" w="med" len="med"/>
+                      <a:tailEnd type="none" w="med" len="med"/>
+                    </a:lnR>
+                    <a:lnT w="12700" cap="flat" cmpd="sng" algn="ctr">
+                      <a:solidFill>
+                        <a:srgbClr val="D9E3EA"/>
+                      </a:solidFill>
+                      <a:prstDash val="solid"/>
+                      <a:round/>
+                      <a:headEnd type="none" w="med" len="med"/>
+                      <a:tailEnd type="none" w="med" len="med"/>
+                    </a:lnT>
+                    <a:lnB w="12700" cap="flat" cmpd="sng" algn="ctr">
+                      <a:solidFill>
+                        <a:srgbClr val="D9E3EA"/>
+                      </a:solidFill>
+                      <a:prstDash val="solid"/>
+                      <a:round/>
+                      <a:headEnd type="none" w="med" len="med"/>
+                      <a:tailEnd type="none" w="med" len="med"/>
+                    </a:lnB>
+                    <a:solidFill>
+                      <a:srgbClr val="FFFFFF"/>
+                    </a:solidFill>
+                  </a:tcPr>
+                </a:tc>
+                <a:tc>
+                  <a:txBody>
+                    <a:bodyPr/>
+                    <a:lstStyle/>
+                    <a:p>
+                      <a:pPr indent="0" marL="0">
+                        <a:buNone/>
+                      </a:pPr>
+                      <a:r>
+                        <a:rPr lang="en-US" sz="1050" dirty="0">
+                          <a:solidFill>
+                            <a:srgbClr val="1B2730"/>
+                          </a:solidFill>
+                        </a:rPr>
+                        <a:t>5,835</a:t>
+                      </a:r>
+                      <a:endParaRPr lang="en-US" sz="1050" dirty="0"/>
+                    </a:p>
+                  </a:txBody>
+                  <a:tcPr marL="76200" marR="76200" marT="38100" marB="38100" anchor="ctr">
+                    <a:lnL w="12700" cap="flat" cmpd="sng" algn="ctr">
+                      <a:solidFill>
+                        <a:srgbClr val="D9E3EA"/>
+                      </a:solidFill>
+                      <a:prstDash val="solid"/>
+                      <a:round/>
+                      <a:headEnd type="none" w="med" len="med"/>
+                      <a:tailEnd type="none" w="med" len="med"/>
+                    </a:lnL>
+                    <a:lnR w="12700" cap="flat" cmpd="sng" algn="ctr">
+                      <a:solidFill>
+                        <a:srgbClr val="D9E3EA"/>
+                      </a:solidFill>
+                      <a:prstDash val="solid"/>
+                      <a:round/>
+                      <a:headEnd type="none" w="med" len="med"/>
+                      <a:tailEnd type="none" w="med" len="med"/>
+                    </a:lnR>
+                    <a:lnT w="12700" cap="flat" cmpd="sng" algn="ctr">
+                      <a:solidFill>
+                        <a:srgbClr val="D9E3EA"/>
+                      </a:solidFill>
+                      <a:prstDash val="solid"/>
+                      <a:round/>
+                      <a:headEnd type="none" w="med" len="med"/>
+                      <a:tailEnd type="none" w="med" len="med"/>
+                    </a:lnT>
+                    <a:lnB w="12700" cap="flat" cmpd="sng" algn="ctr">
+                      <a:solidFill>
+                        <a:srgbClr val="D9E3EA"/>
+                      </a:solidFill>
+                      <a:prstDash val="solid"/>
+                      <a:round/>
+                      <a:headEnd type="none" w="med" len="med"/>
+                      <a:tailEnd type="none" w="med" len="med"/>
+                    </a:lnB>
+                    <a:solidFill>
+                      <a:srgbClr val="FFFFFF"/>
+                    </a:solidFill>
+                  </a:tcPr>
+                </a:tc>
+                <a:tc>
+                  <a:txBody>
+                    <a:bodyPr/>
+                    <a:lstStyle/>
+                    <a:p>
+                      <a:pPr indent="0" marL="0">
+                        <a:buNone/>
+                      </a:pPr>
+                      <a:r>
+                        <a:rPr lang="en-US" sz="1050" dirty="0">
+                          <a:solidFill>
+                            <a:srgbClr val="1B2730"/>
+                          </a:solidFill>
+                        </a:rPr>
+                        <a:t>34.7%</a:t>
+                      </a:r>
+                      <a:endParaRPr lang="en-US" sz="1050" dirty="0"/>
+                    </a:p>
+                  </a:txBody>
+                  <a:tcPr marL="76200" marR="76200" marT="38100" marB="38100" anchor="ctr">
+                    <a:lnL w="12700" cap="flat" cmpd="sng" algn="ctr">
+                      <a:solidFill>
+                        <a:srgbClr val="D9E3EA"/>
+                      </a:solidFill>
+                      <a:prstDash val="solid"/>
+                      <a:round/>
+                      <a:headEnd type="none" w="med" len="med"/>
+                      <a:tailEnd type="none" w="med" len="med"/>
+                    </a:lnL>
+                    <a:lnR w="12700" cap="flat" cmpd="sng" algn="ctr">
+                      <a:solidFill>
+                        <a:srgbClr val="D9E3EA"/>
+                      </a:solidFill>
+                      <a:prstDash val="solid"/>
+                      <a:round/>
+                      <a:headEnd type="none" w="med" len="med"/>
+                      <a:tailEnd type="none" w="med" len="med"/>
+                    </a:lnR>
+                    <a:lnT w="12700" cap="flat" cmpd="sng" algn="ctr">
+                      <a:solidFill>
+                        <a:srgbClr val="D9E3EA"/>
+                      </a:solidFill>
+                      <a:prstDash val="solid"/>
+                      <a:round/>
+                      <a:headEnd type="none" w="med" len="med"/>
+                      <a:tailEnd type="none" w="med" len="med"/>
+                    </a:lnT>
+                    <a:lnB w="12700" cap="flat" cmpd="sng" algn="ctr">
+                      <a:solidFill>
+                        <a:srgbClr val="D9E3EA"/>
+                      </a:solidFill>
+                      <a:prstDash val="solid"/>
+                      <a:round/>
+                      <a:headEnd type="none" w="med" len="med"/>
+                      <a:tailEnd type="none" w="med" len="med"/>
+                    </a:lnB>
+                    <a:solidFill>
+                      <a:srgbClr val="FFFFFF"/>
+                    </a:solidFill>
+                  </a:tcPr>
+                </a:tc>
+                <a:tc>
+                  <a:txBody>
+                    <a:bodyPr/>
+                    <a:lstStyle/>
+                    <a:p>
+                      <a:pPr indent="0" marL="0">
+                        <a:buNone/>
+                      </a:pPr>
+                      <a:r>
+                        <a:rPr lang="en-US" sz="1050" dirty="0">
+                          <a:solidFill>
+                            <a:srgbClr val="1B2730"/>
+                          </a:solidFill>
+                        </a:rPr>
+                        <a:t>14.0%</a:t>
+                      </a:r>
+                      <a:endParaRPr lang="en-US" sz="1050" dirty="0"/>
+                    </a:p>
+                  </a:txBody>
+                  <a:tcPr marL="76200" marR="76200" marT="38100" marB="38100" anchor="ctr">
+                    <a:lnL w="12700" cap="flat" cmpd="sng" algn="ctr">
+                      <a:solidFill>
+                        <a:srgbClr val="D9E3EA"/>
+                      </a:solidFill>
+                      <a:prstDash val="solid"/>
+                      <a:round/>
+                      <a:headEnd type="none" w="med" len="med"/>
+                      <a:tailEnd type="none" w="med" len="med"/>
+                    </a:lnL>
+                    <a:lnR w="12700" cap="flat" cmpd="sng" algn="ctr">
+                      <a:solidFill>
+                        <a:srgbClr val="D9E3EA"/>
+                      </a:solidFill>
+                      <a:prstDash val="solid"/>
+                      <a:round/>
+                      <a:headEnd type="none" w="med" len="med"/>
+                      <a:tailEnd type="none" w="med" len="med"/>
+                    </a:lnR>
+                    <a:lnT w="12700" cap="flat" cmpd="sng" algn="ctr">
+                      <a:solidFill>
+                        <a:srgbClr val="D9E3EA"/>
+                      </a:solidFill>
+                      <a:prstDash val="solid"/>
+                      <a:round/>
+                      <a:headEnd type="none" w="med" len="med"/>
+                      <a:tailEnd type="none" w="med" len="med"/>
+                    </a:lnT>
+                    <a:lnB w="12700" cap="flat" cmpd="sng" algn="ctr">
+                      <a:solidFill>
+                        <a:srgbClr val="D9E3EA"/>
+                      </a:solidFill>
+                      <a:prstDash val="solid"/>
+                      <a:round/>
+                      <a:headEnd type="none" w="med" len="med"/>
+                      <a:tailEnd type="none" w="med" len="med"/>
+                    </a:lnB>
+                    <a:solidFill>
+                      <a:srgbClr val="FFFFFF"/>
+                    </a:solidFill>
+                  </a:tcPr>
+                </a:tc>
+              </a:tr>
+              <a:tr h="384048">
+                <a:tc>
+                  <a:txBody>
+                    <a:bodyPr/>
+                    <a:lstStyle/>
+                    <a:p>
+                      <a:pPr indent="0" marL="0">
+                        <a:buNone/>
+                      </a:pPr>
+                      <a:r>
+                        <a:rPr lang="en-US" sz="1050" b="1" dirty="0">
+                          <a:solidFill>
+                            <a:srgbClr val="24343F"/>
+                          </a:solidFill>
+                        </a:rPr>
+                        <a:t>Credit card</a:t>
+                      </a:r>
+                      <a:endParaRPr lang="en-US" sz="1050" dirty="0"/>
+                    </a:p>
+                  </a:txBody>
+                  <a:tcPr marL="76200" marR="76200" marT="38100" marB="38100" anchor="ctr">
+                    <a:lnL w="12700" cap="flat" cmpd="sng" algn="ctr">
+                      <a:solidFill>
+                        <a:srgbClr val="D9E3EA"/>
+                      </a:solidFill>
+                      <a:prstDash val="solid"/>
+                      <a:round/>
+                      <a:headEnd type="none" w="med" len="med"/>
+                      <a:tailEnd type="none" w="med" len="med"/>
+                    </a:lnL>
+                    <a:lnR w="12700" cap="flat" cmpd="sng" algn="ctr">
+                      <a:solidFill>
+                        <a:srgbClr val="D9E3EA"/>
+                      </a:solidFill>
+                      <a:prstDash val="solid"/>
+                      <a:round/>
+                      <a:headEnd type="none" w="med" len="med"/>
+                      <a:tailEnd type="none" w="med" len="med"/>
+                    </a:lnR>
+                    <a:lnT w="12700" cap="flat" cmpd="sng" algn="ctr">
+                      <a:solidFill>
+                        <a:srgbClr val="D9E3EA"/>
+                      </a:solidFill>
+                      <a:prstDash val="solid"/>
+                      <a:round/>
+                      <a:headEnd type="none" w="med" len="med"/>
+                      <a:tailEnd type="none" w="med" len="med"/>
+                    </a:lnT>
+                    <a:lnB w="12700" cap="flat" cmpd="sng" algn="ctr">
+                      <a:solidFill>
+                        <a:srgbClr val="D9E3EA"/>
+                      </a:solidFill>
+                      <a:prstDash val="solid"/>
+                      <a:round/>
+                      <a:headEnd type="none" w="med" len="med"/>
+                      <a:tailEnd type="none" w="med" len="med"/>
+                    </a:lnB>
+                    <a:solidFill>
+                      <a:srgbClr val="FFFFFF"/>
+                    </a:solidFill>
+                  </a:tcPr>
+                </a:tc>
+                <a:tc>
+                  <a:txBody>
+                    <a:bodyPr/>
+                    <a:lstStyle/>
+                    <a:p>
+                      <a:pPr indent="0" marL="0">
+                        <a:buNone/>
+                      </a:pPr>
+                      <a:r>
+                        <a:rPr lang="en-US" sz="1050" dirty="0">
+                          <a:solidFill>
+                            <a:srgbClr val="1B2730"/>
+                          </a:solidFill>
+                        </a:rPr>
+                        <a:t>5,382</a:t>
+                      </a:r>
+                      <a:endParaRPr lang="en-US" sz="1050" dirty="0"/>
+                    </a:p>
+                  </a:txBody>
+                  <a:tcPr marL="76200" marR="76200" marT="38100" marB="38100" anchor="ctr">
+                    <a:lnL w="12700" cap="flat" cmpd="sng" algn="ctr">
+                      <a:solidFill>
+                        <a:srgbClr val="D9E3EA"/>
+                      </a:solidFill>
+                      <a:prstDash val="solid"/>
+                      <a:round/>
+                      <a:headEnd type="none" w="med" len="med"/>
+                      <a:tailEnd type="none" w="med" len="med"/>
+                    </a:lnL>
+                    <a:lnR w="12700" cap="flat" cmpd="sng" algn="ctr">
+                      <a:solidFill>
+                        <a:srgbClr val="D9E3EA"/>
+                      </a:solidFill>
+                      <a:prstDash val="solid"/>
+                      <a:round/>
+                      <a:headEnd type="none" w="med" len="med"/>
+                      <a:tailEnd type="none" w="med" len="med"/>
+                    </a:lnR>
+                    <a:lnT w="12700" cap="flat" cmpd="sng" algn="ctr">
+                      <a:solidFill>
+                        <a:srgbClr val="D9E3EA"/>
+                      </a:solidFill>
+                      <a:prstDash val="solid"/>
+                      <a:round/>
+                      <a:headEnd type="none" w="med" len="med"/>
+                      <a:tailEnd type="none" w="med" len="med"/>
+                    </a:lnT>
+                    <a:lnB w="12700" cap="flat" cmpd="sng" algn="ctr">
+                      <a:solidFill>
+                        <a:srgbClr val="D9E3EA"/>
+                      </a:solidFill>
+                      <a:prstDash val="solid"/>
+                      <a:round/>
+                      <a:headEnd type="none" w="med" len="med"/>
+                      <a:tailEnd type="none" w="med" len="med"/>
+                    </a:lnB>
+                    <a:solidFill>
+                      <a:srgbClr val="FFFFFF"/>
+                    </a:solidFill>
+                  </a:tcPr>
+                </a:tc>
+                <a:tc>
+                  <a:txBody>
+                    <a:bodyPr/>
+                    <a:lstStyle/>
+                    <a:p>
+                      <a:pPr indent="0" marL="0">
+                        <a:buNone/>
+                      </a:pPr>
+                      <a:r>
+                        <a:rPr lang="en-US" sz="1050" dirty="0">
+                          <a:solidFill>
+                            <a:srgbClr val="1B2730"/>
+                          </a:solidFill>
+                        </a:rPr>
+                        <a:t>32.0%</a:t>
+                      </a:r>
+                      <a:endParaRPr lang="en-US" sz="1050" dirty="0"/>
+                    </a:p>
+                  </a:txBody>
+                  <a:tcPr marL="76200" marR="76200" marT="38100" marB="38100" anchor="ctr">
+                    <a:lnL w="12700" cap="flat" cmpd="sng" algn="ctr">
+                      <a:solidFill>
+                        <a:srgbClr val="D9E3EA"/>
+                      </a:solidFill>
+                      <a:prstDash val="solid"/>
+                      <a:round/>
+                      <a:headEnd type="none" w="med" len="med"/>
+                      <a:tailEnd type="none" w="med" len="med"/>
+                    </a:lnL>
+                    <a:lnR w="12700" cap="flat" cmpd="sng" algn="ctr">
+                      <a:solidFill>
+                        <a:srgbClr val="D9E3EA"/>
+                      </a:solidFill>
+                      <a:prstDash val="solid"/>
+                      <a:round/>
+                      <a:headEnd type="none" w="med" len="med"/>
+                      <a:tailEnd type="none" w="med" len="med"/>
+                    </a:lnR>
+                    <a:lnT w="12700" cap="flat" cmpd="sng" algn="ctr">
+                      <a:solidFill>
+                        <a:srgbClr val="D9E3EA"/>
+                      </a:solidFill>
+                      <a:prstDash val="solid"/>
+                      <a:round/>
+                      <a:headEnd type="none" w="med" len="med"/>
+                      <a:tailEnd type="none" w="med" len="med"/>
+                    </a:lnT>
+                    <a:lnB w="12700" cap="flat" cmpd="sng" algn="ctr">
+                      <a:solidFill>
+                        <a:srgbClr val="D9E3EA"/>
+                      </a:solidFill>
+                      <a:prstDash val="solid"/>
+                      <a:round/>
+                      <a:headEnd type="none" w="med" len="med"/>
+                      <a:tailEnd type="none" w="med" len="med"/>
+                    </a:lnB>
+                    <a:solidFill>
+                      <a:srgbClr val="FFFFFF"/>
+                    </a:solidFill>
+                  </a:tcPr>
+                </a:tc>
+                <a:tc>
+                  <a:txBody>
+                    <a:bodyPr/>
+                    <a:lstStyle/>
+                    <a:p>
+                      <a:pPr indent="0" marL="0">
+                        <a:buNone/>
+                      </a:pPr>
+                      <a:r>
+                        <a:rPr lang="en-US" sz="1050" dirty="0">
+                          <a:solidFill>
+                            <a:srgbClr val="1B2730"/>
+                          </a:solidFill>
+                        </a:rPr>
+                        <a:t>17.2%</a:t>
+                      </a:r>
+                      <a:endParaRPr lang="en-US" sz="1050" dirty="0"/>
+                    </a:p>
+                  </a:txBody>
+                  <a:tcPr marL="76200" marR="76200" marT="38100" marB="38100" anchor="ctr">
+                    <a:lnL w="12700" cap="flat" cmpd="sng" algn="ctr">
+                      <a:solidFill>
+                        <a:srgbClr val="D9E3EA"/>
+                      </a:solidFill>
+                      <a:prstDash val="solid"/>
+                      <a:round/>
+                      <a:headEnd type="none" w="med" len="med"/>
+                      <a:tailEnd type="none" w="med" len="med"/>
+                    </a:lnL>
+                    <a:lnR w="12700" cap="flat" cmpd="sng" algn="ctr">
+                      <a:solidFill>
+                        <a:srgbClr val="D9E3EA"/>
+                      </a:solidFill>
+                      <a:prstDash val="solid"/>
+                      <a:round/>
+                      <a:headEnd type="none" w="med" len="med"/>
+                      <a:tailEnd type="none" w="med" len="med"/>
+                    </a:lnR>
+                    <a:lnT w="12700" cap="flat" cmpd="sng" algn="ctr">
+                      <a:solidFill>
+                        <a:srgbClr val="D9E3EA"/>
+                      </a:solidFill>
+                      <a:prstDash val="solid"/>
+                      <a:round/>
+                      <a:headEnd type="none" w="med" len="med"/>
+                      <a:tailEnd type="none" w="med" len="med"/>
+                    </a:lnT>
+                    <a:lnB w="12700" cap="flat" cmpd="sng" algn="ctr">
+                      <a:solidFill>
+                        <a:srgbClr val="D9E3EA"/>
+                      </a:solidFill>
+                      <a:prstDash val="solid"/>
+                      <a:round/>
+                      <a:headEnd type="none" w="med" len="med"/>
+                      <a:tailEnd type="none" w="med" len="med"/>
+                    </a:lnB>
+                    <a:solidFill>
+                      <a:srgbClr val="FFFFFF"/>
+                    </a:solidFill>
+                  </a:tcPr>
+                </a:tc>
+              </a:tr>
+              <a:tr h="384048">
+                <a:tc>
+                  <a:txBody>
+                    <a:bodyPr/>
+                    <a:lstStyle/>
+                    <a:p>
+                      <a:pPr indent="0" marL="0">
+                        <a:buNone/>
+                      </a:pPr>
+                      <a:r>
+                        <a:rPr lang="en-US" sz="1050" b="1" dirty="0">
+                          <a:solidFill>
+                            <a:srgbClr val="24343F"/>
+                          </a:solidFill>
+                        </a:rPr>
+                        <a:t>Money transfer</a:t>
+                      </a:r>
+                      <a:endParaRPr lang="en-US" sz="1050" dirty="0"/>
+                    </a:p>
+                  </a:txBody>
+                  <a:tcPr marL="76200" marR="76200" marT="38100" marB="38100" anchor="ctr">
+                    <a:lnL w="12700" cap="flat" cmpd="sng" algn="ctr">
+                      <a:solidFill>
+                        <a:srgbClr val="D9E3EA"/>
+                      </a:solidFill>
+                      <a:prstDash val="solid"/>
+                      <a:round/>
+                      <a:headEnd type="none" w="med" len="med"/>
+                      <a:tailEnd type="none" w="med" len="med"/>
+                    </a:lnL>
+                    <a:lnR w="12700" cap="flat" cmpd="sng" algn="ctr">
+                      <a:solidFill>
+                        <a:srgbClr val="D9E3EA"/>
+                      </a:solidFill>
+                      <a:prstDash val="solid"/>
+                      <a:round/>
+                      <a:headEnd type="none" w="med" len="med"/>
+                      <a:tailEnd type="none" w="med" len="med"/>
+                    </a:lnR>
+                    <a:lnT w="12700" cap="flat" cmpd="sng" algn="ctr">
+                      <a:solidFill>
+                        <a:srgbClr val="D9E3EA"/>
+                      </a:solidFill>
+                      <a:prstDash val="solid"/>
+                      <a:round/>
+                      <a:headEnd type="none" w="med" len="med"/>
+                      <a:tailEnd type="none" w="med" len="med"/>
+                    </a:lnT>
+                    <a:lnB w="12700" cap="flat" cmpd="sng" algn="ctr">
+                      <a:solidFill>
+                        <a:srgbClr val="D9E3EA"/>
+                      </a:solidFill>
+                      <a:prstDash val="solid"/>
+                      <a:round/>
+                      <a:headEnd type="none" w="med" len="med"/>
+                      <a:tailEnd type="none" w="med" len="med"/>
+                    </a:lnB>
+                    <a:solidFill>
+                      <a:srgbClr val="FFFFFF"/>
+                    </a:solidFill>
+                  </a:tcPr>
+                </a:tc>
+                <a:tc>
+                  <a:txBody>
+                    <a:bodyPr/>
+                    <a:lstStyle/>
+                    <a:p>
+                      <a:pPr indent="0" marL="0">
+                        <a:buNone/>
+                      </a:pPr>
+                      <a:r>
+                        <a:rPr lang="en-US" sz="1050" dirty="0">
+                          <a:solidFill>
+                            <a:srgbClr val="1B2730"/>
+                          </a:solidFill>
+                        </a:rPr>
+                        <a:t>2,551</a:t>
+                      </a:r>
+                      <a:endParaRPr lang="en-US" sz="1050" dirty="0"/>
+                    </a:p>
+                  </a:txBody>
+                  <a:tcPr marL="76200" marR="76200" marT="38100" marB="38100" anchor="ctr">
+                    <a:lnL w="12700" cap="flat" cmpd="sng" algn="ctr">
+                      <a:solidFill>
+                        <a:srgbClr val="D9E3EA"/>
+                      </a:solidFill>
+                      <a:prstDash val="solid"/>
+                      <a:round/>
+                      <a:headEnd type="none" w="med" len="med"/>
+                      <a:tailEnd type="none" w="med" len="med"/>
+                    </a:lnL>
+                    <a:lnR w="12700" cap="flat" cmpd="sng" algn="ctr">
+                      <a:solidFill>
+                        <a:srgbClr val="D9E3EA"/>
+                      </a:solidFill>
+                      <a:prstDash val="solid"/>
+                      <a:round/>
+                      <a:headEnd type="none" w="med" len="med"/>
+                      <a:tailEnd type="none" w="med" len="med"/>
+                    </a:lnR>
+                    <a:lnT w="12700" cap="flat" cmpd="sng" algn="ctr">
+                      <a:solidFill>
+                        <a:srgbClr val="D9E3EA"/>
+                      </a:solidFill>
+                      <a:prstDash val="solid"/>
+                      <a:round/>
+                      <a:headEnd type="none" w="med" len="med"/>
+                      <a:tailEnd type="none" w="med" len="med"/>
+                    </a:lnT>
+                    <a:lnB w="12700" cap="flat" cmpd="sng" algn="ctr">
+                      <a:solidFill>
+                        <a:srgbClr val="D9E3EA"/>
+                      </a:solidFill>
+                      <a:prstDash val="solid"/>
+                      <a:round/>
+                      <a:headEnd type="none" w="med" len="med"/>
+                      <a:tailEnd type="none" w="med" len="med"/>
+                    </a:lnB>
+                    <a:solidFill>
+                      <a:srgbClr val="FFFFFF"/>
+                    </a:solidFill>
+                  </a:tcPr>
+                </a:tc>
+                <a:tc>
+                  <a:txBody>
+                    <a:bodyPr/>
+                    <a:lstStyle/>
+                    <a:p>
+                      <a:pPr indent="0" marL="0">
+                        <a:buNone/>
+                      </a:pPr>
+                      <a:r>
+                        <a:rPr lang="en-US" sz="1050" dirty="0">
+                          <a:solidFill>
+                            <a:srgbClr val="1B2730"/>
+                          </a:solidFill>
+                        </a:rPr>
+                        <a:t>15.1%</a:t>
+                      </a:r>
+                      <a:endParaRPr lang="en-US" sz="1050" dirty="0"/>
+                    </a:p>
+                  </a:txBody>
+                  <a:tcPr marL="76200" marR="76200" marT="38100" marB="38100" anchor="ctr">
+                    <a:lnL w="12700" cap="flat" cmpd="sng" algn="ctr">
+                      <a:solidFill>
+                        <a:srgbClr val="D9E3EA"/>
+                      </a:solidFill>
+                      <a:prstDash val="solid"/>
+                      <a:round/>
+                      <a:headEnd type="none" w="med" len="med"/>
+                      <a:tailEnd type="none" w="med" len="med"/>
+                    </a:lnL>
+                    <a:lnR w="12700" cap="flat" cmpd="sng" algn="ctr">
+                      <a:solidFill>
+                        <a:srgbClr val="D9E3EA"/>
+                      </a:solidFill>
+                      <a:prstDash val="solid"/>
+                      <a:round/>
+                      <a:headEnd type="none" w="med" len="med"/>
+                      <a:tailEnd type="none" w="med" len="med"/>
+                    </a:lnR>
+                    <a:lnT w="12700" cap="flat" cmpd="sng" algn="ctr">
+                      <a:solidFill>
+                        <a:srgbClr val="D9E3EA"/>
+                      </a:solidFill>
+                      <a:prstDash val="solid"/>
+                      <a:round/>
+                      <a:headEnd type="none" w="med" len="med"/>
+                      <a:tailEnd type="none" w="med" len="med"/>
+                    </a:lnT>
+                    <a:lnB w="12700" cap="flat" cmpd="sng" algn="ctr">
+                      <a:solidFill>
+                        <a:srgbClr val="D9E3EA"/>
+                      </a:solidFill>
+                      <a:prstDash val="solid"/>
+                      <a:round/>
+                      <a:headEnd type="none" w="med" len="med"/>
+                      <a:tailEnd type="none" w="med" len="med"/>
+                    </a:lnB>
+                    <a:solidFill>
+                      <a:srgbClr val="FFFFFF"/>
+                    </a:solidFill>
+                  </a:tcPr>
+                </a:tc>
+                <a:tc>
+                  <a:txBody>
+                    <a:bodyPr/>
+                    <a:lstStyle/>
+                    <a:p>
+                      <a:pPr indent="0" marL="0">
+                        <a:buNone/>
+                      </a:pPr>
+                      <a:r>
+                        <a:rPr lang="en-US" sz="1050" dirty="0">
+                          <a:solidFill>
+                            <a:srgbClr val="1B2730"/>
+                          </a:solidFill>
+                        </a:rPr>
+                        <a:t>10.6%</a:t>
+                      </a:r>
+                      <a:endParaRPr lang="en-US" sz="1050" dirty="0"/>
+                    </a:p>
+                  </a:txBody>
+                  <a:tcPr marL="76200" marR="76200" marT="38100" marB="38100" anchor="ctr">
+                    <a:lnL w="12700" cap="flat" cmpd="sng" algn="ctr">
+                      <a:solidFill>
+                        <a:srgbClr val="D9E3EA"/>
+                      </a:solidFill>
+                      <a:prstDash val="solid"/>
+                      <a:round/>
+                      <a:headEnd type="none" w="med" len="med"/>
+                      <a:tailEnd type="none" w="med" len="med"/>
+                    </a:lnL>
+                    <a:lnR w="12700" cap="flat" cmpd="sng" algn="ctr">
+                      <a:solidFill>
+                        <a:srgbClr val="D9E3EA"/>
+                      </a:solidFill>
+                      <a:prstDash val="solid"/>
+                      <a:round/>
+                      <a:headEnd type="none" w="med" len="med"/>
+                      <a:tailEnd type="none" w="med" len="med"/>
+                    </a:lnR>
+                    <a:lnT w="12700" cap="flat" cmpd="sng" algn="ctr">
+                      <a:solidFill>
+                        <a:srgbClr val="D9E3EA"/>
+                      </a:solidFill>
+                      <a:prstDash val="solid"/>
+                      <a:round/>
+                      <a:headEnd type="none" w="med" len="med"/>
+                      <a:tailEnd type="none" w="med" len="med"/>
+                    </a:lnT>
+                    <a:lnB w="12700" cap="flat" cmpd="sng" algn="ctr">
+                      <a:solidFill>
+                        <a:srgbClr val="D9E3EA"/>
+                      </a:solidFill>
+                      <a:prstDash val="solid"/>
+                      <a:round/>
+                      <a:headEnd type="none" w="med" len="med"/>
+                      <a:tailEnd type="none" w="med" len="med"/>
+                    </a:lnB>
+                    <a:solidFill>
+                      <a:srgbClr val="FFFFFF"/>
+                    </a:solidFill>
+                  </a:tcPr>
+                </a:tc>
+              </a:tr>
+              <a:tr h="384048">
+                <a:tc>
+                  <a:txBody>
+                    <a:bodyPr/>
+                    <a:lstStyle/>
+                    <a:p>
+                      <a:pPr indent="0" marL="0">
+                        <a:buNone/>
+                      </a:pPr>
+                      <a:r>
+                        <a:rPr lang="en-US" sz="1050" b="1" dirty="0">
+                          <a:solidFill>
+                            <a:srgbClr val="24343F"/>
+                          </a:solidFill>
+                        </a:rPr>
+                        <a:t>Vehicle loan</a:t>
+                      </a:r>
+                      <a:endParaRPr lang="en-US" sz="1050" dirty="0"/>
+                    </a:p>
+                  </a:txBody>
+                  <a:tcPr marL="76200" marR="76200" marT="38100" marB="38100" anchor="ctr">
+                    <a:lnL w="12700" cap="flat" cmpd="sng" algn="ctr">
+                      <a:solidFill>
+                        <a:srgbClr val="D9E3EA"/>
+                      </a:solidFill>
+                      <a:prstDash val="solid"/>
+                      <a:round/>
+                      <a:headEnd type="none" w="med" len="med"/>
+                      <a:tailEnd type="none" w="med" len="med"/>
+                    </a:lnL>
+                    <a:lnR w="12700" cap="flat" cmpd="sng" algn="ctr">
+                      <a:solidFill>
+                        <a:srgbClr val="D9E3EA"/>
+                      </a:solidFill>
+                      <a:prstDash val="solid"/>
+                      <a:round/>
+                      <a:headEnd type="none" w="med" len="med"/>
+                      <a:tailEnd type="none" w="med" len="med"/>
+                    </a:lnR>
+                    <a:lnT w="12700" cap="flat" cmpd="sng" algn="ctr">
+                      <a:solidFill>
+                        <a:srgbClr val="D9E3EA"/>
+                      </a:solidFill>
+                      <a:prstDash val="solid"/>
+                      <a:round/>
+                      <a:headEnd type="none" w="med" len="med"/>
+                      <a:tailEnd type="none" w="med" len="med"/>
+                    </a:lnT>
+                    <a:lnB w="12700" cap="flat" cmpd="sng" algn="ctr">
+                      <a:solidFill>
+                        <a:srgbClr val="D9E3EA"/>
+                      </a:solidFill>
+                      <a:prstDash val="solid"/>
+                      <a:round/>
+                      <a:headEnd type="none" w="med" len="med"/>
+                      <a:tailEnd type="none" w="med" len="med"/>
+                    </a:lnB>
+                    <a:solidFill>
+                      <a:srgbClr val="FFFFFF"/>
+                    </a:solidFill>
+                  </a:tcPr>
+                </a:tc>
+                <a:tc>
+                  <a:txBody>
+                    <a:bodyPr/>
+                    <a:lstStyle/>
+                    <a:p>
+                      <a:pPr indent="0" marL="0">
+                        <a:buNone/>
+                      </a:pPr>
+                      <a:r>
+                        <a:rPr lang="en-US" sz="1050" dirty="0">
+                          <a:solidFill>
+                            <a:srgbClr val="1B2730"/>
+                          </a:solidFill>
+                        </a:rPr>
+                        <a:t>1,523</a:t>
+                      </a:r>
+                      <a:endParaRPr lang="en-US" sz="1050" dirty="0"/>
+                    </a:p>
+                  </a:txBody>
+                  <a:tcPr marL="76200" marR="76200" marT="38100" marB="38100" anchor="ctr">
+                    <a:lnL w="12700" cap="flat" cmpd="sng" algn="ctr">
+                      <a:solidFill>
+                        <a:srgbClr val="D9E3EA"/>
+                      </a:solidFill>
+                      <a:prstDash val="solid"/>
+                      <a:round/>
+                      <a:headEnd type="none" w="med" len="med"/>
+                      <a:tailEnd type="none" w="med" len="med"/>
+                    </a:lnL>
+                    <a:lnR w="12700" cap="flat" cmpd="sng" algn="ctr">
+                      <a:solidFill>
+                        <a:srgbClr val="D9E3EA"/>
+                      </a:solidFill>
+                      <a:prstDash val="solid"/>
+                      <a:round/>
+                      <a:headEnd type="none" w="med" len="med"/>
+                      <a:tailEnd type="none" w="med" len="med"/>
+                    </a:lnR>
+                    <a:lnT w="12700" cap="flat" cmpd="sng" algn="ctr">
+                      <a:solidFill>
+                        <a:srgbClr val="D9E3EA"/>
+                      </a:solidFill>
+                      <a:prstDash val="solid"/>
+                      <a:round/>
+                      <a:headEnd type="none" w="med" len="med"/>
+                      <a:tailEnd type="none" w="med" len="med"/>
+                    </a:lnT>
+                    <a:lnB w="12700" cap="flat" cmpd="sng" algn="ctr">
+                      <a:solidFill>
+                        <a:srgbClr val="D9E3EA"/>
+                      </a:solidFill>
+                      <a:prstDash val="solid"/>
+                      <a:round/>
+                      <a:headEnd type="none" w="med" len="med"/>
+                      <a:tailEnd type="none" w="med" len="med"/>
+                    </a:lnB>
+                    <a:solidFill>
+                      <a:srgbClr val="FFFFFF"/>
+                    </a:solidFill>
+                  </a:tcPr>
+                </a:tc>
+                <a:tc>
+                  <a:txBody>
+                    <a:bodyPr/>
+                    <a:lstStyle/>
+                    <a:p>
+                      <a:pPr indent="0" marL="0">
+                        <a:buNone/>
+                      </a:pPr>
+                      <a:r>
+                        <a:rPr lang="en-US" sz="1050" dirty="0">
+                          <a:solidFill>
+                            <a:srgbClr val="1B2730"/>
+                          </a:solidFill>
+                        </a:rPr>
+                        <a:t>9.0%</a:t>
+                      </a:r>
+                      <a:endParaRPr lang="en-US" sz="1050" dirty="0"/>
+                    </a:p>
+                  </a:txBody>
+                  <a:tcPr marL="76200" marR="76200" marT="38100" marB="38100" anchor="ctr">
+                    <a:lnL w="12700" cap="flat" cmpd="sng" algn="ctr">
+                      <a:solidFill>
+                        <a:srgbClr val="D9E3EA"/>
+                      </a:solidFill>
+                      <a:prstDash val="solid"/>
+                      <a:round/>
+                      <a:headEnd type="none" w="med" len="med"/>
+                      <a:tailEnd type="none" w="med" len="med"/>
+                    </a:lnL>
+                    <a:lnR w="12700" cap="flat" cmpd="sng" algn="ctr">
+                      <a:solidFill>
+                        <a:srgbClr val="D9E3EA"/>
+                      </a:solidFill>
+                      <a:prstDash val="solid"/>
+                      <a:round/>
+                      <a:headEnd type="none" w="med" len="med"/>
+                      <a:tailEnd type="none" w="med" len="med"/>
+                    </a:lnR>
+                    <a:lnT w="12700" cap="flat" cmpd="sng" algn="ctr">
+                      <a:solidFill>
+                        <a:srgbClr val="D9E3EA"/>
+                      </a:solidFill>
+                      <a:prstDash val="solid"/>
+                      <a:round/>
+                      <a:headEnd type="none" w="med" len="med"/>
+                      <a:tailEnd type="none" w="med" len="med"/>
+                    </a:lnT>
+                    <a:lnB w="12700" cap="flat" cmpd="sng" algn="ctr">
+                      <a:solidFill>
+                        <a:srgbClr val="D9E3EA"/>
+                      </a:solidFill>
+                      <a:prstDash val="solid"/>
+                      <a:round/>
+                      <a:headEnd type="none" w="med" len="med"/>
+                      <a:tailEnd type="none" w="med" len="med"/>
+                    </a:lnB>
+                    <a:solidFill>
+                      <a:srgbClr val="FFFFFF"/>
+                    </a:solidFill>
+                  </a:tcPr>
+                </a:tc>
+                <a:tc>
+                  <a:txBody>
+                    <a:bodyPr/>
+                    <a:lstStyle/>
+                    <a:p>
+                      <a:pPr indent="0" marL="0">
+                        <a:buNone/>
+                      </a:pPr>
+                      <a:r>
+                        <a:rPr lang="en-US" sz="1050" dirty="0">
+                          <a:solidFill>
+                            <a:srgbClr val="1B2730"/>
+                          </a:solidFill>
+                        </a:rPr>
+                        <a:t>3.0%</a:t>
+                      </a:r>
+                      <a:endParaRPr lang="en-US" sz="1050" dirty="0"/>
+                    </a:p>
+                  </a:txBody>
+                  <a:tcPr marL="76200" marR="76200" marT="38100" marB="38100" anchor="ctr">
+                    <a:lnL w="12700" cap="flat" cmpd="sng" algn="ctr">
+                      <a:solidFill>
+                        <a:srgbClr val="D9E3EA"/>
+                      </a:solidFill>
+                      <a:prstDash val="solid"/>
+                      <a:round/>
+                      <a:headEnd type="none" w="med" len="med"/>
+                      <a:tailEnd type="none" w="med" len="med"/>
+                    </a:lnL>
+                    <a:lnR w="12700" cap="flat" cmpd="sng" algn="ctr">
+                      <a:solidFill>
+                        <a:srgbClr val="D9E3EA"/>
+                      </a:solidFill>
+                      <a:prstDash val="solid"/>
+                      <a:round/>
+                      <a:headEnd type="none" w="med" len="med"/>
+                      <a:tailEnd type="none" w="med" len="med"/>
+                    </a:lnR>
+                    <a:lnT w="12700" cap="flat" cmpd="sng" algn="ctr">
+                      <a:solidFill>
+                        <a:srgbClr val="D9E3EA"/>
+                      </a:solidFill>
+                      <a:prstDash val="solid"/>
+                      <a:round/>
+                      <a:headEnd type="none" w="med" len="med"/>
+                      <a:tailEnd type="none" w="med" len="med"/>
+                    </a:lnT>
+                    <a:lnB w="12700" cap="flat" cmpd="sng" algn="ctr">
+                      <a:solidFill>
+                        <a:srgbClr val="D9E3EA"/>
+                      </a:solidFill>
+                      <a:prstDash val="solid"/>
+                      <a:round/>
+                      <a:headEnd type="none" w="med" len="med"/>
+                      <a:tailEnd type="none" w="med" len="med"/>
+                    </a:lnB>
+                    <a:solidFill>
+                      <a:srgbClr val="FFFFFF"/>
+                    </a:solidFill>
+                  </a:tcPr>
+                </a:tc>
+              </a:tr>
+            </a:tbl>
+          </a:graphicData>
+        </a:graphic>
+      </p:graphicFrame>
+      <p:sp>
+        <p:nvSpPr>
+          <p:cNvPr id="13" name="Shape 9"/>
+          <p:cNvSpPr/>
+          <p:nvPr/>
+        </p:nvSpPr>
+        <p:spPr>
+          <a:xfrm>
+            <a:off x="566928" y="4489704"/>
+            <a:ext cx="11055096" cy="640080"/>
+          </a:xfrm>
+          <a:prstGeom prst="rect">
+            <a:avLst/>
+          </a:prstGeom>
+          <a:solidFill>
+            <a:srgbClr val="EFF5F9"/>
+          </a:solidFill>
+          <a:ln/>
+        </p:spPr>
+      </p:sp>
+      <p:sp>
+        <p:nvSpPr>
+          <p:cNvPr id="14" name="Shape 10"/>
+          <p:cNvSpPr/>
+          <p:nvPr/>
+        </p:nvSpPr>
+        <p:spPr>
+          <a:xfrm>
+            <a:off x="566928" y="4489704"/>
+            <a:ext cx="82296" cy="640080"/>
+          </a:xfrm>
+          <a:prstGeom prst="rect">
+            <a:avLst/>
+          </a:prstGeom>
+          <a:solidFill>
+            <a:srgbClr val="2A78D6"/>
+          </a:solidFill>
+          <a:ln/>
+        </p:spPr>
+      </p:sp>
+      <p:sp>
+        <p:nvSpPr>
+          <p:cNvPr id="15" name="Text 11"/>
+          <p:cNvSpPr/>
+          <p:nvPr/>
+        </p:nvSpPr>
+        <p:spPr>
+          <a:xfrm>
+            <a:off x="822960" y="4489704"/>
+            <a:ext cx="10597896" cy="640080"/>
+          </a:xfrm>
+          <a:prstGeom prst="rect">
+            <a:avLst/>
+          </a:prstGeom>
+          <a:noFill/>
+          <a:ln/>
+        </p:spPr>
+        <p:txBody>
+          <a:bodyPr wrap="square" lIns="0" tIns="0" rIns="0" bIns="0" rtlCol="0" anchor="ctr"/>
+          <a:lstStyle/>
+          <a:p>
+            <a:pPr indent="0" marL="0">
+              <a:buNone/>
+            </a:pPr>
+            <a:r>
+              <a:rPr lang="en-US" sz="1250" b="1" dirty="0">
+                <a:solidFill>
+                  <a:srgbClr val="000000"/>
+                </a:solidFill>
+                <a:latin typeface="Calibri" pitchFamily="34" charset="0"/>
+                <a:ea typeface="Calibri" pitchFamily="34" charset="-122"/>
+                <a:cs typeface="Calibri" pitchFamily="34" charset="-120"/>
+              </a:rPr>
+              <a:t>Two thirds of volume sits in deposits and cards — and so does the money.</a:t>
+            </a:r>
+            <a:endParaRPr lang="en-US" sz="1250" dirty="0"/>
           </a:p>
         </p:txBody>
       </p:sp>
@@ -12078,7 +13311,7 @@
                 <a:ea typeface="Calibri" pitchFamily="34" charset="-122"/>
                 <a:cs typeface="Calibri" pitchFamily="34" charset="-120"/>
               </a:rPr>
-              <a:t>What you read first</a:t>
+              <a:t>Whose numbers are these?</a:t>
             </a:r>
             <a:endParaRPr lang="en-US" sz="1100" dirty="0"/>
           </a:p>
@@ -12118,7 +13351,7 @@
                   <a:srgbClr val="C6D8E4"/>
                 </a:solidFill>
               </a:rPr>
-              <a:t>16,839 complaints handled — the workload, not a sample</a:t>
+              <a:t>Not yours — 16,839 real complaints from the public regulator database</a:t>
             </a:r>
             <a:endParaRPr lang="en-US" sz="1250" dirty="0"/>
           </a:p>
@@ -12136,7 +13369,7 @@
                   <a:srgbClr val="C6D8E4"/>
                 </a:solidFill>
               </a:rPr>
-              <a:t>98.0% answered on time — the number you already report</a:t>
+              <a:t>It stands in for your book until Phase 0 measures the real thing</a:t>
             </a:r>
             <a:endParaRPr lang="en-US" sz="1250" dirty="0"/>
           </a:p>
@@ -12154,7 +13387,7 @@
                   <a:srgbClr val="C6D8E4"/>
                 </a:solidFill>
               </a:rPr>
-              <a:t>12.7% cost money to resolve — the only figure in your currency</a:t>
+              <a:t>What transfers is the shape: the mix of issues, the language, how cases end</a:t>
             </a:r>
             <a:endParaRPr lang="en-US" sz="1250" dirty="0"/>
           </a:p>
@@ -12172,7 +13405,7 @@
                   <a:srgbClr val="C6D8E4"/>
                 </a:solidFill>
               </a:rPr>
-              <a:t>46% could be auto-sorted — the opportunity, stated as a share not a promise</a:t>
+              <a:t>What does not transfer is the volume. Those are your numbers to find, not mine to assume</a:t>
             </a:r>
             <a:endParaRPr lang="en-US" sz="1250" dirty="0"/>
           </a:p>
@@ -12190,7 +13423,7 @@
                   <a:srgbClr val="C6D8E4"/>
                 </a:solidFill>
               </a:rPr>
-              <a:t>Every panel says what it means in plain English underneath. No statistics jargon anywhere on it.</a:t>
+              <a:t>The measures are ones you already report: answered on time, resolved, cost money</a:t>
             </a:r>
             <a:endParaRPr lang="en-US" sz="1250" dirty="0"/>
           </a:p>
@@ -12344,7 +13577,7 @@
                 <a:ea typeface="Trebuchet MS" pitchFamily="34" charset="-122"/>
                 <a:cs typeface="Trebuchet MS" pitchFamily="34" charset="-120"/>
               </a:rPr>
-              <a:t>Volume and cost are not the same picture</a:t>
+              <a:t>Five categories are half of every complaint in the data</a:t>
             </a:r>
             <a:endParaRPr lang="en-US" sz="3000" dirty="0"/>
           </a:p>
@@ -12437,7 +13670,7 @@
                 <a:ea typeface="Calibri" pitchFamily="34" charset="-122"/>
                 <a:cs typeface="Calibri" pitchFamily="34" charset="-120"/>
               </a:rPr>
-              <a:t>Where a complaint lands has money attached to it — cards pay out 5.7× more often than vehicle loans.</a:t>
+              <a:t>The model does not need to understand 64 things. It needs five, and it needs to say “I don't know” about the rest.</a:t>
             </a:r>
             <a:endParaRPr lang="en-US" sz="1050" dirty="0"/>
           </a:p>
@@ -12533,1318 +13766,36 @@
           </a:p>
         </p:txBody>
       </p:sp>
-      <p:graphicFrame>
-        <p:nvGraphicFramePr>
-          <p:cNvPr id="6" name="Table 0"/>
-          <p:cNvGraphicFramePr>
-            <a:graphicFrameLocks noGrp="1"/>
-          </p:cNvGraphicFramePr>
-          <p:nvPr>
-            <p:extLst>
-              <p:ext uri="{D42A27DB-BD31-4B8C-83A1-F6EECF244321}">
-                <p14:modId xmlns:p14="http://schemas.microsoft.com/office/powerpoint/2010/main" val="1579011935"/>
-              </p:ext>
-            </p:extLst>
-          </p:nvPr>
-        </p:nvGraphicFramePr>
-        <p:xfrm>
-          <a:off x="566928" y="2395728"/>
-          <a:ext cx="11055096" cy="914400"/>
-        </p:xfrm>
-        <a:graphic>
-          <a:graphicData uri="http://schemas.openxmlformats.org/drawingml/2006/table">
-            <a:tbl>
-              <a:tblPr/>
-              <a:tblGrid>
-                <a:gridCol w="3749040"/>
-                <a:gridCol w="1371600"/>
-                <a:gridCol w="1188720"/>
-                <a:gridCol w="2377440"/>
-              </a:tblGrid>
-              <a:tr h="329184">
-                <a:tc>
-                  <a:txBody>
-                    <a:bodyPr/>
-                    <a:lstStyle/>
-                    <a:p>
-                      <a:pPr indent="0" marL="0">
-                        <a:buNone/>
-                      </a:pPr>
-                      <a:r>
-                        <a:rPr lang="en-US" sz="1100" b="1" dirty="0">
-                          <a:solidFill>
-                            <a:srgbClr val="FFFFFF"/>
-                          </a:solidFill>
-                        </a:rPr>
-                        <a:t>Product</a:t>
-                      </a:r>
-                      <a:endParaRPr lang="en-US" sz="1100" dirty="0"/>
-                    </a:p>
-                  </a:txBody>
-                  <a:tcPr marL="76200" marR="76200" marT="38100" marB="38100" anchor="ctr">
-                    <a:lnL w="12700" cap="flat" cmpd="sng" algn="ctr">
-                      <a:solidFill>
-                        <a:srgbClr val="D9E3EA"/>
-                      </a:solidFill>
-                      <a:prstDash val="solid"/>
-                      <a:round/>
-                      <a:headEnd type="none" w="med" len="med"/>
-                      <a:tailEnd type="none" w="med" len="med"/>
-                    </a:lnL>
-                    <a:lnR w="12700" cap="flat" cmpd="sng" algn="ctr">
-                      <a:solidFill>
-                        <a:srgbClr val="D9E3EA"/>
-                      </a:solidFill>
-                      <a:prstDash val="solid"/>
-                      <a:round/>
-                      <a:headEnd type="none" w="med" len="med"/>
-                      <a:tailEnd type="none" w="med" len="med"/>
-                    </a:lnR>
-                    <a:lnT w="12700" cap="flat" cmpd="sng" algn="ctr">
-                      <a:solidFill>
-                        <a:srgbClr val="D9E3EA"/>
-                      </a:solidFill>
-                      <a:prstDash val="solid"/>
-                      <a:round/>
-                      <a:headEnd type="none" w="med" len="med"/>
-                      <a:tailEnd type="none" w="med" len="med"/>
-                    </a:lnT>
-                    <a:lnB w="12700" cap="flat" cmpd="sng" algn="ctr">
-                      <a:solidFill>
-                        <a:srgbClr val="D9E3EA"/>
-                      </a:solidFill>
-                      <a:prstDash val="solid"/>
-                      <a:round/>
-                      <a:headEnd type="none" w="med" len="med"/>
-                      <a:tailEnd type="none" w="med" len="med"/>
-                    </a:lnB>
-                    <a:solidFill>
-                      <a:srgbClr val="445A69"/>
-                    </a:solidFill>
-                  </a:tcPr>
-                </a:tc>
-                <a:tc>
-                  <a:txBody>
-                    <a:bodyPr/>
-                    <a:lstStyle/>
-                    <a:p>
-                      <a:pPr indent="0" marL="0">
-                        <a:buNone/>
-                      </a:pPr>
-                      <a:r>
-                        <a:rPr lang="en-US" sz="1100" b="1" dirty="0">
-                          <a:solidFill>
-                            <a:srgbClr val="FFFFFF"/>
-                          </a:solidFill>
-                        </a:rPr>
-                        <a:t>Complaints</a:t>
-                      </a:r>
-                      <a:endParaRPr lang="en-US" sz="1100" dirty="0"/>
-                    </a:p>
-                  </a:txBody>
-                  <a:tcPr marL="76200" marR="76200" marT="38100" marB="38100" anchor="ctr">
-                    <a:lnL w="12700" cap="flat" cmpd="sng" algn="ctr">
-                      <a:solidFill>
-                        <a:srgbClr val="D9E3EA"/>
-                      </a:solidFill>
-                      <a:prstDash val="solid"/>
-                      <a:round/>
-                      <a:headEnd type="none" w="med" len="med"/>
-                      <a:tailEnd type="none" w="med" len="med"/>
-                    </a:lnL>
-                    <a:lnR w="12700" cap="flat" cmpd="sng" algn="ctr">
-                      <a:solidFill>
-                        <a:srgbClr val="D9E3EA"/>
-                      </a:solidFill>
-                      <a:prstDash val="solid"/>
-                      <a:round/>
-                      <a:headEnd type="none" w="med" len="med"/>
-                      <a:tailEnd type="none" w="med" len="med"/>
-                    </a:lnR>
-                    <a:lnT w="12700" cap="flat" cmpd="sng" algn="ctr">
-                      <a:solidFill>
-                        <a:srgbClr val="D9E3EA"/>
-                      </a:solidFill>
-                      <a:prstDash val="solid"/>
-                      <a:round/>
-                      <a:headEnd type="none" w="med" len="med"/>
-                      <a:tailEnd type="none" w="med" len="med"/>
-                    </a:lnT>
-                    <a:lnB w="12700" cap="flat" cmpd="sng" algn="ctr">
-                      <a:solidFill>
-                        <a:srgbClr val="D9E3EA"/>
-                      </a:solidFill>
-                      <a:prstDash val="solid"/>
-                      <a:round/>
-                      <a:headEnd type="none" w="med" len="med"/>
-                      <a:tailEnd type="none" w="med" len="med"/>
-                    </a:lnB>
-                    <a:solidFill>
-                      <a:srgbClr val="445A69"/>
-                    </a:solidFill>
-                  </a:tcPr>
-                </a:tc>
-                <a:tc>
-                  <a:txBody>
-                    <a:bodyPr/>
-                    <a:lstStyle/>
-                    <a:p>
-                      <a:pPr indent="0" marL="0">
-                        <a:buNone/>
-                      </a:pPr>
-                      <a:r>
-                        <a:rPr lang="en-US" sz="1100" b="1" dirty="0">
-                          <a:solidFill>
-                            <a:srgbClr val="FFFFFF"/>
-                          </a:solidFill>
-                        </a:rPr>
-                        <a:t>Share</a:t>
-                      </a:r>
-                      <a:endParaRPr lang="en-US" sz="1100" dirty="0"/>
-                    </a:p>
-                  </a:txBody>
-                  <a:tcPr marL="76200" marR="76200" marT="38100" marB="38100" anchor="ctr">
-                    <a:lnL w="12700" cap="flat" cmpd="sng" algn="ctr">
-                      <a:solidFill>
-                        <a:srgbClr val="D9E3EA"/>
-                      </a:solidFill>
-                      <a:prstDash val="solid"/>
-                      <a:round/>
-                      <a:headEnd type="none" w="med" len="med"/>
-                      <a:tailEnd type="none" w="med" len="med"/>
-                    </a:lnL>
-                    <a:lnR w="12700" cap="flat" cmpd="sng" algn="ctr">
-                      <a:solidFill>
-                        <a:srgbClr val="D9E3EA"/>
-                      </a:solidFill>
-                      <a:prstDash val="solid"/>
-                      <a:round/>
-                      <a:headEnd type="none" w="med" len="med"/>
-                      <a:tailEnd type="none" w="med" len="med"/>
-                    </a:lnR>
-                    <a:lnT w="12700" cap="flat" cmpd="sng" algn="ctr">
-                      <a:solidFill>
-                        <a:srgbClr val="D9E3EA"/>
-                      </a:solidFill>
-                      <a:prstDash val="solid"/>
-                      <a:round/>
-                      <a:headEnd type="none" w="med" len="med"/>
-                      <a:tailEnd type="none" w="med" len="med"/>
-                    </a:lnT>
-                    <a:lnB w="12700" cap="flat" cmpd="sng" algn="ctr">
-                      <a:solidFill>
-                        <a:srgbClr val="D9E3EA"/>
-                      </a:solidFill>
-                      <a:prstDash val="solid"/>
-                      <a:round/>
-                      <a:headEnd type="none" w="med" len="med"/>
-                      <a:tailEnd type="none" w="med" len="med"/>
-                    </a:lnB>
-                    <a:solidFill>
-                      <a:srgbClr val="445A69"/>
-                    </a:solidFill>
-                  </a:tcPr>
-                </a:tc>
-                <a:tc>
-                  <a:txBody>
-                    <a:bodyPr/>
-                    <a:lstStyle/>
-                    <a:p>
-                      <a:pPr indent="0" marL="0">
-                        <a:buNone/>
-                      </a:pPr>
-                      <a:r>
-                        <a:rPr lang="en-US" sz="1100" b="1" dirty="0">
-                          <a:solidFill>
-                            <a:srgbClr val="FFFFFF"/>
-                          </a:solidFill>
-                        </a:rPr>
-                        <a:t>Closed with money paid</a:t>
-                      </a:r>
-                      <a:endParaRPr lang="en-US" sz="1100" dirty="0"/>
-                    </a:p>
-                  </a:txBody>
-                  <a:tcPr marL="76200" marR="76200" marT="38100" marB="38100" anchor="ctr">
-                    <a:lnL w="12700" cap="flat" cmpd="sng" algn="ctr">
-                      <a:solidFill>
-                        <a:srgbClr val="D9E3EA"/>
-                      </a:solidFill>
-                      <a:prstDash val="solid"/>
-                      <a:round/>
-                      <a:headEnd type="none" w="med" len="med"/>
-                      <a:tailEnd type="none" w="med" len="med"/>
-                    </a:lnL>
-                    <a:lnR w="12700" cap="flat" cmpd="sng" algn="ctr">
-                      <a:solidFill>
-                        <a:srgbClr val="D9E3EA"/>
-                      </a:solidFill>
-                      <a:prstDash val="solid"/>
-                      <a:round/>
-                      <a:headEnd type="none" w="med" len="med"/>
-                      <a:tailEnd type="none" w="med" len="med"/>
-                    </a:lnR>
-                    <a:lnT w="12700" cap="flat" cmpd="sng" algn="ctr">
-                      <a:solidFill>
-                        <a:srgbClr val="D9E3EA"/>
-                      </a:solidFill>
-                      <a:prstDash val="solid"/>
-                      <a:round/>
-                      <a:headEnd type="none" w="med" len="med"/>
-                      <a:tailEnd type="none" w="med" len="med"/>
-                    </a:lnT>
-                    <a:lnB w="12700" cap="flat" cmpd="sng" algn="ctr">
-                      <a:solidFill>
-                        <a:srgbClr val="D9E3EA"/>
-                      </a:solidFill>
-                      <a:prstDash val="solid"/>
-                      <a:round/>
-                      <a:headEnd type="none" w="med" len="med"/>
-                      <a:tailEnd type="none" w="med" len="med"/>
-                    </a:lnB>
-                    <a:solidFill>
-                      <a:srgbClr val="445A69"/>
-                    </a:solidFill>
-                  </a:tcPr>
-                </a:tc>
-              </a:tr>
-              <a:tr h="384048">
-                <a:tc>
-                  <a:txBody>
-                    <a:bodyPr/>
-                    <a:lstStyle/>
-                    <a:p>
-                      <a:pPr indent="0" marL="0">
-                        <a:buNone/>
-                      </a:pPr>
-                      <a:r>
-                        <a:rPr lang="en-US" sz="1050" b="1" dirty="0">
-                          <a:solidFill>
-                            <a:srgbClr val="24343F"/>
-                          </a:solidFill>
-                        </a:rPr>
-                        <a:t>Checking or savings</a:t>
-                      </a:r>
-                      <a:endParaRPr lang="en-US" sz="1050" dirty="0"/>
-                    </a:p>
-                  </a:txBody>
-                  <a:tcPr marL="76200" marR="76200" marT="38100" marB="38100" anchor="ctr">
-                    <a:lnL w="12700" cap="flat" cmpd="sng" algn="ctr">
-                      <a:solidFill>
-                        <a:srgbClr val="D9E3EA"/>
-                      </a:solidFill>
-                      <a:prstDash val="solid"/>
-                      <a:round/>
-                      <a:headEnd type="none" w="med" len="med"/>
-                      <a:tailEnd type="none" w="med" len="med"/>
-                    </a:lnL>
-                    <a:lnR w="12700" cap="flat" cmpd="sng" algn="ctr">
-                      <a:solidFill>
-                        <a:srgbClr val="D9E3EA"/>
-                      </a:solidFill>
-                      <a:prstDash val="solid"/>
-                      <a:round/>
-                      <a:headEnd type="none" w="med" len="med"/>
-                      <a:tailEnd type="none" w="med" len="med"/>
-                    </a:lnR>
-                    <a:lnT w="12700" cap="flat" cmpd="sng" algn="ctr">
-                      <a:solidFill>
-                        <a:srgbClr val="D9E3EA"/>
-                      </a:solidFill>
-                      <a:prstDash val="solid"/>
-                      <a:round/>
-                      <a:headEnd type="none" w="med" len="med"/>
-                      <a:tailEnd type="none" w="med" len="med"/>
-                    </a:lnT>
-                    <a:lnB w="12700" cap="flat" cmpd="sng" algn="ctr">
-                      <a:solidFill>
-                        <a:srgbClr val="D9E3EA"/>
-                      </a:solidFill>
-                      <a:prstDash val="solid"/>
-                      <a:round/>
-                      <a:headEnd type="none" w="med" len="med"/>
-                      <a:tailEnd type="none" w="med" len="med"/>
-                    </a:lnB>
-                    <a:solidFill>
-                      <a:srgbClr val="FFFFFF"/>
-                    </a:solidFill>
-                  </a:tcPr>
-                </a:tc>
-                <a:tc>
-                  <a:txBody>
-                    <a:bodyPr/>
-                    <a:lstStyle/>
-                    <a:p>
-                      <a:pPr indent="0" marL="0">
-                        <a:buNone/>
-                      </a:pPr>
-                      <a:r>
-                        <a:rPr lang="en-US" sz="1050" dirty="0">
-                          <a:solidFill>
-                            <a:srgbClr val="1B2730"/>
-                          </a:solidFill>
-                        </a:rPr>
-                        <a:t>5,835</a:t>
-                      </a:r>
-                      <a:endParaRPr lang="en-US" sz="1050" dirty="0"/>
-                    </a:p>
-                  </a:txBody>
-                  <a:tcPr marL="76200" marR="76200" marT="38100" marB="38100" anchor="ctr">
-                    <a:lnL w="12700" cap="flat" cmpd="sng" algn="ctr">
-                      <a:solidFill>
-                        <a:srgbClr val="D9E3EA"/>
-                      </a:solidFill>
-                      <a:prstDash val="solid"/>
-                      <a:round/>
-                      <a:headEnd type="none" w="med" len="med"/>
-                      <a:tailEnd type="none" w="med" len="med"/>
-                    </a:lnL>
-                    <a:lnR w="12700" cap="flat" cmpd="sng" algn="ctr">
-                      <a:solidFill>
-                        <a:srgbClr val="D9E3EA"/>
-                      </a:solidFill>
-                      <a:prstDash val="solid"/>
-                      <a:round/>
-                      <a:headEnd type="none" w="med" len="med"/>
-                      <a:tailEnd type="none" w="med" len="med"/>
-                    </a:lnR>
-                    <a:lnT w="12700" cap="flat" cmpd="sng" algn="ctr">
-                      <a:solidFill>
-                        <a:srgbClr val="D9E3EA"/>
-                      </a:solidFill>
-                      <a:prstDash val="solid"/>
-                      <a:round/>
-                      <a:headEnd type="none" w="med" len="med"/>
-                      <a:tailEnd type="none" w="med" len="med"/>
-                    </a:lnT>
-                    <a:lnB w="12700" cap="flat" cmpd="sng" algn="ctr">
-                      <a:solidFill>
-                        <a:srgbClr val="D9E3EA"/>
-                      </a:solidFill>
-                      <a:prstDash val="solid"/>
-                      <a:round/>
-                      <a:headEnd type="none" w="med" len="med"/>
-                      <a:tailEnd type="none" w="med" len="med"/>
-                    </a:lnB>
-                    <a:solidFill>
-                      <a:srgbClr val="FFFFFF"/>
-                    </a:solidFill>
-                  </a:tcPr>
-                </a:tc>
-                <a:tc>
-                  <a:txBody>
-                    <a:bodyPr/>
-                    <a:lstStyle/>
-                    <a:p>
-                      <a:pPr indent="0" marL="0">
-                        <a:buNone/>
-                      </a:pPr>
-                      <a:r>
-                        <a:rPr lang="en-US" sz="1050" dirty="0">
-                          <a:solidFill>
-                            <a:srgbClr val="1B2730"/>
-                          </a:solidFill>
-                        </a:rPr>
-                        <a:t>34.7%</a:t>
-                      </a:r>
-                      <a:endParaRPr lang="en-US" sz="1050" dirty="0"/>
-                    </a:p>
-                  </a:txBody>
-                  <a:tcPr marL="76200" marR="76200" marT="38100" marB="38100" anchor="ctr">
-                    <a:lnL w="12700" cap="flat" cmpd="sng" algn="ctr">
-                      <a:solidFill>
-                        <a:srgbClr val="D9E3EA"/>
-                      </a:solidFill>
-                      <a:prstDash val="solid"/>
-                      <a:round/>
-                      <a:headEnd type="none" w="med" len="med"/>
-                      <a:tailEnd type="none" w="med" len="med"/>
-                    </a:lnL>
-                    <a:lnR w="12700" cap="flat" cmpd="sng" algn="ctr">
-                      <a:solidFill>
-                        <a:srgbClr val="D9E3EA"/>
-                      </a:solidFill>
-                      <a:prstDash val="solid"/>
-                      <a:round/>
-                      <a:headEnd type="none" w="med" len="med"/>
-                      <a:tailEnd type="none" w="med" len="med"/>
-                    </a:lnR>
-                    <a:lnT w="12700" cap="flat" cmpd="sng" algn="ctr">
-                      <a:solidFill>
-                        <a:srgbClr val="D9E3EA"/>
-                      </a:solidFill>
-                      <a:prstDash val="solid"/>
-                      <a:round/>
-                      <a:headEnd type="none" w="med" len="med"/>
-                      <a:tailEnd type="none" w="med" len="med"/>
-                    </a:lnT>
-                    <a:lnB w="12700" cap="flat" cmpd="sng" algn="ctr">
-                      <a:solidFill>
-                        <a:srgbClr val="D9E3EA"/>
-                      </a:solidFill>
-                      <a:prstDash val="solid"/>
-                      <a:round/>
-                      <a:headEnd type="none" w="med" len="med"/>
-                      <a:tailEnd type="none" w="med" len="med"/>
-                    </a:lnB>
-                    <a:solidFill>
-                      <a:srgbClr val="FFFFFF"/>
-                    </a:solidFill>
-                  </a:tcPr>
-                </a:tc>
-                <a:tc>
-                  <a:txBody>
-                    <a:bodyPr/>
-                    <a:lstStyle/>
-                    <a:p>
-                      <a:pPr indent="0" marL="0">
-                        <a:buNone/>
-                      </a:pPr>
-                      <a:r>
-                        <a:rPr lang="en-US" sz="1050" dirty="0">
-                          <a:solidFill>
-                            <a:srgbClr val="1B2730"/>
-                          </a:solidFill>
-                        </a:rPr>
-                        <a:t>14.0%</a:t>
-                      </a:r>
-                      <a:endParaRPr lang="en-US" sz="1050" dirty="0"/>
-                    </a:p>
-                  </a:txBody>
-                  <a:tcPr marL="76200" marR="76200" marT="38100" marB="38100" anchor="ctr">
-                    <a:lnL w="12700" cap="flat" cmpd="sng" algn="ctr">
-                      <a:solidFill>
-                        <a:srgbClr val="D9E3EA"/>
-                      </a:solidFill>
-                      <a:prstDash val="solid"/>
-                      <a:round/>
-                      <a:headEnd type="none" w="med" len="med"/>
-                      <a:tailEnd type="none" w="med" len="med"/>
-                    </a:lnL>
-                    <a:lnR w="12700" cap="flat" cmpd="sng" algn="ctr">
-                      <a:solidFill>
-                        <a:srgbClr val="D9E3EA"/>
-                      </a:solidFill>
-                      <a:prstDash val="solid"/>
-                      <a:round/>
-                      <a:headEnd type="none" w="med" len="med"/>
-                      <a:tailEnd type="none" w="med" len="med"/>
-                    </a:lnR>
-                    <a:lnT w="12700" cap="flat" cmpd="sng" algn="ctr">
-                      <a:solidFill>
-                        <a:srgbClr val="D9E3EA"/>
-                      </a:solidFill>
-                      <a:prstDash val="solid"/>
-                      <a:round/>
-                      <a:headEnd type="none" w="med" len="med"/>
-                      <a:tailEnd type="none" w="med" len="med"/>
-                    </a:lnT>
-                    <a:lnB w="12700" cap="flat" cmpd="sng" algn="ctr">
-                      <a:solidFill>
-                        <a:srgbClr val="D9E3EA"/>
-                      </a:solidFill>
-                      <a:prstDash val="solid"/>
-                      <a:round/>
-                      <a:headEnd type="none" w="med" len="med"/>
-                      <a:tailEnd type="none" w="med" len="med"/>
-                    </a:lnB>
-                    <a:solidFill>
-                      <a:srgbClr val="FFFFFF"/>
-                    </a:solidFill>
-                  </a:tcPr>
-                </a:tc>
-              </a:tr>
-              <a:tr h="384048">
-                <a:tc>
-                  <a:txBody>
-                    <a:bodyPr/>
-                    <a:lstStyle/>
-                    <a:p>
-                      <a:pPr indent="0" marL="0">
-                        <a:buNone/>
-                      </a:pPr>
-                      <a:r>
-                        <a:rPr lang="en-US" sz="1050" b="1" dirty="0">
-                          <a:solidFill>
-                            <a:srgbClr val="24343F"/>
-                          </a:solidFill>
-                        </a:rPr>
-                        <a:t>Credit card</a:t>
-                      </a:r>
-                      <a:endParaRPr lang="en-US" sz="1050" dirty="0"/>
-                    </a:p>
-                  </a:txBody>
-                  <a:tcPr marL="76200" marR="76200" marT="38100" marB="38100" anchor="ctr">
-                    <a:lnL w="12700" cap="flat" cmpd="sng" algn="ctr">
-                      <a:solidFill>
-                        <a:srgbClr val="D9E3EA"/>
-                      </a:solidFill>
-                      <a:prstDash val="solid"/>
-                      <a:round/>
-                      <a:headEnd type="none" w="med" len="med"/>
-                      <a:tailEnd type="none" w="med" len="med"/>
-                    </a:lnL>
-                    <a:lnR w="12700" cap="flat" cmpd="sng" algn="ctr">
-                      <a:solidFill>
-                        <a:srgbClr val="D9E3EA"/>
-                      </a:solidFill>
-                      <a:prstDash val="solid"/>
-                      <a:round/>
-                      <a:headEnd type="none" w="med" len="med"/>
-                      <a:tailEnd type="none" w="med" len="med"/>
-                    </a:lnR>
-                    <a:lnT w="12700" cap="flat" cmpd="sng" algn="ctr">
-                      <a:solidFill>
-                        <a:srgbClr val="D9E3EA"/>
-                      </a:solidFill>
-                      <a:prstDash val="solid"/>
-                      <a:round/>
-                      <a:headEnd type="none" w="med" len="med"/>
-                      <a:tailEnd type="none" w="med" len="med"/>
-                    </a:lnT>
-                    <a:lnB w="12700" cap="flat" cmpd="sng" algn="ctr">
-                      <a:solidFill>
-                        <a:srgbClr val="D9E3EA"/>
-                      </a:solidFill>
-                      <a:prstDash val="solid"/>
-                      <a:round/>
-                      <a:headEnd type="none" w="med" len="med"/>
-                      <a:tailEnd type="none" w="med" len="med"/>
-                    </a:lnB>
-                    <a:solidFill>
-                      <a:srgbClr val="FFFFFF"/>
-                    </a:solidFill>
-                  </a:tcPr>
-                </a:tc>
-                <a:tc>
-                  <a:txBody>
-                    <a:bodyPr/>
-                    <a:lstStyle/>
-                    <a:p>
-                      <a:pPr indent="0" marL="0">
-                        <a:buNone/>
-                      </a:pPr>
-                      <a:r>
-                        <a:rPr lang="en-US" sz="1050" dirty="0">
-                          <a:solidFill>
-                            <a:srgbClr val="1B2730"/>
-                          </a:solidFill>
-                        </a:rPr>
-                        <a:t>5,382</a:t>
-                      </a:r>
-                      <a:endParaRPr lang="en-US" sz="1050" dirty="0"/>
-                    </a:p>
-                  </a:txBody>
-                  <a:tcPr marL="76200" marR="76200" marT="38100" marB="38100" anchor="ctr">
-                    <a:lnL w="12700" cap="flat" cmpd="sng" algn="ctr">
-                      <a:solidFill>
-                        <a:srgbClr val="D9E3EA"/>
-                      </a:solidFill>
-                      <a:prstDash val="solid"/>
-                      <a:round/>
-                      <a:headEnd type="none" w="med" len="med"/>
-                      <a:tailEnd type="none" w="med" len="med"/>
-                    </a:lnL>
-                    <a:lnR w="12700" cap="flat" cmpd="sng" algn="ctr">
-                      <a:solidFill>
-                        <a:srgbClr val="D9E3EA"/>
-                      </a:solidFill>
-                      <a:prstDash val="solid"/>
-                      <a:round/>
-                      <a:headEnd type="none" w="med" len="med"/>
-                      <a:tailEnd type="none" w="med" len="med"/>
-                    </a:lnR>
-                    <a:lnT w="12700" cap="flat" cmpd="sng" algn="ctr">
-                      <a:solidFill>
-                        <a:srgbClr val="D9E3EA"/>
-                      </a:solidFill>
-                      <a:prstDash val="solid"/>
-                      <a:round/>
-                      <a:headEnd type="none" w="med" len="med"/>
-                      <a:tailEnd type="none" w="med" len="med"/>
-                    </a:lnT>
-                    <a:lnB w="12700" cap="flat" cmpd="sng" algn="ctr">
-                      <a:solidFill>
-                        <a:srgbClr val="D9E3EA"/>
-                      </a:solidFill>
-                      <a:prstDash val="solid"/>
-                      <a:round/>
-                      <a:headEnd type="none" w="med" len="med"/>
-                      <a:tailEnd type="none" w="med" len="med"/>
-                    </a:lnB>
-                    <a:solidFill>
-                      <a:srgbClr val="FFFFFF"/>
-                    </a:solidFill>
-                  </a:tcPr>
-                </a:tc>
-                <a:tc>
-                  <a:txBody>
-                    <a:bodyPr/>
-                    <a:lstStyle/>
-                    <a:p>
-                      <a:pPr indent="0" marL="0">
-                        <a:buNone/>
-                      </a:pPr>
-                      <a:r>
-                        <a:rPr lang="en-US" sz="1050" dirty="0">
-                          <a:solidFill>
-                            <a:srgbClr val="1B2730"/>
-                          </a:solidFill>
-                        </a:rPr>
-                        <a:t>32.0%</a:t>
-                      </a:r>
-                      <a:endParaRPr lang="en-US" sz="1050" dirty="0"/>
-                    </a:p>
-                  </a:txBody>
-                  <a:tcPr marL="76200" marR="76200" marT="38100" marB="38100" anchor="ctr">
-                    <a:lnL w="12700" cap="flat" cmpd="sng" algn="ctr">
-                      <a:solidFill>
-                        <a:srgbClr val="D9E3EA"/>
-                      </a:solidFill>
-                      <a:prstDash val="solid"/>
-                      <a:round/>
-                      <a:headEnd type="none" w="med" len="med"/>
-                      <a:tailEnd type="none" w="med" len="med"/>
-                    </a:lnL>
-                    <a:lnR w="12700" cap="flat" cmpd="sng" algn="ctr">
-                      <a:solidFill>
-                        <a:srgbClr val="D9E3EA"/>
-                      </a:solidFill>
-                      <a:prstDash val="solid"/>
-                      <a:round/>
-                      <a:headEnd type="none" w="med" len="med"/>
-                      <a:tailEnd type="none" w="med" len="med"/>
-                    </a:lnR>
-                    <a:lnT w="12700" cap="flat" cmpd="sng" algn="ctr">
-                      <a:solidFill>
-                        <a:srgbClr val="D9E3EA"/>
-                      </a:solidFill>
-                      <a:prstDash val="solid"/>
-                      <a:round/>
-                      <a:headEnd type="none" w="med" len="med"/>
-                      <a:tailEnd type="none" w="med" len="med"/>
-                    </a:lnT>
-                    <a:lnB w="12700" cap="flat" cmpd="sng" algn="ctr">
-                      <a:solidFill>
-                        <a:srgbClr val="D9E3EA"/>
-                      </a:solidFill>
-                      <a:prstDash val="solid"/>
-                      <a:round/>
-                      <a:headEnd type="none" w="med" len="med"/>
-                      <a:tailEnd type="none" w="med" len="med"/>
-                    </a:lnB>
-                    <a:solidFill>
-                      <a:srgbClr val="FFFFFF"/>
-                    </a:solidFill>
-                  </a:tcPr>
-                </a:tc>
-                <a:tc>
-                  <a:txBody>
-                    <a:bodyPr/>
-                    <a:lstStyle/>
-                    <a:p>
-                      <a:pPr indent="0" marL="0">
-                        <a:buNone/>
-                      </a:pPr>
-                      <a:r>
-                        <a:rPr lang="en-US" sz="1050" dirty="0">
-                          <a:solidFill>
-                            <a:srgbClr val="1B2730"/>
-                          </a:solidFill>
-                        </a:rPr>
-                        <a:t>17.2%</a:t>
-                      </a:r>
-                      <a:endParaRPr lang="en-US" sz="1050" dirty="0"/>
-                    </a:p>
-                  </a:txBody>
-                  <a:tcPr marL="76200" marR="76200" marT="38100" marB="38100" anchor="ctr">
-                    <a:lnL w="12700" cap="flat" cmpd="sng" algn="ctr">
-                      <a:solidFill>
-                        <a:srgbClr val="D9E3EA"/>
-                      </a:solidFill>
-                      <a:prstDash val="solid"/>
-                      <a:round/>
-                      <a:headEnd type="none" w="med" len="med"/>
-                      <a:tailEnd type="none" w="med" len="med"/>
-                    </a:lnL>
-                    <a:lnR w="12700" cap="flat" cmpd="sng" algn="ctr">
-                      <a:solidFill>
-                        <a:srgbClr val="D9E3EA"/>
-                      </a:solidFill>
-                      <a:prstDash val="solid"/>
-                      <a:round/>
-                      <a:headEnd type="none" w="med" len="med"/>
-                      <a:tailEnd type="none" w="med" len="med"/>
-                    </a:lnR>
-                    <a:lnT w="12700" cap="flat" cmpd="sng" algn="ctr">
-                      <a:solidFill>
-                        <a:srgbClr val="D9E3EA"/>
-                      </a:solidFill>
-                      <a:prstDash val="solid"/>
-                      <a:round/>
-                      <a:headEnd type="none" w="med" len="med"/>
-                      <a:tailEnd type="none" w="med" len="med"/>
-                    </a:lnT>
-                    <a:lnB w="12700" cap="flat" cmpd="sng" algn="ctr">
-                      <a:solidFill>
-                        <a:srgbClr val="D9E3EA"/>
-                      </a:solidFill>
-                      <a:prstDash val="solid"/>
-                      <a:round/>
-                      <a:headEnd type="none" w="med" len="med"/>
-                      <a:tailEnd type="none" w="med" len="med"/>
-                    </a:lnB>
-                    <a:solidFill>
-                      <a:srgbClr val="FFFFFF"/>
-                    </a:solidFill>
-                  </a:tcPr>
-                </a:tc>
-              </a:tr>
-              <a:tr h="384048">
-                <a:tc>
-                  <a:txBody>
-                    <a:bodyPr/>
-                    <a:lstStyle/>
-                    <a:p>
-                      <a:pPr indent="0" marL="0">
-                        <a:buNone/>
-                      </a:pPr>
-                      <a:r>
-                        <a:rPr lang="en-US" sz="1050" b="1" dirty="0">
-                          <a:solidFill>
-                            <a:srgbClr val="24343F"/>
-                          </a:solidFill>
-                        </a:rPr>
-                        <a:t>Money transfer</a:t>
-                      </a:r>
-                      <a:endParaRPr lang="en-US" sz="1050" dirty="0"/>
-                    </a:p>
-                  </a:txBody>
-                  <a:tcPr marL="76200" marR="76200" marT="38100" marB="38100" anchor="ctr">
-                    <a:lnL w="12700" cap="flat" cmpd="sng" algn="ctr">
-                      <a:solidFill>
-                        <a:srgbClr val="D9E3EA"/>
-                      </a:solidFill>
-                      <a:prstDash val="solid"/>
-                      <a:round/>
-                      <a:headEnd type="none" w="med" len="med"/>
-                      <a:tailEnd type="none" w="med" len="med"/>
-                    </a:lnL>
-                    <a:lnR w="12700" cap="flat" cmpd="sng" algn="ctr">
-                      <a:solidFill>
-                        <a:srgbClr val="D9E3EA"/>
-                      </a:solidFill>
-                      <a:prstDash val="solid"/>
-                      <a:round/>
-                      <a:headEnd type="none" w="med" len="med"/>
-                      <a:tailEnd type="none" w="med" len="med"/>
-                    </a:lnR>
-                    <a:lnT w="12700" cap="flat" cmpd="sng" algn="ctr">
-                      <a:solidFill>
-                        <a:srgbClr val="D9E3EA"/>
-                      </a:solidFill>
-                      <a:prstDash val="solid"/>
-                      <a:round/>
-                      <a:headEnd type="none" w="med" len="med"/>
-                      <a:tailEnd type="none" w="med" len="med"/>
-                    </a:lnT>
-                    <a:lnB w="12700" cap="flat" cmpd="sng" algn="ctr">
-                      <a:solidFill>
-                        <a:srgbClr val="D9E3EA"/>
-                      </a:solidFill>
-                      <a:prstDash val="solid"/>
-                      <a:round/>
-                      <a:headEnd type="none" w="med" len="med"/>
-                      <a:tailEnd type="none" w="med" len="med"/>
-                    </a:lnB>
-                    <a:solidFill>
-                      <a:srgbClr val="FFFFFF"/>
-                    </a:solidFill>
-                  </a:tcPr>
-                </a:tc>
-                <a:tc>
-                  <a:txBody>
-                    <a:bodyPr/>
-                    <a:lstStyle/>
-                    <a:p>
-                      <a:pPr indent="0" marL="0">
-                        <a:buNone/>
-                      </a:pPr>
-                      <a:r>
-                        <a:rPr lang="en-US" sz="1050" dirty="0">
-                          <a:solidFill>
-                            <a:srgbClr val="1B2730"/>
-                          </a:solidFill>
-                        </a:rPr>
-                        <a:t>2,551</a:t>
-                      </a:r>
-                      <a:endParaRPr lang="en-US" sz="1050" dirty="0"/>
-                    </a:p>
-                  </a:txBody>
-                  <a:tcPr marL="76200" marR="76200" marT="38100" marB="38100" anchor="ctr">
-                    <a:lnL w="12700" cap="flat" cmpd="sng" algn="ctr">
-                      <a:solidFill>
-                        <a:srgbClr val="D9E3EA"/>
-                      </a:solidFill>
-                      <a:prstDash val="solid"/>
-                      <a:round/>
-                      <a:headEnd type="none" w="med" len="med"/>
-                      <a:tailEnd type="none" w="med" len="med"/>
-                    </a:lnL>
-                    <a:lnR w="12700" cap="flat" cmpd="sng" algn="ctr">
-                      <a:solidFill>
-                        <a:srgbClr val="D9E3EA"/>
-                      </a:solidFill>
-                      <a:prstDash val="solid"/>
-                      <a:round/>
-                      <a:headEnd type="none" w="med" len="med"/>
-                      <a:tailEnd type="none" w="med" len="med"/>
-                    </a:lnR>
-                    <a:lnT w="12700" cap="flat" cmpd="sng" algn="ctr">
-                      <a:solidFill>
-                        <a:srgbClr val="D9E3EA"/>
-                      </a:solidFill>
-                      <a:prstDash val="solid"/>
-                      <a:round/>
-                      <a:headEnd type="none" w="med" len="med"/>
-                      <a:tailEnd type="none" w="med" len="med"/>
-                    </a:lnT>
-                    <a:lnB w="12700" cap="flat" cmpd="sng" algn="ctr">
-                      <a:solidFill>
-                        <a:srgbClr val="D9E3EA"/>
-                      </a:solidFill>
-                      <a:prstDash val="solid"/>
-                      <a:round/>
-                      <a:headEnd type="none" w="med" len="med"/>
-                      <a:tailEnd type="none" w="med" len="med"/>
-                    </a:lnB>
-                    <a:solidFill>
-                      <a:srgbClr val="FFFFFF"/>
-                    </a:solidFill>
-                  </a:tcPr>
-                </a:tc>
-                <a:tc>
-                  <a:txBody>
-                    <a:bodyPr/>
-                    <a:lstStyle/>
-                    <a:p>
-                      <a:pPr indent="0" marL="0">
-                        <a:buNone/>
-                      </a:pPr>
-                      <a:r>
-                        <a:rPr lang="en-US" sz="1050" dirty="0">
-                          <a:solidFill>
-                            <a:srgbClr val="1B2730"/>
-                          </a:solidFill>
-                        </a:rPr>
-                        <a:t>15.1%</a:t>
-                      </a:r>
-                      <a:endParaRPr lang="en-US" sz="1050" dirty="0"/>
-                    </a:p>
-                  </a:txBody>
-                  <a:tcPr marL="76200" marR="76200" marT="38100" marB="38100" anchor="ctr">
-                    <a:lnL w="12700" cap="flat" cmpd="sng" algn="ctr">
-                      <a:solidFill>
-                        <a:srgbClr val="D9E3EA"/>
-                      </a:solidFill>
-                      <a:prstDash val="solid"/>
-                      <a:round/>
-                      <a:headEnd type="none" w="med" len="med"/>
-                      <a:tailEnd type="none" w="med" len="med"/>
-                    </a:lnL>
-                    <a:lnR w="12700" cap="flat" cmpd="sng" algn="ctr">
-                      <a:solidFill>
-                        <a:srgbClr val="D9E3EA"/>
-                      </a:solidFill>
-                      <a:prstDash val="solid"/>
-                      <a:round/>
-                      <a:headEnd type="none" w="med" len="med"/>
-                      <a:tailEnd type="none" w="med" len="med"/>
-                    </a:lnR>
-                    <a:lnT w="12700" cap="flat" cmpd="sng" algn="ctr">
-                      <a:solidFill>
-                        <a:srgbClr val="D9E3EA"/>
-                      </a:solidFill>
-                      <a:prstDash val="solid"/>
-                      <a:round/>
-                      <a:headEnd type="none" w="med" len="med"/>
-                      <a:tailEnd type="none" w="med" len="med"/>
-                    </a:lnT>
-                    <a:lnB w="12700" cap="flat" cmpd="sng" algn="ctr">
-                      <a:solidFill>
-                        <a:srgbClr val="D9E3EA"/>
-                      </a:solidFill>
-                      <a:prstDash val="solid"/>
-                      <a:round/>
-                      <a:headEnd type="none" w="med" len="med"/>
-                      <a:tailEnd type="none" w="med" len="med"/>
-                    </a:lnB>
-                    <a:solidFill>
-                      <a:srgbClr val="FFFFFF"/>
-                    </a:solidFill>
-                  </a:tcPr>
-                </a:tc>
-                <a:tc>
-                  <a:txBody>
-                    <a:bodyPr/>
-                    <a:lstStyle/>
-                    <a:p>
-                      <a:pPr indent="0" marL="0">
-                        <a:buNone/>
-                      </a:pPr>
-                      <a:r>
-                        <a:rPr lang="en-US" sz="1050" dirty="0">
-                          <a:solidFill>
-                            <a:srgbClr val="1B2730"/>
-                          </a:solidFill>
-                        </a:rPr>
-                        <a:t>10.6%</a:t>
-                      </a:r>
-                      <a:endParaRPr lang="en-US" sz="1050" dirty="0"/>
-                    </a:p>
-                  </a:txBody>
-                  <a:tcPr marL="76200" marR="76200" marT="38100" marB="38100" anchor="ctr">
-                    <a:lnL w="12700" cap="flat" cmpd="sng" algn="ctr">
-                      <a:solidFill>
-                        <a:srgbClr val="D9E3EA"/>
-                      </a:solidFill>
-                      <a:prstDash val="solid"/>
-                      <a:round/>
-                      <a:headEnd type="none" w="med" len="med"/>
-                      <a:tailEnd type="none" w="med" len="med"/>
-                    </a:lnL>
-                    <a:lnR w="12700" cap="flat" cmpd="sng" algn="ctr">
-                      <a:solidFill>
-                        <a:srgbClr val="D9E3EA"/>
-                      </a:solidFill>
-                      <a:prstDash val="solid"/>
-                      <a:round/>
-                      <a:headEnd type="none" w="med" len="med"/>
-                      <a:tailEnd type="none" w="med" len="med"/>
-                    </a:lnR>
-                    <a:lnT w="12700" cap="flat" cmpd="sng" algn="ctr">
-                      <a:solidFill>
-                        <a:srgbClr val="D9E3EA"/>
-                      </a:solidFill>
-                      <a:prstDash val="solid"/>
-                      <a:round/>
-                      <a:headEnd type="none" w="med" len="med"/>
-                      <a:tailEnd type="none" w="med" len="med"/>
-                    </a:lnT>
-                    <a:lnB w="12700" cap="flat" cmpd="sng" algn="ctr">
-                      <a:solidFill>
-                        <a:srgbClr val="D9E3EA"/>
-                      </a:solidFill>
-                      <a:prstDash val="solid"/>
-                      <a:round/>
-                      <a:headEnd type="none" w="med" len="med"/>
-                      <a:tailEnd type="none" w="med" len="med"/>
-                    </a:lnB>
-                    <a:solidFill>
-                      <a:srgbClr val="FFFFFF"/>
-                    </a:solidFill>
-                  </a:tcPr>
-                </a:tc>
-              </a:tr>
-              <a:tr h="384048">
-                <a:tc>
-                  <a:txBody>
-                    <a:bodyPr/>
-                    <a:lstStyle/>
-                    <a:p>
-                      <a:pPr indent="0" marL="0">
-                        <a:buNone/>
-                      </a:pPr>
-                      <a:r>
-                        <a:rPr lang="en-US" sz="1050" b="1" dirty="0">
-                          <a:solidFill>
-                            <a:srgbClr val="24343F"/>
-                          </a:solidFill>
-                        </a:rPr>
-                        <a:t>Vehicle loan</a:t>
-                      </a:r>
-                      <a:endParaRPr lang="en-US" sz="1050" dirty="0"/>
-                    </a:p>
-                  </a:txBody>
-                  <a:tcPr marL="76200" marR="76200" marT="38100" marB="38100" anchor="ctr">
-                    <a:lnL w="12700" cap="flat" cmpd="sng" algn="ctr">
-                      <a:solidFill>
-                        <a:srgbClr val="D9E3EA"/>
-                      </a:solidFill>
-                      <a:prstDash val="solid"/>
-                      <a:round/>
-                      <a:headEnd type="none" w="med" len="med"/>
-                      <a:tailEnd type="none" w="med" len="med"/>
-                    </a:lnL>
-                    <a:lnR w="12700" cap="flat" cmpd="sng" algn="ctr">
-                      <a:solidFill>
-                        <a:srgbClr val="D9E3EA"/>
-                      </a:solidFill>
-                      <a:prstDash val="solid"/>
-                      <a:round/>
-                      <a:headEnd type="none" w="med" len="med"/>
-                      <a:tailEnd type="none" w="med" len="med"/>
-                    </a:lnR>
-                    <a:lnT w="12700" cap="flat" cmpd="sng" algn="ctr">
-                      <a:solidFill>
-                        <a:srgbClr val="D9E3EA"/>
-                      </a:solidFill>
-                      <a:prstDash val="solid"/>
-                      <a:round/>
-                      <a:headEnd type="none" w="med" len="med"/>
-                      <a:tailEnd type="none" w="med" len="med"/>
-                    </a:lnT>
-                    <a:lnB w="12700" cap="flat" cmpd="sng" algn="ctr">
-                      <a:solidFill>
-                        <a:srgbClr val="D9E3EA"/>
-                      </a:solidFill>
-                      <a:prstDash val="solid"/>
-                      <a:round/>
-                      <a:headEnd type="none" w="med" len="med"/>
-                      <a:tailEnd type="none" w="med" len="med"/>
-                    </a:lnB>
-                    <a:solidFill>
-                      <a:srgbClr val="FFFFFF"/>
-                    </a:solidFill>
-                  </a:tcPr>
-                </a:tc>
-                <a:tc>
-                  <a:txBody>
-                    <a:bodyPr/>
-                    <a:lstStyle/>
-                    <a:p>
-                      <a:pPr indent="0" marL="0">
-                        <a:buNone/>
-                      </a:pPr>
-                      <a:r>
-                        <a:rPr lang="en-US" sz="1050" dirty="0">
-                          <a:solidFill>
-                            <a:srgbClr val="1B2730"/>
-                          </a:solidFill>
-                        </a:rPr>
-                        <a:t>1,523</a:t>
-                      </a:r>
-                      <a:endParaRPr lang="en-US" sz="1050" dirty="0"/>
-                    </a:p>
-                  </a:txBody>
-                  <a:tcPr marL="76200" marR="76200" marT="38100" marB="38100" anchor="ctr">
-                    <a:lnL w="12700" cap="flat" cmpd="sng" algn="ctr">
-                      <a:solidFill>
-                        <a:srgbClr val="D9E3EA"/>
-                      </a:solidFill>
-                      <a:prstDash val="solid"/>
-                      <a:round/>
-                      <a:headEnd type="none" w="med" len="med"/>
-                      <a:tailEnd type="none" w="med" len="med"/>
-                    </a:lnL>
-                    <a:lnR w="12700" cap="flat" cmpd="sng" algn="ctr">
-                      <a:solidFill>
-                        <a:srgbClr val="D9E3EA"/>
-                      </a:solidFill>
-                      <a:prstDash val="solid"/>
-                      <a:round/>
-                      <a:headEnd type="none" w="med" len="med"/>
-                      <a:tailEnd type="none" w="med" len="med"/>
-                    </a:lnR>
-                    <a:lnT w="12700" cap="flat" cmpd="sng" algn="ctr">
-                      <a:solidFill>
-                        <a:srgbClr val="D9E3EA"/>
-                      </a:solidFill>
-                      <a:prstDash val="solid"/>
-                      <a:round/>
-                      <a:headEnd type="none" w="med" len="med"/>
-                      <a:tailEnd type="none" w="med" len="med"/>
-                    </a:lnT>
-                    <a:lnB w="12700" cap="flat" cmpd="sng" algn="ctr">
-                      <a:solidFill>
-                        <a:srgbClr val="D9E3EA"/>
-                      </a:solidFill>
-                      <a:prstDash val="solid"/>
-                      <a:round/>
-                      <a:headEnd type="none" w="med" len="med"/>
-                      <a:tailEnd type="none" w="med" len="med"/>
-                    </a:lnB>
-                    <a:solidFill>
-                      <a:srgbClr val="FFFFFF"/>
-                    </a:solidFill>
-                  </a:tcPr>
-                </a:tc>
-                <a:tc>
-                  <a:txBody>
-                    <a:bodyPr/>
-                    <a:lstStyle/>
-                    <a:p>
-                      <a:pPr indent="0" marL="0">
-                        <a:buNone/>
-                      </a:pPr>
-                      <a:r>
-                        <a:rPr lang="en-US" sz="1050" dirty="0">
-                          <a:solidFill>
-                            <a:srgbClr val="1B2730"/>
-                          </a:solidFill>
-                        </a:rPr>
-                        <a:t>9.0%</a:t>
-                      </a:r>
-                      <a:endParaRPr lang="en-US" sz="1050" dirty="0"/>
-                    </a:p>
-                  </a:txBody>
-                  <a:tcPr marL="76200" marR="76200" marT="38100" marB="38100" anchor="ctr">
-                    <a:lnL w="12700" cap="flat" cmpd="sng" algn="ctr">
-                      <a:solidFill>
-                        <a:srgbClr val="D9E3EA"/>
-                      </a:solidFill>
-                      <a:prstDash val="solid"/>
-                      <a:round/>
-                      <a:headEnd type="none" w="med" len="med"/>
-                      <a:tailEnd type="none" w="med" len="med"/>
-                    </a:lnL>
-                    <a:lnR w="12700" cap="flat" cmpd="sng" algn="ctr">
-                      <a:solidFill>
-                        <a:srgbClr val="D9E3EA"/>
-                      </a:solidFill>
-                      <a:prstDash val="solid"/>
-                      <a:round/>
-                      <a:headEnd type="none" w="med" len="med"/>
-                      <a:tailEnd type="none" w="med" len="med"/>
-                    </a:lnR>
-                    <a:lnT w="12700" cap="flat" cmpd="sng" algn="ctr">
-                      <a:solidFill>
-                        <a:srgbClr val="D9E3EA"/>
-                      </a:solidFill>
-                      <a:prstDash val="solid"/>
-                      <a:round/>
-                      <a:headEnd type="none" w="med" len="med"/>
-                      <a:tailEnd type="none" w="med" len="med"/>
-                    </a:lnT>
-                    <a:lnB w="12700" cap="flat" cmpd="sng" algn="ctr">
-                      <a:solidFill>
-                        <a:srgbClr val="D9E3EA"/>
-                      </a:solidFill>
-                      <a:prstDash val="solid"/>
-                      <a:round/>
-                      <a:headEnd type="none" w="med" len="med"/>
-                      <a:tailEnd type="none" w="med" len="med"/>
-                    </a:lnB>
-                    <a:solidFill>
-                      <a:srgbClr val="FFFFFF"/>
-                    </a:solidFill>
-                  </a:tcPr>
-                </a:tc>
-                <a:tc>
-                  <a:txBody>
-                    <a:bodyPr/>
-                    <a:lstStyle/>
-                    <a:p>
-                      <a:pPr indent="0" marL="0">
-                        <a:buNone/>
-                      </a:pPr>
-                      <a:r>
-                        <a:rPr lang="en-US" sz="1050" dirty="0">
-                          <a:solidFill>
-                            <a:srgbClr val="1B2730"/>
-                          </a:solidFill>
-                        </a:rPr>
-                        <a:t>3.0%</a:t>
-                      </a:r>
-                      <a:endParaRPr lang="en-US" sz="1050" dirty="0"/>
-                    </a:p>
-                  </a:txBody>
-                  <a:tcPr marL="76200" marR="76200" marT="38100" marB="38100" anchor="ctr">
-                    <a:lnL w="12700" cap="flat" cmpd="sng" algn="ctr">
-                      <a:solidFill>
-                        <a:srgbClr val="D9E3EA"/>
-                      </a:solidFill>
-                      <a:prstDash val="solid"/>
-                      <a:round/>
-                      <a:headEnd type="none" w="med" len="med"/>
-                      <a:tailEnd type="none" w="med" len="med"/>
-                    </a:lnL>
-                    <a:lnR w="12700" cap="flat" cmpd="sng" algn="ctr">
-                      <a:solidFill>
-                        <a:srgbClr val="D9E3EA"/>
-                      </a:solidFill>
-                      <a:prstDash val="solid"/>
-                      <a:round/>
-                      <a:headEnd type="none" w="med" len="med"/>
-                      <a:tailEnd type="none" w="med" len="med"/>
-                    </a:lnR>
-                    <a:lnT w="12700" cap="flat" cmpd="sng" algn="ctr">
-                      <a:solidFill>
-                        <a:srgbClr val="D9E3EA"/>
-                      </a:solidFill>
-                      <a:prstDash val="solid"/>
-                      <a:round/>
-                      <a:headEnd type="none" w="med" len="med"/>
-                      <a:tailEnd type="none" w="med" len="med"/>
-                    </a:lnT>
-                    <a:lnB w="12700" cap="flat" cmpd="sng" algn="ctr">
-                      <a:solidFill>
-                        <a:srgbClr val="D9E3EA"/>
-                      </a:solidFill>
-                      <a:prstDash val="solid"/>
-                      <a:round/>
-                      <a:headEnd type="none" w="med" len="med"/>
-                      <a:tailEnd type="none" w="med" len="med"/>
-                    </a:lnB>
-                    <a:solidFill>
-                      <a:srgbClr val="FFFFFF"/>
-                    </a:solidFill>
-                  </a:tcPr>
-                </a:tc>
-              </a:tr>
-            </a:tbl>
-          </a:graphicData>
-        </a:graphic>
-      </p:graphicFrame>
-      <p:sp>
-        <p:nvSpPr>
-          <p:cNvPr id="13" name="Shape 9"/>
-          <p:cNvSpPr/>
-          <p:nvPr/>
-        </p:nvSpPr>
-        <p:spPr>
-          <a:xfrm>
-            <a:off x="566928" y="4489704"/>
-            <a:ext cx="11055096" cy="640080"/>
+      <p:sp>
+        <p:nvSpPr>
+          <p:cNvPr id="12" name="Shape 9"/>
+          <p:cNvSpPr/>
+          <p:nvPr/>
+        </p:nvSpPr>
+        <p:spPr>
+          <a:xfrm>
+            <a:off x="566928" y="2395728"/>
+            <a:ext cx="6411956" cy="329184"/>
           </a:xfrm>
           <a:prstGeom prst="rect">
             <a:avLst/>
           </a:prstGeom>
           <a:solidFill>
-            <a:srgbClr val="EFF5F9"/>
+            <a:srgbClr val="24343F"/>
           </a:solidFill>
           <a:ln/>
         </p:spPr>
       </p:sp>
       <p:sp>
         <p:nvSpPr>
-          <p:cNvPr id="14" name="Shape 10"/>
-          <p:cNvSpPr/>
-          <p:nvPr/>
-        </p:nvSpPr>
-        <p:spPr>
-          <a:xfrm>
-            <a:off x="566928" y="4489704"/>
-            <a:ext cx="82296" cy="640080"/>
-          </a:xfrm>
-          <a:prstGeom prst="rect">
-            <a:avLst/>
-          </a:prstGeom>
-          <a:solidFill>
-            <a:srgbClr val="2A78D6"/>
-          </a:solidFill>
-          <a:ln/>
-        </p:spPr>
-      </p:sp>
-      <p:sp>
-        <p:nvSpPr>
-          <p:cNvPr id="15" name="Text 11"/>
-          <p:cNvSpPr/>
-          <p:nvPr/>
-        </p:nvSpPr>
-        <p:spPr>
-          <a:xfrm>
-            <a:off x="822960" y="4489704"/>
-            <a:ext cx="10597896" cy="640080"/>
+          <p:cNvPr id="13" name="Text 10"/>
+          <p:cNvSpPr/>
+          <p:nvPr/>
+        </p:nvSpPr>
+        <p:spPr>
+          <a:xfrm>
+            <a:off x="713232" y="2395728"/>
+            <a:ext cx="6137636" cy="329184"/>
           </a:xfrm>
           <a:prstGeom prst="rect">
             <a:avLst/>
@@ -13860,17 +13811,351 @@
               <a:buNone/>
             </a:pPr>
             <a:r>
-              <a:rPr lang="en-US" sz="1250" b="1" dirty="0">
+              <a:rPr lang="en-US" sz="1050" dirty="0">
                 <a:solidFill>
-                  <a:srgbClr val="000000"/>
+                  <a:srgbClr val="FFFFFF"/>
                 </a:solidFill>
                 <a:latin typeface="Calibri" pitchFamily="34" charset="0"/>
                 <a:ea typeface="Calibri" pitchFamily="34" charset="-122"/>
                 <a:cs typeface="Calibri" pitchFamily="34" charset="-120"/>
               </a:rPr>
-              <a:t>Two thirds of volume sits in deposits and cards — and so does the money.</a:t>
-            </a:r>
-            <a:endParaRPr lang="en-US" sz="1250" dirty="0"/>
+              <a:t>Managing an account  —  19.9%</a:t>
+            </a:r>
+            <a:endParaRPr lang="en-US" sz="1050" dirty="0"/>
+          </a:p>
+        </p:txBody>
+      </p:sp>
+      <p:sp>
+        <p:nvSpPr>
+          <p:cNvPr id="14" name="Shape 11"/>
+          <p:cNvSpPr/>
+          <p:nvPr/>
+        </p:nvSpPr>
+        <p:spPr>
+          <a:xfrm>
+            <a:off x="676656" y="2793492"/>
+            <a:ext cx="6302228" cy="329184"/>
+          </a:xfrm>
+          <a:prstGeom prst="rect">
+            <a:avLst/>
+          </a:prstGeom>
+          <a:solidFill>
+            <a:srgbClr val="24343F">
+              <a:alpha val="94000"/>
+            </a:srgbClr>
+          </a:solidFill>
+          <a:ln/>
+        </p:spPr>
+      </p:sp>
+      <p:sp>
+        <p:nvSpPr>
+          <p:cNvPr id="15" name="Text 12"/>
+          <p:cNvSpPr/>
+          <p:nvPr/>
+        </p:nvSpPr>
+        <p:spPr>
+          <a:xfrm>
+            <a:off x="822960" y="2793492"/>
+            <a:ext cx="6027908" cy="329184"/>
+          </a:xfrm>
+          <a:prstGeom prst="rect">
+            <a:avLst/>
+          </a:prstGeom>
+          <a:noFill/>
+          <a:ln/>
+        </p:spPr>
+        <p:txBody>
+          <a:bodyPr wrap="square" lIns="0" tIns="0" rIns="0" bIns="0" rtlCol="0" anchor="ctr"/>
+          <a:lstStyle/>
+          <a:p>
+            <a:pPr indent="0" marL="0">
+              <a:buNone/>
+            </a:pPr>
+            <a:r>
+              <a:rPr lang="en-US" sz="1050" dirty="0">
+                <a:solidFill>
+                  <a:srgbClr val="FFFFFF"/>
+                </a:solidFill>
+                <a:latin typeface="Calibri" pitchFamily="34" charset="0"/>
+                <a:ea typeface="Calibri" pitchFamily="34" charset="-122"/>
+                <a:cs typeface="Calibri" pitchFamily="34" charset="-120"/>
+              </a:rPr>
+              <a:t>Problem with a purchase on your statement  —  11.2%</a:t>
+            </a:r>
+            <a:endParaRPr lang="en-US" sz="1050" dirty="0"/>
+          </a:p>
+        </p:txBody>
+      </p:sp>
+      <p:sp>
+        <p:nvSpPr>
+          <p:cNvPr id="16" name="Shape 13"/>
+          <p:cNvSpPr/>
+          <p:nvPr/>
+        </p:nvSpPr>
+        <p:spPr>
+          <a:xfrm>
+            <a:off x="786384" y="3191256"/>
+            <a:ext cx="6192500" cy="329184"/>
+          </a:xfrm>
+          <a:prstGeom prst="rect">
+            <a:avLst/>
+          </a:prstGeom>
+          <a:solidFill>
+            <a:srgbClr val="24343F">
+              <a:alpha val="88000"/>
+            </a:srgbClr>
+          </a:solidFill>
+          <a:ln/>
+        </p:spPr>
+      </p:sp>
+      <p:sp>
+        <p:nvSpPr>
+          <p:cNvPr id="17" name="Text 14"/>
+          <p:cNvSpPr/>
+          <p:nvPr/>
+        </p:nvSpPr>
+        <p:spPr>
+          <a:xfrm>
+            <a:off x="932688" y="3191256"/>
+            <a:ext cx="5918180" cy="329184"/>
+          </a:xfrm>
+          <a:prstGeom prst="rect">
+            <a:avLst/>
+          </a:prstGeom>
+          <a:noFill/>
+          <a:ln/>
+        </p:spPr>
+        <p:txBody>
+          <a:bodyPr wrap="square" lIns="0" tIns="0" rIns="0" bIns="0" rtlCol="0" anchor="ctr"/>
+          <a:lstStyle/>
+          <a:p>
+            <a:pPr indent="0" marL="0">
+              <a:buNone/>
+            </a:pPr>
+            <a:r>
+              <a:rPr lang="en-US" sz="1050" dirty="0">
+                <a:solidFill>
+                  <a:srgbClr val="FFFFFF"/>
+                </a:solidFill>
+                <a:latin typeface="Calibri" pitchFamily="34" charset="0"/>
+                <a:ea typeface="Calibri" pitchFamily="34" charset="-122"/>
+                <a:cs typeface="Calibri" pitchFamily="34" charset="-120"/>
+              </a:rPr>
+              <a:t>A lender or company charging your account  —  5.6%</a:t>
+            </a:r>
+            <a:endParaRPr lang="en-US" sz="1050" dirty="0"/>
+          </a:p>
+        </p:txBody>
+      </p:sp>
+      <p:sp>
+        <p:nvSpPr>
+          <p:cNvPr id="18" name="Shape 15"/>
+          <p:cNvSpPr/>
+          <p:nvPr/>
+        </p:nvSpPr>
+        <p:spPr>
+          <a:xfrm>
+            <a:off x="896112" y="3589020"/>
+            <a:ext cx="6082772" cy="329184"/>
+          </a:xfrm>
+          <a:prstGeom prst="rect">
+            <a:avLst/>
+          </a:prstGeom>
+          <a:solidFill>
+            <a:srgbClr val="24343F">
+              <a:alpha val="82000"/>
+            </a:srgbClr>
+          </a:solidFill>
+          <a:ln/>
+        </p:spPr>
+      </p:sp>
+      <p:sp>
+        <p:nvSpPr>
+          <p:cNvPr id="19" name="Text 16"/>
+          <p:cNvSpPr/>
+          <p:nvPr/>
+        </p:nvSpPr>
+        <p:spPr>
+          <a:xfrm>
+            <a:off x="1042416" y="3589020"/>
+            <a:ext cx="5808452" cy="329184"/>
+          </a:xfrm>
+          <a:prstGeom prst="rect">
+            <a:avLst/>
+          </a:prstGeom>
+          <a:noFill/>
+          <a:ln/>
+        </p:spPr>
+        <p:txBody>
+          <a:bodyPr wrap="square" lIns="0" tIns="0" rIns="0" bIns="0" rtlCol="0" anchor="ctr"/>
+          <a:lstStyle/>
+          <a:p>
+            <a:pPr indent="0" marL="0">
+              <a:buNone/>
+            </a:pPr>
+            <a:r>
+              <a:rPr lang="en-US" sz="1050" dirty="0">
+                <a:solidFill>
+                  <a:srgbClr val="FFFFFF"/>
+                </a:solidFill>
+                <a:latin typeface="Calibri" pitchFamily="34" charset="0"/>
+                <a:ea typeface="Calibri" pitchFamily="34" charset="-122"/>
+                <a:cs typeface="Calibri" pitchFamily="34" charset="-120"/>
+              </a:rPr>
+              <a:t>Fraud or scam  —  4.8%</a:t>
+            </a:r>
+            <a:endParaRPr lang="en-US" sz="1050" dirty="0"/>
+          </a:p>
+        </p:txBody>
+      </p:sp>
+      <p:sp>
+        <p:nvSpPr>
+          <p:cNvPr id="20" name="Shape 17"/>
+          <p:cNvSpPr/>
+          <p:nvPr/>
+        </p:nvSpPr>
+        <p:spPr>
+          <a:xfrm>
+            <a:off x="1005840" y="3986784"/>
+            <a:ext cx="5973044" cy="329184"/>
+          </a:xfrm>
+          <a:prstGeom prst="rect">
+            <a:avLst/>
+          </a:prstGeom>
+          <a:solidFill>
+            <a:srgbClr val="24343F">
+              <a:alpha val="76000"/>
+            </a:srgbClr>
+          </a:solidFill>
+          <a:ln/>
+        </p:spPr>
+      </p:sp>
+      <p:sp>
+        <p:nvSpPr>
+          <p:cNvPr id="21" name="Text 18"/>
+          <p:cNvSpPr/>
+          <p:nvPr/>
+        </p:nvSpPr>
+        <p:spPr>
+          <a:xfrm>
+            <a:off x="1152144" y="3986784"/>
+            <a:ext cx="5698724" cy="329184"/>
+          </a:xfrm>
+          <a:prstGeom prst="rect">
+            <a:avLst/>
+          </a:prstGeom>
+          <a:noFill/>
+          <a:ln/>
+        </p:spPr>
+        <p:txBody>
+          <a:bodyPr wrap="square" lIns="0" tIns="0" rIns="0" bIns="0" rtlCol="0" anchor="ctr"/>
+          <a:lstStyle/>
+          <a:p>
+            <a:pPr indent="0" marL="0">
+              <a:buNone/>
+            </a:pPr>
+            <a:r>
+              <a:rPr lang="en-US" sz="1050" dirty="0">
+                <a:solidFill>
+                  <a:srgbClr val="FFFFFF"/>
+                </a:solidFill>
+                <a:latin typeface="Calibri" pitchFamily="34" charset="0"/>
+                <a:ea typeface="Calibri" pitchFamily="34" charset="-122"/>
+                <a:cs typeface="Calibri" pitchFamily="34" charset="-120"/>
+              </a:rPr>
+              <a:t>Closing an account  —  4.6%</a:t>
+            </a:r>
+            <a:endParaRPr lang="en-US" sz="1050" dirty="0"/>
+          </a:p>
+        </p:txBody>
+      </p:sp>
+      <p:sp>
+        <p:nvSpPr>
+          <p:cNvPr id="22" name="Shape 19"/>
+          <p:cNvSpPr/>
+          <p:nvPr/>
+        </p:nvSpPr>
+        <p:spPr>
+          <a:xfrm>
+            <a:off x="7253204" y="2395728"/>
+            <a:ext cx="4368820" cy="1920240"/>
+          </a:xfrm>
+          <a:prstGeom prst="rect">
+            <a:avLst/>
+          </a:prstGeom>
+          <a:solidFill>
+            <a:srgbClr val="24343F"/>
+          </a:solidFill>
+          <a:ln/>
+          <a:effectLst>
+            <a:outerShdw sx="100000" sy="100000" kx="0" ky="0" algn="bl" rotWithShape="0" blurRad="88900" dist="38100" dir="8100000">
+              <a:srgbClr val="1C2440">
+                <a:alpha val="13000"/>
+              </a:srgbClr>
+            </a:outerShdw>
+          </a:effectLst>
+        </p:spPr>
+      </p:sp>
+      <p:sp>
+        <p:nvSpPr>
+          <p:cNvPr id="23" name="Text 20"/>
+          <p:cNvSpPr/>
+          <p:nvPr/>
+        </p:nvSpPr>
+        <p:spPr>
+          <a:xfrm>
+            <a:off x="7509236" y="2596896"/>
+            <a:ext cx="3856756" cy="1517904"/>
+          </a:xfrm>
+          <a:prstGeom prst="rect">
+            <a:avLst/>
+          </a:prstGeom>
+          <a:noFill/>
+          <a:ln/>
+        </p:spPr>
+        <p:txBody>
+          <a:bodyPr wrap="square" lIns="0" tIns="0" rIns="0" bIns="0" rtlCol="0" anchor="t"/>
+          <a:lstStyle/>
+          <a:p>
+            <a:pPr indent="0" marL="0">
+              <a:buNone/>
+            </a:pPr>
+            <a:r>
+              <a:rPr lang="en-US" sz="4000" b="1" dirty="0">
+                <a:solidFill>
+                  <a:srgbClr val="2A78D6"/>
+                </a:solidFill>
+                <a:latin typeface="Trebuchet MS" pitchFamily="34" charset="0"/>
+                <a:ea typeface="Trebuchet MS" pitchFamily="34" charset="-122"/>
+                <a:cs typeface="Trebuchet MS" pitchFamily="34" charset="-120"/>
+              </a:rPr>
+              <a:t>46.1%
+</a:t>
+            </a:r>
+            <a:pPr indent="0" marL="0">
+              <a:buNone/>
+            </a:pPr>
+            <a:r>
+              <a:rPr lang="en-US" sz="1300" dirty="0">
+                <a:solidFill>
+                  <a:srgbClr val="FFFFFF"/>
+                </a:solidFill>
+              </a:rPr>
+              <a:t>of all complaints sit in just 5 of 64 categories.
+</a:t>
+            </a:r>
+            <a:pPr indent="0" marL="0">
+              <a:buNone/>
+            </a:pPr>
+            <a:r>
+              <a:rPr lang="en-US" sz="1200" i="1" dirty="0">
+                <a:solidFill>
+                  <a:srgbClr val="8FBFF0"/>
+                </a:solidFill>
+              </a:rPr>
+              <a:t>That is what makes the scope small enough to be honest about.</a:t>
+            </a:r>
+            <a:endParaRPr lang="en-US" sz="4000" dirty="0"/>
           </a:p>
         </p:txBody>
       </p:sp>
@@ -14022,7 +14307,7 @@
                 <a:ea typeface="Trebuchet MS" pitchFamily="34" charset="-122"/>
                 <a:cs typeface="Trebuchet MS" pitchFamily="34" charset="-120"/>
               </a:rPr>
-              <a:t>Five categories are half of everything that arrives</a:t>
+              <a:t>You can watch it decide — and every branch ends at a person</a:t>
             </a:r>
             <a:endParaRPr lang="en-US" sz="3000" dirty="0"/>
           </a:p>
@@ -14115,7 +14400,7 @@
                 <a:ea typeface="Calibri" pitchFamily="34" charset="-122"/>
                 <a:cs typeface="Calibri" pitchFamily="34" charset="-120"/>
               </a:rPr>
-              <a:t>The model does not need to understand 64 things. It needs five, and it needs to say “I don't know” about the rest.</a:t>
+              <a:t>Running now on the cohort n8n instance. Open any step and read the exact data going in and out.</a:t>
             </a:r>
             <a:endParaRPr lang="en-US" sz="1050" dirty="0"/>
           </a:p>
@@ -14220,9 +14505,9 @@
         <p:spPr>
           <a:xfrm>
             <a:off x="566928" y="2395728"/>
-            <a:ext cx="6411956" cy="329184"/>
-          </a:xfrm>
-          <a:prstGeom prst="rect">
+            <a:ext cx="2681478" cy="749808"/>
+          </a:xfrm>
+          <a:prstGeom prst="rightArrow">
             <a:avLst/>
           </a:prstGeom>
           <a:solidFill>
@@ -14239,8 +14524,8 @@
         </p:nvSpPr>
         <p:spPr>
           <a:xfrm>
-            <a:off x="713232" y="2395728"/>
-            <a:ext cx="6137636" cy="329184"/>
+            <a:off x="612648" y="2395728"/>
+            <a:ext cx="2571750" cy="749808"/>
           </a:xfrm>
           <a:prstGeom prst="rect">
             <a:avLst/>
@@ -14252,11 +14537,11 @@
           <a:bodyPr wrap="square" lIns="0" tIns="0" rIns="0" bIns="0" rtlCol="0" anchor="ctr"/>
           <a:lstStyle/>
           <a:p>
-            <a:pPr indent="0" marL="0">
+            <a:pPr algn="ctr" indent="0" marL="0">
               <a:buNone/>
             </a:pPr>
             <a:r>
-              <a:rPr lang="en-US" sz="1050" dirty="0">
+              <a:rPr lang="en-US" sz="1050" b="1" dirty="0">
                 <a:solidFill>
                   <a:srgbClr val="FFFFFF"/>
                 </a:solidFill>
@@ -14264,7 +14549,7 @@
                 <a:ea typeface="Calibri" pitchFamily="34" charset="-122"/>
                 <a:cs typeface="Calibri" pitchFamily="34" charset="-120"/>
               </a:rPr>
-              <a:t>Managing an account  —  19.9%</a:t>
+              <a:t>Complaint arrives</a:t>
             </a:r>
             <a:endParaRPr lang="en-US" sz="1050" dirty="0"/>
           </a:p>
@@ -14278,16 +14563,14 @@
         </p:nvSpPr>
         <p:spPr>
           <a:xfrm>
-            <a:off x="676656" y="2793492"/>
-            <a:ext cx="6302228" cy="329184"/>
-          </a:xfrm>
-          <a:prstGeom prst="rect">
+            <a:off x="3358134" y="2395728"/>
+            <a:ext cx="2681478" cy="749808"/>
+          </a:xfrm>
+          <a:prstGeom prst="rightArrow">
             <a:avLst/>
           </a:prstGeom>
           <a:solidFill>
-            <a:srgbClr val="24343F">
-              <a:alpha val="94000"/>
-            </a:srgbClr>
+            <a:srgbClr val="24343F"/>
           </a:solidFill>
           <a:ln/>
         </p:spPr>
@@ -14300,8 +14583,8 @@
         </p:nvSpPr>
         <p:spPr>
           <a:xfrm>
-            <a:off x="822960" y="2793492"/>
-            <a:ext cx="6027908" cy="329184"/>
+            <a:off x="3403854" y="2395728"/>
+            <a:ext cx="2571750" cy="749808"/>
           </a:xfrm>
           <a:prstGeom prst="rect">
             <a:avLst/>
@@ -14313,11 +14596,11 @@
           <a:bodyPr wrap="square" lIns="0" tIns="0" rIns="0" bIns="0" rtlCol="0" anchor="ctr"/>
           <a:lstStyle/>
           <a:p>
-            <a:pPr indent="0" marL="0">
+            <a:pPr algn="ctr" indent="0" marL="0">
               <a:buNone/>
             </a:pPr>
             <a:r>
-              <a:rPr lang="en-US" sz="1050" dirty="0">
+              <a:rPr lang="en-US" sz="1050" b="1" dirty="0">
                 <a:solidFill>
                   <a:srgbClr val="FFFFFF"/>
                 </a:solidFill>
@@ -14325,7 +14608,7 @@
                 <a:ea typeface="Calibri" pitchFamily="34" charset="-122"/>
                 <a:cs typeface="Calibri" pitchFamily="34" charset="-120"/>
               </a:rPr>
-              <a:t>Problem with a purchase on your statement  —  11.2%</a:t>
+              <a:t>Model proposes a team</a:t>
             </a:r>
             <a:endParaRPr lang="en-US" sz="1050" dirty="0"/>
           </a:p>
@@ -14339,16 +14622,14 @@
         </p:nvSpPr>
         <p:spPr>
           <a:xfrm>
-            <a:off x="786384" y="3191256"/>
-            <a:ext cx="6192500" cy="329184"/>
-          </a:xfrm>
-          <a:prstGeom prst="rect">
+            <a:off x="6149340" y="2395728"/>
+            <a:ext cx="2681478" cy="749808"/>
+          </a:xfrm>
+          <a:prstGeom prst="rightArrow">
             <a:avLst/>
           </a:prstGeom>
           <a:solidFill>
-            <a:srgbClr val="24343F">
-              <a:alpha val="88000"/>
-            </a:srgbClr>
+            <a:srgbClr val="24343F"/>
           </a:solidFill>
           <a:ln/>
         </p:spPr>
@@ -14361,8 +14642,8 @@
         </p:nvSpPr>
         <p:spPr>
           <a:xfrm>
-            <a:off x="932688" y="3191256"/>
-            <a:ext cx="5918180" cy="329184"/>
+            <a:off x="6195060" y="2395728"/>
+            <a:ext cx="2571750" cy="749808"/>
           </a:xfrm>
           <a:prstGeom prst="rect">
             <a:avLst/>
@@ -14374,11 +14655,11 @@
           <a:bodyPr wrap="square" lIns="0" tIns="0" rIns="0" bIns="0" rtlCol="0" anchor="ctr"/>
           <a:lstStyle/>
           <a:p>
-            <a:pPr indent="0" marL="0">
+            <a:pPr algn="ctr" indent="0" marL="0">
               <a:buNone/>
             </a:pPr>
             <a:r>
-              <a:rPr lang="en-US" sz="1050" dirty="0">
+              <a:rPr lang="en-US" sz="1050" b="1" dirty="0">
                 <a:solidFill>
                   <a:srgbClr val="FFFFFF"/>
                 </a:solidFill>
@@ -14386,7 +14667,7 @@
                 <a:ea typeface="Calibri" pitchFamily="34" charset="-122"/>
                 <a:cs typeface="Calibri" pitchFamily="34" charset="-120"/>
               </a:rPr>
-              <a:t>A lender or company charging your account  —  5.6%</a:t>
+              <a:t>Four checks run</a:t>
             </a:r>
             <a:endParaRPr lang="en-US" sz="1050" dirty="0"/>
           </a:p>
@@ -14400,16 +14681,14 @@
         </p:nvSpPr>
         <p:spPr>
           <a:xfrm>
-            <a:off x="896112" y="3589020"/>
-            <a:ext cx="6082772" cy="329184"/>
-          </a:xfrm>
-          <a:prstGeom prst="rect">
+            <a:off x="8940546" y="2395728"/>
+            <a:ext cx="2681478" cy="749808"/>
+          </a:xfrm>
+          <a:prstGeom prst="rightArrow">
             <a:avLst/>
           </a:prstGeom>
           <a:solidFill>
-            <a:srgbClr val="24343F">
-              <a:alpha val="82000"/>
-            </a:srgbClr>
+            <a:srgbClr val="2A78D6"/>
           </a:solidFill>
           <a:ln/>
         </p:spPr>
@@ -14422,8 +14701,8 @@
         </p:nvSpPr>
         <p:spPr>
           <a:xfrm>
-            <a:off x="1042416" y="3589020"/>
-            <a:ext cx="5808452" cy="329184"/>
+            <a:off x="8986266" y="2395728"/>
+            <a:ext cx="2571750" cy="749808"/>
           </a:xfrm>
           <a:prstGeom prst="rect">
             <a:avLst/>
@@ -14435,19 +14714,19 @@
           <a:bodyPr wrap="square" lIns="0" tIns="0" rIns="0" bIns="0" rtlCol="0" anchor="ctr"/>
           <a:lstStyle/>
           <a:p>
-            <a:pPr indent="0" marL="0">
+            <a:pPr algn="ctr" indent="0" marL="0">
               <a:buNone/>
             </a:pPr>
             <a:r>
-              <a:rPr lang="en-US" sz="1050" dirty="0">
+              <a:rPr lang="en-US" sz="1050" b="1" dirty="0">
                 <a:solidFill>
-                  <a:srgbClr val="FFFFFF"/>
+                  <a:srgbClr val="1D2A32"/>
                 </a:solidFill>
                 <a:latin typeface="Calibri" pitchFamily="34" charset="0"/>
                 <a:ea typeface="Calibri" pitchFamily="34" charset="-122"/>
                 <a:cs typeface="Calibri" pitchFamily="34" charset="-120"/>
               </a:rPr>
-              <a:t>Fraud or scam  —  4.8%</a:t>
+              <a:t>A person decides</a:t>
             </a:r>
             <a:endParaRPr lang="en-US" sz="1050" dirty="0"/>
           </a:p>
@@ -14461,30 +14740,48 @@
         </p:nvSpPr>
         <p:spPr>
           <a:xfrm>
-            <a:off x="1005840" y="3986784"/>
-            <a:ext cx="5973044" cy="329184"/>
+            <a:off x="566928" y="3419856"/>
+            <a:ext cx="11055096" cy="868680"/>
           </a:xfrm>
           <a:prstGeom prst="rect">
             <a:avLst/>
           </a:prstGeom>
           <a:solidFill>
-            <a:srgbClr val="24343F">
-              <a:alpha val="76000"/>
-            </a:srgbClr>
+            <a:srgbClr val="EFF5F9"/>
           </a:solidFill>
           <a:ln/>
         </p:spPr>
       </p:sp>
       <p:sp>
         <p:nvSpPr>
-          <p:cNvPr id="21" name="Text 18"/>
-          <p:cNvSpPr/>
-          <p:nvPr/>
-        </p:nvSpPr>
-        <p:spPr>
-          <a:xfrm>
-            <a:off x="1152144" y="3986784"/>
-            <a:ext cx="5698724" cy="329184"/>
+          <p:cNvPr id="21" name="Shape 18"/>
+          <p:cNvSpPr/>
+          <p:nvPr/>
+        </p:nvSpPr>
+        <p:spPr>
+          <a:xfrm>
+            <a:off x="566928" y="3419856"/>
+            <a:ext cx="82296" cy="868680"/>
+          </a:xfrm>
+          <a:prstGeom prst="rect">
+            <a:avLst/>
+          </a:prstGeom>
+          <a:solidFill>
+            <a:srgbClr val="2A78D6"/>
+          </a:solidFill>
+          <a:ln/>
+        </p:spPr>
+      </p:sp>
+      <p:sp>
+        <p:nvSpPr>
+          <p:cNvPr id="22" name="Text 19"/>
+          <p:cNvSpPr/>
+          <p:nvPr/>
+        </p:nvSpPr>
+        <p:spPr>
+          <a:xfrm>
+            <a:off x="822960" y="3419856"/>
+            <a:ext cx="10597896" cy="868680"/>
           </a:xfrm>
           <a:prstGeom prst="rect">
             <a:avLst/>
@@ -14500,107 +14797,31 @@
               <a:buNone/>
             </a:pPr>
             <a:r>
-              <a:rPr lang="en-US" sz="1050" dirty="0">
+              <a:rPr lang="en-US" sz="1250" b="1" dirty="0">
                 <a:solidFill>
-                  <a:srgbClr val="FFFFFF"/>
+                  <a:srgbClr val="000000"/>
                 </a:solidFill>
                 <a:latin typeface="Calibri" pitchFamily="34" charset="0"/>
                 <a:ea typeface="Calibri" pitchFamily="34" charset="-122"/>
                 <a:cs typeface="Calibri" pitchFamily="34" charset="-120"/>
               </a:rPr>
-              <a:t>Closing an account  —  4.6%</a:t>
-            </a:r>
-            <a:endParaRPr lang="en-US" sz="1050" dirty="0"/>
-          </a:p>
-        </p:txBody>
-      </p:sp>
-      <p:sp>
-        <p:nvSpPr>
-          <p:cNvPr id="22" name="Shape 19"/>
-          <p:cNvSpPr/>
-          <p:nvPr/>
-        </p:nvSpPr>
-        <p:spPr>
-          <a:xfrm>
-            <a:off x="7253204" y="2395728"/>
-            <a:ext cx="4368820" cy="1920240"/>
-          </a:xfrm>
-          <a:prstGeom prst="rect">
-            <a:avLst/>
-          </a:prstGeom>
-          <a:solidFill>
-            <a:srgbClr val="24343F"/>
-          </a:solidFill>
-          <a:ln/>
-          <a:effectLst>
-            <a:outerShdw sx="100000" sy="100000" kx="0" ky="0" algn="bl" rotWithShape="0" blurRad="88900" dist="38100" dir="8100000">
-              <a:srgbClr val="1C2440">
-                <a:alpha val="13000"/>
-              </a:srgbClr>
-            </a:outerShdw>
-          </a:effectLst>
-        </p:spPr>
-      </p:sp>
-      <p:sp>
-        <p:nvSpPr>
-          <p:cNvPr id="23" name="Text 20"/>
-          <p:cNvSpPr/>
-          <p:nvPr/>
-        </p:nvSpPr>
-        <p:spPr>
-          <a:xfrm>
-            <a:off x="7509236" y="2596896"/>
-            <a:ext cx="3856756" cy="1517904"/>
-          </a:xfrm>
-          <a:prstGeom prst="rect">
-            <a:avLst/>
-          </a:prstGeom>
-          <a:noFill/>
-          <a:ln/>
-        </p:spPr>
-        <p:txBody>
-          <a:bodyPr wrap="square" lIns="0" tIns="0" rIns="0" bIns="0" rtlCol="0" anchor="t"/>
-          <a:lstStyle/>
-          <a:p>
+              <a:t>The model's answer is a claim, not a result.  </a:t>
+            </a:r>
             <a:pPr indent="0" marL="0">
               <a:buNone/>
             </a:pPr>
             <a:r>
-              <a:rPr lang="en-US" sz="4000" b="1" dirty="0">
+              <a:rPr lang="en-US" sz="1250" dirty="0">
                 <a:solidFill>
-                  <a:srgbClr val="2A78D6"/>
+                  <a:srgbClr val="000000"/>
                 </a:solidFill>
-                <a:latin typeface="Trebuchet MS" pitchFamily="34" charset="0"/>
-                <a:ea typeface="Trebuchet MS" pitchFamily="34" charset="-122"/>
-                <a:cs typeface="Trebuchet MS" pitchFamily="34" charset="-120"/>
+                <a:latin typeface="Calibri" pitchFamily="34" charset="0"/>
+                <a:ea typeface="Calibri" pitchFamily="34" charset="-122"/>
+                <a:cs typeface="Calibri" pitchFamily="34" charset="-120"/>
               </a:rPr>
-              <a:t>46.1%
-</a:t>
-            </a:r>
-            <a:pPr indent="0" marL="0">
-              <a:buNone/>
-            </a:pPr>
-            <a:r>
-              <a:rPr lang="en-US" sz="1300" dirty="0">
-                <a:solidFill>
-                  <a:srgbClr val="FFFFFF"/>
-                </a:solidFill>
-              </a:rPr>
-              <a:t>of all complaints sit in just 5 of 64 categories.
-</a:t>
-            </a:r>
-            <a:pPr indent="0" marL="0">
-              <a:buNone/>
-            </a:pPr>
-            <a:r>
-              <a:rPr lang="en-US" sz="1200" i="1" dirty="0">
-                <a:solidFill>
-                  <a:srgbClr val="8FBFF0"/>
-                </a:solidFill>
-              </a:rPr>
-              <a:t>That is what makes the scope small enough to be honest about.</a:t>
-            </a:r>
-            <a:endParaRPr lang="en-US" sz="4000" dirty="0"/>
+              <a:t>Before anyone sees it, four things are checked: that it answered properly, that the team it picked exists for that product, that it was confident enough, and that the sentence it quoted is really in the complaint. Any failure goes to a person, with the reason stated.</a:t>
+            </a:r>
+            <a:endParaRPr lang="en-US" sz="1250" dirty="0"/>
           </a:p>
         </p:txBody>
       </p:sp>
@@ -14752,7 +14973,7 @@
                 <a:ea typeface="Trebuchet MS" pitchFamily="34" charset="-122"/>
                 <a:cs typeface="Trebuchet MS" pitchFamily="34" charset="-120"/>
               </a:rPr>
-              <a:t>You can watch it decide — and every branch ends at a person</a:t>
+              <a:t>Here it is, actually running</a:t>
             </a:r>
             <a:endParaRPr lang="en-US" sz="3000" dirty="0"/>
           </a:p>
@@ -14761,99 +14982,6 @@
       <p:sp>
         <p:nvSpPr>
           <p:cNvPr id="6" name="Shape 3"/>
-          <p:cNvSpPr/>
-          <p:nvPr/>
-        </p:nvSpPr>
-        <p:spPr>
-          <a:xfrm>
-            <a:off x="566928" y="1481328"/>
-            <a:ext cx="11055096" cy="676656"/>
-          </a:xfrm>
-          <a:prstGeom prst="rect">
-            <a:avLst/>
-          </a:prstGeom>
-          <a:solidFill>
-            <a:srgbClr val="EFF5F9"/>
-          </a:solidFill>
-          <a:ln/>
-        </p:spPr>
-      </p:sp>
-      <p:sp>
-        <p:nvSpPr>
-          <p:cNvPr id="7" name="Shape 4"/>
-          <p:cNvSpPr/>
-          <p:nvPr/>
-        </p:nvSpPr>
-        <p:spPr>
-          <a:xfrm>
-            <a:off x="566928" y="1481328"/>
-            <a:ext cx="82296" cy="676656"/>
-          </a:xfrm>
-          <a:prstGeom prst="rect">
-            <a:avLst/>
-          </a:prstGeom>
-          <a:solidFill>
-            <a:srgbClr val="2A78D6"/>
-          </a:solidFill>
-          <a:ln/>
-        </p:spPr>
-      </p:sp>
-      <p:sp>
-        <p:nvSpPr>
-          <p:cNvPr id="8" name="Text 5"/>
-          <p:cNvSpPr/>
-          <p:nvPr/>
-        </p:nvSpPr>
-        <p:spPr>
-          <a:xfrm>
-            <a:off x="822960" y="1481328"/>
-            <a:ext cx="10597896" cy="676656"/>
-          </a:xfrm>
-          <a:prstGeom prst="rect">
-            <a:avLst/>
-          </a:prstGeom>
-          <a:noFill/>
-          <a:ln/>
-        </p:spPr>
-        <p:txBody>
-          <a:bodyPr wrap="square" lIns="0" tIns="0" rIns="0" bIns="0" rtlCol="0" anchor="ctr"/>
-          <a:lstStyle/>
-          <a:p>
-            <a:pPr indent="0" marL="0">
-              <a:buNone/>
-            </a:pPr>
-            <a:r>
-              <a:rPr lang="en-US" sz="1050" b="1" spc="100" kern="0" dirty="0">
-                <a:solidFill>
-                  <a:srgbClr val="2A78D6"/>
-                </a:solidFill>
-                <a:latin typeface="Calibri" pitchFamily="34" charset="0"/>
-                <a:ea typeface="Calibri" pitchFamily="34" charset="-122"/>
-                <a:cs typeface="Calibri" pitchFamily="34" charset="-120"/>
-              </a:rPr>
-              <a:t>TAKEAWAY   </a:t>
-            </a:r>
-            <a:pPr indent="0" marL="0">
-              <a:buNone/>
-            </a:pPr>
-            <a:r>
-              <a:rPr lang="en-US" sz="1300" dirty="0">
-                <a:solidFill>
-                  <a:srgbClr val="1B2730"/>
-                </a:solidFill>
-                <a:latin typeface="Calibri" pitchFamily="34" charset="0"/>
-                <a:ea typeface="Calibri" pitchFamily="34" charset="-122"/>
-                <a:cs typeface="Calibri" pitchFamily="34" charset="-120"/>
-              </a:rPr>
-              <a:t>Running now on the cohort n8n instance. Open any step and read the exact data going in and out.</a:t>
-            </a:r>
-            <a:endParaRPr lang="en-US" sz="1050" dirty="0"/>
-          </a:p>
-        </p:txBody>
-      </p:sp>
-      <p:sp>
-        <p:nvSpPr>
-          <p:cNvPr id="9" name="Shape 6"/>
           <p:cNvSpPr/>
           <p:nvPr/>
         </p:nvSpPr>
@@ -14876,7 +15004,7 @@
       </p:sp>
       <p:sp>
         <p:nvSpPr>
-          <p:cNvPr id="10" name="Text 7"/>
+          <p:cNvPr id="7" name="Text 4"/>
           <p:cNvSpPr/>
           <p:nvPr/>
         </p:nvSpPr>
@@ -14904,7 +15032,7 @@
       </p:sp>
       <p:sp>
         <p:nvSpPr>
-          <p:cNvPr id="11" name="Text 8"/>
+          <p:cNvPr id="8" name="Text 5"/>
           <p:cNvSpPr/>
           <p:nvPr/>
         </p:nvSpPr>
@@ -14941,36 +15069,67 @@
           </a:p>
         </p:txBody>
       </p:sp>
-      <p:sp>
-        <p:nvSpPr>
-          <p:cNvPr id="12" name="Shape 9"/>
-          <p:cNvSpPr/>
-          <p:nvPr/>
-        </p:nvSpPr>
-        <p:spPr>
-          <a:xfrm>
-            <a:off x="566928" y="2395728"/>
-            <a:ext cx="2681478" cy="749808"/>
-          </a:xfrm>
-          <a:prstGeom prst="rightArrow">
+      <p:pic>
+        <p:nvPicPr>
+          <p:cNvPr id="9" name="Image 1" descr="/Users/nnanyelugoahukannah/Learning/Ironhack/PROJECT-Capstone-AI-Consulting/n8n/screenshots/n8n-execution.png">    </p:cNvPr>
+          <p:cNvPicPr>
+            <a:picLocks noChangeAspect="1"/>
+          </p:cNvPicPr>
+          <p:nvPr/>
+        </p:nvPicPr>
+        <p:blipFill>
+          <a:blip r:embed="rId2"/>
+          <a:stretch>
+            <a:fillRect/>
+          </a:stretch>
+        </p:blipFill>
+        <p:spPr>
+          <a:xfrm>
+            <a:off x="566928" y="1481328"/>
+            <a:ext cx="6964710" cy="4873752"/>
+          </a:xfrm>
+          <a:prstGeom prst="rect">
+            <a:avLst/>
+          </a:prstGeom>
+        </p:spPr>
+      </p:pic>
+      <p:sp>
+        <p:nvSpPr>
+          <p:cNvPr id="10" name="Shape 6"/>
+          <p:cNvSpPr/>
+          <p:nvPr/>
+        </p:nvSpPr>
+        <p:spPr>
+          <a:xfrm>
+            <a:off x="7824246" y="1481328"/>
+            <a:ext cx="3797778" cy="4873752"/>
+          </a:xfrm>
+          <a:prstGeom prst="rect">
             <a:avLst/>
           </a:prstGeom>
           <a:solidFill>
             <a:srgbClr val="24343F"/>
           </a:solidFill>
           <a:ln/>
-        </p:spPr>
-      </p:sp>
-      <p:sp>
-        <p:nvSpPr>
-          <p:cNvPr id="13" name="Text 10"/>
-          <p:cNvSpPr/>
-          <p:nvPr/>
-        </p:nvSpPr>
-        <p:spPr>
-          <a:xfrm>
-            <a:off x="612648" y="2395728"/>
-            <a:ext cx="2571750" cy="749808"/>
+          <a:effectLst>
+            <a:outerShdw sx="100000" sy="100000" kx="0" ky="0" algn="bl" rotWithShape="0" blurRad="88900" dist="38100" dir="8100000">
+              <a:srgbClr val="1C2440">
+                <a:alpha val="13000"/>
+              </a:srgbClr>
+            </a:outerShdw>
+          </a:effectLst>
+        </p:spPr>
+      </p:sp>
+      <p:sp>
+        <p:nvSpPr>
+          <p:cNvPr id="11" name="Text 7"/>
+          <p:cNvSpPr/>
+          <p:nvPr/>
+        </p:nvSpPr>
+        <p:spPr>
+          <a:xfrm>
+            <a:off x="8061990" y="1700784"/>
+            <a:ext cx="3340578" cy="310896"/>
           </a:xfrm>
           <a:prstGeom prst="rect">
             <a:avLst/>
@@ -14982,11 +15141,25 @@
           <a:bodyPr wrap="square" lIns="0" tIns="0" rIns="0" bIns="0" rtlCol="0" anchor="ctr"/>
           <a:lstStyle/>
           <a:p>
-            <a:pPr algn="ctr" indent="0" marL="0">
+            <a:pPr indent="0" marL="0">
               <a:buNone/>
             </a:pPr>
             <a:r>
-              <a:rPr lang="en-US" sz="1050" b="1" dirty="0">
+              <a:rPr lang="en-US" sz="1100" dirty="0">
+                <a:solidFill>
+                  <a:srgbClr val="2A78D6"/>
+                </a:solidFill>
+                <a:latin typeface="Calibri" pitchFamily="34" charset="0"/>
+                <a:ea typeface="Calibri" pitchFamily="34" charset="-122"/>
+                <a:cs typeface="Calibri" pitchFamily="34" charset="-120"/>
+              </a:rPr>
+              <a:t>■ </a:t>
+            </a:r>
+            <a:pPr indent="0" marL="0">
+              <a:buNone/>
+            </a:pPr>
+            <a:r>
+              <a:rPr lang="en-US" sz="1300" b="1" dirty="0">
                 <a:solidFill>
                   <a:srgbClr val="FFFFFF"/>
                 </a:solidFill>
@@ -14994,42 +15167,22 @@
                 <a:ea typeface="Calibri" pitchFamily="34" charset="-122"/>
                 <a:cs typeface="Calibri" pitchFamily="34" charset="-120"/>
               </a:rPr>
-              <a:t>Complaint arrives</a:t>
-            </a:r>
-            <a:endParaRPr lang="en-US" sz="1050" dirty="0"/>
+              <a:t>What you are looking at</a:t>
+            </a:r>
+            <a:endParaRPr lang="en-US" sz="1100" dirty="0"/>
           </a:p>
         </p:txBody>
       </p:sp>
       <p:sp>
         <p:nvSpPr>
-          <p:cNvPr id="14" name="Shape 11"/>
-          <p:cNvSpPr/>
-          <p:nvPr/>
-        </p:nvSpPr>
-        <p:spPr>
-          <a:xfrm>
-            <a:off x="3358134" y="2395728"/>
-            <a:ext cx="2681478" cy="749808"/>
-          </a:xfrm>
-          <a:prstGeom prst="rightArrow">
-            <a:avLst/>
-          </a:prstGeom>
-          <a:solidFill>
-            <a:srgbClr val="24343F"/>
-          </a:solidFill>
-          <a:ln/>
-        </p:spPr>
-      </p:sp>
-      <p:sp>
-        <p:nvSpPr>
-          <p:cNvPr id="15" name="Text 12"/>
-          <p:cNvSpPr/>
-          <p:nvPr/>
-        </p:nvSpPr>
-        <p:spPr>
-          <a:xfrm>
-            <a:off x="3403854" y="2395728"/>
-            <a:ext cx="2571750" cy="749808"/>
+          <p:cNvPr id="12" name="Text 8"/>
+          <p:cNvSpPr/>
+          <p:nvPr/>
+        </p:nvSpPr>
+        <p:spPr>
+          <a:xfrm>
+            <a:off x="8061990" y="2139696"/>
+            <a:ext cx="3322290" cy="3959352"/>
           </a:xfrm>
           <a:prstGeom prst="rect">
             <a:avLst/>
@@ -15038,233 +15191,77 @@
           <a:ln/>
         </p:spPr>
         <p:txBody>
-          <a:bodyPr wrap="square" lIns="0" tIns="0" rIns="0" bIns="0" rtlCol="0" anchor="ctr"/>
+          <a:bodyPr wrap="square" rtlCol="0" anchor="t"/>
           <a:lstStyle/>
           <a:p>
-            <a:pPr algn="ctr" indent="0" marL="0">
-              <a:buNone/>
-            </a:pPr>
-            <a:r>
-              <a:rPr lang="en-US" sz="1050" b="1" dirty="0">
-                <a:solidFill>
-                  <a:srgbClr val="FFFFFF"/>
-                </a:solidFill>
-                <a:latin typeface="Calibri" pitchFamily="34" charset="0"/>
-                <a:ea typeface="Calibri" pitchFamily="34" charset="-122"/>
-                <a:cs typeface="Calibri" pitchFamily="34" charset="-120"/>
-              </a:rPr>
-              <a:t>Model proposes a team</a:t>
-            </a:r>
-            <a:endParaRPr lang="en-US" sz="1050" dirty="0"/>
-          </a:p>
-        </p:txBody>
-      </p:sp>
-      <p:sp>
-        <p:nvSpPr>
-          <p:cNvPr id="16" name="Shape 13"/>
-          <p:cNvSpPr/>
-          <p:nvPr/>
-        </p:nvSpPr>
-        <p:spPr>
-          <a:xfrm>
-            <a:off x="6149340" y="2395728"/>
-            <a:ext cx="2681478" cy="749808"/>
-          </a:xfrm>
-          <a:prstGeom prst="rightArrow">
-            <a:avLst/>
-          </a:prstGeom>
-          <a:solidFill>
-            <a:srgbClr val="24343F"/>
-          </a:solidFill>
-          <a:ln/>
-        </p:spPr>
-      </p:sp>
-      <p:sp>
-        <p:nvSpPr>
-          <p:cNvPr id="17" name="Text 14"/>
-          <p:cNvSpPr/>
-          <p:nvPr/>
-        </p:nvSpPr>
-        <p:spPr>
-          <a:xfrm>
-            <a:off x="6195060" y="2395728"/>
-            <a:ext cx="2571750" cy="749808"/>
-          </a:xfrm>
-          <a:prstGeom prst="rect">
-            <a:avLst/>
-          </a:prstGeom>
-          <a:noFill/>
-          <a:ln/>
-        </p:spPr>
-        <p:txBody>
-          <a:bodyPr wrap="square" lIns="0" tIns="0" rIns="0" bIns="0" rtlCol="0" anchor="ctr"/>
-          <a:lstStyle/>
-          <a:p>
-            <a:pPr algn="ctr" indent="0" marL="0">
-              <a:buNone/>
-            </a:pPr>
-            <a:r>
-              <a:rPr lang="en-US" sz="1050" b="1" dirty="0">
-                <a:solidFill>
-                  <a:srgbClr val="FFFFFF"/>
-                </a:solidFill>
-                <a:latin typeface="Calibri" pitchFamily="34" charset="0"/>
-                <a:ea typeface="Calibri" pitchFamily="34" charset="-122"/>
-                <a:cs typeface="Calibri" pitchFamily="34" charset="-120"/>
-              </a:rPr>
-              <a:t>Four checks run</a:t>
-            </a:r>
-            <a:endParaRPr lang="en-US" sz="1050" dirty="0"/>
-          </a:p>
-        </p:txBody>
-      </p:sp>
-      <p:sp>
-        <p:nvSpPr>
-          <p:cNvPr id="18" name="Shape 15"/>
-          <p:cNvSpPr/>
-          <p:nvPr/>
-        </p:nvSpPr>
-        <p:spPr>
-          <a:xfrm>
-            <a:off x="8940546" y="2395728"/>
-            <a:ext cx="2681478" cy="749808"/>
-          </a:xfrm>
-          <a:prstGeom prst="rightArrow">
-            <a:avLst/>
-          </a:prstGeom>
-          <a:solidFill>
-            <a:srgbClr val="2A78D6"/>
-          </a:solidFill>
-          <a:ln/>
-        </p:spPr>
-      </p:sp>
-      <p:sp>
-        <p:nvSpPr>
-          <p:cNvPr id="19" name="Text 16"/>
-          <p:cNvSpPr/>
-          <p:nvPr/>
-        </p:nvSpPr>
-        <p:spPr>
-          <a:xfrm>
-            <a:off x="8986266" y="2395728"/>
-            <a:ext cx="2571750" cy="749808"/>
-          </a:xfrm>
-          <a:prstGeom prst="rect">
-            <a:avLst/>
-          </a:prstGeom>
-          <a:noFill/>
-          <a:ln/>
-        </p:spPr>
-        <p:txBody>
-          <a:bodyPr wrap="square" lIns="0" tIns="0" rIns="0" bIns="0" rtlCol="0" anchor="ctr"/>
-          <a:lstStyle/>
-          <a:p>
-            <a:pPr algn="ctr" indent="0" marL="0">
-              <a:buNone/>
-            </a:pPr>
-            <a:r>
-              <a:rPr lang="en-US" sz="1050" b="1" dirty="0">
-                <a:solidFill>
-                  <a:srgbClr val="1D2A32"/>
-                </a:solidFill>
-                <a:latin typeface="Calibri" pitchFamily="34" charset="0"/>
-                <a:ea typeface="Calibri" pitchFamily="34" charset="-122"/>
-                <a:cs typeface="Calibri" pitchFamily="34" charset="-120"/>
-              </a:rPr>
-              <a:t>A person decides</a:t>
-            </a:r>
-            <a:endParaRPr lang="en-US" sz="1050" dirty="0"/>
-          </a:p>
-        </p:txBody>
-      </p:sp>
-      <p:sp>
-        <p:nvSpPr>
-          <p:cNvPr id="20" name="Shape 17"/>
-          <p:cNvSpPr/>
-          <p:nvPr/>
-        </p:nvSpPr>
-        <p:spPr>
-          <a:xfrm>
-            <a:off x="566928" y="3419856"/>
-            <a:ext cx="11055096" cy="868680"/>
-          </a:xfrm>
-          <a:prstGeom prst="rect">
-            <a:avLst/>
-          </a:prstGeom>
-          <a:solidFill>
-            <a:srgbClr val="EFF5F9"/>
-          </a:solidFill>
-          <a:ln/>
-        </p:spPr>
-      </p:sp>
-      <p:sp>
-        <p:nvSpPr>
-          <p:cNvPr id="21" name="Shape 18"/>
-          <p:cNvSpPr/>
-          <p:nvPr/>
-        </p:nvSpPr>
-        <p:spPr>
-          <a:xfrm>
-            <a:off x="566928" y="3419856"/>
-            <a:ext cx="82296" cy="868680"/>
-          </a:xfrm>
-          <a:prstGeom prst="rect">
-            <a:avLst/>
-          </a:prstGeom>
-          <a:solidFill>
-            <a:srgbClr val="2A78D6"/>
-          </a:solidFill>
-          <a:ln/>
-        </p:spPr>
-      </p:sp>
-      <p:sp>
-        <p:nvSpPr>
-          <p:cNvPr id="22" name="Text 19"/>
-          <p:cNvSpPr/>
-          <p:nvPr/>
-        </p:nvSpPr>
-        <p:spPr>
-          <a:xfrm>
-            <a:off x="822960" y="3419856"/>
-            <a:ext cx="10597896" cy="868680"/>
-          </a:xfrm>
-          <a:prstGeom prst="rect">
-            <a:avLst/>
-          </a:prstGeom>
-          <a:noFill/>
-          <a:ln/>
-        </p:spPr>
-        <p:txBody>
-          <a:bodyPr wrap="square" lIns="0" tIns="0" rIns="0" bIns="0" rtlCol="0" anchor="ctr"/>
-          <a:lstStyle/>
-          <a:p>
-            <a:pPr indent="0" marL="0">
-              <a:buNone/>
-            </a:pPr>
-            <a:r>
-              <a:rPr lang="en-US" sz="1250" b="1" dirty="0">
-                <a:solidFill>
-                  <a:srgbClr val="000000"/>
-                </a:solidFill>
-                <a:latin typeface="Calibri" pitchFamily="34" charset="0"/>
-                <a:ea typeface="Calibri" pitchFamily="34" charset="-122"/>
-                <a:cs typeface="Calibri" pitchFamily="34" charset="-120"/>
-              </a:rPr>
-              <a:t>The model's answer is a claim, not a result.  </a:t>
-            </a:r>
-            <a:pPr indent="0" marL="0">
-              <a:buNone/>
+            <a:pPr marL="152400" indent="-152400">
+              <a:spcAft>
+                <a:spcPts val="500"/>
+              </a:spcAft>
+              <a:buSzPct val="100000"/>
+              <a:buChar char="•"/>
             </a:pPr>
             <a:r>
               <a:rPr lang="en-US" sz="1250" dirty="0">
                 <a:solidFill>
-                  <a:srgbClr val="000000"/>
+                  <a:srgbClr val="C6D8E4"/>
                 </a:solidFill>
-                <a:latin typeface="Calibri" pitchFamily="34" charset="0"/>
-                <a:ea typeface="Calibri" pitchFamily="34" charset="-122"/>
-                <a:cs typeface="Calibri" pitchFamily="34" charset="-120"/>
               </a:rPr>
-              <a:t>Before anyone sees it, four things are checked: that it answered properly, that the team it picked exists for that product, that it was confident enough, and that the sentence it quoted is really in the complaint. Any failure goes to a person, with the reason stated.</a:t>
+              <a:t>Green ticks: every node executed, on a real complaint from the corpus</a:t>
+            </a:r>
+            <a:endParaRPr lang="en-US" sz="1250" dirty="0"/>
+          </a:p>
+          <a:p>
+            <a:pPr marL="152400" indent="-152400">
+              <a:spcAft>
+                <a:spcPts val="500"/>
+              </a:spcAft>
+              <a:buSzPct val="100000"/>
+              <a:buChar char="•"/>
+            </a:pPr>
+            <a:r>
+              <a:rPr lang="en-US" sz="1250" dirty="0">
+                <a:solidFill>
+                  <a:srgbClr val="C6D8E4"/>
+                </a:solidFill>
+              </a:rPr>
+              <a:t>Bottom panel: the proposed team, the confidence, and the quote it relied on</a:t>
+            </a:r>
+            <a:endParaRPr lang="en-US" sz="1250" dirty="0"/>
+          </a:p>
+          <a:p>
+            <a:pPr marL="152400" indent="-152400">
+              <a:spcAft>
+                <a:spcPts val="500"/>
+              </a:spcAft>
+              <a:buSzPct val="100000"/>
+              <a:buChar char="•"/>
+            </a:pPr>
+            <a:r>
+              <a:rPr lang="en-US" sz="1250" dirty="0">
+                <a:solidFill>
+                  <a:srgbClr val="C6D8E4"/>
+                </a:solidFill>
+              </a:rPr>
+              <a:t>It routed to Disputes and fraud — which matched the complaint's actual label</a:t>
+            </a:r>
+            <a:endParaRPr lang="en-US" sz="1250" dirty="0"/>
+          </a:p>
+          <a:p>
+            <a:pPr marL="152400" indent="-152400">
+              <a:spcAft>
+                <a:spcPts val="500"/>
+              </a:spcAft>
+              <a:buSzPct val="100000"/>
+              <a:buChar char="•"/>
+            </a:pPr>
+            <a:r>
+              <a:rPr lang="en-US" sz="1250" dirty="0">
+                <a:solidFill>
+                  <a:srgbClr val="C6D8E4"/>
+                </a:solidFill>
+              </a:rPr>
+              <a:t>Nothing here is a mockup. You can click any node and read its real input and output.</a:t>
             </a:r>
             <a:endParaRPr lang="en-US" sz="1250" dirty="0"/>
           </a:p>
@@ -15418,7 +15415,7 @@
                 <a:ea typeface="Trebuchet MS" pitchFamily="34" charset="-122"/>
                 <a:cs typeface="Trebuchet MS" pitchFamily="34" charset="-120"/>
               </a:rPr>
-              <a:t>Here it is, actually running</a:t>
+              <a:t>It caught itself fabricating a reason — four times</a:t>
             </a:r>
             <a:endParaRPr lang="en-US" sz="3000" dirty="0"/>
           </a:p>
@@ -15427,6 +15424,99 @@
       <p:sp>
         <p:nvSpPr>
           <p:cNvPr id="6" name="Shape 3"/>
+          <p:cNvSpPr/>
+          <p:nvPr/>
+        </p:nvSpPr>
+        <p:spPr>
+          <a:xfrm>
+            <a:off x="566928" y="1481328"/>
+            <a:ext cx="11055096" cy="676656"/>
+          </a:xfrm>
+          <a:prstGeom prst="rect">
+            <a:avLst/>
+          </a:prstGeom>
+          <a:solidFill>
+            <a:srgbClr val="EFF5F9"/>
+          </a:solidFill>
+          <a:ln/>
+        </p:spPr>
+      </p:sp>
+      <p:sp>
+        <p:nvSpPr>
+          <p:cNvPr id="7" name="Shape 4"/>
+          <p:cNvSpPr/>
+          <p:nvPr/>
+        </p:nvSpPr>
+        <p:spPr>
+          <a:xfrm>
+            <a:off x="566928" y="1481328"/>
+            <a:ext cx="82296" cy="676656"/>
+          </a:xfrm>
+          <a:prstGeom prst="rect">
+            <a:avLst/>
+          </a:prstGeom>
+          <a:solidFill>
+            <a:srgbClr val="2A78D6"/>
+          </a:solidFill>
+          <a:ln/>
+        </p:spPr>
+      </p:sp>
+      <p:sp>
+        <p:nvSpPr>
+          <p:cNvPr id="8" name="Text 5"/>
+          <p:cNvSpPr/>
+          <p:nvPr/>
+        </p:nvSpPr>
+        <p:spPr>
+          <a:xfrm>
+            <a:off x="822960" y="1481328"/>
+            <a:ext cx="10597896" cy="676656"/>
+          </a:xfrm>
+          <a:prstGeom prst="rect">
+            <a:avLst/>
+          </a:prstGeom>
+          <a:noFill/>
+          <a:ln/>
+        </p:spPr>
+        <p:txBody>
+          <a:bodyPr wrap="square" lIns="0" tIns="0" rIns="0" bIns="0" rtlCol="0" anchor="ctr"/>
+          <a:lstStyle/>
+          <a:p>
+            <a:pPr indent="0" marL="0">
+              <a:buNone/>
+            </a:pPr>
+            <a:r>
+              <a:rPr lang="en-US" sz="1050" b="1" spc="100" kern="0" dirty="0">
+                <a:solidFill>
+                  <a:srgbClr val="2A78D6"/>
+                </a:solidFill>
+                <a:latin typeface="Calibri" pitchFamily="34" charset="0"/>
+                <a:ea typeface="Calibri" pitchFamily="34" charset="-122"/>
+                <a:cs typeface="Calibri" pitchFamily="34" charset="-120"/>
+              </a:rPr>
+              <a:t>TAKEAWAY   </a:t>
+            </a:r>
+            <a:pPr indent="0" marL="0">
+              <a:buNone/>
+            </a:pPr>
+            <a:r>
+              <a:rPr lang="en-US" sz="1300" dirty="0">
+                <a:solidFill>
+                  <a:srgbClr val="1B2730"/>
+                </a:solidFill>
+                <a:latin typeface="Calibri" pitchFamily="34" charset="0"/>
+                <a:ea typeface="Calibri" pitchFamily="34" charset="-122"/>
+                <a:cs typeface="Calibri" pitchFamily="34" charset="-120"/>
+              </a:rPr>
+              <a:t>60 decisions traced in LangSmith. Every one accounted for, including every refusal.</a:t>
+            </a:r>
+            <a:endParaRPr lang="en-US" sz="1050" dirty="0"/>
+          </a:p>
+        </p:txBody>
+      </p:sp>
+      <p:sp>
+        <p:nvSpPr>
+          <p:cNvPr id="9" name="Shape 6"/>
           <p:cNvSpPr/>
           <p:nvPr/>
         </p:nvSpPr>
@@ -15449,7 +15539,7 @@
       </p:sp>
       <p:sp>
         <p:nvSpPr>
-          <p:cNvPr id="7" name="Text 4"/>
+          <p:cNvPr id="10" name="Text 7"/>
           <p:cNvSpPr/>
           <p:nvPr/>
         </p:nvSpPr>
@@ -15477,7 +15567,7 @@
       </p:sp>
       <p:sp>
         <p:nvSpPr>
-          <p:cNvPr id="8" name="Text 5"/>
+          <p:cNvPr id="11" name="Text 8"/>
           <p:cNvSpPr/>
           <p:nvPr/>
         </p:nvSpPr>
@@ -15514,544 +15604,9 @@
           </a:p>
         </p:txBody>
       </p:sp>
-      <p:pic>
-        <p:nvPicPr>
-          <p:cNvPr id="9" name="Image 1" descr="/Users/nnanyelugoahukannah/Learning/Ironhack/PROJECT-Capstone-AI-Consulting/n8n/screenshots/n8n-execution.png">    </p:cNvPr>
-          <p:cNvPicPr>
-            <a:picLocks noChangeAspect="1"/>
-          </p:cNvPicPr>
-          <p:nvPr/>
-        </p:nvPicPr>
-        <p:blipFill>
-          <a:blip r:embed="rId2"/>
-          <a:stretch>
-            <a:fillRect/>
-          </a:stretch>
-        </p:blipFill>
-        <p:spPr>
-          <a:xfrm>
-            <a:off x="566928" y="1481328"/>
-            <a:ext cx="6964710" cy="4873752"/>
-          </a:xfrm>
-          <a:prstGeom prst="rect">
-            <a:avLst/>
-          </a:prstGeom>
-        </p:spPr>
-      </p:pic>
-      <p:sp>
-        <p:nvSpPr>
-          <p:cNvPr id="10" name="Shape 6"/>
-          <p:cNvSpPr/>
-          <p:nvPr/>
-        </p:nvSpPr>
-        <p:spPr>
-          <a:xfrm>
-            <a:off x="7824246" y="1481328"/>
-            <a:ext cx="3797778" cy="4873752"/>
-          </a:xfrm>
-          <a:prstGeom prst="rect">
-            <a:avLst/>
-          </a:prstGeom>
-          <a:solidFill>
-            <a:srgbClr val="24343F"/>
-          </a:solidFill>
-          <a:ln/>
-          <a:effectLst>
-            <a:outerShdw sx="100000" sy="100000" kx="0" ky="0" algn="bl" rotWithShape="0" blurRad="88900" dist="38100" dir="8100000">
-              <a:srgbClr val="1C2440">
-                <a:alpha val="13000"/>
-              </a:srgbClr>
-            </a:outerShdw>
-          </a:effectLst>
-        </p:spPr>
-      </p:sp>
-      <p:sp>
-        <p:nvSpPr>
-          <p:cNvPr id="11" name="Text 7"/>
-          <p:cNvSpPr/>
-          <p:nvPr/>
-        </p:nvSpPr>
-        <p:spPr>
-          <a:xfrm>
-            <a:off x="8061990" y="1700784"/>
-            <a:ext cx="3340578" cy="310896"/>
-          </a:xfrm>
-          <a:prstGeom prst="rect">
-            <a:avLst/>
-          </a:prstGeom>
-          <a:noFill/>
-          <a:ln/>
-        </p:spPr>
-        <p:txBody>
-          <a:bodyPr wrap="square" lIns="0" tIns="0" rIns="0" bIns="0" rtlCol="0" anchor="ctr"/>
-          <a:lstStyle/>
-          <a:p>
-            <a:pPr indent="0" marL="0">
-              <a:buNone/>
-            </a:pPr>
-            <a:r>
-              <a:rPr lang="en-US" sz="1100" dirty="0">
-                <a:solidFill>
-                  <a:srgbClr val="2A78D6"/>
-                </a:solidFill>
-                <a:latin typeface="Calibri" pitchFamily="34" charset="0"/>
-                <a:ea typeface="Calibri" pitchFamily="34" charset="-122"/>
-                <a:cs typeface="Calibri" pitchFamily="34" charset="-120"/>
-              </a:rPr>
-              <a:t>■ </a:t>
-            </a:r>
-            <a:pPr indent="0" marL="0">
-              <a:buNone/>
-            </a:pPr>
-            <a:r>
-              <a:rPr lang="en-US" sz="1300" b="1" dirty="0">
-                <a:solidFill>
-                  <a:srgbClr val="FFFFFF"/>
-                </a:solidFill>
-                <a:latin typeface="Calibri" pitchFamily="34" charset="0"/>
-                <a:ea typeface="Calibri" pitchFamily="34" charset="-122"/>
-                <a:cs typeface="Calibri" pitchFamily="34" charset="-120"/>
-              </a:rPr>
-              <a:t>What you are looking at</a:t>
-            </a:r>
-            <a:endParaRPr lang="en-US" sz="1100" dirty="0"/>
-          </a:p>
-        </p:txBody>
-      </p:sp>
-      <p:sp>
-        <p:nvSpPr>
-          <p:cNvPr id="12" name="Text 8"/>
-          <p:cNvSpPr/>
-          <p:nvPr/>
-        </p:nvSpPr>
-        <p:spPr>
-          <a:xfrm>
-            <a:off x="8061990" y="2139696"/>
-            <a:ext cx="3322290" cy="3959352"/>
-          </a:xfrm>
-          <a:prstGeom prst="rect">
-            <a:avLst/>
-          </a:prstGeom>
-          <a:noFill/>
-          <a:ln/>
-        </p:spPr>
-        <p:txBody>
-          <a:bodyPr wrap="square" rtlCol="0" anchor="t"/>
-          <a:lstStyle/>
-          <a:p>
-            <a:pPr marL="152400" indent="-152400">
-              <a:spcAft>
-                <a:spcPts val="500"/>
-              </a:spcAft>
-              <a:buSzPct val="100000"/>
-              <a:buChar char="•"/>
-            </a:pPr>
-            <a:r>
-              <a:rPr lang="en-US" sz="1250" dirty="0">
-                <a:solidFill>
-                  <a:srgbClr val="C6D8E4"/>
-                </a:solidFill>
-              </a:rPr>
-              <a:t>Green ticks: every node executed, on a real complaint from the corpus</a:t>
-            </a:r>
-            <a:endParaRPr lang="en-US" sz="1250" dirty="0"/>
-          </a:p>
-          <a:p>
-            <a:pPr marL="152400" indent="-152400">
-              <a:spcAft>
-                <a:spcPts val="500"/>
-              </a:spcAft>
-              <a:buSzPct val="100000"/>
-              <a:buChar char="•"/>
-            </a:pPr>
-            <a:r>
-              <a:rPr lang="en-US" sz="1250" dirty="0">
-                <a:solidFill>
-                  <a:srgbClr val="C6D8E4"/>
-                </a:solidFill>
-              </a:rPr>
-              <a:t>Bottom panel: the proposed team, the confidence, and the quote it relied on</a:t>
-            </a:r>
-            <a:endParaRPr lang="en-US" sz="1250" dirty="0"/>
-          </a:p>
-          <a:p>
-            <a:pPr marL="152400" indent="-152400">
-              <a:spcAft>
-                <a:spcPts val="500"/>
-              </a:spcAft>
-              <a:buSzPct val="100000"/>
-              <a:buChar char="•"/>
-            </a:pPr>
-            <a:r>
-              <a:rPr lang="en-US" sz="1250" dirty="0">
-                <a:solidFill>
-                  <a:srgbClr val="C6D8E4"/>
-                </a:solidFill>
-              </a:rPr>
-              <a:t>It routed to Disputes and fraud — which matched the complaint's actual label</a:t>
-            </a:r>
-            <a:endParaRPr lang="en-US" sz="1250" dirty="0"/>
-          </a:p>
-          <a:p>
-            <a:pPr marL="152400" indent="-152400">
-              <a:spcAft>
-                <a:spcPts val="500"/>
-              </a:spcAft>
-              <a:buSzPct val="100000"/>
-              <a:buChar char="•"/>
-            </a:pPr>
-            <a:r>
-              <a:rPr lang="en-US" sz="1250" dirty="0">
-                <a:solidFill>
-                  <a:srgbClr val="C6D8E4"/>
-                </a:solidFill>
-              </a:rPr>
-              <a:t>Nothing here is a mockup. You can click any node and read its real input and output.</a:t>
-            </a:r>
-            <a:endParaRPr lang="en-US" sz="1250" dirty="0"/>
-          </a:p>
-        </p:txBody>
-      </p:sp>
-    </p:spTree>
-  </p:cSld>
-  <p:clrMapOvr>
-    <a:masterClrMapping/>
-  </p:clrMapOvr>
-</p:sld>
-</file>
-
-<file path=ppt/slides/slide9.xml><?xml version="1.0" encoding="utf-8"?>
-<p:sld xmlns:a="http://schemas.openxmlformats.org/drawingml/2006/main" xmlns:r="http://schemas.openxmlformats.org/officeDocument/2006/relationships" xmlns:p="http://schemas.openxmlformats.org/presentationml/2006/main">
-  <p:cSld name="Slide 9">
-    <p:bg>
-      <p:bgPr>
-        <a:solidFill>
-          <a:srgbClr val="FFFFFF"/>
-        </a:solidFill>
-      </p:bgPr>
-    </p:bg>
-    <p:spTree>
-      <p:nvGrpSpPr>
-        <p:cNvPr id="1" name=""/>
-        <p:cNvGrpSpPr/>
-        <p:nvPr/>
-      </p:nvGrpSpPr>
-      <p:grpSpPr>
-        <a:xfrm>
-          <a:off x="0" y="0"/>
-          <a:ext cx="0" cy="0"/>
-          <a:chOff x="0" y="0"/>
-          <a:chExt cx="0" cy="0"/>
-        </a:xfrm>
-      </p:grpSpPr>
-      <p:sp>
-        <p:nvSpPr>
-          <p:cNvPr id="2" name="Text 0"/>
-          <p:cNvSpPr/>
-          <p:nvPr/>
-        </p:nvSpPr>
-        <p:spPr>
-          <a:xfrm>
-            <a:off x="566928" y="310896"/>
-            <a:ext cx="11055096" cy="274320"/>
-          </a:xfrm>
-          <a:prstGeom prst="rect">
-            <a:avLst/>
-          </a:prstGeom>
-          <a:noFill/>
-          <a:ln/>
-        </p:spPr>
-        <p:txBody>
-          <a:bodyPr wrap="square" lIns="0" tIns="0" rIns="0" bIns="0" rtlCol="0" anchor="ctr"/>
-          <a:lstStyle/>
-          <a:p>
-            <a:pPr indent="0" marL="0">
-              <a:buNone/>
-            </a:pPr>
-            <a:r>
-              <a:rPr lang="en-US" sz="1050" b="1" spc="200" kern="0" dirty="0">
-                <a:solidFill>
-                  <a:srgbClr val="6B7C88"/>
-                </a:solidFill>
-                <a:latin typeface="Calibri" pitchFamily="34" charset="0"/>
-                <a:ea typeface="Calibri" pitchFamily="34" charset="-122"/>
-                <a:cs typeface="Calibri" pitchFamily="34" charset="-120"/>
-              </a:rPr>
-              <a:t>CAPSTONE ROUND 1  ·  AI CONSULTING PITCH</a:t>
-            </a:r>
-            <a:endParaRPr lang="en-US" sz="1050" dirty="0"/>
-          </a:p>
-        </p:txBody>
-      </p:sp>
-      <p:sp>
-        <p:nvSpPr>
-          <p:cNvPr id="3" name="Shape 1"/>
-          <p:cNvSpPr/>
-          <p:nvPr/>
-        </p:nvSpPr>
-        <p:spPr>
-          <a:xfrm>
-            <a:off x="566928" y="658368"/>
-            <a:ext cx="566928" cy="566928"/>
-          </a:xfrm>
-          <a:prstGeom prst="ellipse">
-            <a:avLst/>
-          </a:prstGeom>
-          <a:solidFill>
-            <a:srgbClr val="24343F"/>
-          </a:solidFill>
-          <a:ln/>
-        </p:spPr>
-      </p:sp>
-      <p:pic>
-        <p:nvPicPr>
-          <p:cNvPr id="4" name="Image 0" descr="preencoded.png">    </p:cNvPr>
-          <p:cNvPicPr>
-            <a:picLocks noChangeAspect="1"/>
-          </p:cNvPicPr>
-          <p:nvPr/>
-        </p:nvPicPr>
-        <p:blipFill>
-          <a:blip r:embed="rId1"/>
-          <a:stretch>
-            <a:fillRect/>
-          </a:stretch>
-        </p:blipFill>
-        <p:spPr>
-          <a:xfrm>
-            <a:off x="708660" y="800100"/>
-            <a:ext cx="283464" cy="283464"/>
-          </a:xfrm>
-          <a:prstGeom prst="rect">
-            <a:avLst/>
-          </a:prstGeom>
-        </p:spPr>
-      </p:pic>
-      <p:sp>
-        <p:nvSpPr>
-          <p:cNvPr id="5" name="Text 2"/>
-          <p:cNvSpPr/>
-          <p:nvPr/>
-        </p:nvSpPr>
-        <p:spPr>
-          <a:xfrm>
-            <a:off x="1316736" y="621792"/>
-            <a:ext cx="10305288" cy="658368"/>
-          </a:xfrm>
-          <a:prstGeom prst="rect">
-            <a:avLst/>
-          </a:prstGeom>
-          <a:noFill/>
-          <a:ln/>
-        </p:spPr>
-        <p:txBody>
-          <a:bodyPr wrap="square" lIns="0" tIns="0" rIns="0" bIns="0" rtlCol="0" anchor="ctr"/>
-          <a:lstStyle/>
-          <a:p>
-            <a:pPr indent="0" marL="0">
-              <a:buNone/>
-            </a:pPr>
-            <a:r>
-              <a:rPr lang="en-US" sz="3000" b="1" dirty="0">
-                <a:solidFill>
-                  <a:srgbClr val="24343F"/>
-                </a:solidFill>
-                <a:latin typeface="Trebuchet MS" pitchFamily="34" charset="0"/>
-                <a:ea typeface="Trebuchet MS" pitchFamily="34" charset="-122"/>
-                <a:cs typeface="Trebuchet MS" pitchFamily="34" charset="-120"/>
-              </a:rPr>
-              <a:t>It caught itself fabricating a reason — four times</a:t>
-            </a:r>
-            <a:endParaRPr lang="en-US" sz="3000" dirty="0"/>
-          </a:p>
-        </p:txBody>
-      </p:sp>
-      <p:sp>
-        <p:nvSpPr>
-          <p:cNvPr id="6" name="Shape 3"/>
-          <p:cNvSpPr/>
-          <p:nvPr/>
-        </p:nvSpPr>
-        <p:spPr>
-          <a:xfrm>
-            <a:off x="566928" y="1481328"/>
-            <a:ext cx="11055096" cy="676656"/>
-          </a:xfrm>
-          <a:prstGeom prst="rect">
-            <a:avLst/>
-          </a:prstGeom>
-          <a:solidFill>
-            <a:srgbClr val="EFF5F9"/>
-          </a:solidFill>
-          <a:ln/>
-        </p:spPr>
-      </p:sp>
-      <p:sp>
-        <p:nvSpPr>
-          <p:cNvPr id="7" name="Shape 4"/>
-          <p:cNvSpPr/>
-          <p:nvPr/>
-        </p:nvSpPr>
-        <p:spPr>
-          <a:xfrm>
-            <a:off x="566928" y="1481328"/>
-            <a:ext cx="82296" cy="676656"/>
-          </a:xfrm>
-          <a:prstGeom prst="rect">
-            <a:avLst/>
-          </a:prstGeom>
-          <a:solidFill>
-            <a:srgbClr val="2A78D6"/>
-          </a:solidFill>
-          <a:ln/>
-        </p:spPr>
-      </p:sp>
-      <p:sp>
-        <p:nvSpPr>
-          <p:cNvPr id="8" name="Text 5"/>
-          <p:cNvSpPr/>
-          <p:nvPr/>
-        </p:nvSpPr>
-        <p:spPr>
-          <a:xfrm>
-            <a:off x="822960" y="1481328"/>
-            <a:ext cx="10597896" cy="676656"/>
-          </a:xfrm>
-          <a:prstGeom prst="rect">
-            <a:avLst/>
-          </a:prstGeom>
-          <a:noFill/>
-          <a:ln/>
-        </p:spPr>
-        <p:txBody>
-          <a:bodyPr wrap="square" lIns="0" tIns="0" rIns="0" bIns="0" rtlCol="0" anchor="ctr"/>
-          <a:lstStyle/>
-          <a:p>
-            <a:pPr indent="0" marL="0">
-              <a:buNone/>
-            </a:pPr>
-            <a:r>
-              <a:rPr lang="en-US" sz="1050" b="1" spc="100" kern="0" dirty="0">
-                <a:solidFill>
-                  <a:srgbClr val="2A78D6"/>
-                </a:solidFill>
-                <a:latin typeface="Calibri" pitchFamily="34" charset="0"/>
-                <a:ea typeface="Calibri" pitchFamily="34" charset="-122"/>
-                <a:cs typeface="Calibri" pitchFamily="34" charset="-120"/>
-              </a:rPr>
-              <a:t>TAKEAWAY   </a:t>
-            </a:r>
-            <a:pPr indent="0" marL="0">
-              <a:buNone/>
-            </a:pPr>
-            <a:r>
-              <a:rPr lang="en-US" sz="1300" dirty="0">
-                <a:solidFill>
-                  <a:srgbClr val="1B2730"/>
-                </a:solidFill>
-                <a:latin typeface="Calibri" pitchFamily="34" charset="0"/>
-                <a:ea typeface="Calibri" pitchFamily="34" charset="-122"/>
-                <a:cs typeface="Calibri" pitchFamily="34" charset="-120"/>
-              </a:rPr>
-              <a:t>60 decisions traced in LangSmith. Every one accounted for, including every refusal.</a:t>
-            </a:r>
-            <a:endParaRPr lang="en-US" sz="1050" dirty="0"/>
-          </a:p>
-        </p:txBody>
-      </p:sp>
-      <p:sp>
-        <p:nvSpPr>
-          <p:cNvPr id="9" name="Shape 6"/>
-          <p:cNvSpPr/>
-          <p:nvPr/>
-        </p:nvSpPr>
-        <p:spPr>
-          <a:xfrm>
-            <a:off x="566928" y="6437376"/>
-            <a:ext cx="11055096" cy="0"/>
-          </a:xfrm>
-          <a:prstGeom prst="line">
-            <a:avLst/>
-          </a:prstGeom>
-          <a:noFill/>
-          <a:ln w="12700">
-            <a:solidFill>
-              <a:srgbClr val="D9E3EA"/>
-            </a:solidFill>
-            <a:prstDash val="solid"/>
-          </a:ln>
-        </p:spPr>
-      </p:sp>
-      <p:sp>
-        <p:nvSpPr>
-          <p:cNvPr id="10" name="Text 7"/>
-          <p:cNvSpPr/>
-          <p:nvPr/>
-        </p:nvSpPr>
-        <p:spPr>
-          <a:xfrm>
-            <a:off x="566928" y="6473952"/>
-            <a:ext cx="7315200" cy="274320"/>
-          </a:xfrm>
-          <a:prstGeom prst="rect">
-            <a:avLst/>
-          </a:prstGeom>
-          <a:noFill/>
-          <a:ln/>
-        </p:spPr>
-        <p:txBody>
-          <a:bodyPr wrap="square" lIns="0" tIns="0" rIns="0" bIns="0" rtlCol="0" anchor="ctr"/>
-          <a:lstStyle/>
-          <a:p>
-            <a:pPr indent="0" marL="0">
-              <a:buNone/>
-            </a:pPr>
-            <a:endParaRPr lang="en-US" sz="850" dirty="0"/>
-          </a:p>
-        </p:txBody>
-      </p:sp>
-      <p:sp>
-        <p:nvSpPr>
-          <p:cNvPr id="11" name="Text 8"/>
-          <p:cNvSpPr/>
-          <p:nvPr/>
-        </p:nvSpPr>
-        <p:spPr>
-          <a:xfrm>
-            <a:off x="10524744" y="6473952"/>
-            <a:ext cx="1097280" cy="274320"/>
-          </a:xfrm>
-          <a:prstGeom prst="rect">
-            <a:avLst/>
-          </a:prstGeom>
-          <a:noFill/>
-          <a:ln/>
-        </p:spPr>
-        <p:txBody>
-          <a:bodyPr wrap="square" lIns="0" tIns="0" rIns="0" bIns="0" rtlCol="0" anchor="ctr"/>
-          <a:lstStyle/>
-          <a:p>
-            <a:pPr algn="r" indent="0" marL="0">
-              <a:buNone/>
-            </a:pPr>
-            <a:r>
-              <a:rPr lang="en-US" sz="850" dirty="0">
-                <a:solidFill>
-                  <a:srgbClr val="6B7C88"/>
-                </a:solidFill>
-                <a:latin typeface="Calibri" pitchFamily="34" charset="0"/>
-                <a:ea typeface="Calibri" pitchFamily="34" charset="-122"/>
-                <a:cs typeface="Calibri" pitchFamily="34" charset="-120"/>
-              </a:rPr>
-              <a:t>8</a:t>
-            </a:r>
-            <a:endParaRPr lang="en-US" sz="850" dirty="0"/>
-          </a:p>
-        </p:txBody>
-      </p:sp>
       <p:graphicFrame>
         <p:nvGraphicFramePr>
-          <p:cNvPr id="10" name="Table 0"/>
+          <p:cNvPr id="9" name="Table 0"/>
           <p:cNvGraphicFramePr>
             <a:graphicFrameLocks noGrp="1"/>
           </p:cNvGraphicFramePr>
@@ -16773,6 +16328,448 @@
                 <a:cs typeface="Calibri" pitchFamily="34" charset="-120"/>
               </a:rPr>
               <a:t>A system that explains itself convincingly but falsely is more dangerous than one that says nothing.</a:t>
+            </a:r>
+            <a:endParaRPr lang="en-US" sz="1250" dirty="0"/>
+          </a:p>
+        </p:txBody>
+      </p:sp>
+    </p:spTree>
+  </p:cSld>
+  <p:clrMapOvr>
+    <a:masterClrMapping/>
+  </p:clrMapOvr>
+</p:sld>
+</file>
+
+<file path=ppt/slides/slide9.xml><?xml version="1.0" encoding="utf-8"?>
+<p:sld xmlns:a="http://schemas.openxmlformats.org/drawingml/2006/main" xmlns:r="http://schemas.openxmlformats.org/officeDocument/2006/relationships" xmlns:p="http://schemas.openxmlformats.org/presentationml/2006/main">
+  <p:cSld name="Slide 9">
+    <p:bg>
+      <p:bgPr>
+        <a:solidFill>
+          <a:srgbClr val="FFFFFF"/>
+        </a:solidFill>
+      </p:bgPr>
+    </p:bg>
+    <p:spTree>
+      <p:nvGrpSpPr>
+        <p:cNvPr id="1" name=""/>
+        <p:cNvGrpSpPr/>
+        <p:nvPr/>
+      </p:nvGrpSpPr>
+      <p:grpSpPr>
+        <a:xfrm>
+          <a:off x="0" y="0"/>
+          <a:ext cx="0" cy="0"/>
+          <a:chOff x="0" y="0"/>
+          <a:chExt cx="0" cy="0"/>
+        </a:xfrm>
+      </p:grpSpPr>
+      <p:sp>
+        <p:nvSpPr>
+          <p:cNvPr id="2" name="Text 0"/>
+          <p:cNvSpPr/>
+          <p:nvPr/>
+        </p:nvSpPr>
+        <p:spPr>
+          <a:xfrm>
+            <a:off x="566928" y="310896"/>
+            <a:ext cx="11055096" cy="274320"/>
+          </a:xfrm>
+          <a:prstGeom prst="rect">
+            <a:avLst/>
+          </a:prstGeom>
+          <a:noFill/>
+          <a:ln/>
+        </p:spPr>
+        <p:txBody>
+          <a:bodyPr wrap="square" lIns="0" tIns="0" rIns="0" bIns="0" rtlCol="0" anchor="ctr"/>
+          <a:lstStyle/>
+          <a:p>
+            <a:pPr indent="0" marL="0">
+              <a:buNone/>
+            </a:pPr>
+            <a:r>
+              <a:rPr lang="en-US" sz="1050" b="1" spc="200" kern="0" dirty="0">
+                <a:solidFill>
+                  <a:srgbClr val="6B7C88"/>
+                </a:solidFill>
+                <a:latin typeface="Calibri" pitchFamily="34" charset="0"/>
+                <a:ea typeface="Calibri" pitchFamily="34" charset="-122"/>
+                <a:cs typeface="Calibri" pitchFamily="34" charset="-120"/>
+              </a:rPr>
+              <a:t>CAPSTONE ROUND 1  ·  AI CONSULTING PITCH</a:t>
+            </a:r>
+            <a:endParaRPr lang="en-US" sz="1050" dirty="0"/>
+          </a:p>
+        </p:txBody>
+      </p:sp>
+      <p:sp>
+        <p:nvSpPr>
+          <p:cNvPr id="3" name="Shape 1"/>
+          <p:cNvSpPr/>
+          <p:nvPr/>
+        </p:nvSpPr>
+        <p:spPr>
+          <a:xfrm>
+            <a:off x="566928" y="658368"/>
+            <a:ext cx="566928" cy="566928"/>
+          </a:xfrm>
+          <a:prstGeom prst="ellipse">
+            <a:avLst/>
+          </a:prstGeom>
+          <a:solidFill>
+            <a:srgbClr val="24343F"/>
+          </a:solidFill>
+          <a:ln/>
+        </p:spPr>
+      </p:sp>
+      <p:pic>
+        <p:nvPicPr>
+          <p:cNvPr id="4" name="Image 0" descr="preencoded.png">    </p:cNvPr>
+          <p:cNvPicPr>
+            <a:picLocks noChangeAspect="1"/>
+          </p:cNvPicPr>
+          <p:nvPr/>
+        </p:nvPicPr>
+        <p:blipFill>
+          <a:blip r:embed="rId1"/>
+          <a:stretch>
+            <a:fillRect/>
+          </a:stretch>
+        </p:blipFill>
+        <p:spPr>
+          <a:xfrm>
+            <a:off x="708660" y="800100"/>
+            <a:ext cx="283464" cy="283464"/>
+          </a:xfrm>
+          <a:prstGeom prst="rect">
+            <a:avLst/>
+          </a:prstGeom>
+        </p:spPr>
+      </p:pic>
+      <p:sp>
+        <p:nvSpPr>
+          <p:cNvPr id="5" name="Text 2"/>
+          <p:cNvSpPr/>
+          <p:nvPr/>
+        </p:nvSpPr>
+        <p:spPr>
+          <a:xfrm>
+            <a:off x="1316736" y="621792"/>
+            <a:ext cx="10305288" cy="658368"/>
+          </a:xfrm>
+          <a:prstGeom prst="rect">
+            <a:avLst/>
+          </a:prstGeom>
+          <a:noFill/>
+          <a:ln/>
+        </p:spPr>
+        <p:txBody>
+          <a:bodyPr wrap="square" lIns="0" tIns="0" rIns="0" bIns="0" rtlCol="0" anchor="ctr"/>
+          <a:lstStyle/>
+          <a:p>
+            <a:pPr indent="0" marL="0">
+              <a:buNone/>
+            </a:pPr>
+            <a:r>
+              <a:rPr lang="en-US" sz="3000" b="1" dirty="0">
+                <a:solidFill>
+                  <a:srgbClr val="24343F"/>
+                </a:solidFill>
+                <a:latin typeface="Trebuchet MS" pitchFamily="34" charset="0"/>
+                <a:ea typeface="Trebuchet MS" pitchFamily="34" charset="-122"/>
+                <a:cs typeface="Trebuchet MS" pitchFamily="34" charset="-120"/>
+              </a:rPr>
+              <a:t>One of those four, opened up</a:t>
+            </a:r>
+            <a:endParaRPr lang="en-US" sz="3000" dirty="0"/>
+          </a:p>
+        </p:txBody>
+      </p:sp>
+      <p:sp>
+        <p:nvSpPr>
+          <p:cNvPr id="6" name="Shape 3"/>
+          <p:cNvSpPr/>
+          <p:nvPr/>
+        </p:nvSpPr>
+        <p:spPr>
+          <a:xfrm>
+            <a:off x="566928" y="6437376"/>
+            <a:ext cx="11055096" cy="0"/>
+          </a:xfrm>
+          <a:prstGeom prst="line">
+            <a:avLst/>
+          </a:prstGeom>
+          <a:noFill/>
+          <a:ln w="12700">
+            <a:solidFill>
+              <a:srgbClr val="D9E3EA"/>
+            </a:solidFill>
+            <a:prstDash val="solid"/>
+          </a:ln>
+        </p:spPr>
+      </p:sp>
+      <p:sp>
+        <p:nvSpPr>
+          <p:cNvPr id="7" name="Text 4"/>
+          <p:cNvSpPr/>
+          <p:nvPr/>
+        </p:nvSpPr>
+        <p:spPr>
+          <a:xfrm>
+            <a:off x="566928" y="6473952"/>
+            <a:ext cx="7315200" cy="274320"/>
+          </a:xfrm>
+          <a:prstGeom prst="rect">
+            <a:avLst/>
+          </a:prstGeom>
+          <a:noFill/>
+          <a:ln/>
+        </p:spPr>
+        <p:txBody>
+          <a:bodyPr wrap="square" lIns="0" tIns="0" rIns="0" bIns="0" rtlCol="0" anchor="ctr"/>
+          <a:lstStyle/>
+          <a:p>
+            <a:pPr indent="0" marL="0">
+              <a:buNone/>
+            </a:pPr>
+            <a:endParaRPr lang="en-US" sz="850" dirty="0"/>
+          </a:p>
+        </p:txBody>
+      </p:sp>
+      <p:sp>
+        <p:nvSpPr>
+          <p:cNvPr id="8" name="Text 5"/>
+          <p:cNvSpPr/>
+          <p:nvPr/>
+        </p:nvSpPr>
+        <p:spPr>
+          <a:xfrm>
+            <a:off x="10524744" y="6473952"/>
+            <a:ext cx="1097280" cy="274320"/>
+          </a:xfrm>
+          <a:prstGeom prst="rect">
+            <a:avLst/>
+          </a:prstGeom>
+          <a:noFill/>
+          <a:ln/>
+        </p:spPr>
+        <p:txBody>
+          <a:bodyPr wrap="square" lIns="0" tIns="0" rIns="0" bIns="0" rtlCol="0" anchor="ctr"/>
+          <a:lstStyle/>
+          <a:p>
+            <a:pPr algn="r" indent="0" marL="0">
+              <a:buNone/>
+            </a:pPr>
+            <a:r>
+              <a:rPr lang="en-US" sz="850" dirty="0">
+                <a:solidFill>
+                  <a:srgbClr val="6B7C88"/>
+                </a:solidFill>
+                <a:latin typeface="Calibri" pitchFamily="34" charset="0"/>
+                <a:ea typeface="Calibri" pitchFamily="34" charset="-122"/>
+                <a:cs typeface="Calibri" pitchFamily="34" charset="-120"/>
+              </a:rPr>
+              <a:t>8</a:t>
+            </a:r>
+            <a:endParaRPr lang="en-US" sz="850" dirty="0"/>
+          </a:p>
+        </p:txBody>
+      </p:sp>
+      <p:pic>
+        <p:nvPicPr>
+          <p:cNvPr id="9" name="Image 1" descr="/Users/nnanyelugoahukannah/Learning/Ironhack/PROJECT-Capstone-AI-Consulting/langsmith/screenshots/trace-detail-guard-fired.png">    </p:cNvPr>
+          <p:cNvPicPr>
+            <a:picLocks noChangeAspect="1"/>
+          </p:cNvPicPr>
+          <p:nvPr/>
+        </p:nvPicPr>
+        <p:blipFill>
+          <a:blip r:embed="rId2"/>
+          <a:stretch>
+            <a:fillRect/>
+          </a:stretch>
+        </p:blipFill>
+        <p:spPr>
+          <a:xfrm>
+            <a:off x="566928" y="1481328"/>
+            <a:ext cx="6964710" cy="4873752"/>
+          </a:xfrm>
+          <a:prstGeom prst="rect">
+            <a:avLst/>
+          </a:prstGeom>
+        </p:spPr>
+      </p:pic>
+      <p:sp>
+        <p:nvSpPr>
+          <p:cNvPr id="10" name="Shape 6"/>
+          <p:cNvSpPr/>
+          <p:nvPr/>
+        </p:nvSpPr>
+        <p:spPr>
+          <a:xfrm>
+            <a:off x="7824246" y="1481328"/>
+            <a:ext cx="3797778" cy="4873752"/>
+          </a:xfrm>
+          <a:prstGeom prst="rect">
+            <a:avLst/>
+          </a:prstGeom>
+          <a:solidFill>
+            <a:srgbClr val="24343F"/>
+          </a:solidFill>
+          <a:ln/>
+          <a:effectLst>
+            <a:outerShdw sx="100000" sy="100000" kx="0" ky="0" algn="bl" rotWithShape="0" blurRad="88900" dist="38100" dir="8100000">
+              <a:srgbClr val="1C2440">
+                <a:alpha val="13000"/>
+              </a:srgbClr>
+            </a:outerShdw>
+          </a:effectLst>
+        </p:spPr>
+      </p:sp>
+      <p:sp>
+        <p:nvSpPr>
+          <p:cNvPr id="11" name="Text 7"/>
+          <p:cNvSpPr/>
+          <p:nvPr/>
+        </p:nvSpPr>
+        <p:spPr>
+          <a:xfrm>
+            <a:off x="8061990" y="1700784"/>
+            <a:ext cx="3340578" cy="310896"/>
+          </a:xfrm>
+          <a:prstGeom prst="rect">
+            <a:avLst/>
+          </a:prstGeom>
+          <a:noFill/>
+          <a:ln/>
+        </p:spPr>
+        <p:txBody>
+          <a:bodyPr wrap="square" lIns="0" tIns="0" rIns="0" bIns="0" rtlCol="0" anchor="ctr"/>
+          <a:lstStyle/>
+          <a:p>
+            <a:pPr indent="0" marL="0">
+              <a:buNone/>
+            </a:pPr>
+            <a:r>
+              <a:rPr lang="en-US" sz="1100" dirty="0">
+                <a:solidFill>
+                  <a:srgbClr val="2A78D6"/>
+                </a:solidFill>
+                <a:latin typeface="Calibri" pitchFamily="34" charset="0"/>
+                <a:ea typeface="Calibri" pitchFamily="34" charset="-122"/>
+                <a:cs typeface="Calibri" pitchFamily="34" charset="-120"/>
+              </a:rPr>
+              <a:t>■ </a:t>
+            </a:r>
+            <a:pPr indent="0" marL="0">
+              <a:buNone/>
+            </a:pPr>
+            <a:r>
+              <a:rPr lang="en-US" sz="1300" b="1" dirty="0">
+                <a:solidFill>
+                  <a:srgbClr val="FFFFFF"/>
+                </a:solidFill>
+                <a:latin typeface="Calibri" pitchFamily="34" charset="0"/>
+                <a:ea typeface="Calibri" pitchFamily="34" charset="-122"/>
+                <a:cs typeface="Calibri" pitchFamily="34" charset="-120"/>
+              </a:rPr>
+              <a:t>Why this one was stopped</a:t>
+            </a:r>
+            <a:endParaRPr lang="en-US" sz="1100" dirty="0"/>
+          </a:p>
+        </p:txBody>
+      </p:sp>
+      <p:sp>
+        <p:nvSpPr>
+          <p:cNvPr id="12" name="Text 8"/>
+          <p:cNvSpPr/>
+          <p:nvPr/>
+        </p:nvSpPr>
+        <p:spPr>
+          <a:xfrm>
+            <a:off x="8061990" y="2139696"/>
+            <a:ext cx="3322290" cy="3959352"/>
+          </a:xfrm>
+          <a:prstGeom prst="rect">
+            <a:avLst/>
+          </a:prstGeom>
+          <a:noFill/>
+          <a:ln/>
+        </p:spPr>
+        <p:txBody>
+          <a:bodyPr wrap="square" rtlCol="0" anchor="t"/>
+          <a:lstStyle/>
+          <a:p>
+            <a:pPr marL="152400" indent="-152400">
+              <a:spcAft>
+                <a:spcPts val="500"/>
+              </a:spcAft>
+              <a:buSzPct val="100000"/>
+              <a:buChar char="•"/>
+            </a:pPr>
+            <a:r>
+              <a:rPr lang="en-US" sz="1250" dirty="0">
+                <a:solidFill>
+                  <a:srgbClr val="C6D8E4"/>
+                </a:solidFill>
+              </a:rPr>
+              <a:t>It was 80% confident and named a completely plausible team</a:t>
+            </a:r>
+            <a:endParaRPr lang="en-US" sz="1250" dirty="0"/>
+          </a:p>
+          <a:p>
+            <a:pPr marL="152400" indent="-152400">
+              <a:spcAft>
+                <a:spcPts val="500"/>
+              </a:spcAft>
+              <a:buSzPct val="100000"/>
+              <a:buChar char="•"/>
+            </a:pPr>
+            <a:r>
+              <a:rPr lang="en-US" sz="1250" dirty="0">
+                <a:solidFill>
+                  <a:srgbClr val="C6D8E4"/>
+                </a:solidFill>
+              </a:rPr>
+              <a:t>But the sentence it quoted was not in the complaint (evidence_is_verbatim: false)</a:t>
+            </a:r>
+            <a:endParaRPr lang="en-US" sz="1250" dirty="0"/>
+          </a:p>
+          <a:p>
+            <a:pPr marL="152400" indent="-152400">
+              <a:spcAft>
+                <a:spcPts val="500"/>
+              </a:spcAft>
+              <a:buSzPct val="100000"/>
+              <a:buChar char="•"/>
+            </a:pPr>
+            <a:r>
+              <a:rPr lang="en-US" sz="1250" dirty="0">
+                <a:solidFill>
+                  <a:srgbClr val="C6D8E4"/>
+                </a:solidFill>
+              </a:rPr>
+              <a:t>So it was stopped and sent to a person, with the reason written down</a:t>
+            </a:r>
+            <a:endParaRPr lang="en-US" sz="1250" dirty="0"/>
+          </a:p>
+          <a:p>
+            <a:pPr marL="152400" indent="-152400">
+              <a:spcAft>
+                <a:spcPts val="500"/>
+              </a:spcAft>
+              <a:buSzPct val="100000"/>
+              <a:buChar char="•"/>
+            </a:pPr>
+            <a:r>
+              <a:rPr lang="en-US" sz="1250" dirty="0">
+                <a:solidFill>
+                  <a:srgbClr val="C6D8E4"/>
+                </a:solidFill>
+              </a:rPr>
+              <a:t>This record exists for every decision — including the ones where nothing happened.</a:t>
             </a:r>
             <a:endParaRPr lang="en-US" sz="1250" dirty="0"/>
           </a:p>

--- a/presentation/round1_pitch.pptx
+++ b/presentation/round1_pitch.pptx
@@ -1461,49 +1461,50 @@
           <a:p/>
           <a:p>
             <a:r>
-              <a:t>On the right, that same decision opened up in monitoring. Sixty decisions traced, every one</a:t>
-            </a:r>
-          </a:p>
-          <a:p>
-            <a:r>
-              <a:t>on the record, including the ones where nothing happened.</a:t>
+              <a:t>On the right, that same decision opened up in monitoring.</a:t>
             </a:r>
           </a:p>
           <a:p/>
           <a:p>
             <a:r>
-              <a:t>And this is the part I'd want you to hear. Four times out of sixty, the model made up its</a:t>
-            </a:r>
-          </a:p>
-          <a:p>
-            <a:r>
-              <a:t>justification — it quoted words that weren't in the complaint at all, confidently. The</a:t>
-            </a:r>
-          </a:p>
-          <a:p>
-            <a:r>
-              <a:t>check caught every one and sent it to a person with the reason written down.</a:t>
+              <a:t>[Point at the row of squares.] That is every decision it has made — one square each, none</a:t>
+            </a:r>
+          </a:p>
+          <a:p>
+            <a:r>
+              <a:t>of them hidden. Blue, it proposed a team. Amber, it wasn't confident enough and said so.</a:t>
             </a:r>
           </a:p>
           <a:p/>
           <a:p>
             <a:r>
-              <a:t>[Point at the dark strip.] Which is why I'm not asking you to switch anything on. It picks</a:t>
-            </a:r>
-          </a:p>
-          <a:p>
-            <a:r>
-              <a:t>the right team sixty per cent of the time on this data. That is not good enough to route on</a:t>
-            </a:r>
-          </a:p>
-          <a:p>
-            <a:r>
-              <a:t>its own — so it proposes, and a person decides. That's the honest configuration until a</a:t>
-            </a:r>
-          </a:p>
-          <a:p>
-            <a:r>
-              <a:t>pilot on your data says otherwise.</a:t>
+              <a:t>The red ones are the ones I'd want you to hear about. Four times it quoted a sentence that</a:t>
+            </a:r>
+          </a:p>
+          <a:p>
+            <a:r>
+              <a:t>simply wasn't in the complaint. Confidently. The check caught every one and sent it to a</a:t>
+            </a:r>
+          </a:p>
+          <a:p>
+            <a:r>
+              <a:t>person with the reason written down.</a:t>
+            </a:r>
+          </a:p>
+          <a:p/>
+          <a:p>
+            <a:r>
+              <a:t>[Point at the dark strip, let them read it.] Which is why I am not asking you to switch</a:t>
+            </a:r>
+          </a:p>
+          <a:p>
+            <a:r>
+              <a:t>anything on today. Sixty per cent is on that strip, and I would rather you heard it from me</a:t>
+            </a:r>
+          </a:p>
+          <a:p>
+            <a:r>
+              <a:t>now than found it in month three.</a:t>
             </a:r>
           </a:p>
         </p:txBody>
@@ -1621,33 +1622,33 @@
           <a:p/>
           <a:p>
             <a:r>
-              <a:t>Running cost is seven thousand four hundred a year, of which the AI itself is twenty-nine</a:t>
-            </a:r>
-          </a:p>
-          <a:p>
-            <a:r>
-              <a:t>cents. The rest is someone accountable for watching it, and I wouldn't remove it.</a:t>
+              <a:t>[Point at the bar along the top.] That is where the running cost goes. The dark block is</a:t>
+            </a:r>
+          </a:p>
+          <a:p>
+            <a:r>
+              <a:t>someone accountable for watching it, and I wouldn't remove it. The sliver on the right is</a:t>
+            </a:r>
+          </a:p>
+          <a:p>
+            <a:r>
+              <a:t>the AI itself — twenty-nine cents a year.</a:t>
             </a:r>
           </a:p>
           <a:p/>
           <a:p>
             <a:r>
-              <a:t>Two assumptions, on the slide. The volume is the regulator's rate applied to a firm your</a:t>
-            </a:r>
-          </a:p>
-          <a:p>
-            <a:r>
-              <a:t>size, so treat the euros as an order of magnitude. And the return rests on avoiding</a:t>
-            </a:r>
-          </a:p>
-          <a:p>
-            <a:r>
-              <a:t>ombudsman referrals — four a year covers the running cost. I'm not claiming we hit it.</a:t>
-            </a:r>
-          </a:p>
-          <a:p>
-            <a:r>
-              <a:t>That's what the pilot measures.</a:t>
+              <a:t>Two assumptions, written on the slide rather than buried in an appendix. The second is the</a:t>
+            </a:r>
+          </a:p>
+          <a:p>
+            <a:r>
+              <a:t>one that matters: I am not claiming we avoid four ombudsman referrals a year. That is</a:t>
+            </a:r>
+          </a:p>
+          <a:p>
+            <a:r>
+              <a:t>precisely what the pilot is for.</a:t>
             </a:r>
           </a:p>
           <a:p/>
@@ -9479,7 +9480,7 @@
         <p:spPr>
           <a:xfrm>
             <a:off x="566928" y="1481328"/>
-            <a:ext cx="4608576" cy="3200400"/>
+            <a:ext cx="4016045" cy="2788920"/>
           </a:xfrm>
           <a:prstGeom prst="rect">
             <a:avLst/>
@@ -9502,8 +9503,8 @@
         </p:blipFill>
         <p:spPr>
           <a:xfrm>
-            <a:off x="5449824" y="1481328"/>
-            <a:ext cx="6172200" cy="3200400"/>
+            <a:off x="4857293" y="1481328"/>
+            <a:ext cx="4016045" cy="2788920"/>
           </a:xfrm>
           <a:prstGeom prst="rect">
             <a:avLst/>
@@ -9518,8 +9519,8 @@
         </p:nvSpPr>
         <p:spPr>
           <a:xfrm>
-            <a:off x="566928" y="4846320"/>
-            <a:ext cx="11055096" cy="658368"/>
+            <a:off x="566928" y="4315968"/>
+            <a:ext cx="4016045" cy="219456"/>
           </a:xfrm>
           <a:prstGeom prst="rect">
             <a:avLst/>
@@ -9528,13 +9529,1288 @@
           <a:ln/>
         </p:spPr>
         <p:txBody>
-          <a:bodyPr wrap="square" lIns="0" tIns="0" rIns="0" bIns="0" rtlCol="0" anchor="t"/>
+          <a:bodyPr wrap="square" lIns="0" tIns="0" rIns="0" bIns="0" rtlCol="0" anchor="ctr"/>
           <a:lstStyle/>
           <a:p>
-            <a:pPr indent="0" marL="0">
-              <a:lnSpc>
-                <a:spcPct val="105000"/>
-              </a:lnSpc>
+            <a:pPr algn="ctr" indent="0" marL="0">
+              <a:buNone/>
+            </a:pPr>
+            <a:r>
+              <a:rPr lang="en-US" sz="1050" dirty="0">
+                <a:solidFill>
+                  <a:srgbClr val="6B7C88"/>
+                </a:solidFill>
+                <a:latin typeface="Calibri" pitchFamily="34" charset="0"/>
+                <a:ea typeface="Calibri" pitchFamily="34" charset="-122"/>
+                <a:cs typeface="Calibri" pitchFamily="34" charset="-120"/>
+              </a:rPr>
+              <a:t>The workflow, running on one real complaint</a:t>
+            </a:r>
+            <a:endParaRPr lang="en-US" sz="1050" dirty="0"/>
+          </a:p>
+        </p:txBody>
+      </p:sp>
+      <p:sp>
+        <p:nvSpPr>
+          <p:cNvPr id="12" name="Text 7"/>
+          <p:cNvSpPr/>
+          <p:nvPr/>
+        </p:nvSpPr>
+        <p:spPr>
+          <a:xfrm>
+            <a:off x="4857293" y="4315968"/>
+            <a:ext cx="4016045" cy="219456"/>
+          </a:xfrm>
+          <a:prstGeom prst="rect">
+            <a:avLst/>
+          </a:prstGeom>
+          <a:noFill/>
+          <a:ln/>
+        </p:spPr>
+        <p:txBody>
+          <a:bodyPr wrap="square" lIns="0" tIns="0" rIns="0" bIns="0" rtlCol="0" anchor="ctr"/>
+          <a:lstStyle/>
+          <a:p>
+            <a:pPr algn="ctr" indent="0" marL="0">
+              <a:buNone/>
+            </a:pPr>
+            <a:r>
+              <a:rPr lang="en-US" sz="1050" dirty="0">
+                <a:solidFill>
+                  <a:srgbClr val="6B7C88"/>
+                </a:solidFill>
+                <a:latin typeface="Calibri" pitchFamily="34" charset="0"/>
+                <a:ea typeface="Calibri" pitchFamily="34" charset="-122"/>
+                <a:cs typeface="Calibri" pitchFamily="34" charset="-120"/>
+              </a:rPr>
+              <a:t>The same decision, opened up in monitoring</a:t>
+            </a:r>
+            <a:endParaRPr lang="en-US" sz="1050" dirty="0"/>
+          </a:p>
+        </p:txBody>
+      </p:sp>
+      <p:sp>
+        <p:nvSpPr>
+          <p:cNvPr id="13" name="Shape 8"/>
+          <p:cNvSpPr/>
+          <p:nvPr/>
+        </p:nvSpPr>
+        <p:spPr>
+          <a:xfrm>
+            <a:off x="815188" y="4654296"/>
+            <a:ext cx="146304" cy="146304"/>
+          </a:xfrm>
+          <a:prstGeom prst="rect">
+            <a:avLst/>
+          </a:prstGeom>
+          <a:solidFill>
+            <a:srgbClr val="2A78D6"/>
+          </a:solidFill>
+          <a:ln/>
+        </p:spPr>
+      </p:sp>
+      <p:sp>
+        <p:nvSpPr>
+          <p:cNvPr id="14" name="Shape 9"/>
+          <p:cNvSpPr/>
+          <p:nvPr/>
+        </p:nvSpPr>
+        <p:spPr>
+          <a:xfrm>
+            <a:off x="991667" y="4654296"/>
+            <a:ext cx="146304" cy="146304"/>
+          </a:xfrm>
+          <a:prstGeom prst="rect">
+            <a:avLst/>
+          </a:prstGeom>
+          <a:solidFill>
+            <a:srgbClr val="2A78D6"/>
+          </a:solidFill>
+          <a:ln/>
+        </p:spPr>
+      </p:sp>
+      <p:sp>
+        <p:nvSpPr>
+          <p:cNvPr id="15" name="Shape 10"/>
+          <p:cNvSpPr/>
+          <p:nvPr/>
+        </p:nvSpPr>
+        <p:spPr>
+          <a:xfrm>
+            <a:off x="1168146" y="4654296"/>
+            <a:ext cx="146304" cy="146304"/>
+          </a:xfrm>
+          <a:prstGeom prst="rect">
+            <a:avLst/>
+          </a:prstGeom>
+          <a:solidFill>
+            <a:srgbClr val="2A78D6"/>
+          </a:solidFill>
+          <a:ln/>
+        </p:spPr>
+      </p:sp>
+      <p:sp>
+        <p:nvSpPr>
+          <p:cNvPr id="16" name="Shape 11"/>
+          <p:cNvSpPr/>
+          <p:nvPr/>
+        </p:nvSpPr>
+        <p:spPr>
+          <a:xfrm>
+            <a:off x="1344625" y="4654296"/>
+            <a:ext cx="146304" cy="146304"/>
+          </a:xfrm>
+          <a:prstGeom prst="rect">
+            <a:avLst/>
+          </a:prstGeom>
+          <a:solidFill>
+            <a:srgbClr val="2A78D6"/>
+          </a:solidFill>
+          <a:ln/>
+        </p:spPr>
+      </p:sp>
+      <p:sp>
+        <p:nvSpPr>
+          <p:cNvPr id="17" name="Shape 12"/>
+          <p:cNvSpPr/>
+          <p:nvPr/>
+        </p:nvSpPr>
+        <p:spPr>
+          <a:xfrm>
+            <a:off x="1521104" y="4654296"/>
+            <a:ext cx="146304" cy="146304"/>
+          </a:xfrm>
+          <a:prstGeom prst="rect">
+            <a:avLst/>
+          </a:prstGeom>
+          <a:solidFill>
+            <a:srgbClr val="2A78D6"/>
+          </a:solidFill>
+          <a:ln/>
+        </p:spPr>
+      </p:sp>
+      <p:sp>
+        <p:nvSpPr>
+          <p:cNvPr id="18" name="Shape 13"/>
+          <p:cNvSpPr/>
+          <p:nvPr/>
+        </p:nvSpPr>
+        <p:spPr>
+          <a:xfrm>
+            <a:off x="1697584" y="4654296"/>
+            <a:ext cx="146304" cy="146304"/>
+          </a:xfrm>
+          <a:prstGeom prst="rect">
+            <a:avLst/>
+          </a:prstGeom>
+          <a:solidFill>
+            <a:srgbClr val="2A78D6"/>
+          </a:solidFill>
+          <a:ln/>
+        </p:spPr>
+      </p:sp>
+      <p:sp>
+        <p:nvSpPr>
+          <p:cNvPr id="19" name="Shape 14"/>
+          <p:cNvSpPr/>
+          <p:nvPr/>
+        </p:nvSpPr>
+        <p:spPr>
+          <a:xfrm>
+            <a:off x="1874063" y="4654296"/>
+            <a:ext cx="146304" cy="146304"/>
+          </a:xfrm>
+          <a:prstGeom prst="rect">
+            <a:avLst/>
+          </a:prstGeom>
+          <a:solidFill>
+            <a:srgbClr val="2A78D6"/>
+          </a:solidFill>
+          <a:ln/>
+        </p:spPr>
+      </p:sp>
+      <p:sp>
+        <p:nvSpPr>
+          <p:cNvPr id="20" name="Shape 15"/>
+          <p:cNvSpPr/>
+          <p:nvPr/>
+        </p:nvSpPr>
+        <p:spPr>
+          <a:xfrm>
+            <a:off x="2050542" y="4654296"/>
+            <a:ext cx="146304" cy="146304"/>
+          </a:xfrm>
+          <a:prstGeom prst="rect">
+            <a:avLst/>
+          </a:prstGeom>
+          <a:solidFill>
+            <a:srgbClr val="2A78D6"/>
+          </a:solidFill>
+          <a:ln/>
+        </p:spPr>
+      </p:sp>
+      <p:sp>
+        <p:nvSpPr>
+          <p:cNvPr id="21" name="Shape 16"/>
+          <p:cNvSpPr/>
+          <p:nvPr/>
+        </p:nvSpPr>
+        <p:spPr>
+          <a:xfrm>
+            <a:off x="2227021" y="4654296"/>
+            <a:ext cx="146304" cy="146304"/>
+          </a:xfrm>
+          <a:prstGeom prst="rect">
+            <a:avLst/>
+          </a:prstGeom>
+          <a:solidFill>
+            <a:srgbClr val="2A78D6"/>
+          </a:solidFill>
+          <a:ln/>
+        </p:spPr>
+      </p:sp>
+      <p:sp>
+        <p:nvSpPr>
+          <p:cNvPr id="22" name="Shape 17"/>
+          <p:cNvSpPr/>
+          <p:nvPr/>
+        </p:nvSpPr>
+        <p:spPr>
+          <a:xfrm>
+            <a:off x="2403500" y="4654296"/>
+            <a:ext cx="146304" cy="146304"/>
+          </a:xfrm>
+          <a:prstGeom prst="rect">
+            <a:avLst/>
+          </a:prstGeom>
+          <a:solidFill>
+            <a:srgbClr val="2A78D6"/>
+          </a:solidFill>
+          <a:ln/>
+        </p:spPr>
+      </p:sp>
+      <p:sp>
+        <p:nvSpPr>
+          <p:cNvPr id="23" name="Shape 18"/>
+          <p:cNvSpPr/>
+          <p:nvPr/>
+        </p:nvSpPr>
+        <p:spPr>
+          <a:xfrm>
+            <a:off x="2579980" y="4654296"/>
+            <a:ext cx="146304" cy="146304"/>
+          </a:xfrm>
+          <a:prstGeom prst="rect">
+            <a:avLst/>
+          </a:prstGeom>
+          <a:solidFill>
+            <a:srgbClr val="2A78D6"/>
+          </a:solidFill>
+          <a:ln/>
+        </p:spPr>
+      </p:sp>
+      <p:sp>
+        <p:nvSpPr>
+          <p:cNvPr id="24" name="Shape 19"/>
+          <p:cNvSpPr/>
+          <p:nvPr/>
+        </p:nvSpPr>
+        <p:spPr>
+          <a:xfrm>
+            <a:off x="2756459" y="4654296"/>
+            <a:ext cx="146304" cy="146304"/>
+          </a:xfrm>
+          <a:prstGeom prst="rect">
+            <a:avLst/>
+          </a:prstGeom>
+          <a:solidFill>
+            <a:srgbClr val="2A78D6"/>
+          </a:solidFill>
+          <a:ln/>
+        </p:spPr>
+      </p:sp>
+      <p:sp>
+        <p:nvSpPr>
+          <p:cNvPr id="25" name="Shape 20"/>
+          <p:cNvSpPr/>
+          <p:nvPr/>
+        </p:nvSpPr>
+        <p:spPr>
+          <a:xfrm>
+            <a:off x="2932938" y="4654296"/>
+            <a:ext cx="146304" cy="146304"/>
+          </a:xfrm>
+          <a:prstGeom prst="rect">
+            <a:avLst/>
+          </a:prstGeom>
+          <a:solidFill>
+            <a:srgbClr val="2A78D6"/>
+          </a:solidFill>
+          <a:ln/>
+        </p:spPr>
+      </p:sp>
+      <p:sp>
+        <p:nvSpPr>
+          <p:cNvPr id="26" name="Shape 21"/>
+          <p:cNvSpPr/>
+          <p:nvPr/>
+        </p:nvSpPr>
+        <p:spPr>
+          <a:xfrm>
+            <a:off x="3109417" y="4654296"/>
+            <a:ext cx="146304" cy="146304"/>
+          </a:xfrm>
+          <a:prstGeom prst="rect">
+            <a:avLst/>
+          </a:prstGeom>
+          <a:solidFill>
+            <a:srgbClr val="2A78D6"/>
+          </a:solidFill>
+          <a:ln/>
+        </p:spPr>
+      </p:sp>
+      <p:sp>
+        <p:nvSpPr>
+          <p:cNvPr id="27" name="Shape 22"/>
+          <p:cNvSpPr/>
+          <p:nvPr/>
+        </p:nvSpPr>
+        <p:spPr>
+          <a:xfrm>
+            <a:off x="3285896" y="4654296"/>
+            <a:ext cx="146304" cy="146304"/>
+          </a:xfrm>
+          <a:prstGeom prst="rect">
+            <a:avLst/>
+          </a:prstGeom>
+          <a:solidFill>
+            <a:srgbClr val="2A78D6"/>
+          </a:solidFill>
+          <a:ln/>
+        </p:spPr>
+      </p:sp>
+      <p:sp>
+        <p:nvSpPr>
+          <p:cNvPr id="28" name="Shape 23"/>
+          <p:cNvSpPr/>
+          <p:nvPr/>
+        </p:nvSpPr>
+        <p:spPr>
+          <a:xfrm>
+            <a:off x="3462376" y="4654296"/>
+            <a:ext cx="146304" cy="146304"/>
+          </a:xfrm>
+          <a:prstGeom prst="rect">
+            <a:avLst/>
+          </a:prstGeom>
+          <a:solidFill>
+            <a:srgbClr val="2A78D6"/>
+          </a:solidFill>
+          <a:ln/>
+        </p:spPr>
+      </p:sp>
+      <p:sp>
+        <p:nvSpPr>
+          <p:cNvPr id="29" name="Shape 24"/>
+          <p:cNvSpPr/>
+          <p:nvPr/>
+        </p:nvSpPr>
+        <p:spPr>
+          <a:xfrm>
+            <a:off x="3638855" y="4654296"/>
+            <a:ext cx="146304" cy="146304"/>
+          </a:xfrm>
+          <a:prstGeom prst="rect">
+            <a:avLst/>
+          </a:prstGeom>
+          <a:solidFill>
+            <a:srgbClr val="2A78D6"/>
+          </a:solidFill>
+          <a:ln/>
+        </p:spPr>
+      </p:sp>
+      <p:sp>
+        <p:nvSpPr>
+          <p:cNvPr id="30" name="Shape 25"/>
+          <p:cNvSpPr/>
+          <p:nvPr/>
+        </p:nvSpPr>
+        <p:spPr>
+          <a:xfrm>
+            <a:off x="3815334" y="4654296"/>
+            <a:ext cx="146304" cy="146304"/>
+          </a:xfrm>
+          <a:prstGeom prst="rect">
+            <a:avLst/>
+          </a:prstGeom>
+          <a:solidFill>
+            <a:srgbClr val="2A78D6"/>
+          </a:solidFill>
+          <a:ln/>
+        </p:spPr>
+      </p:sp>
+      <p:sp>
+        <p:nvSpPr>
+          <p:cNvPr id="31" name="Shape 26"/>
+          <p:cNvSpPr/>
+          <p:nvPr/>
+        </p:nvSpPr>
+        <p:spPr>
+          <a:xfrm>
+            <a:off x="3991813" y="4654296"/>
+            <a:ext cx="146304" cy="146304"/>
+          </a:xfrm>
+          <a:prstGeom prst="rect">
+            <a:avLst/>
+          </a:prstGeom>
+          <a:solidFill>
+            <a:srgbClr val="2A78D6"/>
+          </a:solidFill>
+          <a:ln/>
+        </p:spPr>
+      </p:sp>
+      <p:sp>
+        <p:nvSpPr>
+          <p:cNvPr id="32" name="Shape 27"/>
+          <p:cNvSpPr/>
+          <p:nvPr/>
+        </p:nvSpPr>
+        <p:spPr>
+          <a:xfrm>
+            <a:off x="4168292" y="4654296"/>
+            <a:ext cx="146304" cy="146304"/>
+          </a:xfrm>
+          <a:prstGeom prst="rect">
+            <a:avLst/>
+          </a:prstGeom>
+          <a:solidFill>
+            <a:srgbClr val="2A78D6"/>
+          </a:solidFill>
+          <a:ln/>
+        </p:spPr>
+      </p:sp>
+      <p:sp>
+        <p:nvSpPr>
+          <p:cNvPr id="33" name="Shape 28"/>
+          <p:cNvSpPr/>
+          <p:nvPr/>
+        </p:nvSpPr>
+        <p:spPr>
+          <a:xfrm>
+            <a:off x="4344772" y="4654296"/>
+            <a:ext cx="146304" cy="146304"/>
+          </a:xfrm>
+          <a:prstGeom prst="rect">
+            <a:avLst/>
+          </a:prstGeom>
+          <a:solidFill>
+            <a:srgbClr val="2A78D6"/>
+          </a:solidFill>
+          <a:ln/>
+        </p:spPr>
+      </p:sp>
+      <p:sp>
+        <p:nvSpPr>
+          <p:cNvPr id="34" name="Shape 29"/>
+          <p:cNvSpPr/>
+          <p:nvPr/>
+        </p:nvSpPr>
+        <p:spPr>
+          <a:xfrm>
+            <a:off x="4521251" y="4654296"/>
+            <a:ext cx="146304" cy="146304"/>
+          </a:xfrm>
+          <a:prstGeom prst="rect">
+            <a:avLst/>
+          </a:prstGeom>
+          <a:solidFill>
+            <a:srgbClr val="2A78D6"/>
+          </a:solidFill>
+          <a:ln/>
+        </p:spPr>
+      </p:sp>
+      <p:sp>
+        <p:nvSpPr>
+          <p:cNvPr id="35" name="Shape 30"/>
+          <p:cNvSpPr/>
+          <p:nvPr/>
+        </p:nvSpPr>
+        <p:spPr>
+          <a:xfrm>
+            <a:off x="4697730" y="4654296"/>
+            <a:ext cx="146304" cy="146304"/>
+          </a:xfrm>
+          <a:prstGeom prst="rect">
+            <a:avLst/>
+          </a:prstGeom>
+          <a:solidFill>
+            <a:srgbClr val="2A78D6"/>
+          </a:solidFill>
+          <a:ln/>
+        </p:spPr>
+      </p:sp>
+      <p:sp>
+        <p:nvSpPr>
+          <p:cNvPr id="36" name="Shape 31"/>
+          <p:cNvSpPr/>
+          <p:nvPr/>
+        </p:nvSpPr>
+        <p:spPr>
+          <a:xfrm>
+            <a:off x="4874209" y="4654296"/>
+            <a:ext cx="146304" cy="146304"/>
+          </a:xfrm>
+          <a:prstGeom prst="rect">
+            <a:avLst/>
+          </a:prstGeom>
+          <a:solidFill>
+            <a:srgbClr val="2A78D6"/>
+          </a:solidFill>
+          <a:ln/>
+        </p:spPr>
+      </p:sp>
+      <p:sp>
+        <p:nvSpPr>
+          <p:cNvPr id="37" name="Shape 32"/>
+          <p:cNvSpPr/>
+          <p:nvPr/>
+        </p:nvSpPr>
+        <p:spPr>
+          <a:xfrm>
+            <a:off x="5050688" y="4654296"/>
+            <a:ext cx="146304" cy="146304"/>
+          </a:xfrm>
+          <a:prstGeom prst="rect">
+            <a:avLst/>
+          </a:prstGeom>
+          <a:solidFill>
+            <a:srgbClr val="2A78D6"/>
+          </a:solidFill>
+          <a:ln/>
+        </p:spPr>
+      </p:sp>
+      <p:sp>
+        <p:nvSpPr>
+          <p:cNvPr id="38" name="Shape 33"/>
+          <p:cNvSpPr/>
+          <p:nvPr/>
+        </p:nvSpPr>
+        <p:spPr>
+          <a:xfrm>
+            <a:off x="5227168" y="4654296"/>
+            <a:ext cx="146304" cy="146304"/>
+          </a:xfrm>
+          <a:prstGeom prst="rect">
+            <a:avLst/>
+          </a:prstGeom>
+          <a:solidFill>
+            <a:srgbClr val="2A78D6"/>
+          </a:solidFill>
+          <a:ln/>
+        </p:spPr>
+      </p:sp>
+      <p:sp>
+        <p:nvSpPr>
+          <p:cNvPr id="39" name="Shape 34"/>
+          <p:cNvSpPr/>
+          <p:nvPr/>
+        </p:nvSpPr>
+        <p:spPr>
+          <a:xfrm>
+            <a:off x="5403647" y="4654296"/>
+            <a:ext cx="146304" cy="146304"/>
+          </a:xfrm>
+          <a:prstGeom prst="rect">
+            <a:avLst/>
+          </a:prstGeom>
+          <a:solidFill>
+            <a:srgbClr val="2A78D6"/>
+          </a:solidFill>
+          <a:ln/>
+        </p:spPr>
+      </p:sp>
+      <p:sp>
+        <p:nvSpPr>
+          <p:cNvPr id="40" name="Shape 35"/>
+          <p:cNvSpPr/>
+          <p:nvPr/>
+        </p:nvSpPr>
+        <p:spPr>
+          <a:xfrm>
+            <a:off x="5580126" y="4654296"/>
+            <a:ext cx="146304" cy="146304"/>
+          </a:xfrm>
+          <a:prstGeom prst="rect">
+            <a:avLst/>
+          </a:prstGeom>
+          <a:solidFill>
+            <a:srgbClr val="2A78D6"/>
+          </a:solidFill>
+          <a:ln/>
+        </p:spPr>
+      </p:sp>
+      <p:sp>
+        <p:nvSpPr>
+          <p:cNvPr id="41" name="Shape 36"/>
+          <p:cNvSpPr/>
+          <p:nvPr/>
+        </p:nvSpPr>
+        <p:spPr>
+          <a:xfrm>
+            <a:off x="5756605" y="4654296"/>
+            <a:ext cx="146304" cy="146304"/>
+          </a:xfrm>
+          <a:prstGeom prst="rect">
+            <a:avLst/>
+          </a:prstGeom>
+          <a:solidFill>
+            <a:srgbClr val="2A78D6"/>
+          </a:solidFill>
+          <a:ln/>
+        </p:spPr>
+      </p:sp>
+      <p:sp>
+        <p:nvSpPr>
+          <p:cNvPr id="42" name="Shape 37"/>
+          <p:cNvSpPr/>
+          <p:nvPr/>
+        </p:nvSpPr>
+        <p:spPr>
+          <a:xfrm>
+            <a:off x="5933084" y="4654296"/>
+            <a:ext cx="146304" cy="146304"/>
+          </a:xfrm>
+          <a:prstGeom prst="rect">
+            <a:avLst/>
+          </a:prstGeom>
+          <a:solidFill>
+            <a:srgbClr val="2A78D6"/>
+          </a:solidFill>
+          <a:ln/>
+        </p:spPr>
+      </p:sp>
+      <p:sp>
+        <p:nvSpPr>
+          <p:cNvPr id="43" name="Shape 38"/>
+          <p:cNvSpPr/>
+          <p:nvPr/>
+        </p:nvSpPr>
+        <p:spPr>
+          <a:xfrm>
+            <a:off x="6109564" y="4654296"/>
+            <a:ext cx="146304" cy="146304"/>
+          </a:xfrm>
+          <a:prstGeom prst="rect">
+            <a:avLst/>
+          </a:prstGeom>
+          <a:solidFill>
+            <a:srgbClr val="2A78D6"/>
+          </a:solidFill>
+          <a:ln/>
+        </p:spPr>
+      </p:sp>
+      <p:sp>
+        <p:nvSpPr>
+          <p:cNvPr id="44" name="Shape 39"/>
+          <p:cNvSpPr/>
+          <p:nvPr/>
+        </p:nvSpPr>
+        <p:spPr>
+          <a:xfrm>
+            <a:off x="6286043" y="4654296"/>
+            <a:ext cx="146304" cy="146304"/>
+          </a:xfrm>
+          <a:prstGeom prst="rect">
+            <a:avLst/>
+          </a:prstGeom>
+          <a:solidFill>
+            <a:srgbClr val="2A78D6"/>
+          </a:solidFill>
+          <a:ln/>
+        </p:spPr>
+      </p:sp>
+      <p:sp>
+        <p:nvSpPr>
+          <p:cNvPr id="45" name="Shape 40"/>
+          <p:cNvSpPr/>
+          <p:nvPr/>
+        </p:nvSpPr>
+        <p:spPr>
+          <a:xfrm>
+            <a:off x="6462522" y="4654296"/>
+            <a:ext cx="146304" cy="146304"/>
+          </a:xfrm>
+          <a:prstGeom prst="rect">
+            <a:avLst/>
+          </a:prstGeom>
+          <a:solidFill>
+            <a:srgbClr val="2A78D6"/>
+          </a:solidFill>
+          <a:ln/>
+        </p:spPr>
+      </p:sp>
+      <p:sp>
+        <p:nvSpPr>
+          <p:cNvPr id="46" name="Shape 41"/>
+          <p:cNvSpPr/>
+          <p:nvPr/>
+        </p:nvSpPr>
+        <p:spPr>
+          <a:xfrm>
+            <a:off x="6639001" y="4654296"/>
+            <a:ext cx="146304" cy="146304"/>
+          </a:xfrm>
+          <a:prstGeom prst="rect">
+            <a:avLst/>
+          </a:prstGeom>
+          <a:solidFill>
+            <a:srgbClr val="2A78D6"/>
+          </a:solidFill>
+          <a:ln/>
+        </p:spPr>
+      </p:sp>
+      <p:sp>
+        <p:nvSpPr>
+          <p:cNvPr id="47" name="Shape 42"/>
+          <p:cNvSpPr/>
+          <p:nvPr/>
+        </p:nvSpPr>
+        <p:spPr>
+          <a:xfrm>
+            <a:off x="6815480" y="4654296"/>
+            <a:ext cx="146304" cy="146304"/>
+          </a:xfrm>
+          <a:prstGeom prst="rect">
+            <a:avLst/>
+          </a:prstGeom>
+          <a:solidFill>
+            <a:srgbClr val="2A78D6"/>
+          </a:solidFill>
+          <a:ln/>
+        </p:spPr>
+      </p:sp>
+      <p:sp>
+        <p:nvSpPr>
+          <p:cNvPr id="48" name="Shape 43"/>
+          <p:cNvSpPr/>
+          <p:nvPr/>
+        </p:nvSpPr>
+        <p:spPr>
+          <a:xfrm>
+            <a:off x="6991960" y="4654296"/>
+            <a:ext cx="146304" cy="146304"/>
+          </a:xfrm>
+          <a:prstGeom prst="rect">
+            <a:avLst/>
+          </a:prstGeom>
+          <a:solidFill>
+            <a:srgbClr val="2A78D6"/>
+          </a:solidFill>
+          <a:ln/>
+        </p:spPr>
+      </p:sp>
+      <p:sp>
+        <p:nvSpPr>
+          <p:cNvPr id="49" name="Shape 44"/>
+          <p:cNvSpPr/>
+          <p:nvPr/>
+        </p:nvSpPr>
+        <p:spPr>
+          <a:xfrm>
+            <a:off x="7168439" y="4654296"/>
+            <a:ext cx="146304" cy="146304"/>
+          </a:xfrm>
+          <a:prstGeom prst="rect">
+            <a:avLst/>
+          </a:prstGeom>
+          <a:solidFill>
+            <a:srgbClr val="2A78D6"/>
+          </a:solidFill>
+          <a:ln/>
+        </p:spPr>
+      </p:sp>
+      <p:sp>
+        <p:nvSpPr>
+          <p:cNvPr id="50" name="Shape 45"/>
+          <p:cNvSpPr/>
+          <p:nvPr/>
+        </p:nvSpPr>
+        <p:spPr>
+          <a:xfrm>
+            <a:off x="7344918" y="4654296"/>
+            <a:ext cx="146304" cy="146304"/>
+          </a:xfrm>
+          <a:prstGeom prst="rect">
+            <a:avLst/>
+          </a:prstGeom>
+          <a:solidFill>
+            <a:srgbClr val="2A78D6"/>
+          </a:solidFill>
+          <a:ln/>
+        </p:spPr>
+      </p:sp>
+      <p:sp>
+        <p:nvSpPr>
+          <p:cNvPr id="51" name="Shape 46"/>
+          <p:cNvSpPr/>
+          <p:nvPr/>
+        </p:nvSpPr>
+        <p:spPr>
+          <a:xfrm>
+            <a:off x="7521397" y="4654296"/>
+            <a:ext cx="146304" cy="146304"/>
+          </a:xfrm>
+          <a:prstGeom prst="rect">
+            <a:avLst/>
+          </a:prstGeom>
+          <a:solidFill>
+            <a:srgbClr val="2A78D6"/>
+          </a:solidFill>
+          <a:ln/>
+        </p:spPr>
+      </p:sp>
+      <p:sp>
+        <p:nvSpPr>
+          <p:cNvPr id="52" name="Shape 47"/>
+          <p:cNvSpPr/>
+          <p:nvPr/>
+        </p:nvSpPr>
+        <p:spPr>
+          <a:xfrm>
+            <a:off x="7697876" y="4654296"/>
+            <a:ext cx="146304" cy="146304"/>
+          </a:xfrm>
+          <a:prstGeom prst="rect">
+            <a:avLst/>
+          </a:prstGeom>
+          <a:solidFill>
+            <a:srgbClr val="2A78D6"/>
+          </a:solidFill>
+          <a:ln/>
+        </p:spPr>
+      </p:sp>
+      <p:sp>
+        <p:nvSpPr>
+          <p:cNvPr id="53" name="Shape 48"/>
+          <p:cNvSpPr/>
+          <p:nvPr/>
+        </p:nvSpPr>
+        <p:spPr>
+          <a:xfrm>
+            <a:off x="7874356" y="4654296"/>
+            <a:ext cx="146304" cy="146304"/>
+          </a:xfrm>
+          <a:prstGeom prst="rect">
+            <a:avLst/>
+          </a:prstGeom>
+          <a:solidFill>
+            <a:srgbClr val="2A78D6"/>
+          </a:solidFill>
+          <a:ln/>
+        </p:spPr>
+      </p:sp>
+      <p:sp>
+        <p:nvSpPr>
+          <p:cNvPr id="54" name="Shape 49"/>
+          <p:cNvSpPr/>
+          <p:nvPr/>
+        </p:nvSpPr>
+        <p:spPr>
+          <a:xfrm>
+            <a:off x="8050835" y="4654296"/>
+            <a:ext cx="146304" cy="146304"/>
+          </a:xfrm>
+          <a:prstGeom prst="rect">
+            <a:avLst/>
+          </a:prstGeom>
+          <a:solidFill>
+            <a:srgbClr val="2A78D6"/>
+          </a:solidFill>
+          <a:ln/>
+        </p:spPr>
+      </p:sp>
+      <p:sp>
+        <p:nvSpPr>
+          <p:cNvPr id="55" name="Shape 50"/>
+          <p:cNvSpPr/>
+          <p:nvPr/>
+        </p:nvSpPr>
+        <p:spPr>
+          <a:xfrm>
+            <a:off x="8227314" y="4654296"/>
+            <a:ext cx="146304" cy="146304"/>
+          </a:xfrm>
+          <a:prstGeom prst="rect">
+            <a:avLst/>
+          </a:prstGeom>
+          <a:solidFill>
+            <a:srgbClr val="2A78D6"/>
+          </a:solidFill>
+          <a:ln/>
+        </p:spPr>
+      </p:sp>
+      <p:sp>
+        <p:nvSpPr>
+          <p:cNvPr id="56" name="Shape 51"/>
+          <p:cNvSpPr/>
+          <p:nvPr/>
+        </p:nvSpPr>
+        <p:spPr>
+          <a:xfrm>
+            <a:off x="8403793" y="4654296"/>
+            <a:ext cx="146304" cy="146304"/>
+          </a:xfrm>
+          <a:prstGeom prst="rect">
+            <a:avLst/>
+          </a:prstGeom>
+          <a:solidFill>
+            <a:srgbClr val="2A78D6"/>
+          </a:solidFill>
+          <a:ln/>
+        </p:spPr>
+      </p:sp>
+      <p:sp>
+        <p:nvSpPr>
+          <p:cNvPr id="57" name="Shape 52"/>
+          <p:cNvSpPr/>
+          <p:nvPr/>
+        </p:nvSpPr>
+        <p:spPr>
+          <a:xfrm>
+            <a:off x="8580272" y="4654296"/>
+            <a:ext cx="146304" cy="146304"/>
+          </a:xfrm>
+          <a:prstGeom prst="rect">
+            <a:avLst/>
+          </a:prstGeom>
+          <a:solidFill>
+            <a:srgbClr val="2A78D6"/>
+          </a:solidFill>
+          <a:ln/>
+        </p:spPr>
+      </p:sp>
+      <p:sp>
+        <p:nvSpPr>
+          <p:cNvPr id="58" name="Shape 53"/>
+          <p:cNvSpPr/>
+          <p:nvPr/>
+        </p:nvSpPr>
+        <p:spPr>
+          <a:xfrm>
+            <a:off x="8756752" y="4654296"/>
+            <a:ext cx="146304" cy="146304"/>
+          </a:xfrm>
+          <a:prstGeom prst="rect">
+            <a:avLst/>
+          </a:prstGeom>
+          <a:solidFill>
+            <a:srgbClr val="2A78D6"/>
+          </a:solidFill>
+          <a:ln/>
+        </p:spPr>
+      </p:sp>
+      <p:sp>
+        <p:nvSpPr>
+          <p:cNvPr id="59" name="Shape 54"/>
+          <p:cNvSpPr/>
+          <p:nvPr/>
+        </p:nvSpPr>
+        <p:spPr>
+          <a:xfrm>
+            <a:off x="8933231" y="4654296"/>
+            <a:ext cx="146304" cy="146304"/>
+          </a:xfrm>
+          <a:prstGeom prst="rect">
+            <a:avLst/>
+          </a:prstGeom>
+          <a:solidFill>
+            <a:srgbClr val="2A78D6"/>
+          </a:solidFill>
+          <a:ln/>
+        </p:spPr>
+      </p:sp>
+      <p:sp>
+        <p:nvSpPr>
+          <p:cNvPr id="60" name="Shape 55"/>
+          <p:cNvSpPr/>
+          <p:nvPr/>
+        </p:nvSpPr>
+        <p:spPr>
+          <a:xfrm>
+            <a:off x="9109710" y="4654296"/>
+            <a:ext cx="146304" cy="146304"/>
+          </a:xfrm>
+          <a:prstGeom prst="rect">
+            <a:avLst/>
+          </a:prstGeom>
+          <a:solidFill>
+            <a:srgbClr val="2A78D6"/>
+          </a:solidFill>
+          <a:ln/>
+        </p:spPr>
+      </p:sp>
+      <p:sp>
+        <p:nvSpPr>
+          <p:cNvPr id="61" name="Shape 56"/>
+          <p:cNvSpPr/>
+          <p:nvPr/>
+        </p:nvSpPr>
+        <p:spPr>
+          <a:xfrm>
+            <a:off x="9286189" y="4654296"/>
+            <a:ext cx="146304" cy="146304"/>
+          </a:xfrm>
+          <a:prstGeom prst="rect">
+            <a:avLst/>
+          </a:prstGeom>
+          <a:solidFill>
+            <a:srgbClr val="2A78D6"/>
+          </a:solidFill>
+          <a:ln/>
+        </p:spPr>
+      </p:sp>
+      <p:sp>
+        <p:nvSpPr>
+          <p:cNvPr id="62" name="Shape 57"/>
+          <p:cNvSpPr/>
+          <p:nvPr/>
+        </p:nvSpPr>
+        <p:spPr>
+          <a:xfrm>
+            <a:off x="9462668" y="4654296"/>
+            <a:ext cx="146304" cy="146304"/>
+          </a:xfrm>
+          <a:prstGeom prst="rect">
+            <a:avLst/>
+          </a:prstGeom>
+          <a:solidFill>
+            <a:srgbClr val="2A78D6"/>
+          </a:solidFill>
+          <a:ln/>
+        </p:spPr>
+      </p:sp>
+      <p:sp>
+        <p:nvSpPr>
+          <p:cNvPr id="63" name="Shape 58"/>
+          <p:cNvSpPr/>
+          <p:nvPr/>
+        </p:nvSpPr>
+        <p:spPr>
+          <a:xfrm>
+            <a:off x="9639148" y="4654296"/>
+            <a:ext cx="146304" cy="146304"/>
+          </a:xfrm>
+          <a:prstGeom prst="rect">
+            <a:avLst/>
+          </a:prstGeom>
+          <a:solidFill>
+            <a:srgbClr val="2A78D6"/>
+          </a:solidFill>
+          <a:ln/>
+        </p:spPr>
+      </p:sp>
+      <p:sp>
+        <p:nvSpPr>
+          <p:cNvPr id="64" name="Shape 59"/>
+          <p:cNvSpPr/>
+          <p:nvPr/>
+        </p:nvSpPr>
+        <p:spPr>
+          <a:xfrm>
+            <a:off x="9815627" y="4654296"/>
+            <a:ext cx="146304" cy="146304"/>
+          </a:xfrm>
+          <a:prstGeom prst="rect">
+            <a:avLst/>
+          </a:prstGeom>
+          <a:solidFill>
+            <a:srgbClr val="2A78D6"/>
+          </a:solidFill>
+          <a:ln/>
+        </p:spPr>
+      </p:sp>
+      <p:sp>
+        <p:nvSpPr>
+          <p:cNvPr id="65" name="Shape 60"/>
+          <p:cNvSpPr/>
+          <p:nvPr/>
+        </p:nvSpPr>
+        <p:spPr>
+          <a:xfrm>
+            <a:off x="9992106" y="4654296"/>
+            <a:ext cx="146304" cy="146304"/>
+          </a:xfrm>
+          <a:prstGeom prst="rect">
+            <a:avLst/>
+          </a:prstGeom>
+          <a:solidFill>
+            <a:srgbClr val="FAB219"/>
+          </a:solidFill>
+          <a:ln/>
+        </p:spPr>
+      </p:sp>
+      <p:sp>
+        <p:nvSpPr>
+          <p:cNvPr id="66" name="Shape 61"/>
+          <p:cNvSpPr/>
+          <p:nvPr/>
+        </p:nvSpPr>
+        <p:spPr>
+          <a:xfrm>
+            <a:off x="10168585" y="4654296"/>
+            <a:ext cx="146304" cy="146304"/>
+          </a:xfrm>
+          <a:prstGeom prst="rect">
+            <a:avLst/>
+          </a:prstGeom>
+          <a:solidFill>
+            <a:srgbClr val="FAB219"/>
+          </a:solidFill>
+          <a:ln/>
+        </p:spPr>
+      </p:sp>
+      <p:sp>
+        <p:nvSpPr>
+          <p:cNvPr id="67" name="Shape 62"/>
+          <p:cNvSpPr/>
+          <p:nvPr/>
+        </p:nvSpPr>
+        <p:spPr>
+          <a:xfrm>
+            <a:off x="10345064" y="4654296"/>
+            <a:ext cx="146304" cy="146304"/>
+          </a:xfrm>
+          <a:prstGeom prst="rect">
+            <a:avLst/>
+          </a:prstGeom>
+          <a:solidFill>
+            <a:srgbClr val="FAB219"/>
+          </a:solidFill>
+          <a:ln/>
+        </p:spPr>
+      </p:sp>
+      <p:sp>
+        <p:nvSpPr>
+          <p:cNvPr id="68" name="Shape 63"/>
+          <p:cNvSpPr/>
+          <p:nvPr/>
+        </p:nvSpPr>
+        <p:spPr>
+          <a:xfrm>
+            <a:off x="10521544" y="4654296"/>
+            <a:ext cx="146304" cy="146304"/>
+          </a:xfrm>
+          <a:prstGeom prst="rect">
+            <a:avLst/>
+          </a:prstGeom>
+          <a:solidFill>
+            <a:srgbClr val="FAB219"/>
+          </a:solidFill>
+          <a:ln/>
+        </p:spPr>
+      </p:sp>
+      <p:sp>
+        <p:nvSpPr>
+          <p:cNvPr id="69" name="Shape 64"/>
+          <p:cNvSpPr/>
+          <p:nvPr/>
+        </p:nvSpPr>
+        <p:spPr>
+          <a:xfrm>
+            <a:off x="10698023" y="4654296"/>
+            <a:ext cx="146304" cy="146304"/>
+          </a:xfrm>
+          <a:prstGeom prst="rect">
+            <a:avLst/>
+          </a:prstGeom>
+          <a:solidFill>
+            <a:srgbClr val="D03B3B"/>
+          </a:solidFill>
+          <a:ln/>
+        </p:spPr>
+      </p:sp>
+      <p:sp>
+        <p:nvSpPr>
+          <p:cNvPr id="70" name="Shape 65"/>
+          <p:cNvSpPr/>
+          <p:nvPr/>
+        </p:nvSpPr>
+        <p:spPr>
+          <a:xfrm>
+            <a:off x="10874502" y="4654296"/>
+            <a:ext cx="146304" cy="146304"/>
+          </a:xfrm>
+          <a:prstGeom prst="rect">
+            <a:avLst/>
+          </a:prstGeom>
+          <a:solidFill>
+            <a:srgbClr val="D03B3B"/>
+          </a:solidFill>
+          <a:ln/>
+        </p:spPr>
+      </p:sp>
+      <p:sp>
+        <p:nvSpPr>
+          <p:cNvPr id="71" name="Shape 66"/>
+          <p:cNvSpPr/>
+          <p:nvPr/>
+        </p:nvSpPr>
+        <p:spPr>
+          <a:xfrm>
+            <a:off x="11050981" y="4654296"/>
+            <a:ext cx="146304" cy="146304"/>
+          </a:xfrm>
+          <a:prstGeom prst="rect">
+            <a:avLst/>
+          </a:prstGeom>
+          <a:solidFill>
+            <a:srgbClr val="D03B3B"/>
+          </a:solidFill>
+          <a:ln/>
+        </p:spPr>
+      </p:sp>
+      <p:sp>
+        <p:nvSpPr>
+          <p:cNvPr id="72" name="Shape 67"/>
+          <p:cNvSpPr/>
+          <p:nvPr/>
+        </p:nvSpPr>
+        <p:spPr>
+          <a:xfrm>
+            <a:off x="11227460" y="4654296"/>
+            <a:ext cx="146304" cy="146304"/>
+          </a:xfrm>
+          <a:prstGeom prst="rect">
+            <a:avLst/>
+          </a:prstGeom>
+          <a:solidFill>
+            <a:srgbClr val="D03B3B"/>
+          </a:solidFill>
+          <a:ln/>
+        </p:spPr>
+      </p:sp>
+      <p:sp>
+        <p:nvSpPr>
+          <p:cNvPr id="73" name="Text 68"/>
+          <p:cNvSpPr/>
+          <p:nvPr/>
+        </p:nvSpPr>
+        <p:spPr>
+          <a:xfrm>
+            <a:off x="566928" y="4892040"/>
+            <a:ext cx="11055096" cy="274320"/>
+          </a:xfrm>
+          <a:prstGeom prst="rect">
+            <a:avLst/>
+          </a:prstGeom>
+          <a:noFill/>
+          <a:ln/>
+        </p:spPr>
+        <p:txBody>
+          <a:bodyPr wrap="square" lIns="0" tIns="0" rIns="0" bIns="0" rtlCol="0" anchor="ctr"/>
+          <a:lstStyle/>
+          <a:p>
+            <a:pPr algn="ctr" indent="0" marL="0">
               <a:buNone/>
             </a:pPr>
             <a:r>
@@ -9543,12 +10819,20 @@
                   <a:srgbClr val="1B2730"/>
                 </a:solidFill>
               </a:rPr>
-              <a:t>LEFT — the workflow, running on a real complaint.</a:t>
-            </a:r>
-            <a:pPr indent="0" marL="0">
-              <a:lnSpc>
-                <a:spcPct val="105000"/>
-              </a:lnSpc>
+              <a:t>60 decisions traced.   </a:t>
+            </a:r>
+            <a:pPr algn="ctr" indent="0" marL="0">
+              <a:buNone/>
+            </a:pPr>
+            <a:r>
+              <a:rPr lang="en-US" sz="1200" dirty="0">
+                <a:solidFill>
+                  <a:srgbClr val="2A78D6"/>
+                </a:solidFill>
+              </a:rPr>
+              <a:t>■ </a:t>
+            </a:r>
+            <a:pPr algn="ctr" indent="0" marL="0">
               <a:buNone/>
             </a:pPr>
             <a:r>
@@ -9557,27 +10841,20 @@
                   <a:srgbClr val="1B2730"/>
                 </a:solidFill>
               </a:rPr>
-              <a:t>  Green ticks: every step executed. It proposed Disputes and fraud, quoting the customer's own words — and a person still decides.
-</a:t>
-            </a:r>
-            <a:pPr indent="0" marL="0">
-              <a:lnSpc>
-                <a:spcPct val="105000"/>
-              </a:lnSpc>
+              <a:t>52 proposed a team    </a:t>
+            </a:r>
+            <a:pPr algn="ctr" indent="0" marL="0">
               <a:buNone/>
             </a:pPr>
             <a:r>
-              <a:rPr lang="en-US" sz="1150" b="1" dirty="0">
+              <a:rPr lang="en-US" sz="1200" dirty="0">
                 <a:solidFill>
-                  <a:srgbClr val="1B2730"/>
+                  <a:srgbClr val="FAB219"/>
                 </a:solidFill>
               </a:rPr>
-              <a:t>RIGHT — the same decision, opened up in monitoring.</a:t>
-            </a:r>
-            <a:pPr indent="0" marL="0">
-              <a:lnSpc>
-                <a:spcPct val="105000"/>
-              </a:lnSpc>
+              <a:t>■ </a:t>
+            </a:r>
+            <a:pPr algn="ctr" indent="0" marL="0">
               <a:buNone/>
             </a:pPr>
             <a:r>
@@ -9586,7 +10863,29 @@
                   <a:srgbClr val="1B2730"/>
                 </a:solidFill>
               </a:rPr>
-              <a:t>  60 decisions traced. Four times the model invented its quote; the check caught every one and sent it to a person with the reason.</a:t>
+              <a:t>4 stopped, not confident enough    </a:t>
+            </a:r>
+            <a:pPr algn="ctr" indent="0" marL="0">
+              <a:buNone/>
+            </a:pPr>
+            <a:r>
+              <a:rPr lang="en-US" sz="1200" dirty="0">
+                <a:solidFill>
+                  <a:srgbClr val="D03B3B"/>
+                </a:solidFill>
+              </a:rPr>
+              <a:t>■ </a:t>
+            </a:r>
+            <a:pPr algn="ctr" indent="0" marL="0">
+              <a:buNone/>
+            </a:pPr>
+            <a:r>
+              <a:rPr lang="en-US" sz="1150" dirty="0">
+                <a:solidFill>
+                  <a:srgbClr val="1B2730"/>
+                </a:solidFill>
+              </a:rPr>
+              <a:t>4 stopped, quoted a sentence that was not there</a:t>
             </a:r>
             <a:endParaRPr lang="en-US" sz="1150" dirty="0"/>
           </a:p>
@@ -9594,13 +10893,13 @@
       </p:sp>
       <p:sp>
         <p:nvSpPr>
-          <p:cNvPr id="12" name="Shape 7"/>
-          <p:cNvSpPr/>
-          <p:nvPr/>
-        </p:nvSpPr>
-        <p:spPr>
-          <a:xfrm>
-            <a:off x="566928" y="5577840"/>
+          <p:cNvPr id="74" name="Shape 69"/>
+          <p:cNvSpPr/>
+          <p:nvPr/>
+        </p:nvSpPr>
+        <p:spPr>
+          <a:xfrm>
+            <a:off x="566928" y="5257800"/>
             <a:ext cx="11055096" cy="786384"/>
           </a:xfrm>
           <a:prstGeom prst="rect">
@@ -9614,13 +10913,13 @@
       </p:sp>
       <p:sp>
         <p:nvSpPr>
-          <p:cNvPr id="13" name="Shape 8"/>
-          <p:cNvSpPr/>
-          <p:nvPr/>
-        </p:nvSpPr>
-        <p:spPr>
-          <a:xfrm>
-            <a:off x="566928" y="5577840"/>
+          <p:cNvPr id="75" name="Shape 70"/>
+          <p:cNvSpPr/>
+          <p:nvPr/>
+        </p:nvSpPr>
+        <p:spPr>
+          <a:xfrm>
+            <a:off x="566928" y="5257800"/>
             <a:ext cx="82296" cy="786384"/>
           </a:xfrm>
           <a:prstGeom prst="rect">
@@ -9634,13 +10933,13 @@
       </p:sp>
       <p:sp>
         <p:nvSpPr>
-          <p:cNvPr id="14" name="Text 9"/>
-          <p:cNvSpPr/>
-          <p:nvPr/>
-        </p:nvSpPr>
-        <p:spPr>
-          <a:xfrm>
-            <a:off x="822960" y="5577840"/>
+          <p:cNvPr id="76" name="Text 71"/>
+          <p:cNvSpPr/>
+          <p:nvPr/>
+        </p:nvSpPr>
+        <p:spPr>
+          <a:xfrm>
+            <a:off x="822960" y="5257800"/>
             <a:ext cx="10597896" cy="786384"/>
           </a:xfrm>
           <a:prstGeom prst="rect">
@@ -9847,99 +11146,6 @@
         </p:nvSpPr>
         <p:spPr>
           <a:xfrm>
-            <a:off x="566928" y="1481328"/>
-            <a:ext cx="11055096" cy="676656"/>
-          </a:xfrm>
-          <a:prstGeom prst="rect">
-            <a:avLst/>
-          </a:prstGeom>
-          <a:solidFill>
-            <a:srgbClr val="EFF5F9"/>
-          </a:solidFill>
-          <a:ln/>
-        </p:spPr>
-      </p:sp>
-      <p:sp>
-        <p:nvSpPr>
-          <p:cNvPr id="7" name="Shape 4"/>
-          <p:cNvSpPr/>
-          <p:nvPr/>
-        </p:nvSpPr>
-        <p:spPr>
-          <a:xfrm>
-            <a:off x="566928" y="1481328"/>
-            <a:ext cx="82296" cy="676656"/>
-          </a:xfrm>
-          <a:prstGeom prst="rect">
-            <a:avLst/>
-          </a:prstGeom>
-          <a:solidFill>
-            <a:srgbClr val="2A78D6"/>
-          </a:solidFill>
-          <a:ln/>
-        </p:spPr>
-      </p:sp>
-      <p:sp>
-        <p:nvSpPr>
-          <p:cNvPr id="8" name="Text 5"/>
-          <p:cNvSpPr/>
-          <p:nvPr/>
-        </p:nvSpPr>
-        <p:spPr>
-          <a:xfrm>
-            <a:off x="822960" y="1481328"/>
-            <a:ext cx="10597896" cy="676656"/>
-          </a:xfrm>
-          <a:prstGeom prst="rect">
-            <a:avLst/>
-          </a:prstGeom>
-          <a:noFill/>
-          <a:ln/>
-        </p:spPr>
-        <p:txBody>
-          <a:bodyPr wrap="square" lIns="0" tIns="0" rIns="0" bIns="0" rtlCol="0" anchor="ctr"/>
-          <a:lstStyle/>
-          <a:p>
-            <a:pPr indent="0" marL="0">
-              <a:buNone/>
-            </a:pPr>
-            <a:r>
-              <a:rPr lang="en-US" sz="1050" b="1" spc="100" kern="0" dirty="0">
-                <a:solidFill>
-                  <a:srgbClr val="2A78D6"/>
-                </a:solidFill>
-                <a:latin typeface="Calibri" pitchFamily="34" charset="0"/>
-                <a:ea typeface="Calibri" pitchFamily="34" charset="-122"/>
-                <a:cs typeface="Calibri" pitchFamily="34" charset="-120"/>
-              </a:rPr>
-              <a:t>TAKEAWAY   </a:t>
-            </a:r>
-            <a:pPr indent="0" marL="0">
-              <a:buNone/>
-            </a:pPr>
-            <a:r>
-              <a:rPr lang="en-US" sz="1300" dirty="0">
-                <a:solidFill>
-                  <a:srgbClr val="1B2730"/>
-                </a:solidFill>
-                <a:latin typeface="Calibri" pitchFamily="34" charset="0"/>
-                <a:ea typeface="Calibri" pitchFamily="34" charset="-122"/>
-                <a:cs typeface="Calibri" pitchFamily="34" charset="-120"/>
-              </a:rPr>
-              <a:t>Running cost is €7,400 a year — of which the AI itself is €0.29. The rest is human oversight.</a:t>
-            </a:r>
-            <a:endParaRPr lang="en-US" sz="1050" dirty="0"/>
-          </a:p>
-        </p:txBody>
-      </p:sp>
-      <p:sp>
-        <p:nvSpPr>
-          <p:cNvPr id="9" name="Shape 6"/>
-          <p:cNvSpPr/>
-          <p:nvPr/>
-        </p:nvSpPr>
-        <p:spPr>
-          <a:xfrm>
             <a:off x="566928" y="6437376"/>
             <a:ext cx="11055096" cy="0"/>
           </a:xfrm>
@@ -9957,7 +11163,7 @@
       </p:sp>
       <p:sp>
         <p:nvSpPr>
-          <p:cNvPr id="10" name="Text 7"/>
+          <p:cNvPr id="7" name="Text 4"/>
           <p:cNvSpPr/>
           <p:nvPr/>
         </p:nvSpPr>
@@ -9985,7 +11191,7 @@
       </p:sp>
       <p:sp>
         <p:nvSpPr>
-          <p:cNvPr id="11" name="Text 8"/>
+          <p:cNvPr id="8" name="Text 5"/>
           <p:cNvSpPr/>
           <p:nvPr/>
         </p:nvSpPr>
@@ -10024,13 +11230,229 @@
       </p:sp>
       <p:sp>
         <p:nvSpPr>
-          <p:cNvPr id="12" name="Shape 9"/>
-          <p:cNvSpPr/>
-          <p:nvPr/>
-        </p:nvSpPr>
-        <p:spPr>
-          <a:xfrm>
-            <a:off x="2348484" y="2779776"/>
+          <p:cNvPr id="9" name="Shape 6"/>
+          <p:cNvSpPr/>
+          <p:nvPr/>
+        </p:nvSpPr>
+        <p:spPr>
+          <a:xfrm>
+            <a:off x="566928" y="1481328"/>
+            <a:ext cx="8366019" cy="384048"/>
+          </a:xfrm>
+          <a:prstGeom prst="rect">
+            <a:avLst/>
+          </a:prstGeom>
+          <a:solidFill>
+            <a:srgbClr val="24343F"/>
+          </a:solidFill>
+          <a:ln/>
+        </p:spPr>
+      </p:sp>
+      <p:sp>
+        <p:nvSpPr>
+          <p:cNvPr id="10" name="Shape 7"/>
+          <p:cNvSpPr/>
+          <p:nvPr/>
+        </p:nvSpPr>
+        <p:spPr>
+          <a:xfrm>
+            <a:off x="8951235" y="1481328"/>
+            <a:ext cx="2670789" cy="384048"/>
+          </a:xfrm>
+          <a:prstGeom prst="rect">
+            <a:avLst/>
+          </a:prstGeom>
+          <a:solidFill>
+            <a:srgbClr val="445A69"/>
+          </a:solidFill>
+          <a:ln/>
+        </p:spPr>
+      </p:sp>
+      <p:sp>
+        <p:nvSpPr>
+          <p:cNvPr id="11" name="Shape 8"/>
+          <p:cNvSpPr/>
+          <p:nvPr/>
+        </p:nvSpPr>
+        <p:spPr>
+          <a:xfrm>
+            <a:off x="11585448" y="1481328"/>
+            <a:ext cx="36576" cy="384048"/>
+          </a:xfrm>
+          <a:prstGeom prst="rect">
+            <a:avLst/>
+          </a:prstGeom>
+          <a:solidFill>
+            <a:srgbClr val="2A78D6"/>
+          </a:solidFill>
+          <a:ln/>
+        </p:spPr>
+      </p:sp>
+      <p:sp>
+        <p:nvSpPr>
+          <p:cNvPr id="12" name="Text 9"/>
+          <p:cNvSpPr/>
+          <p:nvPr/>
+        </p:nvSpPr>
+        <p:spPr>
+          <a:xfrm>
+            <a:off x="694944" y="1481328"/>
+            <a:ext cx="8091699" cy="384048"/>
+          </a:xfrm>
+          <a:prstGeom prst="rect">
+            <a:avLst/>
+          </a:prstGeom>
+          <a:noFill/>
+          <a:ln/>
+        </p:spPr>
+        <p:txBody>
+          <a:bodyPr wrap="square" lIns="0" tIns="0" rIns="0" bIns="0" rtlCol="0" anchor="ctr"/>
+          <a:lstStyle/>
+          <a:p>
+            <a:pPr indent="0" marL="0">
+              <a:buNone/>
+            </a:pPr>
+            <a:r>
+              <a:rPr lang="en-US" sz="1200" b="1" dirty="0">
+                <a:solidFill>
+                  <a:srgbClr val="FFFFFF"/>
+                </a:solidFill>
+                <a:latin typeface="Calibri" pitchFamily="34" charset="0"/>
+                <a:ea typeface="Calibri" pitchFamily="34" charset="-122"/>
+                <a:cs typeface="Calibri" pitchFamily="34" charset="-120"/>
+              </a:rPr>
+              <a:t>Someone accountable for watching it  —  €5,600</a:t>
+            </a:r>
+            <a:endParaRPr lang="en-US" sz="1200" dirty="0"/>
+          </a:p>
+        </p:txBody>
+      </p:sp>
+      <p:sp>
+        <p:nvSpPr>
+          <p:cNvPr id="13" name="Text 10"/>
+          <p:cNvSpPr/>
+          <p:nvPr/>
+        </p:nvSpPr>
+        <p:spPr>
+          <a:xfrm>
+            <a:off x="9060963" y="1481328"/>
+            <a:ext cx="2414757" cy="384048"/>
+          </a:xfrm>
+          <a:prstGeom prst="rect">
+            <a:avLst/>
+          </a:prstGeom>
+          <a:noFill/>
+          <a:ln/>
+        </p:spPr>
+        <p:txBody>
+          <a:bodyPr wrap="square" lIns="0" tIns="0" rIns="0" bIns="0" rtlCol="0" anchor="ctr"/>
+          <a:lstStyle/>
+          <a:p>
+            <a:pPr indent="0" marL="0">
+              <a:buNone/>
+            </a:pPr>
+            <a:r>
+              <a:rPr lang="en-US" sz="1150" dirty="0">
+                <a:solidFill>
+                  <a:srgbClr val="FFFFFF"/>
+                </a:solidFill>
+                <a:latin typeface="Calibri" pitchFamily="34" charset="0"/>
+                <a:ea typeface="Calibri" pitchFamily="34" charset="-122"/>
+                <a:cs typeface="Calibri" pitchFamily="34" charset="-120"/>
+              </a:rPr>
+              <a:t>Platform  €1,800</a:t>
+            </a:r>
+            <a:endParaRPr lang="en-US" sz="1150" dirty="0"/>
+          </a:p>
+        </p:txBody>
+      </p:sp>
+      <p:sp>
+        <p:nvSpPr>
+          <p:cNvPr id="14" name="Text 11"/>
+          <p:cNvSpPr/>
+          <p:nvPr/>
+        </p:nvSpPr>
+        <p:spPr>
+          <a:xfrm>
+            <a:off x="566928" y="1911096"/>
+            <a:ext cx="8311896" cy="237744"/>
+          </a:xfrm>
+          <a:prstGeom prst="rect">
+            <a:avLst/>
+          </a:prstGeom>
+          <a:noFill/>
+          <a:ln/>
+        </p:spPr>
+        <p:txBody>
+          <a:bodyPr wrap="square" lIns="0" tIns="0" rIns="0" bIns="0" rtlCol="0" anchor="ctr"/>
+          <a:lstStyle/>
+          <a:p>
+            <a:pPr indent="0" marL="0">
+              <a:buNone/>
+            </a:pPr>
+            <a:r>
+              <a:rPr lang="en-US" sz="1100" dirty="0">
+                <a:solidFill>
+                  <a:srgbClr val="6B7C88"/>
+                </a:solidFill>
+                <a:latin typeface="Calibri" pitchFamily="34" charset="0"/>
+                <a:ea typeface="Calibri" pitchFamily="34" charset="-122"/>
+                <a:cs typeface="Calibri" pitchFamily="34" charset="-120"/>
+              </a:rPr>
+              <a:t>€7,400 a year to run</a:t>
+            </a:r>
+            <a:endParaRPr lang="en-US" sz="1100" dirty="0"/>
+          </a:p>
+        </p:txBody>
+      </p:sp>
+      <p:sp>
+        <p:nvSpPr>
+          <p:cNvPr id="15" name="Text 12"/>
+          <p:cNvSpPr/>
+          <p:nvPr/>
+        </p:nvSpPr>
+        <p:spPr>
+          <a:xfrm>
+            <a:off x="8878824" y="1911096"/>
+            <a:ext cx="2743200" cy="237744"/>
+          </a:xfrm>
+          <a:prstGeom prst="rect">
+            <a:avLst/>
+          </a:prstGeom>
+          <a:noFill/>
+          <a:ln/>
+        </p:spPr>
+        <p:txBody>
+          <a:bodyPr wrap="square" lIns="0" tIns="0" rIns="0" bIns="0" rtlCol="0" anchor="ctr"/>
+          <a:lstStyle/>
+          <a:p>
+            <a:pPr algn="r" indent="0" marL="0">
+              <a:buNone/>
+            </a:pPr>
+            <a:r>
+              <a:rPr lang="en-US" sz="1100" b="1" dirty="0">
+                <a:solidFill>
+                  <a:srgbClr val="2A78D6"/>
+                </a:solidFill>
+                <a:latin typeface="Calibri" pitchFamily="34" charset="0"/>
+                <a:ea typeface="Calibri" pitchFamily="34" charset="-122"/>
+                <a:cs typeface="Calibri" pitchFamily="34" charset="-120"/>
+              </a:rPr>
+              <a:t>▲ the AI itself — €0.29 a year</a:t>
+            </a:r>
+            <a:endParaRPr lang="en-US" sz="1100" dirty="0"/>
+          </a:p>
+        </p:txBody>
+      </p:sp>
+      <p:sp>
+        <p:nvSpPr>
+          <p:cNvPr id="16" name="Shape 13"/>
+          <p:cNvSpPr/>
+          <p:nvPr/>
+        </p:nvSpPr>
+        <p:spPr>
+          <a:xfrm>
+            <a:off x="2348484" y="2706624"/>
             <a:ext cx="7491984" cy="0"/>
           </a:xfrm>
           <a:prstGeom prst="line">
@@ -10047,13 +11469,13 @@
       </p:sp>
       <p:sp>
         <p:nvSpPr>
-          <p:cNvPr id="13" name="Shape 10"/>
-          <p:cNvSpPr/>
-          <p:nvPr/>
-        </p:nvSpPr>
-        <p:spPr>
-          <a:xfrm>
-            <a:off x="1964436" y="2395728"/>
+          <p:cNvPr id="17" name="Shape 14"/>
+          <p:cNvSpPr/>
+          <p:nvPr/>
+        </p:nvSpPr>
+        <p:spPr>
+          <a:xfrm>
+            <a:off x="1964436" y="2322576"/>
             <a:ext cx="768096" cy="768096"/>
           </a:xfrm>
           <a:prstGeom prst="ellipse">
@@ -10072,13 +11494,13 @@
       </p:sp>
       <p:sp>
         <p:nvSpPr>
-          <p:cNvPr id="14" name="Text 11"/>
-          <p:cNvSpPr/>
-          <p:nvPr/>
-        </p:nvSpPr>
-        <p:spPr>
-          <a:xfrm>
-            <a:off x="1964436" y="2395728"/>
+          <p:cNvPr id="18" name="Text 15"/>
+          <p:cNvSpPr/>
+          <p:nvPr/>
+        </p:nvSpPr>
+        <p:spPr>
+          <a:xfrm>
+            <a:off x="1964436" y="2322576"/>
             <a:ext cx="768096" cy="768096"/>
           </a:xfrm>
           <a:prstGeom prst="rect">
@@ -10111,13 +11533,13 @@
       </p:sp>
       <p:sp>
         <p:nvSpPr>
-          <p:cNvPr id="15" name="Shape 12"/>
-          <p:cNvSpPr/>
-          <p:nvPr/>
-        </p:nvSpPr>
-        <p:spPr>
-          <a:xfrm>
-            <a:off x="566928" y="3355848"/>
+          <p:cNvPr id="19" name="Shape 16"/>
+          <p:cNvSpPr/>
+          <p:nvPr/>
+        </p:nvSpPr>
+        <p:spPr>
+          <a:xfrm>
+            <a:off x="566928" y="3282696"/>
             <a:ext cx="3563112" cy="1143000"/>
           </a:xfrm>
           <a:prstGeom prst="rect">
@@ -10143,13 +11565,13 @@
       </p:sp>
       <p:sp>
         <p:nvSpPr>
-          <p:cNvPr id="16" name="Text 13"/>
-          <p:cNvSpPr/>
-          <p:nvPr/>
-        </p:nvSpPr>
-        <p:spPr>
-          <a:xfrm>
-            <a:off x="658368" y="3465576"/>
+          <p:cNvPr id="20" name="Text 17"/>
+          <p:cNvSpPr/>
+          <p:nvPr/>
+        </p:nvSpPr>
+        <p:spPr>
+          <a:xfrm>
+            <a:off x="658368" y="3392424"/>
             <a:ext cx="3380232" cy="640080"/>
           </a:xfrm>
           <a:prstGeom prst="rect">
@@ -10182,13 +11604,13 @@
       </p:sp>
       <p:sp>
         <p:nvSpPr>
-          <p:cNvPr id="17" name="Text 14"/>
-          <p:cNvSpPr/>
-          <p:nvPr/>
-        </p:nvSpPr>
-        <p:spPr>
-          <a:xfrm>
-            <a:off x="676656" y="3959352"/>
+          <p:cNvPr id="21" name="Text 18"/>
+          <p:cNvSpPr/>
+          <p:nvPr/>
+        </p:nvSpPr>
+        <p:spPr>
+          <a:xfrm>
+            <a:off x="676656" y="3886200"/>
             <a:ext cx="3343656" cy="502920"/>
           </a:xfrm>
           <a:prstGeom prst="rect">
@@ -10221,13 +11643,13 @@
       </p:sp>
       <p:sp>
         <p:nvSpPr>
-          <p:cNvPr id="18" name="Shape 15"/>
-          <p:cNvSpPr/>
-          <p:nvPr/>
-        </p:nvSpPr>
-        <p:spPr>
-          <a:xfrm>
-            <a:off x="5710428" y="2395728"/>
+          <p:cNvPr id="22" name="Shape 19"/>
+          <p:cNvSpPr/>
+          <p:nvPr/>
+        </p:nvSpPr>
+        <p:spPr>
+          <a:xfrm>
+            <a:off x="5710428" y="2322576"/>
             <a:ext cx="768096" cy="768096"/>
           </a:xfrm>
           <a:prstGeom prst="ellipse">
@@ -10246,13 +11668,13 @@
       </p:sp>
       <p:sp>
         <p:nvSpPr>
-          <p:cNvPr id="19" name="Text 16"/>
-          <p:cNvSpPr/>
-          <p:nvPr/>
-        </p:nvSpPr>
-        <p:spPr>
-          <a:xfrm>
-            <a:off x="5710428" y="2395728"/>
+          <p:cNvPr id="23" name="Text 20"/>
+          <p:cNvSpPr/>
+          <p:nvPr/>
+        </p:nvSpPr>
+        <p:spPr>
+          <a:xfrm>
+            <a:off x="5710428" y="2322576"/>
             <a:ext cx="768096" cy="768096"/>
           </a:xfrm>
           <a:prstGeom prst="rect">
@@ -10285,13 +11707,13 @@
       </p:sp>
       <p:sp>
         <p:nvSpPr>
-          <p:cNvPr id="20" name="Shape 17"/>
-          <p:cNvSpPr/>
-          <p:nvPr/>
-        </p:nvSpPr>
-        <p:spPr>
-          <a:xfrm>
-            <a:off x="4312920" y="3355848"/>
+          <p:cNvPr id="24" name="Shape 21"/>
+          <p:cNvSpPr/>
+          <p:nvPr/>
+        </p:nvSpPr>
+        <p:spPr>
+          <a:xfrm>
+            <a:off x="4312920" y="3282696"/>
             <a:ext cx="3563112" cy="1143000"/>
           </a:xfrm>
           <a:prstGeom prst="rect">
@@ -10317,13 +11739,13 @@
       </p:sp>
       <p:sp>
         <p:nvSpPr>
-          <p:cNvPr id="21" name="Text 18"/>
-          <p:cNvSpPr/>
-          <p:nvPr/>
-        </p:nvSpPr>
-        <p:spPr>
-          <a:xfrm>
-            <a:off x="4404360" y="3465576"/>
+          <p:cNvPr id="25" name="Text 22"/>
+          <p:cNvSpPr/>
+          <p:nvPr/>
+        </p:nvSpPr>
+        <p:spPr>
+          <a:xfrm>
+            <a:off x="4404360" y="3392424"/>
             <a:ext cx="3380232" cy="640080"/>
           </a:xfrm>
           <a:prstGeom prst="rect">
@@ -10356,13 +11778,13 @@
       </p:sp>
       <p:sp>
         <p:nvSpPr>
-          <p:cNvPr id="22" name="Text 19"/>
-          <p:cNvSpPr/>
-          <p:nvPr/>
-        </p:nvSpPr>
-        <p:spPr>
-          <a:xfrm>
-            <a:off x="4422648" y="3959352"/>
+          <p:cNvPr id="26" name="Text 23"/>
+          <p:cNvSpPr/>
+          <p:nvPr/>
+        </p:nvSpPr>
+        <p:spPr>
+          <a:xfrm>
+            <a:off x="4422648" y="3886200"/>
             <a:ext cx="3343656" cy="502920"/>
           </a:xfrm>
           <a:prstGeom prst="rect">
@@ -10395,13 +11817,13 @@
       </p:sp>
       <p:sp>
         <p:nvSpPr>
-          <p:cNvPr id="23" name="Shape 20"/>
-          <p:cNvSpPr/>
-          <p:nvPr/>
-        </p:nvSpPr>
-        <p:spPr>
-          <a:xfrm>
-            <a:off x="9456420" y="2395728"/>
+          <p:cNvPr id="27" name="Shape 24"/>
+          <p:cNvSpPr/>
+          <p:nvPr/>
+        </p:nvSpPr>
+        <p:spPr>
+          <a:xfrm>
+            <a:off x="9456420" y="2322576"/>
             <a:ext cx="768096" cy="768096"/>
           </a:xfrm>
           <a:prstGeom prst="ellipse">
@@ -10420,13 +11842,13 @@
       </p:sp>
       <p:sp>
         <p:nvSpPr>
-          <p:cNvPr id="24" name="Text 21"/>
-          <p:cNvSpPr/>
-          <p:nvPr/>
-        </p:nvSpPr>
-        <p:spPr>
-          <a:xfrm>
-            <a:off x="9456420" y="2395728"/>
+          <p:cNvPr id="28" name="Text 25"/>
+          <p:cNvSpPr/>
+          <p:nvPr/>
+        </p:nvSpPr>
+        <p:spPr>
+          <a:xfrm>
+            <a:off x="9456420" y="2322576"/>
             <a:ext cx="768096" cy="768096"/>
           </a:xfrm>
           <a:prstGeom prst="rect">
@@ -10459,13 +11881,13 @@
       </p:sp>
       <p:sp>
         <p:nvSpPr>
-          <p:cNvPr id="25" name="Shape 22"/>
-          <p:cNvSpPr/>
-          <p:nvPr/>
-        </p:nvSpPr>
-        <p:spPr>
-          <a:xfrm>
-            <a:off x="8058912" y="3355848"/>
+          <p:cNvPr id="29" name="Shape 26"/>
+          <p:cNvSpPr/>
+          <p:nvPr/>
+        </p:nvSpPr>
+        <p:spPr>
+          <a:xfrm>
+            <a:off x="8058912" y="3282696"/>
             <a:ext cx="3563112" cy="1143000"/>
           </a:xfrm>
           <a:prstGeom prst="rect">
@@ -10491,13 +11913,13 @@
       </p:sp>
       <p:sp>
         <p:nvSpPr>
-          <p:cNvPr id="26" name="Text 23"/>
-          <p:cNvSpPr/>
-          <p:nvPr/>
-        </p:nvSpPr>
-        <p:spPr>
-          <a:xfrm>
-            <a:off x="8150352" y="3465576"/>
+          <p:cNvPr id="30" name="Text 27"/>
+          <p:cNvSpPr/>
+          <p:nvPr/>
+        </p:nvSpPr>
+        <p:spPr>
+          <a:xfrm>
+            <a:off x="8150352" y="3392424"/>
             <a:ext cx="3380232" cy="640080"/>
           </a:xfrm>
           <a:prstGeom prst="rect">
@@ -10530,13 +11952,13 @@
       </p:sp>
       <p:sp>
         <p:nvSpPr>
-          <p:cNvPr id="27" name="Text 24"/>
-          <p:cNvSpPr/>
-          <p:nvPr/>
-        </p:nvSpPr>
-        <p:spPr>
-          <a:xfrm>
-            <a:off x="8168640" y="3959352"/>
+          <p:cNvPr id="31" name="Text 28"/>
+          <p:cNvSpPr/>
+          <p:nvPr/>
+        </p:nvSpPr>
+        <p:spPr>
+          <a:xfrm>
+            <a:off x="8168640" y="3886200"/>
             <a:ext cx="3343656" cy="502920"/>
           </a:xfrm>
           <a:prstGeom prst="rect">
@@ -10569,13 +11991,13 @@
       </p:sp>
       <p:sp>
         <p:nvSpPr>
-          <p:cNvPr id="28" name="Shape 25"/>
-          <p:cNvSpPr/>
-          <p:nvPr/>
-        </p:nvSpPr>
-        <p:spPr>
-          <a:xfrm>
-            <a:off x="566928" y="4681728"/>
+          <p:cNvPr id="32" name="Shape 29"/>
+          <p:cNvSpPr/>
+          <p:nvPr/>
+        </p:nvSpPr>
+        <p:spPr>
+          <a:xfrm>
+            <a:off x="566928" y="4608576"/>
             <a:ext cx="11055096" cy="822960"/>
           </a:xfrm>
           <a:prstGeom prst="rect">
@@ -10589,13 +12011,13 @@
       </p:sp>
       <p:sp>
         <p:nvSpPr>
-          <p:cNvPr id="29" name="Shape 26"/>
-          <p:cNvSpPr/>
-          <p:nvPr/>
-        </p:nvSpPr>
-        <p:spPr>
-          <a:xfrm>
-            <a:off x="566928" y="4681728"/>
+          <p:cNvPr id="33" name="Shape 30"/>
+          <p:cNvSpPr/>
+          <p:nvPr/>
+        </p:nvSpPr>
+        <p:spPr>
+          <a:xfrm>
+            <a:off x="566928" y="4608576"/>
             <a:ext cx="82296" cy="822960"/>
           </a:xfrm>
           <a:prstGeom prst="rect">
@@ -10609,13 +12031,13 @@
       </p:sp>
       <p:sp>
         <p:nvSpPr>
-          <p:cNvPr id="30" name="Text 27"/>
-          <p:cNvSpPr/>
-          <p:nvPr/>
-        </p:nvSpPr>
-        <p:spPr>
-          <a:xfrm>
-            <a:off x="822960" y="4681728"/>
+          <p:cNvPr id="34" name="Text 31"/>
+          <p:cNvSpPr/>
+          <p:nvPr/>
+        </p:nvSpPr>
+        <p:spPr>
+          <a:xfrm>
+            <a:off x="822960" y="4608576"/>
             <a:ext cx="10597896" cy="822960"/>
           </a:xfrm>
           <a:prstGeom prst="rect">

--- a/presentation/round1_pitch.pptx
+++ b/presentation/round1_pitch.pptx
@@ -2,25 +2,26 @@
 <file path=ppt/presentation.xml><?xml version="1.0" encoding="utf-8"?>
 <p:presentation xmlns:p="http://schemas.openxmlformats.org/presentationml/2006/main">
   <p:sldMasterIdLst>
-    <p:sldMasterId xmlns:r="http://schemas.openxmlformats.org/officeDocument/2006/relationships" id="2147483648" r:id="R92da7196703a4393"/>
+    <p:sldMasterId xmlns:r="http://schemas.openxmlformats.org/officeDocument/2006/relationships" id="2147483648" r:id="R7a76bfd0bcea46e7"/>
   </p:sldMasterIdLst>
   <p:notesMasterIdLst>
-    <p:notesMasterId xmlns:r="http://schemas.openxmlformats.org/officeDocument/2006/relationships" r:id="R92d66e7d3ccb4018"/>
+    <p:notesMasterId xmlns:r="http://schemas.openxmlformats.org/officeDocument/2006/relationships" r:id="Rd73e6dfdb0d84c88"/>
   </p:notesMasterIdLst>
   <p:sldIdLst>
-    <p:sldId xmlns:r="http://schemas.openxmlformats.org/officeDocument/2006/relationships" id="256" r:id="R08f91a46d2104ac6"/>
-    <p:sldId xmlns:r="http://schemas.openxmlformats.org/officeDocument/2006/relationships" id="257" r:id="R1261f58107d3431f"/>
-    <p:sldId xmlns:r="http://schemas.openxmlformats.org/officeDocument/2006/relationships" id="258" r:id="Rc6ee7ebe5dbf4a5a"/>
-    <p:sldId xmlns:r="http://schemas.openxmlformats.org/officeDocument/2006/relationships" id="259" r:id="R65cd48b1e33d4e31"/>
-    <p:sldId xmlns:r="http://schemas.openxmlformats.org/officeDocument/2006/relationships" id="260" r:id="R625f5b2b6e4143fb"/>
-    <p:sldId xmlns:r="http://schemas.openxmlformats.org/officeDocument/2006/relationships" id="261" r:id="Ra6528e22c8934a92"/>
-    <p:sldId xmlns:r="http://schemas.openxmlformats.org/officeDocument/2006/relationships" id="262" r:id="R97b2a3ebeba14210"/>
-    <p:sldId xmlns:r="http://schemas.openxmlformats.org/officeDocument/2006/relationships" id="263" r:id="R93fb42d7c15e46ff"/>
-    <p:sldId xmlns:r="http://schemas.openxmlformats.org/officeDocument/2006/relationships" id="264" r:id="R2c5b8a9f372f415d"/>
-    <p:sldId xmlns:r="http://schemas.openxmlformats.org/officeDocument/2006/relationships" id="265" r:id="R23abdbb0a25c48b7"/>
-    <p:sldId xmlns:r="http://schemas.openxmlformats.org/officeDocument/2006/relationships" id="266" r:id="R09fe25216cc84801"/>
-    <p:sldId xmlns:r="http://schemas.openxmlformats.org/officeDocument/2006/relationships" id="267" r:id="R9428aafad30c49e7"/>
-    <p:sldId xmlns:r="http://schemas.openxmlformats.org/officeDocument/2006/relationships" id="268" r:id="R3500dabf3b03468f"/>
+    <p:sldId xmlns:r="http://schemas.openxmlformats.org/officeDocument/2006/relationships" id="256" r:id="R883a0ea1f87f416d"/>
+    <p:sldId xmlns:r="http://schemas.openxmlformats.org/officeDocument/2006/relationships" id="257" r:id="Rb55d5a90365f436f"/>
+    <p:sldId xmlns:r="http://schemas.openxmlformats.org/officeDocument/2006/relationships" id="258" r:id="R1f725f9b78f24821"/>
+    <p:sldId xmlns:r="http://schemas.openxmlformats.org/officeDocument/2006/relationships" id="259" r:id="R06706de16095453b"/>
+    <p:sldId xmlns:r="http://schemas.openxmlformats.org/officeDocument/2006/relationships" id="260" r:id="R14347f17fb71450f"/>
+    <p:sldId xmlns:r="http://schemas.openxmlformats.org/officeDocument/2006/relationships" id="261" r:id="R0be6c43eccec450a"/>
+    <p:sldId xmlns:r="http://schemas.openxmlformats.org/officeDocument/2006/relationships" id="262" r:id="R76707a4419354669"/>
+    <p:sldId xmlns:r="http://schemas.openxmlformats.org/officeDocument/2006/relationships" id="263" r:id="R356748d9a6ed48ab"/>
+    <p:sldId xmlns:r="http://schemas.openxmlformats.org/officeDocument/2006/relationships" id="264" r:id="R3ab75f0f4b3f4b0c"/>
+    <p:sldId xmlns:r="http://schemas.openxmlformats.org/officeDocument/2006/relationships" id="265" r:id="R40d8dc9b2fd54897"/>
+    <p:sldId xmlns:r="http://schemas.openxmlformats.org/officeDocument/2006/relationships" id="266" r:id="R1e277a1a106642de"/>
+    <p:sldId xmlns:r="http://schemas.openxmlformats.org/officeDocument/2006/relationships" id="267" r:id="R7b0132ac71e74b48"/>
+    <p:sldId xmlns:r="http://schemas.openxmlformats.org/officeDocument/2006/relationships" id="268" r:id="R0fbe23acbb8144d5"/>
+    <p:sldId xmlns:r="http://schemas.openxmlformats.org/officeDocument/2006/relationships" id="269" r:id="R26e6a4bb631f410c"/>
   </p:sldIdLst>
   <p:sldSz cx="12192000" cy="6858000"/>
   <p:notesSz cx="6858000" cy="9144000"/>
@@ -494,7 +495,7 @@
           <a:lstStyle xmlns:a="http://schemas.openxmlformats.org/drawingml/2006/main"/>
           <a:p xmlns:a="http://schemas.openxmlformats.org/drawingml/2006/main">
             <a:r>
-              <a:t>We met over dinner, and you told me you do not trust AI because you cannot see what it does.</a:t>
+              <a:t>Over dinner, you told me you do not trust AI because you cannot see what it does.</a:t>
             </a:r>
           </a:p>
           <a:p xmlns:a="http://schemas.openxmlformats.org/drawingml/2006/main">
@@ -504,7 +505,7 @@
           </a:p>
           <a:p xmlns:a="http://schemas.openxmlformats.org/drawingml/2006/main">
             <a:r>
-              <a:t>So I am not asking you to believe a promise. I am going to show you a single decision from start to finish.</a:t>
+              <a:t>So I am not asking you to believe a promise. I am going to show you 1 complaint-routing decision from start to finish.</a:t>
             </a:r>
           </a:p>
           <a:p xmlns:a="http://schemas.openxmlformats.org/drawingml/2006/main">
@@ -514,7 +515,7 @@
           </a:p>
           <a:p xmlns:a="http://schemas.openxmlformats.org/drawingml/2006/main">
             <a:r>
-              <a:t>The workflow runs, its reasoning is visible, and every number traces back to the project evidence.</a:t>
+              <a:t>The workflow runs, its reasoning is visible, and every number traces to project evidence.</a:t>
             </a:r>
           </a:p>
           <a:p xmlns:a="http://schemas.openxmlformats.org/drawingml/2006/main">
@@ -644,7 +645,7 @@
           </a:p>
           <a:p xmlns:a="http://schemas.openxmlformats.org/drawingml/2006/main">
             <a:r>
-              <a:t>This suggests label quality is a major measurement bottleneck, but it does not prove that the model is correct. Phase 0 resolves that uncertainty by asking experienced handlers to create an expert-labelled reference set and by measuring their agreement with one another.</a:t>
+              <a:t>The 60.5% result therefore mixes model error with label mismatch; it cannot separate them. Phase 0 resolves that uncertainty by asking experienced handlers to create an expert-labelled reference set and by measuring their agreement with one another.</a:t>
             </a:r>
           </a:p>
           <a:p xmlns:a="http://schemas.openxmlformats.org/drawingml/2006/main">
@@ -759,7 +760,7 @@
           </a:p>
           <a:p xmlns:a="http://schemas.openxmlformats.org/drawingml/2006/main">
             <a:r>
-              <a:t>First, recent complaint volume appeared to collapse by 73% because the regulator publishes complaints only after the company responds or enough time passes. I removed the incomplete period and ended the analysis window on 27 June.</a:t>
+              <a:t>First, recent complaint volume appeared to collapse by 73% because the CFPB publishes complaints only after the company responds or enough time passes. I removed the incomplete period and ended the analysis window on 27 June 2026.</a:t>
             </a:r>
           </a:p>
           <a:p xmlns:a="http://schemas.openxmlformats.org/drawingml/2006/main">
@@ -889,7 +890,7 @@
           <a:lstStyle xmlns:a="http://schemas.openxmlformats.org/drawingml/2006/main"/>
           <a:p xmlns:a="http://schemas.openxmlformats.org/drawingml/2006/main">
             <a:r>
-              <a:t>My Round 1 compliance position is deliberately preliminary.</a:t>
+              <a:t>My Round 1 compliance position is deliberately preliminary. It is not a final legal classification.</a:t>
             </a:r>
           </a:p>
           <a:p xmlns:a="http://schemas.openxmlformats.org/drawingml/2006/main">
@@ -909,7 +910,7 @@
           </a:p>
           <a:p xmlns:a="http://schemas.openxmlformats.org/drawingml/2006/main">
             <a:r>
-              <a:t>On that intended use, I do not currently see it matching the Annex III creditworthiness use that is classified as high-risk. However, classification depends on the exact intended purpose, deployment context, data flows, and degree of human control.</a:t>
+              <a:t>On that intended use, I have not identified it as matching the Annex III creditworthiness use classified as high-risk. However, classification depends on the exact intended purpose, deployment context, data flows, and degree of human control.</a:t>
             </a:r>
           </a:p>
           <a:p xmlns:a="http://schemas.openxmlformats.org/drawingml/2006/main">
@@ -929,6 +930,16 @@
           </a:p>
           <a:p xmlns:a="http://schemas.openxmlformats.org/drawingml/2006/main">
             <a:r>
+              <a:t>Round 2 must also establish the GDPR legal basis and retention period, decide whether a DPIA is required, and verify the hosting region and cross-border transfer controls. Those controls are open work, not completed safeguards.</a:t>
+            </a:r>
+          </a:p>
+          <a:p xmlns:a="http://schemas.openxmlformats.org/drawingml/2006/main">
+            <a:r>
+              <a:t/>
+            </a:r>
+          </a:p>
+          <a:p xmlns:a="http://schemas.openxmlformats.org/drawingml/2006/main">
+            <a:r>
               <a:t>--- END OF SPOKEN NOTES ---</a:t>
             </a:r>
           </a:p>
@@ -944,7 +955,7 @@
           </a:p>
           <a:p xmlns:a="http://schemas.openxmlformats.org/drawingml/2006/main">
             <a:r>
-              <a:t>- Project repository: research/compliance_analysis.md.</a:t>
+              <a:t>- Project repository: research/opportunities_risks.md, §4.</a:t>
             </a:r>
           </a:p>
           <a:p xmlns:a="http://schemas.openxmlformats.org/drawingml/2006/main">
@@ -1034,7 +1045,7 @@
           </a:p>
           <a:p xmlns:a="http://schemas.openxmlformats.org/drawingml/2006/main">
             <a:r>
-              <a:t>The complaint analysis comes from the public CFPB dataset. The client-size and complaint-rate estimates use stated FCA benchmarks and scenario assumptions. The model behaviour comes from the project’s own evaluations. Soft inputs such as minutes per complaint, employer on-costs, and platform cost are labelled as judgements in the cost model.</a:t>
+              <a:t>The complaint analysis comes from the public CFPB dataset. The client-size and complaint-rate estimates use stated FCA benchmarks and scenario assumptions. The model behaviour comes from the project’s own evaluations. The 60.5% figure is agreement with CFPB-derived labels, not expert-routing accuracy. Soft inputs such as minutes per complaint, employer on-costs, and platform cost are labelled as judgements in the cost model.</a:t>
             </a:r>
           </a:p>
           <a:p xmlns:a="http://schemas.openxmlformats.org/drawingml/2006/main">
@@ -1159,7 +1170,7 @@
           </a:p>
           <a:p xmlns:a="http://schemas.openxmlformats.org/drawingml/2006/main">
             <a:r>
-              <a:t>I considered 3 use cases: complaint triage, anomaly flagging, and reporting assistance. I ranked them by how clearly we can inspect the reasoning, not by the largest promised saving.</a:t>
+              <a:t>I assessed 3 use cases: complaint triage, anomaly flagging, and reporting assistance. I ranked them by inspectability, not the largest promised saving.</a:t>
             </a:r>
           </a:p>
           <a:p xmlns:a="http://schemas.openxmlformats.org/drawingml/2006/main">
@@ -1169,7 +1180,7 @@
           </a:p>
           <a:p xmlns:a="http://schemas.openxmlformats.org/drawingml/2006/main">
             <a:r>
-              <a:t>Triage comes first because we can watch the decision. The system proposes a team, shows the supporting words, and lets a person confirm or reject it.</a:t>
+              <a:t>Triage comes first because the system proposes a team, shows the supporting words, and lets a person confirm or reject it.</a:t>
             </a:r>
           </a:p>
           <a:p xmlns:a="http://schemas.openxmlformats.org/drawingml/2006/main">
@@ -1179,7 +1190,7 @@
           </a:p>
           <a:p xmlns:a="http://schemas.openxmlformats.org/drawingml/2006/main">
             <a:r>
-              <a:t>I am ruling out a chatbot because it can fail publicly in the firm’s voice. I am ruling out credit scoring because it is an Annex III high-risk use under the EU AI Act.</a:t>
+              <a:t>I ruled out a chatbot because it can fail publicly in the firm’s voice, and creditworthiness scoring because it is an Annex III high-risk use under the EU AI Act.</a:t>
             </a:r>
           </a:p>
           <a:p xmlns:a="http://schemas.openxmlformats.org/drawingml/2006/main">
@@ -1199,7 +1210,7 @@
           </a:p>
           <a:p xmlns:a="http://schemas.openxmlformats.org/drawingml/2006/main">
             <a:r>
-              <a:t>Now let me show you the opportunity in real complaint data.</a:t>
+              <a:t>Now let me show you the opportunity suggested by public complaint data.</a:t>
             </a:r>
           </a:p>
           <a:p xmlns:a="http://schemas.openxmlformats.org/drawingml/2006/main">
@@ -1314,7 +1325,7 @@
           </a:p>
           <a:p xmlns:a="http://schemas.openxmlformats.org/drawingml/2006/main">
             <a:r>
-              <a:t>The analysis contains 16,839 complaints. 98.0% received a timely response, while 12.7% ended with monetary relief.</a:t>
+              <a:t>The analysis contains 16,839 public complaints across 567 firms. The CFPB timely-response field is 98.0%, while 12.7% ended with monetary relief. Neither figure describes your firm’s performance.</a:t>
             </a:r>
           </a:p>
           <a:p xmlns:a="http://schemas.openxmlformats.org/drawingml/2006/main">
@@ -1324,7 +1335,7 @@
           </a:p>
           <a:p xmlns:a="http://schemas.openxmlformats.org/drawingml/2006/main">
             <a:r>
-              <a:t>The key number is 46.1%: 5 of 64 issue categories account for almost half of the complaints. That suggests a bounded starting point instead of asking a model to handle every issue equally well.</a:t>
+              <a:t>The key number is 46.1%: 5 of 64 issue categories account for almost half the complaints. That suggests a bounded start rather than asking a model to handle every issue equally well.</a:t>
             </a:r>
           </a:p>
           <a:p xmlns:a="http://schemas.openxmlformats.org/drawingml/2006/main">
@@ -1334,7 +1345,7 @@
           </a:p>
           <a:p xmlns:a="http://schemas.openxmlformats.org/drawingml/2006/main">
             <a:r>
-              <a:t>The public data tells us where to investigate. Your own data decides what enters the pilot.</a:t>
+              <a:t>The public data tells us where to investigate; your data decides what enters the pilot.</a:t>
             </a:r>
           </a:p>
           <a:p xmlns:a="http://schemas.openxmlformats.org/drawingml/2006/main">
@@ -1449,7 +1460,7 @@
           <a:lstStyle xmlns:a="http://schemas.openxmlformats.org/drawingml/2006/main"/>
           <a:p xmlns:a="http://schemas.openxmlformats.org/drawingml/2006/main">
             <a:r>
-              <a:t>Here is the workflow processing a real complaint. It proposes the Disputes and Fraud team, quotes the customer’s words as evidence, and stops for a person to confirm.</a:t>
+              <a:t>Here is the demo workflow processing 1 public CFPB complaint. It proposes the Disputes and Fraud team, quotes the customer’s words as evidence, and stops for human review.</a:t>
             </a:r>
           </a:p>
           <a:p xmlns:a="http://schemas.openxmlformats.org/drawingml/2006/main">
@@ -1459,7 +1470,7 @@
           </a:p>
           <a:p xmlns:a="http://schemas.openxmlformats.org/drawingml/2006/main">
             <a:r>
-              <a:t>The monitoring view records every decision. Of 60 cases, 52 produced a proposal. 4 stopped for low confidence, and 4 because the quoted evidence was not in the complaint.</a:t>
+              <a:t>LangSmith records every evaluation outcome. Of 60 cases, 52 produced a proposal; 4 stopped for low confidence and 4 because the quoted evidence was absent from the complaint.</a:t>
             </a:r>
           </a:p>
           <a:p xmlns:a="http://schemas.openxmlformats.org/drawingml/2006/main">
@@ -1469,7 +1480,7 @@
           </a:p>
           <a:p xmlns:a="http://schemas.openxmlformats.org/drawingml/2006/main">
             <a:r>
-              <a:t>Those fabricated quotations matter most. The model sounded convincing, but the validation check caught them and sent each case to human review.</a:t>
+              <a:t>Those fabricated quotations matter most. Validation caught them and sent each case to human review.</a:t>
             </a:r>
           </a:p>
           <a:p xmlns:a="http://schemas.openxmlformats.org/drawingml/2006/main">
@@ -1489,7 +1500,7 @@
           </a:p>
           <a:p xmlns:a="http://schemas.openxmlformats.org/drawingml/2006/main">
             <a:r>
-              <a:t>The process runs and can be observed. Accuracy must now be measured against the client’s expert-labelled complaints. That is why the proposal is staged.</a:t>
+              <a:t>The demo is observable, but it does not establish deployment accuracy. Phase 0 creates expert labels from your complaints; Phase 1 measures performance in shadow mode. That is why the proposal is staged.</a:t>
             </a:r>
           </a:p>
           <a:p xmlns:a="http://schemas.openxmlformats.org/drawingml/2006/main">
@@ -1594,7 +1605,7 @@
           <a:lstStyle xmlns:a="http://schemas.openxmlformats.org/drawingml/2006/main"/>
           <a:p xmlns:a="http://schemas.openxmlformats.org/drawingml/2006/main">
             <a:r>
-              <a:t>The proposal uses a fixed fee for each phase because the problem is uncertainty.</a:t>
+              <a:t>The pricing basis is €700 for each of my consulting days, contracted as a fixed fee per phase.</a:t>
             </a:r>
           </a:p>
           <a:p xmlns:a="http://schemas.openxmlformats.org/drawingml/2006/main">
@@ -1604,7 +1615,7 @@
           </a:p>
           <a:p xmlns:a="http://schemas.openxmlformats.org/drawingml/2006/main">
             <a:r>
-              <a:t>Phase 0 costs €5,600. 2 experienced handlers label 300 complaints independently, creating the trustworthy reference set we need.</a:t>
+              <a:t>Phase 0 includes 8 of my consulting days, or €5,600. Over 2 weeks, 2 of your handlers label 300 complaints; their time is not included in my fee.</a:t>
             </a:r>
           </a:p>
           <a:p xmlns:a="http://schemas.openxmlformats.org/drawingml/2006/main">
@@ -1614,7 +1625,7 @@
           </a:p>
           <a:p xmlns:a="http://schemas.openxmlformats.org/drawingml/2006/main">
             <a:r>
-              <a:t>Phase 1 costs €8,400 and runs an assist-only pilot beside the existing process. Together, the phases cost €14,000 and reach a real decision point.</a:t>
+              <a:t>Phase 1 includes 12 of my consulting days, or €8,400. Over 11 weeks, that covers the build and 60-day shadow run. The system proposes; your handlers follow the existing process and do not act on suggestions. Results use the Phase 0 expert labels. Together, Phases 0 and 1 cost €14,000 and reach a decision point.</a:t>
             </a:r>
           </a:p>
           <a:p xmlns:a="http://schemas.openxmlformats.org/drawingml/2006/main">
@@ -1624,7 +1635,17 @@
           </a:p>
           <a:p xmlns:a="http://schemas.openxmlformats.org/drawingml/2006/main">
             <a:r>
-              <a:t>Annual operation is estimated at €7,400, almost entirely for human oversight and the platform. Under the stated assumptions, the model calls cost about €0.29 per year. The model is not the expensive part; accountable operation is.</a:t>
+              <a:t>Phase 2 is contingent on the pilot passing. It includes 15 of my consulting days, or €10,500, taking the full programme to €24,500. This phase is assist-only: your handlers may use proposals, but autonomous routing requires separate approval.</a:t>
+            </a:r>
+          </a:p>
+          <a:p xmlns:a="http://schemas.openxmlformats.org/drawingml/2006/main">
+            <a:r>
+              <a:t/>
+            </a:r>
+          </a:p>
+          <a:p xmlns:a="http://schemas.openxmlformats.org/drawingml/2006/main">
+            <a:r>
+              <a:t>Estimated annual operating cost is €7,400: 8 consultant review days cost €5,600, and the €150 monthly platform costs €1,800. Under the assumed volume, model calls add about €0.29. Accountable operation, not model calls, drives cost.</a:t>
             </a:r>
           </a:p>
           <a:p xmlns:a="http://schemas.openxmlformats.org/drawingml/2006/main">
@@ -1759,7 +1780,7 @@
           <a:lstStyle xmlns:a="http://schemas.openxmlformats.org/drawingml/2006/main"/>
           <a:p xmlns:a="http://schemas.openxmlformats.org/drawingml/2006/main">
             <a:r>
-              <a:t>I ranked the 3 proposed use cases by how visible and controllable their reasoning can be.</a:t>
+              <a:t>I ranked 3 candidate use cases by how visible and controllable their reasoning can be. Only complaint triage is proposed for Phase 0 and Phase 1; anomaly flagging and reporting assistance remain later options.</a:t>
             </a:r>
           </a:p>
           <a:p xmlns:a="http://schemas.openxmlformats.org/drawingml/2006/main">
@@ -1769,7 +1790,7 @@
           </a:p>
           <a:p xmlns:a="http://schemas.openxmlformats.org/drawingml/2006/main">
             <a:r>
-              <a:t>Complaint triage can propose a team and show the exact evidence behind the proposal. Anomaly flagging can identify unusual patterns for a person to investigate. Reporting assistance can draft material while leaving approval with a named employee.</a:t>
+              <a:t>Complaint triage can propose a team and show the exact evidence behind the proposal. Anomaly flagging can identify unusual patterns for one of your investigators to review. Reporting assistance can draft material while leaving approval with a named employee in your firm.</a:t>
             </a:r>
           </a:p>
           <a:p xmlns:a="http://schemas.openxmlformats.org/drawingml/2006/main">
@@ -1779,7 +1800,7 @@
           </a:p>
           <a:p xmlns:a="http://schemas.openxmlformats.org/drawingml/2006/main">
             <a:r>
-              <a:t>I ruled out 2 uses. A customer-facing chatbot could make public errors in the firm’s voice. Credit scoring directly affects access to financial services and is classified as high-risk under the EU AI Act.</a:t>
+              <a:t>I ruled out 2 uses. A customer-facing chatbot could make public errors in the firm’s voice. Creditworthiness scoring directly affects access to financial services and is classified as high-risk under the EU AI Act. A separate guardrail prevents predicted payout from determining routing priority.</a:t>
             </a:r>
           </a:p>
           <a:p xmlns:a="http://schemas.openxmlformats.org/drawingml/2006/main">
@@ -1894,7 +1915,7 @@
           <a:lstStyle xmlns:a="http://schemas.openxmlformats.org/drawingml/2006/main"/>
           <a:p xmlns:a="http://schemas.openxmlformats.org/drawingml/2006/main">
             <a:r>
-              <a:t>This chart explains how I bounded the initial scope.</a:t>
+              <a:t>This chart explains how the public data supports a bounded initial test.</a:t>
             </a:r>
           </a:p>
           <a:p xmlns:a="http://schemas.openxmlformats.org/drawingml/2006/main">
@@ -2024,7 +2045,7 @@
           <a:lstStyle xmlns:a="http://schemas.openxmlformats.org/drawingml/2006/main"/>
           <a:p xmlns:a="http://schemas.openxmlformats.org/drawingml/2006/main">
             <a:r>
-              <a:t>This slide separates how often complaints occur from how consequential they may be.</a:t>
+              <a:t>This public-data slide separates how often complaints occur from how often they end with monetary relief.</a:t>
             </a:r>
           </a:p>
           <a:p xmlns:a="http://schemas.openxmlformats.org/drawingml/2006/main">
@@ -2044,7 +2065,7 @@
           </a:p>
           <a:p xmlns:a="http://schemas.openxmlformats.org/drawingml/2006/main">
             <a:r>
-              <a:t>The implication is that routing priorities should not be based on volume alone. Product type and likely consequence also matter.</a:t>
+              <a:t>The implication is that volume alone does not describe likely monetary relief. That relationship is a hypothesis to test, not a routing rule.</a:t>
             </a:r>
           </a:p>
           <a:p xmlns:a="http://schemas.openxmlformats.org/drawingml/2006/main">
@@ -2154,7 +2175,7 @@
           <a:lstStyle xmlns:a="http://schemas.openxmlformats.org/drawingml/2006/main"/>
           <a:p xmlns:a="http://schemas.openxmlformats.org/drawingml/2006/main">
             <a:r>
-              <a:t>In the 60-case monitoring sample, 52 complaints passed all validation checks and produced a proposal.</a:t>
+              <a:t>In the 60-case evaluation sample recorded in LangSmith, 52 complaints produced a proposal after passing the configured validation checks. Passing those checks does not prove that the proposed team was correct.</a:t>
             </a:r>
           </a:p>
           <a:p xmlns:a="http://schemas.openxmlformats.org/drawingml/2006/main">
@@ -2164,7 +2185,7 @@
           </a:p>
           <a:p xmlns:a="http://schemas.openxmlformats.org/drawingml/2006/main">
             <a:r>
-              <a:t>4 were sent to human review because the model’s evidence quotation was not present verbatim in the complaint. Another 4 were sent to human review because confidence was below the threshold.</a:t>
+              <a:t>4 were flagged for human review because the model’s evidence quotation was not present verbatim in the complaint. Another 4 were flagged because confidence was below the threshold.</a:t>
             </a:r>
           </a:p>
           <a:p xmlns:a="http://schemas.openxmlformats.org/drawingml/2006/main">
@@ -2174,7 +2195,7 @@
           </a:p>
           <a:p xmlns:a="http://schemas.openxmlformats.org/drawingml/2006/main">
             <a:r>
-              <a:t>Every case in the sample has a recorded outcome and a reason code. 0 cases disappeared into an unexplained bucket.</a:t>
+              <a:t>Every case in the sample has a recorded outcome and a reason code. 0 cases lack a recorded outcome.</a:t>
             </a:r>
           </a:p>
           <a:p xmlns:a="http://schemas.openxmlformats.org/drawingml/2006/main">
@@ -2184,7 +2205,7 @@
           </a:p>
           <a:p xmlns:a="http://schemas.openxmlformats.org/drawingml/2006/main">
             <a:r>
-              <a:t>This does not prove that every proposal was correct. It proves that proposals, rejections, and non-decisions can all be traced and discussed.</a:t>
+              <a:t>This does not prove that every proposal was correct. It proves that proposals and stops can be traced and discussed.</a:t>
             </a:r>
           </a:p>
           <a:p xmlns:a="http://schemas.openxmlformats.org/drawingml/2006/main">
@@ -2282,7 +2303,7 @@
   </p:cSld>
   <p:clrMap bg1="lt1" tx1="dk1" bg2="lt2" tx2="dk2" accent1="accent1" accent2="accent2" accent3="accent3" accent4="accent4" accent5="accent5" accent6="accent6" hlink="hlink" folHlink="folHlink"/>
   <p:sldLayoutIdLst>
-    <p:sldLayoutId xmlns:r="http://schemas.openxmlformats.org/officeDocument/2006/relationships" id="2147483649" r:id="Ra08236cf2a854077"/>
+    <p:sldLayoutId xmlns:r="http://schemas.openxmlformats.org/officeDocument/2006/relationships" id="2147483649" r:id="R611ed53a67cf4025"/>
   </p:sldLayoutIdLst>
   <p:hf sldNum="0" hdr="0" ftr="0" dt="0"/>
   <p:txStyles>
@@ -2853,7 +2874,7 @@
           <p:cNvPr id="2" name="Shape 0">
             <a:extLst xmlns:a="http://schemas.openxmlformats.org/drawingml/2006/main">
               <a:ext uri="{FF2B5EF4-FFF2-40B4-BE49-F238E27FC236}">
-                <a16:creationId xmlns:a16="http://schemas.microsoft.com/office/drawing/2014/main" id="{9C972677-03F9-446D-B185-192350B71997}"/>
+                <a16:creationId xmlns:a16="http://schemas.microsoft.com/office/drawing/2014/main" id="{3056916D-5056-42C6-BAD6-5AAEDE3D4E0E}"/>
               </a:ext>
             </a:extLst>
           </p:cNvPr>
@@ -2883,7 +2904,7 @@
           <p:cNvPr id="3" name="Shape 1">
             <a:extLst xmlns:a="http://schemas.openxmlformats.org/drawingml/2006/main">
               <a:ext uri="{FF2B5EF4-FFF2-40B4-BE49-F238E27FC236}">
-                <a16:creationId xmlns:a16="http://schemas.microsoft.com/office/drawing/2014/main" id="{0BCB1693-028E-4F5C-B3BD-DA0F5B8961E2}"/>
+                <a16:creationId xmlns:a16="http://schemas.microsoft.com/office/drawing/2014/main" id="{6A83C6B3-5B02-40D3-8DF9-118A874298E9}"/>
               </a:ext>
             </a:extLst>
           </p:cNvPr>
@@ -2912,7 +2933,7 @@
           <p:cNvPr id="4" name="Text 2">
             <a:extLst xmlns:a="http://schemas.openxmlformats.org/drawingml/2006/main">
               <a:ext uri="{FF2B5EF4-FFF2-40B4-BE49-F238E27FC236}">
-                <a16:creationId xmlns:a16="http://schemas.microsoft.com/office/drawing/2014/main" id="{5427C93D-CF3D-4624-997A-1991753E3E8F}"/>
+                <a16:creationId xmlns:a16="http://schemas.microsoft.com/office/drawing/2014/main" id="{397CEAF3-7A33-478F-98E2-FD5BC3451AED}"/>
               </a:ext>
             </a:extLst>
           </p:cNvPr>
@@ -2958,7 +2979,7 @@
           <p:cNvPr id="5" name="Text 3">
             <a:extLst xmlns:a="http://schemas.openxmlformats.org/drawingml/2006/main">
               <a:ext uri="{FF2B5EF4-FFF2-40B4-BE49-F238E27FC236}">
-                <a16:creationId xmlns:a16="http://schemas.microsoft.com/office/drawing/2014/main" id="{8098B855-6157-4307-9AA0-621368231840}"/>
+                <a16:creationId xmlns:a16="http://schemas.microsoft.com/office/drawing/2014/main" id="{2273E1B8-6A2C-4DD9-A605-CD7DF863B525}"/>
               </a:ext>
             </a:extLst>
           </p:cNvPr>
@@ -3004,7 +3025,7 @@
           <p:cNvPr id="6" name="Text 4">
             <a:extLst xmlns:a="http://schemas.openxmlformats.org/drawingml/2006/main">
               <a:ext uri="{FF2B5EF4-FFF2-40B4-BE49-F238E27FC236}">
-                <a16:creationId xmlns:a16="http://schemas.microsoft.com/office/drawing/2014/main" id="{302E3BC8-2816-4B43-86A6-973371BC5D15}"/>
+                <a16:creationId xmlns:a16="http://schemas.microsoft.com/office/drawing/2014/main" id="{47DA406D-0B8A-4DA0-A893-8B083FBAFF6E}"/>
               </a:ext>
             </a:extLst>
           </p:cNvPr>
@@ -3050,7 +3071,7 @@
           <p:cNvPr id="7" name="Shape 5">
             <a:extLst xmlns:a="http://schemas.openxmlformats.org/drawingml/2006/main">
               <a:ext uri="{FF2B5EF4-FFF2-40B4-BE49-F238E27FC236}">
-                <a16:creationId xmlns:a16="http://schemas.microsoft.com/office/drawing/2014/main" id="{E4B16C05-2335-45DE-A7E7-2A26D2BB1FF2}"/>
+                <a16:creationId xmlns:a16="http://schemas.microsoft.com/office/drawing/2014/main" id="{EBF1142D-F742-43DD-AE16-111D2B47E084}"/>
               </a:ext>
             </a:extLst>
           </p:cNvPr>
@@ -3081,7 +3102,7 @@
           <p:cNvPr id="8" name="Text 6">
             <a:extLst xmlns:a="http://schemas.openxmlformats.org/drawingml/2006/main">
               <a:ext uri="{FF2B5EF4-FFF2-40B4-BE49-F238E27FC236}">
-                <a16:creationId xmlns:a16="http://schemas.microsoft.com/office/drawing/2014/main" id="{3945BCC3-EFBF-4E18-94A8-E756912D6C90}"/>
+                <a16:creationId xmlns:a16="http://schemas.microsoft.com/office/drawing/2014/main" id="{3E8DE3FC-2D9E-4522-82D2-7E760966283E}"/>
               </a:ext>
             </a:extLst>
           </p:cNvPr>
@@ -3133,7 +3154,7 @@
                 <a:ea typeface="Calibri"/>
                 <a:cs typeface="Calibri"/>
               </a:rPr>
-              <a:t>Round 1 — research, dashboard, POC, monitoring, cost</a:t>
+              <a:t>Round 1 — research, dashboard, proof of concept, monitoring, cost</a:t>
             </a:r>
             <a:endParaRPr sz="1200"/>
           </a:p>
@@ -3144,7 +3165,7 @@
           <p:cNvPr id="9" name="Text 7">
             <a:extLst xmlns:a="http://schemas.openxmlformats.org/drawingml/2006/main">
               <a:ext uri="{FF2B5EF4-FFF2-40B4-BE49-F238E27FC236}">
-                <a16:creationId xmlns:a16="http://schemas.microsoft.com/office/drawing/2014/main" id="{D590A296-C572-430F-A25E-6BCB177C209B}"/>
+                <a16:creationId xmlns:a16="http://schemas.microsoft.com/office/drawing/2014/main" id="{E132266D-BC7A-4D3A-8E77-89EF87BB3717}"/>
               </a:ext>
             </a:extLst>
           </p:cNvPr>
@@ -3190,7 +3211,18 @@
                 <a:ea typeface="Calibri"/>
                 <a:cs typeface="Calibri"/>
               </a:rPr>
-              <a:t>All figures reproducible from the repo    </a:t>
+              <a:t>All figures trace to the project repository</a:t>
+            </a:r>
+            <a:r>
+              <a:rPr sz="900">
+                <a:solidFill>
+                  <a:srgbClr val="6B7C88"/>
+                </a:solidFill>
+                <a:latin typeface="Calibri"/>
+                <a:ea typeface="Calibri"/>
+                <a:cs typeface="Calibri"/>
+              </a:rPr>
+              <a:t>    </a:t>
             </a:r>
             <a:endParaRPr sz="900"/>
           </a:p>
@@ -3201,7 +3233,7 @@
           <p:cNvPr id="10" name="Shape 8">
             <a:extLst xmlns:a="http://schemas.openxmlformats.org/drawingml/2006/main">
               <a:ext uri="{FF2B5EF4-FFF2-40B4-BE49-F238E27FC236}">
-                <a16:creationId xmlns:a16="http://schemas.microsoft.com/office/drawing/2014/main" id="{38F0C9F4-27CE-4BDE-9DED-6D2C42540486}"/>
+                <a16:creationId xmlns:a16="http://schemas.microsoft.com/office/drawing/2014/main" id="{F54583F0-2ED9-483A-B0AB-1F6C3F561E62}"/>
               </a:ext>
             </a:extLst>
           </p:cNvPr>
@@ -3228,7 +3260,7 @@
           <p:cNvPr id="11" name="Shape 9">
             <a:extLst xmlns:a="http://schemas.openxmlformats.org/drawingml/2006/main">
               <a:ext uri="{FF2B5EF4-FFF2-40B4-BE49-F238E27FC236}">
-                <a16:creationId xmlns:a16="http://schemas.microsoft.com/office/drawing/2014/main" id="{401A879C-1BF6-4095-99C6-7AC4FBBC7089}"/>
+                <a16:creationId xmlns:a16="http://schemas.microsoft.com/office/drawing/2014/main" id="{6C59BF6E-78D9-4446-93A1-6A5B27E56056}"/>
               </a:ext>
             </a:extLst>
           </p:cNvPr>
@@ -3255,7 +3287,7 @@
           <p:cNvPr id="12" name="Shape 10">
             <a:extLst xmlns:a="http://schemas.openxmlformats.org/drawingml/2006/main">
               <a:ext uri="{FF2B5EF4-FFF2-40B4-BE49-F238E27FC236}">
-                <a16:creationId xmlns:a16="http://schemas.microsoft.com/office/drawing/2014/main" id="{78534FFA-FF96-4977-9790-6B705D5924A7}"/>
+                <a16:creationId xmlns:a16="http://schemas.microsoft.com/office/drawing/2014/main" id="{9476BFF2-3CB7-4EE6-85B5-7BF0561EDB75}"/>
               </a:ext>
             </a:extLst>
           </p:cNvPr>
@@ -3280,7 +3312,7 @@
     </p:spTree>
     <p:extLst>
       <p:ext uri="{BB962C8B-B14F-4D97-AF65-F5344CB8AC3E}">
-        <p14:creationId xmlns:p14="http://schemas.microsoft.com/office/powerpoint/2010/main" val="1728959976"/>
+        <p14:creationId xmlns:p14="http://schemas.microsoft.com/office/powerpoint/2010/main" val="1239173867"/>
       </p:ext>
     </p:extLst>
   </p:cSld>
@@ -3311,7 +3343,7 @@
           <p:cNvPr id="2" name="Text 0">
             <a:extLst xmlns:a="http://schemas.openxmlformats.org/drawingml/2006/main">
               <a:ext uri="{FF2B5EF4-FFF2-40B4-BE49-F238E27FC236}">
-                <a16:creationId xmlns:a16="http://schemas.microsoft.com/office/drawing/2014/main" id="{10A25C4C-57C3-4BDE-BE43-9210861AB3FF}"/>
+                <a16:creationId xmlns:a16="http://schemas.microsoft.com/office/drawing/2014/main" id="{FA767F41-F5E3-4A08-8566-3D083A35ECEB}"/>
               </a:ext>
             </a:extLst>
           </p:cNvPr>
@@ -3357,7 +3389,7 @@
           <p:cNvPr id="3" name="Shape 1">
             <a:extLst xmlns:a="http://schemas.openxmlformats.org/drawingml/2006/main">
               <a:ext uri="{FF2B5EF4-FFF2-40B4-BE49-F238E27FC236}">
-                <a16:creationId xmlns:a16="http://schemas.microsoft.com/office/drawing/2014/main" id="{34EF64D4-78E7-4514-8A8C-2952E1FF7F52}"/>
+                <a16:creationId xmlns:a16="http://schemas.microsoft.com/office/drawing/2014/main" id="{EE704676-748F-4BFF-8647-4340CF3BD0D2}"/>
               </a:ext>
             </a:extLst>
           </p:cNvPr>
@@ -3381,14 +3413,14 @@
       </p:sp>
       <p:pic>
         <p:nvPicPr>
-          <p:cNvPr id="23" name="Image 0"/>
+          <p:cNvPr id="20" name="Image 0"/>
           <p:cNvPicPr>
             <a:picLocks xmlns:a="http://schemas.openxmlformats.org/drawingml/2006/main" noChangeAspect="1"/>
           </p:cNvPicPr>
           <p:nvPr/>
         </p:nvPicPr>
         <p:blipFill>
-          <a:blip xmlns:r="http://schemas.openxmlformats.org/officeDocument/2006/relationships" xmlns:a="http://schemas.openxmlformats.org/drawingml/2006/main" r:embed="R0f3d894925b04885"/>
+          <a:blip xmlns:r="http://schemas.openxmlformats.org/officeDocument/2006/relationships" xmlns:a="http://schemas.openxmlformats.org/drawingml/2006/main" r:embed="R904af97ae8654a15"/>
           <a:stretch xmlns:a="http://schemas.openxmlformats.org/drawingml/2006/main">
             <a:fillRect l="0" t="0" r="0" b="0"/>
           </a:stretch>
@@ -3408,7 +3440,7 @@
           <p:cNvPr id="5" name="Text 2">
             <a:extLst xmlns:a="http://schemas.openxmlformats.org/drawingml/2006/main">
               <a:ext uri="{FF2B5EF4-FFF2-40B4-BE49-F238E27FC236}">
-                <a16:creationId xmlns:a16="http://schemas.microsoft.com/office/drawing/2014/main" id="{EA7DE29F-449A-419C-A327-119801B3B0B1}"/>
+                <a16:creationId xmlns:a16="http://schemas.microsoft.com/office/drawing/2014/main" id="{E78C994F-A3C9-4C9F-9790-7F14CC5985FC}"/>
               </a:ext>
             </a:extLst>
           </p:cNvPr>
@@ -3443,7 +3475,7 @@
                 <a:ea typeface="Trebuchet MS"/>
                 <a:cs typeface="Trebuchet MS"/>
               </a:rPr>
-              <a:t>60.5% agreement makes expert labels essential</a:t>
+              <a:t>All 60 evaluation decisions are accounted for</a:t>
             </a:r>
             <a:endParaRPr sz="3000"/>
           </a:p>
@@ -3454,7 +3486,7 @@
           <p:cNvPr id="6" name="Shape 3">
             <a:extLst xmlns:a="http://schemas.openxmlformats.org/drawingml/2006/main">
               <a:ext uri="{FF2B5EF4-FFF2-40B4-BE49-F238E27FC236}">
-                <a16:creationId xmlns:a16="http://schemas.microsoft.com/office/drawing/2014/main" id="{E819C5C1-9638-47E9-B189-C77D62A7F8A8}"/>
+                <a16:creationId xmlns:a16="http://schemas.microsoft.com/office/drawing/2014/main" id="{F4276BF7-BD11-427A-8D8C-D6578032A259}"/>
               </a:ext>
             </a:extLst>
           </p:cNvPr>
@@ -3481,7 +3513,7 @@
           <p:cNvPr id="7" name="Shape 4">
             <a:extLst xmlns:a="http://schemas.openxmlformats.org/drawingml/2006/main">
               <a:ext uri="{FF2B5EF4-FFF2-40B4-BE49-F238E27FC236}">
-                <a16:creationId xmlns:a16="http://schemas.microsoft.com/office/drawing/2014/main" id="{B5B28C81-663C-4EF7-A9D9-ED761D8249BF}"/>
+                <a16:creationId xmlns:a16="http://schemas.microsoft.com/office/drawing/2014/main" id="{F65156A7-B4A3-4D02-934D-12DC414B0293}"/>
               </a:ext>
             </a:extLst>
           </p:cNvPr>
@@ -3508,7 +3540,7 @@
           <p:cNvPr id="8" name="Text 5">
             <a:extLst xmlns:a="http://schemas.openxmlformats.org/drawingml/2006/main">
               <a:ext uri="{FF2B5EF4-FFF2-40B4-BE49-F238E27FC236}">
-                <a16:creationId xmlns:a16="http://schemas.microsoft.com/office/drawing/2014/main" id="{BF0350ED-10A8-4F4C-90A7-9C219A19F4B1}"/>
+                <a16:creationId xmlns:a16="http://schemas.microsoft.com/office/drawing/2014/main" id="{062D030E-4B15-4E2D-B412-E54D65E50934}"/>
               </a:ext>
             </a:extLst>
           </p:cNvPr>
@@ -3554,7 +3586,7 @@
                 <a:ea typeface="Calibri"/>
                 <a:cs typeface="Calibri"/>
               </a:rPr>
-              <a:t>The bottleneck is the labels, not the model. That is what Phase 0 buys.</a:t>
+              <a:t>60 evaluation cases; every outcome has a reason code.</a:t>
             </a:r>
             <a:endParaRPr sz="1050"/>
           </a:p>
@@ -3565,7 +3597,7 @@
           <p:cNvPr id="9" name="Shape 6">
             <a:extLst xmlns:a="http://schemas.openxmlformats.org/drawingml/2006/main">
               <a:ext uri="{FF2B5EF4-FFF2-40B4-BE49-F238E27FC236}">
-                <a16:creationId xmlns:a16="http://schemas.microsoft.com/office/drawing/2014/main" id="{26FF6090-019B-4287-BF4C-BB290F174068}"/>
+                <a16:creationId xmlns:a16="http://schemas.microsoft.com/office/drawing/2014/main" id="{8D4174F3-C1DA-4F32-9978-34A92CD256E6}"/>
               </a:ext>
             </a:extLst>
           </p:cNvPr>
@@ -3596,7 +3628,7 @@
           <p:cNvPr id="10" name="Text 7">
             <a:extLst xmlns:a="http://schemas.openxmlformats.org/drawingml/2006/main">
               <a:ext uri="{FF2B5EF4-FFF2-40B4-BE49-F238E27FC236}">
-                <a16:creationId xmlns:a16="http://schemas.microsoft.com/office/drawing/2014/main" id="{A45CD869-0CFB-48F3-A22B-FA063D6C208F}"/>
+                <a16:creationId xmlns:a16="http://schemas.microsoft.com/office/drawing/2014/main" id="{A7C1EA5D-7D52-4ED4-AD83-8ECBEECCF734}"/>
               </a:ext>
             </a:extLst>
           </p:cNvPr>
@@ -3631,7 +3663,7 @@
           <p:cNvPr id="11" name="Text 8">
             <a:extLst xmlns:a="http://schemas.openxmlformats.org/drawingml/2006/main">
               <a:ext uri="{FF2B5EF4-FFF2-40B4-BE49-F238E27FC236}">
-                <a16:creationId xmlns:a16="http://schemas.microsoft.com/office/drawing/2014/main" id="{F8F91122-B8FA-4F14-87D2-560D627CB12B}"/>
+                <a16:creationId xmlns:a16="http://schemas.microsoft.com/office/drawing/2014/main" id="{FE5D79FF-1575-42D7-861B-5F2EA86FE970}"/>
               </a:ext>
             </a:extLst>
           </p:cNvPr>
@@ -3666,70 +3698,552 @@
                 <a:ea typeface="Calibri"/>
                 <a:cs typeface="Calibri"/>
               </a:rPr>
-              <a:t>9</a:t>
+              <a:t>8</a:t>
             </a:r>
             <a:endParaRPr sz="850"/>
           </a:p>
         </p:txBody>
       </p:sp>
-      <p:sp>
-        <p:nvSpPr>
-          <p:cNvPr id="12" name="Shape 9">
-            <a:extLst xmlns:a="http://schemas.openxmlformats.org/drawingml/2006/main">
-              <a:ext uri="{FF2B5EF4-FFF2-40B4-BE49-F238E27FC236}">
-                <a16:creationId xmlns:a16="http://schemas.microsoft.com/office/drawing/2014/main" id="{51442248-F74B-4413-876D-3E969AFB7504}"/>
-              </a:ext>
-            </a:extLst>
-          </p:cNvPr>
-          <p:cNvSpPr>
-            <a:spLocks xmlns:a="http://schemas.openxmlformats.org/drawingml/2006/main" noGrp="1"/>
-          </p:cNvSpPr>
-          <p:nvPr/>
-        </p:nvSpPr>
-        <p:spPr>
-          <a:xfrm xmlns:a="http://schemas.openxmlformats.org/drawingml/2006/main">
-            <a:off x="566928" y="2395728"/>
-            <a:ext cx="5390388" cy="1874520"/>
-          </a:xfrm>
-          <a:prstGeom xmlns:a="http://schemas.openxmlformats.org/drawingml/2006/main" prst="rect">
-            <a:avLst/>
-          </a:prstGeom>
-          <a:solidFill xmlns:a="http://schemas.openxmlformats.org/drawingml/2006/main">
-            <a:srgbClr val="FFFFFF"/>
-          </a:solidFill>
-          <a:ln xmlns:a="http://schemas.openxmlformats.org/drawingml/2006/main" w="12700">
-            <a:solidFill>
-              <a:srgbClr val="D9E3EA"/>
-            </a:solidFill>
-            <a:prstDash val="solid"/>
-          </a:ln>
-          <a:effectLst xmlns:a="http://schemas.openxmlformats.org/drawingml/2006/main">
-            <a:outerShdw blurRad="88900" dist="38100" dir="8100000" sx="100000" sy="100000" kx="0" ky="0" algn="bl" rotWithShape="0">
-              <a:srgbClr val="1C2440">
-                <a:alpha val="13000"/>
-              </a:srgbClr>
-            </a:outerShdw>
-          </a:effectLst>
-        </p:spPr>
-      </p:sp>
-      <p:sp>
-        <p:nvSpPr>
-          <p:cNvPr id="13" name="Shape 10">
-            <a:extLst xmlns:a="http://schemas.openxmlformats.org/drawingml/2006/main">
-              <a:ext uri="{FF2B5EF4-FFF2-40B4-BE49-F238E27FC236}">
-                <a16:creationId xmlns:a16="http://schemas.microsoft.com/office/drawing/2014/main" id="{39E852DC-F8EB-47F3-AFA3-0CBB762ED499}"/>
-              </a:ext>
-            </a:extLst>
-          </p:cNvPr>
-          <p:cNvSpPr>
-            <a:spLocks xmlns:a="http://schemas.openxmlformats.org/drawingml/2006/main" noGrp="1"/>
-          </p:cNvSpPr>
-          <p:nvPr/>
-        </p:nvSpPr>
-        <p:spPr>
-          <a:xfrm xmlns:a="http://schemas.openxmlformats.org/drawingml/2006/main">
-            <a:off x="566928" y="2395728"/>
-            <a:ext cx="5390388" cy="457200"/>
+      <p:graphicFrame>
+        <p:nvGraphicFramePr>
+          <p:cNvPr id="28" name="Table 0"/>
+          <p:cNvGraphicFramePr/>
+          <p:nvPr/>
+        </p:nvGraphicFramePr>
+        <p:xfrm>
+          <a:off xmlns:a="http://schemas.openxmlformats.org/drawingml/2006/main" x="566928" y="2395728"/>
+          <a:ext xmlns:a="http://schemas.openxmlformats.org/drawingml/2006/main" cx="11055096" cy="914400"/>
+        </p:xfrm>
+        <a:graphic xmlns:a="http://schemas.openxmlformats.org/drawingml/2006/main">
+          <a:graphicData uri="http://schemas.openxmlformats.org/drawingml/2006/table">
+            <a:tbl>
+              <a:tblPr/>
+              <a:tblGrid>
+                <a:gridCol w="3931920"/>
+                <a:gridCol w="7123176"/>
+              </a:tblGrid>
+              <a:tr h="329184">
+                <a:tc>
+                  <a:txBody>
+                    <a:bodyPr/>
+                    <a:lstStyle/>
+                    <a:p>
+                      <a:pPr marL="0" indent="0">
+                        <a:buNone/>
+                      </a:pPr>
+                      <a:r>
+                        <a:rPr sz="1100" b="1" spc="100">
+                          <a:solidFill>
+                            <a:srgbClr val="FFFFFF"/>
+                          </a:solidFill>
+                        </a:rPr>
+                        <a:t>WHAT HAPPENED</a:t>
+                      </a:r>
+                      <a:endParaRPr sz="1100"/>
+                    </a:p>
+                  </a:txBody>
+                  <a:tcPr marL="101600" marR="101600" marT="25400" marB="25400" anchor="ctr">
+                    <a:lnL w="12700" cmpd="sng">
+                      <a:solidFill>
+                        <a:srgbClr val="D9E3EA"/>
+                      </a:solidFill>
+                      <a:prstDash val="solid"/>
+                    </a:lnL>
+                    <a:lnR w="12700" cmpd="sng">
+                      <a:solidFill>
+                        <a:srgbClr val="D9E3EA"/>
+                      </a:solidFill>
+                      <a:prstDash val="solid"/>
+                    </a:lnR>
+                    <a:lnT w="12700" cmpd="sng">
+                      <a:solidFill>
+                        <a:srgbClr val="D9E3EA"/>
+                      </a:solidFill>
+                      <a:prstDash val="solid"/>
+                    </a:lnT>
+                    <a:lnB w="12700" cmpd="sng">
+                      <a:solidFill>
+                        <a:srgbClr val="D9E3EA"/>
+                      </a:solidFill>
+                      <a:prstDash val="solid"/>
+                    </a:lnB>
+                    <a:solidFill>
+                      <a:srgbClr val="445A69"/>
+                    </a:solidFill>
+                  </a:tcPr>
+                </a:tc>
+                <a:tc>
+                  <a:txBody>
+                    <a:bodyPr/>
+                    <a:lstStyle/>
+                    <a:p>
+                      <a:pPr marL="0" indent="0">
+                        <a:buNone/>
+                      </a:pPr>
+                      <a:r>
+                        <a:rPr sz="1100" b="1" spc="100">
+                          <a:solidFill>
+                            <a:srgbClr val="1D2A32"/>
+                          </a:solidFill>
+                        </a:rPr>
+                        <a:t>HOW OFTEN, IN 60 DECISIONS</a:t>
+                      </a:r>
+                      <a:endParaRPr sz="1100"/>
+                    </a:p>
+                  </a:txBody>
+                  <a:tcPr marL="101600" marR="101600" marT="25400" marB="25400" anchor="ctr">
+                    <a:lnL w="12700" cmpd="sng">
+                      <a:solidFill>
+                        <a:srgbClr val="D9E3EA"/>
+                      </a:solidFill>
+                      <a:prstDash val="solid"/>
+                    </a:lnL>
+                    <a:lnR w="12700" cmpd="sng">
+                      <a:solidFill>
+                        <a:srgbClr val="D9E3EA"/>
+                      </a:solidFill>
+                      <a:prstDash val="solid"/>
+                    </a:lnR>
+                    <a:lnT w="12700" cmpd="sng">
+                      <a:solidFill>
+                        <a:srgbClr val="D9E3EA"/>
+                      </a:solidFill>
+                      <a:prstDash val="solid"/>
+                    </a:lnT>
+                    <a:lnB w="12700" cmpd="sng">
+                      <a:solidFill>
+                        <a:srgbClr val="D9E3EA"/>
+                      </a:solidFill>
+                      <a:prstDash val="solid"/>
+                    </a:lnB>
+                    <a:solidFill>
+                      <a:srgbClr val="2A78D6"/>
+                    </a:solidFill>
+                  </a:tcPr>
+                </a:tc>
+              </a:tr>
+              <a:tr h="338328">
+                <a:tc>
+                  <a:txBody>
+                    <a:bodyPr/>
+                    <a:lstStyle/>
+                    <a:p>
+                      <a:pPr marL="0" indent="0">
+                        <a:buNone/>
+                      </a:pPr>
+                      <a:r>
+                        <a:rPr sz="1050" b="1">
+                          <a:solidFill>
+                            <a:srgbClr val="24343F"/>
+                          </a:solidFill>
+                        </a:rPr>
+                        <a:t>Produced a proposal; validation checks passed</a:t>
+                      </a:r>
+                      <a:endParaRPr sz="1050"/>
+                    </a:p>
+                  </a:txBody>
+                  <a:tcPr marL="101600" marR="101600" marT="25400" marB="25400" anchor="ctr">
+                    <a:lnL w="12700" cmpd="sng">
+                      <a:solidFill>
+                        <a:srgbClr val="D9E3EA"/>
+                      </a:solidFill>
+                      <a:prstDash val="solid"/>
+                    </a:lnL>
+                    <a:lnR w="12700" cmpd="sng">
+                      <a:solidFill>
+                        <a:srgbClr val="D9E3EA"/>
+                      </a:solidFill>
+                      <a:prstDash val="solid"/>
+                    </a:lnR>
+                    <a:lnT w="12700" cmpd="sng">
+                      <a:solidFill>
+                        <a:srgbClr val="D9E3EA"/>
+                      </a:solidFill>
+                      <a:prstDash val="solid"/>
+                    </a:lnT>
+                    <a:lnB w="12700" cmpd="sng">
+                      <a:solidFill>
+                        <a:srgbClr val="D9E3EA"/>
+                      </a:solidFill>
+                      <a:prstDash val="solid"/>
+                    </a:lnB>
+                    <a:solidFill>
+                      <a:srgbClr val="FFFFFF"/>
+                    </a:solidFill>
+                  </a:tcPr>
+                </a:tc>
+                <a:tc>
+                  <a:txBody>
+                    <a:bodyPr/>
+                    <a:lstStyle/>
+                    <a:p>
+                      <a:pPr marL="0" indent="0">
+                        <a:buNone/>
+                      </a:pPr>
+                      <a:r>
+                        <a:rPr sz="1050">
+                          <a:solidFill>
+                            <a:srgbClr val="1B2730"/>
+                          </a:solidFill>
+                        </a:rPr>
+                        <a:t>52</a:t>
+                      </a:r>
+                      <a:endParaRPr sz="1050"/>
+                    </a:p>
+                  </a:txBody>
+                  <a:tcPr marL="101600" marR="101600" marT="25400" marB="25400" anchor="ctr">
+                    <a:lnL w="12700" cmpd="sng">
+                      <a:solidFill>
+                        <a:srgbClr val="D9E3EA"/>
+                      </a:solidFill>
+                      <a:prstDash val="solid"/>
+                    </a:lnL>
+                    <a:lnR w="12700" cmpd="sng">
+                      <a:solidFill>
+                        <a:srgbClr val="D9E3EA"/>
+                      </a:solidFill>
+                      <a:prstDash val="solid"/>
+                    </a:lnR>
+                    <a:lnT w="12700" cmpd="sng">
+                      <a:solidFill>
+                        <a:srgbClr val="D9E3EA"/>
+                      </a:solidFill>
+                      <a:prstDash val="solid"/>
+                    </a:lnT>
+                    <a:lnB w="12700" cmpd="sng">
+                      <a:solidFill>
+                        <a:srgbClr val="D9E3EA"/>
+                      </a:solidFill>
+                      <a:prstDash val="solid"/>
+                    </a:lnB>
+                    <a:solidFill>
+                      <a:srgbClr val="FFFFFF"/>
+                    </a:solidFill>
+                  </a:tcPr>
+                </a:tc>
+              </a:tr>
+              <a:tr h="338328">
+                <a:tc>
+                  <a:txBody>
+                    <a:bodyPr/>
+                    <a:lstStyle/>
+                    <a:p>
+                      <a:pPr marL="0" indent="0">
+                        <a:buNone/>
+                      </a:pPr>
+                      <a:r>
+                        <a:rPr sz="1050" b="1">
+                          <a:solidFill>
+                            <a:srgbClr val="24343F"/>
+                          </a:solidFill>
+                        </a:rPr>
+                        <a:t>Quote was not actually in the complaint</a:t>
+                      </a:r>
+                      <a:endParaRPr sz="1050"/>
+                    </a:p>
+                  </a:txBody>
+                  <a:tcPr marL="101600" marR="101600" marT="25400" marB="25400" anchor="ctr">
+                    <a:lnL w="12700" cmpd="sng">
+                      <a:solidFill>
+                        <a:srgbClr val="D9E3EA"/>
+                      </a:solidFill>
+                      <a:prstDash val="solid"/>
+                    </a:lnL>
+                    <a:lnR w="12700" cmpd="sng">
+                      <a:solidFill>
+                        <a:srgbClr val="D9E3EA"/>
+                      </a:solidFill>
+                      <a:prstDash val="solid"/>
+                    </a:lnR>
+                    <a:lnT w="12700" cmpd="sng">
+                      <a:solidFill>
+                        <a:srgbClr val="D9E3EA"/>
+                      </a:solidFill>
+                      <a:prstDash val="solid"/>
+                    </a:lnT>
+                    <a:lnB w="12700" cmpd="sng">
+                      <a:solidFill>
+                        <a:srgbClr val="D9E3EA"/>
+                      </a:solidFill>
+                      <a:prstDash val="solid"/>
+                    </a:lnB>
+                    <a:solidFill>
+                      <a:srgbClr val="EFF5F9"/>
+                    </a:solidFill>
+                  </a:tcPr>
+                </a:tc>
+                <a:tc>
+                  <a:txBody>
+                    <a:bodyPr/>
+                    <a:lstStyle/>
+                    <a:p>
+                      <a:pPr marL="0" indent="0">
+                        <a:buNone/>
+                      </a:pPr>
+                      <a:r>
+                        <a:rPr sz="1050">
+                          <a:solidFill>
+                            <a:srgbClr val="1B2730"/>
+                          </a:solidFill>
+                        </a:rPr>
+                        <a:t>4 — flagged for human review</a:t>
+                      </a:r>
+                      <a:endParaRPr sz="1050"/>
+                    </a:p>
+                  </a:txBody>
+                  <a:tcPr marL="101600" marR="101600" marT="25400" marB="25400" anchor="ctr">
+                    <a:lnL w="12700" cmpd="sng">
+                      <a:solidFill>
+                        <a:srgbClr val="D9E3EA"/>
+                      </a:solidFill>
+                      <a:prstDash val="solid"/>
+                    </a:lnL>
+                    <a:lnR w="12700" cmpd="sng">
+                      <a:solidFill>
+                        <a:srgbClr val="D9E3EA"/>
+                      </a:solidFill>
+                      <a:prstDash val="solid"/>
+                    </a:lnR>
+                    <a:lnT w="12700" cmpd="sng">
+                      <a:solidFill>
+                        <a:srgbClr val="D9E3EA"/>
+                      </a:solidFill>
+                      <a:prstDash val="solid"/>
+                    </a:lnT>
+                    <a:lnB w="12700" cmpd="sng">
+                      <a:solidFill>
+                        <a:srgbClr val="D9E3EA"/>
+                      </a:solidFill>
+                      <a:prstDash val="solid"/>
+                    </a:lnB>
+                    <a:solidFill>
+                      <a:srgbClr val="EFF5F9"/>
+                    </a:solidFill>
+                  </a:tcPr>
+                </a:tc>
+              </a:tr>
+              <a:tr h="338328">
+                <a:tc>
+                  <a:txBody>
+                    <a:bodyPr/>
+                    <a:lstStyle/>
+                    <a:p>
+                      <a:pPr marL="0" indent="0">
+                        <a:buNone/>
+                      </a:pPr>
+                      <a:r>
+                        <a:rPr sz="1050" b="1">
+                          <a:solidFill>
+                            <a:srgbClr val="24343F"/>
+                          </a:solidFill>
+                        </a:rPr>
+                        <a:t>Confidence below the 0.70 threshold</a:t>
+                      </a:r>
+                      <a:endParaRPr sz="1050"/>
+                    </a:p>
+                  </a:txBody>
+                  <a:tcPr marL="101600" marR="101600" marT="25400" marB="25400" anchor="ctr">
+                    <a:lnL w="12700" cmpd="sng">
+                      <a:solidFill>
+                        <a:srgbClr val="D9E3EA"/>
+                      </a:solidFill>
+                      <a:prstDash val="solid"/>
+                    </a:lnL>
+                    <a:lnR w="12700" cmpd="sng">
+                      <a:solidFill>
+                        <a:srgbClr val="D9E3EA"/>
+                      </a:solidFill>
+                      <a:prstDash val="solid"/>
+                    </a:lnR>
+                    <a:lnT w="12700" cmpd="sng">
+                      <a:solidFill>
+                        <a:srgbClr val="D9E3EA"/>
+                      </a:solidFill>
+                      <a:prstDash val="solid"/>
+                    </a:lnT>
+                    <a:lnB w="12700" cmpd="sng">
+                      <a:solidFill>
+                        <a:srgbClr val="D9E3EA"/>
+                      </a:solidFill>
+                      <a:prstDash val="solid"/>
+                    </a:lnB>
+                    <a:solidFill>
+                      <a:srgbClr val="FFFFFF"/>
+                    </a:solidFill>
+                  </a:tcPr>
+                </a:tc>
+                <a:tc>
+                  <a:txBody>
+                    <a:bodyPr/>
+                    <a:lstStyle/>
+                    <a:p>
+                      <a:pPr marL="0" indent="0">
+                        <a:buNone/>
+                      </a:pPr>
+                      <a:r>
+                        <a:rPr sz="1050">
+                          <a:solidFill>
+                            <a:srgbClr val="1B2730"/>
+                          </a:solidFill>
+                        </a:rPr>
+                        <a:t>4 — flagged for human review</a:t>
+                      </a:r>
+                      <a:endParaRPr sz="1050"/>
+                    </a:p>
+                  </a:txBody>
+                  <a:tcPr marL="101600" marR="101600" marT="25400" marB="25400" anchor="ctr">
+                    <a:lnL w="12700" cmpd="sng">
+                      <a:solidFill>
+                        <a:srgbClr val="D9E3EA"/>
+                      </a:solidFill>
+                      <a:prstDash val="solid"/>
+                    </a:lnL>
+                    <a:lnR w="12700" cmpd="sng">
+                      <a:solidFill>
+                        <a:srgbClr val="D9E3EA"/>
+                      </a:solidFill>
+                      <a:prstDash val="solid"/>
+                    </a:lnR>
+                    <a:lnT w="12700" cmpd="sng">
+                      <a:solidFill>
+                        <a:srgbClr val="D9E3EA"/>
+                      </a:solidFill>
+                      <a:prstDash val="solid"/>
+                    </a:lnT>
+                    <a:lnB w="12700" cmpd="sng">
+                      <a:solidFill>
+                        <a:srgbClr val="D9E3EA"/>
+                      </a:solidFill>
+                      <a:prstDash val="solid"/>
+                    </a:lnB>
+                    <a:solidFill>
+                      <a:srgbClr val="FFFFFF"/>
+                    </a:solidFill>
+                  </a:tcPr>
+                </a:tc>
+              </a:tr>
+              <a:tr h="338328">
+                <a:tc>
+                  <a:txBody>
+                    <a:bodyPr/>
+                    <a:lstStyle/>
+                    <a:p>
+                      <a:pPr marL="0" indent="0">
+                        <a:buNone/>
+                      </a:pPr>
+                      <a:r>
+                        <a:rPr sz="1050" b="1">
+                          <a:solidFill>
+                            <a:srgbClr val="24343F"/>
+                          </a:solidFill>
+                        </a:rPr>
+                        <a:t>Cases without a recorded outcome</a:t>
+                      </a:r>
+                      <a:endParaRPr sz="1050"/>
+                    </a:p>
+                  </a:txBody>
+                  <a:tcPr marL="101600" marR="101600" marT="25400" marB="25400" anchor="ctr">
+                    <a:lnL w="12700" cmpd="sng">
+                      <a:solidFill>
+                        <a:srgbClr val="D9E3EA"/>
+                      </a:solidFill>
+                      <a:prstDash val="solid"/>
+                    </a:lnL>
+                    <a:lnR w="12700" cmpd="sng">
+                      <a:solidFill>
+                        <a:srgbClr val="D9E3EA"/>
+                      </a:solidFill>
+                      <a:prstDash val="solid"/>
+                    </a:lnR>
+                    <a:lnT w="12700" cmpd="sng">
+                      <a:solidFill>
+                        <a:srgbClr val="D9E3EA"/>
+                      </a:solidFill>
+                      <a:prstDash val="solid"/>
+                    </a:lnT>
+                    <a:lnB w="12700" cmpd="sng">
+                      <a:solidFill>
+                        <a:srgbClr val="D9E3EA"/>
+                      </a:solidFill>
+                      <a:prstDash val="solid"/>
+                    </a:lnB>
+                    <a:solidFill>
+                      <a:srgbClr val="EFF5F9"/>
+                    </a:solidFill>
+                  </a:tcPr>
+                </a:tc>
+                <a:tc>
+                  <a:txBody>
+                    <a:bodyPr/>
+                    <a:lstStyle/>
+                    <a:p>
+                      <a:pPr marL="0" indent="0">
+                        <a:buNone/>
+                      </a:pPr>
+                      <a:r>
+                        <a:rPr sz="1050">
+                          <a:solidFill>
+                            <a:srgbClr val="1B2730"/>
+                          </a:solidFill>
+                        </a:rPr>
+                        <a:t>0</a:t>
+                      </a:r>
+                      <a:endParaRPr sz="1050"/>
+                    </a:p>
+                  </a:txBody>
+                  <a:tcPr marL="101600" marR="101600" marT="25400" marB="25400" anchor="ctr">
+                    <a:lnL w="12700" cmpd="sng">
+                      <a:solidFill>
+                        <a:srgbClr val="D9E3EA"/>
+                      </a:solidFill>
+                      <a:prstDash val="solid"/>
+                    </a:lnL>
+                    <a:lnR w="12700" cmpd="sng">
+                      <a:solidFill>
+                        <a:srgbClr val="D9E3EA"/>
+                      </a:solidFill>
+                      <a:prstDash val="solid"/>
+                    </a:lnR>
+                    <a:lnT w="12700" cmpd="sng">
+                      <a:solidFill>
+                        <a:srgbClr val="D9E3EA"/>
+                      </a:solidFill>
+                      <a:prstDash val="solid"/>
+                    </a:lnT>
+                    <a:lnB w="12700" cmpd="sng">
+                      <a:solidFill>
+                        <a:srgbClr val="D9E3EA"/>
+                      </a:solidFill>
+                      <a:prstDash val="solid"/>
+                    </a:lnB>
+                    <a:solidFill>
+                      <a:srgbClr val="EFF5F9"/>
+                    </a:solidFill>
+                  </a:tcPr>
+                </a:tc>
+              </a:tr>
+            </a:tbl>
+          </a:graphicData>
+        </a:graphic>
+      </p:graphicFrame>
+      <p:sp>
+        <p:nvSpPr>
+          <p:cNvPr id="13" name="Shape 9">
+            <a:extLst xmlns:a="http://schemas.openxmlformats.org/drawingml/2006/main">
+              <a:ext uri="{FF2B5EF4-FFF2-40B4-BE49-F238E27FC236}">
+                <a16:creationId xmlns:a16="http://schemas.microsoft.com/office/drawing/2014/main" id="{BA5697E4-693B-443D-B872-6C4AF59B87B8}"/>
+              </a:ext>
+            </a:extLst>
+          </p:cNvPr>
+          <p:cNvSpPr>
+            <a:spLocks xmlns:a="http://schemas.openxmlformats.org/drawingml/2006/main" noGrp="1"/>
+          </p:cNvSpPr>
+          <p:nvPr/>
+        </p:nvSpPr>
+        <p:spPr>
+          <a:xfrm xmlns:a="http://schemas.openxmlformats.org/drawingml/2006/main">
+            <a:off x="566928" y="4306824"/>
+            <a:ext cx="11055096" cy="640080"/>
           </a:xfrm>
           <a:prstGeom xmlns:a="http://schemas.openxmlformats.org/drawingml/2006/main" prst="rect">
             <a:avLst/>
@@ -3741,22 +4255,49 @@
       </p:sp>
       <p:sp>
         <p:nvSpPr>
-          <p:cNvPr id="14" name="Text 11">
-            <a:extLst xmlns:a="http://schemas.openxmlformats.org/drawingml/2006/main">
-              <a:ext uri="{FF2B5EF4-FFF2-40B4-BE49-F238E27FC236}">
-                <a16:creationId xmlns:a16="http://schemas.microsoft.com/office/drawing/2014/main" id="{DA8E3CAF-26FF-4359-8EDF-8B3CD3C3A30F}"/>
-              </a:ext>
-            </a:extLst>
-          </p:cNvPr>
-          <p:cNvSpPr>
-            <a:spLocks xmlns:a="http://schemas.openxmlformats.org/drawingml/2006/main" noGrp="1"/>
-          </p:cNvSpPr>
-          <p:nvPr/>
-        </p:nvSpPr>
-        <p:spPr>
-          <a:xfrm xmlns:a="http://schemas.openxmlformats.org/drawingml/2006/main">
-            <a:off x="768096" y="2395728"/>
-            <a:ext cx="5024628" cy="457200"/>
+          <p:cNvPr id="14" name="Shape 10">
+            <a:extLst xmlns:a="http://schemas.openxmlformats.org/drawingml/2006/main">
+              <a:ext uri="{FF2B5EF4-FFF2-40B4-BE49-F238E27FC236}">
+                <a16:creationId xmlns:a16="http://schemas.microsoft.com/office/drawing/2014/main" id="{C32452CF-E5A8-4881-8C96-FEDC013C53F7}"/>
+              </a:ext>
+            </a:extLst>
+          </p:cNvPr>
+          <p:cNvSpPr>
+            <a:spLocks xmlns:a="http://schemas.openxmlformats.org/drawingml/2006/main" noGrp="1"/>
+          </p:cNvSpPr>
+          <p:nvPr/>
+        </p:nvSpPr>
+        <p:spPr>
+          <a:xfrm xmlns:a="http://schemas.openxmlformats.org/drawingml/2006/main">
+            <a:off x="566928" y="4306824"/>
+            <a:ext cx="82296" cy="640080"/>
+          </a:xfrm>
+          <a:prstGeom xmlns:a="http://schemas.openxmlformats.org/drawingml/2006/main" prst="rect">
+            <a:avLst/>
+          </a:prstGeom>
+          <a:solidFill xmlns:a="http://schemas.openxmlformats.org/drawingml/2006/main">
+            <a:srgbClr val="2A78D6"/>
+          </a:solidFill>
+        </p:spPr>
+      </p:sp>
+      <p:sp>
+        <p:nvSpPr>
+          <p:cNvPr id="15" name="Text 11">
+            <a:extLst xmlns:a="http://schemas.openxmlformats.org/drawingml/2006/main">
+              <a:ext uri="{FF2B5EF4-FFF2-40B4-BE49-F238E27FC236}">
+                <a16:creationId xmlns:a16="http://schemas.microsoft.com/office/drawing/2014/main" id="{702751CC-BFDE-4F56-9C13-C725FF460F90}"/>
+              </a:ext>
+            </a:extLst>
+          </p:cNvPr>
+          <p:cNvSpPr>
+            <a:spLocks xmlns:a="http://schemas.openxmlformats.org/drawingml/2006/main" noGrp="1"/>
+          </p:cNvSpPr>
+          <p:nvPr/>
+        </p:nvSpPr>
+        <p:spPr>
+          <a:xfrm xmlns:a="http://schemas.openxmlformats.org/drawingml/2006/main">
+            <a:off x="822960" y="4306824"/>
+            <a:ext cx="10597896" cy="640080"/>
           </a:xfrm>
           <a:prstGeom xmlns:a="http://schemas.openxmlformats.org/drawingml/2006/main" prst="rect">
             <a:avLst/>
@@ -3771,7 +4312,7 @@
               <a:buNone/>
             </a:pPr>
             <a:r>
-              <a:rPr sz="1300" b="1" spc="200">
+              <a:rPr sz="1250" b="1">
                 <a:solidFill>
                   <a:srgbClr val="FFFFFF"/>
                 </a:solidFill>
@@ -3779,313 +4320,16 @@
                 <a:ea typeface="Calibri"/>
                 <a:cs typeface="Calibri"/>
               </a:rPr>
-              <a:t>What I measured</a:t>
-            </a:r>
-            <a:endParaRPr sz="1300"/>
-          </a:p>
-        </p:txBody>
-      </p:sp>
-      <p:sp>
-        <p:nvSpPr>
-          <p:cNvPr id="15" name="Text 12">
-            <a:extLst xmlns:a="http://schemas.openxmlformats.org/drawingml/2006/main">
-              <a:ext uri="{FF2B5EF4-FFF2-40B4-BE49-F238E27FC236}">
-                <a16:creationId xmlns:a16="http://schemas.microsoft.com/office/drawing/2014/main" id="{6415FA64-4146-423F-B5D6-80A1B59051C0}"/>
-              </a:ext>
-            </a:extLst>
-          </p:cNvPr>
-          <p:cNvSpPr>
-            <a:spLocks xmlns:a="http://schemas.openxmlformats.org/drawingml/2006/main" noGrp="1"/>
-          </p:cNvSpPr>
-          <p:nvPr/>
-        </p:nvSpPr>
-        <p:spPr>
-          <a:xfrm xmlns:a="http://schemas.openxmlformats.org/drawingml/2006/main">
-            <a:off x="768096" y="2962656"/>
-            <a:ext cx="4988052" cy="1143000"/>
-          </a:xfrm>
-          <a:prstGeom xmlns:a="http://schemas.openxmlformats.org/drawingml/2006/main" prst="rect">
-            <a:avLst/>
-          </a:prstGeom>
-          <a:noFill xmlns:a="http://schemas.openxmlformats.org/drawingml/2006/main"/>
-        </p:spPr>
-        <p:txBody>
-          <a:bodyPr xmlns:a="http://schemas.openxmlformats.org/drawingml/2006/main" wrap="square" lIns="0" tIns="0" rIns="0" bIns="0" anchor="t"/>
-          <a:lstStyle xmlns:a="http://schemas.openxmlformats.org/drawingml/2006/main"/>
-          <a:p xmlns:a="http://schemas.openxmlformats.org/drawingml/2006/main">
-            <a:pPr marL="152400" indent="-152400">
-              <a:spcAft>
-                <a:spcPts val="600"/>
-              </a:spcAft>
-              <a:buSzPct val="100000"/>
-              <a:buChar char="•"/>
-            </a:pPr>
-            <a:r>
-              <a:rPr sz="1150">
-                <a:solidFill>
-                  <a:srgbClr val="1B2730"/>
-                </a:solidFill>
-                <a:latin typeface="Calibri"/>
-                <a:ea typeface="Calibri"/>
-                <a:cs typeface="Calibri"/>
-              </a:rPr>
-              <a:t>60.5% correct team (gpt-4o, 240 complaints)</a:t>
-            </a:r>
-            <a:endParaRPr sz="1150"/>
-          </a:p>
-          <a:p xmlns:a="http://schemas.openxmlformats.org/drawingml/2006/main">
-            <a:pPr marL="152400" indent="-152400">
-              <a:spcAft>
-                <a:spcPts val="600"/>
-              </a:spcAft>
-              <a:buSzPct val="100000"/>
-              <a:buChar char="•"/>
-            </a:pPr>
-            <a:r>
-              <a:rPr sz="1150">
-                <a:solidFill>
-                  <a:srgbClr val="1B2730"/>
-                </a:solidFill>
-                <a:latin typeface="Calibri"/>
-                <a:ea typeface="Calibri"/>
-                <a:cs typeface="Calibri"/>
-              </a:rPr>
-              <a:t>A 6× more expensive model buys 4 points</a:t>
-            </a:r>
-            <a:endParaRPr sz="1150"/>
-          </a:p>
-          <a:p xmlns:a="http://schemas.openxmlformats.org/drawingml/2006/main">
-            <a:pPr marL="152400" indent="-152400">
-              <a:spcAft>
-                <a:spcPts val="600"/>
-              </a:spcAft>
-              <a:buSzPct val="100000"/>
-              <a:buChar char="•"/>
-            </a:pPr>
-            <a:r>
-              <a:rPr sz="1150">
-                <a:solidFill>
-                  <a:srgbClr val="1B2730"/>
-                </a:solidFill>
-                <a:latin typeface="Calibri"/>
-                <a:ea typeface="Calibri"/>
-                <a:cs typeface="Calibri"/>
-              </a:rPr>
-              <a:t>So the bottleneck is not the model</a:t>
-            </a:r>
-            <a:endParaRPr sz="1150"/>
-          </a:p>
-        </p:txBody>
-      </p:sp>
-      <p:sp>
-        <p:nvSpPr>
-          <p:cNvPr id="16" name="Shape 13">
-            <a:extLst xmlns:a="http://schemas.openxmlformats.org/drawingml/2006/main">
-              <a:ext uri="{FF2B5EF4-FFF2-40B4-BE49-F238E27FC236}">
-                <a16:creationId xmlns:a16="http://schemas.microsoft.com/office/drawing/2014/main" id="{06124659-08F8-4FFF-BF5E-B2DBA58F1A2D}"/>
-              </a:ext>
-            </a:extLst>
-          </p:cNvPr>
-          <p:cNvSpPr>
-            <a:spLocks xmlns:a="http://schemas.openxmlformats.org/drawingml/2006/main" noGrp="1"/>
-          </p:cNvSpPr>
-          <p:nvPr/>
-        </p:nvSpPr>
-        <p:spPr>
-          <a:xfrm xmlns:a="http://schemas.openxmlformats.org/drawingml/2006/main">
-            <a:off x="6231636" y="2395728"/>
-            <a:ext cx="5390388" cy="1874520"/>
-          </a:xfrm>
-          <a:prstGeom xmlns:a="http://schemas.openxmlformats.org/drawingml/2006/main" prst="rect">
-            <a:avLst/>
-          </a:prstGeom>
-          <a:solidFill xmlns:a="http://schemas.openxmlformats.org/drawingml/2006/main">
-            <a:srgbClr val="FFFFFF"/>
-          </a:solidFill>
-          <a:ln xmlns:a="http://schemas.openxmlformats.org/drawingml/2006/main" w="12700">
-            <a:solidFill>
-              <a:srgbClr val="D9E3EA"/>
-            </a:solidFill>
-            <a:prstDash val="solid"/>
-          </a:ln>
-          <a:effectLst xmlns:a="http://schemas.openxmlformats.org/drawingml/2006/main">
-            <a:outerShdw blurRad="88900" dist="38100" dir="8100000" sx="100000" sy="100000" kx="0" ky="0" algn="bl" rotWithShape="0">
-              <a:srgbClr val="1C2440">
-                <a:alpha val="13000"/>
-              </a:srgbClr>
-            </a:outerShdw>
-          </a:effectLst>
-        </p:spPr>
-      </p:sp>
-      <p:sp>
-        <p:nvSpPr>
-          <p:cNvPr id="17" name="Shape 14">
-            <a:extLst xmlns:a="http://schemas.openxmlformats.org/drawingml/2006/main">
-              <a:ext uri="{FF2B5EF4-FFF2-40B4-BE49-F238E27FC236}">
-                <a16:creationId xmlns:a16="http://schemas.microsoft.com/office/drawing/2014/main" id="{02969ADD-8F8D-4765-B6B8-72FC8BBF42DD}"/>
-              </a:ext>
-            </a:extLst>
-          </p:cNvPr>
-          <p:cNvSpPr>
-            <a:spLocks xmlns:a="http://schemas.openxmlformats.org/drawingml/2006/main" noGrp="1"/>
-          </p:cNvSpPr>
-          <p:nvPr/>
-        </p:nvSpPr>
-        <p:spPr>
-          <a:xfrm xmlns:a="http://schemas.openxmlformats.org/drawingml/2006/main">
-            <a:off x="6231636" y="2395728"/>
-            <a:ext cx="5390388" cy="457200"/>
-          </a:xfrm>
-          <a:prstGeom xmlns:a="http://schemas.openxmlformats.org/drawingml/2006/main" prst="rect">
-            <a:avLst/>
-          </a:prstGeom>
-          <a:solidFill xmlns:a="http://schemas.openxmlformats.org/drawingml/2006/main">
-            <a:srgbClr val="445A69"/>
-          </a:solidFill>
-        </p:spPr>
-      </p:sp>
-      <p:sp>
-        <p:nvSpPr>
-          <p:cNvPr id="18" name="Text 15">
-            <a:extLst xmlns:a="http://schemas.openxmlformats.org/drawingml/2006/main">
-              <a:ext uri="{FF2B5EF4-FFF2-40B4-BE49-F238E27FC236}">
-                <a16:creationId xmlns:a16="http://schemas.microsoft.com/office/drawing/2014/main" id="{303969F6-A7A6-41DC-92DC-58C5FD5A8ACE}"/>
-              </a:ext>
-            </a:extLst>
-          </p:cNvPr>
-          <p:cNvSpPr>
-            <a:spLocks xmlns:a="http://schemas.openxmlformats.org/drawingml/2006/main" noGrp="1"/>
-          </p:cNvSpPr>
-          <p:nvPr/>
-        </p:nvSpPr>
-        <p:spPr>
-          <a:xfrm xmlns:a="http://schemas.openxmlformats.org/drawingml/2006/main">
-            <a:off x="6432804" y="2395728"/>
-            <a:ext cx="5024628" cy="457200"/>
-          </a:xfrm>
-          <a:prstGeom xmlns:a="http://schemas.openxmlformats.org/drawingml/2006/main" prst="rect">
-            <a:avLst/>
-          </a:prstGeom>
-          <a:noFill xmlns:a="http://schemas.openxmlformats.org/drawingml/2006/main"/>
-        </p:spPr>
-        <p:txBody>
-          <a:bodyPr xmlns:a="http://schemas.openxmlformats.org/drawingml/2006/main" wrap="square" lIns="0" tIns="0" rIns="0" bIns="0" anchor="ctr"/>
-          <a:lstStyle xmlns:a="http://schemas.openxmlformats.org/drawingml/2006/main"/>
-          <a:p xmlns:a="http://schemas.openxmlformats.org/drawingml/2006/main">
-            <a:pPr marL="0" indent="0">
-              <a:buNone/>
-            </a:pPr>
-            <a:r>
-              <a:rPr sz="1300" b="1" spc="200">
-                <a:solidFill>
-                  <a:srgbClr val="FFFFFF"/>
-                </a:solidFill>
-                <a:latin typeface="Calibri"/>
-                <a:ea typeface="Calibri"/>
-                <a:cs typeface="Calibri"/>
-              </a:rPr>
-              <a:t>Why the number is what it is</a:t>
-            </a:r>
-            <a:endParaRPr sz="1300"/>
-          </a:p>
-        </p:txBody>
-      </p:sp>
-      <p:sp>
-        <p:nvSpPr>
-          <p:cNvPr id="19" name="Text 16">
-            <a:extLst xmlns:a="http://schemas.openxmlformats.org/drawingml/2006/main">
-              <a:ext uri="{FF2B5EF4-FFF2-40B4-BE49-F238E27FC236}">
-                <a16:creationId xmlns:a16="http://schemas.microsoft.com/office/drawing/2014/main" id="{3822FCE5-490F-49A2-B378-A8C58BD00377}"/>
-              </a:ext>
-            </a:extLst>
-          </p:cNvPr>
-          <p:cNvSpPr>
-            <a:spLocks xmlns:a="http://schemas.openxmlformats.org/drawingml/2006/main" noGrp="1"/>
-          </p:cNvSpPr>
-          <p:nvPr/>
-        </p:nvSpPr>
-        <p:spPr>
-          <a:xfrm xmlns:a="http://schemas.openxmlformats.org/drawingml/2006/main">
-            <a:off x="6432804" y="2962656"/>
-            <a:ext cx="4988052" cy="1143000"/>
-          </a:xfrm>
-          <a:prstGeom xmlns:a="http://schemas.openxmlformats.org/drawingml/2006/main" prst="rect">
-            <a:avLst/>
-          </a:prstGeom>
-          <a:noFill xmlns:a="http://schemas.openxmlformats.org/drawingml/2006/main"/>
-        </p:spPr>
-        <p:txBody>
-          <a:bodyPr xmlns:a="http://schemas.openxmlformats.org/drawingml/2006/main" wrap="square" lIns="0" tIns="0" rIns="0" bIns="0" anchor="t"/>
-          <a:lstStyle xmlns:a="http://schemas.openxmlformats.org/drawingml/2006/main"/>
-          <a:p xmlns:a="http://schemas.openxmlformats.org/drawingml/2006/main">
-            <a:pPr marL="152400" indent="-152400">
-              <a:spcAft>
-                <a:spcPts val="600"/>
-              </a:spcAft>
-              <a:buSzPct val="100000"/>
-              <a:buChar char="•"/>
-            </a:pPr>
-            <a:r>
-              <a:rPr sz="1150">
-                <a:solidFill>
-                  <a:srgbClr val="6B7C88"/>
-                </a:solidFill>
-                <a:latin typeface="Calibri"/>
-                <a:ea typeface="Calibri"/>
-                <a:cs typeface="Calibri"/>
-              </a:rPr>
-              <a:t>Ask it the same complaint twice and it answers the same way ~9 times in 10</a:t>
-            </a:r>
-            <a:endParaRPr sz="1150"/>
-          </a:p>
-          <a:p xmlns:a="http://schemas.openxmlformats.org/drawingml/2006/main">
-            <a:pPr marL="152400" indent="-152400">
-              <a:spcAft>
-                <a:spcPts val="600"/>
-              </a:spcAft>
-              <a:buSzPct val="100000"/>
-              <a:buChar char="•"/>
-            </a:pPr>
-            <a:r>
-              <a:rPr sz="1150">
-                <a:solidFill>
-                  <a:srgbClr val="6B7C88"/>
-                </a:solidFill>
-                <a:latin typeface="Calibri"/>
-                <a:ea typeface="Calibri"/>
-                <a:cs typeface="Calibri"/>
-              </a:rPr>
-              <a:t>So it is consistent — it just disagrees with the official label</a:t>
-            </a:r>
-            <a:endParaRPr sz="1150"/>
-          </a:p>
-          <a:p xmlns:a="http://schemas.openxmlformats.org/drawingml/2006/main">
-            <a:pPr marL="152400" indent="-152400">
-              <a:spcAft>
-                <a:spcPts val="600"/>
-              </a:spcAft>
-              <a:buSzPct val="100000"/>
-              <a:buChar char="•"/>
-            </a:pPr>
-            <a:r>
-              <a:rPr sz="1150">
-                <a:solidFill>
-                  <a:srgbClr val="6B7C88"/>
-                </a:solidFill>
-                <a:latin typeface="Calibri"/>
-                <a:ea typeface="Calibri"/>
-                <a:cs typeface="Calibri"/>
-              </a:rPr>
-              <a:t>That label was picked by the customer filing the complaint, from a menu, untrained</a:t>
-            </a:r>
-            <a:endParaRPr sz="1150"/>
+              <a:t>A system that explains itself convincingly but falsely is more dangerous than one that says nothing.</a:t>
+            </a:r>
+            <a:endParaRPr sz="1250"/>
           </a:p>
         </p:txBody>
       </p:sp>
     </p:spTree>
     <p:extLst>
       <p:ext uri="{BB962C8B-B14F-4D97-AF65-F5344CB8AC3E}">
-        <p14:creationId xmlns:p14="http://schemas.microsoft.com/office/powerpoint/2010/main" val="998389882"/>
+        <p14:creationId xmlns:p14="http://schemas.microsoft.com/office/powerpoint/2010/main" val="2031138843"/>
       </p:ext>
     </p:extLst>
   </p:cSld>
@@ -4116,7 +4360,7 @@
           <p:cNvPr id="2" name="Text 0">
             <a:extLst xmlns:a="http://schemas.openxmlformats.org/drawingml/2006/main">
               <a:ext uri="{FF2B5EF4-FFF2-40B4-BE49-F238E27FC236}">
-                <a16:creationId xmlns:a16="http://schemas.microsoft.com/office/drawing/2014/main" id="{91B797C0-867C-4486-9542-96B116F725CE}"/>
+                <a16:creationId xmlns:a16="http://schemas.microsoft.com/office/drawing/2014/main" id="{705A42C3-6F98-4F0E-96B5-40C97376D3F3}"/>
               </a:ext>
             </a:extLst>
           </p:cNvPr>
@@ -4162,7 +4406,801 @@
           <p:cNvPr id="3" name="Shape 1">
             <a:extLst xmlns:a="http://schemas.openxmlformats.org/drawingml/2006/main">
               <a:ext uri="{FF2B5EF4-FFF2-40B4-BE49-F238E27FC236}">
-                <a16:creationId xmlns:a16="http://schemas.microsoft.com/office/drawing/2014/main" id="{C09AB220-2E9D-4025-B4F9-BFA540084A11}"/>
+                <a16:creationId xmlns:a16="http://schemas.microsoft.com/office/drawing/2014/main" id="{8B8086FB-4698-4B5F-98D9-A60291BFBB96}"/>
+              </a:ext>
+            </a:extLst>
+          </p:cNvPr>
+          <p:cNvSpPr>
+            <a:spLocks xmlns:a="http://schemas.openxmlformats.org/drawingml/2006/main" noGrp="1"/>
+          </p:cNvSpPr>
+          <p:nvPr/>
+        </p:nvSpPr>
+        <p:spPr>
+          <a:xfrm xmlns:a="http://schemas.openxmlformats.org/drawingml/2006/main">
+            <a:off x="566928" y="658368"/>
+            <a:ext cx="566928" cy="566928"/>
+          </a:xfrm>
+          <a:prstGeom xmlns:a="http://schemas.openxmlformats.org/drawingml/2006/main" prst="ellipse">
+            <a:avLst/>
+          </a:prstGeom>
+          <a:solidFill xmlns:a="http://schemas.openxmlformats.org/drawingml/2006/main">
+            <a:srgbClr val="24343F"/>
+          </a:solidFill>
+        </p:spPr>
+      </p:sp>
+      <p:pic>
+        <p:nvPicPr>
+          <p:cNvPr id="23" name="Image 0"/>
+          <p:cNvPicPr>
+            <a:picLocks xmlns:a="http://schemas.openxmlformats.org/drawingml/2006/main" noChangeAspect="1"/>
+          </p:cNvPicPr>
+          <p:nvPr/>
+        </p:nvPicPr>
+        <p:blipFill>
+          <a:blip xmlns:r="http://schemas.openxmlformats.org/officeDocument/2006/relationships" xmlns:a="http://schemas.openxmlformats.org/drawingml/2006/main" r:embed="Raf04b2489948485a"/>
+          <a:stretch xmlns:a="http://schemas.openxmlformats.org/drawingml/2006/main">
+            <a:fillRect l="0" t="0" r="0" b="0"/>
+          </a:stretch>
+        </p:blipFill>
+        <p:spPr>
+          <a:xfrm xmlns:a="http://schemas.openxmlformats.org/drawingml/2006/main">
+            <a:off x="708660" y="800100"/>
+            <a:ext cx="283464" cy="283464"/>
+          </a:xfrm>
+          <a:prstGeom xmlns:a="http://schemas.openxmlformats.org/drawingml/2006/main" prst="rect">
+            <a:avLst/>
+          </a:prstGeom>
+        </p:spPr>
+      </p:pic>
+      <p:sp>
+        <p:nvSpPr>
+          <p:cNvPr id="5" name="Text 2">
+            <a:extLst xmlns:a="http://schemas.openxmlformats.org/drawingml/2006/main">
+              <a:ext uri="{FF2B5EF4-FFF2-40B4-BE49-F238E27FC236}">
+                <a16:creationId xmlns:a16="http://schemas.microsoft.com/office/drawing/2014/main" id="{31E8D3B7-3B23-46BB-BE16-77F38CF7AE50}"/>
+              </a:ext>
+            </a:extLst>
+          </p:cNvPr>
+          <p:cNvSpPr>
+            <a:spLocks xmlns:a="http://schemas.openxmlformats.org/drawingml/2006/main" noGrp="1"/>
+          </p:cNvSpPr>
+          <p:nvPr/>
+        </p:nvSpPr>
+        <p:spPr>
+          <a:xfrm xmlns:a="http://schemas.openxmlformats.org/drawingml/2006/main">
+            <a:off x="1316736" y="621792"/>
+            <a:ext cx="10305288" cy="658368"/>
+          </a:xfrm>
+          <a:prstGeom xmlns:a="http://schemas.openxmlformats.org/drawingml/2006/main" prst="rect">
+            <a:avLst/>
+          </a:prstGeom>
+          <a:noFill xmlns:a="http://schemas.openxmlformats.org/drawingml/2006/main"/>
+        </p:spPr>
+        <p:txBody>
+          <a:bodyPr xmlns:a="http://schemas.openxmlformats.org/drawingml/2006/main" wrap="square" lIns="0" tIns="0" rIns="0" bIns="0" anchor="ctr"/>
+          <a:lstStyle xmlns:a="http://schemas.openxmlformats.org/drawingml/2006/main"/>
+          <a:p xmlns:a="http://schemas.openxmlformats.org/drawingml/2006/main">
+            <a:pPr marL="0" indent="0">
+              <a:buNone/>
+            </a:pPr>
+            <a:r>
+              <a:rPr sz="3000" b="1">
+                <a:solidFill>
+                  <a:srgbClr val="24343F"/>
+                </a:solidFill>
+                <a:latin typeface="Trebuchet MS"/>
+                <a:ea typeface="Trebuchet MS"/>
+                <a:cs typeface="Trebuchet MS"/>
+              </a:rPr>
+              <a:t>60.5% agreement makes expert labels essential</a:t>
+            </a:r>
+            <a:endParaRPr sz="3000"/>
+          </a:p>
+        </p:txBody>
+      </p:sp>
+      <p:sp>
+        <p:nvSpPr>
+          <p:cNvPr id="6" name="Shape 3">
+            <a:extLst xmlns:a="http://schemas.openxmlformats.org/drawingml/2006/main">
+              <a:ext uri="{FF2B5EF4-FFF2-40B4-BE49-F238E27FC236}">
+                <a16:creationId xmlns:a16="http://schemas.microsoft.com/office/drawing/2014/main" id="{9FBDD608-80F8-4840-9B69-E494B42BC080}"/>
+              </a:ext>
+            </a:extLst>
+          </p:cNvPr>
+          <p:cNvSpPr>
+            <a:spLocks xmlns:a="http://schemas.openxmlformats.org/drawingml/2006/main" noGrp="1"/>
+          </p:cNvSpPr>
+          <p:nvPr/>
+        </p:nvSpPr>
+        <p:spPr>
+          <a:xfrm xmlns:a="http://schemas.openxmlformats.org/drawingml/2006/main">
+            <a:off x="566928" y="1481328"/>
+            <a:ext cx="11055096" cy="676656"/>
+          </a:xfrm>
+          <a:prstGeom xmlns:a="http://schemas.openxmlformats.org/drawingml/2006/main" prst="rect">
+            <a:avLst/>
+          </a:prstGeom>
+          <a:solidFill xmlns:a="http://schemas.openxmlformats.org/drawingml/2006/main">
+            <a:srgbClr val="EFF5F9"/>
+          </a:solidFill>
+        </p:spPr>
+      </p:sp>
+      <p:sp>
+        <p:nvSpPr>
+          <p:cNvPr id="7" name="Shape 4">
+            <a:extLst xmlns:a="http://schemas.openxmlformats.org/drawingml/2006/main">
+              <a:ext uri="{FF2B5EF4-FFF2-40B4-BE49-F238E27FC236}">
+                <a16:creationId xmlns:a16="http://schemas.microsoft.com/office/drawing/2014/main" id="{0513622E-9512-441B-865E-4F9C4EE748A1}"/>
+              </a:ext>
+            </a:extLst>
+          </p:cNvPr>
+          <p:cNvSpPr>
+            <a:spLocks xmlns:a="http://schemas.openxmlformats.org/drawingml/2006/main" noGrp="1"/>
+          </p:cNvSpPr>
+          <p:nvPr/>
+        </p:nvSpPr>
+        <p:spPr>
+          <a:xfrm xmlns:a="http://schemas.openxmlformats.org/drawingml/2006/main">
+            <a:off x="566928" y="1481328"/>
+            <a:ext cx="82296" cy="676656"/>
+          </a:xfrm>
+          <a:prstGeom xmlns:a="http://schemas.openxmlformats.org/drawingml/2006/main" prst="rect">
+            <a:avLst/>
+          </a:prstGeom>
+          <a:solidFill xmlns:a="http://schemas.openxmlformats.org/drawingml/2006/main">
+            <a:srgbClr val="2A78D6"/>
+          </a:solidFill>
+        </p:spPr>
+      </p:sp>
+      <p:sp>
+        <p:nvSpPr>
+          <p:cNvPr id="8" name="Text 5">
+            <a:extLst xmlns:a="http://schemas.openxmlformats.org/drawingml/2006/main">
+              <a:ext uri="{FF2B5EF4-FFF2-40B4-BE49-F238E27FC236}">
+                <a16:creationId xmlns:a16="http://schemas.microsoft.com/office/drawing/2014/main" id="{8293D481-229D-499D-9F2A-6816F93280D3}"/>
+              </a:ext>
+            </a:extLst>
+          </p:cNvPr>
+          <p:cNvSpPr>
+            <a:spLocks xmlns:a="http://schemas.openxmlformats.org/drawingml/2006/main" noGrp="1"/>
+          </p:cNvSpPr>
+          <p:nvPr/>
+        </p:nvSpPr>
+        <p:spPr>
+          <a:xfrm xmlns:a="http://schemas.openxmlformats.org/drawingml/2006/main">
+            <a:off x="822960" y="1481328"/>
+            <a:ext cx="10597896" cy="676656"/>
+          </a:xfrm>
+          <a:prstGeom xmlns:a="http://schemas.openxmlformats.org/drawingml/2006/main" prst="rect">
+            <a:avLst/>
+          </a:prstGeom>
+          <a:noFill xmlns:a="http://schemas.openxmlformats.org/drawingml/2006/main"/>
+        </p:spPr>
+        <p:txBody>
+          <a:bodyPr xmlns:a="http://schemas.openxmlformats.org/drawingml/2006/main" wrap="square" lIns="0" tIns="0" rIns="0" bIns="0" anchor="ctr"/>
+          <a:lstStyle xmlns:a="http://schemas.openxmlformats.org/drawingml/2006/main"/>
+          <a:p xmlns:a="http://schemas.openxmlformats.org/drawingml/2006/main">
+            <a:pPr marL="0" indent="0">
+              <a:buNone/>
+            </a:pPr>
+            <a:r>
+              <a:rPr sz="1050" b="1" spc="100">
+                <a:solidFill>
+                  <a:srgbClr val="2A78D6"/>
+                </a:solidFill>
+                <a:latin typeface="Calibri"/>
+                <a:ea typeface="Calibri"/>
+                <a:cs typeface="Calibri"/>
+              </a:rPr>
+              <a:t>TAKEAWAY   CFPB labels are not expert routing ground truth; Phase 0 creates it.</a:t>
+            </a:r>
+            <a:endParaRPr sz="1050"/>
+          </a:p>
+        </p:txBody>
+      </p:sp>
+      <p:sp>
+        <p:nvSpPr>
+          <p:cNvPr id="9" name="Shape 6">
+            <a:extLst xmlns:a="http://schemas.openxmlformats.org/drawingml/2006/main">
+              <a:ext uri="{FF2B5EF4-FFF2-40B4-BE49-F238E27FC236}">
+                <a16:creationId xmlns:a16="http://schemas.microsoft.com/office/drawing/2014/main" id="{DD003455-8344-4140-8412-E65222CF9572}"/>
+              </a:ext>
+            </a:extLst>
+          </p:cNvPr>
+          <p:cNvSpPr>
+            <a:spLocks xmlns:a="http://schemas.openxmlformats.org/drawingml/2006/main" noGrp="1"/>
+          </p:cNvSpPr>
+          <p:nvPr/>
+        </p:nvSpPr>
+        <p:spPr>
+          <a:xfrm xmlns:a="http://schemas.openxmlformats.org/drawingml/2006/main">
+            <a:off x="566928" y="6437376"/>
+            <a:ext cx="11055096" cy="0"/>
+          </a:xfrm>
+          <a:prstGeom xmlns:a="http://schemas.openxmlformats.org/drawingml/2006/main" prst="line">
+            <a:avLst/>
+          </a:prstGeom>
+          <a:noFill xmlns:a="http://schemas.openxmlformats.org/drawingml/2006/main"/>
+          <a:ln xmlns:a="http://schemas.openxmlformats.org/drawingml/2006/main" w="12700">
+            <a:solidFill>
+              <a:srgbClr val="D9E3EA"/>
+            </a:solidFill>
+            <a:prstDash val="solid"/>
+          </a:ln>
+        </p:spPr>
+      </p:sp>
+      <p:sp>
+        <p:nvSpPr>
+          <p:cNvPr id="10" name="Text 7">
+            <a:extLst xmlns:a="http://schemas.openxmlformats.org/drawingml/2006/main">
+              <a:ext uri="{FF2B5EF4-FFF2-40B4-BE49-F238E27FC236}">
+                <a16:creationId xmlns:a16="http://schemas.microsoft.com/office/drawing/2014/main" id="{62991595-1CB2-4A39-BBD5-33A93C2E377B}"/>
+              </a:ext>
+            </a:extLst>
+          </p:cNvPr>
+          <p:cNvSpPr>
+            <a:spLocks xmlns:a="http://schemas.openxmlformats.org/drawingml/2006/main" noGrp="1"/>
+          </p:cNvSpPr>
+          <p:nvPr/>
+        </p:nvSpPr>
+        <p:spPr>
+          <a:xfrm xmlns:a="http://schemas.openxmlformats.org/drawingml/2006/main">
+            <a:off x="566928" y="6473952"/>
+            <a:ext cx="7315200" cy="274320"/>
+          </a:xfrm>
+          <a:prstGeom xmlns:a="http://schemas.openxmlformats.org/drawingml/2006/main" prst="rect">
+            <a:avLst/>
+          </a:prstGeom>
+          <a:noFill xmlns:a="http://schemas.openxmlformats.org/drawingml/2006/main"/>
+        </p:spPr>
+        <p:txBody>
+          <a:bodyPr xmlns:a="http://schemas.openxmlformats.org/drawingml/2006/main" wrap="square" lIns="0" tIns="0" rIns="0" bIns="0" anchor="ctr"/>
+          <a:lstStyle xmlns:a="http://schemas.openxmlformats.org/drawingml/2006/main"/>
+          <a:p xmlns:a="http://schemas.openxmlformats.org/drawingml/2006/main">
+            <a:pPr marL="0" indent="0">
+              <a:buNone/>
+            </a:pPr>
+            <a:endParaRPr sz="850"/>
+          </a:p>
+        </p:txBody>
+      </p:sp>
+      <p:sp>
+        <p:nvSpPr>
+          <p:cNvPr id="11" name="Text 8">
+            <a:extLst xmlns:a="http://schemas.openxmlformats.org/drawingml/2006/main">
+              <a:ext uri="{FF2B5EF4-FFF2-40B4-BE49-F238E27FC236}">
+                <a16:creationId xmlns:a16="http://schemas.microsoft.com/office/drawing/2014/main" id="{F2439A02-322A-4F99-AD37-0D2B77FEC6D7}"/>
+              </a:ext>
+            </a:extLst>
+          </p:cNvPr>
+          <p:cNvSpPr>
+            <a:spLocks xmlns:a="http://schemas.openxmlformats.org/drawingml/2006/main" noGrp="1"/>
+          </p:cNvSpPr>
+          <p:nvPr/>
+        </p:nvSpPr>
+        <p:spPr>
+          <a:xfrm xmlns:a="http://schemas.openxmlformats.org/drawingml/2006/main">
+            <a:off x="10524744" y="6473952"/>
+            <a:ext cx="1097280" cy="274320"/>
+          </a:xfrm>
+          <a:prstGeom xmlns:a="http://schemas.openxmlformats.org/drawingml/2006/main" prst="rect">
+            <a:avLst/>
+          </a:prstGeom>
+          <a:noFill xmlns:a="http://schemas.openxmlformats.org/drawingml/2006/main"/>
+        </p:spPr>
+        <p:txBody>
+          <a:bodyPr xmlns:a="http://schemas.openxmlformats.org/drawingml/2006/main" wrap="square" lIns="0" tIns="0" rIns="0" bIns="0" anchor="ctr"/>
+          <a:lstStyle xmlns:a="http://schemas.openxmlformats.org/drawingml/2006/main"/>
+          <a:p xmlns:a="http://schemas.openxmlformats.org/drawingml/2006/main">
+            <a:pPr marL="0" indent="0" algn="r">
+              <a:buNone/>
+            </a:pPr>
+            <a:r>
+              <a:rPr sz="850">
+                <a:solidFill>
+                  <a:srgbClr val="6B7C88"/>
+                </a:solidFill>
+                <a:latin typeface="Calibri"/>
+                <a:ea typeface="Calibri"/>
+                <a:cs typeface="Calibri"/>
+              </a:rPr>
+              <a:t>9</a:t>
+            </a:r>
+            <a:endParaRPr sz="850"/>
+          </a:p>
+        </p:txBody>
+      </p:sp>
+      <p:sp>
+        <p:nvSpPr>
+          <p:cNvPr id="12" name="Shape 9">
+            <a:extLst xmlns:a="http://schemas.openxmlformats.org/drawingml/2006/main">
+              <a:ext uri="{FF2B5EF4-FFF2-40B4-BE49-F238E27FC236}">
+                <a16:creationId xmlns:a16="http://schemas.microsoft.com/office/drawing/2014/main" id="{6355D7D4-E8DE-4C77-ADC3-1937CD5D66FE}"/>
+              </a:ext>
+            </a:extLst>
+          </p:cNvPr>
+          <p:cNvSpPr>
+            <a:spLocks xmlns:a="http://schemas.openxmlformats.org/drawingml/2006/main" noGrp="1"/>
+          </p:cNvSpPr>
+          <p:nvPr/>
+        </p:nvSpPr>
+        <p:spPr>
+          <a:xfrm xmlns:a="http://schemas.openxmlformats.org/drawingml/2006/main">
+            <a:off x="566928" y="2395728"/>
+            <a:ext cx="5390388" cy="1874520"/>
+          </a:xfrm>
+          <a:prstGeom xmlns:a="http://schemas.openxmlformats.org/drawingml/2006/main" prst="rect">
+            <a:avLst/>
+          </a:prstGeom>
+          <a:solidFill xmlns:a="http://schemas.openxmlformats.org/drawingml/2006/main">
+            <a:srgbClr val="FFFFFF"/>
+          </a:solidFill>
+          <a:ln xmlns:a="http://schemas.openxmlformats.org/drawingml/2006/main" w="12700">
+            <a:solidFill>
+              <a:srgbClr val="D9E3EA"/>
+            </a:solidFill>
+            <a:prstDash val="solid"/>
+          </a:ln>
+          <a:effectLst xmlns:a="http://schemas.openxmlformats.org/drawingml/2006/main">
+            <a:outerShdw blurRad="88900" dist="38100" dir="8100000" sx="100000" sy="100000" kx="0" ky="0" algn="bl" rotWithShape="0">
+              <a:srgbClr val="1C2440">
+                <a:alpha val="13000"/>
+              </a:srgbClr>
+            </a:outerShdw>
+          </a:effectLst>
+        </p:spPr>
+      </p:sp>
+      <p:sp>
+        <p:nvSpPr>
+          <p:cNvPr id="13" name="Shape 10">
+            <a:extLst xmlns:a="http://schemas.openxmlformats.org/drawingml/2006/main">
+              <a:ext uri="{FF2B5EF4-FFF2-40B4-BE49-F238E27FC236}">
+                <a16:creationId xmlns:a16="http://schemas.microsoft.com/office/drawing/2014/main" id="{A831C8F0-AABE-41C7-AF53-2F66F3A1DE2B}"/>
+              </a:ext>
+            </a:extLst>
+          </p:cNvPr>
+          <p:cNvSpPr>
+            <a:spLocks xmlns:a="http://schemas.openxmlformats.org/drawingml/2006/main" noGrp="1"/>
+          </p:cNvSpPr>
+          <p:nvPr/>
+        </p:nvSpPr>
+        <p:spPr>
+          <a:xfrm xmlns:a="http://schemas.openxmlformats.org/drawingml/2006/main">
+            <a:off x="566928" y="2395728"/>
+            <a:ext cx="5390388" cy="457200"/>
+          </a:xfrm>
+          <a:prstGeom xmlns:a="http://schemas.openxmlformats.org/drawingml/2006/main" prst="rect">
+            <a:avLst/>
+          </a:prstGeom>
+          <a:solidFill xmlns:a="http://schemas.openxmlformats.org/drawingml/2006/main">
+            <a:srgbClr val="24343F"/>
+          </a:solidFill>
+        </p:spPr>
+      </p:sp>
+      <p:sp>
+        <p:nvSpPr>
+          <p:cNvPr id="14" name="Text 11">
+            <a:extLst xmlns:a="http://schemas.openxmlformats.org/drawingml/2006/main">
+              <a:ext uri="{FF2B5EF4-FFF2-40B4-BE49-F238E27FC236}">
+                <a16:creationId xmlns:a16="http://schemas.microsoft.com/office/drawing/2014/main" id="{6725D714-AAD5-471A-911D-869302B968F5}"/>
+              </a:ext>
+            </a:extLst>
+          </p:cNvPr>
+          <p:cNvSpPr>
+            <a:spLocks xmlns:a="http://schemas.openxmlformats.org/drawingml/2006/main" noGrp="1"/>
+          </p:cNvSpPr>
+          <p:nvPr/>
+        </p:nvSpPr>
+        <p:spPr>
+          <a:xfrm xmlns:a="http://schemas.openxmlformats.org/drawingml/2006/main">
+            <a:off x="768096" y="2395728"/>
+            <a:ext cx="5024628" cy="457200"/>
+          </a:xfrm>
+          <a:prstGeom xmlns:a="http://schemas.openxmlformats.org/drawingml/2006/main" prst="rect">
+            <a:avLst/>
+          </a:prstGeom>
+          <a:noFill xmlns:a="http://schemas.openxmlformats.org/drawingml/2006/main"/>
+        </p:spPr>
+        <p:txBody>
+          <a:bodyPr xmlns:a="http://schemas.openxmlformats.org/drawingml/2006/main" wrap="square" lIns="0" tIns="0" rIns="0" bIns="0" anchor="ctr"/>
+          <a:lstStyle xmlns:a="http://schemas.openxmlformats.org/drawingml/2006/main"/>
+          <a:p xmlns:a="http://schemas.openxmlformats.org/drawingml/2006/main">
+            <a:pPr marL="0" indent="0">
+              <a:buNone/>
+            </a:pPr>
+            <a:r>
+              <a:rPr sz="1300" b="1" spc="200">
+                <a:solidFill>
+                  <a:srgbClr val="FFFFFF"/>
+                </a:solidFill>
+                <a:latin typeface="Calibri"/>
+                <a:ea typeface="Calibri"/>
+                <a:cs typeface="Calibri"/>
+              </a:rPr>
+              <a:t>What I measured</a:t>
+            </a:r>
+            <a:endParaRPr sz="1300"/>
+          </a:p>
+        </p:txBody>
+      </p:sp>
+      <p:sp>
+        <p:nvSpPr>
+          <p:cNvPr id="15" name="Text 12">
+            <a:extLst xmlns:a="http://schemas.openxmlformats.org/drawingml/2006/main">
+              <a:ext uri="{FF2B5EF4-FFF2-40B4-BE49-F238E27FC236}">
+                <a16:creationId xmlns:a16="http://schemas.microsoft.com/office/drawing/2014/main" id="{2EEE9339-A6F5-4E49-BD59-DE93F216C3BF}"/>
+              </a:ext>
+            </a:extLst>
+          </p:cNvPr>
+          <p:cNvSpPr>
+            <a:spLocks xmlns:a="http://schemas.openxmlformats.org/drawingml/2006/main" noGrp="1"/>
+          </p:cNvSpPr>
+          <p:nvPr/>
+        </p:nvSpPr>
+        <p:spPr>
+          <a:xfrm xmlns:a="http://schemas.openxmlformats.org/drawingml/2006/main">
+            <a:off x="768096" y="2962656"/>
+            <a:ext cx="4988052" cy="1143000"/>
+          </a:xfrm>
+          <a:prstGeom xmlns:a="http://schemas.openxmlformats.org/drawingml/2006/main" prst="rect">
+            <a:avLst/>
+          </a:prstGeom>
+          <a:noFill xmlns:a="http://schemas.openxmlformats.org/drawingml/2006/main"/>
+        </p:spPr>
+        <p:txBody>
+          <a:bodyPr xmlns:a="http://schemas.openxmlformats.org/drawingml/2006/main" wrap="square" lIns="0" tIns="0" rIns="0" bIns="0" anchor="t"/>
+          <a:lstStyle xmlns:a="http://schemas.openxmlformats.org/drawingml/2006/main"/>
+          <a:p xmlns:a="http://schemas.openxmlformats.org/drawingml/2006/main">
+            <a:pPr marL="152400" indent="-152400">
+              <a:spcAft>
+                <a:spcPts val="600"/>
+              </a:spcAft>
+              <a:buSzPct val="100000"/>
+              <a:buChar char="•"/>
+            </a:pPr>
+            <a:r>
+              <a:rPr sz="1150">
+                <a:solidFill>
+                  <a:srgbClr val="1B2730"/>
+                </a:solidFill>
+                <a:latin typeface="Calibri"/>
+                <a:ea typeface="Calibri"/>
+                <a:cs typeface="Calibri"/>
+              </a:rPr>
+              <a:t>60.5% agreement with CFPB-derived team labels (gpt-4o, n=240)</a:t>
+            </a:r>
+            <a:endParaRPr sz="1150"/>
+          </a:p>
+          <a:p xmlns:a="http://schemas.openxmlformats.org/drawingml/2006/main">
+            <a:pPr marL="152400" indent="-152400">
+              <a:spcAft>
+                <a:spcPts val="600"/>
+              </a:spcAft>
+              <a:buSzPct val="100000"/>
+              <a:buChar char="•"/>
+            </a:pPr>
+            <a:r>
+              <a:rPr sz="1150">
+                <a:solidFill>
+                  <a:srgbClr val="1B2730"/>
+                </a:solidFill>
+                <a:latin typeface="Calibri"/>
+                <a:ea typeface="Calibri"/>
+                <a:cs typeface="Calibri"/>
+              </a:rPr>
+              <a:t>A model costing 6× more improved agreement by 4 percentage points</a:t>
+            </a:r>
+            <a:endParaRPr sz="1150"/>
+          </a:p>
+          <a:p xmlns:a="http://schemas.openxmlformats.org/drawingml/2006/main">
+            <a:pPr marL="152400" indent="-152400">
+              <a:spcAft>
+                <a:spcPts val="600"/>
+              </a:spcAft>
+              <a:buSzPct val="100000"/>
+              <a:buChar char="•"/>
+            </a:pPr>
+            <a:r>
+              <a:rPr sz="1150">
+                <a:solidFill>
+                  <a:srgbClr val="1B2730"/>
+                </a:solidFill>
+                <a:latin typeface="Calibri"/>
+                <a:ea typeface="Calibri"/>
+                <a:cs typeface="Calibri"/>
+              </a:rPr>
+              <a:t>That comparison does not establish expert-routing accuracy</a:t>
+            </a:r>
+            <a:endParaRPr sz="1150"/>
+          </a:p>
+        </p:txBody>
+      </p:sp>
+      <p:sp>
+        <p:nvSpPr>
+          <p:cNvPr id="16" name="Shape 13">
+            <a:extLst xmlns:a="http://schemas.openxmlformats.org/drawingml/2006/main">
+              <a:ext uri="{FF2B5EF4-FFF2-40B4-BE49-F238E27FC236}">
+                <a16:creationId xmlns:a16="http://schemas.microsoft.com/office/drawing/2014/main" id="{4CD963AE-872A-4031-923D-EAB3A8AB0851}"/>
+              </a:ext>
+            </a:extLst>
+          </p:cNvPr>
+          <p:cNvSpPr>
+            <a:spLocks xmlns:a="http://schemas.openxmlformats.org/drawingml/2006/main" noGrp="1"/>
+          </p:cNvSpPr>
+          <p:nvPr/>
+        </p:nvSpPr>
+        <p:spPr>
+          <a:xfrm xmlns:a="http://schemas.openxmlformats.org/drawingml/2006/main">
+            <a:off x="6231636" y="2395728"/>
+            <a:ext cx="5390388" cy="1874520"/>
+          </a:xfrm>
+          <a:prstGeom xmlns:a="http://schemas.openxmlformats.org/drawingml/2006/main" prst="rect">
+            <a:avLst/>
+          </a:prstGeom>
+          <a:solidFill xmlns:a="http://schemas.openxmlformats.org/drawingml/2006/main">
+            <a:srgbClr val="FFFFFF"/>
+          </a:solidFill>
+          <a:ln xmlns:a="http://schemas.openxmlformats.org/drawingml/2006/main" w="12700">
+            <a:solidFill>
+              <a:srgbClr val="D9E3EA"/>
+            </a:solidFill>
+            <a:prstDash val="solid"/>
+          </a:ln>
+          <a:effectLst xmlns:a="http://schemas.openxmlformats.org/drawingml/2006/main">
+            <a:outerShdw blurRad="88900" dist="38100" dir="8100000" sx="100000" sy="100000" kx="0" ky="0" algn="bl" rotWithShape="0">
+              <a:srgbClr val="1C2440">
+                <a:alpha val="13000"/>
+              </a:srgbClr>
+            </a:outerShdw>
+          </a:effectLst>
+        </p:spPr>
+      </p:sp>
+      <p:sp>
+        <p:nvSpPr>
+          <p:cNvPr id="17" name="Shape 14">
+            <a:extLst xmlns:a="http://schemas.openxmlformats.org/drawingml/2006/main">
+              <a:ext uri="{FF2B5EF4-FFF2-40B4-BE49-F238E27FC236}">
+                <a16:creationId xmlns:a16="http://schemas.microsoft.com/office/drawing/2014/main" id="{BE6A9CED-BCC4-47BE-A107-C353F0177F31}"/>
+              </a:ext>
+            </a:extLst>
+          </p:cNvPr>
+          <p:cNvSpPr>
+            <a:spLocks xmlns:a="http://schemas.openxmlformats.org/drawingml/2006/main" noGrp="1"/>
+          </p:cNvSpPr>
+          <p:nvPr/>
+        </p:nvSpPr>
+        <p:spPr>
+          <a:xfrm xmlns:a="http://schemas.openxmlformats.org/drawingml/2006/main">
+            <a:off x="6231636" y="2395728"/>
+            <a:ext cx="5390388" cy="457200"/>
+          </a:xfrm>
+          <a:prstGeom xmlns:a="http://schemas.openxmlformats.org/drawingml/2006/main" prst="rect">
+            <a:avLst/>
+          </a:prstGeom>
+          <a:solidFill xmlns:a="http://schemas.openxmlformats.org/drawingml/2006/main">
+            <a:srgbClr val="445A69"/>
+          </a:solidFill>
+        </p:spPr>
+      </p:sp>
+      <p:sp>
+        <p:nvSpPr>
+          <p:cNvPr id="18" name="Text 15">
+            <a:extLst xmlns:a="http://schemas.openxmlformats.org/drawingml/2006/main">
+              <a:ext uri="{FF2B5EF4-FFF2-40B4-BE49-F238E27FC236}">
+                <a16:creationId xmlns:a16="http://schemas.microsoft.com/office/drawing/2014/main" id="{11123818-7162-4AC2-ACDC-5939A76B78DB}"/>
+              </a:ext>
+            </a:extLst>
+          </p:cNvPr>
+          <p:cNvSpPr>
+            <a:spLocks xmlns:a="http://schemas.openxmlformats.org/drawingml/2006/main" noGrp="1"/>
+          </p:cNvSpPr>
+          <p:nvPr/>
+        </p:nvSpPr>
+        <p:spPr>
+          <a:xfrm xmlns:a="http://schemas.openxmlformats.org/drawingml/2006/main">
+            <a:off x="6432804" y="2395728"/>
+            <a:ext cx="5024628" cy="457200"/>
+          </a:xfrm>
+          <a:prstGeom xmlns:a="http://schemas.openxmlformats.org/drawingml/2006/main" prst="rect">
+            <a:avLst/>
+          </a:prstGeom>
+          <a:noFill xmlns:a="http://schemas.openxmlformats.org/drawingml/2006/main"/>
+        </p:spPr>
+        <p:txBody>
+          <a:bodyPr xmlns:a="http://schemas.openxmlformats.org/drawingml/2006/main" wrap="square" lIns="0" tIns="0" rIns="0" bIns="0" anchor="ctr"/>
+          <a:lstStyle xmlns:a="http://schemas.openxmlformats.org/drawingml/2006/main"/>
+          <a:p xmlns:a="http://schemas.openxmlformats.org/drawingml/2006/main">
+            <a:pPr marL="0" indent="0">
+              <a:buNone/>
+            </a:pPr>
+            <a:r>
+              <a:rPr sz="1300" b="1" spc="200">
+                <a:solidFill>
+                  <a:srgbClr val="FFFFFF"/>
+                </a:solidFill>
+                <a:latin typeface="Calibri"/>
+                <a:ea typeface="Calibri"/>
+                <a:cs typeface="Calibri"/>
+              </a:rPr>
+              <a:t>Why the number is what it is</a:t>
+            </a:r>
+            <a:endParaRPr sz="1300"/>
+          </a:p>
+        </p:txBody>
+      </p:sp>
+      <p:sp>
+        <p:nvSpPr>
+          <p:cNvPr id="19" name="Text 16">
+            <a:extLst xmlns:a="http://schemas.openxmlformats.org/drawingml/2006/main">
+              <a:ext uri="{FF2B5EF4-FFF2-40B4-BE49-F238E27FC236}">
+                <a16:creationId xmlns:a16="http://schemas.microsoft.com/office/drawing/2014/main" id="{870AAE1A-23E1-4755-A50B-5C762E29D08C}"/>
+              </a:ext>
+            </a:extLst>
+          </p:cNvPr>
+          <p:cNvSpPr>
+            <a:spLocks xmlns:a="http://schemas.openxmlformats.org/drawingml/2006/main" noGrp="1"/>
+          </p:cNvSpPr>
+          <p:nvPr/>
+        </p:nvSpPr>
+        <p:spPr>
+          <a:xfrm xmlns:a="http://schemas.openxmlformats.org/drawingml/2006/main">
+            <a:off x="6432804" y="2962656"/>
+            <a:ext cx="4988052" cy="1143000"/>
+          </a:xfrm>
+          <a:prstGeom xmlns:a="http://schemas.openxmlformats.org/drawingml/2006/main" prst="rect">
+            <a:avLst/>
+          </a:prstGeom>
+          <a:noFill xmlns:a="http://schemas.openxmlformats.org/drawingml/2006/main"/>
+        </p:spPr>
+        <p:txBody>
+          <a:bodyPr xmlns:a="http://schemas.openxmlformats.org/drawingml/2006/main" wrap="square" lIns="0" tIns="0" rIns="0" bIns="0" anchor="t"/>
+          <a:lstStyle xmlns:a="http://schemas.openxmlformats.org/drawingml/2006/main"/>
+          <a:p xmlns:a="http://schemas.openxmlformats.org/drawingml/2006/main">
+            <a:pPr marL="152400" indent="-152400">
+              <a:spcAft>
+                <a:spcPts val="600"/>
+              </a:spcAft>
+              <a:buSzPct val="100000"/>
+              <a:buChar char="•"/>
+            </a:pPr>
+            <a:r>
+              <a:rPr sz="1150">
+                <a:solidFill>
+                  <a:srgbClr val="6B7C88"/>
+                </a:solidFill>
+                <a:latin typeface="Calibri"/>
+                <a:ea typeface="Calibri"/>
+                <a:cs typeface="Calibri"/>
+              </a:rPr>
+              <a:t>gpt-4o chose the same team on 89.0% of repeated runs</a:t>
+            </a:r>
+            <a:endParaRPr sz="1150"/>
+          </a:p>
+          <a:p xmlns:a="http://schemas.openxmlformats.org/drawingml/2006/main">
+            <a:pPr marL="152400" indent="-152400">
+              <a:spcAft>
+                <a:spcPts val="600"/>
+              </a:spcAft>
+              <a:buSzPct val="100000"/>
+              <a:buChar char="•"/>
+            </a:pPr>
+            <a:r>
+              <a:rPr sz="1150">
+                <a:solidFill>
+                  <a:srgbClr val="6B7C88"/>
+                </a:solidFill>
+                <a:latin typeface="Calibri"/>
+                <a:ea typeface="Calibri"/>
+                <a:cs typeface="Calibri"/>
+              </a:rPr>
+              <a:t>It still agreed with CFPB-derived team labels only 60.5%</a:t>
+            </a:r>
+            <a:endParaRPr sz="1150"/>
+          </a:p>
+          <a:p xmlns:a="http://schemas.openxmlformats.org/drawingml/2006/main">
+            <a:pPr marL="152400" indent="-152400">
+              <a:spcAft>
+                <a:spcPts val="600"/>
+              </a:spcAft>
+              <a:buSzPct val="100000"/>
+              <a:buChar char="•"/>
+            </a:pPr>
+            <a:r>
+              <a:rPr sz="1150">
+                <a:solidFill>
+                  <a:srgbClr val="6B7C88"/>
+                </a:solidFill>
+                <a:latin typeface="Calibri"/>
+                <a:ea typeface="Calibri"/>
+                <a:cs typeface="Calibri"/>
+              </a:rPr>
+              <a:t>Those labels came from consumer-selected issue menus, not expert routing</a:t>
+            </a:r>
+            <a:endParaRPr sz="1150"/>
+          </a:p>
+        </p:txBody>
+      </p:sp>
+    </p:spTree>
+    <p:extLst>
+      <p:ext uri="{BB962C8B-B14F-4D97-AF65-F5344CB8AC3E}">
+        <p14:creationId xmlns:p14="http://schemas.microsoft.com/office/powerpoint/2010/main" val="547129928"/>
+      </p:ext>
+    </p:extLst>
+  </p:cSld>
+</p:sld>
+</file>
+
+<file path=ppt/slides/slide12.xml><?xml version="1.0" encoding="utf-8"?>
+<p:sld xmlns:p="http://schemas.openxmlformats.org/presentationml/2006/main">
+  <p:cSld>
+    <p:bg>
+      <p:bgPr>
+        <a:solidFill xmlns:a="http://schemas.openxmlformats.org/drawingml/2006/main">
+          <a:srgbClr val="FFFFFF"/>
+        </a:solidFill>
+      </p:bgPr>
+    </p:bg>
+    <p:spTree>
+      <p:nvGrpSpPr>
+        <p:cNvPr id="1" name=""/>
+        <p:cNvGrpSpPr/>
+        <p:nvPr/>
+      </p:nvGrpSpPr>
+      <p:grpSpPr>
+        <a:xfrm xmlns:a="http://schemas.openxmlformats.org/drawingml/2006/main"/>
+      </p:grpSpPr>
+      <p:sp>
+        <p:nvSpPr>
+          <p:cNvPr id="2" name="Text 0">
+            <a:extLst xmlns:a="http://schemas.openxmlformats.org/drawingml/2006/main">
+              <a:ext uri="{FF2B5EF4-FFF2-40B4-BE49-F238E27FC236}">
+                <a16:creationId xmlns:a16="http://schemas.microsoft.com/office/drawing/2014/main" id="{36EDDBBD-9505-4469-98ED-7D40ADEAAD89}"/>
+              </a:ext>
+            </a:extLst>
+          </p:cNvPr>
+          <p:cNvSpPr>
+            <a:spLocks xmlns:a="http://schemas.openxmlformats.org/drawingml/2006/main" noGrp="1"/>
+          </p:cNvSpPr>
+          <p:nvPr/>
+        </p:nvSpPr>
+        <p:spPr>
+          <a:xfrm xmlns:a="http://schemas.openxmlformats.org/drawingml/2006/main">
+            <a:off x="566928" y="310896"/>
+            <a:ext cx="11055096" cy="274320"/>
+          </a:xfrm>
+          <a:prstGeom xmlns:a="http://schemas.openxmlformats.org/drawingml/2006/main" prst="rect">
+            <a:avLst/>
+          </a:prstGeom>
+          <a:noFill xmlns:a="http://schemas.openxmlformats.org/drawingml/2006/main"/>
+        </p:spPr>
+        <p:txBody>
+          <a:bodyPr xmlns:a="http://schemas.openxmlformats.org/drawingml/2006/main" wrap="square" lIns="0" tIns="0" rIns="0" bIns="0" anchor="ctr"/>
+          <a:lstStyle xmlns:a="http://schemas.openxmlformats.org/drawingml/2006/main"/>
+          <a:p xmlns:a="http://schemas.openxmlformats.org/drawingml/2006/main">
+            <a:pPr marL="0" indent="0">
+              <a:buNone/>
+            </a:pPr>
+            <a:r>
+              <a:rPr sz="1050" b="1" spc="200">
+                <a:solidFill>
+                  <a:srgbClr val="6B7C88"/>
+                </a:solidFill>
+                <a:latin typeface="Calibri"/>
+                <a:ea typeface="Calibri"/>
+                <a:cs typeface="Calibri"/>
+              </a:rPr>
+              <a:t>CAPSTONE ROUND 1  ·  AI CONSULTING PITCH</a:t>
+            </a:r>
+            <a:endParaRPr sz="1050"/>
+          </a:p>
+        </p:txBody>
+      </p:sp>
+      <p:sp>
+        <p:nvSpPr>
+          <p:cNvPr id="3" name="Shape 1">
+            <a:extLst xmlns:a="http://schemas.openxmlformats.org/drawingml/2006/main">
+              <a:ext uri="{FF2B5EF4-FFF2-40B4-BE49-F238E27FC236}">
+                <a16:creationId xmlns:a16="http://schemas.microsoft.com/office/drawing/2014/main" id="{604B142D-325D-4235-8F0A-6E25C5330DAB}"/>
               </a:ext>
             </a:extLst>
           </p:cNvPr>
@@ -4193,7 +5231,7 @@
           <p:nvPr/>
         </p:nvPicPr>
         <p:blipFill>
-          <a:blip xmlns:r="http://schemas.openxmlformats.org/officeDocument/2006/relationships" xmlns:a="http://schemas.openxmlformats.org/drawingml/2006/main" r:embed="R1886efa8b461432c"/>
+          <a:blip xmlns:r="http://schemas.openxmlformats.org/officeDocument/2006/relationships" xmlns:a="http://schemas.openxmlformats.org/drawingml/2006/main" r:embed="R4584125345324127"/>
           <a:stretch xmlns:a="http://schemas.openxmlformats.org/drawingml/2006/main">
             <a:fillRect l="0" t="0" r="0" b="0"/>
           </a:stretch>
@@ -4213,7 +5251,7 @@
           <p:cNvPr id="5" name="Text 2">
             <a:extLst xmlns:a="http://schemas.openxmlformats.org/drawingml/2006/main">
               <a:ext uri="{FF2B5EF4-FFF2-40B4-BE49-F238E27FC236}">
-                <a16:creationId xmlns:a16="http://schemas.microsoft.com/office/drawing/2014/main" id="{7828F93C-8962-41DB-8FC4-81C34B5C1A66}"/>
+                <a16:creationId xmlns:a16="http://schemas.microsoft.com/office/drawing/2014/main" id="{E1E2E2F5-F661-4E6F-8DEE-CE78E261F400}"/>
               </a:ext>
             </a:extLst>
           </p:cNvPr>
@@ -4259,7 +5297,7 @@
           <p:cNvPr id="6" name="Shape 3">
             <a:extLst xmlns:a="http://schemas.openxmlformats.org/drawingml/2006/main">
               <a:ext uri="{FF2B5EF4-FFF2-40B4-BE49-F238E27FC236}">
-                <a16:creationId xmlns:a16="http://schemas.microsoft.com/office/drawing/2014/main" id="{4C302D49-06DB-4C94-AD06-C4BABE3D7D56}"/>
+                <a16:creationId xmlns:a16="http://schemas.microsoft.com/office/drawing/2014/main" id="{54DDBA36-09BA-413C-9CCF-726371215AE6}"/>
               </a:ext>
             </a:extLst>
           </p:cNvPr>
@@ -4286,7 +5324,7 @@
           <p:cNvPr id="7" name="Shape 4">
             <a:extLst xmlns:a="http://schemas.openxmlformats.org/drawingml/2006/main">
               <a:ext uri="{FF2B5EF4-FFF2-40B4-BE49-F238E27FC236}">
-                <a16:creationId xmlns:a16="http://schemas.microsoft.com/office/drawing/2014/main" id="{C7BCFB64-BF64-4A53-925C-26F107EFECC0}"/>
+                <a16:creationId xmlns:a16="http://schemas.microsoft.com/office/drawing/2014/main" id="{977388FD-A653-436D-89AB-018D2BA05E7C}"/>
               </a:ext>
             </a:extLst>
           </p:cNvPr>
@@ -4313,7 +5351,7 @@
           <p:cNvPr id="8" name="Text 5">
             <a:extLst xmlns:a="http://schemas.openxmlformats.org/drawingml/2006/main">
               <a:ext uri="{FF2B5EF4-FFF2-40B4-BE49-F238E27FC236}">
-                <a16:creationId xmlns:a16="http://schemas.microsoft.com/office/drawing/2014/main" id="{A1E8FE47-E567-4718-83AD-6BA649B3E108}"/>
+                <a16:creationId xmlns:a16="http://schemas.microsoft.com/office/drawing/2014/main" id="{BC7AC2FA-8922-47DA-BBC7-628716BA8471}"/>
               </a:ext>
             </a:extLst>
           </p:cNvPr>
@@ -4370,7 +5408,7 @@
           <p:cNvPr id="9" name="Shape 6">
             <a:extLst xmlns:a="http://schemas.openxmlformats.org/drawingml/2006/main">
               <a:ext uri="{FF2B5EF4-FFF2-40B4-BE49-F238E27FC236}">
-                <a16:creationId xmlns:a16="http://schemas.microsoft.com/office/drawing/2014/main" id="{2DD0C8A0-917E-442E-8C32-E8139163FC56}"/>
+                <a16:creationId xmlns:a16="http://schemas.microsoft.com/office/drawing/2014/main" id="{F746F43D-58C3-4F77-BFC5-4611442E3CF9}"/>
               </a:ext>
             </a:extLst>
           </p:cNvPr>
@@ -4401,7 +5439,7 @@
           <p:cNvPr id="10" name="Text 7">
             <a:extLst xmlns:a="http://schemas.openxmlformats.org/drawingml/2006/main">
               <a:ext uri="{FF2B5EF4-FFF2-40B4-BE49-F238E27FC236}">
-                <a16:creationId xmlns:a16="http://schemas.microsoft.com/office/drawing/2014/main" id="{C77719BE-BC51-411C-B4DB-FFAEE5BF0622}"/>
+                <a16:creationId xmlns:a16="http://schemas.microsoft.com/office/drawing/2014/main" id="{5717993E-EF41-4851-B13D-1382A01FDD4F}"/>
               </a:ext>
             </a:extLst>
           </p:cNvPr>
@@ -4436,7 +5474,7 @@
           <p:cNvPr id="11" name="Text 8">
             <a:extLst xmlns:a="http://schemas.openxmlformats.org/drawingml/2006/main">
               <a:ext uri="{FF2B5EF4-FFF2-40B4-BE49-F238E27FC236}">
-                <a16:creationId xmlns:a16="http://schemas.microsoft.com/office/drawing/2014/main" id="{D1E59461-6BA8-48A5-8D80-6067B6919558}"/>
+                <a16:creationId xmlns:a16="http://schemas.microsoft.com/office/drawing/2014/main" id="{5C005951-6E2B-4167-AE24-99AE11B6E227}"/>
               </a:ext>
             </a:extLst>
           </p:cNvPr>
@@ -4659,7 +5697,7 @@
                             <a:srgbClr val="1B2730"/>
                           </a:solidFill>
                         </a:rPr>
-                        <a:t>Publication lag — the regulator only publishes once a firm responds. Window cut at 2026-06-27</a:t>
+                        <a:t>CFPB publication lag — records appear after a company responds or enough time passes. Analysis ends 27 Jun 2026</a:t>
                       </a:r>
                       <a:endParaRPr sz="1050"/>
                     </a:p>
@@ -4902,14 +5940,14 @@
     </p:spTree>
     <p:extLst>
       <p:ext uri="{BB962C8B-B14F-4D97-AF65-F5344CB8AC3E}">
-        <p14:creationId xmlns:p14="http://schemas.microsoft.com/office/powerpoint/2010/main" val="790827221"/>
+        <p14:creationId xmlns:p14="http://schemas.microsoft.com/office/powerpoint/2010/main" val="1861782894"/>
       </p:ext>
     </p:extLst>
   </p:cSld>
 </p:sld>
 </file>
 
-<file path=ppt/slides/slide12.xml><?xml version="1.0" encoding="utf-8"?>
+<file path=ppt/slides/slide13.xml><?xml version="1.0" encoding="utf-8"?>
 <p:sld xmlns:p="http://schemas.openxmlformats.org/presentationml/2006/main">
   <p:cSld>
     <p:bg>
@@ -4933,7 +5971,7 @@
           <p:cNvPr id="2" name="Text 0">
             <a:extLst xmlns:a="http://schemas.openxmlformats.org/drawingml/2006/main">
               <a:ext uri="{FF2B5EF4-FFF2-40B4-BE49-F238E27FC236}">
-                <a16:creationId xmlns:a16="http://schemas.microsoft.com/office/drawing/2014/main" id="{DCEB5714-0C61-4C92-AC55-C65CB72CEEE1}"/>
+                <a16:creationId xmlns:a16="http://schemas.microsoft.com/office/drawing/2014/main" id="{4DD022C4-638E-44EA-B6EA-A52B0F431FED}"/>
               </a:ext>
             </a:extLst>
           </p:cNvPr>
@@ -4979,7 +6017,7 @@
           <p:cNvPr id="3" name="Shape 1">
             <a:extLst xmlns:a="http://schemas.openxmlformats.org/drawingml/2006/main">
               <a:ext uri="{FF2B5EF4-FFF2-40B4-BE49-F238E27FC236}">
-                <a16:creationId xmlns:a16="http://schemas.microsoft.com/office/drawing/2014/main" id="{2FB4EB2D-7D93-48DE-AE9C-9FBB8E6B48B4}"/>
+                <a16:creationId xmlns:a16="http://schemas.microsoft.com/office/drawing/2014/main" id="{EA919AC1-4394-406C-98C1-A02015AB5ED9}"/>
               </a:ext>
             </a:extLst>
           </p:cNvPr>
@@ -5010,7 +6048,7 @@
           <p:nvPr/>
         </p:nvPicPr>
         <p:blipFill>
-          <a:blip xmlns:r="http://schemas.openxmlformats.org/officeDocument/2006/relationships" xmlns:a="http://schemas.openxmlformats.org/drawingml/2006/main" r:embed="Rff11f4af29194410"/>
+          <a:blip xmlns:r="http://schemas.openxmlformats.org/officeDocument/2006/relationships" xmlns:a="http://schemas.openxmlformats.org/drawingml/2006/main" r:embed="R3b26cb9bdd7f4a2b"/>
           <a:stretch xmlns:a="http://schemas.openxmlformats.org/drawingml/2006/main">
             <a:fillRect l="0" t="0" r="0" b="0"/>
           </a:stretch>
@@ -5030,7 +6068,7 @@
           <p:cNvPr id="5" name="Text 2">
             <a:extLst xmlns:a="http://schemas.openxmlformats.org/drawingml/2006/main">
               <a:ext uri="{FF2B5EF4-FFF2-40B4-BE49-F238E27FC236}">
-                <a16:creationId xmlns:a16="http://schemas.microsoft.com/office/drawing/2014/main" id="{480C3DB0-F326-4C02-B88F-D961BCED853E}"/>
+                <a16:creationId xmlns:a16="http://schemas.microsoft.com/office/drawing/2014/main" id="{97741F4D-F167-4BA5-8D0E-0CEABD3E91B9}"/>
               </a:ext>
             </a:extLst>
           </p:cNvPr>
@@ -5065,7 +6103,7 @@
                 <a:ea typeface="Trebuchet MS"/>
                 <a:cs typeface="Trebuchet MS"/>
               </a:rPr>
-              <a:t>Human review bounds the compliance position</a:t>
+              <a:t>Human review supports a preliminary compliance view</a:t>
             </a:r>
             <a:endParaRPr sz="3000"/>
           </a:p>
@@ -5076,7 +6114,7 @@
           <p:cNvPr id="6" name="Shape 3">
             <a:extLst xmlns:a="http://schemas.openxmlformats.org/drawingml/2006/main">
               <a:ext uri="{FF2B5EF4-FFF2-40B4-BE49-F238E27FC236}">
-                <a16:creationId xmlns:a16="http://schemas.microsoft.com/office/drawing/2014/main" id="{843F0BF2-C250-4E3B-9DCA-A087651B44BC}"/>
+                <a16:creationId xmlns:a16="http://schemas.microsoft.com/office/drawing/2014/main" id="{A1350174-4B90-47AB-87E6-4B9537D675C6}"/>
               </a:ext>
             </a:extLst>
           </p:cNvPr>
@@ -5103,7 +6141,7 @@
           <p:cNvPr id="7" name="Shape 4">
             <a:extLst xmlns:a="http://schemas.openxmlformats.org/drawingml/2006/main">
               <a:ext uri="{FF2B5EF4-FFF2-40B4-BE49-F238E27FC236}">
-                <a16:creationId xmlns:a16="http://schemas.microsoft.com/office/drawing/2014/main" id="{4C143B7A-4823-42FF-859E-65EAA8DE0876}"/>
+                <a16:creationId xmlns:a16="http://schemas.microsoft.com/office/drawing/2014/main" id="{829B278E-1B55-4A02-A5BC-A48973FBADF9}"/>
               </a:ext>
             </a:extLst>
           </p:cNvPr>
@@ -5130,7 +6168,7 @@
           <p:cNvPr id="8" name="Text 5">
             <a:extLst xmlns:a="http://schemas.openxmlformats.org/drawingml/2006/main">
               <a:ext uri="{FF2B5EF4-FFF2-40B4-BE49-F238E27FC236}">
-                <a16:creationId xmlns:a16="http://schemas.microsoft.com/office/drawing/2014/main" id="{64965641-EC02-4443-B902-0C023A8FD95D}"/>
+                <a16:creationId xmlns:a16="http://schemas.microsoft.com/office/drawing/2014/main" id="{EC54657B-BD9C-453F-B170-B6DF5EF7186C}"/>
               </a:ext>
             </a:extLst>
           </p:cNvPr>
@@ -5165,18 +6203,7 @@
                 <a:ea typeface="Calibri"/>
                 <a:cs typeface="Calibri"/>
               </a:rPr>
-              <a:t>TAKEAWAY   </a:t>
-            </a:r>
-            <a:r>
-              <a:rPr sz="1300">
-                <a:solidFill>
-                  <a:srgbClr val="1B2730"/>
-                </a:solidFill>
-                <a:latin typeface="Calibri"/>
-                <a:ea typeface="Calibri"/>
-                <a:cs typeface="Calibri"/>
-              </a:rPr>
-              <a:t>A preliminary view with reasoning beats a confident label with none.</a:t>
+              <a:t>TAKEAWAY   This is a Round 1 working view, not a final legal classification.</a:t>
             </a:r>
             <a:endParaRPr sz="1050"/>
           </a:p>
@@ -5187,7 +6214,7 @@
           <p:cNvPr id="9" name="Shape 6">
             <a:extLst xmlns:a="http://schemas.openxmlformats.org/drawingml/2006/main">
               <a:ext uri="{FF2B5EF4-FFF2-40B4-BE49-F238E27FC236}">
-                <a16:creationId xmlns:a16="http://schemas.microsoft.com/office/drawing/2014/main" id="{95CECDBE-C262-4D7D-975A-42B5778307D2}"/>
+                <a16:creationId xmlns:a16="http://schemas.microsoft.com/office/drawing/2014/main" id="{4778F047-D2F3-485F-8F42-175910086159}"/>
               </a:ext>
             </a:extLst>
           </p:cNvPr>
@@ -5218,7 +6245,7 @@
           <p:cNvPr id="10" name="Text 7">
             <a:extLst xmlns:a="http://schemas.openxmlformats.org/drawingml/2006/main">
               <a:ext uri="{FF2B5EF4-FFF2-40B4-BE49-F238E27FC236}">
-                <a16:creationId xmlns:a16="http://schemas.microsoft.com/office/drawing/2014/main" id="{83385318-51E4-4DB5-844B-FEC4975C01C4}"/>
+                <a16:creationId xmlns:a16="http://schemas.microsoft.com/office/drawing/2014/main" id="{B7BBCBD9-14CC-4F2A-9C62-7DEBC4D4FE36}"/>
               </a:ext>
             </a:extLst>
           </p:cNvPr>
@@ -5253,7 +6280,7 @@
           <p:cNvPr id="11" name="Text 8">
             <a:extLst xmlns:a="http://schemas.openxmlformats.org/drawingml/2006/main">
               <a:ext uri="{FF2B5EF4-FFF2-40B4-BE49-F238E27FC236}">
-                <a16:creationId xmlns:a16="http://schemas.microsoft.com/office/drawing/2014/main" id="{2D9D6560-6EE1-4039-849B-C23B9F97BABA}"/>
+                <a16:creationId xmlns:a16="http://schemas.microsoft.com/office/drawing/2014/main" id="{087E6D7C-9A22-40B4-8314-3A91929D36B2}"/>
               </a:ext>
             </a:extLst>
           </p:cNvPr>
@@ -5376,7 +6403,7 @@
                             <a:srgbClr val="FFFFFF"/>
                           </a:solidFill>
                         </a:rPr>
-                        <a:t>Position for Round 1</a:t>
+                        <a:t>Round 1 working view</a:t>
                       </a:r>
                       <a:endParaRPr sz="1100"/>
                     </a:p>
@@ -5427,7 +6454,7 @@
                             <a:srgbClr val="24343F"/>
                           </a:solidFill>
                         </a:rPr>
-                        <a:t>EU AI Act tier</a:t>
+                        <a:t>EU AI Act classification</a:t>
                       </a:r>
                       <a:endParaRPr sz="1050"/>
                     </a:p>
@@ -5476,7 +6503,7 @@
                             <a:srgbClr val="1B2730"/>
                           </a:solidFill>
                         </a:rPr>
-                        <a:t>Limited risk — it classifies and routes, a human resolves. Not Annex III creditworthiness</a:t>
+                        <a:t>Not identified as Annex III high-risk for this intended use; Round 2 legal validation is required</a:t>
                       </a:r>
                       <a:endParaRPr sz="1050"/>
                     </a:p>
@@ -5527,7 +6554,7 @@
                             <a:srgbClr val="24343F"/>
                           </a:solidFill>
                         </a:rPr>
-                        <a:t>What keeps it there</a:t>
+                        <a:t>Decision boundary</a:t>
                       </a:r>
                       <a:endParaRPr sz="1050"/>
                     </a:p>
@@ -5576,7 +6603,7 @@
                             <a:srgbClr val="1B2730"/>
                           </a:solidFill>
                         </a:rPr>
-                        <a:t>The human decision boundary. Autonomous routing is a new assessment, not an upgrade</a:t>
+                        <a:t>The system proposes a route; a human confirms and resolves. Autonomous routing requires a new assessment</a:t>
                       </a:r>
                       <a:endParaRPr sz="1050"/>
                     </a:p>
@@ -5627,7 +6654,7 @@
                             <a:srgbClr val="24343F"/>
                           </a:solidFill>
                         </a:rPr>
-                        <a:t>GDPR</a:t>
+                        <a:t>GDPR work</a:t>
                       </a:r>
                       <a:endParaRPr sz="1050"/>
                     </a:p>
@@ -5676,7 +6703,7 @@
                             <a:srgbClr val="1B2730"/>
                           </a:solidFill>
                         </a:rPr>
-                        <a:t>Complaint text is personal data. Legal basis, retention and a DPIA are Round 2</a:t>
+                        <a:t>Round 2 assesses legal basis, retention, and whether a DPIA is required</a:t>
                       </a:r>
                       <a:endParaRPr sz="1050"/>
                     </a:p>
@@ -5776,7 +6803,7 @@
                             <a:srgbClr val="1B2730"/>
                           </a:solidFill>
                         </a:rPr>
-                        <a:t>Model hosting region — an EU customer's text must not leave the EEA by accident</a:t>
+                        <a:t>Hosting region and cross-border transfer controls are not yet verified</a:t>
                       </a:r>
                       <a:endParaRPr sz="1050"/>
                     </a:p>
@@ -5819,14 +6846,14 @@
     </p:spTree>
     <p:extLst>
       <p:ext uri="{BB962C8B-B14F-4D97-AF65-F5344CB8AC3E}">
-        <p14:creationId xmlns:p14="http://schemas.microsoft.com/office/powerpoint/2010/main" val="1153756064"/>
+        <p14:creationId xmlns:p14="http://schemas.microsoft.com/office/powerpoint/2010/main" val="81852308"/>
       </p:ext>
     </p:extLst>
   </p:cSld>
 </p:sld>
 </file>
 
-<file path=ppt/slides/slide13.xml><?xml version="1.0" encoding="utf-8"?>
+<file path=ppt/slides/slide14.xml><?xml version="1.0" encoding="utf-8"?>
 <p:sld xmlns:p="http://schemas.openxmlformats.org/presentationml/2006/main">
   <p:cSld>
     <p:bg>
@@ -5850,7 +6877,7 @@
           <p:cNvPr id="2" name="Text 0">
             <a:extLst xmlns:a="http://schemas.openxmlformats.org/drawingml/2006/main">
               <a:ext uri="{FF2B5EF4-FFF2-40B4-BE49-F238E27FC236}">
-                <a16:creationId xmlns:a16="http://schemas.microsoft.com/office/drawing/2014/main" id="{5045123A-39BE-472E-A326-C43A9C55D12C}"/>
+                <a16:creationId xmlns:a16="http://schemas.microsoft.com/office/drawing/2014/main" id="{7ABDF90F-91E1-48A9-AEC3-AB8689DD0758}"/>
               </a:ext>
             </a:extLst>
           </p:cNvPr>
@@ -5896,7 +6923,7 @@
           <p:cNvPr id="3" name="Shape 1">
             <a:extLst xmlns:a="http://schemas.openxmlformats.org/drawingml/2006/main">
               <a:ext uri="{FF2B5EF4-FFF2-40B4-BE49-F238E27FC236}">
-                <a16:creationId xmlns:a16="http://schemas.microsoft.com/office/drawing/2014/main" id="{3506872A-79F9-4EDA-AA74-DAD407DAE3E8}"/>
+                <a16:creationId xmlns:a16="http://schemas.microsoft.com/office/drawing/2014/main" id="{F70B1A62-2D66-44DB-9089-7B731F580057}"/>
               </a:ext>
             </a:extLst>
           </p:cNvPr>
@@ -5927,7 +6954,7 @@
           <p:nvPr/>
         </p:nvPicPr>
         <p:blipFill>
-          <a:blip xmlns:r="http://schemas.openxmlformats.org/officeDocument/2006/relationships" xmlns:a="http://schemas.openxmlformats.org/drawingml/2006/main" r:embed="Ree956af79c8448bb"/>
+          <a:blip xmlns:r="http://schemas.openxmlformats.org/officeDocument/2006/relationships" xmlns:a="http://schemas.openxmlformats.org/drawingml/2006/main" r:embed="R8a81df8573a04e21"/>
           <a:stretch xmlns:a="http://schemas.openxmlformats.org/drawingml/2006/main">
             <a:fillRect l="0" t="0" r="0" b="0"/>
           </a:stretch>
@@ -5947,7 +6974,7 @@
           <p:cNvPr id="5" name="Text 2">
             <a:extLst xmlns:a="http://schemas.openxmlformats.org/drawingml/2006/main">
               <a:ext uri="{FF2B5EF4-FFF2-40B4-BE49-F238E27FC236}">
-                <a16:creationId xmlns:a16="http://schemas.microsoft.com/office/drawing/2014/main" id="{82AADD72-12AA-4669-91D7-76A59FD91759}"/>
+                <a16:creationId xmlns:a16="http://schemas.microsoft.com/office/drawing/2014/main" id="{00221943-D41C-4834-8289-185472238871}"/>
               </a:ext>
             </a:extLst>
           </p:cNvPr>
@@ -5993,7 +7020,7 @@
           <p:cNvPr id="6" name="Shape 3">
             <a:extLst xmlns:a="http://schemas.openxmlformats.org/drawingml/2006/main">
               <a:ext uri="{FF2B5EF4-FFF2-40B4-BE49-F238E27FC236}">
-                <a16:creationId xmlns:a16="http://schemas.microsoft.com/office/drawing/2014/main" id="{12972ACF-710E-4D54-9AC0-430ABEBB4451}"/>
+                <a16:creationId xmlns:a16="http://schemas.microsoft.com/office/drawing/2014/main" id="{8483479E-4296-401A-8867-CC6428197FCE}"/>
               </a:ext>
             </a:extLst>
           </p:cNvPr>
@@ -6020,7 +7047,7 @@
           <p:cNvPr id="7" name="Shape 4">
             <a:extLst xmlns:a="http://schemas.openxmlformats.org/drawingml/2006/main">
               <a:ext uri="{FF2B5EF4-FFF2-40B4-BE49-F238E27FC236}">
-                <a16:creationId xmlns:a16="http://schemas.microsoft.com/office/drawing/2014/main" id="{D7F55A7D-008E-4963-8F1C-AE87DFF4D923}"/>
+                <a16:creationId xmlns:a16="http://schemas.microsoft.com/office/drawing/2014/main" id="{3C793C62-6C32-4C88-93F0-B3BBCC29D2B7}"/>
               </a:ext>
             </a:extLst>
           </p:cNvPr>
@@ -6047,7 +7074,7 @@
           <p:cNvPr id="8" name="Text 5">
             <a:extLst xmlns:a="http://schemas.openxmlformats.org/drawingml/2006/main">
               <a:ext uri="{FF2B5EF4-FFF2-40B4-BE49-F238E27FC236}">
-                <a16:creationId xmlns:a16="http://schemas.microsoft.com/office/drawing/2014/main" id="{E46B1D22-C4B9-4BD3-9290-1C9FB50AE930}"/>
+                <a16:creationId xmlns:a16="http://schemas.microsoft.com/office/drawing/2014/main" id="{D647D352-3DC6-4028-B2BA-AC66D1C89F1B}"/>
               </a:ext>
             </a:extLst>
           </p:cNvPr>
@@ -6073,17 +7100,6 @@
             <a:pPr marL="0" indent="0">
               <a:buNone/>
             </a:pPr>
-            <a:r>
-              <a:rPr sz="1050" b="1" spc="100">
-                <a:solidFill>
-                  <a:srgbClr val="2A78D6"/>
-                </a:solidFill>
-                <a:latin typeface="Calibri"/>
-                <a:ea typeface="Calibri"/>
-                <a:cs typeface="Calibri"/>
-              </a:rPr>
-              <a:t>TAKEAWAY   </a:t>
-            </a:r>
             <a:r>
               <a:rPr sz="1300">
                 <a:solidFill>
@@ -6093,7 +7109,7 @@
                 <a:ea typeface="Calibri"/>
                 <a:cs typeface="Calibri"/>
               </a:rPr>
-              <a:t>Nothing on these slides is an estimate dressed as a measurement.</a:t>
+              <a:t>Measured, sourced, and assumed figures are labelled separately.</a:t>
             </a:r>
             <a:endParaRPr sz="1050"/>
           </a:p>
@@ -6104,7 +7120,7 @@
           <p:cNvPr id="9" name="Shape 6">
             <a:extLst xmlns:a="http://schemas.openxmlformats.org/drawingml/2006/main">
               <a:ext uri="{FF2B5EF4-FFF2-40B4-BE49-F238E27FC236}">
-                <a16:creationId xmlns:a16="http://schemas.microsoft.com/office/drawing/2014/main" id="{727291EC-B71B-48C8-B860-DE2AD76BC3D5}"/>
+                <a16:creationId xmlns:a16="http://schemas.microsoft.com/office/drawing/2014/main" id="{544C8F67-CF99-49B0-8DD0-934686D98AA2}"/>
               </a:ext>
             </a:extLst>
           </p:cNvPr>
@@ -6135,7 +7151,7 @@
           <p:cNvPr id="10" name="Text 7">
             <a:extLst xmlns:a="http://schemas.openxmlformats.org/drawingml/2006/main">
               <a:ext uri="{FF2B5EF4-FFF2-40B4-BE49-F238E27FC236}">
-                <a16:creationId xmlns:a16="http://schemas.microsoft.com/office/drawing/2014/main" id="{0B285854-D890-4FB3-9897-7B1267C91812}"/>
+                <a16:creationId xmlns:a16="http://schemas.microsoft.com/office/drawing/2014/main" id="{9D412CF9-850D-439D-82D4-20F29652C975}"/>
               </a:ext>
             </a:extLst>
           </p:cNvPr>
@@ -6170,7 +7186,7 @@
           <p:cNvPr id="11" name="Text 8">
             <a:extLst xmlns:a="http://schemas.openxmlformats.org/drawingml/2006/main">
               <a:ext uri="{FF2B5EF4-FFF2-40B4-BE49-F238E27FC236}">
-                <a16:creationId xmlns:a16="http://schemas.microsoft.com/office/drawing/2014/main" id="{1446FB4D-D31E-42ED-BD93-78B21A681786}"/>
+                <a16:creationId xmlns:a16="http://schemas.microsoft.com/office/drawing/2014/main" id="{E4A337CA-DF2F-49FE-AAC2-296DB8D87B1F}"/>
               </a:ext>
             </a:extLst>
           </p:cNvPr>
@@ -6543,7 +7559,7 @@
                             <a:srgbClr val="24343F"/>
                           </a:solidFill>
                         </a:rPr>
-                        <a:t>Complaint rate</a:t>
+                        <a:t>Scenario complaint rate</a:t>
                       </a:r>
                       <a:endParaRPr sz="1050"/>
                     </a:p>
@@ -6641,7 +7657,7 @@
                             <a:srgbClr val="1B2730"/>
                           </a:solidFill>
                         </a:rPr>
-                        <a:t>FCA aggregate complaints 2025 H2</a:t>
+                        <a:t>FCA aggregate benchmark, 2025 H2</a:t>
                       </a:r>
                       <a:endParaRPr sz="1050"/>
                     </a:p>
@@ -6741,7 +7757,7 @@
                             <a:srgbClr val="1B2730"/>
                           </a:solidFill>
                         </a:rPr>
-                        <a:t>£650, 3 free</a:t>
+                        <a:t>£650 after 3 free cases/year</a:t>
                       </a:r>
                       <a:endParaRPr sz="1050"/>
                     </a:p>
@@ -6890,7 +7906,7 @@
                             <a:srgbClr val="1B2730"/>
                           </a:solidFill>
                         </a:rPr>
-                        <a:t>684 in / 49 out</a:t>
+                        <a:t>684 input / 49 output tokens</a:t>
                       </a:r>
                       <a:endParaRPr sz="1050"/>
                     </a:p>
@@ -6939,7 +7955,7 @@
                             <a:srgbClr val="1B2730"/>
                           </a:solidFill>
                         </a:rPr>
-                        <a:t>Measured, n=12</a:t>
+                        <a:t>Project measurement, n=12</a:t>
                       </a:r>
                       <a:endParaRPr sz="1050"/>
                     </a:p>
@@ -6990,7 +8006,7 @@
                             <a:srgbClr val="24343F"/>
                           </a:solidFill>
                         </a:rPr>
-                        <a:t>Team accuracy</a:t>
+                        <a:t>Agreement with CFPB label</a:t>
                       </a:r>
                       <a:endParaRPr sz="1050"/>
                     </a:p>
@@ -7088,7 +8104,7 @@
                             <a:srgbClr val="1B2730"/>
                           </a:solidFill>
                         </a:rPr>
-                        <a:t>gpt-4o, 240 complaints, seed 42</a:t>
+                        <a:t>gpt-4o, n=240, seed 42</a:t>
                       </a:r>
                       <a:endParaRPr sz="1050"/>
                     </a:p>
@@ -7131,7 +8147,7 @@
     </p:spTree>
     <p:extLst>
       <p:ext uri="{BB962C8B-B14F-4D97-AF65-F5344CB8AC3E}">
-        <p14:creationId xmlns:p14="http://schemas.microsoft.com/office/powerpoint/2010/main" val="2022289701"/>
+        <p14:creationId xmlns:p14="http://schemas.microsoft.com/office/powerpoint/2010/main" val="57141458"/>
       </p:ext>
     </p:extLst>
   </p:cSld>
@@ -7162,7 +8178,7 @@
           <p:cNvPr id="2" name="Text 0">
             <a:extLst xmlns:a="http://schemas.openxmlformats.org/drawingml/2006/main">
               <a:ext uri="{FF2B5EF4-FFF2-40B4-BE49-F238E27FC236}">
-                <a16:creationId xmlns:a16="http://schemas.microsoft.com/office/drawing/2014/main" id="{CC0A68A0-885A-41B8-BFB7-7EAB3F145A1C}"/>
+                <a16:creationId xmlns:a16="http://schemas.microsoft.com/office/drawing/2014/main" id="{A2A58E71-4D91-4029-A2BD-5A7F2CCFD9BD}"/>
               </a:ext>
             </a:extLst>
           </p:cNvPr>
@@ -7208,7 +8224,7 @@
           <p:cNvPr id="3" name="Shape 1">
             <a:extLst xmlns:a="http://schemas.openxmlformats.org/drawingml/2006/main">
               <a:ext uri="{FF2B5EF4-FFF2-40B4-BE49-F238E27FC236}">
-                <a16:creationId xmlns:a16="http://schemas.microsoft.com/office/drawing/2014/main" id="{FEA3FEC7-4E1D-403B-825F-806056ADB23C}"/>
+                <a16:creationId xmlns:a16="http://schemas.microsoft.com/office/drawing/2014/main" id="{C20FDC72-8FB4-481A-A1D3-ACEF768F7E61}"/>
               </a:ext>
             </a:extLst>
           </p:cNvPr>
@@ -7239,7 +8255,7 @@
           <p:nvPr/>
         </p:nvPicPr>
         <p:blipFill>
-          <a:blip xmlns:r="http://schemas.openxmlformats.org/officeDocument/2006/relationships" xmlns:a="http://schemas.openxmlformats.org/drawingml/2006/main" r:embed="R6e5699fe50fe467e"/>
+          <a:blip xmlns:r="http://schemas.openxmlformats.org/officeDocument/2006/relationships" xmlns:a="http://schemas.openxmlformats.org/drawingml/2006/main" r:embed="Rb19c9506a58b4f5a"/>
           <a:stretch xmlns:a="http://schemas.openxmlformats.org/drawingml/2006/main">
             <a:fillRect l="0" t="0" r="0" b="0"/>
           </a:stretch>
@@ -7259,7 +8275,7 @@
           <p:cNvPr id="5" name="Text 2">
             <a:extLst xmlns:a="http://schemas.openxmlformats.org/drawingml/2006/main">
               <a:ext uri="{FF2B5EF4-FFF2-40B4-BE49-F238E27FC236}">
-                <a16:creationId xmlns:a16="http://schemas.microsoft.com/office/drawing/2014/main" id="{7B470AE5-51D9-42A7-A49E-754C77E40F33}"/>
+                <a16:creationId xmlns:a16="http://schemas.microsoft.com/office/drawing/2014/main" id="{FCD47B61-FDB3-418D-97F2-E1A7D53888AA}"/>
               </a:ext>
             </a:extLst>
           </p:cNvPr>
@@ -7305,7 +8321,7 @@
           <p:cNvPr id="6" name="Shape 3">
             <a:extLst xmlns:a="http://schemas.openxmlformats.org/drawingml/2006/main">
               <a:ext uri="{FF2B5EF4-FFF2-40B4-BE49-F238E27FC236}">
-                <a16:creationId xmlns:a16="http://schemas.microsoft.com/office/drawing/2014/main" id="{DFB73B41-3264-417E-B0E9-AA0D45C36A6B}"/>
+                <a16:creationId xmlns:a16="http://schemas.microsoft.com/office/drawing/2014/main" id="{C37099B5-A037-411E-A7B2-CDF4CD9450CC}"/>
               </a:ext>
             </a:extLst>
           </p:cNvPr>
@@ -7332,7 +8348,7 @@
           <p:cNvPr id="7" name="Shape 4">
             <a:extLst xmlns:a="http://schemas.openxmlformats.org/drawingml/2006/main">
               <a:ext uri="{FF2B5EF4-FFF2-40B4-BE49-F238E27FC236}">
-                <a16:creationId xmlns:a16="http://schemas.microsoft.com/office/drawing/2014/main" id="{1920A8D3-56B9-411E-9B95-52B0BA1B8EF0}"/>
+                <a16:creationId xmlns:a16="http://schemas.microsoft.com/office/drawing/2014/main" id="{5A5A7132-CB8C-4F18-8253-9C8C05939D1E}"/>
               </a:ext>
             </a:extLst>
           </p:cNvPr>
@@ -7359,7 +8375,7 @@
           <p:cNvPr id="8" name="Text 5">
             <a:extLst xmlns:a="http://schemas.openxmlformats.org/drawingml/2006/main">
               <a:ext uri="{FF2B5EF4-FFF2-40B4-BE49-F238E27FC236}">
-                <a16:creationId xmlns:a16="http://schemas.microsoft.com/office/drawing/2014/main" id="{9EE23009-4616-4F6C-A88E-F1CACA6DADCA}"/>
+                <a16:creationId xmlns:a16="http://schemas.microsoft.com/office/drawing/2014/main" id="{A2248CCC-1018-4240-8772-124BE624E752}"/>
               </a:ext>
             </a:extLst>
           </p:cNvPr>
@@ -7416,7 +8432,7 @@
           <p:cNvPr id="9" name="Shape 6">
             <a:extLst xmlns:a="http://schemas.openxmlformats.org/drawingml/2006/main">
               <a:ext uri="{FF2B5EF4-FFF2-40B4-BE49-F238E27FC236}">
-                <a16:creationId xmlns:a16="http://schemas.microsoft.com/office/drawing/2014/main" id="{6F0A0BB3-7686-41A5-93A2-9AE66F8B7B2A}"/>
+                <a16:creationId xmlns:a16="http://schemas.microsoft.com/office/drawing/2014/main" id="{826C9C09-5E5C-4999-AF0E-D98B2F0D5CD9}"/>
               </a:ext>
             </a:extLst>
           </p:cNvPr>
@@ -7447,7 +8463,7 @@
           <p:cNvPr id="10" name="Text 7">
             <a:extLst xmlns:a="http://schemas.openxmlformats.org/drawingml/2006/main">
               <a:ext uri="{FF2B5EF4-FFF2-40B4-BE49-F238E27FC236}">
-                <a16:creationId xmlns:a16="http://schemas.microsoft.com/office/drawing/2014/main" id="{74BAFE3E-0BD1-4052-8B5E-2400E8C5D2FA}"/>
+                <a16:creationId xmlns:a16="http://schemas.microsoft.com/office/drawing/2014/main" id="{1E677E53-A408-4F7A-9FEB-9DAE374160F4}"/>
               </a:ext>
             </a:extLst>
           </p:cNvPr>
@@ -7482,7 +8498,7 @@
           <p:cNvPr id="11" name="Text 8">
             <a:extLst xmlns:a="http://schemas.openxmlformats.org/drawingml/2006/main">
               <a:ext uri="{FF2B5EF4-FFF2-40B4-BE49-F238E27FC236}">
-                <a16:creationId xmlns:a16="http://schemas.microsoft.com/office/drawing/2014/main" id="{09982725-8484-4FCC-BB50-C1BB31C3006A}"/>
+                <a16:creationId xmlns:a16="http://schemas.microsoft.com/office/drawing/2014/main" id="{624F7F1D-3445-4FE2-9F43-FCB824BD86BD}"/>
               </a:ext>
             </a:extLst>
           </p:cNvPr>
@@ -7528,7 +8544,7 @@
           <p:cNvPr id="12" name="Shape 9">
             <a:extLst xmlns:a="http://schemas.openxmlformats.org/drawingml/2006/main">
               <a:ext uri="{FF2B5EF4-FFF2-40B4-BE49-F238E27FC236}">
-                <a16:creationId xmlns:a16="http://schemas.microsoft.com/office/drawing/2014/main" id="{F9488555-424B-4DF3-85D1-91FB62B0DB80}"/>
+                <a16:creationId xmlns:a16="http://schemas.microsoft.com/office/drawing/2014/main" id="{4FF37271-FF11-4479-8E84-3EE8C1C62EBD}"/>
               </a:ext>
             </a:extLst>
           </p:cNvPr>
@@ -7568,7 +8584,7 @@
           <p:cNvPr id="13" name="Text 10">
             <a:extLst xmlns:a="http://schemas.openxmlformats.org/drawingml/2006/main">
               <a:ext uri="{FF2B5EF4-FFF2-40B4-BE49-F238E27FC236}">
-                <a16:creationId xmlns:a16="http://schemas.microsoft.com/office/drawing/2014/main" id="{E6FEE50B-D1FD-4509-ABD3-84BFFEEED3AF}"/>
+                <a16:creationId xmlns:a16="http://schemas.microsoft.com/office/drawing/2014/main" id="{AEFF8FFE-0F7A-4731-BEFE-D5ACC80ED5F2}"/>
               </a:ext>
             </a:extLst>
           </p:cNvPr>
@@ -7603,7 +8619,7 @@
                 <a:ea typeface="Calibri"/>
                 <a:cs typeface="Calibri"/>
               </a:rPr>
-              <a:t>THE FIRM</a:t>
+              <a:t>ASSUMED CLIENT PROFILE</a:t>
             </a:r>
             <a:endParaRPr sz="950"/>
           </a:p>
@@ -7614,7 +8630,7 @@
           <p:cNvPr id="14" name="Text 11">
             <a:extLst xmlns:a="http://schemas.openxmlformats.org/drawingml/2006/main">
               <a:ext uri="{FF2B5EF4-FFF2-40B4-BE49-F238E27FC236}">
-                <a16:creationId xmlns:a16="http://schemas.microsoft.com/office/drawing/2014/main" id="{28754D22-995A-4107-B9A8-F6029364B33E}"/>
+                <a16:creationId xmlns:a16="http://schemas.microsoft.com/office/drawing/2014/main" id="{4ACF582F-575C-4EC1-A8C3-43C4DEABB72D}"/>
               </a:ext>
             </a:extLst>
           </p:cNvPr>
@@ -7660,7 +8676,7 @@
           <p:cNvPr id="15" name="Text 12">
             <a:extLst xmlns:a="http://schemas.openxmlformats.org/drawingml/2006/main">
               <a:ext uri="{FF2B5EF4-FFF2-40B4-BE49-F238E27FC236}">
-                <a16:creationId xmlns:a16="http://schemas.microsoft.com/office/drawing/2014/main" id="{0D7CBBD6-CBFE-4EE5-9F94-8F7AD8C08711}"/>
+                <a16:creationId xmlns:a16="http://schemas.microsoft.com/office/drawing/2014/main" id="{96FA5068-14A6-478F-9438-572CC454E138}"/>
               </a:ext>
             </a:extLst>
           </p:cNvPr>
@@ -7706,7 +8722,7 @@
           <p:cNvPr id="16" name="Shape 13">
             <a:extLst xmlns:a="http://schemas.openxmlformats.org/drawingml/2006/main">
               <a:ext uri="{FF2B5EF4-FFF2-40B4-BE49-F238E27FC236}">
-                <a16:creationId xmlns:a16="http://schemas.microsoft.com/office/drawing/2014/main" id="{F4010573-4DFA-4F58-A410-87A15A8CB29F}"/>
+                <a16:creationId xmlns:a16="http://schemas.microsoft.com/office/drawing/2014/main" id="{A5B56416-B0B1-4E3F-91C0-E8FADB7B9E35}"/>
               </a:ext>
             </a:extLst>
           </p:cNvPr>
@@ -7740,7 +8756,7 @@
           <p:cNvPr id="17" name="Text 14">
             <a:extLst xmlns:a="http://schemas.openxmlformats.org/drawingml/2006/main">
               <a:ext uri="{FF2B5EF4-FFF2-40B4-BE49-F238E27FC236}">
-                <a16:creationId xmlns:a16="http://schemas.microsoft.com/office/drawing/2014/main" id="{2604AE16-3005-47A4-9C1E-A143C7BAC2BB}"/>
+                <a16:creationId xmlns:a16="http://schemas.microsoft.com/office/drawing/2014/main" id="{66C09F7C-5821-43A7-A7AE-B976C51DDEF6}"/>
               </a:ext>
             </a:extLst>
           </p:cNvPr>
@@ -7786,7 +8802,7 @@
           <p:cNvPr id="18" name="Text 15">
             <a:extLst xmlns:a="http://schemas.openxmlformats.org/drawingml/2006/main">
               <a:ext uri="{FF2B5EF4-FFF2-40B4-BE49-F238E27FC236}">
-                <a16:creationId xmlns:a16="http://schemas.microsoft.com/office/drawing/2014/main" id="{D2DF7392-AF5B-49AC-A8F8-861F9C1CE229}"/>
+                <a16:creationId xmlns:a16="http://schemas.microsoft.com/office/drawing/2014/main" id="{5A6EF752-4BF8-4B37-8D46-E7DABA65B577}"/>
               </a:ext>
             </a:extLst>
           </p:cNvPr>
@@ -7832,7 +8848,7 @@
           <p:cNvPr id="19" name="Text 16">
             <a:extLst xmlns:a="http://schemas.openxmlformats.org/drawingml/2006/main">
               <a:ext uri="{FF2B5EF4-FFF2-40B4-BE49-F238E27FC236}">
-                <a16:creationId xmlns:a16="http://schemas.microsoft.com/office/drawing/2014/main" id="{F25935AC-ED8F-410F-A5DF-11C25BABD03D}"/>
+                <a16:creationId xmlns:a16="http://schemas.microsoft.com/office/drawing/2014/main" id="{BFDB2DFF-EAE9-4F62-AC35-863F875D594D}"/>
               </a:ext>
             </a:extLst>
           </p:cNvPr>
@@ -7878,7 +8894,7 @@
           <p:cNvPr id="20" name="Shape 17">
             <a:extLst xmlns:a="http://schemas.openxmlformats.org/drawingml/2006/main">
               <a:ext uri="{FF2B5EF4-FFF2-40B4-BE49-F238E27FC236}">
-                <a16:creationId xmlns:a16="http://schemas.microsoft.com/office/drawing/2014/main" id="{8A3CA519-F1F5-4896-B10F-F9A520706246}"/>
+                <a16:creationId xmlns:a16="http://schemas.microsoft.com/office/drawing/2014/main" id="{F2BE3AF1-9E89-47EA-AEC5-9ED0319010DD}"/>
               </a:ext>
             </a:extLst>
           </p:cNvPr>
@@ -7918,7 +8934,7 @@
           <p:cNvPr id="21" name="Text 18">
             <a:extLst xmlns:a="http://schemas.openxmlformats.org/drawingml/2006/main">
               <a:ext uri="{FF2B5EF4-FFF2-40B4-BE49-F238E27FC236}">
-                <a16:creationId xmlns:a16="http://schemas.microsoft.com/office/drawing/2014/main" id="{350ADA36-242C-40AE-A33D-692D2A692DA4}"/>
+                <a16:creationId xmlns:a16="http://schemas.microsoft.com/office/drawing/2014/main" id="{88B3A65A-FB3F-4738-852A-58E53536F66E}"/>
               </a:ext>
             </a:extLst>
           </p:cNvPr>
@@ -7964,7 +8980,7 @@
           <p:cNvPr id="22" name="Text 19">
             <a:extLst xmlns:a="http://schemas.openxmlformats.org/drawingml/2006/main">
               <a:ext uri="{FF2B5EF4-FFF2-40B4-BE49-F238E27FC236}">
-                <a16:creationId xmlns:a16="http://schemas.microsoft.com/office/drawing/2014/main" id="{E150AC1D-0D78-43D2-A31D-F250C60A9429}"/>
+                <a16:creationId xmlns:a16="http://schemas.microsoft.com/office/drawing/2014/main" id="{9B3AD434-E544-4A56-B0CB-5BC2FE44BE7D}"/>
               </a:ext>
             </a:extLst>
           </p:cNvPr>
@@ -8010,7 +9026,7 @@
           <p:cNvPr id="23" name="Text 20">
             <a:extLst xmlns:a="http://schemas.openxmlformats.org/drawingml/2006/main">
               <a:ext uri="{FF2B5EF4-FFF2-40B4-BE49-F238E27FC236}">
-                <a16:creationId xmlns:a16="http://schemas.microsoft.com/office/drawing/2014/main" id="{35B1CEDB-5A05-46CE-84C6-809308594318}"/>
+                <a16:creationId xmlns:a16="http://schemas.microsoft.com/office/drawing/2014/main" id="{EBE21BEA-284B-4E86-8037-A41C84D180A6}"/>
               </a:ext>
             </a:extLst>
           </p:cNvPr>
@@ -8056,7 +9072,7 @@
           <p:cNvPr id="24" name="Shape 21">
             <a:extLst xmlns:a="http://schemas.openxmlformats.org/drawingml/2006/main">
               <a:ext uri="{FF2B5EF4-FFF2-40B4-BE49-F238E27FC236}">
-                <a16:creationId xmlns:a16="http://schemas.microsoft.com/office/drawing/2014/main" id="{0862710D-6A4B-4F66-A9D5-5AA02317F905}"/>
+                <a16:creationId xmlns:a16="http://schemas.microsoft.com/office/drawing/2014/main" id="{29909F16-92B8-48C4-AD6E-70304175B3C4}"/>
               </a:ext>
             </a:extLst>
           </p:cNvPr>
@@ -8083,7 +9099,7 @@
           <p:cNvPr id="25" name="Shape 22">
             <a:extLst xmlns:a="http://schemas.openxmlformats.org/drawingml/2006/main">
               <a:ext uri="{FF2B5EF4-FFF2-40B4-BE49-F238E27FC236}">
-                <a16:creationId xmlns:a16="http://schemas.microsoft.com/office/drawing/2014/main" id="{3F883784-EC2A-4C68-800E-F814E1EE69F6}"/>
+                <a16:creationId xmlns:a16="http://schemas.microsoft.com/office/drawing/2014/main" id="{D1C9E604-91C7-40A4-9075-E4DF77D7D79D}"/>
               </a:ext>
             </a:extLst>
           </p:cNvPr>
@@ -8110,7 +9126,7 @@
           <p:cNvPr id="26" name="Text 23">
             <a:extLst xmlns:a="http://schemas.openxmlformats.org/drawingml/2006/main">
               <a:ext uri="{FF2B5EF4-FFF2-40B4-BE49-F238E27FC236}">
-                <a16:creationId xmlns:a16="http://schemas.microsoft.com/office/drawing/2014/main" id="{B4C6A863-FE5A-4EF0-8B82-E38C8B667C52}"/>
+                <a16:creationId xmlns:a16="http://schemas.microsoft.com/office/drawing/2014/main" id="{6B459C27-945F-4261-A8FE-02289FA84C7D}"/>
               </a:ext>
             </a:extLst>
           </p:cNvPr>
@@ -8167,7 +9183,29 @@
                 <a:ea typeface="Calibri"/>
                 <a:cs typeface="Calibri"/>
               </a:rPr>
-              <a:t>a customer-facing chatbot, which fails in public in your customer's voice; and credit scoring, which is Annex III high-risk under the EU AI Act.</a:t>
+              <a:t>a customer-facing chatbot, which fails in public in your customer's voice; and </a:t>
+            </a:r>
+            <a:r>
+              <a:rPr sz="1250">
+                <a:solidFill>
+                  <a:srgbClr val="000000"/>
+                </a:solidFill>
+                <a:latin typeface="Calibri"/>
+                <a:ea typeface="Calibri"/>
+                <a:cs typeface="Calibri"/>
+              </a:rPr>
+              <a:t>creditworthiness scoring, an Annex III high-risk use</a:t>
+            </a:r>
+            <a:r>
+              <a:rPr sz="1250">
+                <a:solidFill>
+                  <a:srgbClr val="000000"/>
+                </a:solidFill>
+                <a:latin typeface="Calibri"/>
+                <a:ea typeface="Calibri"/>
+                <a:cs typeface="Calibri"/>
+              </a:rPr>
+              <a:t> under the EU AI Act.</a:t>
             </a:r>
             <a:endParaRPr sz="1250"/>
           </a:p>
@@ -8176,7 +9214,7 @@
     </p:spTree>
     <p:extLst>
       <p:ext uri="{BB962C8B-B14F-4D97-AF65-F5344CB8AC3E}">
-        <p14:creationId xmlns:p14="http://schemas.microsoft.com/office/powerpoint/2010/main" val="1028167476"/>
+        <p14:creationId xmlns:p14="http://schemas.microsoft.com/office/powerpoint/2010/main" val="545349177"/>
       </p:ext>
     </p:extLst>
   </p:cSld>
@@ -8207,7 +9245,7 @@
           <p:cNvPr id="2" name="Text 0">
             <a:extLst xmlns:a="http://schemas.openxmlformats.org/drawingml/2006/main">
               <a:ext uri="{FF2B5EF4-FFF2-40B4-BE49-F238E27FC236}">
-                <a16:creationId xmlns:a16="http://schemas.microsoft.com/office/drawing/2014/main" id="{0CC232A2-4369-498C-9D85-A582B78EE89B}"/>
+                <a16:creationId xmlns:a16="http://schemas.microsoft.com/office/drawing/2014/main" id="{F83B0BFE-769C-47A7-9677-1749477D5BE9}"/>
               </a:ext>
             </a:extLst>
           </p:cNvPr>
@@ -8253,7 +9291,7 @@
           <p:cNvPr id="3" name="Shape 1">
             <a:extLst xmlns:a="http://schemas.openxmlformats.org/drawingml/2006/main">
               <a:ext uri="{FF2B5EF4-FFF2-40B4-BE49-F238E27FC236}">
-                <a16:creationId xmlns:a16="http://schemas.microsoft.com/office/drawing/2014/main" id="{4242AE54-5296-4410-90D8-64C4275D4311}"/>
+                <a16:creationId xmlns:a16="http://schemas.microsoft.com/office/drawing/2014/main" id="{0A91866A-232D-4441-A636-989FB56AF36D}"/>
               </a:ext>
             </a:extLst>
           </p:cNvPr>
@@ -8284,7 +9322,7 @@
           <p:nvPr/>
         </p:nvPicPr>
         <p:blipFill>
-          <a:blip xmlns:r="http://schemas.openxmlformats.org/officeDocument/2006/relationships" xmlns:a="http://schemas.openxmlformats.org/drawingml/2006/main" r:embed="R0b8251a3718b497e"/>
+          <a:blip xmlns:r="http://schemas.openxmlformats.org/officeDocument/2006/relationships" xmlns:a="http://schemas.openxmlformats.org/drawingml/2006/main" r:embed="R501dae6cfb1f4df3"/>
           <a:stretch xmlns:a="http://schemas.openxmlformats.org/drawingml/2006/main">
             <a:fillRect l="0" t="0" r="0" b="0"/>
           </a:stretch>
@@ -8304,7 +9342,7 @@
           <p:cNvPr id="5" name="Text 2">
             <a:extLst xmlns:a="http://schemas.openxmlformats.org/drawingml/2006/main">
               <a:ext uri="{FF2B5EF4-FFF2-40B4-BE49-F238E27FC236}">
-                <a16:creationId xmlns:a16="http://schemas.microsoft.com/office/drawing/2014/main" id="{D8468A89-22F4-4FF3-82DC-36C3F33BDDFE}"/>
+                <a16:creationId xmlns:a16="http://schemas.microsoft.com/office/drawing/2014/main" id="{5358ACDD-FC2B-426B-BD5E-5952130A4048}"/>
               </a:ext>
             </a:extLst>
           </p:cNvPr>
@@ -8350,7 +9388,7 @@
           <p:cNvPr id="6" name="Shape 3">
             <a:extLst xmlns:a="http://schemas.openxmlformats.org/drawingml/2006/main">
               <a:ext uri="{FF2B5EF4-FFF2-40B4-BE49-F238E27FC236}">
-                <a16:creationId xmlns:a16="http://schemas.microsoft.com/office/drawing/2014/main" id="{BE407897-6C6D-4A4D-9142-0FDC2C94A0AB}"/>
+                <a16:creationId xmlns:a16="http://schemas.microsoft.com/office/drawing/2014/main" id="{4B8147D2-28B2-43C4-834B-5DDA718C8081}"/>
               </a:ext>
             </a:extLst>
           </p:cNvPr>
@@ -8381,7 +9419,7 @@
           <p:cNvPr id="7" name="Text 4">
             <a:extLst xmlns:a="http://schemas.openxmlformats.org/drawingml/2006/main">
               <a:ext uri="{FF2B5EF4-FFF2-40B4-BE49-F238E27FC236}">
-                <a16:creationId xmlns:a16="http://schemas.microsoft.com/office/drawing/2014/main" id="{2C2F9421-0A72-44F9-B19B-7CBE666447B6}"/>
+                <a16:creationId xmlns:a16="http://schemas.microsoft.com/office/drawing/2014/main" id="{9DD442BA-E48D-4F7C-B612-3DF3E855749B}"/>
               </a:ext>
             </a:extLst>
           </p:cNvPr>
@@ -8416,7 +9454,7 @@
           <p:cNvPr id="8" name="Text 5">
             <a:extLst xmlns:a="http://schemas.openxmlformats.org/drawingml/2006/main">
               <a:ext uri="{FF2B5EF4-FFF2-40B4-BE49-F238E27FC236}">
-                <a16:creationId xmlns:a16="http://schemas.microsoft.com/office/drawing/2014/main" id="{A1C608C6-76BA-4C20-844C-AB7C1CFF67BA}"/>
+                <a16:creationId xmlns:a16="http://schemas.microsoft.com/office/drawing/2014/main" id="{7E9377E3-BDEE-4E99-9379-94AFD9FC4292}"/>
               </a:ext>
             </a:extLst>
           </p:cNvPr>
@@ -8466,7 +9504,7 @@
           <p:nvPr/>
         </p:nvPicPr>
         <p:blipFill>
-          <a:blip xmlns:r="http://schemas.openxmlformats.org/officeDocument/2006/relationships" xmlns:a="http://schemas.openxmlformats.org/drawingml/2006/main" r:embed="R13d65269fb0f4c0a"/>
+          <a:blip xmlns:r="http://schemas.openxmlformats.org/officeDocument/2006/relationships" xmlns:a="http://schemas.openxmlformats.org/drawingml/2006/main" r:embed="R14fc6e2c1bae4c89"/>
           <a:stretch xmlns:a="http://schemas.openxmlformats.org/drawingml/2006/main">
             <a:fillRect l="0" t="0" r="0" b="0"/>
           </a:stretch>
@@ -8486,7 +9524,7 @@
           <p:cNvPr id="10" name="Shape 6">
             <a:extLst xmlns:a="http://schemas.openxmlformats.org/drawingml/2006/main">
               <a:ext uri="{FF2B5EF4-FFF2-40B4-BE49-F238E27FC236}">
-                <a16:creationId xmlns:a16="http://schemas.microsoft.com/office/drawing/2014/main" id="{70524DD7-5E36-4BD5-BB42-CA9F47B6C725}"/>
+                <a16:creationId xmlns:a16="http://schemas.microsoft.com/office/drawing/2014/main" id="{BBE8E076-A2E6-44EE-A3B8-8122081F5B7A}"/>
               </a:ext>
             </a:extLst>
           </p:cNvPr>
@@ -8520,7 +9558,7 @@
           <p:cNvPr id="11" name="Text 7">
             <a:extLst xmlns:a="http://schemas.openxmlformats.org/drawingml/2006/main">
               <a:ext uri="{FF2B5EF4-FFF2-40B4-BE49-F238E27FC236}">
-                <a16:creationId xmlns:a16="http://schemas.microsoft.com/office/drawing/2014/main" id="{016CEC6A-785C-4977-B162-F7D07A765FDA}"/>
+                <a16:creationId xmlns:a16="http://schemas.microsoft.com/office/drawing/2014/main" id="{A0D07527-6A45-4365-B601-75E07FBCBE50}"/>
               </a:ext>
             </a:extLst>
           </p:cNvPr>
@@ -8577,7 +9615,7 @@
           <p:cNvPr id="12" name="Text 8">
             <a:extLst xmlns:a="http://schemas.openxmlformats.org/drawingml/2006/main">
               <a:ext uri="{FF2B5EF4-FFF2-40B4-BE49-F238E27FC236}">
-                <a16:creationId xmlns:a16="http://schemas.microsoft.com/office/drawing/2014/main" id="{6D7524D0-516C-413D-9B47-AF9B76D2A399}"/>
+                <a16:creationId xmlns:a16="http://schemas.microsoft.com/office/drawing/2014/main" id="{7564BCC4-8AAA-4062-812A-3DF4C85E9157}"/>
               </a:ext>
             </a:extLst>
           </p:cNvPr>
@@ -8613,7 +9651,7 @@
                   <a:srgbClr val="C6D8E4"/>
                 </a:solidFill>
               </a:rPr>
-              <a:t>16,839 complaints — the size of the job, not a sample</a:t>
+              <a:t>16,839 public complaints — what I analysed, not your annual volume</a:t>
             </a:r>
             <a:endParaRPr sz="1250"/>
           </a:p>
@@ -8631,7 +9669,7 @@
                   <a:srgbClr val="C6D8E4"/>
                 </a:solidFill>
               </a:rPr>
-              <a:t>98.0% answered on time — the measure you already report to your regulator</a:t>
+              <a:t>98.0% timely responses — a CFPB field, not your performance</a:t>
             </a:r>
             <a:endParaRPr sz="1250"/>
           </a:p>
@@ -8649,7 +9687,7 @@
                   <a:srgbClr val="C6D8E4"/>
                 </a:solidFill>
               </a:rPr>
-              <a:t>12.7% cost money to resolve — the only figure here in your currency</a:t>
+              <a:t>12.7% ended with monetary relief — not complaint-handling cost</a:t>
             </a:r>
             <a:endParaRPr sz="1250"/>
           </a:p>
@@ -8667,15 +9705,7 @@
                   <a:srgbClr val="C6D8E4"/>
                 </a:solidFill>
               </a:rPr>
-              <a:t>46% sit in 5 of 64 categories</a:t>
-            </a:r>
-            <a:r>
-              <a:rPr sz="1250">
-                <a:solidFill>
-                  <a:srgbClr val="C6D8E4"/>
-                </a:solidFill>
-              </a:rPr>
-              <a:t> — the opportunity, as a share not a promise</a:t>
+              <a:t>46.1% fall in 5 of 64 categories — a hypothesis to test in your data</a:t>
             </a:r>
             <a:endParaRPr sz="1250"/>
           </a:p>
@@ -8693,7 +9723,7 @@
                   <a:srgbClr val="C6D8E4"/>
                 </a:solidFill>
               </a:rPr>
-              <a:t>Whose numbers? Not yours. Public regulator data standing in for your book until Phase 0. The shape transfers; the volume does not.</a:t>
+              <a:t>These are CFPB figures across 567 firms. Phase 0 measures your own volume, mix, and outcomes.</a:t>
             </a:r>
             <a:endParaRPr sz="1250"/>
           </a:p>
@@ -8702,7 +9732,7 @@
     </p:spTree>
     <p:extLst>
       <p:ext uri="{BB962C8B-B14F-4D97-AF65-F5344CB8AC3E}">
-        <p14:creationId xmlns:p14="http://schemas.microsoft.com/office/powerpoint/2010/main" val="1735981689"/>
+        <p14:creationId xmlns:p14="http://schemas.microsoft.com/office/powerpoint/2010/main" val="1229886271"/>
       </p:ext>
     </p:extLst>
   </p:cSld>
@@ -8733,7 +9763,7 @@
           <p:cNvPr id="2" name="Text 0">
             <a:extLst xmlns:a="http://schemas.openxmlformats.org/drawingml/2006/main">
               <a:ext uri="{FF2B5EF4-FFF2-40B4-BE49-F238E27FC236}">
-                <a16:creationId xmlns:a16="http://schemas.microsoft.com/office/drawing/2014/main" id="{7C7FF10D-37B4-41A5-8143-24E70F67EBE0}"/>
+                <a16:creationId xmlns:a16="http://schemas.microsoft.com/office/drawing/2014/main" id="{406638FD-761A-4663-8308-CA3FD84D904D}"/>
               </a:ext>
             </a:extLst>
           </p:cNvPr>
@@ -8779,7 +9809,7 @@
           <p:cNvPr id="3" name="Shape 1">
             <a:extLst xmlns:a="http://schemas.openxmlformats.org/drawingml/2006/main">
               <a:ext uri="{FF2B5EF4-FFF2-40B4-BE49-F238E27FC236}">
-                <a16:creationId xmlns:a16="http://schemas.microsoft.com/office/drawing/2014/main" id="{682312DF-455D-446D-AD40-65F4D88D291B}"/>
+                <a16:creationId xmlns:a16="http://schemas.microsoft.com/office/drawing/2014/main" id="{B182C1EE-0F26-4870-859C-15860802062B}"/>
               </a:ext>
             </a:extLst>
           </p:cNvPr>
@@ -8810,7 +9840,7 @@
           <p:nvPr/>
         </p:nvPicPr>
         <p:blipFill>
-          <a:blip xmlns:r="http://schemas.openxmlformats.org/officeDocument/2006/relationships" xmlns:a="http://schemas.openxmlformats.org/drawingml/2006/main" r:embed="Rce04a60dc9d14f70"/>
+          <a:blip xmlns:r="http://schemas.openxmlformats.org/officeDocument/2006/relationships" xmlns:a="http://schemas.openxmlformats.org/drawingml/2006/main" r:embed="R8a148e4e47ca48da"/>
           <a:stretch xmlns:a="http://schemas.openxmlformats.org/drawingml/2006/main">
             <a:fillRect l="0" t="0" r="0" b="0"/>
           </a:stretch>
@@ -8830,7 +9860,7 @@
           <p:cNvPr id="5" name="Text 2">
             <a:extLst xmlns:a="http://schemas.openxmlformats.org/drawingml/2006/main">
               <a:ext uri="{FF2B5EF4-FFF2-40B4-BE49-F238E27FC236}">
-                <a16:creationId xmlns:a16="http://schemas.microsoft.com/office/drawing/2014/main" id="{E3E6B6EA-B7A2-4979-909F-94D34DC1BCBF}"/>
+                <a16:creationId xmlns:a16="http://schemas.microsoft.com/office/drawing/2014/main" id="{9BA90DFA-0E93-42E9-B514-87081EC312EA}"/>
               </a:ext>
             </a:extLst>
           </p:cNvPr>
@@ -8876,7 +9906,7 @@
           <p:cNvPr id="6" name="Shape 3">
             <a:extLst xmlns:a="http://schemas.openxmlformats.org/drawingml/2006/main">
               <a:ext uri="{FF2B5EF4-FFF2-40B4-BE49-F238E27FC236}">
-                <a16:creationId xmlns:a16="http://schemas.microsoft.com/office/drawing/2014/main" id="{FE4397E1-6A53-4C1A-9094-131B5383D392}"/>
+                <a16:creationId xmlns:a16="http://schemas.microsoft.com/office/drawing/2014/main" id="{2E38A821-6B4B-4F39-8194-3B109A38AA5B}"/>
               </a:ext>
             </a:extLst>
           </p:cNvPr>
@@ -8907,7 +9937,7 @@
           <p:cNvPr id="7" name="Text 4">
             <a:extLst xmlns:a="http://schemas.openxmlformats.org/drawingml/2006/main">
               <a:ext uri="{FF2B5EF4-FFF2-40B4-BE49-F238E27FC236}">
-                <a16:creationId xmlns:a16="http://schemas.microsoft.com/office/drawing/2014/main" id="{1D8AB955-FEC5-4F62-8C28-33E4EFDB6A3F}"/>
+                <a16:creationId xmlns:a16="http://schemas.microsoft.com/office/drawing/2014/main" id="{2E940304-9FFC-4C17-9992-B5FD9F9E4861}"/>
               </a:ext>
             </a:extLst>
           </p:cNvPr>
@@ -8942,7 +9972,7 @@
           <p:cNvPr id="8" name="Text 5">
             <a:extLst xmlns:a="http://schemas.openxmlformats.org/drawingml/2006/main">
               <a:ext uri="{FF2B5EF4-FFF2-40B4-BE49-F238E27FC236}">
-                <a16:creationId xmlns:a16="http://schemas.microsoft.com/office/drawing/2014/main" id="{3C221B9F-17F9-4A1F-89DD-E980721F2E22}"/>
+                <a16:creationId xmlns:a16="http://schemas.microsoft.com/office/drawing/2014/main" id="{8865DD5B-377B-4E2C-A576-5D21B8F0FE89}"/>
               </a:ext>
             </a:extLst>
           </p:cNvPr>
@@ -8992,7 +10022,7 @@
           <p:nvPr/>
         </p:nvPicPr>
         <p:blipFill>
-          <a:blip xmlns:r="http://schemas.openxmlformats.org/officeDocument/2006/relationships" xmlns:a="http://schemas.openxmlformats.org/drawingml/2006/main" r:embed="R7d38f3f1a2774910"/>
+          <a:blip xmlns:r="http://schemas.openxmlformats.org/officeDocument/2006/relationships" xmlns:a="http://schemas.openxmlformats.org/drawingml/2006/main" r:embed="R537d6012df9d4478"/>
           <a:stretch xmlns:a="http://schemas.openxmlformats.org/drawingml/2006/main">
             <a:fillRect l="0" t="0" r="0" b="0"/>
           </a:stretch>
@@ -9016,7 +10046,7 @@
           <p:nvPr/>
         </p:nvPicPr>
         <p:blipFill>
-          <a:blip xmlns:r="http://schemas.openxmlformats.org/officeDocument/2006/relationships" xmlns:a="http://schemas.openxmlformats.org/drawingml/2006/main" r:embed="R1f63a93852f04afc"/>
+          <a:blip xmlns:r="http://schemas.openxmlformats.org/officeDocument/2006/relationships" xmlns:a="http://schemas.openxmlformats.org/drawingml/2006/main" r:embed="Rc9b513322889402d"/>
           <a:stretch xmlns:a="http://schemas.openxmlformats.org/drawingml/2006/main">
             <a:fillRect l="0" t="0" r="0" b="0"/>
           </a:stretch>
@@ -9036,7 +10066,7 @@
           <p:cNvPr id="11" name="Text 6">
             <a:extLst xmlns:a="http://schemas.openxmlformats.org/drawingml/2006/main">
               <a:ext uri="{FF2B5EF4-FFF2-40B4-BE49-F238E27FC236}">
-                <a16:creationId xmlns:a16="http://schemas.microsoft.com/office/drawing/2014/main" id="{33C6C0BB-056F-45C4-8F41-D47DDD8B0F39}"/>
+                <a16:creationId xmlns:a16="http://schemas.microsoft.com/office/drawing/2014/main" id="{4A907EE2-2189-4349-BAE7-55AF17C3A0C4}"/>
               </a:ext>
             </a:extLst>
           </p:cNvPr>
@@ -9071,7 +10101,7 @@
                 <a:ea typeface="Calibri"/>
                 <a:cs typeface="Calibri"/>
               </a:rPr>
-              <a:t>The workflow, running on 1 real complaint</a:t>
+              <a:t>The workflow, running on 1 public CFPB complaint</a:t>
             </a:r>
             <a:endParaRPr sz="1050"/>
           </a:p>
@@ -9082,7 +10112,7 @@
           <p:cNvPr id="12" name="Text 7">
             <a:extLst xmlns:a="http://schemas.openxmlformats.org/drawingml/2006/main">
               <a:ext uri="{FF2B5EF4-FFF2-40B4-BE49-F238E27FC236}">
-                <a16:creationId xmlns:a16="http://schemas.microsoft.com/office/drawing/2014/main" id="{5DA08784-B166-4BC8-B049-187309445A00}"/>
+                <a16:creationId xmlns:a16="http://schemas.microsoft.com/office/drawing/2014/main" id="{E5EA4F9E-5F8D-4843-9BE2-2B1472F952BF}"/>
               </a:ext>
             </a:extLst>
           </p:cNvPr>
@@ -9117,7 +10147,7 @@
                 <a:ea typeface="Calibri"/>
                 <a:cs typeface="Calibri"/>
               </a:rPr>
-              <a:t>The same decision, opened up in monitoring</a:t>
+              <a:t>The same demo case in LangSmith monitoring</a:t>
             </a:r>
             <a:endParaRPr sz="1050"/>
           </a:p>
@@ -9128,7 +10158,7 @@
           <p:cNvPr id="13" name="Shape 8">
             <a:extLst xmlns:a="http://schemas.openxmlformats.org/drawingml/2006/main">
               <a:ext uri="{FF2B5EF4-FFF2-40B4-BE49-F238E27FC236}">
-                <a16:creationId xmlns:a16="http://schemas.microsoft.com/office/drawing/2014/main" id="{ACFFE720-9A0B-497C-9373-48808C4EC557}"/>
+                <a16:creationId xmlns:a16="http://schemas.microsoft.com/office/drawing/2014/main" id="{15E023B1-ADEA-45D5-B7DC-35A3EE92F0F3}"/>
               </a:ext>
             </a:extLst>
           </p:cNvPr>
@@ -9155,7 +10185,7 @@
           <p:cNvPr id="14" name="Shape 9">
             <a:extLst xmlns:a="http://schemas.openxmlformats.org/drawingml/2006/main">
               <a:ext uri="{FF2B5EF4-FFF2-40B4-BE49-F238E27FC236}">
-                <a16:creationId xmlns:a16="http://schemas.microsoft.com/office/drawing/2014/main" id="{C0FC9119-6B9E-4E45-B9A9-2465707CE104}"/>
+                <a16:creationId xmlns:a16="http://schemas.microsoft.com/office/drawing/2014/main" id="{EC60F611-B4B5-4FC6-A082-705677F96791}"/>
               </a:ext>
             </a:extLst>
           </p:cNvPr>
@@ -9182,7 +10212,7 @@
           <p:cNvPr id="15" name="Shape 10">
             <a:extLst xmlns:a="http://schemas.openxmlformats.org/drawingml/2006/main">
               <a:ext uri="{FF2B5EF4-FFF2-40B4-BE49-F238E27FC236}">
-                <a16:creationId xmlns:a16="http://schemas.microsoft.com/office/drawing/2014/main" id="{B75B420C-6E37-4B78-96F1-D5436E046208}"/>
+                <a16:creationId xmlns:a16="http://schemas.microsoft.com/office/drawing/2014/main" id="{EA8A8C76-38DC-40A2-87AC-99060729F97B}"/>
               </a:ext>
             </a:extLst>
           </p:cNvPr>
@@ -9209,7 +10239,7 @@
           <p:cNvPr id="16" name="Shape 11">
             <a:extLst xmlns:a="http://schemas.openxmlformats.org/drawingml/2006/main">
               <a:ext uri="{FF2B5EF4-FFF2-40B4-BE49-F238E27FC236}">
-                <a16:creationId xmlns:a16="http://schemas.microsoft.com/office/drawing/2014/main" id="{6A8A0A97-8FC1-4AEA-9A8E-C1F6E7D41D19}"/>
+                <a16:creationId xmlns:a16="http://schemas.microsoft.com/office/drawing/2014/main" id="{3DD2CEB1-EEDC-495D-B526-2BC52F90EF96}"/>
               </a:ext>
             </a:extLst>
           </p:cNvPr>
@@ -9236,7 +10266,7 @@
           <p:cNvPr id="17" name="Shape 12">
             <a:extLst xmlns:a="http://schemas.openxmlformats.org/drawingml/2006/main">
               <a:ext uri="{FF2B5EF4-FFF2-40B4-BE49-F238E27FC236}">
-                <a16:creationId xmlns:a16="http://schemas.microsoft.com/office/drawing/2014/main" id="{79B494EE-32B9-4F45-B7F9-F970321B8956}"/>
+                <a16:creationId xmlns:a16="http://schemas.microsoft.com/office/drawing/2014/main" id="{ADB30687-E4C2-4B8F-9CF3-58F2B4CB7731}"/>
               </a:ext>
             </a:extLst>
           </p:cNvPr>
@@ -9263,7 +10293,7 @@
           <p:cNvPr id="18" name="Shape 13">
             <a:extLst xmlns:a="http://schemas.openxmlformats.org/drawingml/2006/main">
               <a:ext uri="{FF2B5EF4-FFF2-40B4-BE49-F238E27FC236}">
-                <a16:creationId xmlns:a16="http://schemas.microsoft.com/office/drawing/2014/main" id="{D21CAFA9-C50A-400B-B016-3FA312706820}"/>
+                <a16:creationId xmlns:a16="http://schemas.microsoft.com/office/drawing/2014/main" id="{74E07CAD-98E1-4999-89B1-510091A01047}"/>
               </a:ext>
             </a:extLst>
           </p:cNvPr>
@@ -9290,7 +10320,7 @@
           <p:cNvPr id="19" name="Shape 14">
             <a:extLst xmlns:a="http://schemas.openxmlformats.org/drawingml/2006/main">
               <a:ext uri="{FF2B5EF4-FFF2-40B4-BE49-F238E27FC236}">
-                <a16:creationId xmlns:a16="http://schemas.microsoft.com/office/drawing/2014/main" id="{36401BD1-FAD4-4C17-9841-868E19E3AD16}"/>
+                <a16:creationId xmlns:a16="http://schemas.microsoft.com/office/drawing/2014/main" id="{CDF92E13-CC3C-4FD1-A210-B464827D974F}"/>
               </a:ext>
             </a:extLst>
           </p:cNvPr>
@@ -9317,7 +10347,7 @@
           <p:cNvPr id="20" name="Shape 15">
             <a:extLst xmlns:a="http://schemas.openxmlformats.org/drawingml/2006/main">
               <a:ext uri="{FF2B5EF4-FFF2-40B4-BE49-F238E27FC236}">
-                <a16:creationId xmlns:a16="http://schemas.microsoft.com/office/drawing/2014/main" id="{2A3C6744-62E3-469E-8088-8696096BAE66}"/>
+                <a16:creationId xmlns:a16="http://schemas.microsoft.com/office/drawing/2014/main" id="{9E8E81F5-37EA-40C8-96EA-5DE9D8330D8D}"/>
               </a:ext>
             </a:extLst>
           </p:cNvPr>
@@ -9344,7 +10374,7 @@
           <p:cNvPr id="21" name="Shape 16">
             <a:extLst xmlns:a="http://schemas.openxmlformats.org/drawingml/2006/main">
               <a:ext uri="{FF2B5EF4-FFF2-40B4-BE49-F238E27FC236}">
-                <a16:creationId xmlns:a16="http://schemas.microsoft.com/office/drawing/2014/main" id="{FD0DDD33-F5B8-4C99-918E-0BD57987592E}"/>
+                <a16:creationId xmlns:a16="http://schemas.microsoft.com/office/drawing/2014/main" id="{8FD869BE-7731-4B22-B785-7EF8FE10BF72}"/>
               </a:ext>
             </a:extLst>
           </p:cNvPr>
@@ -9371,7 +10401,7 @@
           <p:cNvPr id="22" name="Shape 17">
             <a:extLst xmlns:a="http://schemas.openxmlformats.org/drawingml/2006/main">
               <a:ext uri="{FF2B5EF4-FFF2-40B4-BE49-F238E27FC236}">
-                <a16:creationId xmlns:a16="http://schemas.microsoft.com/office/drawing/2014/main" id="{17CDC898-6107-4875-AD3E-BBE3236D5454}"/>
+                <a16:creationId xmlns:a16="http://schemas.microsoft.com/office/drawing/2014/main" id="{52BC73B9-BE37-4EF2-8ECC-68D62DF7BE5E}"/>
               </a:ext>
             </a:extLst>
           </p:cNvPr>
@@ -9398,7 +10428,7 @@
           <p:cNvPr id="23" name="Shape 18">
             <a:extLst xmlns:a="http://schemas.openxmlformats.org/drawingml/2006/main">
               <a:ext uri="{FF2B5EF4-FFF2-40B4-BE49-F238E27FC236}">
-                <a16:creationId xmlns:a16="http://schemas.microsoft.com/office/drawing/2014/main" id="{4C3CF4E3-00AA-4F09-96C8-E28CD6AA2635}"/>
+                <a16:creationId xmlns:a16="http://schemas.microsoft.com/office/drawing/2014/main" id="{2CF03239-C0ED-478A-8B21-283F83C232EC}"/>
               </a:ext>
             </a:extLst>
           </p:cNvPr>
@@ -9425,7 +10455,7 @@
           <p:cNvPr id="24" name="Shape 19">
             <a:extLst xmlns:a="http://schemas.openxmlformats.org/drawingml/2006/main">
               <a:ext uri="{FF2B5EF4-FFF2-40B4-BE49-F238E27FC236}">
-                <a16:creationId xmlns:a16="http://schemas.microsoft.com/office/drawing/2014/main" id="{003996E9-609B-468D-963F-C7DC50098AF8}"/>
+                <a16:creationId xmlns:a16="http://schemas.microsoft.com/office/drawing/2014/main" id="{AA389B86-87F2-4286-A467-7D252ED6022B}"/>
               </a:ext>
             </a:extLst>
           </p:cNvPr>
@@ -9452,7 +10482,7 @@
           <p:cNvPr id="25" name="Shape 20">
             <a:extLst xmlns:a="http://schemas.openxmlformats.org/drawingml/2006/main">
               <a:ext uri="{FF2B5EF4-FFF2-40B4-BE49-F238E27FC236}">
-                <a16:creationId xmlns:a16="http://schemas.microsoft.com/office/drawing/2014/main" id="{910307AF-1A62-410C-A135-31AAF8BF1705}"/>
+                <a16:creationId xmlns:a16="http://schemas.microsoft.com/office/drawing/2014/main" id="{76790CC9-9083-4CB0-A7C8-431DEF181525}"/>
               </a:ext>
             </a:extLst>
           </p:cNvPr>
@@ -9479,7 +10509,7 @@
           <p:cNvPr id="26" name="Shape 21">
             <a:extLst xmlns:a="http://schemas.openxmlformats.org/drawingml/2006/main">
               <a:ext uri="{FF2B5EF4-FFF2-40B4-BE49-F238E27FC236}">
-                <a16:creationId xmlns:a16="http://schemas.microsoft.com/office/drawing/2014/main" id="{8E0742CE-2E77-45D5-B95E-4D64BA48FD75}"/>
+                <a16:creationId xmlns:a16="http://schemas.microsoft.com/office/drawing/2014/main" id="{BB944760-7E97-4BF9-B636-B73DF50048AF}"/>
               </a:ext>
             </a:extLst>
           </p:cNvPr>
@@ -9506,7 +10536,7 @@
           <p:cNvPr id="27" name="Shape 22">
             <a:extLst xmlns:a="http://schemas.openxmlformats.org/drawingml/2006/main">
               <a:ext uri="{FF2B5EF4-FFF2-40B4-BE49-F238E27FC236}">
-                <a16:creationId xmlns:a16="http://schemas.microsoft.com/office/drawing/2014/main" id="{FF96A4FB-0ADC-4784-B3FC-A746DE1B3ECC}"/>
+                <a16:creationId xmlns:a16="http://schemas.microsoft.com/office/drawing/2014/main" id="{691344D5-0BD6-4928-9A4F-38640936D853}"/>
               </a:ext>
             </a:extLst>
           </p:cNvPr>
@@ -9533,7 +10563,7 @@
           <p:cNvPr id="28" name="Shape 23">
             <a:extLst xmlns:a="http://schemas.openxmlformats.org/drawingml/2006/main">
               <a:ext uri="{FF2B5EF4-FFF2-40B4-BE49-F238E27FC236}">
-                <a16:creationId xmlns:a16="http://schemas.microsoft.com/office/drawing/2014/main" id="{FA9B4D88-DFEB-43BE-BCA3-FA7A9E3C1C64}"/>
+                <a16:creationId xmlns:a16="http://schemas.microsoft.com/office/drawing/2014/main" id="{E441B51D-2914-4FDF-8E65-351A3C84CDEE}"/>
               </a:ext>
             </a:extLst>
           </p:cNvPr>
@@ -9560,7 +10590,7 @@
           <p:cNvPr id="29" name="Shape 24">
             <a:extLst xmlns:a="http://schemas.openxmlformats.org/drawingml/2006/main">
               <a:ext uri="{FF2B5EF4-FFF2-40B4-BE49-F238E27FC236}">
-                <a16:creationId xmlns:a16="http://schemas.microsoft.com/office/drawing/2014/main" id="{13C8E69F-4789-4A38-B2E1-419D7CF48382}"/>
+                <a16:creationId xmlns:a16="http://schemas.microsoft.com/office/drawing/2014/main" id="{199332F8-986D-4725-A107-B67D60AF6057}"/>
               </a:ext>
             </a:extLst>
           </p:cNvPr>
@@ -9587,7 +10617,7 @@
           <p:cNvPr id="30" name="Shape 25">
             <a:extLst xmlns:a="http://schemas.openxmlformats.org/drawingml/2006/main">
               <a:ext uri="{FF2B5EF4-FFF2-40B4-BE49-F238E27FC236}">
-                <a16:creationId xmlns:a16="http://schemas.microsoft.com/office/drawing/2014/main" id="{A880B6D3-8639-400B-BBDF-B0BC3D8F7820}"/>
+                <a16:creationId xmlns:a16="http://schemas.microsoft.com/office/drawing/2014/main" id="{6083A483-91A5-46A7-9E00-8426A4B6DB19}"/>
               </a:ext>
             </a:extLst>
           </p:cNvPr>
@@ -9614,7 +10644,7 @@
           <p:cNvPr id="31" name="Shape 26">
             <a:extLst xmlns:a="http://schemas.openxmlformats.org/drawingml/2006/main">
               <a:ext uri="{FF2B5EF4-FFF2-40B4-BE49-F238E27FC236}">
-                <a16:creationId xmlns:a16="http://schemas.microsoft.com/office/drawing/2014/main" id="{965B65B9-43DA-4F73-A0B3-68DE46F6E89B}"/>
+                <a16:creationId xmlns:a16="http://schemas.microsoft.com/office/drawing/2014/main" id="{6711871D-497A-4FC1-BC21-AAFC722C0BAB}"/>
               </a:ext>
             </a:extLst>
           </p:cNvPr>
@@ -9641,7 +10671,7 @@
           <p:cNvPr id="32" name="Shape 27">
             <a:extLst xmlns:a="http://schemas.openxmlformats.org/drawingml/2006/main">
               <a:ext uri="{FF2B5EF4-FFF2-40B4-BE49-F238E27FC236}">
-                <a16:creationId xmlns:a16="http://schemas.microsoft.com/office/drawing/2014/main" id="{F658E15E-0CEF-4AFE-BA95-A4A5963717D4}"/>
+                <a16:creationId xmlns:a16="http://schemas.microsoft.com/office/drawing/2014/main" id="{C9482B1E-2A59-41DB-8426-FCD49AC553E6}"/>
               </a:ext>
             </a:extLst>
           </p:cNvPr>
@@ -9668,7 +10698,7 @@
           <p:cNvPr id="33" name="Shape 28">
             <a:extLst xmlns:a="http://schemas.openxmlformats.org/drawingml/2006/main">
               <a:ext uri="{FF2B5EF4-FFF2-40B4-BE49-F238E27FC236}">
-                <a16:creationId xmlns:a16="http://schemas.microsoft.com/office/drawing/2014/main" id="{0DF9E185-7252-449F-AAAA-E2F056E5052C}"/>
+                <a16:creationId xmlns:a16="http://schemas.microsoft.com/office/drawing/2014/main" id="{ABB77DFD-739D-41A7-9315-50E59B9F4293}"/>
               </a:ext>
             </a:extLst>
           </p:cNvPr>
@@ -9695,7 +10725,7 @@
           <p:cNvPr id="34" name="Shape 29">
             <a:extLst xmlns:a="http://schemas.openxmlformats.org/drawingml/2006/main">
               <a:ext uri="{FF2B5EF4-FFF2-40B4-BE49-F238E27FC236}">
-                <a16:creationId xmlns:a16="http://schemas.microsoft.com/office/drawing/2014/main" id="{40BC5556-B19C-48B1-B680-8A3A54963EB1}"/>
+                <a16:creationId xmlns:a16="http://schemas.microsoft.com/office/drawing/2014/main" id="{E809A0DA-DC96-435C-83F7-E5AD8BEBD1E7}"/>
               </a:ext>
             </a:extLst>
           </p:cNvPr>
@@ -9722,7 +10752,7 @@
           <p:cNvPr id="35" name="Shape 30">
             <a:extLst xmlns:a="http://schemas.openxmlformats.org/drawingml/2006/main">
               <a:ext uri="{FF2B5EF4-FFF2-40B4-BE49-F238E27FC236}">
-                <a16:creationId xmlns:a16="http://schemas.microsoft.com/office/drawing/2014/main" id="{7EA3C5DD-2B57-40C6-A286-BEA72A1DD9EE}"/>
+                <a16:creationId xmlns:a16="http://schemas.microsoft.com/office/drawing/2014/main" id="{6DBC6865-B724-474C-860F-473047D71A54}"/>
               </a:ext>
             </a:extLst>
           </p:cNvPr>
@@ -9749,7 +10779,7 @@
           <p:cNvPr id="36" name="Shape 31">
             <a:extLst xmlns:a="http://schemas.openxmlformats.org/drawingml/2006/main">
               <a:ext uri="{FF2B5EF4-FFF2-40B4-BE49-F238E27FC236}">
-                <a16:creationId xmlns:a16="http://schemas.microsoft.com/office/drawing/2014/main" id="{C8C4BD3F-B00B-49F7-ACEC-74852F537755}"/>
+                <a16:creationId xmlns:a16="http://schemas.microsoft.com/office/drawing/2014/main" id="{70CAE0BB-B79A-44CA-8633-361B5D356B01}"/>
               </a:ext>
             </a:extLst>
           </p:cNvPr>
@@ -9776,7 +10806,7 @@
           <p:cNvPr id="37" name="Shape 32">
             <a:extLst xmlns:a="http://schemas.openxmlformats.org/drawingml/2006/main">
               <a:ext uri="{FF2B5EF4-FFF2-40B4-BE49-F238E27FC236}">
-                <a16:creationId xmlns:a16="http://schemas.microsoft.com/office/drawing/2014/main" id="{4FC7EF4F-4CD0-4BE3-9B1A-C71BBC16FD3A}"/>
+                <a16:creationId xmlns:a16="http://schemas.microsoft.com/office/drawing/2014/main" id="{7D1280C7-FD46-4732-B0D4-56646DE20C12}"/>
               </a:ext>
             </a:extLst>
           </p:cNvPr>
@@ -9803,7 +10833,7 @@
           <p:cNvPr id="38" name="Shape 33">
             <a:extLst xmlns:a="http://schemas.openxmlformats.org/drawingml/2006/main">
               <a:ext uri="{FF2B5EF4-FFF2-40B4-BE49-F238E27FC236}">
-                <a16:creationId xmlns:a16="http://schemas.microsoft.com/office/drawing/2014/main" id="{F860FAAA-C289-40E4-9D6E-642A59E3047E}"/>
+                <a16:creationId xmlns:a16="http://schemas.microsoft.com/office/drawing/2014/main" id="{4BE61340-7186-4035-8B52-5A3637EF7451}"/>
               </a:ext>
             </a:extLst>
           </p:cNvPr>
@@ -9830,7 +10860,7 @@
           <p:cNvPr id="39" name="Shape 34">
             <a:extLst xmlns:a="http://schemas.openxmlformats.org/drawingml/2006/main">
               <a:ext uri="{FF2B5EF4-FFF2-40B4-BE49-F238E27FC236}">
-                <a16:creationId xmlns:a16="http://schemas.microsoft.com/office/drawing/2014/main" id="{9EB429E7-EC17-447B-ACC6-C6F93C40C392}"/>
+                <a16:creationId xmlns:a16="http://schemas.microsoft.com/office/drawing/2014/main" id="{5CEBC994-6C14-4E89-97C7-DCC0875AEA52}"/>
               </a:ext>
             </a:extLst>
           </p:cNvPr>
@@ -9857,7 +10887,7 @@
           <p:cNvPr id="40" name="Shape 35">
             <a:extLst xmlns:a="http://schemas.openxmlformats.org/drawingml/2006/main">
               <a:ext uri="{FF2B5EF4-FFF2-40B4-BE49-F238E27FC236}">
-                <a16:creationId xmlns:a16="http://schemas.microsoft.com/office/drawing/2014/main" id="{AFF60252-1B04-497E-910B-23BB7EDEC8D1}"/>
+                <a16:creationId xmlns:a16="http://schemas.microsoft.com/office/drawing/2014/main" id="{6484C306-8793-4680-BB99-C4C5B529E209}"/>
               </a:ext>
             </a:extLst>
           </p:cNvPr>
@@ -9884,7 +10914,7 @@
           <p:cNvPr id="41" name="Shape 36">
             <a:extLst xmlns:a="http://schemas.openxmlformats.org/drawingml/2006/main">
               <a:ext uri="{FF2B5EF4-FFF2-40B4-BE49-F238E27FC236}">
-                <a16:creationId xmlns:a16="http://schemas.microsoft.com/office/drawing/2014/main" id="{D2CC6FF2-9CE5-450B-BC31-4AA2CBAD6A0A}"/>
+                <a16:creationId xmlns:a16="http://schemas.microsoft.com/office/drawing/2014/main" id="{A7D7DF54-7C1B-4114-968E-86D76C767372}"/>
               </a:ext>
             </a:extLst>
           </p:cNvPr>
@@ -9911,7 +10941,7 @@
           <p:cNvPr id="42" name="Shape 37">
             <a:extLst xmlns:a="http://schemas.openxmlformats.org/drawingml/2006/main">
               <a:ext uri="{FF2B5EF4-FFF2-40B4-BE49-F238E27FC236}">
-                <a16:creationId xmlns:a16="http://schemas.microsoft.com/office/drawing/2014/main" id="{62A1652B-70A0-4A93-BBDD-558B34E016D8}"/>
+                <a16:creationId xmlns:a16="http://schemas.microsoft.com/office/drawing/2014/main" id="{B551EAD9-6CFB-4CE1-A213-E2C0D02BE95E}"/>
               </a:ext>
             </a:extLst>
           </p:cNvPr>
@@ -9938,7 +10968,7 @@
           <p:cNvPr id="43" name="Shape 38">
             <a:extLst xmlns:a="http://schemas.openxmlformats.org/drawingml/2006/main">
               <a:ext uri="{FF2B5EF4-FFF2-40B4-BE49-F238E27FC236}">
-                <a16:creationId xmlns:a16="http://schemas.microsoft.com/office/drawing/2014/main" id="{C37E4613-89D8-4AE3-A1AC-E30CFEAEB7F1}"/>
+                <a16:creationId xmlns:a16="http://schemas.microsoft.com/office/drawing/2014/main" id="{F527DA75-53E0-495D-A169-44EF6BAA7346}"/>
               </a:ext>
             </a:extLst>
           </p:cNvPr>
@@ -9965,7 +10995,7 @@
           <p:cNvPr id="44" name="Shape 39">
             <a:extLst xmlns:a="http://schemas.openxmlformats.org/drawingml/2006/main">
               <a:ext uri="{FF2B5EF4-FFF2-40B4-BE49-F238E27FC236}">
-                <a16:creationId xmlns:a16="http://schemas.microsoft.com/office/drawing/2014/main" id="{7E3A059D-BF52-4D32-A0F7-3B0A21EC1EE0}"/>
+                <a16:creationId xmlns:a16="http://schemas.microsoft.com/office/drawing/2014/main" id="{FCC8F7E3-65A3-40AD-80AC-1B0AE9439A9D}"/>
               </a:ext>
             </a:extLst>
           </p:cNvPr>
@@ -9992,7 +11022,7 @@
           <p:cNvPr id="45" name="Shape 40">
             <a:extLst xmlns:a="http://schemas.openxmlformats.org/drawingml/2006/main">
               <a:ext uri="{FF2B5EF4-FFF2-40B4-BE49-F238E27FC236}">
-                <a16:creationId xmlns:a16="http://schemas.microsoft.com/office/drawing/2014/main" id="{61F40BE0-A9B6-4BEB-B8D9-1CBD0D23C8F4}"/>
+                <a16:creationId xmlns:a16="http://schemas.microsoft.com/office/drawing/2014/main" id="{BD17A261-A9A0-47F4-BB67-DF30210E9FAC}"/>
               </a:ext>
             </a:extLst>
           </p:cNvPr>
@@ -10019,7 +11049,7 @@
           <p:cNvPr id="46" name="Shape 41">
             <a:extLst xmlns:a="http://schemas.openxmlformats.org/drawingml/2006/main">
               <a:ext uri="{FF2B5EF4-FFF2-40B4-BE49-F238E27FC236}">
-                <a16:creationId xmlns:a16="http://schemas.microsoft.com/office/drawing/2014/main" id="{E5DBEB2C-726F-4233-81CB-3B3A89644FD2}"/>
+                <a16:creationId xmlns:a16="http://schemas.microsoft.com/office/drawing/2014/main" id="{1FD15479-F38D-4D40-97B6-C827CB61C429}"/>
               </a:ext>
             </a:extLst>
           </p:cNvPr>
@@ -10046,7 +11076,7 @@
           <p:cNvPr id="47" name="Shape 42">
             <a:extLst xmlns:a="http://schemas.openxmlformats.org/drawingml/2006/main">
               <a:ext uri="{FF2B5EF4-FFF2-40B4-BE49-F238E27FC236}">
-                <a16:creationId xmlns:a16="http://schemas.microsoft.com/office/drawing/2014/main" id="{0602B37C-C7EF-4D71-A0C1-E420E8A57533}"/>
+                <a16:creationId xmlns:a16="http://schemas.microsoft.com/office/drawing/2014/main" id="{40F12513-6595-4C2A-87F7-64866764F0AD}"/>
               </a:ext>
             </a:extLst>
           </p:cNvPr>
@@ -10073,7 +11103,7 @@
           <p:cNvPr id="48" name="Shape 43">
             <a:extLst xmlns:a="http://schemas.openxmlformats.org/drawingml/2006/main">
               <a:ext uri="{FF2B5EF4-FFF2-40B4-BE49-F238E27FC236}">
-                <a16:creationId xmlns:a16="http://schemas.microsoft.com/office/drawing/2014/main" id="{1FEF6B27-6781-48F6-BB88-903FCE749865}"/>
+                <a16:creationId xmlns:a16="http://schemas.microsoft.com/office/drawing/2014/main" id="{ED7EF040-6302-4C38-84D3-920B1136153A}"/>
               </a:ext>
             </a:extLst>
           </p:cNvPr>
@@ -10100,7 +11130,7 @@
           <p:cNvPr id="49" name="Shape 44">
             <a:extLst xmlns:a="http://schemas.openxmlformats.org/drawingml/2006/main">
               <a:ext uri="{FF2B5EF4-FFF2-40B4-BE49-F238E27FC236}">
-                <a16:creationId xmlns:a16="http://schemas.microsoft.com/office/drawing/2014/main" id="{639FA67E-34DF-4BD7-9E5D-5E2F74D3D05A}"/>
+                <a16:creationId xmlns:a16="http://schemas.microsoft.com/office/drawing/2014/main" id="{760E6FB0-A61F-4953-BC1B-25A9A3FDFB4D}"/>
               </a:ext>
             </a:extLst>
           </p:cNvPr>
@@ -10127,7 +11157,7 @@
           <p:cNvPr id="50" name="Shape 45">
             <a:extLst xmlns:a="http://schemas.openxmlformats.org/drawingml/2006/main">
               <a:ext uri="{FF2B5EF4-FFF2-40B4-BE49-F238E27FC236}">
-                <a16:creationId xmlns:a16="http://schemas.microsoft.com/office/drawing/2014/main" id="{C30D92DF-1961-4B02-9A7B-922EEA9B536A}"/>
+                <a16:creationId xmlns:a16="http://schemas.microsoft.com/office/drawing/2014/main" id="{1F9344F1-B7B1-4AB9-AA31-D286A4B40978}"/>
               </a:ext>
             </a:extLst>
           </p:cNvPr>
@@ -10154,7 +11184,7 @@
           <p:cNvPr id="51" name="Shape 46">
             <a:extLst xmlns:a="http://schemas.openxmlformats.org/drawingml/2006/main">
               <a:ext uri="{FF2B5EF4-FFF2-40B4-BE49-F238E27FC236}">
-                <a16:creationId xmlns:a16="http://schemas.microsoft.com/office/drawing/2014/main" id="{5E70CC61-018A-417C-9303-19D71FF4E502}"/>
+                <a16:creationId xmlns:a16="http://schemas.microsoft.com/office/drawing/2014/main" id="{9B7BBB88-5609-4BE8-8BAC-BE19459A68AB}"/>
               </a:ext>
             </a:extLst>
           </p:cNvPr>
@@ -10181,7 +11211,7 @@
           <p:cNvPr id="52" name="Shape 47">
             <a:extLst xmlns:a="http://schemas.openxmlformats.org/drawingml/2006/main">
               <a:ext uri="{FF2B5EF4-FFF2-40B4-BE49-F238E27FC236}">
-                <a16:creationId xmlns:a16="http://schemas.microsoft.com/office/drawing/2014/main" id="{F3152E9F-AE28-42F6-916C-5DCB00BFD4F4}"/>
+                <a16:creationId xmlns:a16="http://schemas.microsoft.com/office/drawing/2014/main" id="{F02382C1-FA21-4788-BFE8-6FAD61CBA9CA}"/>
               </a:ext>
             </a:extLst>
           </p:cNvPr>
@@ -10208,7 +11238,7 @@
           <p:cNvPr id="53" name="Shape 48">
             <a:extLst xmlns:a="http://schemas.openxmlformats.org/drawingml/2006/main">
               <a:ext uri="{FF2B5EF4-FFF2-40B4-BE49-F238E27FC236}">
-                <a16:creationId xmlns:a16="http://schemas.microsoft.com/office/drawing/2014/main" id="{5260BAD8-D867-4453-B5E4-99B917CCAB59}"/>
+                <a16:creationId xmlns:a16="http://schemas.microsoft.com/office/drawing/2014/main" id="{331D212E-0708-40D3-A5FD-988C2CA99879}"/>
               </a:ext>
             </a:extLst>
           </p:cNvPr>
@@ -10235,7 +11265,7 @@
           <p:cNvPr id="54" name="Shape 49">
             <a:extLst xmlns:a="http://schemas.openxmlformats.org/drawingml/2006/main">
               <a:ext uri="{FF2B5EF4-FFF2-40B4-BE49-F238E27FC236}">
-                <a16:creationId xmlns:a16="http://schemas.microsoft.com/office/drawing/2014/main" id="{56E54696-8635-450A-84B2-061111BF75D0}"/>
+                <a16:creationId xmlns:a16="http://schemas.microsoft.com/office/drawing/2014/main" id="{4B4A5BF4-DBE9-4AB8-B643-42502E50F37A}"/>
               </a:ext>
             </a:extLst>
           </p:cNvPr>
@@ -10262,7 +11292,7 @@
           <p:cNvPr id="55" name="Shape 50">
             <a:extLst xmlns:a="http://schemas.openxmlformats.org/drawingml/2006/main">
               <a:ext uri="{FF2B5EF4-FFF2-40B4-BE49-F238E27FC236}">
-                <a16:creationId xmlns:a16="http://schemas.microsoft.com/office/drawing/2014/main" id="{DB536434-A60C-47D0-979E-7583A647E570}"/>
+                <a16:creationId xmlns:a16="http://schemas.microsoft.com/office/drawing/2014/main" id="{4735EF40-E950-44F7-93A3-A9B69F1B8220}"/>
               </a:ext>
             </a:extLst>
           </p:cNvPr>
@@ -10289,7 +11319,7 @@
           <p:cNvPr id="56" name="Shape 51">
             <a:extLst xmlns:a="http://schemas.openxmlformats.org/drawingml/2006/main">
               <a:ext uri="{FF2B5EF4-FFF2-40B4-BE49-F238E27FC236}">
-                <a16:creationId xmlns:a16="http://schemas.microsoft.com/office/drawing/2014/main" id="{9671775D-9177-440A-B6C4-ED88C687853A}"/>
+                <a16:creationId xmlns:a16="http://schemas.microsoft.com/office/drawing/2014/main" id="{7B125E94-BF3C-4C99-9516-EBE2A5CACCD6}"/>
               </a:ext>
             </a:extLst>
           </p:cNvPr>
@@ -10316,7 +11346,7 @@
           <p:cNvPr id="57" name="Shape 52">
             <a:extLst xmlns:a="http://schemas.openxmlformats.org/drawingml/2006/main">
               <a:ext uri="{FF2B5EF4-FFF2-40B4-BE49-F238E27FC236}">
-                <a16:creationId xmlns:a16="http://schemas.microsoft.com/office/drawing/2014/main" id="{5B85FAF2-03EF-4C55-B3A6-148083A6C366}"/>
+                <a16:creationId xmlns:a16="http://schemas.microsoft.com/office/drawing/2014/main" id="{AE7D031E-8C29-4ACC-8DED-B54CE5AA0F96}"/>
               </a:ext>
             </a:extLst>
           </p:cNvPr>
@@ -10343,7 +11373,7 @@
           <p:cNvPr id="58" name="Shape 53">
             <a:extLst xmlns:a="http://schemas.openxmlformats.org/drawingml/2006/main">
               <a:ext uri="{FF2B5EF4-FFF2-40B4-BE49-F238E27FC236}">
-                <a16:creationId xmlns:a16="http://schemas.microsoft.com/office/drawing/2014/main" id="{7589433D-F397-4277-8E4F-3E59C6AEC0F1}"/>
+                <a16:creationId xmlns:a16="http://schemas.microsoft.com/office/drawing/2014/main" id="{0C304480-3D9B-45D5-AD28-CEDEC2A7DBDB}"/>
               </a:ext>
             </a:extLst>
           </p:cNvPr>
@@ -10370,7 +11400,7 @@
           <p:cNvPr id="59" name="Shape 54">
             <a:extLst xmlns:a="http://schemas.openxmlformats.org/drawingml/2006/main">
               <a:ext uri="{FF2B5EF4-FFF2-40B4-BE49-F238E27FC236}">
-                <a16:creationId xmlns:a16="http://schemas.microsoft.com/office/drawing/2014/main" id="{55D6EDA1-D942-4EE2-8986-A5297DDD5ACD}"/>
+                <a16:creationId xmlns:a16="http://schemas.microsoft.com/office/drawing/2014/main" id="{A9E54927-3DDB-4311-A0BD-96773B73A415}"/>
               </a:ext>
             </a:extLst>
           </p:cNvPr>
@@ -10397,7 +11427,7 @@
           <p:cNvPr id="60" name="Shape 55">
             <a:extLst xmlns:a="http://schemas.openxmlformats.org/drawingml/2006/main">
               <a:ext uri="{FF2B5EF4-FFF2-40B4-BE49-F238E27FC236}">
-                <a16:creationId xmlns:a16="http://schemas.microsoft.com/office/drawing/2014/main" id="{6F2CDF07-EFFE-4724-A242-97DFBC451472}"/>
+                <a16:creationId xmlns:a16="http://schemas.microsoft.com/office/drawing/2014/main" id="{17EF1249-A349-47EB-BF8C-521FB1D2CE37}"/>
               </a:ext>
             </a:extLst>
           </p:cNvPr>
@@ -10424,7 +11454,7 @@
           <p:cNvPr id="61" name="Shape 56">
             <a:extLst xmlns:a="http://schemas.openxmlformats.org/drawingml/2006/main">
               <a:ext uri="{FF2B5EF4-FFF2-40B4-BE49-F238E27FC236}">
-                <a16:creationId xmlns:a16="http://schemas.microsoft.com/office/drawing/2014/main" id="{47619F20-027C-4E37-92D8-6AE96E6D0C2C}"/>
+                <a16:creationId xmlns:a16="http://schemas.microsoft.com/office/drawing/2014/main" id="{FED441A8-D76D-4C89-AD2E-929FD871B3F4}"/>
               </a:ext>
             </a:extLst>
           </p:cNvPr>
@@ -10451,7 +11481,7 @@
           <p:cNvPr id="62" name="Shape 57">
             <a:extLst xmlns:a="http://schemas.openxmlformats.org/drawingml/2006/main">
               <a:ext uri="{FF2B5EF4-FFF2-40B4-BE49-F238E27FC236}">
-                <a16:creationId xmlns:a16="http://schemas.microsoft.com/office/drawing/2014/main" id="{5B520302-9670-47FD-AF3D-740F04C10F8D}"/>
+                <a16:creationId xmlns:a16="http://schemas.microsoft.com/office/drawing/2014/main" id="{74E9CCBE-DBE7-4095-8D09-BF44C136160A}"/>
               </a:ext>
             </a:extLst>
           </p:cNvPr>
@@ -10478,7 +11508,7 @@
           <p:cNvPr id="63" name="Shape 58">
             <a:extLst xmlns:a="http://schemas.openxmlformats.org/drawingml/2006/main">
               <a:ext uri="{FF2B5EF4-FFF2-40B4-BE49-F238E27FC236}">
-                <a16:creationId xmlns:a16="http://schemas.microsoft.com/office/drawing/2014/main" id="{006E55FF-8814-4126-B2B5-913F7168D6D4}"/>
+                <a16:creationId xmlns:a16="http://schemas.microsoft.com/office/drawing/2014/main" id="{60FEA9DA-0317-4E1F-B6EE-66DB21A13916}"/>
               </a:ext>
             </a:extLst>
           </p:cNvPr>
@@ -10505,7 +11535,7 @@
           <p:cNvPr id="64" name="Shape 59">
             <a:extLst xmlns:a="http://schemas.openxmlformats.org/drawingml/2006/main">
               <a:ext uri="{FF2B5EF4-FFF2-40B4-BE49-F238E27FC236}">
-                <a16:creationId xmlns:a16="http://schemas.microsoft.com/office/drawing/2014/main" id="{291A7943-AB58-436C-8101-FC653012BB9E}"/>
+                <a16:creationId xmlns:a16="http://schemas.microsoft.com/office/drawing/2014/main" id="{8239E98C-2FBF-43A4-88B6-C9DE2EDAD38B}"/>
               </a:ext>
             </a:extLst>
           </p:cNvPr>
@@ -10532,7 +11562,7 @@
           <p:cNvPr id="65" name="Shape 60">
             <a:extLst xmlns:a="http://schemas.openxmlformats.org/drawingml/2006/main">
               <a:ext uri="{FF2B5EF4-FFF2-40B4-BE49-F238E27FC236}">
-                <a16:creationId xmlns:a16="http://schemas.microsoft.com/office/drawing/2014/main" id="{13D19CF4-C181-4576-977C-A83266B2A87B}"/>
+                <a16:creationId xmlns:a16="http://schemas.microsoft.com/office/drawing/2014/main" id="{A77CE587-CDE2-46F1-B5BB-C93EDAEF28D4}"/>
               </a:ext>
             </a:extLst>
           </p:cNvPr>
@@ -10559,7 +11589,7 @@
           <p:cNvPr id="66" name="Shape 61">
             <a:extLst xmlns:a="http://schemas.openxmlformats.org/drawingml/2006/main">
               <a:ext uri="{FF2B5EF4-FFF2-40B4-BE49-F238E27FC236}">
-                <a16:creationId xmlns:a16="http://schemas.microsoft.com/office/drawing/2014/main" id="{51D04CE0-F5B4-4A17-96AA-E4511F1EC32E}"/>
+                <a16:creationId xmlns:a16="http://schemas.microsoft.com/office/drawing/2014/main" id="{EF03112B-DD3B-4698-848E-F9486496A185}"/>
               </a:ext>
             </a:extLst>
           </p:cNvPr>
@@ -10586,7 +11616,7 @@
           <p:cNvPr id="67" name="Shape 62">
             <a:extLst xmlns:a="http://schemas.openxmlformats.org/drawingml/2006/main">
               <a:ext uri="{FF2B5EF4-FFF2-40B4-BE49-F238E27FC236}">
-                <a16:creationId xmlns:a16="http://schemas.microsoft.com/office/drawing/2014/main" id="{734FE86E-A5DE-44B7-822B-9FA3B6DE9B51}"/>
+                <a16:creationId xmlns:a16="http://schemas.microsoft.com/office/drawing/2014/main" id="{161A152A-B4AD-4F27-B783-4AFC36288AE1}"/>
               </a:ext>
             </a:extLst>
           </p:cNvPr>
@@ -10613,7 +11643,7 @@
           <p:cNvPr id="68" name="Shape 63">
             <a:extLst xmlns:a="http://schemas.openxmlformats.org/drawingml/2006/main">
               <a:ext uri="{FF2B5EF4-FFF2-40B4-BE49-F238E27FC236}">
-                <a16:creationId xmlns:a16="http://schemas.microsoft.com/office/drawing/2014/main" id="{3E9A4E7D-B039-40A4-8508-4C003FB9B84D}"/>
+                <a16:creationId xmlns:a16="http://schemas.microsoft.com/office/drawing/2014/main" id="{7AC0E424-F729-446B-A426-0ABD9AE79BF8}"/>
               </a:ext>
             </a:extLst>
           </p:cNvPr>
@@ -10640,7 +11670,7 @@
           <p:cNvPr id="69" name="Shape 64">
             <a:extLst xmlns:a="http://schemas.openxmlformats.org/drawingml/2006/main">
               <a:ext uri="{FF2B5EF4-FFF2-40B4-BE49-F238E27FC236}">
-                <a16:creationId xmlns:a16="http://schemas.microsoft.com/office/drawing/2014/main" id="{F846DDB9-2784-4B85-B813-5EC4353D2A44}"/>
+                <a16:creationId xmlns:a16="http://schemas.microsoft.com/office/drawing/2014/main" id="{F70F1961-3622-474D-9EAF-22293370DAD8}"/>
               </a:ext>
             </a:extLst>
           </p:cNvPr>
@@ -10667,7 +11697,7 @@
           <p:cNvPr id="70" name="Shape 65">
             <a:extLst xmlns:a="http://schemas.openxmlformats.org/drawingml/2006/main">
               <a:ext uri="{FF2B5EF4-FFF2-40B4-BE49-F238E27FC236}">
-                <a16:creationId xmlns:a16="http://schemas.microsoft.com/office/drawing/2014/main" id="{43D61DA4-0F20-4428-8AF4-99A8C7F62519}"/>
+                <a16:creationId xmlns:a16="http://schemas.microsoft.com/office/drawing/2014/main" id="{4DE5561A-FE6B-4A53-A52F-5BF0555A6DDA}"/>
               </a:ext>
             </a:extLst>
           </p:cNvPr>
@@ -10694,7 +11724,7 @@
           <p:cNvPr id="71" name="Shape 66">
             <a:extLst xmlns:a="http://schemas.openxmlformats.org/drawingml/2006/main">
               <a:ext uri="{FF2B5EF4-FFF2-40B4-BE49-F238E27FC236}">
-                <a16:creationId xmlns:a16="http://schemas.microsoft.com/office/drawing/2014/main" id="{8FF15708-C2A6-4A07-901C-0D53FB53EE12}"/>
+                <a16:creationId xmlns:a16="http://schemas.microsoft.com/office/drawing/2014/main" id="{5336934B-CEDD-4013-9662-70F0A0D7FCCE}"/>
               </a:ext>
             </a:extLst>
           </p:cNvPr>
@@ -10721,7 +11751,7 @@
           <p:cNvPr id="72" name="Shape 67">
             <a:extLst xmlns:a="http://schemas.openxmlformats.org/drawingml/2006/main">
               <a:ext uri="{FF2B5EF4-FFF2-40B4-BE49-F238E27FC236}">
-                <a16:creationId xmlns:a16="http://schemas.microsoft.com/office/drawing/2014/main" id="{CFE7FFF6-EF63-469C-BC6C-7D4F380189B6}"/>
+                <a16:creationId xmlns:a16="http://schemas.microsoft.com/office/drawing/2014/main" id="{F45208C6-0F61-4F8F-A3F3-F30A1D9C4547}"/>
               </a:ext>
             </a:extLst>
           </p:cNvPr>
@@ -10748,7 +11778,7 @@
           <p:cNvPr id="73" name="Text 68">
             <a:extLst xmlns:a="http://schemas.openxmlformats.org/drawingml/2006/main">
               <a:ext uri="{FF2B5EF4-FFF2-40B4-BE49-F238E27FC236}">
-                <a16:creationId xmlns:a16="http://schemas.microsoft.com/office/drawing/2014/main" id="{A544DDC8-B8A2-4203-A663-CFE1C4DDA01F}"/>
+                <a16:creationId xmlns:a16="http://schemas.microsoft.com/office/drawing/2014/main" id="{D8AB90BB-A09D-4F93-9691-46DA5709C5CC}"/>
               </a:ext>
             </a:extLst>
           </p:cNvPr>
@@ -10780,7 +11810,15 @@
                   <a:srgbClr val="1B2730"/>
                 </a:solidFill>
               </a:rPr>
-              <a:t>60 decisions traced.   </a:t>
+              <a:t>60 evaluation cases traced.</a:t>
+            </a:r>
+            <a:r>
+              <a:rPr sz="1150" b="1">
+                <a:solidFill>
+                  <a:srgbClr val="1B2730"/>
+                </a:solidFill>
+              </a:rPr>
+              <a:t>   </a:t>
             </a:r>
             <a:r>
               <a:rPr sz="1200">
@@ -10839,7 +11877,7 @@
           <p:cNvPr id="74" name="Shape 69">
             <a:extLst xmlns:a="http://schemas.openxmlformats.org/drawingml/2006/main">
               <a:ext uri="{FF2B5EF4-FFF2-40B4-BE49-F238E27FC236}">
-                <a16:creationId xmlns:a16="http://schemas.microsoft.com/office/drawing/2014/main" id="{2E986C9C-2D2B-4555-A9E5-52DA4B2E6657}"/>
+                <a16:creationId xmlns:a16="http://schemas.microsoft.com/office/drawing/2014/main" id="{869FF651-F0F6-4DE0-92EB-8216EDFB036F}"/>
               </a:ext>
             </a:extLst>
           </p:cNvPr>
@@ -10866,7 +11904,7 @@
           <p:cNvPr id="75" name="Shape 70">
             <a:extLst xmlns:a="http://schemas.openxmlformats.org/drawingml/2006/main">
               <a:ext uri="{FF2B5EF4-FFF2-40B4-BE49-F238E27FC236}">
-                <a16:creationId xmlns:a16="http://schemas.microsoft.com/office/drawing/2014/main" id="{11A2A76C-AEF1-4C5C-A766-BDF38EB2C444}"/>
+                <a16:creationId xmlns:a16="http://schemas.microsoft.com/office/drawing/2014/main" id="{0F74899D-3559-487C-BA5D-92ED7701500F}"/>
               </a:ext>
             </a:extLst>
           </p:cNvPr>
@@ -10893,7 +11931,7 @@
           <p:cNvPr id="76" name="Text 71">
             <a:extLst xmlns:a="http://schemas.openxmlformats.org/drawingml/2006/main">
               <a:ext uri="{FF2B5EF4-FFF2-40B4-BE49-F238E27FC236}">
-                <a16:creationId xmlns:a16="http://schemas.microsoft.com/office/drawing/2014/main" id="{B0838855-C47F-4A08-AD67-6646D931F5B6}"/>
+                <a16:creationId xmlns:a16="http://schemas.microsoft.com/office/drawing/2014/main" id="{70258F8A-2779-47C7-9B5C-8F2BD7E0C004}"/>
               </a:ext>
             </a:extLst>
           </p:cNvPr>
@@ -10928,18 +11966,7 @@
                 <a:ea typeface="Calibri"/>
                 <a:cs typeface="Calibri"/>
               </a:rPr>
-              <a:t>Demo, not production.  </a:t>
-            </a:r>
-            <a:r>
-              <a:rPr sz="1250">
-                <a:solidFill>
-                  <a:srgbClr val="C6D8E4"/>
-                </a:solidFill>
-                <a:latin typeface="Calibri"/>
-                <a:ea typeface="Calibri"/>
-                <a:cs typeface="Calibri"/>
-              </a:rPr>
-              <a:t>It picks the right team 60% of the time on public data — not good enough to route on its own. So it proposes, and a person decides. That is the honest configuration until a pilot on your data says otherwise.</a:t>
+              <a:t>Demo, not production. Agreement with consumer-selected CFPB labels is 60.5% — not deployment accuracy. The demo stops for human review; Phase 1 runs in shadow, with no action on suggestions.</a:t>
             </a:r>
             <a:endParaRPr sz="1250"/>
           </a:p>
@@ -10948,7 +11975,7 @@
     </p:spTree>
     <p:extLst>
       <p:ext uri="{BB962C8B-B14F-4D97-AF65-F5344CB8AC3E}">
-        <p14:creationId xmlns:p14="http://schemas.microsoft.com/office/powerpoint/2010/main" val="1988229464"/>
+        <p14:creationId xmlns:p14="http://schemas.microsoft.com/office/powerpoint/2010/main" val="2000782396"/>
       </p:ext>
     </p:extLst>
   </p:cSld>
@@ -10979,7 +12006,7 @@
           <p:cNvPr id="2" name="Text 0">
             <a:extLst xmlns:a="http://schemas.openxmlformats.org/drawingml/2006/main">
               <a:ext uri="{FF2B5EF4-FFF2-40B4-BE49-F238E27FC236}">
-                <a16:creationId xmlns:a16="http://schemas.microsoft.com/office/drawing/2014/main" id="{0991618E-0545-4CC8-A815-21B4446D443A}"/>
+                <a16:creationId xmlns:a16="http://schemas.microsoft.com/office/drawing/2014/main" id="{C4F6EC30-101E-47FA-A46A-57164DF36453}"/>
               </a:ext>
             </a:extLst>
           </p:cNvPr>
@@ -11025,7 +12052,7 @@
           <p:cNvPr id="3" name="Shape 1">
             <a:extLst xmlns:a="http://schemas.openxmlformats.org/drawingml/2006/main">
               <a:ext uri="{FF2B5EF4-FFF2-40B4-BE49-F238E27FC236}">
-                <a16:creationId xmlns:a16="http://schemas.microsoft.com/office/drawing/2014/main" id="{08B3C23C-D53C-420F-91F4-521647855A2B}"/>
+                <a16:creationId xmlns:a16="http://schemas.microsoft.com/office/drawing/2014/main" id="{1FB9F7AE-D87E-44B3-9CD9-F439DD77DB6B}"/>
               </a:ext>
             </a:extLst>
           </p:cNvPr>
@@ -11056,7 +12083,7 @@
           <p:nvPr/>
         </p:nvPicPr>
         <p:blipFill>
-          <a:blip xmlns:r="http://schemas.openxmlformats.org/officeDocument/2006/relationships" xmlns:a="http://schemas.openxmlformats.org/drawingml/2006/main" r:embed="R13e6730f99fc4e9b"/>
+          <a:blip xmlns:r="http://schemas.openxmlformats.org/officeDocument/2006/relationships" xmlns:a="http://schemas.openxmlformats.org/drawingml/2006/main" r:embed="R50a2a327e09c4824"/>
           <a:stretch xmlns:a="http://schemas.openxmlformats.org/drawingml/2006/main">
             <a:fillRect l="0" t="0" r="0" b="0"/>
           </a:stretch>
@@ -11076,7 +12103,7 @@
           <p:cNvPr id="5" name="Text 2">
             <a:extLst xmlns:a="http://schemas.openxmlformats.org/drawingml/2006/main">
               <a:ext uri="{FF2B5EF4-FFF2-40B4-BE49-F238E27FC236}">
-                <a16:creationId xmlns:a16="http://schemas.microsoft.com/office/drawing/2014/main" id="{D137115D-5BE4-4531-9FA6-02CABF446953}"/>
+                <a16:creationId xmlns:a16="http://schemas.microsoft.com/office/drawing/2014/main" id="{4306E948-E810-4971-A39C-937D6C58383A}"/>
               </a:ext>
             </a:extLst>
           </p:cNvPr>
@@ -11122,7 +12149,7 @@
           <p:cNvPr id="6" name="Shape 3">
             <a:extLst xmlns:a="http://schemas.openxmlformats.org/drawingml/2006/main">
               <a:ext uri="{FF2B5EF4-FFF2-40B4-BE49-F238E27FC236}">
-                <a16:creationId xmlns:a16="http://schemas.microsoft.com/office/drawing/2014/main" id="{5813B7D0-25F1-40E1-A2C0-2CB6F581D169}"/>
+                <a16:creationId xmlns:a16="http://schemas.microsoft.com/office/drawing/2014/main" id="{65015E29-8689-4D71-9594-DA08FFB7E66E}"/>
               </a:ext>
             </a:extLst>
           </p:cNvPr>
@@ -11153,7 +12180,7 @@
           <p:cNvPr id="7" name="Text 4">
             <a:extLst xmlns:a="http://schemas.openxmlformats.org/drawingml/2006/main">
               <a:ext uri="{FF2B5EF4-FFF2-40B4-BE49-F238E27FC236}">
-                <a16:creationId xmlns:a16="http://schemas.microsoft.com/office/drawing/2014/main" id="{99120800-12BE-45E5-99CF-04C217B75B08}"/>
+                <a16:creationId xmlns:a16="http://schemas.microsoft.com/office/drawing/2014/main" id="{3719A270-963C-4D59-B2A9-FE8E8005BC40}"/>
               </a:ext>
             </a:extLst>
           </p:cNvPr>
@@ -11188,7 +12215,7 @@
           <p:cNvPr id="8" name="Text 5">
             <a:extLst xmlns:a="http://schemas.openxmlformats.org/drawingml/2006/main">
               <a:ext uri="{FF2B5EF4-FFF2-40B4-BE49-F238E27FC236}">
-                <a16:creationId xmlns:a16="http://schemas.microsoft.com/office/drawing/2014/main" id="{07233EE9-0720-4F65-9BD4-12A1EA402D4F}"/>
+                <a16:creationId xmlns:a16="http://schemas.microsoft.com/office/drawing/2014/main" id="{9D94E496-3555-441D-B086-BC366EDB841E}"/>
               </a:ext>
             </a:extLst>
           </p:cNvPr>
@@ -11234,7 +12261,7 @@
           <p:cNvPr id="9" name="Shape 6">
             <a:extLst xmlns:a="http://schemas.openxmlformats.org/drawingml/2006/main">
               <a:ext uri="{FF2B5EF4-FFF2-40B4-BE49-F238E27FC236}">
-                <a16:creationId xmlns:a16="http://schemas.microsoft.com/office/drawing/2014/main" id="{E8D24EB9-4483-4AB9-B4E5-9AC9100CDB57}"/>
+                <a16:creationId xmlns:a16="http://schemas.microsoft.com/office/drawing/2014/main" id="{60F47026-7EC9-46BA-99F2-5E8956D0757C}"/>
               </a:ext>
             </a:extLst>
           </p:cNvPr>
@@ -11261,7 +12288,7 @@
           <p:cNvPr id="10" name="Shape 7">
             <a:extLst xmlns:a="http://schemas.openxmlformats.org/drawingml/2006/main">
               <a:ext uri="{FF2B5EF4-FFF2-40B4-BE49-F238E27FC236}">
-                <a16:creationId xmlns:a16="http://schemas.microsoft.com/office/drawing/2014/main" id="{8570CB80-AD16-409E-BDC1-E97ACED3B937}"/>
+                <a16:creationId xmlns:a16="http://schemas.microsoft.com/office/drawing/2014/main" id="{E685F88B-E64B-4F55-B0E3-B3170A56606E}"/>
               </a:ext>
             </a:extLst>
           </p:cNvPr>
@@ -11288,7 +12315,7 @@
           <p:cNvPr id="11" name="Shape 8">
             <a:extLst xmlns:a="http://schemas.openxmlformats.org/drawingml/2006/main">
               <a:ext uri="{FF2B5EF4-FFF2-40B4-BE49-F238E27FC236}">
-                <a16:creationId xmlns:a16="http://schemas.microsoft.com/office/drawing/2014/main" id="{0B38FE65-75FB-4936-83F6-F821DF91BB21}"/>
+                <a16:creationId xmlns:a16="http://schemas.microsoft.com/office/drawing/2014/main" id="{50C3C242-2765-4455-8EFE-2109BB94ADEC}"/>
               </a:ext>
             </a:extLst>
           </p:cNvPr>
@@ -11315,7 +12342,7 @@
           <p:cNvPr id="12" name="Text 9">
             <a:extLst xmlns:a="http://schemas.openxmlformats.org/drawingml/2006/main">
               <a:ext uri="{FF2B5EF4-FFF2-40B4-BE49-F238E27FC236}">
-                <a16:creationId xmlns:a16="http://schemas.microsoft.com/office/drawing/2014/main" id="{6D4A237E-B424-41C0-84C5-C5A4829652A0}"/>
+                <a16:creationId xmlns:a16="http://schemas.microsoft.com/office/drawing/2014/main" id="{8459EB48-9F6C-4FD0-8758-3BBD994E446F}"/>
               </a:ext>
             </a:extLst>
           </p:cNvPr>
@@ -11350,7 +12377,7 @@
                 <a:ea typeface="Calibri"/>
                 <a:cs typeface="Calibri"/>
               </a:rPr>
-              <a:t>Someone accountable for watching it  —  €5,600</a:t>
+              <a:t>Consultant oversight: 8 days/year × €700 — €5,600</a:t>
             </a:r>
             <a:endParaRPr sz="1200"/>
           </a:p>
@@ -11361,7 +12388,7 @@
           <p:cNvPr id="13" name="Text 10">
             <a:extLst xmlns:a="http://schemas.openxmlformats.org/drawingml/2006/main">
               <a:ext uri="{FF2B5EF4-FFF2-40B4-BE49-F238E27FC236}">
-                <a16:creationId xmlns:a16="http://schemas.microsoft.com/office/drawing/2014/main" id="{62D3B592-9B51-480F-8C42-E48F791EB241}"/>
+                <a16:creationId xmlns:a16="http://schemas.microsoft.com/office/drawing/2014/main" id="{D6C416C7-5DB8-4592-A6A1-FE4D32812CF8}"/>
               </a:ext>
             </a:extLst>
           </p:cNvPr>
@@ -11396,7 +12423,7 @@
                 <a:ea typeface="Calibri"/>
                 <a:cs typeface="Calibri"/>
               </a:rPr>
-              <a:t>Platform  €1,800</a:t>
+              <a:t>Platform: €150/mo × 12 — €1,800</a:t>
             </a:r>
             <a:endParaRPr sz="1150"/>
           </a:p>
@@ -11407,7 +12434,7 @@
           <p:cNvPr id="14" name="Text 11">
             <a:extLst xmlns:a="http://schemas.openxmlformats.org/drawingml/2006/main">
               <a:ext uri="{FF2B5EF4-FFF2-40B4-BE49-F238E27FC236}">
-                <a16:creationId xmlns:a16="http://schemas.microsoft.com/office/drawing/2014/main" id="{4CE7B140-0BEC-4A64-8F2A-14A0B73C7763}"/>
+                <a16:creationId xmlns:a16="http://schemas.microsoft.com/office/drawing/2014/main" id="{F0A67452-783C-4FF6-B450-7FB6CDE842ED}"/>
               </a:ext>
             </a:extLst>
           </p:cNvPr>
@@ -11442,7 +12469,7 @@
                 <a:ea typeface="Calibri"/>
                 <a:cs typeface="Calibri"/>
               </a:rPr>
-              <a:t>€7,400 a year to run</a:t>
+              <a:t>Estimated annual operating cost: €7,400</a:t>
             </a:r>
             <a:endParaRPr sz="1100"/>
           </a:p>
@@ -11453,7 +12480,7 @@
           <p:cNvPr id="15" name="Text 12">
             <a:extLst xmlns:a="http://schemas.openxmlformats.org/drawingml/2006/main">
               <a:ext uri="{FF2B5EF4-FFF2-40B4-BE49-F238E27FC236}">
-                <a16:creationId xmlns:a16="http://schemas.microsoft.com/office/drawing/2014/main" id="{B096FC78-88F8-4FCF-AA1F-20161D7DE63B}"/>
+                <a16:creationId xmlns:a16="http://schemas.microsoft.com/office/drawing/2014/main" id="{606BC34A-E1DB-4A56-B847-325406B03E3D}"/>
               </a:ext>
             </a:extLst>
           </p:cNvPr>
@@ -11488,7 +12515,7 @@
                 <a:ea typeface="Calibri"/>
                 <a:cs typeface="Calibri"/>
               </a:rPr>
-              <a:t>▲ the AI itself — €0.29 a year</a:t>
+              <a:t>▲ Estimated model calls — €0.29/year</a:t>
             </a:r>
             <a:endParaRPr sz="1100"/>
           </a:p>
@@ -11499,7 +12526,7 @@
           <p:cNvPr id="16" name="Shape 13">
             <a:extLst xmlns:a="http://schemas.openxmlformats.org/drawingml/2006/main">
               <a:ext uri="{FF2B5EF4-FFF2-40B4-BE49-F238E27FC236}">
-                <a16:creationId xmlns:a16="http://schemas.microsoft.com/office/drawing/2014/main" id="{C0F26839-9EF9-4AB3-82CF-C1D1DEFE9EEE}"/>
+                <a16:creationId xmlns:a16="http://schemas.microsoft.com/office/drawing/2014/main" id="{0FD0DE44-C518-4F5B-8C89-226237237606}"/>
               </a:ext>
             </a:extLst>
           </p:cNvPr>
@@ -11530,7 +12557,7 @@
           <p:cNvPr id="17" name="Shape 14">
             <a:extLst xmlns:a="http://schemas.openxmlformats.org/drawingml/2006/main">
               <a:ext uri="{FF2B5EF4-FFF2-40B4-BE49-F238E27FC236}">
-                <a16:creationId xmlns:a16="http://schemas.microsoft.com/office/drawing/2014/main" id="{EA92809E-5F3F-40CA-800E-DAB58E8E570D}"/>
+                <a16:creationId xmlns:a16="http://schemas.microsoft.com/office/drawing/2014/main" id="{12022737-A19C-4289-B261-EC2CA9B03BEC}"/>
               </a:ext>
             </a:extLst>
           </p:cNvPr>
@@ -11563,7 +12590,7 @@
           <p:cNvPr id="18" name="Text 15">
             <a:extLst xmlns:a="http://schemas.openxmlformats.org/drawingml/2006/main">
               <a:ext uri="{FF2B5EF4-FFF2-40B4-BE49-F238E27FC236}">
-                <a16:creationId xmlns:a16="http://schemas.microsoft.com/office/drawing/2014/main" id="{C4FE7562-235D-47A5-8470-DFA9B578A996}"/>
+                <a16:creationId xmlns:a16="http://schemas.microsoft.com/office/drawing/2014/main" id="{C29F8128-F997-4DED-BBBE-435C557B342A}"/>
               </a:ext>
             </a:extLst>
           </p:cNvPr>
@@ -11609,7 +12636,7 @@
           <p:cNvPr id="19" name="Shape 16">
             <a:extLst xmlns:a="http://schemas.openxmlformats.org/drawingml/2006/main">
               <a:ext uri="{FF2B5EF4-FFF2-40B4-BE49-F238E27FC236}">
-                <a16:creationId xmlns:a16="http://schemas.microsoft.com/office/drawing/2014/main" id="{6411B7DA-1CB3-44EC-865D-8DFBBDEDDA30}"/>
+                <a16:creationId xmlns:a16="http://schemas.microsoft.com/office/drawing/2014/main" id="{8BF017AC-A1BD-427B-A765-E5BCE66359AC}"/>
               </a:ext>
             </a:extLst>
           </p:cNvPr>
@@ -11649,7 +12676,7 @@
           <p:cNvPr id="20" name="Text 17">
             <a:extLst xmlns:a="http://schemas.openxmlformats.org/drawingml/2006/main">
               <a:ext uri="{FF2B5EF4-FFF2-40B4-BE49-F238E27FC236}">
-                <a16:creationId xmlns:a16="http://schemas.microsoft.com/office/drawing/2014/main" id="{7BDE7D1A-2084-4D3D-9B26-99FE3D413E21}"/>
+                <a16:creationId xmlns:a16="http://schemas.microsoft.com/office/drawing/2014/main" id="{EA145BB3-D7D4-4AEC-87FA-AF2596017136}"/>
               </a:ext>
             </a:extLst>
           </p:cNvPr>
@@ -11695,7 +12722,7 @@
           <p:cNvPr id="21" name="Text 18">
             <a:extLst xmlns:a="http://schemas.openxmlformats.org/drawingml/2006/main">
               <a:ext uri="{FF2B5EF4-FFF2-40B4-BE49-F238E27FC236}">
-                <a16:creationId xmlns:a16="http://schemas.microsoft.com/office/drawing/2014/main" id="{7C223037-267E-499A-B588-320E4C6D329D}"/>
+                <a16:creationId xmlns:a16="http://schemas.microsoft.com/office/drawing/2014/main" id="{86F1E770-C12B-4487-A584-026A2F1AF330}"/>
               </a:ext>
             </a:extLst>
           </p:cNvPr>
@@ -11730,18 +12757,7 @@
                 <a:ea typeface="Calibri"/>
                 <a:cs typeface="Calibri"/>
               </a:rPr>
-              <a:t>2 weeks. 2 of your handlers</a:t>
-            </a:r>
-            <a:r>
-              <a:rPr sz="980">
-                <a:solidFill>
-                  <a:srgbClr val="1B2730"/>
-                </a:solidFill>
-                <a:latin typeface="Calibri"/>
-                <a:ea typeface="Calibri"/>
-                <a:cs typeface="Calibri"/>
-              </a:rPr>
-              <a:t> label 300 complaints. Produces the ground truth you do not have.</a:t>
+              <a:t>2 weeks elapsed · 8 consulting days × €700. 2 of your handlers label 300 complaints; their time is excluded.</a:t>
             </a:r>
             <a:endParaRPr sz="980"/>
           </a:p>
@@ -11752,7 +12768,7 @@
           <p:cNvPr id="22" name="Shape 19">
             <a:extLst xmlns:a="http://schemas.openxmlformats.org/drawingml/2006/main">
               <a:ext uri="{FF2B5EF4-FFF2-40B4-BE49-F238E27FC236}">
-                <a16:creationId xmlns:a16="http://schemas.microsoft.com/office/drawing/2014/main" id="{E7574B19-E501-4B2C-BE59-E607845B7EA6}"/>
+                <a16:creationId xmlns:a16="http://schemas.microsoft.com/office/drawing/2014/main" id="{16B47120-2190-47F8-A104-0117C32B9298}"/>
               </a:ext>
             </a:extLst>
           </p:cNvPr>
@@ -11785,7 +12801,7 @@
           <p:cNvPr id="23" name="Text 20">
             <a:extLst xmlns:a="http://schemas.openxmlformats.org/drawingml/2006/main">
               <a:ext uri="{FF2B5EF4-FFF2-40B4-BE49-F238E27FC236}">
-                <a16:creationId xmlns:a16="http://schemas.microsoft.com/office/drawing/2014/main" id="{2F305791-8F72-4ED3-8780-7AB8CDC108F2}"/>
+                <a16:creationId xmlns:a16="http://schemas.microsoft.com/office/drawing/2014/main" id="{D9F928DB-DC03-4741-A785-B7839D46875C}"/>
               </a:ext>
             </a:extLst>
           </p:cNvPr>
@@ -11831,7 +12847,7 @@
           <p:cNvPr id="24" name="Shape 21">
             <a:extLst xmlns:a="http://schemas.openxmlformats.org/drawingml/2006/main">
               <a:ext uri="{FF2B5EF4-FFF2-40B4-BE49-F238E27FC236}">
-                <a16:creationId xmlns:a16="http://schemas.microsoft.com/office/drawing/2014/main" id="{7A5811A1-0E2B-4D96-8206-499389347409}"/>
+                <a16:creationId xmlns:a16="http://schemas.microsoft.com/office/drawing/2014/main" id="{548D5236-3B93-4279-82E8-742805121966}"/>
               </a:ext>
             </a:extLst>
           </p:cNvPr>
@@ -11871,7 +12887,7 @@
           <p:cNvPr id="25" name="Text 22">
             <a:extLst xmlns:a="http://schemas.openxmlformats.org/drawingml/2006/main">
               <a:ext uri="{FF2B5EF4-FFF2-40B4-BE49-F238E27FC236}">
-                <a16:creationId xmlns:a16="http://schemas.microsoft.com/office/drawing/2014/main" id="{3A431772-A438-4D58-93B1-847C1E97E6BD}"/>
+                <a16:creationId xmlns:a16="http://schemas.microsoft.com/office/drawing/2014/main" id="{43286AD2-5856-4D4F-B01E-06B2BA8C3487}"/>
               </a:ext>
             </a:extLst>
           </p:cNvPr>
@@ -11917,7 +12933,7 @@
           <p:cNvPr id="26" name="Text 23">
             <a:extLst xmlns:a="http://schemas.openxmlformats.org/drawingml/2006/main">
               <a:ext uri="{FF2B5EF4-FFF2-40B4-BE49-F238E27FC236}">
-                <a16:creationId xmlns:a16="http://schemas.microsoft.com/office/drawing/2014/main" id="{03086F45-14F3-46CE-B55D-59B7456793C4}"/>
+                <a16:creationId xmlns:a16="http://schemas.microsoft.com/office/drawing/2014/main" id="{5B90008F-7F9C-421E-A05C-C57CABCA1448}"/>
               </a:ext>
             </a:extLst>
           </p:cNvPr>
@@ -11952,7 +12968,7 @@
                 <a:ea typeface="Calibri"/>
                 <a:cs typeface="Calibri"/>
               </a:rPr>
-              <a:t>11 weeks. It proposes, nobody acts on it, we measure against your labels.</a:t>
+              <a:t>11 weeks elapsed · 12 consulting days × €700. The system proposes; handlers do not act; results use the Phase 0 labels.</a:t>
             </a:r>
             <a:endParaRPr sz="980"/>
           </a:p>
@@ -11963,7 +12979,7 @@
           <p:cNvPr id="27" name="Shape 24">
             <a:extLst xmlns:a="http://schemas.openxmlformats.org/drawingml/2006/main">
               <a:ext uri="{FF2B5EF4-FFF2-40B4-BE49-F238E27FC236}">
-                <a16:creationId xmlns:a16="http://schemas.microsoft.com/office/drawing/2014/main" id="{B5CB28DB-BDB7-40A1-9B3E-739D80B89410}"/>
+                <a16:creationId xmlns:a16="http://schemas.microsoft.com/office/drawing/2014/main" id="{80F3F7B1-83B0-4F0A-A66F-7161369B0D1B}"/>
               </a:ext>
             </a:extLst>
           </p:cNvPr>
@@ -11996,7 +13012,7 @@
           <p:cNvPr id="28" name="Text 25">
             <a:extLst xmlns:a="http://schemas.openxmlformats.org/drawingml/2006/main">
               <a:ext uri="{FF2B5EF4-FFF2-40B4-BE49-F238E27FC236}">
-                <a16:creationId xmlns:a16="http://schemas.microsoft.com/office/drawing/2014/main" id="{8F9F5553-5E9D-43BB-8DA8-83313C5DA6BF}"/>
+                <a16:creationId xmlns:a16="http://schemas.microsoft.com/office/drawing/2014/main" id="{0A52C065-146D-46AC-8FDA-695FDB41C646}"/>
               </a:ext>
             </a:extLst>
           </p:cNvPr>
@@ -12042,7 +13058,7 @@
           <p:cNvPr id="29" name="Shape 26">
             <a:extLst xmlns:a="http://schemas.openxmlformats.org/drawingml/2006/main">
               <a:ext uri="{FF2B5EF4-FFF2-40B4-BE49-F238E27FC236}">
-                <a16:creationId xmlns:a16="http://schemas.microsoft.com/office/drawing/2014/main" id="{320DD752-B98E-4A95-8DFB-A617FE3EF471}"/>
+                <a16:creationId xmlns:a16="http://schemas.microsoft.com/office/drawing/2014/main" id="{E16ED97C-CE91-4A9D-9F7C-CC09FA1FE67A}"/>
               </a:ext>
             </a:extLst>
           </p:cNvPr>
@@ -12082,7 +13098,7 @@
           <p:cNvPr id="30" name="Text 27">
             <a:extLst xmlns:a="http://schemas.openxmlformats.org/drawingml/2006/main">
               <a:ext uri="{FF2B5EF4-FFF2-40B4-BE49-F238E27FC236}">
-                <a16:creationId xmlns:a16="http://schemas.microsoft.com/office/drawing/2014/main" id="{59ABE45F-B2A7-40A1-9D4D-1075BD816486}"/>
+                <a16:creationId xmlns:a16="http://schemas.microsoft.com/office/drawing/2014/main" id="{79A95893-7611-462B-B5A0-3964A771BF0D}"/>
               </a:ext>
             </a:extLst>
           </p:cNvPr>
@@ -12128,7 +13144,7 @@
           <p:cNvPr id="31" name="Text 28">
             <a:extLst xmlns:a="http://schemas.openxmlformats.org/drawingml/2006/main">
               <a:ext uri="{FF2B5EF4-FFF2-40B4-BE49-F238E27FC236}">
-                <a16:creationId xmlns:a16="http://schemas.microsoft.com/office/drawing/2014/main" id="{DCAC4CFF-2A10-4424-B32C-B5D054403790}"/>
+                <a16:creationId xmlns:a16="http://schemas.microsoft.com/office/drawing/2014/main" id="{FE0D5EB4-4A9A-44DD-9CFF-8A75088ACDD2}"/>
               </a:ext>
             </a:extLst>
           </p:cNvPr>
@@ -12163,7 +13179,7 @@
                 <a:ea typeface="Calibri"/>
                 <a:cs typeface="Calibri"/>
               </a:rPr>
-              <a:t>4 weeks. Assist-only. Autonomous routing is a separate decision.</a:t>
+              <a:t>4 weeks elapsed · 15 consulting days × €700. Handlers may use proposals; autonomous routing needs separate approval.</a:t>
             </a:r>
             <a:endParaRPr sz="980"/>
           </a:p>
@@ -12174,7 +13190,7 @@
           <p:cNvPr id="32" name="Shape 29">
             <a:extLst xmlns:a="http://schemas.openxmlformats.org/drawingml/2006/main">
               <a:ext uri="{FF2B5EF4-FFF2-40B4-BE49-F238E27FC236}">
-                <a16:creationId xmlns:a16="http://schemas.microsoft.com/office/drawing/2014/main" id="{37785C60-0E23-4C9F-BED7-75CF7705CC19}"/>
+                <a16:creationId xmlns:a16="http://schemas.microsoft.com/office/drawing/2014/main" id="{20341403-1763-498D-AA95-5AF09CCE5909}"/>
               </a:ext>
             </a:extLst>
           </p:cNvPr>
@@ -12201,7 +13217,7 @@
           <p:cNvPr id="33" name="Shape 30">
             <a:extLst xmlns:a="http://schemas.openxmlformats.org/drawingml/2006/main">
               <a:ext uri="{FF2B5EF4-FFF2-40B4-BE49-F238E27FC236}">
-                <a16:creationId xmlns:a16="http://schemas.microsoft.com/office/drawing/2014/main" id="{7944A24F-9460-41C3-A134-096BBEAFCDA9}"/>
+                <a16:creationId xmlns:a16="http://schemas.microsoft.com/office/drawing/2014/main" id="{3B07E184-69BB-404E-A798-8D8804A7B8A6}"/>
               </a:ext>
             </a:extLst>
           </p:cNvPr>
@@ -12228,7 +13244,7 @@
           <p:cNvPr id="34" name="Text 31">
             <a:extLst xmlns:a="http://schemas.openxmlformats.org/drawingml/2006/main">
               <a:ext uri="{FF2B5EF4-FFF2-40B4-BE49-F238E27FC236}">
-                <a16:creationId xmlns:a16="http://schemas.microsoft.com/office/drawing/2014/main" id="{5A0E272B-6CA9-4A7B-A1C7-2E3128A855AF}"/>
+                <a16:creationId xmlns:a16="http://schemas.microsoft.com/office/drawing/2014/main" id="{3014F814-BD2B-4C8B-94AD-02AC8EF19D3D}"/>
               </a:ext>
             </a:extLst>
           </p:cNvPr>
@@ -12285,29 +13301,7 @@
                 <a:ea typeface="Calibri"/>
                 <a:cs typeface="Calibri"/>
               </a:rPr>
-              <a:t>volume comes from the regulator's own complaint rate applied to a firm your size, so treat the euros as an order of magnitude. And the return rests on avoided ombudsman referrals — </a:t>
-            </a:r>
-            <a:r>
-              <a:rPr sz="1250">
-                <a:solidFill>
-                  <a:srgbClr val="000000"/>
-                </a:solidFill>
-                <a:latin typeface="Calibri"/>
-                <a:ea typeface="Calibri"/>
-                <a:cs typeface="Calibri"/>
-              </a:rPr>
-              <a:t>4 a year covers the running cost</a:t>
-            </a:r>
-            <a:r>
-              <a:rPr sz="1250">
-                <a:solidFill>
-                  <a:srgbClr val="000000"/>
-                </a:solidFill>
-                <a:latin typeface="Calibri"/>
-                <a:ea typeface="Calibri"/>
-                <a:cs typeface="Calibri"/>
-              </a:rPr>
-              <a:t>. The pilot is what tests it.</a:t>
+              <a:t>annual complaint volume uses a regulator benchmark for a firm your size; 4 avoided ombudsman referrals a year is the break-even hypothesis. Fixed phase fees are quoted; the pilot tests the benefit.</a:t>
             </a:r>
             <a:endParaRPr sz="1250"/>
           </a:p>
@@ -12316,7 +13310,7 @@
     </p:spTree>
     <p:extLst>
       <p:ext uri="{BB962C8B-B14F-4D97-AF65-F5344CB8AC3E}">
-        <p14:creationId xmlns:p14="http://schemas.microsoft.com/office/powerpoint/2010/main" val="1824286969"/>
+        <p14:creationId xmlns:p14="http://schemas.microsoft.com/office/powerpoint/2010/main" val="1654927288"/>
       </p:ext>
     </p:extLst>
   </p:cSld>
@@ -12329,7 +13323,7 @@
     <p:bg>
       <p:bgPr>
         <a:solidFill xmlns:a="http://schemas.openxmlformats.org/drawingml/2006/main">
-          <a:srgbClr val="FFFFFF"/>
+          <a:srgbClr val="1D2A32"/>
         </a:solidFill>
       </p:bgPr>
     </p:bg>
@@ -12347,7 +13341,7 @@
           <p:cNvPr id="2" name="Text 0">
             <a:extLst xmlns:a="http://schemas.openxmlformats.org/drawingml/2006/main">
               <a:ext uri="{FF2B5EF4-FFF2-40B4-BE49-F238E27FC236}">
-                <a16:creationId xmlns:a16="http://schemas.microsoft.com/office/drawing/2014/main" id="{1BBC4387-AAE2-4FA8-B556-4C3658FA955E}"/>
+                <a16:creationId xmlns:a16="http://schemas.microsoft.com/office/drawing/2014/main" id="{BDC73FA7-6DFB-4FB1-876B-7CA6DD0B2A1C}"/>
               </a:ext>
             </a:extLst>
           </p:cNvPr>
@@ -12375,203 +13369,6 @@
             </a:pPr>
             <a:r>
               <a:rPr sz="1050" b="1" spc="200">
-                <a:solidFill>
-                  <a:srgbClr val="6B7C88"/>
-                </a:solidFill>
-                <a:latin typeface="Calibri"/>
-                <a:ea typeface="Calibri"/>
-                <a:cs typeface="Calibri"/>
-              </a:rPr>
-              <a:t>CAPSTONE ROUND 1  ·  AI CONSULTING PITCH</a:t>
-            </a:r>
-            <a:endParaRPr sz="1050"/>
-          </a:p>
-        </p:txBody>
-      </p:sp>
-      <p:sp>
-        <p:nvSpPr>
-          <p:cNvPr id="3" name="Shape 1">
-            <a:extLst xmlns:a="http://schemas.openxmlformats.org/drawingml/2006/main">
-              <a:ext uri="{FF2B5EF4-FFF2-40B4-BE49-F238E27FC236}">
-                <a16:creationId xmlns:a16="http://schemas.microsoft.com/office/drawing/2014/main" id="{37B3EF20-7C5E-47D7-B466-E18CD7083724}"/>
-              </a:ext>
-            </a:extLst>
-          </p:cNvPr>
-          <p:cNvSpPr>
-            <a:spLocks xmlns:a="http://schemas.openxmlformats.org/drawingml/2006/main" noGrp="1"/>
-          </p:cNvSpPr>
-          <p:nvPr/>
-        </p:nvSpPr>
-        <p:spPr>
-          <a:xfrm xmlns:a="http://schemas.openxmlformats.org/drawingml/2006/main">
-            <a:off x="566928" y="658368"/>
-            <a:ext cx="566928" cy="566928"/>
-          </a:xfrm>
-          <a:prstGeom xmlns:a="http://schemas.openxmlformats.org/drawingml/2006/main" prst="ellipse">
-            <a:avLst/>
-          </a:prstGeom>
-          <a:solidFill xmlns:a="http://schemas.openxmlformats.org/drawingml/2006/main">
-            <a:srgbClr val="24343F"/>
-          </a:solidFill>
-        </p:spPr>
-      </p:sp>
-      <p:pic>
-        <p:nvPicPr>
-          <p:cNvPr id="23" name="Image 0"/>
-          <p:cNvPicPr>
-            <a:picLocks xmlns:a="http://schemas.openxmlformats.org/drawingml/2006/main" noChangeAspect="1"/>
-          </p:cNvPicPr>
-          <p:nvPr/>
-        </p:nvPicPr>
-        <p:blipFill>
-          <a:blip xmlns:r="http://schemas.openxmlformats.org/officeDocument/2006/relationships" xmlns:a="http://schemas.openxmlformats.org/drawingml/2006/main" r:embed="R00c066079d0349d3"/>
-          <a:stretch xmlns:a="http://schemas.openxmlformats.org/drawingml/2006/main">
-            <a:fillRect l="0" t="0" r="0" b="0"/>
-          </a:stretch>
-        </p:blipFill>
-        <p:spPr>
-          <a:xfrm xmlns:a="http://schemas.openxmlformats.org/drawingml/2006/main">
-            <a:off x="708660" y="800100"/>
-            <a:ext cx="283464" cy="283464"/>
-          </a:xfrm>
-          <a:prstGeom xmlns:a="http://schemas.openxmlformats.org/drawingml/2006/main" prst="rect">
-            <a:avLst/>
-          </a:prstGeom>
-        </p:spPr>
-      </p:pic>
-      <p:sp>
-        <p:nvSpPr>
-          <p:cNvPr id="5" name="Text 2">
-            <a:extLst xmlns:a="http://schemas.openxmlformats.org/drawingml/2006/main">
-              <a:ext uri="{FF2B5EF4-FFF2-40B4-BE49-F238E27FC236}">
-                <a16:creationId xmlns:a16="http://schemas.microsoft.com/office/drawing/2014/main" id="{F5BE29DF-B1DE-4146-8602-CDAA067AE927}"/>
-              </a:ext>
-            </a:extLst>
-          </p:cNvPr>
-          <p:cNvSpPr>
-            <a:spLocks xmlns:a="http://schemas.openxmlformats.org/drawingml/2006/main" noGrp="1"/>
-          </p:cNvSpPr>
-          <p:nvPr/>
-        </p:nvSpPr>
-        <p:spPr>
-          <a:xfrm xmlns:a="http://schemas.openxmlformats.org/drawingml/2006/main">
-            <a:off x="1316736" y="621792"/>
-            <a:ext cx="10305288" cy="658368"/>
-          </a:xfrm>
-          <a:prstGeom xmlns:a="http://schemas.openxmlformats.org/drawingml/2006/main" prst="rect">
-            <a:avLst/>
-          </a:prstGeom>
-          <a:noFill xmlns:a="http://schemas.openxmlformats.org/drawingml/2006/main"/>
-        </p:spPr>
-        <p:txBody>
-          <a:bodyPr xmlns:a="http://schemas.openxmlformats.org/drawingml/2006/main" wrap="square" lIns="0" tIns="0" rIns="0" bIns="0" anchor="ctr"/>
-          <a:lstStyle xmlns:a="http://schemas.openxmlformats.org/drawingml/2006/main"/>
-          <a:p xmlns:a="http://schemas.openxmlformats.org/drawingml/2006/main">
-            <a:pPr marL="0" indent="0">
-              <a:buNone/>
-            </a:pPr>
-            <a:r>
-              <a:rPr sz="3000" b="1">
-                <a:solidFill>
-                  <a:srgbClr val="24343F"/>
-                </a:solidFill>
-                <a:latin typeface="Trebuchet MS"/>
-                <a:ea typeface="Trebuchet MS"/>
-                <a:cs typeface="Trebuchet MS"/>
-              </a:rPr>
-              <a:t>Why complaint triage comes first</a:t>
-            </a:r>
-            <a:endParaRPr sz="3000"/>
-          </a:p>
-        </p:txBody>
-      </p:sp>
-      <p:sp>
-        <p:nvSpPr>
-          <p:cNvPr id="6" name="Shape 3">
-            <a:extLst xmlns:a="http://schemas.openxmlformats.org/drawingml/2006/main">
-              <a:ext uri="{FF2B5EF4-FFF2-40B4-BE49-F238E27FC236}">
-                <a16:creationId xmlns:a16="http://schemas.microsoft.com/office/drawing/2014/main" id="{770716BA-8F2C-4628-B18D-FBB58B5D6022}"/>
-              </a:ext>
-            </a:extLst>
-          </p:cNvPr>
-          <p:cNvSpPr>
-            <a:spLocks xmlns:a="http://schemas.openxmlformats.org/drawingml/2006/main" noGrp="1"/>
-          </p:cNvSpPr>
-          <p:nvPr/>
-        </p:nvSpPr>
-        <p:spPr>
-          <a:xfrm xmlns:a="http://schemas.openxmlformats.org/drawingml/2006/main">
-            <a:off x="566928" y="1481328"/>
-            <a:ext cx="11055096" cy="676656"/>
-          </a:xfrm>
-          <a:prstGeom xmlns:a="http://schemas.openxmlformats.org/drawingml/2006/main" prst="rect">
-            <a:avLst/>
-          </a:prstGeom>
-          <a:solidFill xmlns:a="http://schemas.openxmlformats.org/drawingml/2006/main">
-            <a:srgbClr val="EFF5F9"/>
-          </a:solidFill>
-        </p:spPr>
-      </p:sp>
-      <p:sp>
-        <p:nvSpPr>
-          <p:cNvPr id="7" name="Shape 4">
-            <a:extLst xmlns:a="http://schemas.openxmlformats.org/drawingml/2006/main">
-              <a:ext uri="{FF2B5EF4-FFF2-40B4-BE49-F238E27FC236}">
-                <a16:creationId xmlns:a16="http://schemas.microsoft.com/office/drawing/2014/main" id="{D2B466BD-9140-4658-A9A6-9413DD8FD9D4}"/>
-              </a:ext>
-            </a:extLst>
-          </p:cNvPr>
-          <p:cNvSpPr>
-            <a:spLocks xmlns:a="http://schemas.openxmlformats.org/drawingml/2006/main" noGrp="1"/>
-          </p:cNvSpPr>
-          <p:nvPr/>
-        </p:nvSpPr>
-        <p:spPr>
-          <a:xfrm xmlns:a="http://schemas.openxmlformats.org/drawingml/2006/main">
-            <a:off x="566928" y="1481328"/>
-            <a:ext cx="82296" cy="676656"/>
-          </a:xfrm>
-          <a:prstGeom xmlns:a="http://schemas.openxmlformats.org/drawingml/2006/main" prst="rect">
-            <a:avLst/>
-          </a:prstGeom>
-          <a:solidFill xmlns:a="http://schemas.openxmlformats.org/drawingml/2006/main">
-            <a:srgbClr val="2A78D6"/>
-          </a:solidFill>
-        </p:spPr>
-      </p:sp>
-      <p:sp>
-        <p:nvSpPr>
-          <p:cNvPr id="8" name="Text 5">
-            <a:extLst xmlns:a="http://schemas.openxmlformats.org/drawingml/2006/main">
-              <a:ext uri="{FF2B5EF4-FFF2-40B4-BE49-F238E27FC236}">
-                <a16:creationId xmlns:a16="http://schemas.microsoft.com/office/drawing/2014/main" id="{DD559D77-40DA-4451-A7FD-0DF2C3ACCDC5}"/>
-              </a:ext>
-            </a:extLst>
-          </p:cNvPr>
-          <p:cNvSpPr>
-            <a:spLocks xmlns:a="http://schemas.openxmlformats.org/drawingml/2006/main" noGrp="1"/>
-          </p:cNvSpPr>
-          <p:nvPr/>
-        </p:nvSpPr>
-        <p:spPr>
-          <a:xfrm xmlns:a="http://schemas.openxmlformats.org/drawingml/2006/main">
-            <a:off x="822960" y="1481328"/>
-            <a:ext cx="10597896" cy="676656"/>
-          </a:xfrm>
-          <a:prstGeom xmlns:a="http://schemas.openxmlformats.org/drawingml/2006/main" prst="rect">
-            <a:avLst/>
-          </a:prstGeom>
-          <a:noFill xmlns:a="http://schemas.openxmlformats.org/drawingml/2006/main"/>
-        </p:spPr>
-        <p:txBody>
-          <a:bodyPr xmlns:a="http://schemas.openxmlformats.org/drawingml/2006/main" wrap="square" lIns="0" tIns="0" rIns="0" bIns="0" anchor="ctr"/>
-          <a:lstStyle xmlns:a="http://schemas.openxmlformats.org/drawingml/2006/main"/>
-          <a:p xmlns:a="http://schemas.openxmlformats.org/drawingml/2006/main">
-            <a:pPr marL="0" indent="0">
-              <a:buNone/>
-            </a:pPr>
-            <a:r>
-              <a:rPr sz="1050" b="1" spc="100">
                 <a:solidFill>
                   <a:srgbClr val="2A78D6"/>
                 </a:solidFill>
@@ -12579,18 +13376,7 @@
                 <a:ea typeface="Calibri"/>
                 <a:cs typeface="Calibri"/>
               </a:rPr>
-              <a:t>TAKEAWAY   </a:t>
-            </a:r>
-            <a:r>
-              <a:rPr sz="1300">
-                <a:solidFill>
-                  <a:srgbClr val="1B2730"/>
-                </a:solidFill>
-                <a:latin typeface="Calibri"/>
-                <a:ea typeface="Calibri"/>
-                <a:cs typeface="Calibri"/>
-              </a:rPr>
-              <a:t>Ranked by how visible the reasoning is, not by the size of the prize.</a:t>
+              <a:t>CAPSTONE ROUND 1  ·  AI CONSULTING PITCH</a:t>
             </a:r>
             <a:endParaRPr sz="1050"/>
           </a:p>
@@ -12598,53 +13384,73 @@
       </p:sp>
       <p:sp>
         <p:nvSpPr>
-          <p:cNvPr id="9" name="Shape 6">
-            <a:extLst xmlns:a="http://schemas.openxmlformats.org/drawingml/2006/main">
-              <a:ext uri="{FF2B5EF4-FFF2-40B4-BE49-F238E27FC236}">
-                <a16:creationId xmlns:a16="http://schemas.microsoft.com/office/drawing/2014/main" id="{04A8531E-9407-4000-84C5-B211EDF3EF0B}"/>
-              </a:ext>
-            </a:extLst>
-          </p:cNvPr>
-          <p:cNvSpPr>
-            <a:spLocks xmlns:a="http://schemas.openxmlformats.org/drawingml/2006/main" noGrp="1"/>
-          </p:cNvSpPr>
-          <p:nvPr/>
-        </p:nvSpPr>
-        <p:spPr>
-          <a:xfrm xmlns:a="http://schemas.openxmlformats.org/drawingml/2006/main">
-            <a:off x="566928" y="6437376"/>
-            <a:ext cx="11055096" cy="0"/>
-          </a:xfrm>
-          <a:prstGeom xmlns:a="http://schemas.openxmlformats.org/drawingml/2006/main" prst="line">
-            <a:avLst/>
-          </a:prstGeom>
-          <a:noFill xmlns:a="http://schemas.openxmlformats.org/drawingml/2006/main"/>
-          <a:ln xmlns:a="http://schemas.openxmlformats.org/drawingml/2006/main" w="12700">
-            <a:solidFill>
-              <a:srgbClr val="D9E3EA"/>
-            </a:solidFill>
-            <a:prstDash val="solid"/>
-          </a:ln>
-        </p:spPr>
-      </p:sp>
-      <p:sp>
-        <p:nvSpPr>
-          <p:cNvPr id="10" name="Text 7">
-            <a:extLst xmlns:a="http://schemas.openxmlformats.org/drawingml/2006/main">
-              <a:ext uri="{FF2B5EF4-FFF2-40B4-BE49-F238E27FC236}">
-                <a16:creationId xmlns:a16="http://schemas.microsoft.com/office/drawing/2014/main" id="{AC7DE3C6-152F-483D-A112-1EC601595227}"/>
-              </a:ext>
-            </a:extLst>
-          </p:cNvPr>
-          <p:cNvSpPr>
-            <a:spLocks xmlns:a="http://schemas.openxmlformats.org/drawingml/2006/main" noGrp="1"/>
-          </p:cNvSpPr>
-          <p:nvPr/>
-        </p:nvSpPr>
-        <p:spPr>
-          <a:xfrm xmlns:a="http://schemas.openxmlformats.org/drawingml/2006/main">
-            <a:off x="566928" y="6473952"/>
-            <a:ext cx="7315200" cy="274320"/>
+          <p:cNvPr id="3" name="Shape 1">
+            <a:extLst xmlns:a="http://schemas.openxmlformats.org/drawingml/2006/main">
+              <a:ext uri="{FF2B5EF4-FFF2-40B4-BE49-F238E27FC236}">
+                <a16:creationId xmlns:a16="http://schemas.microsoft.com/office/drawing/2014/main" id="{71FA25FA-CA35-4D06-9DAE-47BFB0D376B1}"/>
+              </a:ext>
+            </a:extLst>
+          </p:cNvPr>
+          <p:cNvSpPr>
+            <a:spLocks xmlns:a="http://schemas.openxmlformats.org/drawingml/2006/main" noGrp="1"/>
+          </p:cNvSpPr>
+          <p:nvPr/>
+        </p:nvSpPr>
+        <p:spPr>
+          <a:xfrm xmlns:a="http://schemas.openxmlformats.org/drawingml/2006/main">
+            <a:off x="566928" y="658368"/>
+            <a:ext cx="566928" cy="566928"/>
+          </a:xfrm>
+          <a:prstGeom xmlns:a="http://schemas.openxmlformats.org/drawingml/2006/main" prst="ellipse">
+            <a:avLst/>
+          </a:prstGeom>
+          <a:solidFill xmlns:a="http://schemas.openxmlformats.org/drawingml/2006/main">
+            <a:srgbClr val="24343F"/>
+          </a:solidFill>
+        </p:spPr>
+      </p:sp>
+      <p:pic>
+        <p:nvPicPr>
+          <p:cNvPr id="10" name="Image 0"/>
+          <p:cNvPicPr>
+            <a:picLocks xmlns:a="http://schemas.openxmlformats.org/drawingml/2006/main" noChangeAspect="1"/>
+          </p:cNvPicPr>
+          <p:nvPr/>
+        </p:nvPicPr>
+        <p:blipFill>
+          <a:blip xmlns:r="http://schemas.openxmlformats.org/officeDocument/2006/relationships" xmlns:a="http://schemas.openxmlformats.org/drawingml/2006/main" r:embed="R275f8c71fa7a42f2"/>
+          <a:stretch xmlns:a="http://schemas.openxmlformats.org/drawingml/2006/main">
+            <a:fillRect l="0" t="0" r="0" b="0"/>
+          </a:stretch>
+        </p:blipFill>
+        <p:spPr>
+          <a:xfrm xmlns:a="http://schemas.openxmlformats.org/drawingml/2006/main">
+            <a:off x="708660" y="800100"/>
+            <a:ext cx="283464" cy="283464"/>
+          </a:xfrm>
+          <a:prstGeom xmlns:a="http://schemas.openxmlformats.org/drawingml/2006/main" prst="rect">
+            <a:avLst/>
+          </a:prstGeom>
+        </p:spPr>
+      </p:pic>
+      <p:sp>
+        <p:nvSpPr>
+          <p:cNvPr id="5" name="Text 2">
+            <a:extLst xmlns:a="http://schemas.openxmlformats.org/drawingml/2006/main">
+              <a:ext uri="{FF2B5EF4-FFF2-40B4-BE49-F238E27FC236}">
+                <a16:creationId xmlns:a16="http://schemas.microsoft.com/office/drawing/2014/main" id="{A95F2334-AAF2-47D1-9C0B-857186294923}"/>
+              </a:ext>
+            </a:extLst>
+          </p:cNvPr>
+          <p:cNvSpPr>
+            <a:spLocks xmlns:a="http://schemas.openxmlformats.org/drawingml/2006/main" noGrp="1"/>
+          </p:cNvSpPr>
+          <p:nvPr/>
+        </p:nvSpPr>
+        <p:spPr>
+          <a:xfrm xmlns:a="http://schemas.openxmlformats.org/drawingml/2006/main">
+            <a:off x="1316736" y="621792"/>
+            <a:ext cx="10305288" cy="658368"/>
           </a:xfrm>
           <a:prstGeom xmlns:a="http://schemas.openxmlformats.org/drawingml/2006/main" prst="rect">
             <a:avLst/>
@@ -12658,28 +13464,39 @@
             <a:pPr marL="0" indent="0">
               <a:buNone/>
             </a:pPr>
-            <a:endParaRPr sz="850"/>
+            <a:r>
+              <a:rPr sz="3000" b="1">
+                <a:solidFill>
+                  <a:srgbClr val="FFFFFF"/>
+                </a:solidFill>
+                <a:latin typeface="Trebuchet MS"/>
+                <a:ea typeface="Trebuchet MS"/>
+                <a:cs typeface="Trebuchet MS"/>
+              </a:rPr>
+              <a:t>Supporting evidence</a:t>
+            </a:r>
+            <a:endParaRPr sz="3000"/>
           </a:p>
         </p:txBody>
       </p:sp>
       <p:sp>
         <p:nvSpPr>
-          <p:cNvPr id="11" name="Text 8">
-            <a:extLst xmlns:a="http://schemas.openxmlformats.org/drawingml/2006/main">
-              <a:ext uri="{FF2B5EF4-FFF2-40B4-BE49-F238E27FC236}">
-                <a16:creationId xmlns:a16="http://schemas.microsoft.com/office/drawing/2014/main" id="{020A240E-F0FD-468E-B5CD-E0DC3862D174}"/>
-              </a:ext>
-            </a:extLst>
-          </p:cNvPr>
-          <p:cNvSpPr>
-            <a:spLocks xmlns:a="http://schemas.openxmlformats.org/drawingml/2006/main" noGrp="1"/>
-          </p:cNvSpPr>
-          <p:nvPr/>
-        </p:nvSpPr>
-        <p:spPr>
-          <a:xfrm xmlns:a="http://schemas.openxmlformats.org/drawingml/2006/main">
-            <a:off x="10524744" y="6473952"/>
-            <a:ext cx="1097280" cy="274320"/>
+          <p:cNvPr id="6" name="Text 3">
+            <a:extLst xmlns:a="http://schemas.openxmlformats.org/drawingml/2006/main">
+              <a:ext uri="{FF2B5EF4-FFF2-40B4-BE49-F238E27FC236}">
+                <a16:creationId xmlns:a16="http://schemas.microsoft.com/office/drawing/2014/main" id="{57A5854E-2043-488B-9A65-0E76F55DF615}"/>
+              </a:ext>
+            </a:extLst>
+          </p:cNvPr>
+          <p:cNvSpPr>
+            <a:spLocks xmlns:a="http://schemas.openxmlformats.org/drawingml/2006/main" noGrp="1"/>
+          </p:cNvSpPr>
+          <p:nvPr/>
+        </p:nvSpPr>
+        <p:spPr>
+          <a:xfrm xmlns:a="http://schemas.openxmlformats.org/drawingml/2006/main">
+            <a:off x="566928" y="2057400"/>
+            <a:ext cx="9507383" cy="1737360"/>
           </a:xfrm>
           <a:prstGeom xmlns:a="http://schemas.openxmlformats.org/drawingml/2006/main" prst="rect">
             <a:avLst/>
@@ -12687,441 +13504,37 @@
           <a:noFill xmlns:a="http://schemas.openxmlformats.org/drawingml/2006/main"/>
         </p:spPr>
         <p:txBody>
-          <a:bodyPr xmlns:a="http://schemas.openxmlformats.org/drawingml/2006/main" wrap="square" lIns="0" tIns="0" rIns="0" bIns="0" anchor="ctr"/>
-          <a:lstStyle xmlns:a="http://schemas.openxmlformats.org/drawingml/2006/main"/>
-          <a:p xmlns:a="http://schemas.openxmlformats.org/drawingml/2006/main">
-            <a:pPr marL="0" indent="0" algn="r">
-              <a:buNone/>
-            </a:pPr>
-            <a:r>
-              <a:rPr sz="850">
-                <a:solidFill>
-                  <a:srgbClr val="6B7C88"/>
-                </a:solidFill>
-                <a:latin typeface="Calibri"/>
-                <a:ea typeface="Calibri"/>
-                <a:cs typeface="Calibri"/>
-              </a:rPr>
-              <a:t>5</a:t>
-            </a:r>
-            <a:endParaRPr sz="850"/>
-          </a:p>
-        </p:txBody>
-      </p:sp>
-      <p:sp>
-        <p:nvSpPr>
-          <p:cNvPr id="12" name="Shape 9">
-            <a:extLst xmlns:a="http://schemas.openxmlformats.org/drawingml/2006/main">
-              <a:ext uri="{FF2B5EF4-FFF2-40B4-BE49-F238E27FC236}">
-                <a16:creationId xmlns:a16="http://schemas.microsoft.com/office/drawing/2014/main" id="{15DC0B06-039E-4496-B2A7-C8DF9C86CDE1}"/>
-              </a:ext>
-            </a:extLst>
-          </p:cNvPr>
-          <p:cNvSpPr>
-            <a:spLocks xmlns:a="http://schemas.openxmlformats.org/drawingml/2006/main" noGrp="1"/>
-          </p:cNvSpPr>
-          <p:nvPr/>
-        </p:nvSpPr>
-        <p:spPr>
-          <a:xfrm xmlns:a="http://schemas.openxmlformats.org/drawingml/2006/main">
-            <a:off x="566928" y="2395728"/>
-            <a:ext cx="5390388" cy="1783080"/>
-          </a:xfrm>
-          <a:prstGeom xmlns:a="http://schemas.openxmlformats.org/drawingml/2006/main" prst="rect">
-            <a:avLst/>
-          </a:prstGeom>
-          <a:solidFill xmlns:a="http://schemas.openxmlformats.org/drawingml/2006/main">
-            <a:srgbClr val="FFFFFF"/>
-          </a:solidFill>
-          <a:ln xmlns:a="http://schemas.openxmlformats.org/drawingml/2006/main" w="12700">
-            <a:solidFill>
-              <a:srgbClr val="D9E3EA"/>
-            </a:solidFill>
-            <a:prstDash val="solid"/>
-          </a:ln>
-          <a:effectLst xmlns:a="http://schemas.openxmlformats.org/drawingml/2006/main">
-            <a:outerShdw blurRad="88900" dist="38100" dir="8100000" sx="100000" sy="100000" kx="0" ky="0" algn="bl" rotWithShape="0">
-              <a:srgbClr val="1C2440">
-                <a:alpha val="13000"/>
-              </a:srgbClr>
-            </a:outerShdw>
-          </a:effectLst>
-        </p:spPr>
-      </p:sp>
-      <p:sp>
-        <p:nvSpPr>
-          <p:cNvPr id="13" name="Shape 10">
-            <a:extLst xmlns:a="http://schemas.openxmlformats.org/drawingml/2006/main">
-              <a:ext uri="{FF2B5EF4-FFF2-40B4-BE49-F238E27FC236}">
-                <a16:creationId xmlns:a16="http://schemas.microsoft.com/office/drawing/2014/main" id="{694D29F0-AC07-42D5-B51C-715CCA3AE4D6}"/>
-              </a:ext>
-            </a:extLst>
-          </p:cNvPr>
-          <p:cNvSpPr>
-            <a:spLocks xmlns:a="http://schemas.openxmlformats.org/drawingml/2006/main" noGrp="1"/>
-          </p:cNvSpPr>
-          <p:nvPr/>
-        </p:nvSpPr>
-        <p:spPr>
-          <a:xfrm xmlns:a="http://schemas.openxmlformats.org/drawingml/2006/main">
-            <a:off x="566928" y="2395728"/>
-            <a:ext cx="5390388" cy="457200"/>
-          </a:xfrm>
-          <a:prstGeom xmlns:a="http://schemas.openxmlformats.org/drawingml/2006/main" prst="rect">
-            <a:avLst/>
-          </a:prstGeom>
-          <a:solidFill xmlns:a="http://schemas.openxmlformats.org/drawingml/2006/main">
-            <a:srgbClr val="24343F"/>
-          </a:solidFill>
-        </p:spPr>
-      </p:sp>
-      <p:sp>
-        <p:nvSpPr>
-          <p:cNvPr id="14" name="Text 11">
-            <a:extLst xmlns:a="http://schemas.openxmlformats.org/drawingml/2006/main">
-              <a:ext uri="{FF2B5EF4-FFF2-40B4-BE49-F238E27FC236}">
-                <a16:creationId xmlns:a16="http://schemas.microsoft.com/office/drawing/2014/main" id="{244631B8-29AE-4DB6-A931-09470CB72C09}"/>
-              </a:ext>
-            </a:extLst>
-          </p:cNvPr>
-          <p:cNvSpPr>
-            <a:spLocks xmlns:a="http://schemas.openxmlformats.org/drawingml/2006/main" noGrp="1"/>
-          </p:cNvSpPr>
-          <p:nvPr/>
-        </p:nvSpPr>
-        <p:spPr>
-          <a:xfrm xmlns:a="http://schemas.openxmlformats.org/drawingml/2006/main">
-            <a:off x="768096" y="2395728"/>
-            <a:ext cx="5024628" cy="457200"/>
-          </a:xfrm>
-          <a:prstGeom xmlns:a="http://schemas.openxmlformats.org/drawingml/2006/main" prst="rect">
-            <a:avLst/>
-          </a:prstGeom>
-          <a:noFill xmlns:a="http://schemas.openxmlformats.org/drawingml/2006/main"/>
-        </p:spPr>
-        <p:txBody>
-          <a:bodyPr xmlns:a="http://schemas.openxmlformats.org/drawingml/2006/main" wrap="square" lIns="0" tIns="0" rIns="0" bIns="0" anchor="ctr"/>
+          <a:bodyPr xmlns:a="http://schemas.openxmlformats.org/drawingml/2006/main" wrap="square" anchor="t"/>
           <a:lstStyle xmlns:a="http://schemas.openxmlformats.org/drawingml/2006/main"/>
           <a:p xmlns:a="http://schemas.openxmlformats.org/drawingml/2006/main">
             <a:pPr marL="0" indent="0">
               <a:buNone/>
             </a:pPr>
             <a:r>
-              <a:rPr sz="1300" b="1" spc="200">
+              <a:rPr sz="1700">
                 <a:solidFill>
                   <a:srgbClr val="FFFFFF"/>
                 </a:solidFill>
-                <a:latin typeface="Calibri"/>
-                <a:ea typeface="Calibri"/>
-                <a:cs typeface="Calibri"/>
               </a:rPr>
-              <a:t>What I would build</a:t>
-            </a:r>
-            <a:endParaRPr sz="1300"/>
-          </a:p>
-        </p:txBody>
-      </p:sp>
-      <p:sp>
-        <p:nvSpPr>
-          <p:cNvPr id="15" name="Text 12">
-            <a:extLst xmlns:a="http://schemas.openxmlformats.org/drawingml/2006/main">
-              <a:ext uri="{FF2B5EF4-FFF2-40B4-BE49-F238E27FC236}">
-                <a16:creationId xmlns:a16="http://schemas.microsoft.com/office/drawing/2014/main" id="{64E438EE-50D0-4FAA-AC24-2E376FE211F9}"/>
-              </a:ext>
-            </a:extLst>
-          </p:cNvPr>
-          <p:cNvSpPr>
-            <a:spLocks xmlns:a="http://schemas.openxmlformats.org/drawingml/2006/main" noGrp="1"/>
-          </p:cNvSpPr>
-          <p:nvPr/>
-        </p:nvSpPr>
-        <p:spPr>
-          <a:xfrm xmlns:a="http://schemas.openxmlformats.org/drawingml/2006/main">
-            <a:off x="768096" y="2962656"/>
-            <a:ext cx="4988052" cy="1051560"/>
-          </a:xfrm>
-          <a:prstGeom xmlns:a="http://schemas.openxmlformats.org/drawingml/2006/main" prst="rect">
-            <a:avLst/>
-          </a:prstGeom>
-          <a:noFill xmlns:a="http://schemas.openxmlformats.org/drawingml/2006/main"/>
-        </p:spPr>
-        <p:txBody>
-          <a:bodyPr xmlns:a="http://schemas.openxmlformats.org/drawingml/2006/main" wrap="square" lIns="0" tIns="0" rIns="0" bIns="0" anchor="t"/>
-          <a:lstStyle xmlns:a="http://schemas.openxmlformats.org/drawingml/2006/main"/>
-          <a:p xmlns:a="http://schemas.openxmlformats.org/drawingml/2006/main">
-            <a:pPr marL="152400" indent="-152400">
-              <a:spcAft>
-                <a:spcPts val="600"/>
-              </a:spcAft>
-              <a:buSzPct val="100000"/>
-              <a:buChar char="•"/>
-            </a:pPr>
-            <a:r>
-              <a:rPr sz="1150">
-                <a:solidFill>
-                  <a:srgbClr val="1B2730"/>
-                </a:solidFill>
-                <a:latin typeface="Calibri"/>
-                <a:ea typeface="Calibri"/>
-                <a:cs typeface="Calibri"/>
-              </a:rPr>
-              <a:t>Complaint triage — reads a complaint, proposes a team, quotes its reason</a:t>
-            </a:r>
-            <a:endParaRPr sz="1150"/>
-          </a:p>
-          <a:p xmlns:a="http://schemas.openxmlformats.org/drawingml/2006/main">
-            <a:pPr marL="152400" indent="-152400">
-              <a:spcAft>
-                <a:spcPts val="600"/>
-              </a:spcAft>
-              <a:buSzPct val="100000"/>
-              <a:buChar char="•"/>
-            </a:pPr>
-            <a:r>
-              <a:rPr sz="1150">
-                <a:solidFill>
-                  <a:srgbClr val="1B2730"/>
-                </a:solidFill>
-                <a:latin typeface="Calibri"/>
-                <a:ea typeface="Calibri"/>
-                <a:cs typeface="Calibri"/>
-              </a:rPr>
-              <a:t>Anomaly flagging — every flag carries a reason, a human decides</a:t>
-            </a:r>
-            <a:endParaRPr sz="1150"/>
-          </a:p>
-          <a:p xmlns:a="http://schemas.openxmlformats.org/drawingml/2006/main">
-            <a:pPr marL="152400" indent="-152400">
-              <a:spcAft>
-                <a:spcPts val="600"/>
-              </a:spcAft>
-              <a:buSzPct val="100000"/>
-              <a:buChar char="•"/>
-            </a:pPr>
-            <a:r>
-              <a:rPr sz="1150">
-                <a:solidFill>
-                  <a:srgbClr val="1B2730"/>
-                </a:solidFill>
-                <a:latin typeface="Calibri"/>
-                <a:ea typeface="Calibri"/>
-                <a:cs typeface="Calibri"/>
-              </a:rPr>
-              <a:t>Reporting assistance — drafts what a person signs</a:t>
-            </a:r>
-            <a:endParaRPr sz="1150"/>
-          </a:p>
-        </p:txBody>
-      </p:sp>
-      <p:sp>
-        <p:nvSpPr>
-          <p:cNvPr id="16" name="Shape 13">
-            <a:extLst xmlns:a="http://schemas.openxmlformats.org/drawingml/2006/main">
-              <a:ext uri="{FF2B5EF4-FFF2-40B4-BE49-F238E27FC236}">
-                <a16:creationId xmlns:a16="http://schemas.microsoft.com/office/drawing/2014/main" id="{991E72CD-A0C5-4D13-8089-551BDF5C40D4}"/>
-              </a:ext>
-            </a:extLst>
-          </p:cNvPr>
-          <p:cNvSpPr>
-            <a:spLocks xmlns:a="http://schemas.openxmlformats.org/drawingml/2006/main" noGrp="1"/>
-          </p:cNvSpPr>
-          <p:nvPr/>
-        </p:nvSpPr>
-        <p:spPr>
-          <a:xfrm xmlns:a="http://schemas.openxmlformats.org/drawingml/2006/main">
-            <a:off x="6231636" y="2395728"/>
-            <a:ext cx="5390388" cy="1783080"/>
-          </a:xfrm>
-          <a:prstGeom xmlns:a="http://schemas.openxmlformats.org/drawingml/2006/main" prst="rect">
-            <a:avLst/>
-          </a:prstGeom>
-          <a:solidFill xmlns:a="http://schemas.openxmlformats.org/drawingml/2006/main">
-            <a:srgbClr val="FFFFFF"/>
-          </a:solidFill>
-          <a:ln xmlns:a="http://schemas.openxmlformats.org/drawingml/2006/main" w="12700">
-            <a:solidFill>
-              <a:srgbClr val="D9E3EA"/>
-            </a:solidFill>
-            <a:prstDash val="solid"/>
-          </a:ln>
-          <a:effectLst xmlns:a="http://schemas.openxmlformats.org/drawingml/2006/main">
-            <a:outerShdw blurRad="88900" dist="38100" dir="8100000" sx="100000" sy="100000" kx="0" ky="0" algn="bl" rotWithShape="0">
-              <a:srgbClr val="1C2440">
-                <a:alpha val="13000"/>
-              </a:srgbClr>
-            </a:outerShdw>
-          </a:effectLst>
-        </p:spPr>
-      </p:sp>
-      <p:sp>
-        <p:nvSpPr>
-          <p:cNvPr id="17" name="Shape 14">
-            <a:extLst xmlns:a="http://schemas.openxmlformats.org/drawingml/2006/main">
-              <a:ext uri="{FF2B5EF4-FFF2-40B4-BE49-F238E27FC236}">
-                <a16:creationId xmlns:a16="http://schemas.microsoft.com/office/drawing/2014/main" id="{FD05D0A3-36B2-4285-98C7-9234A95BA4DD}"/>
-              </a:ext>
-            </a:extLst>
-          </p:cNvPr>
-          <p:cNvSpPr>
-            <a:spLocks xmlns:a="http://schemas.openxmlformats.org/drawingml/2006/main" noGrp="1"/>
-          </p:cNvSpPr>
-          <p:nvPr/>
-        </p:nvSpPr>
-        <p:spPr>
-          <a:xfrm xmlns:a="http://schemas.openxmlformats.org/drawingml/2006/main">
-            <a:off x="6231636" y="2395728"/>
-            <a:ext cx="5390388" cy="457200"/>
-          </a:xfrm>
-          <a:prstGeom xmlns:a="http://schemas.openxmlformats.org/drawingml/2006/main" prst="rect">
-            <a:avLst/>
-          </a:prstGeom>
-          <a:solidFill xmlns:a="http://schemas.openxmlformats.org/drawingml/2006/main">
-            <a:srgbClr val="445A69"/>
-          </a:solidFill>
-        </p:spPr>
-      </p:sp>
-      <p:sp>
-        <p:nvSpPr>
-          <p:cNvPr id="18" name="Text 15">
-            <a:extLst xmlns:a="http://schemas.openxmlformats.org/drawingml/2006/main">
-              <a:ext uri="{FF2B5EF4-FFF2-40B4-BE49-F238E27FC236}">
-                <a16:creationId xmlns:a16="http://schemas.microsoft.com/office/drawing/2014/main" id="{1F7F83E1-8865-4A44-AEE0-D5A0D7EA3D4C}"/>
-              </a:ext>
-            </a:extLst>
-          </p:cNvPr>
-          <p:cNvSpPr>
-            <a:spLocks xmlns:a="http://schemas.openxmlformats.org/drawingml/2006/main" noGrp="1"/>
-          </p:cNvSpPr>
-          <p:nvPr/>
-        </p:nvSpPr>
-        <p:spPr>
-          <a:xfrm xmlns:a="http://schemas.openxmlformats.org/drawingml/2006/main">
-            <a:off x="6432804" y="2395728"/>
-            <a:ext cx="5024628" cy="457200"/>
-          </a:xfrm>
-          <a:prstGeom xmlns:a="http://schemas.openxmlformats.org/drawingml/2006/main" prst="rect">
-            <a:avLst/>
-          </a:prstGeom>
-          <a:noFill xmlns:a="http://schemas.openxmlformats.org/drawingml/2006/main"/>
-        </p:spPr>
-        <p:txBody>
-          <a:bodyPr xmlns:a="http://schemas.openxmlformats.org/drawingml/2006/main" wrap="square" lIns="0" tIns="0" rIns="0" bIns="0" anchor="ctr"/>
-          <a:lstStyle xmlns:a="http://schemas.openxmlformats.org/drawingml/2006/main"/>
-          <a:p xmlns:a="http://schemas.openxmlformats.org/drawingml/2006/main">
-            <a:pPr marL="0" indent="0">
-              <a:buNone/>
-            </a:pPr>
-            <a:r>
-              <a:rPr sz="1300" b="1" spc="200">
+              <a:t>Appendix for questions and discussion</a:t>
+            </a:r>
+            <a:r>
+              <a:rPr sz="1700">
                 <a:solidFill>
                   <a:srgbClr val="FFFFFF"/>
                 </a:solidFill>
-                <a:latin typeface="Calibri"/>
-                <a:ea typeface="Calibri"/>
-                <a:cs typeface="Calibri"/>
               </a:rPr>
-              <a:t>What I refuse to build</a:t>
-            </a:r>
-            <a:endParaRPr sz="1300"/>
-          </a:p>
-        </p:txBody>
-      </p:sp>
-      <p:sp>
-        <p:nvSpPr>
-          <p:cNvPr id="19" name="Text 16">
-            <a:extLst xmlns:a="http://schemas.openxmlformats.org/drawingml/2006/main">
-              <a:ext uri="{FF2B5EF4-FFF2-40B4-BE49-F238E27FC236}">
-                <a16:creationId xmlns:a16="http://schemas.microsoft.com/office/drawing/2014/main" id="{8111AB7C-FC00-4C8D-A5EC-0A01B128AA4A}"/>
-              </a:ext>
-            </a:extLst>
-          </p:cNvPr>
-          <p:cNvSpPr>
-            <a:spLocks xmlns:a="http://schemas.openxmlformats.org/drawingml/2006/main" noGrp="1"/>
-          </p:cNvSpPr>
-          <p:nvPr/>
-        </p:nvSpPr>
-        <p:spPr>
-          <a:xfrm xmlns:a="http://schemas.openxmlformats.org/drawingml/2006/main">
-            <a:off x="6432804" y="2962656"/>
-            <a:ext cx="4988052" cy="1051560"/>
-          </a:xfrm>
-          <a:prstGeom xmlns:a="http://schemas.openxmlformats.org/drawingml/2006/main" prst="rect">
-            <a:avLst/>
-          </a:prstGeom>
-          <a:noFill xmlns:a="http://schemas.openxmlformats.org/drawingml/2006/main"/>
-        </p:spPr>
-        <p:txBody>
-          <a:bodyPr xmlns:a="http://schemas.openxmlformats.org/drawingml/2006/main" wrap="square" lIns="0" tIns="0" rIns="0" bIns="0" anchor="t"/>
-          <a:lstStyle xmlns:a="http://schemas.openxmlformats.org/drawingml/2006/main"/>
-          <a:p xmlns:a="http://schemas.openxmlformats.org/drawingml/2006/main">
-            <a:pPr marL="152400" indent="-152400">
-              <a:spcAft>
-                <a:spcPts val="600"/>
-              </a:spcAft>
-              <a:buSzPct val="100000"/>
-              <a:buChar char="•"/>
-            </a:pPr>
-            <a:r>
-              <a:rPr sz="1150">
-                <a:solidFill>
-                  <a:srgbClr val="6B7C88"/>
-                </a:solidFill>
-                <a:latin typeface="Calibri"/>
-                <a:ea typeface="Calibri"/>
-                <a:cs typeface="Calibri"/>
-              </a:rPr>
-              <a:t>Customer-facing chatbot — fails in public, in your customer's voice</a:t>
-            </a:r>
-            <a:endParaRPr sz="1150"/>
-          </a:p>
-          <a:p xmlns:a="http://schemas.openxmlformats.org/drawingml/2006/main">
-            <a:pPr marL="152400" indent="-152400">
-              <a:spcAft>
-                <a:spcPts val="600"/>
-              </a:spcAft>
-              <a:buSzPct val="100000"/>
-              <a:buChar char="•"/>
-            </a:pPr>
-            <a:r>
-              <a:rPr sz="1150">
-                <a:solidFill>
-                  <a:srgbClr val="6B7C88"/>
-                </a:solidFill>
-                <a:latin typeface="Calibri"/>
-                <a:ea typeface="Calibri"/>
-                <a:cs typeface="Calibri"/>
-              </a:rPr>
-              <a:t>Credit scoring — Annex III high-risk under the EU AI Act</a:t>
-            </a:r>
-            <a:endParaRPr sz="1150"/>
-          </a:p>
-          <a:p xmlns:a="http://schemas.openxmlformats.org/drawingml/2006/main">
-            <a:pPr marL="152400" indent="-152400">
-              <a:spcAft>
-                <a:spcPts val="600"/>
-              </a:spcAft>
-              <a:buSzPct val="100000"/>
-              <a:buChar char="•"/>
-            </a:pPr>
-            <a:r>
-              <a:rPr sz="1150">
-                <a:solidFill>
-                  <a:srgbClr val="6B7C88"/>
-                </a:solidFill>
-                <a:latin typeface="Calibri"/>
-                <a:ea typeface="Calibri"/>
-                <a:cs typeface="Calibri"/>
-              </a:rPr>
-              <a:t>Predicting which complaints cost money — creates the wrong incentive</a:t>
-            </a:r>
-            <a:endParaRPr sz="1150"/>
+              <a:t>
+</a:t>
+            </a:r>
+            <a:endParaRPr sz="1700"/>
           </a:p>
         </p:txBody>
       </p:sp>
     </p:spTree>
     <p:extLst>
       <p:ext uri="{BB962C8B-B14F-4D97-AF65-F5344CB8AC3E}">
-        <p14:creationId xmlns:p14="http://schemas.microsoft.com/office/powerpoint/2010/main" val="1796699437"/>
+        <p14:creationId xmlns:p14="http://schemas.microsoft.com/office/powerpoint/2010/main" val="692659577"/>
       </p:ext>
     </p:extLst>
   </p:cSld>
@@ -13152,7 +13565,7 @@
           <p:cNvPr id="2" name="Text 0">
             <a:extLst xmlns:a="http://schemas.openxmlformats.org/drawingml/2006/main">
               <a:ext uri="{FF2B5EF4-FFF2-40B4-BE49-F238E27FC236}">
-                <a16:creationId xmlns:a16="http://schemas.microsoft.com/office/drawing/2014/main" id="{A402FA8B-A990-4FB0-9609-490958A5792F}"/>
+                <a16:creationId xmlns:a16="http://schemas.microsoft.com/office/drawing/2014/main" id="{544DCCB9-B7E3-4EAF-AA3D-4FB12FA69E74}"/>
               </a:ext>
             </a:extLst>
           </p:cNvPr>
@@ -13198,7 +13611,7 @@
           <p:cNvPr id="3" name="Shape 1">
             <a:extLst xmlns:a="http://schemas.openxmlformats.org/drawingml/2006/main">
               <a:ext uri="{FF2B5EF4-FFF2-40B4-BE49-F238E27FC236}">
-                <a16:creationId xmlns:a16="http://schemas.microsoft.com/office/drawing/2014/main" id="{E1CC9238-5826-4857-A64A-991A382B6421}"/>
+                <a16:creationId xmlns:a16="http://schemas.microsoft.com/office/drawing/2014/main" id="{AEC7D5AE-DE1E-403B-81E4-AC497F1FCA26}"/>
               </a:ext>
             </a:extLst>
           </p:cNvPr>
@@ -13222,14 +13635,14 @@
       </p:sp>
       <p:pic>
         <p:nvPicPr>
-          <p:cNvPr id="27" name="Image 0"/>
+          <p:cNvPr id="23" name="Image 0"/>
           <p:cNvPicPr>
             <a:picLocks xmlns:a="http://schemas.openxmlformats.org/drawingml/2006/main" noChangeAspect="1"/>
           </p:cNvPicPr>
           <p:nvPr/>
         </p:nvPicPr>
         <p:blipFill>
-          <a:blip xmlns:r="http://schemas.openxmlformats.org/officeDocument/2006/relationships" xmlns:a="http://schemas.openxmlformats.org/drawingml/2006/main" r:embed="Rd1952b5d32ef4c72"/>
+          <a:blip xmlns:r="http://schemas.openxmlformats.org/officeDocument/2006/relationships" xmlns:a="http://schemas.openxmlformats.org/drawingml/2006/main" r:embed="Rdd8a517d38d5495d"/>
           <a:stretch xmlns:a="http://schemas.openxmlformats.org/drawingml/2006/main">
             <a:fillRect l="0" t="0" r="0" b="0"/>
           </a:stretch>
@@ -13249,7 +13662,7 @@
           <p:cNvPr id="5" name="Text 2">
             <a:extLst xmlns:a="http://schemas.openxmlformats.org/drawingml/2006/main">
               <a:ext uri="{FF2B5EF4-FFF2-40B4-BE49-F238E27FC236}">
-                <a16:creationId xmlns:a16="http://schemas.microsoft.com/office/drawing/2014/main" id="{20D7D6FA-1141-4C84-BF26-C8EABC5200ED}"/>
+                <a16:creationId xmlns:a16="http://schemas.microsoft.com/office/drawing/2014/main" id="{67E72BE8-F43E-4D24-B2A6-03F66B693385}"/>
               </a:ext>
             </a:extLst>
           </p:cNvPr>
@@ -13284,7 +13697,7 @@
                 <a:ea typeface="Trebuchet MS"/>
                 <a:cs typeface="Trebuchet MS"/>
               </a:rPr>
-              <a:t>5 categories account for 46.1% of complaints</a:t>
+              <a:t>Why complaint triage comes first</a:t>
             </a:r>
             <a:endParaRPr sz="3000"/>
           </a:p>
@@ -13295,7 +13708,7 @@
           <p:cNvPr id="6" name="Shape 3">
             <a:extLst xmlns:a="http://schemas.openxmlformats.org/drawingml/2006/main">
               <a:ext uri="{FF2B5EF4-FFF2-40B4-BE49-F238E27FC236}">
-                <a16:creationId xmlns:a16="http://schemas.microsoft.com/office/drawing/2014/main" id="{C990284C-E931-42AD-A536-44CD12C90031}"/>
+                <a16:creationId xmlns:a16="http://schemas.microsoft.com/office/drawing/2014/main" id="{DD8CF70A-DAD5-4F1B-BB3E-BAB070F24627}"/>
               </a:ext>
             </a:extLst>
           </p:cNvPr>
@@ -13322,7 +13735,7 @@
           <p:cNvPr id="7" name="Shape 4">
             <a:extLst xmlns:a="http://schemas.openxmlformats.org/drawingml/2006/main">
               <a:ext uri="{FF2B5EF4-FFF2-40B4-BE49-F238E27FC236}">
-                <a16:creationId xmlns:a16="http://schemas.microsoft.com/office/drawing/2014/main" id="{FEA0F68C-DAC9-4AF3-947A-C164ABAD6278}"/>
+                <a16:creationId xmlns:a16="http://schemas.microsoft.com/office/drawing/2014/main" id="{8DC3CAC0-1162-4626-AC26-60AE6697F260}"/>
               </a:ext>
             </a:extLst>
           </p:cNvPr>
@@ -13349,7 +13762,7 @@
           <p:cNvPr id="8" name="Text 5">
             <a:extLst xmlns:a="http://schemas.openxmlformats.org/drawingml/2006/main">
               <a:ext uri="{FF2B5EF4-FFF2-40B4-BE49-F238E27FC236}">
-                <a16:creationId xmlns:a16="http://schemas.microsoft.com/office/drawing/2014/main" id="{F832347F-3061-4497-9112-1FBD766F69E5}"/>
+                <a16:creationId xmlns:a16="http://schemas.microsoft.com/office/drawing/2014/main" id="{46A1C3F7-6930-499C-B2FC-D74A3B6AC6EA}"/>
               </a:ext>
             </a:extLst>
           </p:cNvPr>
@@ -13395,29 +13808,7 @@
                 <a:ea typeface="Calibri"/>
                 <a:cs typeface="Calibri"/>
               </a:rPr>
-              <a:t>The model needs to be </a:t>
-            </a:r>
-            <a:r>
-              <a:rPr sz="1300">
-                <a:solidFill>
-                  <a:srgbClr val="1B2730"/>
-                </a:solidFill>
-                <a:latin typeface="Calibri"/>
-                <a:ea typeface="Calibri"/>
-                <a:cs typeface="Calibri"/>
-              </a:rPr>
-              <a:t>good at 5 things</a:t>
-            </a:r>
-            <a:r>
-              <a:rPr sz="1300">
-                <a:solidFill>
-                  <a:srgbClr val="1B2730"/>
-                </a:solidFill>
-                <a:latin typeface="Calibri"/>
-                <a:ea typeface="Calibri"/>
-                <a:cs typeface="Calibri"/>
-              </a:rPr>
-              <a:t> and honest about the rest.</a:t>
+              <a:t>Ranked by how visible the reasoning is, not by the size of the prize.</a:t>
             </a:r>
             <a:endParaRPr sz="1050"/>
           </a:p>
@@ -13428,7 +13819,7 @@
           <p:cNvPr id="9" name="Shape 6">
             <a:extLst xmlns:a="http://schemas.openxmlformats.org/drawingml/2006/main">
               <a:ext uri="{FF2B5EF4-FFF2-40B4-BE49-F238E27FC236}">
-                <a16:creationId xmlns:a16="http://schemas.microsoft.com/office/drawing/2014/main" id="{86ADBAB7-D347-4AA8-B8B1-ADFC66BC846F}"/>
+                <a16:creationId xmlns:a16="http://schemas.microsoft.com/office/drawing/2014/main" id="{E8F65825-3BBD-4C9F-A8C0-78078D1DFAD5}"/>
               </a:ext>
             </a:extLst>
           </p:cNvPr>
@@ -13459,7 +13850,7 @@
           <p:cNvPr id="10" name="Text 7">
             <a:extLst xmlns:a="http://schemas.openxmlformats.org/drawingml/2006/main">
               <a:ext uri="{FF2B5EF4-FFF2-40B4-BE49-F238E27FC236}">
-                <a16:creationId xmlns:a16="http://schemas.microsoft.com/office/drawing/2014/main" id="{B73E5D00-32A5-4F1D-B4CF-DD7752177B63}"/>
+                <a16:creationId xmlns:a16="http://schemas.microsoft.com/office/drawing/2014/main" id="{C098D8A9-E267-4F44-B0C0-65067944E2B7}"/>
               </a:ext>
             </a:extLst>
           </p:cNvPr>
@@ -13494,7 +13885,7 @@
           <p:cNvPr id="11" name="Text 8">
             <a:extLst xmlns:a="http://schemas.openxmlformats.org/drawingml/2006/main">
               <a:ext uri="{FF2B5EF4-FFF2-40B4-BE49-F238E27FC236}">
-                <a16:creationId xmlns:a16="http://schemas.microsoft.com/office/drawing/2014/main" id="{D8DC5310-3909-4C5C-A8BF-8644A1B1745B}"/>
+                <a16:creationId xmlns:a16="http://schemas.microsoft.com/office/drawing/2014/main" id="{EBBAC08B-6BB5-423F-AEB2-7C6CD21570CF}"/>
               </a:ext>
             </a:extLst>
           </p:cNvPr>
@@ -13529,7 +13920,7 @@
                 <a:ea typeface="Calibri"/>
                 <a:cs typeface="Calibri"/>
               </a:rPr>
-              <a:t>6</a:t>
+              <a:t>5</a:t>
             </a:r>
             <a:endParaRPr sz="850"/>
           </a:p>
@@ -13540,7 +13931,7 @@
           <p:cNvPr id="12" name="Shape 9">
             <a:extLst xmlns:a="http://schemas.openxmlformats.org/drawingml/2006/main">
               <a:ext uri="{FF2B5EF4-FFF2-40B4-BE49-F238E27FC236}">
-                <a16:creationId xmlns:a16="http://schemas.microsoft.com/office/drawing/2014/main" id="{51A692B8-546F-47CE-A328-11F0F436A13A}"/>
+                <a16:creationId xmlns:a16="http://schemas.microsoft.com/office/drawing/2014/main" id="{EA77C709-AB30-43DB-B5F3-71FADAA7BAF4}"/>
               </a:ext>
             </a:extLst>
           </p:cNvPr>
@@ -13552,7 +13943,47 @@
         <p:spPr>
           <a:xfrm xmlns:a="http://schemas.openxmlformats.org/drawingml/2006/main">
             <a:off x="566928" y="2395728"/>
-            <a:ext cx="6411956" cy="329184"/>
+            <a:ext cx="5390388" cy="1783080"/>
+          </a:xfrm>
+          <a:prstGeom xmlns:a="http://schemas.openxmlformats.org/drawingml/2006/main" prst="rect">
+            <a:avLst/>
+          </a:prstGeom>
+          <a:solidFill xmlns:a="http://schemas.openxmlformats.org/drawingml/2006/main">
+            <a:srgbClr val="FFFFFF"/>
+          </a:solidFill>
+          <a:ln xmlns:a="http://schemas.openxmlformats.org/drawingml/2006/main" w="12700">
+            <a:solidFill>
+              <a:srgbClr val="D9E3EA"/>
+            </a:solidFill>
+            <a:prstDash val="solid"/>
+          </a:ln>
+          <a:effectLst xmlns:a="http://schemas.openxmlformats.org/drawingml/2006/main">
+            <a:outerShdw blurRad="88900" dist="38100" dir="8100000" sx="100000" sy="100000" kx="0" ky="0" algn="bl" rotWithShape="0">
+              <a:srgbClr val="1C2440">
+                <a:alpha val="13000"/>
+              </a:srgbClr>
+            </a:outerShdw>
+          </a:effectLst>
+        </p:spPr>
+      </p:sp>
+      <p:sp>
+        <p:nvSpPr>
+          <p:cNvPr id="13" name="Shape 10">
+            <a:extLst xmlns:a="http://schemas.openxmlformats.org/drawingml/2006/main">
+              <a:ext uri="{FF2B5EF4-FFF2-40B4-BE49-F238E27FC236}">
+                <a16:creationId xmlns:a16="http://schemas.microsoft.com/office/drawing/2014/main" id="{004AF0A0-CB9C-4BB0-81F1-ECFDA81B9531}"/>
+              </a:ext>
+            </a:extLst>
+          </p:cNvPr>
+          <p:cNvSpPr>
+            <a:spLocks xmlns:a="http://schemas.openxmlformats.org/drawingml/2006/main" noGrp="1"/>
+          </p:cNvSpPr>
+          <p:nvPr/>
+        </p:nvSpPr>
+        <p:spPr>
+          <a:xfrm xmlns:a="http://schemas.openxmlformats.org/drawingml/2006/main">
+            <a:off x="566928" y="2395728"/>
+            <a:ext cx="5390388" cy="457200"/>
           </a:xfrm>
           <a:prstGeom xmlns:a="http://schemas.openxmlformats.org/drawingml/2006/main" prst="rect">
             <a:avLst/>
@@ -13564,22 +13995,22 @@
       </p:sp>
       <p:sp>
         <p:nvSpPr>
-          <p:cNvPr id="13" name="Text 10">
-            <a:extLst xmlns:a="http://schemas.openxmlformats.org/drawingml/2006/main">
-              <a:ext uri="{FF2B5EF4-FFF2-40B4-BE49-F238E27FC236}">
-                <a16:creationId xmlns:a16="http://schemas.microsoft.com/office/drawing/2014/main" id="{819957CF-33C0-4128-9E91-0458D2B28D0D}"/>
-              </a:ext>
-            </a:extLst>
-          </p:cNvPr>
-          <p:cNvSpPr>
-            <a:spLocks xmlns:a="http://schemas.openxmlformats.org/drawingml/2006/main" noGrp="1"/>
-          </p:cNvSpPr>
-          <p:nvPr/>
-        </p:nvSpPr>
-        <p:spPr>
-          <a:xfrm xmlns:a="http://schemas.openxmlformats.org/drawingml/2006/main">
-            <a:off x="713232" y="2395728"/>
-            <a:ext cx="6137636" cy="329184"/>
+          <p:cNvPr id="14" name="Text 11">
+            <a:extLst xmlns:a="http://schemas.openxmlformats.org/drawingml/2006/main">
+              <a:ext uri="{FF2B5EF4-FFF2-40B4-BE49-F238E27FC236}">
+                <a16:creationId xmlns:a16="http://schemas.microsoft.com/office/drawing/2014/main" id="{ABFDA9F5-F07E-48DC-97D9-8269ACE1118C}"/>
+              </a:ext>
+            </a:extLst>
+          </p:cNvPr>
+          <p:cNvSpPr>
+            <a:spLocks xmlns:a="http://schemas.openxmlformats.org/drawingml/2006/main" noGrp="1"/>
+          </p:cNvSpPr>
+          <p:nvPr/>
+        </p:nvSpPr>
+        <p:spPr>
+          <a:xfrm xmlns:a="http://schemas.openxmlformats.org/drawingml/2006/main">
+            <a:off x="768096" y="2395728"/>
+            <a:ext cx="5024628" cy="457200"/>
           </a:xfrm>
           <a:prstGeom xmlns:a="http://schemas.openxmlformats.org/drawingml/2006/main" prst="rect">
             <a:avLst/>
@@ -13594,7 +14025,7 @@
               <a:buNone/>
             </a:pPr>
             <a:r>
-              <a:rPr sz="1050">
+              <a:rPr sz="1300" b="1" spc="200">
                 <a:solidFill>
                   <a:srgbClr val="FFFFFF"/>
                 </a:solidFill>
@@ -13602,59 +14033,189 @@
                 <a:ea typeface="Calibri"/>
                 <a:cs typeface="Calibri"/>
               </a:rPr>
-              <a:t>Managing an account  —  19.9%</a:t>
-            </a:r>
-            <a:endParaRPr sz="1050"/>
+              <a:t>3 use cases assessed</a:t>
+            </a:r>
+            <a:endParaRPr sz="1300"/>
           </a:p>
         </p:txBody>
       </p:sp>
       <p:sp>
         <p:nvSpPr>
-          <p:cNvPr id="14" name="Shape 11">
-            <a:extLst xmlns:a="http://schemas.openxmlformats.org/drawingml/2006/main">
-              <a:ext uri="{FF2B5EF4-FFF2-40B4-BE49-F238E27FC236}">
-                <a16:creationId xmlns:a16="http://schemas.microsoft.com/office/drawing/2014/main" id="{8A56EF1E-31D0-4582-98E2-56FB701E0B4E}"/>
-              </a:ext>
-            </a:extLst>
-          </p:cNvPr>
-          <p:cNvSpPr>
-            <a:spLocks xmlns:a="http://schemas.openxmlformats.org/drawingml/2006/main" noGrp="1"/>
-          </p:cNvSpPr>
-          <p:nvPr/>
-        </p:nvSpPr>
-        <p:spPr>
-          <a:xfrm xmlns:a="http://schemas.openxmlformats.org/drawingml/2006/main">
-            <a:off x="676656" y="2793492"/>
-            <a:ext cx="6302228" cy="329184"/>
+          <p:cNvPr id="15" name="Text 12">
+            <a:extLst xmlns:a="http://schemas.openxmlformats.org/drawingml/2006/main">
+              <a:ext uri="{FF2B5EF4-FFF2-40B4-BE49-F238E27FC236}">
+                <a16:creationId xmlns:a16="http://schemas.microsoft.com/office/drawing/2014/main" id="{7293C100-FFFD-4654-9DE4-2C40B8A85FB5}"/>
+              </a:ext>
+            </a:extLst>
+          </p:cNvPr>
+          <p:cNvSpPr>
+            <a:spLocks xmlns:a="http://schemas.openxmlformats.org/drawingml/2006/main" noGrp="1"/>
+          </p:cNvSpPr>
+          <p:nvPr/>
+        </p:nvSpPr>
+        <p:spPr>
+          <a:xfrm xmlns:a="http://schemas.openxmlformats.org/drawingml/2006/main">
+            <a:off x="768096" y="2962656"/>
+            <a:ext cx="4988052" cy="1051560"/>
+          </a:xfrm>
+          <a:prstGeom xmlns:a="http://schemas.openxmlformats.org/drawingml/2006/main" prst="rect">
+            <a:avLst/>
+          </a:prstGeom>
+          <a:noFill xmlns:a="http://schemas.openxmlformats.org/drawingml/2006/main"/>
+        </p:spPr>
+        <p:txBody>
+          <a:bodyPr xmlns:a="http://schemas.openxmlformats.org/drawingml/2006/main" wrap="square" lIns="0" tIns="0" rIns="0" bIns="0" anchor="t"/>
+          <a:lstStyle xmlns:a="http://schemas.openxmlformats.org/drawingml/2006/main"/>
+          <a:p xmlns:a="http://schemas.openxmlformats.org/drawingml/2006/main">
+            <a:pPr marL="152400" indent="-152400">
+              <a:spcAft>
+                <a:spcPts val="600"/>
+              </a:spcAft>
+              <a:buSzPct val="100000"/>
+              <a:buChar char="•"/>
+            </a:pPr>
+            <a:r>
+              <a:rPr sz="1150">
+                <a:solidFill>
+                  <a:srgbClr val="1B2730"/>
+                </a:solidFill>
+                <a:latin typeface="Calibri"/>
+                <a:ea typeface="Calibri"/>
+                <a:cs typeface="Calibri"/>
+              </a:rPr>
+              <a:t>Complaint triage — proposed for Phase 0 and Phase 1</a:t>
+            </a:r>
+            <a:endParaRPr sz="1150"/>
+          </a:p>
+          <a:p xmlns:a="http://schemas.openxmlformats.org/drawingml/2006/main">
+            <a:pPr marL="152400" indent="-152400">
+              <a:spcAft>
+                <a:spcPts val="600"/>
+              </a:spcAft>
+              <a:buSzPct val="100000"/>
+              <a:buChar char="•"/>
+            </a:pPr>
+            <a:r>
+              <a:rPr sz="1150">
+                <a:solidFill>
+                  <a:srgbClr val="1B2730"/>
+                </a:solidFill>
+                <a:latin typeface="Calibri"/>
+                <a:ea typeface="Calibri"/>
+                <a:cs typeface="Calibri"/>
+              </a:rPr>
+              <a:t>Anomaly flagging — later option; your investigator reviews each flag</a:t>
+            </a:r>
+            <a:endParaRPr sz="1150"/>
+          </a:p>
+          <a:p xmlns:a="http://schemas.openxmlformats.org/drawingml/2006/main">
+            <a:pPr marL="152400" indent="-152400">
+              <a:spcAft>
+                <a:spcPts val="600"/>
+              </a:spcAft>
+              <a:buSzPct val="100000"/>
+              <a:buChar char="•"/>
+            </a:pPr>
+            <a:r>
+              <a:rPr sz="1150">
+                <a:solidFill>
+                  <a:srgbClr val="1B2730"/>
+                </a:solidFill>
+                <a:latin typeface="Calibri"/>
+                <a:ea typeface="Calibri"/>
+                <a:cs typeface="Calibri"/>
+              </a:rPr>
+              <a:t>Reporting assistance — later option; a named employee approves output</a:t>
+            </a:r>
+            <a:endParaRPr sz="1150"/>
+          </a:p>
+        </p:txBody>
+      </p:sp>
+      <p:sp>
+        <p:nvSpPr>
+          <p:cNvPr id="16" name="Shape 13">
+            <a:extLst xmlns:a="http://schemas.openxmlformats.org/drawingml/2006/main">
+              <a:ext uri="{FF2B5EF4-FFF2-40B4-BE49-F238E27FC236}">
+                <a16:creationId xmlns:a16="http://schemas.microsoft.com/office/drawing/2014/main" id="{C3131531-AB17-45D6-8D65-E8E5B1D814AA}"/>
+              </a:ext>
+            </a:extLst>
+          </p:cNvPr>
+          <p:cNvSpPr>
+            <a:spLocks xmlns:a="http://schemas.openxmlformats.org/drawingml/2006/main" noGrp="1"/>
+          </p:cNvSpPr>
+          <p:nvPr/>
+        </p:nvSpPr>
+        <p:spPr>
+          <a:xfrm xmlns:a="http://schemas.openxmlformats.org/drawingml/2006/main">
+            <a:off x="6231636" y="2395728"/>
+            <a:ext cx="5390388" cy="1783080"/>
           </a:xfrm>
           <a:prstGeom xmlns:a="http://schemas.openxmlformats.org/drawingml/2006/main" prst="rect">
             <a:avLst/>
           </a:prstGeom>
           <a:solidFill xmlns:a="http://schemas.openxmlformats.org/drawingml/2006/main">
-            <a:srgbClr val="24343F">
-              <a:alpha val="94000"/>
-            </a:srgbClr>
+            <a:srgbClr val="FFFFFF"/>
           </a:solidFill>
-        </p:spPr>
-      </p:sp>
-      <p:sp>
-        <p:nvSpPr>
-          <p:cNvPr id="15" name="Text 12">
-            <a:extLst xmlns:a="http://schemas.openxmlformats.org/drawingml/2006/main">
-              <a:ext uri="{FF2B5EF4-FFF2-40B4-BE49-F238E27FC236}">
-                <a16:creationId xmlns:a16="http://schemas.microsoft.com/office/drawing/2014/main" id="{74374469-6E9D-479C-B3E6-7F183035E587}"/>
-              </a:ext>
-            </a:extLst>
-          </p:cNvPr>
-          <p:cNvSpPr>
-            <a:spLocks xmlns:a="http://schemas.openxmlformats.org/drawingml/2006/main" noGrp="1"/>
-          </p:cNvSpPr>
-          <p:nvPr/>
-        </p:nvSpPr>
-        <p:spPr>
-          <a:xfrm xmlns:a="http://schemas.openxmlformats.org/drawingml/2006/main">
-            <a:off x="822960" y="2793492"/>
-            <a:ext cx="6027908" cy="329184"/>
+          <a:ln xmlns:a="http://schemas.openxmlformats.org/drawingml/2006/main" w="12700">
+            <a:solidFill>
+              <a:srgbClr val="D9E3EA"/>
+            </a:solidFill>
+            <a:prstDash val="solid"/>
+          </a:ln>
+          <a:effectLst xmlns:a="http://schemas.openxmlformats.org/drawingml/2006/main">
+            <a:outerShdw blurRad="88900" dist="38100" dir="8100000" sx="100000" sy="100000" kx="0" ky="0" algn="bl" rotWithShape="0">
+              <a:srgbClr val="1C2440">
+                <a:alpha val="13000"/>
+              </a:srgbClr>
+            </a:outerShdw>
+          </a:effectLst>
+        </p:spPr>
+      </p:sp>
+      <p:sp>
+        <p:nvSpPr>
+          <p:cNvPr id="17" name="Shape 14">
+            <a:extLst xmlns:a="http://schemas.openxmlformats.org/drawingml/2006/main">
+              <a:ext uri="{FF2B5EF4-FFF2-40B4-BE49-F238E27FC236}">
+                <a16:creationId xmlns:a16="http://schemas.microsoft.com/office/drawing/2014/main" id="{8A4AD0F1-C1B7-4067-9FAB-1217DDA133EA}"/>
+              </a:ext>
+            </a:extLst>
+          </p:cNvPr>
+          <p:cNvSpPr>
+            <a:spLocks xmlns:a="http://schemas.openxmlformats.org/drawingml/2006/main" noGrp="1"/>
+          </p:cNvSpPr>
+          <p:nvPr/>
+        </p:nvSpPr>
+        <p:spPr>
+          <a:xfrm xmlns:a="http://schemas.openxmlformats.org/drawingml/2006/main">
+            <a:off x="6231636" y="2395728"/>
+            <a:ext cx="5390388" cy="457200"/>
+          </a:xfrm>
+          <a:prstGeom xmlns:a="http://schemas.openxmlformats.org/drawingml/2006/main" prst="rect">
+            <a:avLst/>
+          </a:prstGeom>
+          <a:solidFill xmlns:a="http://schemas.openxmlformats.org/drawingml/2006/main">
+            <a:srgbClr val="445A69"/>
+          </a:solidFill>
+        </p:spPr>
+      </p:sp>
+      <p:sp>
+        <p:nvSpPr>
+          <p:cNvPr id="18" name="Text 15">
+            <a:extLst xmlns:a="http://schemas.openxmlformats.org/drawingml/2006/main">
+              <a:ext uri="{FF2B5EF4-FFF2-40B4-BE49-F238E27FC236}">
+                <a16:creationId xmlns:a16="http://schemas.microsoft.com/office/drawing/2014/main" id="{BBC6DBF5-0942-45CD-96A0-C70E8D840C25}"/>
+              </a:ext>
+            </a:extLst>
+          </p:cNvPr>
+          <p:cNvSpPr>
+            <a:spLocks xmlns:a="http://schemas.openxmlformats.org/drawingml/2006/main" noGrp="1"/>
+          </p:cNvSpPr>
+          <p:nvPr/>
+        </p:nvSpPr>
+        <p:spPr>
+          <a:xfrm xmlns:a="http://schemas.openxmlformats.org/drawingml/2006/main">
+            <a:off x="6432804" y="2395728"/>
+            <a:ext cx="5024628" cy="457200"/>
           </a:xfrm>
           <a:prstGeom xmlns:a="http://schemas.openxmlformats.org/drawingml/2006/main" prst="rect">
             <a:avLst/>
@@ -13669,7 +14230,7 @@
               <a:buNone/>
             </a:pPr>
             <a:r>
-              <a:rPr sz="1050">
+              <a:rPr sz="1300" b="1" spc="200">
                 <a:solidFill>
                   <a:srgbClr val="FFFFFF"/>
                 </a:solidFill>
@@ -13677,59 +14238,30 @@
                 <a:ea typeface="Calibri"/>
                 <a:cs typeface="Calibri"/>
               </a:rPr>
-              <a:t>Problem with a purchase on your statement  —  11.2%</a:t>
-            </a:r>
-            <a:endParaRPr sz="1050"/>
+              <a:t>2 excluded uses + 1 guardrail</a:t>
+            </a:r>
+            <a:endParaRPr sz="1300"/>
           </a:p>
         </p:txBody>
       </p:sp>
       <p:sp>
         <p:nvSpPr>
-          <p:cNvPr id="16" name="Shape 13">
-            <a:extLst xmlns:a="http://schemas.openxmlformats.org/drawingml/2006/main">
-              <a:ext uri="{FF2B5EF4-FFF2-40B4-BE49-F238E27FC236}">
-                <a16:creationId xmlns:a16="http://schemas.microsoft.com/office/drawing/2014/main" id="{A67A2B8C-E8D1-4838-876E-FB5DF351AFE8}"/>
-              </a:ext>
-            </a:extLst>
-          </p:cNvPr>
-          <p:cNvSpPr>
-            <a:spLocks xmlns:a="http://schemas.openxmlformats.org/drawingml/2006/main" noGrp="1"/>
-          </p:cNvSpPr>
-          <p:nvPr/>
-        </p:nvSpPr>
-        <p:spPr>
-          <a:xfrm xmlns:a="http://schemas.openxmlformats.org/drawingml/2006/main">
-            <a:off x="786384" y="3191256"/>
-            <a:ext cx="6192500" cy="329184"/>
-          </a:xfrm>
-          <a:prstGeom xmlns:a="http://schemas.openxmlformats.org/drawingml/2006/main" prst="rect">
-            <a:avLst/>
-          </a:prstGeom>
-          <a:solidFill xmlns:a="http://schemas.openxmlformats.org/drawingml/2006/main">
-            <a:srgbClr val="24343F">
-              <a:alpha val="88000"/>
-            </a:srgbClr>
-          </a:solidFill>
-        </p:spPr>
-      </p:sp>
-      <p:sp>
-        <p:nvSpPr>
-          <p:cNvPr id="17" name="Text 14">
-            <a:extLst xmlns:a="http://schemas.openxmlformats.org/drawingml/2006/main">
-              <a:ext uri="{FF2B5EF4-FFF2-40B4-BE49-F238E27FC236}">
-                <a16:creationId xmlns:a16="http://schemas.microsoft.com/office/drawing/2014/main" id="{A0DB4522-006F-4102-9983-0C98BCE4F1E4}"/>
-              </a:ext>
-            </a:extLst>
-          </p:cNvPr>
-          <p:cNvSpPr>
-            <a:spLocks xmlns:a="http://schemas.openxmlformats.org/drawingml/2006/main" noGrp="1"/>
-          </p:cNvSpPr>
-          <p:nvPr/>
-        </p:nvSpPr>
-        <p:spPr>
-          <a:xfrm xmlns:a="http://schemas.openxmlformats.org/drawingml/2006/main">
-            <a:off x="932688" y="3191256"/>
-            <a:ext cx="5918180" cy="329184"/>
+          <p:cNvPr id="19" name="Text 16">
+            <a:extLst xmlns:a="http://schemas.openxmlformats.org/drawingml/2006/main">
+              <a:ext uri="{FF2B5EF4-FFF2-40B4-BE49-F238E27FC236}">
+                <a16:creationId xmlns:a16="http://schemas.microsoft.com/office/drawing/2014/main" id="{D01D1EF2-03D9-4A3C-9320-19B9A0E8AEC3}"/>
+              </a:ext>
+            </a:extLst>
+          </p:cNvPr>
+          <p:cNvSpPr>
+            <a:spLocks xmlns:a="http://schemas.openxmlformats.org/drawingml/2006/main" noGrp="1"/>
+          </p:cNvSpPr>
+          <p:nvPr/>
+        </p:nvSpPr>
+        <p:spPr>
+          <a:xfrm xmlns:a="http://schemas.openxmlformats.org/drawingml/2006/main">
+            <a:off x="6432804" y="2962656"/>
+            <a:ext cx="4988052" cy="1051560"/>
           </a:xfrm>
           <a:prstGeom xmlns:a="http://schemas.openxmlformats.org/drawingml/2006/main" prst="rect">
             <a:avLst/>
@@ -13737,279 +14269,77 @@
           <a:noFill xmlns:a="http://schemas.openxmlformats.org/drawingml/2006/main"/>
         </p:spPr>
         <p:txBody>
-          <a:bodyPr xmlns:a="http://schemas.openxmlformats.org/drawingml/2006/main" wrap="square" lIns="0" tIns="0" rIns="0" bIns="0" anchor="ctr"/>
+          <a:bodyPr xmlns:a="http://schemas.openxmlformats.org/drawingml/2006/main" wrap="square" lIns="0" tIns="0" rIns="0" bIns="0" anchor="t"/>
           <a:lstStyle xmlns:a="http://schemas.openxmlformats.org/drawingml/2006/main"/>
           <a:p xmlns:a="http://schemas.openxmlformats.org/drawingml/2006/main">
-            <a:pPr marL="0" indent="0">
-              <a:buNone/>
+            <a:pPr marL="152400" indent="-152400">
+              <a:spcAft>
+                <a:spcPts val="600"/>
+              </a:spcAft>
+              <a:buSzPct val="100000"/>
+              <a:buChar char="•"/>
             </a:pPr>
             <a:r>
-              <a:rPr sz="1050">
+              <a:rPr sz="1150">
                 <a:solidFill>
-                  <a:srgbClr val="FFFFFF"/>
+                  <a:srgbClr val="6B7C88"/>
                 </a:solidFill>
                 <a:latin typeface="Calibri"/>
                 <a:ea typeface="Calibri"/>
                 <a:cs typeface="Calibri"/>
               </a:rPr>
-              <a:t>A lender or company charging your account  —  5.6%</a:t>
-            </a:r>
-            <a:endParaRPr sz="1050"/>
-          </a:p>
-        </p:txBody>
-      </p:sp>
-      <p:sp>
-        <p:nvSpPr>
-          <p:cNvPr id="18" name="Shape 15">
-            <a:extLst xmlns:a="http://schemas.openxmlformats.org/drawingml/2006/main">
-              <a:ext uri="{FF2B5EF4-FFF2-40B4-BE49-F238E27FC236}">
-                <a16:creationId xmlns:a16="http://schemas.microsoft.com/office/drawing/2014/main" id="{EA5AD339-25EA-49E7-844B-61179B6F1DC4}"/>
-              </a:ext>
-            </a:extLst>
-          </p:cNvPr>
-          <p:cNvSpPr>
-            <a:spLocks xmlns:a="http://schemas.openxmlformats.org/drawingml/2006/main" noGrp="1"/>
-          </p:cNvSpPr>
-          <p:nvPr/>
-        </p:nvSpPr>
-        <p:spPr>
-          <a:xfrm xmlns:a="http://schemas.openxmlformats.org/drawingml/2006/main">
-            <a:off x="896112" y="3589020"/>
-            <a:ext cx="6082772" cy="329184"/>
-          </a:xfrm>
-          <a:prstGeom xmlns:a="http://schemas.openxmlformats.org/drawingml/2006/main" prst="rect">
-            <a:avLst/>
-          </a:prstGeom>
-          <a:solidFill xmlns:a="http://schemas.openxmlformats.org/drawingml/2006/main">
-            <a:srgbClr val="24343F">
-              <a:alpha val="82000"/>
-            </a:srgbClr>
-          </a:solidFill>
-        </p:spPr>
-      </p:sp>
-      <p:sp>
-        <p:nvSpPr>
-          <p:cNvPr id="19" name="Text 16">
-            <a:extLst xmlns:a="http://schemas.openxmlformats.org/drawingml/2006/main">
-              <a:ext uri="{FF2B5EF4-FFF2-40B4-BE49-F238E27FC236}">
-                <a16:creationId xmlns:a16="http://schemas.microsoft.com/office/drawing/2014/main" id="{CB0F7237-C2F7-47C9-801D-968E9E606FBE}"/>
-              </a:ext>
-            </a:extLst>
-          </p:cNvPr>
-          <p:cNvSpPr>
-            <a:spLocks xmlns:a="http://schemas.openxmlformats.org/drawingml/2006/main" noGrp="1"/>
-          </p:cNvSpPr>
-          <p:nvPr/>
-        </p:nvSpPr>
-        <p:spPr>
-          <a:xfrm xmlns:a="http://schemas.openxmlformats.org/drawingml/2006/main">
-            <a:off x="1042416" y="3589020"/>
-            <a:ext cx="5808452" cy="329184"/>
-          </a:xfrm>
-          <a:prstGeom xmlns:a="http://schemas.openxmlformats.org/drawingml/2006/main" prst="rect">
-            <a:avLst/>
-          </a:prstGeom>
-          <a:noFill xmlns:a="http://schemas.openxmlformats.org/drawingml/2006/main"/>
-        </p:spPr>
-        <p:txBody>
-          <a:bodyPr xmlns:a="http://schemas.openxmlformats.org/drawingml/2006/main" wrap="square" lIns="0" tIns="0" rIns="0" bIns="0" anchor="ctr"/>
-          <a:lstStyle xmlns:a="http://schemas.openxmlformats.org/drawingml/2006/main"/>
-          <a:p xmlns:a="http://schemas.openxmlformats.org/drawingml/2006/main">
-            <a:pPr marL="0" indent="0">
-              <a:buNone/>
+              <a:t>Customer-facing chatbot — excluded; public errors use your firm's voice</a:t>
+            </a:r>
+            <a:endParaRPr sz="1150"/>
+          </a:p>
+          <a:p xmlns:a="http://schemas.openxmlformats.org/drawingml/2006/main">
+            <a:pPr marL="152400" indent="-152400">
+              <a:spcAft>
+                <a:spcPts val="600"/>
+              </a:spcAft>
+              <a:buSzPct val="100000"/>
+              <a:buChar char="•"/>
             </a:pPr>
             <a:r>
-              <a:rPr sz="1050">
+              <a:rPr sz="1150">
                 <a:solidFill>
-                  <a:srgbClr val="FFFFFF"/>
+                  <a:srgbClr val="6B7C88"/>
                 </a:solidFill>
                 <a:latin typeface="Calibri"/>
                 <a:ea typeface="Calibri"/>
                 <a:cs typeface="Calibri"/>
               </a:rPr>
-              <a:t>Fraud or scam  —  4.8%</a:t>
-            </a:r>
-            <a:endParaRPr sz="1050"/>
-          </a:p>
-        </p:txBody>
-      </p:sp>
-      <p:sp>
-        <p:nvSpPr>
-          <p:cNvPr id="20" name="Shape 17">
-            <a:extLst xmlns:a="http://schemas.openxmlformats.org/drawingml/2006/main">
-              <a:ext uri="{FF2B5EF4-FFF2-40B4-BE49-F238E27FC236}">
-                <a16:creationId xmlns:a16="http://schemas.microsoft.com/office/drawing/2014/main" id="{88A1BD88-BBC2-4875-BA35-7C457D01FF47}"/>
-              </a:ext>
-            </a:extLst>
-          </p:cNvPr>
-          <p:cNvSpPr>
-            <a:spLocks xmlns:a="http://schemas.openxmlformats.org/drawingml/2006/main" noGrp="1"/>
-          </p:cNvSpPr>
-          <p:nvPr/>
-        </p:nvSpPr>
-        <p:spPr>
-          <a:xfrm xmlns:a="http://schemas.openxmlformats.org/drawingml/2006/main">
-            <a:off x="1005840" y="3986784"/>
-            <a:ext cx="5973044" cy="329184"/>
-          </a:xfrm>
-          <a:prstGeom xmlns:a="http://schemas.openxmlformats.org/drawingml/2006/main" prst="rect">
-            <a:avLst/>
-          </a:prstGeom>
-          <a:solidFill xmlns:a="http://schemas.openxmlformats.org/drawingml/2006/main">
-            <a:srgbClr val="24343F">
-              <a:alpha val="76000"/>
-            </a:srgbClr>
-          </a:solidFill>
-        </p:spPr>
-      </p:sp>
-      <p:sp>
-        <p:nvSpPr>
-          <p:cNvPr id="21" name="Text 18">
-            <a:extLst xmlns:a="http://schemas.openxmlformats.org/drawingml/2006/main">
-              <a:ext uri="{FF2B5EF4-FFF2-40B4-BE49-F238E27FC236}">
-                <a16:creationId xmlns:a16="http://schemas.microsoft.com/office/drawing/2014/main" id="{6375E24B-79CB-487E-AF82-739D03657779}"/>
-              </a:ext>
-            </a:extLst>
-          </p:cNvPr>
-          <p:cNvSpPr>
-            <a:spLocks xmlns:a="http://schemas.openxmlformats.org/drawingml/2006/main" noGrp="1"/>
-          </p:cNvSpPr>
-          <p:nvPr/>
-        </p:nvSpPr>
-        <p:spPr>
-          <a:xfrm xmlns:a="http://schemas.openxmlformats.org/drawingml/2006/main">
-            <a:off x="1152144" y="3986784"/>
-            <a:ext cx="5698724" cy="329184"/>
-          </a:xfrm>
-          <a:prstGeom xmlns:a="http://schemas.openxmlformats.org/drawingml/2006/main" prst="rect">
-            <a:avLst/>
-          </a:prstGeom>
-          <a:noFill xmlns:a="http://schemas.openxmlformats.org/drawingml/2006/main"/>
-        </p:spPr>
-        <p:txBody>
-          <a:bodyPr xmlns:a="http://schemas.openxmlformats.org/drawingml/2006/main" wrap="square" lIns="0" tIns="0" rIns="0" bIns="0" anchor="ctr"/>
-          <a:lstStyle xmlns:a="http://schemas.openxmlformats.org/drawingml/2006/main"/>
-          <a:p xmlns:a="http://schemas.openxmlformats.org/drawingml/2006/main">
-            <a:pPr marL="0" indent="0">
-              <a:buNone/>
+              <a:t>Creditworthiness scoring — excluded; Annex III high-risk</a:t>
+            </a:r>
+            <a:endParaRPr sz="1150"/>
+          </a:p>
+          <a:p xmlns:a="http://schemas.openxmlformats.org/drawingml/2006/main">
+            <a:pPr marL="152400" indent="-152400">
+              <a:spcAft>
+                <a:spcPts val="600"/>
+              </a:spcAft>
+              <a:buSzPct val="100000"/>
+              <a:buChar char="•"/>
             </a:pPr>
             <a:r>
-              <a:rPr sz="1050">
+              <a:rPr sz="1150">
                 <a:solidFill>
-                  <a:srgbClr val="FFFFFF"/>
+                  <a:srgbClr val="6B7C88"/>
                 </a:solidFill>
                 <a:latin typeface="Calibri"/>
                 <a:ea typeface="Calibri"/>
                 <a:cs typeface="Calibri"/>
               </a:rPr>
-              <a:t>Closing an account  —  4.6%</a:t>
-            </a:r>
-            <a:endParaRPr sz="1050"/>
-          </a:p>
-        </p:txBody>
-      </p:sp>
-      <p:sp>
-        <p:nvSpPr>
-          <p:cNvPr id="22" name="Shape 19">
-            <a:extLst xmlns:a="http://schemas.openxmlformats.org/drawingml/2006/main">
-              <a:ext uri="{FF2B5EF4-FFF2-40B4-BE49-F238E27FC236}">
-                <a16:creationId xmlns:a16="http://schemas.microsoft.com/office/drawing/2014/main" id="{2D49FFE4-EC8B-44A3-9A71-52ADFC12103A}"/>
-              </a:ext>
-            </a:extLst>
-          </p:cNvPr>
-          <p:cNvSpPr>
-            <a:spLocks xmlns:a="http://schemas.openxmlformats.org/drawingml/2006/main" noGrp="1"/>
-          </p:cNvSpPr>
-          <p:nvPr/>
-        </p:nvSpPr>
-        <p:spPr>
-          <a:xfrm xmlns:a="http://schemas.openxmlformats.org/drawingml/2006/main">
-            <a:off x="7253204" y="2395728"/>
-            <a:ext cx="4368820" cy="1920240"/>
-          </a:xfrm>
-          <a:prstGeom xmlns:a="http://schemas.openxmlformats.org/drawingml/2006/main" prst="rect">
-            <a:avLst/>
-          </a:prstGeom>
-          <a:solidFill xmlns:a="http://schemas.openxmlformats.org/drawingml/2006/main">
-            <a:srgbClr val="24343F"/>
-          </a:solidFill>
-          <a:effectLst xmlns:a="http://schemas.openxmlformats.org/drawingml/2006/main">
-            <a:outerShdw blurRad="88900" dist="38100" dir="8100000" sx="100000" sy="100000" kx="0" ky="0" algn="bl" rotWithShape="0">
-              <a:srgbClr val="1C2440">
-                <a:alpha val="13000"/>
-              </a:srgbClr>
-            </a:outerShdw>
-          </a:effectLst>
-        </p:spPr>
-      </p:sp>
-      <p:sp>
-        <p:nvSpPr>
-          <p:cNvPr id="23" name="Text 20">
-            <a:extLst xmlns:a="http://schemas.openxmlformats.org/drawingml/2006/main">
-              <a:ext uri="{FF2B5EF4-FFF2-40B4-BE49-F238E27FC236}">
-                <a16:creationId xmlns:a16="http://schemas.microsoft.com/office/drawing/2014/main" id="{060195E1-E318-48F7-8E1F-6C237A2CA7F9}"/>
-              </a:ext>
-            </a:extLst>
-          </p:cNvPr>
-          <p:cNvSpPr>
-            <a:spLocks xmlns:a="http://schemas.openxmlformats.org/drawingml/2006/main" noGrp="1"/>
-          </p:cNvSpPr>
-          <p:nvPr/>
-        </p:nvSpPr>
-        <p:spPr>
-          <a:xfrm xmlns:a="http://schemas.openxmlformats.org/drawingml/2006/main">
-            <a:off x="7509236" y="2596896"/>
-            <a:ext cx="3856756" cy="1517904"/>
-          </a:xfrm>
-          <a:prstGeom xmlns:a="http://schemas.openxmlformats.org/drawingml/2006/main" prst="rect">
-            <a:avLst/>
-          </a:prstGeom>
-          <a:noFill xmlns:a="http://schemas.openxmlformats.org/drawingml/2006/main"/>
-        </p:spPr>
-        <p:txBody>
-          <a:bodyPr xmlns:a="http://schemas.openxmlformats.org/drawingml/2006/main" wrap="square" lIns="0" tIns="0" rIns="0" bIns="0" anchor="t"/>
-          <a:lstStyle xmlns:a="http://schemas.openxmlformats.org/drawingml/2006/main"/>
-          <a:p xmlns:a="http://schemas.openxmlformats.org/drawingml/2006/main">
-            <a:pPr marL="0" indent="0">
-              <a:buNone/>
-            </a:pPr>
-            <a:r>
-              <a:rPr sz="4000" b="1">
-                <a:solidFill>
-                  <a:srgbClr val="2A78D6"/>
-                </a:solidFill>
-                <a:latin typeface="Trebuchet MS"/>
-                <a:ea typeface="Trebuchet MS"/>
-                <a:cs typeface="Trebuchet MS"/>
-              </a:rPr>
-              <a:t>46.1%
-</a:t>
-            </a:r>
-            <a:r>
-              <a:rPr sz="1300">
-                <a:solidFill>
-                  <a:srgbClr val="FFFFFF"/>
-                </a:solidFill>
-              </a:rPr>
-              <a:t>of all complaints sit in just 5 of 64 categories.
-</a:t>
-            </a:r>
-            <a:r>
-              <a:rPr sz="1200" i="1">
-                <a:solidFill>
-                  <a:srgbClr val="8FBFF0"/>
-                </a:solidFill>
-              </a:rPr>
-              <a:t>Concentration like that is a property of complaint books, not of one firm.</a:t>
-            </a:r>
-            <a:endParaRPr sz="4000"/>
+              <a:t>Guardrail — predicted payout never determines routing priority</a:t>
+            </a:r>
+            <a:endParaRPr sz="1150"/>
           </a:p>
         </p:txBody>
       </p:sp>
     </p:spTree>
     <p:extLst>
       <p:ext uri="{BB962C8B-B14F-4D97-AF65-F5344CB8AC3E}">
-        <p14:creationId xmlns:p14="http://schemas.microsoft.com/office/powerpoint/2010/main" val="360925404"/>
+        <p14:creationId xmlns:p14="http://schemas.microsoft.com/office/powerpoint/2010/main" val="2145789799"/>
       </p:ext>
     </p:extLst>
   </p:cSld>
@@ -14040,7 +14370,7 @@
           <p:cNvPr id="2" name="Text 0">
             <a:extLst xmlns:a="http://schemas.openxmlformats.org/drawingml/2006/main">
               <a:ext uri="{FF2B5EF4-FFF2-40B4-BE49-F238E27FC236}">
-                <a16:creationId xmlns:a16="http://schemas.microsoft.com/office/drawing/2014/main" id="{DF0AAD76-5C0B-4F32-8012-AEB777EF8D9B}"/>
+                <a16:creationId xmlns:a16="http://schemas.microsoft.com/office/drawing/2014/main" id="{F357C0BD-9E9F-48FA-9687-0F7C23228AFB}"/>
               </a:ext>
             </a:extLst>
           </p:cNvPr>
@@ -14086,7 +14416,870 @@
           <p:cNvPr id="3" name="Shape 1">
             <a:extLst xmlns:a="http://schemas.openxmlformats.org/drawingml/2006/main">
               <a:ext uri="{FF2B5EF4-FFF2-40B4-BE49-F238E27FC236}">
-                <a16:creationId xmlns:a16="http://schemas.microsoft.com/office/drawing/2014/main" id="{ECF2F71B-C40D-48DB-9B32-653D66187017}"/>
+                <a16:creationId xmlns:a16="http://schemas.microsoft.com/office/drawing/2014/main" id="{36F0793D-933B-406D-ADE8-4CA1F5CBC527}"/>
+              </a:ext>
+            </a:extLst>
+          </p:cNvPr>
+          <p:cNvSpPr>
+            <a:spLocks xmlns:a="http://schemas.openxmlformats.org/drawingml/2006/main" noGrp="1"/>
+          </p:cNvSpPr>
+          <p:nvPr/>
+        </p:nvSpPr>
+        <p:spPr>
+          <a:xfrm xmlns:a="http://schemas.openxmlformats.org/drawingml/2006/main">
+            <a:off x="566928" y="658368"/>
+            <a:ext cx="566928" cy="566928"/>
+          </a:xfrm>
+          <a:prstGeom xmlns:a="http://schemas.openxmlformats.org/drawingml/2006/main" prst="ellipse">
+            <a:avLst/>
+          </a:prstGeom>
+          <a:solidFill xmlns:a="http://schemas.openxmlformats.org/drawingml/2006/main">
+            <a:srgbClr val="24343F"/>
+          </a:solidFill>
+        </p:spPr>
+      </p:sp>
+      <p:pic>
+        <p:nvPicPr>
+          <p:cNvPr id="27" name="Image 0"/>
+          <p:cNvPicPr>
+            <a:picLocks xmlns:a="http://schemas.openxmlformats.org/drawingml/2006/main" noChangeAspect="1"/>
+          </p:cNvPicPr>
+          <p:nvPr/>
+        </p:nvPicPr>
+        <p:blipFill>
+          <a:blip xmlns:r="http://schemas.openxmlformats.org/officeDocument/2006/relationships" xmlns:a="http://schemas.openxmlformats.org/drawingml/2006/main" r:embed="R5848d6bc4082462c"/>
+          <a:stretch xmlns:a="http://schemas.openxmlformats.org/drawingml/2006/main">
+            <a:fillRect l="0" t="0" r="0" b="0"/>
+          </a:stretch>
+        </p:blipFill>
+        <p:spPr>
+          <a:xfrm xmlns:a="http://schemas.openxmlformats.org/drawingml/2006/main">
+            <a:off x="708660" y="800100"/>
+            <a:ext cx="283464" cy="283464"/>
+          </a:xfrm>
+          <a:prstGeom xmlns:a="http://schemas.openxmlformats.org/drawingml/2006/main" prst="rect">
+            <a:avLst/>
+          </a:prstGeom>
+        </p:spPr>
+      </p:pic>
+      <p:sp>
+        <p:nvSpPr>
+          <p:cNvPr id="5" name="Text 2">
+            <a:extLst xmlns:a="http://schemas.openxmlformats.org/drawingml/2006/main">
+              <a:ext uri="{FF2B5EF4-FFF2-40B4-BE49-F238E27FC236}">
+                <a16:creationId xmlns:a16="http://schemas.microsoft.com/office/drawing/2014/main" id="{D8BC6109-E56B-4ED1-8264-EC1A049C8A1F}"/>
+              </a:ext>
+            </a:extLst>
+          </p:cNvPr>
+          <p:cNvSpPr>
+            <a:spLocks xmlns:a="http://schemas.openxmlformats.org/drawingml/2006/main" noGrp="1"/>
+          </p:cNvSpPr>
+          <p:nvPr/>
+        </p:nvSpPr>
+        <p:spPr>
+          <a:xfrm xmlns:a="http://schemas.openxmlformats.org/drawingml/2006/main">
+            <a:off x="1316736" y="621792"/>
+            <a:ext cx="10305288" cy="658368"/>
+          </a:xfrm>
+          <a:prstGeom xmlns:a="http://schemas.openxmlformats.org/drawingml/2006/main" prst="rect">
+            <a:avLst/>
+          </a:prstGeom>
+          <a:noFill xmlns:a="http://schemas.openxmlformats.org/drawingml/2006/main"/>
+        </p:spPr>
+        <p:txBody>
+          <a:bodyPr xmlns:a="http://schemas.openxmlformats.org/drawingml/2006/main" wrap="square" lIns="0" tIns="0" rIns="0" bIns="0" anchor="ctr"/>
+          <a:lstStyle xmlns:a="http://schemas.openxmlformats.org/drawingml/2006/main"/>
+          <a:p xmlns:a="http://schemas.openxmlformats.org/drawingml/2006/main">
+            <a:pPr marL="0" indent="0">
+              <a:buNone/>
+            </a:pPr>
+            <a:r>
+              <a:rPr sz="3000" b="1">
+                <a:solidFill>
+                  <a:srgbClr val="24343F"/>
+                </a:solidFill>
+                <a:latin typeface="Trebuchet MS"/>
+                <a:ea typeface="Trebuchet MS"/>
+                <a:cs typeface="Trebuchet MS"/>
+              </a:rPr>
+              <a:t>5 categories account for 46.1% of complaints</a:t>
+            </a:r>
+            <a:endParaRPr sz="3000"/>
+          </a:p>
+        </p:txBody>
+      </p:sp>
+      <p:sp>
+        <p:nvSpPr>
+          <p:cNvPr id="6" name="Shape 3">
+            <a:extLst xmlns:a="http://schemas.openxmlformats.org/drawingml/2006/main">
+              <a:ext uri="{FF2B5EF4-FFF2-40B4-BE49-F238E27FC236}">
+                <a16:creationId xmlns:a16="http://schemas.microsoft.com/office/drawing/2014/main" id="{0342CC60-12E6-48FE-B354-827C4BFDCFE3}"/>
+              </a:ext>
+            </a:extLst>
+          </p:cNvPr>
+          <p:cNvSpPr>
+            <a:spLocks xmlns:a="http://schemas.openxmlformats.org/drawingml/2006/main" noGrp="1"/>
+          </p:cNvSpPr>
+          <p:nvPr/>
+        </p:nvSpPr>
+        <p:spPr>
+          <a:xfrm xmlns:a="http://schemas.openxmlformats.org/drawingml/2006/main">
+            <a:off x="566928" y="1481328"/>
+            <a:ext cx="11055096" cy="676656"/>
+          </a:xfrm>
+          <a:prstGeom xmlns:a="http://schemas.openxmlformats.org/drawingml/2006/main" prst="rect">
+            <a:avLst/>
+          </a:prstGeom>
+          <a:solidFill xmlns:a="http://schemas.openxmlformats.org/drawingml/2006/main">
+            <a:srgbClr val="EFF5F9"/>
+          </a:solidFill>
+        </p:spPr>
+      </p:sp>
+      <p:sp>
+        <p:nvSpPr>
+          <p:cNvPr id="7" name="Shape 4">
+            <a:extLst xmlns:a="http://schemas.openxmlformats.org/drawingml/2006/main">
+              <a:ext uri="{FF2B5EF4-FFF2-40B4-BE49-F238E27FC236}">
+                <a16:creationId xmlns:a16="http://schemas.microsoft.com/office/drawing/2014/main" id="{2C2C8831-A237-43A6-8D7B-C4CC38268D07}"/>
+              </a:ext>
+            </a:extLst>
+          </p:cNvPr>
+          <p:cNvSpPr>
+            <a:spLocks xmlns:a="http://schemas.openxmlformats.org/drawingml/2006/main" noGrp="1"/>
+          </p:cNvSpPr>
+          <p:nvPr/>
+        </p:nvSpPr>
+        <p:spPr>
+          <a:xfrm xmlns:a="http://schemas.openxmlformats.org/drawingml/2006/main">
+            <a:off x="566928" y="1481328"/>
+            <a:ext cx="82296" cy="676656"/>
+          </a:xfrm>
+          <a:prstGeom xmlns:a="http://schemas.openxmlformats.org/drawingml/2006/main" prst="rect">
+            <a:avLst/>
+          </a:prstGeom>
+          <a:solidFill xmlns:a="http://schemas.openxmlformats.org/drawingml/2006/main">
+            <a:srgbClr val="2A78D6"/>
+          </a:solidFill>
+        </p:spPr>
+      </p:sp>
+      <p:sp>
+        <p:nvSpPr>
+          <p:cNvPr id="8" name="Text 5">
+            <a:extLst xmlns:a="http://schemas.openxmlformats.org/drawingml/2006/main">
+              <a:ext uri="{FF2B5EF4-FFF2-40B4-BE49-F238E27FC236}">
+                <a16:creationId xmlns:a16="http://schemas.microsoft.com/office/drawing/2014/main" id="{73285F2E-0D13-49AE-A0FD-BB5FBA119F0B}"/>
+              </a:ext>
+            </a:extLst>
+          </p:cNvPr>
+          <p:cNvSpPr>
+            <a:spLocks xmlns:a="http://schemas.openxmlformats.org/drawingml/2006/main" noGrp="1"/>
+          </p:cNvSpPr>
+          <p:nvPr/>
+        </p:nvSpPr>
+        <p:spPr>
+          <a:xfrm xmlns:a="http://schemas.openxmlformats.org/drawingml/2006/main">
+            <a:off x="822960" y="1481328"/>
+            <a:ext cx="10597896" cy="676656"/>
+          </a:xfrm>
+          <a:prstGeom xmlns:a="http://schemas.openxmlformats.org/drawingml/2006/main" prst="rect">
+            <a:avLst/>
+          </a:prstGeom>
+          <a:noFill xmlns:a="http://schemas.openxmlformats.org/drawingml/2006/main"/>
+        </p:spPr>
+        <p:txBody>
+          <a:bodyPr xmlns:a="http://schemas.openxmlformats.org/drawingml/2006/main" wrap="square" lIns="0" tIns="0" rIns="0" bIns="0" anchor="ctr"/>
+          <a:lstStyle xmlns:a="http://schemas.openxmlformats.org/drawingml/2006/main"/>
+          <a:p xmlns:a="http://schemas.openxmlformats.org/drawingml/2006/main">
+            <a:pPr marL="0" indent="0">
+              <a:buNone/>
+            </a:pPr>
+            <a:r>
+              <a:rPr sz="1050" b="1" spc="100">
+                <a:solidFill>
+                  <a:srgbClr val="2A78D6"/>
+                </a:solidFill>
+                <a:latin typeface="Calibri"/>
+                <a:ea typeface="Calibri"/>
+                <a:cs typeface="Calibri"/>
+              </a:rPr>
+              <a:t>TAKEAWAY   Public CFPB data suggests a narrow test; Phase 0 selects your categories.</a:t>
+            </a:r>
+            <a:endParaRPr sz="1050"/>
+          </a:p>
+        </p:txBody>
+      </p:sp>
+      <p:sp>
+        <p:nvSpPr>
+          <p:cNvPr id="9" name="Shape 6">
+            <a:extLst xmlns:a="http://schemas.openxmlformats.org/drawingml/2006/main">
+              <a:ext uri="{FF2B5EF4-FFF2-40B4-BE49-F238E27FC236}">
+                <a16:creationId xmlns:a16="http://schemas.microsoft.com/office/drawing/2014/main" id="{43DB66DD-BF89-4675-9C08-60AEFD77041A}"/>
+              </a:ext>
+            </a:extLst>
+          </p:cNvPr>
+          <p:cNvSpPr>
+            <a:spLocks xmlns:a="http://schemas.openxmlformats.org/drawingml/2006/main" noGrp="1"/>
+          </p:cNvSpPr>
+          <p:nvPr/>
+        </p:nvSpPr>
+        <p:spPr>
+          <a:xfrm xmlns:a="http://schemas.openxmlformats.org/drawingml/2006/main">
+            <a:off x="566928" y="6437376"/>
+            <a:ext cx="11055096" cy="0"/>
+          </a:xfrm>
+          <a:prstGeom xmlns:a="http://schemas.openxmlformats.org/drawingml/2006/main" prst="line">
+            <a:avLst/>
+          </a:prstGeom>
+          <a:noFill xmlns:a="http://schemas.openxmlformats.org/drawingml/2006/main"/>
+          <a:ln xmlns:a="http://schemas.openxmlformats.org/drawingml/2006/main" w="12700">
+            <a:solidFill>
+              <a:srgbClr val="D9E3EA"/>
+            </a:solidFill>
+            <a:prstDash val="solid"/>
+          </a:ln>
+        </p:spPr>
+      </p:sp>
+      <p:sp>
+        <p:nvSpPr>
+          <p:cNvPr id="10" name="Text 7">
+            <a:extLst xmlns:a="http://schemas.openxmlformats.org/drawingml/2006/main">
+              <a:ext uri="{FF2B5EF4-FFF2-40B4-BE49-F238E27FC236}">
+                <a16:creationId xmlns:a16="http://schemas.microsoft.com/office/drawing/2014/main" id="{C9878604-E02A-4631-A48F-A38A0E43F96D}"/>
+              </a:ext>
+            </a:extLst>
+          </p:cNvPr>
+          <p:cNvSpPr>
+            <a:spLocks xmlns:a="http://schemas.openxmlformats.org/drawingml/2006/main" noGrp="1"/>
+          </p:cNvSpPr>
+          <p:nvPr/>
+        </p:nvSpPr>
+        <p:spPr>
+          <a:xfrm xmlns:a="http://schemas.openxmlformats.org/drawingml/2006/main">
+            <a:off x="566928" y="6473952"/>
+            <a:ext cx="7315200" cy="274320"/>
+          </a:xfrm>
+          <a:prstGeom xmlns:a="http://schemas.openxmlformats.org/drawingml/2006/main" prst="rect">
+            <a:avLst/>
+          </a:prstGeom>
+          <a:noFill xmlns:a="http://schemas.openxmlformats.org/drawingml/2006/main"/>
+        </p:spPr>
+        <p:txBody>
+          <a:bodyPr xmlns:a="http://schemas.openxmlformats.org/drawingml/2006/main" wrap="square" lIns="0" tIns="0" rIns="0" bIns="0" anchor="ctr"/>
+          <a:lstStyle xmlns:a="http://schemas.openxmlformats.org/drawingml/2006/main"/>
+          <a:p xmlns:a="http://schemas.openxmlformats.org/drawingml/2006/main">
+            <a:pPr marL="0" indent="0">
+              <a:buNone/>
+            </a:pPr>
+            <a:endParaRPr sz="850"/>
+          </a:p>
+        </p:txBody>
+      </p:sp>
+      <p:sp>
+        <p:nvSpPr>
+          <p:cNvPr id="11" name="Text 8">
+            <a:extLst xmlns:a="http://schemas.openxmlformats.org/drawingml/2006/main">
+              <a:ext uri="{FF2B5EF4-FFF2-40B4-BE49-F238E27FC236}">
+                <a16:creationId xmlns:a16="http://schemas.microsoft.com/office/drawing/2014/main" id="{537800B2-E9CD-45D8-82AF-3EC010099300}"/>
+              </a:ext>
+            </a:extLst>
+          </p:cNvPr>
+          <p:cNvSpPr>
+            <a:spLocks xmlns:a="http://schemas.openxmlformats.org/drawingml/2006/main" noGrp="1"/>
+          </p:cNvSpPr>
+          <p:nvPr/>
+        </p:nvSpPr>
+        <p:spPr>
+          <a:xfrm xmlns:a="http://schemas.openxmlformats.org/drawingml/2006/main">
+            <a:off x="10524744" y="6473952"/>
+            <a:ext cx="1097280" cy="274320"/>
+          </a:xfrm>
+          <a:prstGeom xmlns:a="http://schemas.openxmlformats.org/drawingml/2006/main" prst="rect">
+            <a:avLst/>
+          </a:prstGeom>
+          <a:noFill xmlns:a="http://schemas.openxmlformats.org/drawingml/2006/main"/>
+        </p:spPr>
+        <p:txBody>
+          <a:bodyPr xmlns:a="http://schemas.openxmlformats.org/drawingml/2006/main" wrap="square" lIns="0" tIns="0" rIns="0" bIns="0" anchor="ctr"/>
+          <a:lstStyle xmlns:a="http://schemas.openxmlformats.org/drawingml/2006/main"/>
+          <a:p xmlns:a="http://schemas.openxmlformats.org/drawingml/2006/main">
+            <a:pPr marL="0" indent="0" algn="r">
+              <a:buNone/>
+            </a:pPr>
+            <a:r>
+              <a:rPr sz="850">
+                <a:solidFill>
+                  <a:srgbClr val="6B7C88"/>
+                </a:solidFill>
+                <a:latin typeface="Calibri"/>
+                <a:ea typeface="Calibri"/>
+                <a:cs typeface="Calibri"/>
+              </a:rPr>
+              <a:t>6</a:t>
+            </a:r>
+            <a:endParaRPr sz="850"/>
+          </a:p>
+        </p:txBody>
+      </p:sp>
+      <p:sp>
+        <p:nvSpPr>
+          <p:cNvPr id="12" name="Shape 9">
+            <a:extLst xmlns:a="http://schemas.openxmlformats.org/drawingml/2006/main">
+              <a:ext uri="{FF2B5EF4-FFF2-40B4-BE49-F238E27FC236}">
+                <a16:creationId xmlns:a16="http://schemas.microsoft.com/office/drawing/2014/main" id="{56BE8F92-A63B-40E8-A062-6F2D09607B7F}"/>
+              </a:ext>
+            </a:extLst>
+          </p:cNvPr>
+          <p:cNvSpPr>
+            <a:spLocks xmlns:a="http://schemas.openxmlformats.org/drawingml/2006/main" noGrp="1"/>
+          </p:cNvSpPr>
+          <p:nvPr/>
+        </p:nvSpPr>
+        <p:spPr>
+          <a:xfrm xmlns:a="http://schemas.openxmlformats.org/drawingml/2006/main">
+            <a:off x="566928" y="2395728"/>
+            <a:ext cx="6411956" cy="329184"/>
+          </a:xfrm>
+          <a:prstGeom xmlns:a="http://schemas.openxmlformats.org/drawingml/2006/main" prst="rect">
+            <a:avLst/>
+          </a:prstGeom>
+          <a:solidFill xmlns:a="http://schemas.openxmlformats.org/drawingml/2006/main">
+            <a:srgbClr val="24343F"/>
+          </a:solidFill>
+        </p:spPr>
+      </p:sp>
+      <p:sp>
+        <p:nvSpPr>
+          <p:cNvPr id="13" name="Text 10">
+            <a:extLst xmlns:a="http://schemas.openxmlformats.org/drawingml/2006/main">
+              <a:ext uri="{FF2B5EF4-FFF2-40B4-BE49-F238E27FC236}">
+                <a16:creationId xmlns:a16="http://schemas.microsoft.com/office/drawing/2014/main" id="{EDA69E92-44CC-4758-815F-5A8254927599}"/>
+              </a:ext>
+            </a:extLst>
+          </p:cNvPr>
+          <p:cNvSpPr>
+            <a:spLocks xmlns:a="http://schemas.openxmlformats.org/drawingml/2006/main" noGrp="1"/>
+          </p:cNvSpPr>
+          <p:nvPr/>
+        </p:nvSpPr>
+        <p:spPr>
+          <a:xfrm xmlns:a="http://schemas.openxmlformats.org/drawingml/2006/main">
+            <a:off x="713232" y="2395728"/>
+            <a:ext cx="6137636" cy="329184"/>
+          </a:xfrm>
+          <a:prstGeom xmlns:a="http://schemas.openxmlformats.org/drawingml/2006/main" prst="rect">
+            <a:avLst/>
+          </a:prstGeom>
+          <a:noFill xmlns:a="http://schemas.openxmlformats.org/drawingml/2006/main"/>
+        </p:spPr>
+        <p:txBody>
+          <a:bodyPr xmlns:a="http://schemas.openxmlformats.org/drawingml/2006/main" wrap="square" lIns="0" tIns="0" rIns="0" bIns="0" anchor="ctr"/>
+          <a:lstStyle xmlns:a="http://schemas.openxmlformats.org/drawingml/2006/main"/>
+          <a:p xmlns:a="http://schemas.openxmlformats.org/drawingml/2006/main">
+            <a:pPr marL="0" indent="0">
+              <a:buNone/>
+            </a:pPr>
+            <a:r>
+              <a:rPr sz="1050">
+                <a:solidFill>
+                  <a:srgbClr val="FFFFFF"/>
+                </a:solidFill>
+                <a:latin typeface="Calibri"/>
+                <a:ea typeface="Calibri"/>
+                <a:cs typeface="Calibri"/>
+              </a:rPr>
+              <a:t>Managing an account  —  19.9%</a:t>
+            </a:r>
+            <a:endParaRPr sz="1050"/>
+          </a:p>
+        </p:txBody>
+      </p:sp>
+      <p:sp>
+        <p:nvSpPr>
+          <p:cNvPr id="14" name="Shape 11">
+            <a:extLst xmlns:a="http://schemas.openxmlformats.org/drawingml/2006/main">
+              <a:ext uri="{FF2B5EF4-FFF2-40B4-BE49-F238E27FC236}">
+                <a16:creationId xmlns:a16="http://schemas.microsoft.com/office/drawing/2014/main" id="{B0BAC1AB-01F2-4A94-A387-42DE8482826B}"/>
+              </a:ext>
+            </a:extLst>
+          </p:cNvPr>
+          <p:cNvSpPr>
+            <a:spLocks xmlns:a="http://schemas.openxmlformats.org/drawingml/2006/main" noGrp="1"/>
+          </p:cNvSpPr>
+          <p:nvPr/>
+        </p:nvSpPr>
+        <p:spPr>
+          <a:xfrm xmlns:a="http://schemas.openxmlformats.org/drawingml/2006/main">
+            <a:off x="676656" y="2793492"/>
+            <a:ext cx="6302228" cy="329184"/>
+          </a:xfrm>
+          <a:prstGeom xmlns:a="http://schemas.openxmlformats.org/drawingml/2006/main" prst="rect">
+            <a:avLst/>
+          </a:prstGeom>
+          <a:solidFill xmlns:a="http://schemas.openxmlformats.org/drawingml/2006/main">
+            <a:srgbClr val="24343F">
+              <a:alpha val="94000"/>
+            </a:srgbClr>
+          </a:solidFill>
+        </p:spPr>
+      </p:sp>
+      <p:sp>
+        <p:nvSpPr>
+          <p:cNvPr id="15" name="Text 12">
+            <a:extLst xmlns:a="http://schemas.openxmlformats.org/drawingml/2006/main">
+              <a:ext uri="{FF2B5EF4-FFF2-40B4-BE49-F238E27FC236}">
+                <a16:creationId xmlns:a16="http://schemas.microsoft.com/office/drawing/2014/main" id="{15752F61-9A14-42F3-A779-7D6499CC1B6E}"/>
+              </a:ext>
+            </a:extLst>
+          </p:cNvPr>
+          <p:cNvSpPr>
+            <a:spLocks xmlns:a="http://schemas.openxmlformats.org/drawingml/2006/main" noGrp="1"/>
+          </p:cNvSpPr>
+          <p:nvPr/>
+        </p:nvSpPr>
+        <p:spPr>
+          <a:xfrm xmlns:a="http://schemas.openxmlformats.org/drawingml/2006/main">
+            <a:off x="822960" y="2793492"/>
+            <a:ext cx="6027908" cy="329184"/>
+          </a:xfrm>
+          <a:prstGeom xmlns:a="http://schemas.openxmlformats.org/drawingml/2006/main" prst="rect">
+            <a:avLst/>
+          </a:prstGeom>
+          <a:noFill xmlns:a="http://schemas.openxmlformats.org/drawingml/2006/main"/>
+        </p:spPr>
+        <p:txBody>
+          <a:bodyPr xmlns:a="http://schemas.openxmlformats.org/drawingml/2006/main" wrap="square" lIns="0" tIns="0" rIns="0" bIns="0" anchor="ctr"/>
+          <a:lstStyle xmlns:a="http://schemas.openxmlformats.org/drawingml/2006/main"/>
+          <a:p xmlns:a="http://schemas.openxmlformats.org/drawingml/2006/main">
+            <a:pPr marL="0" indent="0">
+              <a:buNone/>
+            </a:pPr>
+            <a:r>
+              <a:rPr sz="1050">
+                <a:solidFill>
+                  <a:srgbClr val="FFFFFF"/>
+                </a:solidFill>
+                <a:latin typeface="Calibri"/>
+                <a:ea typeface="Calibri"/>
+                <a:cs typeface="Calibri"/>
+              </a:rPr>
+              <a:t>Problem with a purchase on your statement  —  11.2%</a:t>
+            </a:r>
+            <a:endParaRPr sz="1050"/>
+          </a:p>
+        </p:txBody>
+      </p:sp>
+      <p:sp>
+        <p:nvSpPr>
+          <p:cNvPr id="16" name="Shape 13">
+            <a:extLst xmlns:a="http://schemas.openxmlformats.org/drawingml/2006/main">
+              <a:ext uri="{FF2B5EF4-FFF2-40B4-BE49-F238E27FC236}">
+                <a16:creationId xmlns:a16="http://schemas.microsoft.com/office/drawing/2014/main" id="{71D54875-B153-4C23-95D0-851678E85996}"/>
+              </a:ext>
+            </a:extLst>
+          </p:cNvPr>
+          <p:cNvSpPr>
+            <a:spLocks xmlns:a="http://schemas.openxmlformats.org/drawingml/2006/main" noGrp="1"/>
+          </p:cNvSpPr>
+          <p:nvPr/>
+        </p:nvSpPr>
+        <p:spPr>
+          <a:xfrm xmlns:a="http://schemas.openxmlformats.org/drawingml/2006/main">
+            <a:off x="786384" y="3191256"/>
+            <a:ext cx="6192500" cy="329184"/>
+          </a:xfrm>
+          <a:prstGeom xmlns:a="http://schemas.openxmlformats.org/drawingml/2006/main" prst="rect">
+            <a:avLst/>
+          </a:prstGeom>
+          <a:solidFill xmlns:a="http://schemas.openxmlformats.org/drawingml/2006/main">
+            <a:srgbClr val="24343F">
+              <a:alpha val="88000"/>
+            </a:srgbClr>
+          </a:solidFill>
+        </p:spPr>
+      </p:sp>
+      <p:sp>
+        <p:nvSpPr>
+          <p:cNvPr id="17" name="Text 14">
+            <a:extLst xmlns:a="http://schemas.openxmlformats.org/drawingml/2006/main">
+              <a:ext uri="{FF2B5EF4-FFF2-40B4-BE49-F238E27FC236}">
+                <a16:creationId xmlns:a16="http://schemas.microsoft.com/office/drawing/2014/main" id="{D69ADEBB-615C-44A4-BEAB-3D651C0A2CAA}"/>
+              </a:ext>
+            </a:extLst>
+          </p:cNvPr>
+          <p:cNvSpPr>
+            <a:spLocks xmlns:a="http://schemas.openxmlformats.org/drawingml/2006/main" noGrp="1"/>
+          </p:cNvSpPr>
+          <p:nvPr/>
+        </p:nvSpPr>
+        <p:spPr>
+          <a:xfrm xmlns:a="http://schemas.openxmlformats.org/drawingml/2006/main">
+            <a:off x="932688" y="3191256"/>
+            <a:ext cx="5918180" cy="329184"/>
+          </a:xfrm>
+          <a:prstGeom xmlns:a="http://schemas.openxmlformats.org/drawingml/2006/main" prst="rect">
+            <a:avLst/>
+          </a:prstGeom>
+          <a:noFill xmlns:a="http://schemas.openxmlformats.org/drawingml/2006/main"/>
+        </p:spPr>
+        <p:txBody>
+          <a:bodyPr xmlns:a="http://schemas.openxmlformats.org/drawingml/2006/main" wrap="square" lIns="0" tIns="0" rIns="0" bIns="0" anchor="ctr"/>
+          <a:lstStyle xmlns:a="http://schemas.openxmlformats.org/drawingml/2006/main"/>
+          <a:p xmlns:a="http://schemas.openxmlformats.org/drawingml/2006/main">
+            <a:pPr marL="0" indent="0">
+              <a:buNone/>
+            </a:pPr>
+            <a:r>
+              <a:rPr sz="1050">
+                <a:solidFill>
+                  <a:srgbClr val="FFFFFF"/>
+                </a:solidFill>
+                <a:latin typeface="Calibri"/>
+                <a:ea typeface="Calibri"/>
+                <a:cs typeface="Calibri"/>
+              </a:rPr>
+              <a:t>A lender or company charging your account  —  5.6%</a:t>
+            </a:r>
+            <a:endParaRPr sz="1050"/>
+          </a:p>
+        </p:txBody>
+      </p:sp>
+      <p:sp>
+        <p:nvSpPr>
+          <p:cNvPr id="18" name="Shape 15">
+            <a:extLst xmlns:a="http://schemas.openxmlformats.org/drawingml/2006/main">
+              <a:ext uri="{FF2B5EF4-FFF2-40B4-BE49-F238E27FC236}">
+                <a16:creationId xmlns:a16="http://schemas.microsoft.com/office/drawing/2014/main" id="{AE059A9D-A47E-445F-82E5-4F707A5EC080}"/>
+              </a:ext>
+            </a:extLst>
+          </p:cNvPr>
+          <p:cNvSpPr>
+            <a:spLocks xmlns:a="http://schemas.openxmlformats.org/drawingml/2006/main" noGrp="1"/>
+          </p:cNvSpPr>
+          <p:nvPr/>
+        </p:nvSpPr>
+        <p:spPr>
+          <a:xfrm xmlns:a="http://schemas.openxmlformats.org/drawingml/2006/main">
+            <a:off x="896112" y="3589020"/>
+            <a:ext cx="6082772" cy="329184"/>
+          </a:xfrm>
+          <a:prstGeom xmlns:a="http://schemas.openxmlformats.org/drawingml/2006/main" prst="rect">
+            <a:avLst/>
+          </a:prstGeom>
+          <a:solidFill xmlns:a="http://schemas.openxmlformats.org/drawingml/2006/main">
+            <a:srgbClr val="24343F">
+              <a:alpha val="82000"/>
+            </a:srgbClr>
+          </a:solidFill>
+        </p:spPr>
+      </p:sp>
+      <p:sp>
+        <p:nvSpPr>
+          <p:cNvPr id="19" name="Text 16">
+            <a:extLst xmlns:a="http://schemas.openxmlformats.org/drawingml/2006/main">
+              <a:ext uri="{FF2B5EF4-FFF2-40B4-BE49-F238E27FC236}">
+                <a16:creationId xmlns:a16="http://schemas.microsoft.com/office/drawing/2014/main" id="{8DD74476-B68C-41F9-BC8A-5EC588FD8810}"/>
+              </a:ext>
+            </a:extLst>
+          </p:cNvPr>
+          <p:cNvSpPr>
+            <a:spLocks xmlns:a="http://schemas.openxmlformats.org/drawingml/2006/main" noGrp="1"/>
+          </p:cNvSpPr>
+          <p:nvPr/>
+        </p:nvSpPr>
+        <p:spPr>
+          <a:xfrm xmlns:a="http://schemas.openxmlformats.org/drawingml/2006/main">
+            <a:off x="1042416" y="3589020"/>
+            <a:ext cx="5808452" cy="329184"/>
+          </a:xfrm>
+          <a:prstGeom xmlns:a="http://schemas.openxmlformats.org/drawingml/2006/main" prst="rect">
+            <a:avLst/>
+          </a:prstGeom>
+          <a:noFill xmlns:a="http://schemas.openxmlformats.org/drawingml/2006/main"/>
+        </p:spPr>
+        <p:txBody>
+          <a:bodyPr xmlns:a="http://schemas.openxmlformats.org/drawingml/2006/main" wrap="square" lIns="0" tIns="0" rIns="0" bIns="0" anchor="ctr"/>
+          <a:lstStyle xmlns:a="http://schemas.openxmlformats.org/drawingml/2006/main"/>
+          <a:p xmlns:a="http://schemas.openxmlformats.org/drawingml/2006/main">
+            <a:pPr marL="0" indent="0">
+              <a:buNone/>
+            </a:pPr>
+            <a:r>
+              <a:rPr sz="1050">
+                <a:solidFill>
+                  <a:srgbClr val="FFFFFF"/>
+                </a:solidFill>
+                <a:latin typeface="Calibri"/>
+                <a:ea typeface="Calibri"/>
+                <a:cs typeface="Calibri"/>
+              </a:rPr>
+              <a:t>Fraud or scam  —  4.8%</a:t>
+            </a:r>
+            <a:endParaRPr sz="1050"/>
+          </a:p>
+        </p:txBody>
+      </p:sp>
+      <p:sp>
+        <p:nvSpPr>
+          <p:cNvPr id="20" name="Shape 17">
+            <a:extLst xmlns:a="http://schemas.openxmlformats.org/drawingml/2006/main">
+              <a:ext uri="{FF2B5EF4-FFF2-40B4-BE49-F238E27FC236}">
+                <a16:creationId xmlns:a16="http://schemas.microsoft.com/office/drawing/2014/main" id="{D37CB98A-E6FF-4C2F-BF70-BDEEAA79AD63}"/>
+              </a:ext>
+            </a:extLst>
+          </p:cNvPr>
+          <p:cNvSpPr>
+            <a:spLocks xmlns:a="http://schemas.openxmlformats.org/drawingml/2006/main" noGrp="1"/>
+          </p:cNvSpPr>
+          <p:nvPr/>
+        </p:nvSpPr>
+        <p:spPr>
+          <a:xfrm xmlns:a="http://schemas.openxmlformats.org/drawingml/2006/main">
+            <a:off x="1005840" y="3986784"/>
+            <a:ext cx="5973044" cy="329184"/>
+          </a:xfrm>
+          <a:prstGeom xmlns:a="http://schemas.openxmlformats.org/drawingml/2006/main" prst="rect">
+            <a:avLst/>
+          </a:prstGeom>
+          <a:solidFill xmlns:a="http://schemas.openxmlformats.org/drawingml/2006/main">
+            <a:srgbClr val="24343F">
+              <a:alpha val="76000"/>
+            </a:srgbClr>
+          </a:solidFill>
+        </p:spPr>
+      </p:sp>
+      <p:sp>
+        <p:nvSpPr>
+          <p:cNvPr id="21" name="Text 18">
+            <a:extLst xmlns:a="http://schemas.openxmlformats.org/drawingml/2006/main">
+              <a:ext uri="{FF2B5EF4-FFF2-40B4-BE49-F238E27FC236}">
+                <a16:creationId xmlns:a16="http://schemas.microsoft.com/office/drawing/2014/main" id="{8734A012-6B1D-45DF-809E-C36DEC901840}"/>
+              </a:ext>
+            </a:extLst>
+          </p:cNvPr>
+          <p:cNvSpPr>
+            <a:spLocks xmlns:a="http://schemas.openxmlformats.org/drawingml/2006/main" noGrp="1"/>
+          </p:cNvSpPr>
+          <p:nvPr/>
+        </p:nvSpPr>
+        <p:spPr>
+          <a:xfrm xmlns:a="http://schemas.openxmlformats.org/drawingml/2006/main">
+            <a:off x="1152144" y="3986784"/>
+            <a:ext cx="5698724" cy="329184"/>
+          </a:xfrm>
+          <a:prstGeom xmlns:a="http://schemas.openxmlformats.org/drawingml/2006/main" prst="rect">
+            <a:avLst/>
+          </a:prstGeom>
+          <a:noFill xmlns:a="http://schemas.openxmlformats.org/drawingml/2006/main"/>
+        </p:spPr>
+        <p:txBody>
+          <a:bodyPr xmlns:a="http://schemas.openxmlformats.org/drawingml/2006/main" wrap="square" lIns="0" tIns="0" rIns="0" bIns="0" anchor="ctr"/>
+          <a:lstStyle xmlns:a="http://schemas.openxmlformats.org/drawingml/2006/main"/>
+          <a:p xmlns:a="http://schemas.openxmlformats.org/drawingml/2006/main">
+            <a:pPr marL="0" indent="0">
+              <a:buNone/>
+            </a:pPr>
+            <a:r>
+              <a:rPr sz="1050">
+                <a:solidFill>
+                  <a:srgbClr val="FFFFFF"/>
+                </a:solidFill>
+                <a:latin typeface="Calibri"/>
+                <a:ea typeface="Calibri"/>
+                <a:cs typeface="Calibri"/>
+              </a:rPr>
+              <a:t>Closing an account  —  4.6%</a:t>
+            </a:r>
+            <a:endParaRPr sz="1050"/>
+          </a:p>
+        </p:txBody>
+      </p:sp>
+      <p:sp>
+        <p:nvSpPr>
+          <p:cNvPr id="22" name="Shape 19">
+            <a:extLst xmlns:a="http://schemas.openxmlformats.org/drawingml/2006/main">
+              <a:ext uri="{FF2B5EF4-FFF2-40B4-BE49-F238E27FC236}">
+                <a16:creationId xmlns:a16="http://schemas.microsoft.com/office/drawing/2014/main" id="{59BC8660-8123-4C02-965A-F13742D90C3F}"/>
+              </a:ext>
+            </a:extLst>
+          </p:cNvPr>
+          <p:cNvSpPr>
+            <a:spLocks xmlns:a="http://schemas.openxmlformats.org/drawingml/2006/main" noGrp="1"/>
+          </p:cNvSpPr>
+          <p:nvPr/>
+        </p:nvSpPr>
+        <p:spPr>
+          <a:xfrm xmlns:a="http://schemas.openxmlformats.org/drawingml/2006/main">
+            <a:off x="7253204" y="2395728"/>
+            <a:ext cx="4368820" cy="1920240"/>
+          </a:xfrm>
+          <a:prstGeom xmlns:a="http://schemas.openxmlformats.org/drawingml/2006/main" prst="rect">
+            <a:avLst/>
+          </a:prstGeom>
+          <a:solidFill xmlns:a="http://schemas.openxmlformats.org/drawingml/2006/main">
+            <a:srgbClr val="24343F"/>
+          </a:solidFill>
+          <a:effectLst xmlns:a="http://schemas.openxmlformats.org/drawingml/2006/main">
+            <a:outerShdw blurRad="88900" dist="38100" dir="8100000" sx="100000" sy="100000" kx="0" ky="0" algn="bl" rotWithShape="0">
+              <a:srgbClr val="1C2440">
+                <a:alpha val="13000"/>
+              </a:srgbClr>
+            </a:outerShdw>
+          </a:effectLst>
+        </p:spPr>
+      </p:sp>
+      <p:sp>
+        <p:nvSpPr>
+          <p:cNvPr id="23" name="Text 20">
+            <a:extLst xmlns:a="http://schemas.openxmlformats.org/drawingml/2006/main">
+              <a:ext uri="{FF2B5EF4-FFF2-40B4-BE49-F238E27FC236}">
+                <a16:creationId xmlns:a16="http://schemas.microsoft.com/office/drawing/2014/main" id="{65F2D466-EBB3-4CEF-98AD-131B92168419}"/>
+              </a:ext>
+            </a:extLst>
+          </p:cNvPr>
+          <p:cNvSpPr>
+            <a:spLocks xmlns:a="http://schemas.openxmlformats.org/drawingml/2006/main" noGrp="1"/>
+          </p:cNvSpPr>
+          <p:nvPr/>
+        </p:nvSpPr>
+        <p:spPr>
+          <a:xfrm xmlns:a="http://schemas.openxmlformats.org/drawingml/2006/main">
+            <a:off x="7509236" y="2596896"/>
+            <a:ext cx="3856756" cy="1517904"/>
+          </a:xfrm>
+          <a:prstGeom xmlns:a="http://schemas.openxmlformats.org/drawingml/2006/main" prst="rect">
+            <a:avLst/>
+          </a:prstGeom>
+          <a:noFill xmlns:a="http://schemas.openxmlformats.org/drawingml/2006/main"/>
+        </p:spPr>
+        <p:txBody>
+          <a:bodyPr xmlns:a="http://schemas.openxmlformats.org/drawingml/2006/main" wrap="square" lIns="0" tIns="0" rIns="0" bIns="0" anchor="t"/>
+          <a:lstStyle xmlns:a="http://schemas.openxmlformats.org/drawingml/2006/main"/>
+          <a:p xmlns:a="http://schemas.openxmlformats.org/drawingml/2006/main">
+            <a:pPr marL="0" indent="0">
+              <a:buNone/>
+            </a:pPr>
+            <a:r>
+              <a:rPr sz="4000" b="1">
+                <a:solidFill>
+                  <a:srgbClr val="2A78D6"/>
+                </a:solidFill>
+                <a:latin typeface="Trebuchet MS"/>
+                <a:ea typeface="Trebuchet MS"/>
+                <a:cs typeface="Trebuchet MS"/>
+              </a:rPr>
+              <a:t>46.1%
+</a:t>
+            </a:r>
+            <a:r>
+              <a:rPr sz="1300">
+                <a:solidFill>
+                  <a:srgbClr val="FFFFFF"/>
+                </a:solidFill>
+              </a:rPr>
+              <a:t>of 16,839 public complaints sit in 5 of 64 categories.</a:t>
+            </a:r>
+            <a:r>
+              <a:rPr sz="1300">
+                <a:solidFill>
+                  <a:srgbClr val="FFFFFF"/>
+                </a:solidFill>
+              </a:rPr>
+              <a:t>
+</a:t>
+            </a:r>
+            <a:r>
+              <a:rPr sz="1200" i="1">
+                <a:solidFill>
+                  <a:srgbClr val="8FBFF0"/>
+                </a:solidFill>
+              </a:rPr>
+              <a:t>Phase 0 tests whether your complaint book is similarly concentrated.</a:t>
+            </a:r>
+            <a:endParaRPr sz="4000"/>
+          </a:p>
+        </p:txBody>
+      </p:sp>
+    </p:spTree>
+    <p:extLst>
+      <p:ext uri="{BB962C8B-B14F-4D97-AF65-F5344CB8AC3E}">
+        <p14:creationId xmlns:p14="http://schemas.microsoft.com/office/powerpoint/2010/main" val="153335743"/>
+      </p:ext>
+    </p:extLst>
+  </p:cSld>
+</p:sld>
+</file>
+
+<file path=ppt/slides/slide9.xml><?xml version="1.0" encoding="utf-8"?>
+<p:sld xmlns:p="http://schemas.openxmlformats.org/presentationml/2006/main">
+  <p:cSld>
+    <p:bg>
+      <p:bgPr>
+        <a:solidFill xmlns:a="http://schemas.openxmlformats.org/drawingml/2006/main">
+          <a:srgbClr val="FFFFFF"/>
+        </a:solidFill>
+      </p:bgPr>
+    </p:bg>
+    <p:spTree>
+      <p:nvGrpSpPr>
+        <p:cNvPr id="1" name=""/>
+        <p:cNvGrpSpPr/>
+        <p:nvPr/>
+      </p:nvGrpSpPr>
+      <p:grpSpPr>
+        <a:xfrm xmlns:a="http://schemas.openxmlformats.org/drawingml/2006/main"/>
+      </p:grpSpPr>
+      <p:sp>
+        <p:nvSpPr>
+          <p:cNvPr id="2" name="Text 0">
+            <a:extLst xmlns:a="http://schemas.openxmlformats.org/drawingml/2006/main">
+              <a:ext uri="{FF2B5EF4-FFF2-40B4-BE49-F238E27FC236}">
+                <a16:creationId xmlns:a16="http://schemas.microsoft.com/office/drawing/2014/main" id="{AE38C168-76C0-4A55-8C17-DEB98038580E}"/>
+              </a:ext>
+            </a:extLst>
+          </p:cNvPr>
+          <p:cNvSpPr>
+            <a:spLocks xmlns:a="http://schemas.openxmlformats.org/drawingml/2006/main" noGrp="1"/>
+          </p:cNvSpPr>
+          <p:nvPr/>
+        </p:nvSpPr>
+        <p:spPr>
+          <a:xfrm xmlns:a="http://schemas.openxmlformats.org/drawingml/2006/main">
+            <a:off x="566928" y="310896"/>
+            <a:ext cx="11055096" cy="274320"/>
+          </a:xfrm>
+          <a:prstGeom xmlns:a="http://schemas.openxmlformats.org/drawingml/2006/main" prst="rect">
+            <a:avLst/>
+          </a:prstGeom>
+          <a:noFill xmlns:a="http://schemas.openxmlformats.org/drawingml/2006/main"/>
+        </p:spPr>
+        <p:txBody>
+          <a:bodyPr xmlns:a="http://schemas.openxmlformats.org/drawingml/2006/main" wrap="square" lIns="0" tIns="0" rIns="0" bIns="0" anchor="ctr"/>
+          <a:lstStyle xmlns:a="http://schemas.openxmlformats.org/drawingml/2006/main"/>
+          <a:p xmlns:a="http://schemas.openxmlformats.org/drawingml/2006/main">
+            <a:pPr marL="0" indent="0">
+              <a:buNone/>
+            </a:pPr>
+            <a:r>
+              <a:rPr sz="1050" b="1" spc="200">
+                <a:solidFill>
+                  <a:srgbClr val="6B7C88"/>
+                </a:solidFill>
+                <a:latin typeface="Calibri"/>
+                <a:ea typeface="Calibri"/>
+                <a:cs typeface="Calibri"/>
+              </a:rPr>
+              <a:t>CAPSTONE ROUND 1  ·  AI CONSULTING PITCH</a:t>
+            </a:r>
+            <a:endParaRPr sz="1050"/>
+          </a:p>
+        </p:txBody>
+      </p:sp>
+      <p:sp>
+        <p:nvSpPr>
+          <p:cNvPr id="3" name="Shape 1">
+            <a:extLst xmlns:a="http://schemas.openxmlformats.org/drawingml/2006/main">
+              <a:ext uri="{FF2B5EF4-FFF2-40B4-BE49-F238E27FC236}">
+                <a16:creationId xmlns:a16="http://schemas.microsoft.com/office/drawing/2014/main" id="{E5E38E64-1936-46EC-BE8B-7E9DE57EE258}"/>
               </a:ext>
             </a:extLst>
           </p:cNvPr>
@@ -14117,7 +15310,7 @@
           <p:nvPr/>
         </p:nvPicPr>
         <p:blipFill>
-          <a:blip xmlns:r="http://schemas.openxmlformats.org/officeDocument/2006/relationships" xmlns:a="http://schemas.openxmlformats.org/drawingml/2006/main" r:embed="R4a772d607aaa4ac9"/>
+          <a:blip xmlns:r="http://schemas.openxmlformats.org/officeDocument/2006/relationships" xmlns:a="http://schemas.openxmlformats.org/drawingml/2006/main" r:embed="R0306a19abd3142e6"/>
           <a:stretch xmlns:a="http://schemas.openxmlformats.org/drawingml/2006/main">
             <a:fillRect l="0" t="0" r="0" b="0"/>
           </a:stretch>
@@ -14137,7 +15330,7 @@
           <p:cNvPr id="5" name="Text 2">
             <a:extLst xmlns:a="http://schemas.openxmlformats.org/drawingml/2006/main">
               <a:ext uri="{FF2B5EF4-FFF2-40B4-BE49-F238E27FC236}">
-                <a16:creationId xmlns:a16="http://schemas.microsoft.com/office/drawing/2014/main" id="{BC69CFA2-CE5E-4C52-AEBE-EDD2D6A9EFE2}"/>
+                <a16:creationId xmlns:a16="http://schemas.microsoft.com/office/drawing/2014/main" id="{31A691E1-1189-4036-BEEE-58B22D73C256}"/>
               </a:ext>
             </a:extLst>
           </p:cNvPr>
@@ -14183,7 +15376,7 @@
           <p:cNvPr id="6" name="Shape 3">
             <a:extLst xmlns:a="http://schemas.openxmlformats.org/drawingml/2006/main">
               <a:ext uri="{FF2B5EF4-FFF2-40B4-BE49-F238E27FC236}">
-                <a16:creationId xmlns:a16="http://schemas.microsoft.com/office/drawing/2014/main" id="{4AEC6EF6-AE28-4D5A-8B4A-4F59C688D152}"/>
+                <a16:creationId xmlns:a16="http://schemas.microsoft.com/office/drawing/2014/main" id="{6621DF98-207D-4A64-8241-48E8F0A9EB74}"/>
               </a:ext>
             </a:extLst>
           </p:cNvPr>
@@ -14210,7 +15403,7 @@
           <p:cNvPr id="7" name="Shape 4">
             <a:extLst xmlns:a="http://schemas.openxmlformats.org/drawingml/2006/main">
               <a:ext uri="{FF2B5EF4-FFF2-40B4-BE49-F238E27FC236}">
-                <a16:creationId xmlns:a16="http://schemas.microsoft.com/office/drawing/2014/main" id="{892751A9-B1C2-42B8-9304-BA77C9E0176D}"/>
+                <a16:creationId xmlns:a16="http://schemas.microsoft.com/office/drawing/2014/main" id="{2A895384-D1D1-4017-B2AD-04D5F9DAC147}"/>
               </a:ext>
             </a:extLst>
           </p:cNvPr>
@@ -14237,7 +15430,7 @@
           <p:cNvPr id="8" name="Text 5">
             <a:extLst xmlns:a="http://schemas.openxmlformats.org/drawingml/2006/main">
               <a:ext uri="{FF2B5EF4-FFF2-40B4-BE49-F238E27FC236}">
-                <a16:creationId xmlns:a16="http://schemas.microsoft.com/office/drawing/2014/main" id="{31F45C33-5567-4D20-A50F-EF28DAE7576D}"/>
+                <a16:creationId xmlns:a16="http://schemas.microsoft.com/office/drawing/2014/main" id="{D5A310F4-5919-408D-87B1-3CE290AEF447}"/>
               </a:ext>
             </a:extLst>
           </p:cNvPr>
@@ -14272,18 +15465,7 @@
                 <a:ea typeface="Calibri"/>
                 <a:cs typeface="Calibri"/>
               </a:rPr>
-              <a:t>TAKEAWAY   </a:t>
-            </a:r>
-            <a:r>
-              <a:rPr sz="1300">
-                <a:solidFill>
-                  <a:srgbClr val="1B2730"/>
-                </a:solidFill>
-                <a:latin typeface="Calibri"/>
-                <a:ea typeface="Calibri"/>
-                <a:cs typeface="Calibri"/>
-              </a:rPr>
-              <a:t>Cards pay out 5.7× more often than vehicle loans. Routing has money attached.</a:t>
+              <a:t>TAKEAWAY   In public CFPB data, credit-card complaints ended with monetary relief 5.7× as often as vehicle-loan complaints.</a:t>
             </a:r>
             <a:endParaRPr sz="1050"/>
           </a:p>
@@ -14294,7 +15476,7 @@
           <p:cNvPr id="9" name="Shape 6">
             <a:extLst xmlns:a="http://schemas.openxmlformats.org/drawingml/2006/main">
               <a:ext uri="{FF2B5EF4-FFF2-40B4-BE49-F238E27FC236}">
-                <a16:creationId xmlns:a16="http://schemas.microsoft.com/office/drawing/2014/main" id="{7E6E1D91-CD1C-4B97-ABB0-951719297948}"/>
+                <a16:creationId xmlns:a16="http://schemas.microsoft.com/office/drawing/2014/main" id="{67E25FD0-114A-43DA-B381-ED5ED615EB9B}"/>
               </a:ext>
             </a:extLst>
           </p:cNvPr>
@@ -14325,7 +15507,7 @@
           <p:cNvPr id="10" name="Text 7">
             <a:extLst xmlns:a="http://schemas.openxmlformats.org/drawingml/2006/main">
               <a:ext uri="{FF2B5EF4-FFF2-40B4-BE49-F238E27FC236}">
-                <a16:creationId xmlns:a16="http://schemas.microsoft.com/office/drawing/2014/main" id="{B376413C-65FA-4B69-94CC-DAF2ECAB0138}"/>
+                <a16:creationId xmlns:a16="http://schemas.microsoft.com/office/drawing/2014/main" id="{ABFDB0A2-26F9-4AED-AB57-83F0F8331767}"/>
               </a:ext>
             </a:extLst>
           </p:cNvPr>
@@ -14360,7 +15542,7 @@
           <p:cNvPr id="11" name="Text 8">
             <a:extLst xmlns:a="http://schemas.openxmlformats.org/drawingml/2006/main">
               <a:ext uri="{FF2B5EF4-FFF2-40B4-BE49-F238E27FC236}">
-                <a16:creationId xmlns:a16="http://schemas.microsoft.com/office/drawing/2014/main" id="{081777D3-6905-4917-BE52-1B8BF12E3B80}"/>
+                <a16:creationId xmlns:a16="http://schemas.microsoft.com/office/drawing/2014/main" id="{490DFB8F-8291-44CF-AA0E-08D8F10D683C}"/>
               </a:ext>
             </a:extLst>
           </p:cNvPr>
@@ -15420,7 +16602,7 @@
           <p:cNvPr id="13" name="Shape 9">
             <a:extLst xmlns:a="http://schemas.openxmlformats.org/drawingml/2006/main">
               <a:ext uri="{FF2B5EF4-FFF2-40B4-BE49-F238E27FC236}">
-                <a16:creationId xmlns:a16="http://schemas.microsoft.com/office/drawing/2014/main" id="{BD600CB7-E0F6-48DA-AB68-56D158EF24F7}"/>
+                <a16:creationId xmlns:a16="http://schemas.microsoft.com/office/drawing/2014/main" id="{058E1A81-D93E-4FDE-BBA8-FB47E36E48BB}"/>
               </a:ext>
             </a:extLst>
           </p:cNvPr>
@@ -15447,7 +16629,7 @@
           <p:cNvPr id="14" name="Shape 10">
             <a:extLst xmlns:a="http://schemas.openxmlformats.org/drawingml/2006/main">
               <a:ext uri="{FF2B5EF4-FFF2-40B4-BE49-F238E27FC236}">
-                <a16:creationId xmlns:a16="http://schemas.microsoft.com/office/drawing/2014/main" id="{AF2B0A2D-C084-45E1-993D-1A4A33C0FFFE}"/>
+                <a16:creationId xmlns:a16="http://schemas.microsoft.com/office/drawing/2014/main" id="{3D4B9AD0-36F3-4DF7-8AD1-76FBADC3E4D9}"/>
               </a:ext>
             </a:extLst>
           </p:cNvPr>
@@ -15474,7 +16656,7 @@
           <p:cNvPr id="15" name="Text 11">
             <a:extLst xmlns:a="http://schemas.openxmlformats.org/drawingml/2006/main">
               <a:ext uri="{FF2B5EF4-FFF2-40B4-BE49-F238E27FC236}">
-                <a16:creationId xmlns:a16="http://schemas.microsoft.com/office/drawing/2014/main" id="{010B44F1-100A-41D1-9DCD-D7732C29078B}"/>
+                <a16:creationId xmlns:a16="http://schemas.microsoft.com/office/drawing/2014/main" id="{89924444-5835-4F06-9F8F-D36A8E66FF83}"/>
               </a:ext>
             </a:extLst>
           </p:cNvPr>
@@ -15509,7 +16691,7 @@
                 <a:ea typeface="Calibri"/>
                 <a:cs typeface="Calibri"/>
               </a:rPr>
-              <a:t>That ratio should hold for her, because it follows from how the products work — not from who the firm is.</a:t>
+              <a:t>This is a public-data relationship; Phase 0 tests whether it appears in your complaint book.</a:t>
             </a:r>
             <a:endParaRPr sz="1250"/>
           </a:p>
@@ -15518,1024 +16700,7 @@
     </p:spTree>
     <p:extLst>
       <p:ext uri="{BB962C8B-B14F-4D97-AF65-F5344CB8AC3E}">
-        <p14:creationId xmlns:p14="http://schemas.microsoft.com/office/powerpoint/2010/main" val="2022655755"/>
-      </p:ext>
-    </p:extLst>
-  </p:cSld>
-</p:sld>
-</file>
-
-<file path=ppt/slides/slide9.xml><?xml version="1.0" encoding="utf-8"?>
-<p:sld xmlns:p="http://schemas.openxmlformats.org/presentationml/2006/main">
-  <p:cSld>
-    <p:bg>
-      <p:bgPr>
-        <a:solidFill xmlns:a="http://schemas.openxmlformats.org/drawingml/2006/main">
-          <a:srgbClr val="FFFFFF"/>
-        </a:solidFill>
-      </p:bgPr>
-    </p:bg>
-    <p:spTree>
-      <p:nvGrpSpPr>
-        <p:cNvPr id="1" name=""/>
-        <p:cNvGrpSpPr/>
-        <p:nvPr/>
-      </p:nvGrpSpPr>
-      <p:grpSpPr>
-        <a:xfrm xmlns:a="http://schemas.openxmlformats.org/drawingml/2006/main"/>
-      </p:grpSpPr>
-      <p:sp>
-        <p:nvSpPr>
-          <p:cNvPr id="2" name="Text 0">
-            <a:extLst xmlns:a="http://schemas.openxmlformats.org/drawingml/2006/main">
-              <a:ext uri="{FF2B5EF4-FFF2-40B4-BE49-F238E27FC236}">
-                <a16:creationId xmlns:a16="http://schemas.microsoft.com/office/drawing/2014/main" id="{5E6BBFD1-76F4-4264-AAFC-AA06B52A3320}"/>
-              </a:ext>
-            </a:extLst>
-          </p:cNvPr>
-          <p:cNvSpPr>
-            <a:spLocks xmlns:a="http://schemas.openxmlformats.org/drawingml/2006/main" noGrp="1"/>
-          </p:cNvSpPr>
-          <p:nvPr/>
-        </p:nvSpPr>
-        <p:spPr>
-          <a:xfrm xmlns:a="http://schemas.openxmlformats.org/drawingml/2006/main">
-            <a:off x="566928" y="310896"/>
-            <a:ext cx="11055096" cy="274320"/>
-          </a:xfrm>
-          <a:prstGeom xmlns:a="http://schemas.openxmlformats.org/drawingml/2006/main" prst="rect">
-            <a:avLst/>
-          </a:prstGeom>
-          <a:noFill xmlns:a="http://schemas.openxmlformats.org/drawingml/2006/main"/>
-        </p:spPr>
-        <p:txBody>
-          <a:bodyPr xmlns:a="http://schemas.openxmlformats.org/drawingml/2006/main" wrap="square" lIns="0" tIns="0" rIns="0" bIns="0" anchor="ctr"/>
-          <a:lstStyle xmlns:a="http://schemas.openxmlformats.org/drawingml/2006/main"/>
-          <a:p xmlns:a="http://schemas.openxmlformats.org/drawingml/2006/main">
-            <a:pPr marL="0" indent="0">
-              <a:buNone/>
-            </a:pPr>
-            <a:r>
-              <a:rPr sz="1050" b="1" spc="200">
-                <a:solidFill>
-                  <a:srgbClr val="6B7C88"/>
-                </a:solidFill>
-                <a:latin typeface="Calibri"/>
-                <a:ea typeface="Calibri"/>
-                <a:cs typeface="Calibri"/>
-              </a:rPr>
-              <a:t>CAPSTONE ROUND 1  ·  AI CONSULTING PITCH</a:t>
-            </a:r>
-            <a:endParaRPr sz="1050"/>
-          </a:p>
-        </p:txBody>
-      </p:sp>
-      <p:sp>
-        <p:nvSpPr>
-          <p:cNvPr id="3" name="Shape 1">
-            <a:extLst xmlns:a="http://schemas.openxmlformats.org/drawingml/2006/main">
-              <a:ext uri="{FF2B5EF4-FFF2-40B4-BE49-F238E27FC236}">
-                <a16:creationId xmlns:a16="http://schemas.microsoft.com/office/drawing/2014/main" id="{19F7D223-2961-4759-9A4D-FB5D65BF8CAA}"/>
-              </a:ext>
-            </a:extLst>
-          </p:cNvPr>
-          <p:cNvSpPr>
-            <a:spLocks xmlns:a="http://schemas.openxmlformats.org/drawingml/2006/main" noGrp="1"/>
-          </p:cNvSpPr>
-          <p:nvPr/>
-        </p:nvSpPr>
-        <p:spPr>
-          <a:xfrm xmlns:a="http://schemas.openxmlformats.org/drawingml/2006/main">
-            <a:off x="566928" y="658368"/>
-            <a:ext cx="566928" cy="566928"/>
-          </a:xfrm>
-          <a:prstGeom xmlns:a="http://schemas.openxmlformats.org/drawingml/2006/main" prst="ellipse">
-            <a:avLst/>
-          </a:prstGeom>
-          <a:solidFill xmlns:a="http://schemas.openxmlformats.org/drawingml/2006/main">
-            <a:srgbClr val="24343F"/>
-          </a:solidFill>
-        </p:spPr>
-      </p:sp>
-      <p:pic>
-        <p:nvPicPr>
-          <p:cNvPr id="20" name="Image 0"/>
-          <p:cNvPicPr>
-            <a:picLocks xmlns:a="http://schemas.openxmlformats.org/drawingml/2006/main" noChangeAspect="1"/>
-          </p:cNvPicPr>
-          <p:nvPr/>
-        </p:nvPicPr>
-        <p:blipFill>
-          <a:blip xmlns:r="http://schemas.openxmlformats.org/officeDocument/2006/relationships" xmlns:a="http://schemas.openxmlformats.org/drawingml/2006/main" r:embed="Rb5284b16b98e42e3"/>
-          <a:stretch xmlns:a="http://schemas.openxmlformats.org/drawingml/2006/main">
-            <a:fillRect l="0" t="0" r="0" b="0"/>
-          </a:stretch>
-        </p:blipFill>
-        <p:spPr>
-          <a:xfrm xmlns:a="http://schemas.openxmlformats.org/drawingml/2006/main">
-            <a:off x="708660" y="800100"/>
-            <a:ext cx="283464" cy="283464"/>
-          </a:xfrm>
-          <a:prstGeom xmlns:a="http://schemas.openxmlformats.org/drawingml/2006/main" prst="rect">
-            <a:avLst/>
-          </a:prstGeom>
-        </p:spPr>
-      </p:pic>
-      <p:sp>
-        <p:nvSpPr>
-          <p:cNvPr id="5" name="Text 2">
-            <a:extLst xmlns:a="http://schemas.openxmlformats.org/drawingml/2006/main">
-              <a:ext uri="{FF2B5EF4-FFF2-40B4-BE49-F238E27FC236}">
-                <a16:creationId xmlns:a16="http://schemas.microsoft.com/office/drawing/2014/main" id="{131C40A9-6942-40A2-9939-1E219E6C100C}"/>
-              </a:ext>
-            </a:extLst>
-          </p:cNvPr>
-          <p:cNvSpPr>
-            <a:spLocks xmlns:a="http://schemas.openxmlformats.org/drawingml/2006/main" noGrp="1"/>
-          </p:cNvSpPr>
-          <p:nvPr/>
-        </p:nvSpPr>
-        <p:spPr>
-          <a:xfrm xmlns:a="http://schemas.openxmlformats.org/drawingml/2006/main">
-            <a:off x="1316736" y="621792"/>
-            <a:ext cx="10305288" cy="658368"/>
-          </a:xfrm>
-          <a:prstGeom xmlns:a="http://schemas.openxmlformats.org/drawingml/2006/main" prst="rect">
-            <a:avLst/>
-          </a:prstGeom>
-          <a:noFill xmlns:a="http://schemas.openxmlformats.org/drawingml/2006/main"/>
-        </p:spPr>
-        <p:txBody>
-          <a:bodyPr xmlns:a="http://schemas.openxmlformats.org/drawingml/2006/main" wrap="square" lIns="0" tIns="0" rIns="0" bIns="0" anchor="ctr"/>
-          <a:lstStyle xmlns:a="http://schemas.openxmlformats.org/drawingml/2006/main"/>
-          <a:p xmlns:a="http://schemas.openxmlformats.org/drawingml/2006/main">
-            <a:pPr marL="0" indent="0">
-              <a:buNone/>
-            </a:pPr>
-            <a:r>
-              <a:rPr sz="3000" b="1">
-                <a:solidFill>
-                  <a:srgbClr val="24343F"/>
-                </a:solidFill>
-                <a:latin typeface="Trebuchet MS"/>
-                <a:ea typeface="Trebuchet MS"/>
-                <a:cs typeface="Trebuchet MS"/>
-              </a:rPr>
-              <a:t>All 60 monitored decisions are accounted for</a:t>
-            </a:r>
-            <a:endParaRPr sz="3000"/>
-          </a:p>
-        </p:txBody>
-      </p:sp>
-      <p:sp>
-        <p:nvSpPr>
-          <p:cNvPr id="6" name="Shape 3">
-            <a:extLst xmlns:a="http://schemas.openxmlformats.org/drawingml/2006/main">
-              <a:ext uri="{FF2B5EF4-FFF2-40B4-BE49-F238E27FC236}">
-                <a16:creationId xmlns:a16="http://schemas.microsoft.com/office/drawing/2014/main" id="{C2695AF7-C40E-4C3B-96FF-2B39034E3FDC}"/>
-              </a:ext>
-            </a:extLst>
-          </p:cNvPr>
-          <p:cNvSpPr>
-            <a:spLocks xmlns:a="http://schemas.openxmlformats.org/drawingml/2006/main" noGrp="1"/>
-          </p:cNvSpPr>
-          <p:nvPr/>
-        </p:nvSpPr>
-        <p:spPr>
-          <a:xfrm xmlns:a="http://schemas.openxmlformats.org/drawingml/2006/main">
-            <a:off x="566928" y="1481328"/>
-            <a:ext cx="11055096" cy="676656"/>
-          </a:xfrm>
-          <a:prstGeom xmlns:a="http://schemas.openxmlformats.org/drawingml/2006/main" prst="rect">
-            <a:avLst/>
-          </a:prstGeom>
-          <a:solidFill xmlns:a="http://schemas.openxmlformats.org/drawingml/2006/main">
-            <a:srgbClr val="EFF5F9"/>
-          </a:solidFill>
-        </p:spPr>
-      </p:sp>
-      <p:sp>
-        <p:nvSpPr>
-          <p:cNvPr id="7" name="Shape 4">
-            <a:extLst xmlns:a="http://schemas.openxmlformats.org/drawingml/2006/main">
-              <a:ext uri="{FF2B5EF4-FFF2-40B4-BE49-F238E27FC236}">
-                <a16:creationId xmlns:a16="http://schemas.microsoft.com/office/drawing/2014/main" id="{9031ADDA-3B1D-41FC-AF8D-3C14853F797A}"/>
-              </a:ext>
-            </a:extLst>
-          </p:cNvPr>
-          <p:cNvSpPr>
-            <a:spLocks xmlns:a="http://schemas.openxmlformats.org/drawingml/2006/main" noGrp="1"/>
-          </p:cNvSpPr>
-          <p:nvPr/>
-        </p:nvSpPr>
-        <p:spPr>
-          <a:xfrm xmlns:a="http://schemas.openxmlformats.org/drawingml/2006/main">
-            <a:off x="566928" y="1481328"/>
-            <a:ext cx="82296" cy="676656"/>
-          </a:xfrm>
-          <a:prstGeom xmlns:a="http://schemas.openxmlformats.org/drawingml/2006/main" prst="rect">
-            <a:avLst/>
-          </a:prstGeom>
-          <a:solidFill xmlns:a="http://schemas.openxmlformats.org/drawingml/2006/main">
-            <a:srgbClr val="2A78D6"/>
-          </a:solidFill>
-        </p:spPr>
-      </p:sp>
-      <p:sp>
-        <p:nvSpPr>
-          <p:cNvPr id="8" name="Text 5">
-            <a:extLst xmlns:a="http://schemas.openxmlformats.org/drawingml/2006/main">
-              <a:ext uri="{FF2B5EF4-FFF2-40B4-BE49-F238E27FC236}">
-                <a16:creationId xmlns:a16="http://schemas.microsoft.com/office/drawing/2014/main" id="{74FDC3F0-CA8E-480E-9F2A-89CB67E989C0}"/>
-              </a:ext>
-            </a:extLst>
-          </p:cNvPr>
-          <p:cNvSpPr>
-            <a:spLocks xmlns:a="http://schemas.openxmlformats.org/drawingml/2006/main" noGrp="1"/>
-          </p:cNvSpPr>
-          <p:nvPr/>
-        </p:nvSpPr>
-        <p:spPr>
-          <a:xfrm xmlns:a="http://schemas.openxmlformats.org/drawingml/2006/main">
-            <a:off x="822960" y="1481328"/>
-            <a:ext cx="10597896" cy="676656"/>
-          </a:xfrm>
-          <a:prstGeom xmlns:a="http://schemas.openxmlformats.org/drawingml/2006/main" prst="rect">
-            <a:avLst/>
-          </a:prstGeom>
-          <a:noFill xmlns:a="http://schemas.openxmlformats.org/drawingml/2006/main"/>
-        </p:spPr>
-        <p:txBody>
-          <a:bodyPr xmlns:a="http://schemas.openxmlformats.org/drawingml/2006/main" wrap="square" lIns="0" tIns="0" rIns="0" bIns="0" anchor="ctr"/>
-          <a:lstStyle xmlns:a="http://schemas.openxmlformats.org/drawingml/2006/main"/>
-          <a:p xmlns:a="http://schemas.openxmlformats.org/drawingml/2006/main">
-            <a:pPr marL="0" indent="0">
-              <a:buNone/>
-            </a:pPr>
-            <a:r>
-              <a:rPr sz="1050" b="1" spc="100">
-                <a:solidFill>
-                  <a:srgbClr val="2A78D6"/>
-                </a:solidFill>
-                <a:latin typeface="Calibri"/>
-                <a:ea typeface="Calibri"/>
-                <a:cs typeface="Calibri"/>
-              </a:rPr>
-              <a:t>TAKEAWAY   </a:t>
-            </a:r>
-            <a:r>
-              <a:rPr sz="1300">
-                <a:solidFill>
-                  <a:srgbClr val="1B2730"/>
-                </a:solidFill>
-                <a:latin typeface="Calibri"/>
-                <a:ea typeface="Calibri"/>
-                <a:cs typeface="Calibri"/>
-              </a:rPr>
-              <a:t>60 decisions traced. Nothing silently wrong.</a:t>
-            </a:r>
-            <a:endParaRPr sz="1050"/>
-          </a:p>
-        </p:txBody>
-      </p:sp>
-      <p:sp>
-        <p:nvSpPr>
-          <p:cNvPr id="9" name="Shape 6">
-            <a:extLst xmlns:a="http://schemas.openxmlformats.org/drawingml/2006/main">
-              <a:ext uri="{FF2B5EF4-FFF2-40B4-BE49-F238E27FC236}">
-                <a16:creationId xmlns:a16="http://schemas.microsoft.com/office/drawing/2014/main" id="{35F65E03-4EAC-4FA0-AE67-48134FDAF914}"/>
-              </a:ext>
-            </a:extLst>
-          </p:cNvPr>
-          <p:cNvSpPr>
-            <a:spLocks xmlns:a="http://schemas.openxmlformats.org/drawingml/2006/main" noGrp="1"/>
-          </p:cNvSpPr>
-          <p:nvPr/>
-        </p:nvSpPr>
-        <p:spPr>
-          <a:xfrm xmlns:a="http://schemas.openxmlformats.org/drawingml/2006/main">
-            <a:off x="566928" y="6437376"/>
-            <a:ext cx="11055096" cy="0"/>
-          </a:xfrm>
-          <a:prstGeom xmlns:a="http://schemas.openxmlformats.org/drawingml/2006/main" prst="line">
-            <a:avLst/>
-          </a:prstGeom>
-          <a:noFill xmlns:a="http://schemas.openxmlformats.org/drawingml/2006/main"/>
-          <a:ln xmlns:a="http://schemas.openxmlformats.org/drawingml/2006/main" w="12700">
-            <a:solidFill>
-              <a:srgbClr val="D9E3EA"/>
-            </a:solidFill>
-            <a:prstDash val="solid"/>
-          </a:ln>
-        </p:spPr>
-      </p:sp>
-      <p:sp>
-        <p:nvSpPr>
-          <p:cNvPr id="10" name="Text 7">
-            <a:extLst xmlns:a="http://schemas.openxmlformats.org/drawingml/2006/main">
-              <a:ext uri="{FF2B5EF4-FFF2-40B4-BE49-F238E27FC236}">
-                <a16:creationId xmlns:a16="http://schemas.microsoft.com/office/drawing/2014/main" id="{8F3AF063-45B0-4DE8-9680-14F33E758D01}"/>
-              </a:ext>
-            </a:extLst>
-          </p:cNvPr>
-          <p:cNvSpPr>
-            <a:spLocks xmlns:a="http://schemas.openxmlformats.org/drawingml/2006/main" noGrp="1"/>
-          </p:cNvSpPr>
-          <p:nvPr/>
-        </p:nvSpPr>
-        <p:spPr>
-          <a:xfrm xmlns:a="http://schemas.openxmlformats.org/drawingml/2006/main">
-            <a:off x="566928" y="6473952"/>
-            <a:ext cx="7315200" cy="274320"/>
-          </a:xfrm>
-          <a:prstGeom xmlns:a="http://schemas.openxmlformats.org/drawingml/2006/main" prst="rect">
-            <a:avLst/>
-          </a:prstGeom>
-          <a:noFill xmlns:a="http://schemas.openxmlformats.org/drawingml/2006/main"/>
-        </p:spPr>
-        <p:txBody>
-          <a:bodyPr xmlns:a="http://schemas.openxmlformats.org/drawingml/2006/main" wrap="square" lIns="0" tIns="0" rIns="0" bIns="0" anchor="ctr"/>
-          <a:lstStyle xmlns:a="http://schemas.openxmlformats.org/drawingml/2006/main"/>
-          <a:p xmlns:a="http://schemas.openxmlformats.org/drawingml/2006/main">
-            <a:pPr marL="0" indent="0">
-              <a:buNone/>
-            </a:pPr>
-            <a:endParaRPr sz="850"/>
-          </a:p>
-        </p:txBody>
-      </p:sp>
-      <p:sp>
-        <p:nvSpPr>
-          <p:cNvPr id="11" name="Text 8">
-            <a:extLst xmlns:a="http://schemas.openxmlformats.org/drawingml/2006/main">
-              <a:ext uri="{FF2B5EF4-FFF2-40B4-BE49-F238E27FC236}">
-                <a16:creationId xmlns:a16="http://schemas.microsoft.com/office/drawing/2014/main" id="{D3E66F24-BD78-4918-BACC-CD2EE7D89F09}"/>
-              </a:ext>
-            </a:extLst>
-          </p:cNvPr>
-          <p:cNvSpPr>
-            <a:spLocks xmlns:a="http://schemas.openxmlformats.org/drawingml/2006/main" noGrp="1"/>
-          </p:cNvSpPr>
-          <p:nvPr/>
-        </p:nvSpPr>
-        <p:spPr>
-          <a:xfrm xmlns:a="http://schemas.openxmlformats.org/drawingml/2006/main">
-            <a:off x="10524744" y="6473952"/>
-            <a:ext cx="1097280" cy="274320"/>
-          </a:xfrm>
-          <a:prstGeom xmlns:a="http://schemas.openxmlformats.org/drawingml/2006/main" prst="rect">
-            <a:avLst/>
-          </a:prstGeom>
-          <a:noFill xmlns:a="http://schemas.openxmlformats.org/drawingml/2006/main"/>
-        </p:spPr>
-        <p:txBody>
-          <a:bodyPr xmlns:a="http://schemas.openxmlformats.org/drawingml/2006/main" wrap="square" lIns="0" tIns="0" rIns="0" bIns="0" anchor="ctr"/>
-          <a:lstStyle xmlns:a="http://schemas.openxmlformats.org/drawingml/2006/main"/>
-          <a:p xmlns:a="http://schemas.openxmlformats.org/drawingml/2006/main">
-            <a:pPr marL="0" indent="0" algn="r">
-              <a:buNone/>
-            </a:pPr>
-            <a:r>
-              <a:rPr sz="850">
-                <a:solidFill>
-                  <a:srgbClr val="6B7C88"/>
-                </a:solidFill>
-                <a:latin typeface="Calibri"/>
-                <a:ea typeface="Calibri"/>
-                <a:cs typeface="Calibri"/>
-              </a:rPr>
-              <a:t>8</a:t>
-            </a:r>
-            <a:endParaRPr sz="850"/>
-          </a:p>
-        </p:txBody>
-      </p:sp>
-      <p:graphicFrame>
-        <p:nvGraphicFramePr>
-          <p:cNvPr id="28" name="Table 0"/>
-          <p:cNvGraphicFramePr/>
-          <p:nvPr/>
-        </p:nvGraphicFramePr>
-        <p:xfrm>
-          <a:off xmlns:a="http://schemas.openxmlformats.org/drawingml/2006/main" x="566928" y="2395728"/>
-          <a:ext xmlns:a="http://schemas.openxmlformats.org/drawingml/2006/main" cx="11055096" cy="914400"/>
-        </p:xfrm>
-        <a:graphic xmlns:a="http://schemas.openxmlformats.org/drawingml/2006/main">
-          <a:graphicData uri="http://schemas.openxmlformats.org/drawingml/2006/table">
-            <a:tbl>
-              <a:tblPr/>
-              <a:tblGrid>
-                <a:gridCol w="3931920"/>
-                <a:gridCol w="7123176"/>
-              </a:tblGrid>
-              <a:tr h="329184">
-                <a:tc>
-                  <a:txBody>
-                    <a:bodyPr/>
-                    <a:lstStyle/>
-                    <a:p>
-                      <a:pPr marL="0" indent="0">
-                        <a:buNone/>
-                      </a:pPr>
-                      <a:r>
-                        <a:rPr sz="1100" b="1" spc="100">
-                          <a:solidFill>
-                            <a:srgbClr val="FFFFFF"/>
-                          </a:solidFill>
-                        </a:rPr>
-                        <a:t>WHAT HAPPENED</a:t>
-                      </a:r>
-                      <a:endParaRPr sz="1100"/>
-                    </a:p>
-                  </a:txBody>
-                  <a:tcPr marL="101600" marR="101600" marT="25400" marB="25400" anchor="ctr">
-                    <a:lnL w="12700" cmpd="sng">
-                      <a:solidFill>
-                        <a:srgbClr val="D9E3EA"/>
-                      </a:solidFill>
-                      <a:prstDash val="solid"/>
-                    </a:lnL>
-                    <a:lnR w="12700" cmpd="sng">
-                      <a:solidFill>
-                        <a:srgbClr val="D9E3EA"/>
-                      </a:solidFill>
-                      <a:prstDash val="solid"/>
-                    </a:lnR>
-                    <a:lnT w="12700" cmpd="sng">
-                      <a:solidFill>
-                        <a:srgbClr val="D9E3EA"/>
-                      </a:solidFill>
-                      <a:prstDash val="solid"/>
-                    </a:lnT>
-                    <a:lnB w="12700" cmpd="sng">
-                      <a:solidFill>
-                        <a:srgbClr val="D9E3EA"/>
-                      </a:solidFill>
-                      <a:prstDash val="solid"/>
-                    </a:lnB>
-                    <a:solidFill>
-                      <a:srgbClr val="445A69"/>
-                    </a:solidFill>
-                  </a:tcPr>
-                </a:tc>
-                <a:tc>
-                  <a:txBody>
-                    <a:bodyPr/>
-                    <a:lstStyle/>
-                    <a:p>
-                      <a:pPr marL="0" indent="0">
-                        <a:buNone/>
-                      </a:pPr>
-                      <a:r>
-                        <a:rPr sz="1100" b="1" spc="100">
-                          <a:solidFill>
-                            <a:srgbClr val="1D2A32"/>
-                          </a:solidFill>
-                        </a:rPr>
-                        <a:t>HOW OFTEN, IN 60 DECISIONS</a:t>
-                      </a:r>
-                      <a:endParaRPr sz="1100"/>
-                    </a:p>
-                  </a:txBody>
-                  <a:tcPr marL="101600" marR="101600" marT="25400" marB="25400" anchor="ctr">
-                    <a:lnL w="12700" cmpd="sng">
-                      <a:solidFill>
-                        <a:srgbClr val="D9E3EA"/>
-                      </a:solidFill>
-                      <a:prstDash val="solid"/>
-                    </a:lnL>
-                    <a:lnR w="12700" cmpd="sng">
-                      <a:solidFill>
-                        <a:srgbClr val="D9E3EA"/>
-                      </a:solidFill>
-                      <a:prstDash val="solid"/>
-                    </a:lnR>
-                    <a:lnT w="12700" cmpd="sng">
-                      <a:solidFill>
-                        <a:srgbClr val="D9E3EA"/>
-                      </a:solidFill>
-                      <a:prstDash val="solid"/>
-                    </a:lnT>
-                    <a:lnB w="12700" cmpd="sng">
-                      <a:solidFill>
-                        <a:srgbClr val="D9E3EA"/>
-                      </a:solidFill>
-                      <a:prstDash val="solid"/>
-                    </a:lnB>
-                    <a:solidFill>
-                      <a:srgbClr val="2A78D6"/>
-                    </a:solidFill>
-                  </a:tcPr>
-                </a:tc>
-              </a:tr>
-              <a:tr h="338328">
-                <a:tc>
-                  <a:txBody>
-                    <a:bodyPr/>
-                    <a:lstStyle/>
-                    <a:p>
-                      <a:pPr marL="0" indent="0">
-                        <a:buNone/>
-                      </a:pPr>
-                      <a:r>
-                        <a:rPr sz="1050" b="1">
-                          <a:solidFill>
-                            <a:srgbClr val="24343F"/>
-                          </a:solidFill>
-                        </a:rPr>
-                        <a:t>Proposed a team, all checks passed</a:t>
-                      </a:r>
-                      <a:endParaRPr sz="1050"/>
-                    </a:p>
-                  </a:txBody>
-                  <a:tcPr marL="101600" marR="101600" marT="25400" marB="25400" anchor="ctr">
-                    <a:lnL w="12700" cmpd="sng">
-                      <a:solidFill>
-                        <a:srgbClr val="D9E3EA"/>
-                      </a:solidFill>
-                      <a:prstDash val="solid"/>
-                    </a:lnL>
-                    <a:lnR w="12700" cmpd="sng">
-                      <a:solidFill>
-                        <a:srgbClr val="D9E3EA"/>
-                      </a:solidFill>
-                      <a:prstDash val="solid"/>
-                    </a:lnR>
-                    <a:lnT w="12700" cmpd="sng">
-                      <a:solidFill>
-                        <a:srgbClr val="D9E3EA"/>
-                      </a:solidFill>
-                      <a:prstDash val="solid"/>
-                    </a:lnT>
-                    <a:lnB w="12700" cmpd="sng">
-                      <a:solidFill>
-                        <a:srgbClr val="D9E3EA"/>
-                      </a:solidFill>
-                      <a:prstDash val="solid"/>
-                    </a:lnB>
-                    <a:solidFill>
-                      <a:srgbClr val="FFFFFF"/>
-                    </a:solidFill>
-                  </a:tcPr>
-                </a:tc>
-                <a:tc>
-                  <a:txBody>
-                    <a:bodyPr/>
-                    <a:lstStyle/>
-                    <a:p>
-                      <a:pPr marL="0" indent="0">
-                        <a:buNone/>
-                      </a:pPr>
-                      <a:r>
-                        <a:rPr sz="1050">
-                          <a:solidFill>
-                            <a:srgbClr val="1B2730"/>
-                          </a:solidFill>
-                        </a:rPr>
-                        <a:t>52</a:t>
-                      </a:r>
-                      <a:endParaRPr sz="1050"/>
-                    </a:p>
-                  </a:txBody>
-                  <a:tcPr marL="101600" marR="101600" marT="25400" marB="25400" anchor="ctr">
-                    <a:lnL w="12700" cmpd="sng">
-                      <a:solidFill>
-                        <a:srgbClr val="D9E3EA"/>
-                      </a:solidFill>
-                      <a:prstDash val="solid"/>
-                    </a:lnL>
-                    <a:lnR w="12700" cmpd="sng">
-                      <a:solidFill>
-                        <a:srgbClr val="D9E3EA"/>
-                      </a:solidFill>
-                      <a:prstDash val="solid"/>
-                    </a:lnR>
-                    <a:lnT w="12700" cmpd="sng">
-                      <a:solidFill>
-                        <a:srgbClr val="D9E3EA"/>
-                      </a:solidFill>
-                      <a:prstDash val="solid"/>
-                    </a:lnT>
-                    <a:lnB w="12700" cmpd="sng">
-                      <a:solidFill>
-                        <a:srgbClr val="D9E3EA"/>
-                      </a:solidFill>
-                      <a:prstDash val="solid"/>
-                    </a:lnB>
-                    <a:solidFill>
-                      <a:srgbClr val="FFFFFF"/>
-                    </a:solidFill>
-                  </a:tcPr>
-                </a:tc>
-              </a:tr>
-              <a:tr h="338328">
-                <a:tc>
-                  <a:txBody>
-                    <a:bodyPr/>
-                    <a:lstStyle/>
-                    <a:p>
-                      <a:pPr marL="0" indent="0">
-                        <a:buNone/>
-                      </a:pPr>
-                      <a:r>
-                        <a:rPr sz="1050" b="1">
-                          <a:solidFill>
-                            <a:srgbClr val="24343F"/>
-                          </a:solidFill>
-                        </a:rPr>
-                        <a:t>Quote was not actually in the complaint</a:t>
-                      </a:r>
-                      <a:endParaRPr sz="1050"/>
-                    </a:p>
-                  </a:txBody>
-                  <a:tcPr marL="101600" marR="101600" marT="25400" marB="25400" anchor="ctr">
-                    <a:lnL w="12700" cmpd="sng">
-                      <a:solidFill>
-                        <a:srgbClr val="D9E3EA"/>
-                      </a:solidFill>
-                      <a:prstDash val="solid"/>
-                    </a:lnL>
-                    <a:lnR w="12700" cmpd="sng">
-                      <a:solidFill>
-                        <a:srgbClr val="D9E3EA"/>
-                      </a:solidFill>
-                      <a:prstDash val="solid"/>
-                    </a:lnR>
-                    <a:lnT w="12700" cmpd="sng">
-                      <a:solidFill>
-                        <a:srgbClr val="D9E3EA"/>
-                      </a:solidFill>
-                      <a:prstDash val="solid"/>
-                    </a:lnT>
-                    <a:lnB w="12700" cmpd="sng">
-                      <a:solidFill>
-                        <a:srgbClr val="D9E3EA"/>
-                      </a:solidFill>
-                      <a:prstDash val="solid"/>
-                    </a:lnB>
-                    <a:solidFill>
-                      <a:srgbClr val="EFF5F9"/>
-                    </a:solidFill>
-                  </a:tcPr>
-                </a:tc>
-                <a:tc>
-                  <a:txBody>
-                    <a:bodyPr/>
-                    <a:lstStyle/>
-                    <a:p>
-                      <a:pPr marL="0" indent="0">
-                        <a:buNone/>
-                      </a:pPr>
-                      <a:r>
-                        <a:rPr sz="1050">
-                          <a:solidFill>
-                            <a:srgbClr val="1B2730"/>
-                          </a:solidFill>
-                        </a:rPr>
-                        <a:t>4  —  caught, sent to a human</a:t>
-                      </a:r>
-                      <a:endParaRPr sz="1050"/>
-                    </a:p>
-                  </a:txBody>
-                  <a:tcPr marL="101600" marR="101600" marT="25400" marB="25400" anchor="ctr">
-                    <a:lnL w="12700" cmpd="sng">
-                      <a:solidFill>
-                        <a:srgbClr val="D9E3EA"/>
-                      </a:solidFill>
-                      <a:prstDash val="solid"/>
-                    </a:lnL>
-                    <a:lnR w="12700" cmpd="sng">
-                      <a:solidFill>
-                        <a:srgbClr val="D9E3EA"/>
-                      </a:solidFill>
-                      <a:prstDash val="solid"/>
-                    </a:lnR>
-                    <a:lnT w="12700" cmpd="sng">
-                      <a:solidFill>
-                        <a:srgbClr val="D9E3EA"/>
-                      </a:solidFill>
-                      <a:prstDash val="solid"/>
-                    </a:lnT>
-                    <a:lnB w="12700" cmpd="sng">
-                      <a:solidFill>
-                        <a:srgbClr val="D9E3EA"/>
-                      </a:solidFill>
-                      <a:prstDash val="solid"/>
-                    </a:lnB>
-                    <a:solidFill>
-                      <a:srgbClr val="EFF5F9"/>
-                    </a:solidFill>
-                  </a:tcPr>
-                </a:tc>
-              </a:tr>
-              <a:tr h="338328">
-                <a:tc>
-                  <a:txBody>
-                    <a:bodyPr/>
-                    <a:lstStyle/>
-                    <a:p>
-                      <a:pPr marL="0" indent="0">
-                        <a:buNone/>
-                      </a:pPr>
-                      <a:r>
-                        <a:rPr sz="1050" b="1">
-                          <a:solidFill>
-                            <a:srgbClr val="24343F"/>
-                          </a:solidFill>
-                        </a:rPr>
-                        <a:t>Confidence below the 0.70 threshold</a:t>
-                      </a:r>
-                      <a:endParaRPr sz="1050"/>
-                    </a:p>
-                  </a:txBody>
-                  <a:tcPr marL="101600" marR="101600" marT="25400" marB="25400" anchor="ctr">
-                    <a:lnL w="12700" cmpd="sng">
-                      <a:solidFill>
-                        <a:srgbClr val="D9E3EA"/>
-                      </a:solidFill>
-                      <a:prstDash val="solid"/>
-                    </a:lnL>
-                    <a:lnR w="12700" cmpd="sng">
-                      <a:solidFill>
-                        <a:srgbClr val="D9E3EA"/>
-                      </a:solidFill>
-                      <a:prstDash val="solid"/>
-                    </a:lnR>
-                    <a:lnT w="12700" cmpd="sng">
-                      <a:solidFill>
-                        <a:srgbClr val="D9E3EA"/>
-                      </a:solidFill>
-                      <a:prstDash val="solid"/>
-                    </a:lnT>
-                    <a:lnB w="12700" cmpd="sng">
-                      <a:solidFill>
-                        <a:srgbClr val="D9E3EA"/>
-                      </a:solidFill>
-                      <a:prstDash val="solid"/>
-                    </a:lnB>
-                    <a:solidFill>
-                      <a:srgbClr val="FFFFFF"/>
-                    </a:solidFill>
-                  </a:tcPr>
-                </a:tc>
-                <a:tc>
-                  <a:txBody>
-                    <a:bodyPr/>
-                    <a:lstStyle/>
-                    <a:p>
-                      <a:pPr marL="0" indent="0">
-                        <a:buNone/>
-                      </a:pPr>
-                      <a:r>
-                        <a:rPr sz="1050">
-                          <a:solidFill>
-                            <a:srgbClr val="1B2730"/>
-                          </a:solidFill>
-                        </a:rPr>
-                        <a:t>4  —  caught, sent to a human</a:t>
-                      </a:r>
-                      <a:endParaRPr sz="1050"/>
-                    </a:p>
-                  </a:txBody>
-                  <a:tcPr marL="101600" marR="101600" marT="25400" marB="25400" anchor="ctr">
-                    <a:lnL w="12700" cmpd="sng">
-                      <a:solidFill>
-                        <a:srgbClr val="D9E3EA"/>
-                      </a:solidFill>
-                      <a:prstDash val="solid"/>
-                    </a:lnL>
-                    <a:lnR w="12700" cmpd="sng">
-                      <a:solidFill>
-                        <a:srgbClr val="D9E3EA"/>
-                      </a:solidFill>
-                      <a:prstDash val="solid"/>
-                    </a:lnR>
-                    <a:lnT w="12700" cmpd="sng">
-                      <a:solidFill>
-                        <a:srgbClr val="D9E3EA"/>
-                      </a:solidFill>
-                      <a:prstDash val="solid"/>
-                    </a:lnT>
-                    <a:lnB w="12700" cmpd="sng">
-                      <a:solidFill>
-                        <a:srgbClr val="D9E3EA"/>
-                      </a:solidFill>
-                      <a:prstDash val="solid"/>
-                    </a:lnB>
-                    <a:solidFill>
-                      <a:srgbClr val="FFFFFF"/>
-                    </a:solidFill>
-                  </a:tcPr>
-                </a:tc>
-              </a:tr>
-              <a:tr h="338328">
-                <a:tc>
-                  <a:txBody>
-                    <a:bodyPr/>
-                    <a:lstStyle/>
-                    <a:p>
-                      <a:pPr marL="0" indent="0">
-                        <a:buNone/>
-                      </a:pPr>
-                      <a:r>
-                        <a:rPr sz="1050" b="1">
-                          <a:solidFill>
-                            <a:srgbClr val="24343F"/>
-                          </a:solidFill>
-                        </a:rPr>
-                        <a:t>Silently wrong, with no record</a:t>
-                      </a:r>
-                      <a:endParaRPr sz="1050"/>
-                    </a:p>
-                  </a:txBody>
-                  <a:tcPr marL="101600" marR="101600" marT="25400" marB="25400" anchor="ctr">
-                    <a:lnL w="12700" cmpd="sng">
-                      <a:solidFill>
-                        <a:srgbClr val="D9E3EA"/>
-                      </a:solidFill>
-                      <a:prstDash val="solid"/>
-                    </a:lnL>
-                    <a:lnR w="12700" cmpd="sng">
-                      <a:solidFill>
-                        <a:srgbClr val="D9E3EA"/>
-                      </a:solidFill>
-                      <a:prstDash val="solid"/>
-                    </a:lnR>
-                    <a:lnT w="12700" cmpd="sng">
-                      <a:solidFill>
-                        <a:srgbClr val="D9E3EA"/>
-                      </a:solidFill>
-                      <a:prstDash val="solid"/>
-                    </a:lnT>
-                    <a:lnB w="12700" cmpd="sng">
-                      <a:solidFill>
-                        <a:srgbClr val="D9E3EA"/>
-                      </a:solidFill>
-                      <a:prstDash val="solid"/>
-                    </a:lnB>
-                    <a:solidFill>
-                      <a:srgbClr val="EFF5F9"/>
-                    </a:solidFill>
-                  </a:tcPr>
-                </a:tc>
-                <a:tc>
-                  <a:txBody>
-                    <a:bodyPr/>
-                    <a:lstStyle/>
-                    <a:p>
-                      <a:pPr marL="0" indent="0">
-                        <a:buNone/>
-                      </a:pPr>
-                      <a:r>
-                        <a:rPr sz="1050">
-                          <a:solidFill>
-                            <a:srgbClr val="1B2730"/>
-                          </a:solidFill>
-                        </a:rPr>
-                        <a:t>0</a:t>
-                      </a:r>
-                      <a:endParaRPr sz="1050"/>
-                    </a:p>
-                  </a:txBody>
-                  <a:tcPr marL="101600" marR="101600" marT="25400" marB="25400" anchor="ctr">
-                    <a:lnL w="12700" cmpd="sng">
-                      <a:solidFill>
-                        <a:srgbClr val="D9E3EA"/>
-                      </a:solidFill>
-                      <a:prstDash val="solid"/>
-                    </a:lnL>
-                    <a:lnR w="12700" cmpd="sng">
-                      <a:solidFill>
-                        <a:srgbClr val="D9E3EA"/>
-                      </a:solidFill>
-                      <a:prstDash val="solid"/>
-                    </a:lnR>
-                    <a:lnT w="12700" cmpd="sng">
-                      <a:solidFill>
-                        <a:srgbClr val="D9E3EA"/>
-                      </a:solidFill>
-                      <a:prstDash val="solid"/>
-                    </a:lnT>
-                    <a:lnB w="12700" cmpd="sng">
-                      <a:solidFill>
-                        <a:srgbClr val="D9E3EA"/>
-                      </a:solidFill>
-                      <a:prstDash val="solid"/>
-                    </a:lnB>
-                    <a:solidFill>
-                      <a:srgbClr val="EFF5F9"/>
-                    </a:solidFill>
-                  </a:tcPr>
-                </a:tc>
-              </a:tr>
-            </a:tbl>
-          </a:graphicData>
-        </a:graphic>
-      </p:graphicFrame>
-      <p:sp>
-        <p:nvSpPr>
-          <p:cNvPr id="13" name="Shape 9">
-            <a:extLst xmlns:a="http://schemas.openxmlformats.org/drawingml/2006/main">
-              <a:ext uri="{FF2B5EF4-FFF2-40B4-BE49-F238E27FC236}">
-                <a16:creationId xmlns:a16="http://schemas.microsoft.com/office/drawing/2014/main" id="{FF7A1D08-7399-458B-89FA-223DAFA009F4}"/>
-              </a:ext>
-            </a:extLst>
-          </p:cNvPr>
-          <p:cNvSpPr>
-            <a:spLocks xmlns:a="http://schemas.openxmlformats.org/drawingml/2006/main" noGrp="1"/>
-          </p:cNvSpPr>
-          <p:nvPr/>
-        </p:nvSpPr>
-        <p:spPr>
-          <a:xfrm xmlns:a="http://schemas.openxmlformats.org/drawingml/2006/main">
-            <a:off x="566928" y="4306824"/>
-            <a:ext cx="11055096" cy="640080"/>
-          </a:xfrm>
-          <a:prstGeom xmlns:a="http://schemas.openxmlformats.org/drawingml/2006/main" prst="rect">
-            <a:avLst/>
-          </a:prstGeom>
-          <a:solidFill xmlns:a="http://schemas.openxmlformats.org/drawingml/2006/main">
-            <a:srgbClr val="24343F"/>
-          </a:solidFill>
-        </p:spPr>
-      </p:sp>
-      <p:sp>
-        <p:nvSpPr>
-          <p:cNvPr id="14" name="Shape 10">
-            <a:extLst xmlns:a="http://schemas.openxmlformats.org/drawingml/2006/main">
-              <a:ext uri="{FF2B5EF4-FFF2-40B4-BE49-F238E27FC236}">
-                <a16:creationId xmlns:a16="http://schemas.microsoft.com/office/drawing/2014/main" id="{20C0D579-94D8-42B4-88DB-5392DA93A69F}"/>
-              </a:ext>
-            </a:extLst>
-          </p:cNvPr>
-          <p:cNvSpPr>
-            <a:spLocks xmlns:a="http://schemas.openxmlformats.org/drawingml/2006/main" noGrp="1"/>
-          </p:cNvSpPr>
-          <p:nvPr/>
-        </p:nvSpPr>
-        <p:spPr>
-          <a:xfrm xmlns:a="http://schemas.openxmlformats.org/drawingml/2006/main">
-            <a:off x="566928" y="4306824"/>
-            <a:ext cx="82296" cy="640080"/>
-          </a:xfrm>
-          <a:prstGeom xmlns:a="http://schemas.openxmlformats.org/drawingml/2006/main" prst="rect">
-            <a:avLst/>
-          </a:prstGeom>
-          <a:solidFill xmlns:a="http://schemas.openxmlformats.org/drawingml/2006/main">
-            <a:srgbClr val="2A78D6"/>
-          </a:solidFill>
-        </p:spPr>
-      </p:sp>
-      <p:sp>
-        <p:nvSpPr>
-          <p:cNvPr id="15" name="Text 11">
-            <a:extLst xmlns:a="http://schemas.openxmlformats.org/drawingml/2006/main">
-              <a:ext uri="{FF2B5EF4-FFF2-40B4-BE49-F238E27FC236}">
-                <a16:creationId xmlns:a16="http://schemas.microsoft.com/office/drawing/2014/main" id="{E905AE75-9F7C-4FA4-90A1-E31D25DD3F5D}"/>
-              </a:ext>
-            </a:extLst>
-          </p:cNvPr>
-          <p:cNvSpPr>
-            <a:spLocks xmlns:a="http://schemas.openxmlformats.org/drawingml/2006/main" noGrp="1"/>
-          </p:cNvSpPr>
-          <p:nvPr/>
-        </p:nvSpPr>
-        <p:spPr>
-          <a:xfrm xmlns:a="http://schemas.openxmlformats.org/drawingml/2006/main">
-            <a:off x="822960" y="4306824"/>
-            <a:ext cx="10597896" cy="640080"/>
-          </a:xfrm>
-          <a:prstGeom xmlns:a="http://schemas.openxmlformats.org/drawingml/2006/main" prst="rect">
-            <a:avLst/>
-          </a:prstGeom>
-          <a:noFill xmlns:a="http://schemas.openxmlformats.org/drawingml/2006/main"/>
-        </p:spPr>
-        <p:txBody>
-          <a:bodyPr xmlns:a="http://schemas.openxmlformats.org/drawingml/2006/main" wrap="square" lIns="0" tIns="0" rIns="0" bIns="0" anchor="ctr"/>
-          <a:lstStyle xmlns:a="http://schemas.openxmlformats.org/drawingml/2006/main"/>
-          <a:p xmlns:a="http://schemas.openxmlformats.org/drawingml/2006/main">
-            <a:pPr marL="0" indent="0">
-              <a:buNone/>
-            </a:pPr>
-            <a:r>
-              <a:rPr sz="1250" b="1">
-                <a:solidFill>
-                  <a:srgbClr val="FFFFFF"/>
-                </a:solidFill>
-                <a:latin typeface="Calibri"/>
-                <a:ea typeface="Calibri"/>
-                <a:cs typeface="Calibri"/>
-              </a:rPr>
-              <a:t>A system that explains itself convincingly but falsely is more dangerous than one that says nothing.</a:t>
-            </a:r>
-            <a:endParaRPr sz="1250"/>
-          </a:p>
-        </p:txBody>
-      </p:sp>
-    </p:spTree>
-    <p:extLst>
-      <p:ext uri="{BB962C8B-B14F-4D97-AF65-F5344CB8AC3E}">
-        <p14:creationId xmlns:p14="http://schemas.microsoft.com/office/powerpoint/2010/main" val="2118558757"/>
+        <p14:creationId xmlns:p14="http://schemas.microsoft.com/office/powerpoint/2010/main" val="2110621205"/>
       </p:ext>
     </p:extLst>
   </p:cSld>

--- a/presentation/round1_pitch.pptx
+++ b/presentation/round1_pitch.pptx
@@ -2,26 +2,26 @@
 <file path=ppt/presentation.xml><?xml version="1.0" encoding="utf-8"?>
 <p:presentation xmlns:p="http://schemas.openxmlformats.org/presentationml/2006/main">
   <p:sldMasterIdLst>
-    <p:sldMasterId xmlns:r="http://schemas.openxmlformats.org/officeDocument/2006/relationships" id="2147483648" r:id="R7a76bfd0bcea46e7"/>
+    <p:sldMasterId xmlns:r="http://schemas.openxmlformats.org/officeDocument/2006/relationships" id="2147483648" r:id="R73b9547b469547b3"/>
   </p:sldMasterIdLst>
   <p:notesMasterIdLst>
-    <p:notesMasterId xmlns:r="http://schemas.openxmlformats.org/officeDocument/2006/relationships" r:id="Rd73e6dfdb0d84c88"/>
+    <p:notesMasterId xmlns:r="http://schemas.openxmlformats.org/officeDocument/2006/relationships" r:id="R56410e7f2b5445be"/>
   </p:notesMasterIdLst>
   <p:sldIdLst>
-    <p:sldId xmlns:r="http://schemas.openxmlformats.org/officeDocument/2006/relationships" id="256" r:id="R883a0ea1f87f416d"/>
-    <p:sldId xmlns:r="http://schemas.openxmlformats.org/officeDocument/2006/relationships" id="257" r:id="Rb55d5a90365f436f"/>
-    <p:sldId xmlns:r="http://schemas.openxmlformats.org/officeDocument/2006/relationships" id="258" r:id="R1f725f9b78f24821"/>
-    <p:sldId xmlns:r="http://schemas.openxmlformats.org/officeDocument/2006/relationships" id="259" r:id="R06706de16095453b"/>
-    <p:sldId xmlns:r="http://schemas.openxmlformats.org/officeDocument/2006/relationships" id="260" r:id="R14347f17fb71450f"/>
-    <p:sldId xmlns:r="http://schemas.openxmlformats.org/officeDocument/2006/relationships" id="261" r:id="R0be6c43eccec450a"/>
-    <p:sldId xmlns:r="http://schemas.openxmlformats.org/officeDocument/2006/relationships" id="262" r:id="R76707a4419354669"/>
-    <p:sldId xmlns:r="http://schemas.openxmlformats.org/officeDocument/2006/relationships" id="263" r:id="R356748d9a6ed48ab"/>
-    <p:sldId xmlns:r="http://schemas.openxmlformats.org/officeDocument/2006/relationships" id="264" r:id="R3ab75f0f4b3f4b0c"/>
-    <p:sldId xmlns:r="http://schemas.openxmlformats.org/officeDocument/2006/relationships" id="265" r:id="R40d8dc9b2fd54897"/>
-    <p:sldId xmlns:r="http://schemas.openxmlformats.org/officeDocument/2006/relationships" id="266" r:id="R1e277a1a106642de"/>
-    <p:sldId xmlns:r="http://schemas.openxmlformats.org/officeDocument/2006/relationships" id="267" r:id="R7b0132ac71e74b48"/>
-    <p:sldId xmlns:r="http://schemas.openxmlformats.org/officeDocument/2006/relationships" id="268" r:id="R0fbe23acbb8144d5"/>
-    <p:sldId xmlns:r="http://schemas.openxmlformats.org/officeDocument/2006/relationships" id="269" r:id="R26e6a4bb631f410c"/>
+    <p:sldId xmlns:r="http://schemas.openxmlformats.org/officeDocument/2006/relationships" id="256" r:id="Rd26def38410049a6"/>
+    <p:sldId xmlns:r="http://schemas.openxmlformats.org/officeDocument/2006/relationships" id="257" r:id="R3b22b0014225498d"/>
+    <p:sldId xmlns:r="http://schemas.openxmlformats.org/officeDocument/2006/relationships" id="258" r:id="R2380e23fe235466c"/>
+    <p:sldId xmlns:r="http://schemas.openxmlformats.org/officeDocument/2006/relationships" id="259" r:id="R71735fc5ac9245f7"/>
+    <p:sldId xmlns:r="http://schemas.openxmlformats.org/officeDocument/2006/relationships" id="260" r:id="R4465b0b26c30493c"/>
+    <p:sldId xmlns:r="http://schemas.openxmlformats.org/officeDocument/2006/relationships" id="261" r:id="Ree76443202e54b62"/>
+    <p:sldId xmlns:r="http://schemas.openxmlformats.org/officeDocument/2006/relationships" id="262" r:id="Re572e4008d7043db"/>
+    <p:sldId xmlns:r="http://schemas.openxmlformats.org/officeDocument/2006/relationships" id="263" r:id="R91b3ac2167354724"/>
+    <p:sldId xmlns:r="http://schemas.openxmlformats.org/officeDocument/2006/relationships" id="264" r:id="R2f801f5078704be1"/>
+    <p:sldId xmlns:r="http://schemas.openxmlformats.org/officeDocument/2006/relationships" id="265" r:id="Reba12b63adad48d7"/>
+    <p:sldId xmlns:r="http://schemas.openxmlformats.org/officeDocument/2006/relationships" id="266" r:id="R752d83818c864954"/>
+    <p:sldId xmlns:r="http://schemas.openxmlformats.org/officeDocument/2006/relationships" id="267" r:id="R05b391fee938463e"/>
+    <p:sldId xmlns:r="http://schemas.openxmlformats.org/officeDocument/2006/relationships" id="268" r:id="R794c731530f349d4"/>
+    <p:sldId xmlns:r="http://schemas.openxmlformats.org/officeDocument/2006/relationships" id="269" r:id="R97516b331451472e"/>
   </p:sldIdLst>
   <p:sldSz cx="12192000" cy="6858000"/>
   <p:notesSz cx="6858000" cy="9144000"/>
@@ -515,7 +515,7 @@
           </a:p>
           <a:p xmlns:a="http://schemas.openxmlformats.org/drawingml/2006/main">
             <a:r>
-              <a:t>The workflow runs, its reasoning is visible, and every number traces to project evidence.</a:t>
+              <a:t>The workflow runs, its reasoning is visible, and every number traces to project evidence, including public complaint data from the U.S. Consumer Financial Protection Bureau, or CFPB.</a:t>
             </a:r>
           </a:p>
           <a:p xmlns:a="http://schemas.openxmlformats.org/drawingml/2006/main">
@@ -536,6 +536,11 @@
           <a:p xmlns:a="http://schemas.openxmlformats.org/drawingml/2006/main">
             <a:r>
               <a:t>[Sources]</a:t>
+            </a:r>
+          </a:p>
+          <a:p xmlns:a="http://schemas.openxmlformats.org/drawingml/2006/main">
+            <a:r>
+              <a:t>- CFPB Consumer Complaint Database: https://www.consumerfinance.gov/data-research/consumer-complaints/</a:t>
             </a:r>
           </a:p>
           <a:p xmlns:a="http://schemas.openxmlformats.org/drawingml/2006/main">
@@ -2303,7 +2308,7 @@
   </p:cSld>
   <p:clrMap bg1="lt1" tx1="dk1" bg2="lt2" tx2="dk2" accent1="accent1" accent2="accent2" accent3="accent3" accent4="accent4" accent5="accent5" accent6="accent6" hlink="hlink" folHlink="folHlink"/>
   <p:sldLayoutIdLst>
-    <p:sldLayoutId xmlns:r="http://schemas.openxmlformats.org/officeDocument/2006/relationships" id="2147483649" r:id="R611ed53a67cf4025"/>
+    <p:sldLayoutId xmlns:r="http://schemas.openxmlformats.org/officeDocument/2006/relationships" id="2147483649" r:id="Rfe782b5d4bde487d"/>
   </p:sldLayoutIdLst>
   <p:hf sldNum="0" hdr="0" ftr="0" dt="0"/>
   <p:txStyles>
@@ -3200,7 +3205,18 @@
                 <a:ea typeface="Calibri"/>
                 <a:cs typeface="Calibri"/>
               </a:rPr>
-              <a:t>Public CFPB data · 16,839 complaints    </a:t>
+              <a:t>U.S. Consumer Financial Protection Bureau (CFPB) · public complaint data</a:t>
+            </a:r>
+            <a:r>
+              <a:rPr sz="900">
+                <a:solidFill>
+                  <a:srgbClr val="6B7C88"/>
+                </a:solidFill>
+                <a:latin typeface="Calibri"/>
+                <a:ea typeface="Calibri"/>
+                <a:cs typeface="Calibri"/>
+              </a:rPr>
+              <a:t>    </a:t>
             </a:r>
             <a:r>
               <a:rPr sz="900">
@@ -3420,7 +3436,7 @@
           <p:nvPr/>
         </p:nvPicPr>
         <p:blipFill>
-          <a:blip xmlns:r="http://schemas.openxmlformats.org/officeDocument/2006/relationships" xmlns:a="http://schemas.openxmlformats.org/drawingml/2006/main" r:embed="R904af97ae8654a15"/>
+          <a:blip xmlns:r="http://schemas.openxmlformats.org/officeDocument/2006/relationships" xmlns:a="http://schemas.openxmlformats.org/drawingml/2006/main" r:embed="R0e4194775f0846d6"/>
           <a:stretch xmlns:a="http://schemas.openxmlformats.org/drawingml/2006/main">
             <a:fillRect l="0" t="0" r="0" b="0"/>
           </a:stretch>
@@ -3651,9 +3667,22 @@
           <a:bodyPr xmlns:a="http://schemas.openxmlformats.org/drawingml/2006/main" wrap="square" lIns="0" tIns="0" rIns="0" bIns="0" anchor="ctr"/>
           <a:lstStyle xmlns:a="http://schemas.openxmlformats.org/drawingml/2006/main"/>
           <a:p xmlns:a="http://schemas.openxmlformats.org/drawingml/2006/main">
-            <a:pPr marL="0" indent="0">
+            <a:pPr marL="0" indent="0" algn="l">
               <a:buNone/>
+              <a:defRPr sz="900" b="0">
+                <a:solidFill>
+                  <a:srgbClr val="6B7C88"/>
+                </a:solidFill>
+              </a:defRPr>
             </a:pPr>
+            <a:r>
+              <a:rPr sz="900" b="0">
+                <a:solidFill>
+                  <a:srgbClr val="6B7C88"/>
+                </a:solidFill>
+              </a:rPr>
+              <a:t>Source: Project LangSmith evaluation (n=60 public CFPB complaints).</a:t>
+            </a:r>
             <a:endParaRPr sz="850"/>
           </a:p>
         </p:txBody>
@@ -4437,7 +4466,7 @@
           <p:nvPr/>
         </p:nvPicPr>
         <p:blipFill>
-          <a:blip xmlns:r="http://schemas.openxmlformats.org/officeDocument/2006/relationships" xmlns:a="http://schemas.openxmlformats.org/drawingml/2006/main" r:embed="Raf04b2489948485a"/>
+          <a:blip xmlns:r="http://schemas.openxmlformats.org/officeDocument/2006/relationships" xmlns:a="http://schemas.openxmlformats.org/drawingml/2006/main" r:embed="Rf3668b642f14462f"/>
           <a:stretch xmlns:a="http://schemas.openxmlformats.org/drawingml/2006/main">
             <a:fillRect l="0" t="0" r="0" b="0"/>
           </a:stretch>
@@ -4657,9 +4686,22 @@
           <a:bodyPr xmlns:a="http://schemas.openxmlformats.org/drawingml/2006/main" wrap="square" lIns="0" tIns="0" rIns="0" bIns="0" anchor="ctr"/>
           <a:lstStyle xmlns:a="http://schemas.openxmlformats.org/drawingml/2006/main"/>
           <a:p xmlns:a="http://schemas.openxmlformats.org/drawingml/2006/main">
-            <a:pPr marL="0" indent="0">
+            <a:pPr marL="0" indent="0" algn="l">
               <a:buNone/>
+              <a:defRPr sz="900" b="0">
+                <a:solidFill>
+                  <a:srgbClr val="6B7C88"/>
+                </a:solidFill>
+              </a:defRPr>
             </a:pPr>
+            <a:r>
+              <a:rPr sz="900" b="0">
+                <a:solidFill>
+                  <a:srgbClr val="6B7C88"/>
+                </a:solidFill>
+              </a:rPr>
+              <a:t>Source: Project evaluation vs CFPB-derived labels (gpt-4o, n=240); agreement, not accuracy.</a:t>
+            </a:r>
             <a:endParaRPr sz="850"/>
           </a:p>
         </p:txBody>
@@ -5231,7 +5273,7 @@
           <p:nvPr/>
         </p:nvPicPr>
         <p:blipFill>
-          <a:blip xmlns:r="http://schemas.openxmlformats.org/officeDocument/2006/relationships" xmlns:a="http://schemas.openxmlformats.org/drawingml/2006/main" r:embed="R4584125345324127"/>
+          <a:blip xmlns:r="http://schemas.openxmlformats.org/officeDocument/2006/relationships" xmlns:a="http://schemas.openxmlformats.org/drawingml/2006/main" r:embed="R101fb8bc4b45479f"/>
           <a:stretch xmlns:a="http://schemas.openxmlformats.org/drawingml/2006/main">
             <a:fillRect l="0" t="0" r="0" b="0"/>
           </a:stretch>
@@ -5462,9 +5504,22 @@
           <a:bodyPr xmlns:a="http://schemas.openxmlformats.org/drawingml/2006/main" wrap="square" lIns="0" tIns="0" rIns="0" bIns="0" anchor="ctr"/>
           <a:lstStyle xmlns:a="http://schemas.openxmlformats.org/drawingml/2006/main"/>
           <a:p xmlns:a="http://schemas.openxmlformats.org/drawingml/2006/main">
-            <a:pPr marL="0" indent="0">
+            <a:pPr marL="0" indent="0" algn="l">
               <a:buNone/>
+              <a:defRPr sz="900" b="0">
+                <a:solidFill>
+                  <a:srgbClr val="6B7C88"/>
+                </a:solidFill>
+              </a:defRPr>
             </a:pPr>
+            <a:r>
+              <a:rPr sz="900" b="0">
+                <a:solidFill>
+                  <a:srgbClr val="6B7C88"/>
+                </a:solidFill>
+              </a:rPr>
+              <a:t>Source: CFPB data-quality review; analysis window ends 27 Jun 2026.</a:t>
+            </a:r>
             <a:endParaRPr sz="850"/>
           </a:p>
         </p:txBody>
@@ -6048,7 +6103,7 @@
           <p:nvPr/>
         </p:nvPicPr>
         <p:blipFill>
-          <a:blip xmlns:r="http://schemas.openxmlformats.org/officeDocument/2006/relationships" xmlns:a="http://schemas.openxmlformats.org/drawingml/2006/main" r:embed="R3b26cb9bdd7f4a2b"/>
+          <a:blip xmlns:r="http://schemas.openxmlformats.org/officeDocument/2006/relationships" xmlns:a="http://schemas.openxmlformats.org/drawingml/2006/main" r:embed="R755aed03094c477a"/>
           <a:stretch xmlns:a="http://schemas.openxmlformats.org/drawingml/2006/main">
             <a:fillRect l="0" t="0" r="0" b="0"/>
           </a:stretch>
@@ -6268,9 +6323,22 @@
           <a:bodyPr xmlns:a="http://schemas.openxmlformats.org/drawingml/2006/main" wrap="square" lIns="0" tIns="0" rIns="0" bIns="0" anchor="ctr"/>
           <a:lstStyle xmlns:a="http://schemas.openxmlformats.org/drawingml/2006/main"/>
           <a:p xmlns:a="http://schemas.openxmlformats.org/drawingml/2006/main">
-            <a:pPr marL="0" indent="0">
+            <a:pPr marL="0" indent="0" algn="l">
               <a:buNone/>
+              <a:defRPr sz="900" b="0">
+                <a:solidFill>
+                  <a:srgbClr val="6B7C88"/>
+                </a:solidFill>
+              </a:defRPr>
             </a:pPr>
+            <a:r>
+              <a:rPr sz="900" b="0">
+                <a:solidFill>
+                  <a:srgbClr val="6B7C88"/>
+                </a:solidFill>
+              </a:rPr>
+              <a:t>Source: EU AI Act Annex III; Round 1 working view; legal validation remains open.</a:t>
+            </a:r>
             <a:endParaRPr sz="850"/>
           </a:p>
         </p:txBody>
@@ -6954,7 +7022,7 @@
           <p:nvPr/>
         </p:nvPicPr>
         <p:blipFill>
-          <a:blip xmlns:r="http://schemas.openxmlformats.org/officeDocument/2006/relationships" xmlns:a="http://schemas.openxmlformats.org/drawingml/2006/main" r:embed="R8a81df8573a04e21"/>
+          <a:blip xmlns:r="http://schemas.openxmlformats.org/officeDocument/2006/relationships" xmlns:a="http://schemas.openxmlformats.org/drawingml/2006/main" r:embed="Ree2210f3f94f46c4"/>
           <a:stretch xmlns:a="http://schemas.openxmlformats.org/drawingml/2006/main">
             <a:fillRect l="0" t="0" r="0" b="0"/>
           </a:stretch>
@@ -7174,9 +7242,22 @@
           <a:bodyPr xmlns:a="http://schemas.openxmlformats.org/drawingml/2006/main" wrap="square" lIns="0" tIns="0" rIns="0" bIns="0" anchor="ctr"/>
           <a:lstStyle xmlns:a="http://schemas.openxmlformats.org/drawingml/2006/main"/>
           <a:p xmlns:a="http://schemas.openxmlformats.org/drawingml/2006/main">
-            <a:pPr marL="0" indent="0">
+            <a:pPr marL="0" indent="0" algn="l">
               <a:buNone/>
+              <a:defRPr sz="900" b="0">
+                <a:solidFill>
+                  <a:srgbClr val="6B7C88"/>
+                </a:solidFill>
+              </a:defRPr>
             </a:pPr>
+            <a:r>
+              <a:rPr sz="900" b="0">
+                <a:solidFill>
+                  <a:srgbClr val="6B7C88"/>
+                </a:solidFill>
+              </a:rPr>
+              <a:t>Sources: CFPB, FCA, Financial Ombudsman Service, and project evaluation files.</a:t>
+            </a:r>
             <a:endParaRPr sz="850"/>
           </a:p>
         </p:txBody>
@@ -7508,7 +7589,7 @@
                             <a:srgbClr val="1B2730"/>
                           </a:solidFill>
                         </a:rPr>
-                        <a:t>CFPB public API, 2026-05-01 to 06-27</a:t>
+                        <a:t>U.S. Consumer Financial Protection Bureau (CFPB), 1 May–27 Jun 2026</a:t>
                       </a:r>
                       <a:endParaRPr sz="1050"/>
                     </a:p>
@@ -8255,7 +8336,7 @@
           <p:nvPr/>
         </p:nvPicPr>
         <p:blipFill>
-          <a:blip xmlns:r="http://schemas.openxmlformats.org/officeDocument/2006/relationships" xmlns:a="http://schemas.openxmlformats.org/drawingml/2006/main" r:embed="Rb19c9506a58b4f5a"/>
+          <a:blip xmlns:r="http://schemas.openxmlformats.org/officeDocument/2006/relationships" xmlns:a="http://schemas.openxmlformats.org/drawingml/2006/main" r:embed="R90326f3209cd47fa"/>
           <a:stretch xmlns:a="http://schemas.openxmlformats.org/drawingml/2006/main">
             <a:fillRect l="0" t="0" r="0" b="0"/>
           </a:stretch>
@@ -9322,7 +9403,7 @@
           <p:nvPr/>
         </p:nvPicPr>
         <p:blipFill>
-          <a:blip xmlns:r="http://schemas.openxmlformats.org/officeDocument/2006/relationships" xmlns:a="http://schemas.openxmlformats.org/drawingml/2006/main" r:embed="R501dae6cfb1f4df3"/>
+          <a:blip xmlns:r="http://schemas.openxmlformats.org/officeDocument/2006/relationships" xmlns:a="http://schemas.openxmlformats.org/drawingml/2006/main" r:embed="R810e605741cb4c66"/>
           <a:stretch xmlns:a="http://schemas.openxmlformats.org/drawingml/2006/main">
             <a:fillRect l="0" t="0" r="0" b="0"/>
           </a:stretch>
@@ -9442,9 +9523,22 @@
           <a:bodyPr xmlns:a="http://schemas.openxmlformats.org/drawingml/2006/main" wrap="square" lIns="0" tIns="0" rIns="0" bIns="0" anchor="ctr"/>
           <a:lstStyle xmlns:a="http://schemas.openxmlformats.org/drawingml/2006/main"/>
           <a:p xmlns:a="http://schemas.openxmlformats.org/drawingml/2006/main">
-            <a:pPr marL="0" indent="0">
+            <a:pPr marL="0" indent="0" algn="l">
               <a:buNone/>
+              <a:defRPr sz="900" b="0">
+                <a:solidFill>
+                  <a:srgbClr val="6B7C88"/>
+                </a:solidFill>
+              </a:defRPr>
             </a:pPr>
+            <a:r>
+              <a:rPr sz="900" b="0">
+                <a:solidFill>
+                  <a:srgbClr val="6B7C88"/>
+                </a:solidFill>
+              </a:rPr>
+              <a:t>Source: CFPB Consumer Complaint Database (public U.S. data; 1 May–27 Jun 2026).</a:t>
+            </a:r>
             <a:endParaRPr sz="850"/>
           </a:p>
         </p:txBody>
@@ -9504,7 +9598,7 @@
           <p:nvPr/>
         </p:nvPicPr>
         <p:blipFill>
-          <a:blip xmlns:r="http://schemas.openxmlformats.org/officeDocument/2006/relationships" xmlns:a="http://schemas.openxmlformats.org/drawingml/2006/main" r:embed="R14fc6e2c1bae4c89"/>
+          <a:blip xmlns:r="http://schemas.openxmlformats.org/officeDocument/2006/relationships" xmlns:a="http://schemas.openxmlformats.org/drawingml/2006/main" r:embed="R84080be2017a4bce"/>
           <a:stretch xmlns:a="http://schemas.openxmlformats.org/drawingml/2006/main">
             <a:fillRect l="0" t="0" r="0" b="0"/>
           </a:stretch>
@@ -9840,7 +9934,7 @@
           <p:nvPr/>
         </p:nvPicPr>
         <p:blipFill>
-          <a:blip xmlns:r="http://schemas.openxmlformats.org/officeDocument/2006/relationships" xmlns:a="http://schemas.openxmlformats.org/drawingml/2006/main" r:embed="R8a148e4e47ca48da"/>
+          <a:blip xmlns:r="http://schemas.openxmlformats.org/officeDocument/2006/relationships" xmlns:a="http://schemas.openxmlformats.org/drawingml/2006/main" r:embed="Rbecef9ec958e49ea"/>
           <a:stretch xmlns:a="http://schemas.openxmlformats.org/drawingml/2006/main">
             <a:fillRect l="0" t="0" r="0" b="0"/>
           </a:stretch>
@@ -9960,9 +10054,22 @@
           <a:bodyPr xmlns:a="http://schemas.openxmlformats.org/drawingml/2006/main" wrap="square" lIns="0" tIns="0" rIns="0" bIns="0" anchor="ctr"/>
           <a:lstStyle xmlns:a="http://schemas.openxmlformats.org/drawingml/2006/main"/>
           <a:p xmlns:a="http://schemas.openxmlformats.org/drawingml/2006/main">
-            <a:pPr marL="0" indent="0">
+            <a:pPr marL="0" indent="0" algn="l">
               <a:buNone/>
+              <a:defRPr sz="900" b="0">
+                <a:solidFill>
+                  <a:srgbClr val="6B7C88"/>
+                </a:solidFill>
+              </a:defRPr>
             </a:pPr>
+            <a:r>
+              <a:rPr sz="900" b="0">
+                <a:solidFill>
+                  <a:srgbClr val="6B7C88"/>
+                </a:solidFill>
+              </a:rPr>
+              <a:t>Source: Project demo/evaluation on public CFPB complaints; agreement is not accuracy.</a:t>
+            </a:r>
             <a:endParaRPr sz="850"/>
           </a:p>
         </p:txBody>
@@ -10022,7 +10129,7 @@
           <p:nvPr/>
         </p:nvPicPr>
         <p:blipFill>
-          <a:blip xmlns:r="http://schemas.openxmlformats.org/officeDocument/2006/relationships" xmlns:a="http://schemas.openxmlformats.org/drawingml/2006/main" r:embed="R537d6012df9d4478"/>
+          <a:blip xmlns:r="http://schemas.openxmlformats.org/officeDocument/2006/relationships" xmlns:a="http://schemas.openxmlformats.org/drawingml/2006/main" r:embed="Rb63f16244bda4fa8"/>
           <a:stretch xmlns:a="http://schemas.openxmlformats.org/drawingml/2006/main">
             <a:fillRect l="0" t="0" r="0" b="0"/>
           </a:stretch>
@@ -10046,7 +10153,7 @@
           <p:nvPr/>
         </p:nvPicPr>
         <p:blipFill>
-          <a:blip xmlns:r="http://schemas.openxmlformats.org/officeDocument/2006/relationships" xmlns:a="http://schemas.openxmlformats.org/drawingml/2006/main" r:embed="Rc9b513322889402d"/>
+          <a:blip xmlns:r="http://schemas.openxmlformats.org/officeDocument/2006/relationships" xmlns:a="http://schemas.openxmlformats.org/drawingml/2006/main" r:embed="Rfb0a7e79a69d41d1"/>
           <a:stretch xmlns:a="http://schemas.openxmlformats.org/drawingml/2006/main">
             <a:fillRect l="0" t="0" r="0" b="0"/>
           </a:stretch>
@@ -12083,7 +12190,7 @@
           <p:nvPr/>
         </p:nvPicPr>
         <p:blipFill>
-          <a:blip xmlns:r="http://schemas.openxmlformats.org/officeDocument/2006/relationships" xmlns:a="http://schemas.openxmlformats.org/drawingml/2006/main" r:embed="R50a2a327e09c4824"/>
+          <a:blip xmlns:r="http://schemas.openxmlformats.org/officeDocument/2006/relationships" xmlns:a="http://schemas.openxmlformats.org/drawingml/2006/main" r:embed="R1cec721bd7c54551"/>
           <a:stretch xmlns:a="http://schemas.openxmlformats.org/drawingml/2006/main">
             <a:fillRect l="0" t="0" r="0" b="0"/>
           </a:stretch>
@@ -12203,9 +12310,22 @@
           <a:bodyPr xmlns:a="http://schemas.openxmlformats.org/drawingml/2006/main" wrap="square" lIns="0" tIns="0" rIns="0" bIns="0" anchor="ctr"/>
           <a:lstStyle xmlns:a="http://schemas.openxmlformats.org/drawingml/2006/main"/>
           <a:p xmlns:a="http://schemas.openxmlformats.org/drawingml/2006/main">
-            <a:pPr marL="0" indent="0">
+            <a:pPr marL="0" indent="0" algn="l">
               <a:buNone/>
+              <a:defRPr sz="900" b="0">
+                <a:solidFill>
+                  <a:srgbClr val="6B7C88"/>
+                </a:solidFill>
+              </a:defRPr>
             </a:pPr>
+            <a:r>
+              <a:rPr sz="900" b="0">
+                <a:solidFill>
+                  <a:srgbClr val="6B7C88"/>
+                </a:solidFill>
+              </a:rPr>
+              <a:t>Sources: FCA complaint benchmark; Financial Ombudsman Service case fee; project cost model.</a:t>
+            </a:r>
             <a:endParaRPr sz="850"/>
           </a:p>
         </p:txBody>
@@ -13418,7 +13538,7 @@
           <p:nvPr/>
         </p:nvPicPr>
         <p:blipFill>
-          <a:blip xmlns:r="http://schemas.openxmlformats.org/officeDocument/2006/relationships" xmlns:a="http://schemas.openxmlformats.org/drawingml/2006/main" r:embed="R275f8c71fa7a42f2"/>
+          <a:blip xmlns:r="http://schemas.openxmlformats.org/officeDocument/2006/relationships" xmlns:a="http://schemas.openxmlformats.org/drawingml/2006/main" r:embed="Rf6c7ee433bda429f"/>
           <a:stretch xmlns:a="http://schemas.openxmlformats.org/drawingml/2006/main">
             <a:fillRect l="0" t="0" r="0" b="0"/>
           </a:stretch>
@@ -13642,7 +13762,7 @@
           <p:nvPr/>
         </p:nvPicPr>
         <p:blipFill>
-          <a:blip xmlns:r="http://schemas.openxmlformats.org/officeDocument/2006/relationships" xmlns:a="http://schemas.openxmlformats.org/drawingml/2006/main" r:embed="Rdd8a517d38d5495d"/>
+          <a:blip xmlns:r="http://schemas.openxmlformats.org/officeDocument/2006/relationships" xmlns:a="http://schemas.openxmlformats.org/drawingml/2006/main" r:embed="R380e739bb4934b50"/>
           <a:stretch xmlns:a="http://schemas.openxmlformats.org/drawingml/2006/main">
             <a:fillRect l="0" t="0" r="0" b="0"/>
           </a:stretch>
@@ -14447,7 +14567,7 @@
           <p:nvPr/>
         </p:nvPicPr>
         <p:blipFill>
-          <a:blip xmlns:r="http://schemas.openxmlformats.org/officeDocument/2006/relationships" xmlns:a="http://schemas.openxmlformats.org/drawingml/2006/main" r:embed="R5848d6bc4082462c"/>
+          <a:blip xmlns:r="http://schemas.openxmlformats.org/officeDocument/2006/relationships" xmlns:a="http://schemas.openxmlformats.org/drawingml/2006/main" r:embed="R6f2841d48071433e"/>
           <a:stretch xmlns:a="http://schemas.openxmlformats.org/drawingml/2006/main">
             <a:fillRect l="0" t="0" r="0" b="0"/>
           </a:stretch>
@@ -14667,9 +14787,22 @@
           <a:bodyPr xmlns:a="http://schemas.openxmlformats.org/drawingml/2006/main" wrap="square" lIns="0" tIns="0" rIns="0" bIns="0" anchor="ctr"/>
           <a:lstStyle xmlns:a="http://schemas.openxmlformats.org/drawingml/2006/main"/>
           <a:p xmlns:a="http://schemas.openxmlformats.org/drawingml/2006/main">
-            <a:pPr marL="0" indent="0">
+            <a:pPr marL="0" indent="0" algn="l">
               <a:buNone/>
+              <a:defRPr sz="900" b="0">
+                <a:solidFill>
+                  <a:srgbClr val="6B7C88"/>
+                </a:solidFill>
+              </a:defRPr>
             </a:pPr>
+            <a:r>
+              <a:rPr sz="900" b="0">
+                <a:solidFill>
+                  <a:srgbClr val="6B7C88"/>
+                </a:solidFill>
+              </a:rPr>
+              <a:t>Source: CFPB Consumer Complaint Database (public U.S. data; n=16,839).</a:t>
+            </a:r>
             <a:endParaRPr sz="850"/>
           </a:p>
         </p:txBody>
@@ -15310,7 +15443,7 @@
           <p:nvPr/>
         </p:nvPicPr>
         <p:blipFill>
-          <a:blip xmlns:r="http://schemas.openxmlformats.org/officeDocument/2006/relationships" xmlns:a="http://schemas.openxmlformats.org/drawingml/2006/main" r:embed="R0306a19abd3142e6"/>
+          <a:blip xmlns:r="http://schemas.openxmlformats.org/officeDocument/2006/relationships" xmlns:a="http://schemas.openxmlformats.org/drawingml/2006/main" r:embed="R13c84005b60948cb"/>
           <a:stretch xmlns:a="http://schemas.openxmlformats.org/drawingml/2006/main">
             <a:fillRect l="0" t="0" r="0" b="0"/>
           </a:stretch>
@@ -15530,9 +15663,22 @@
           <a:bodyPr xmlns:a="http://schemas.openxmlformats.org/drawingml/2006/main" wrap="square" lIns="0" tIns="0" rIns="0" bIns="0" anchor="ctr"/>
           <a:lstStyle xmlns:a="http://schemas.openxmlformats.org/drawingml/2006/main"/>
           <a:p xmlns:a="http://schemas.openxmlformats.org/drawingml/2006/main">
-            <a:pPr marL="0" indent="0">
+            <a:pPr marL="0" indent="0" algn="l">
               <a:buNone/>
+              <a:defRPr sz="900" b="0">
+                <a:solidFill>
+                  <a:srgbClr val="6B7C88"/>
+                </a:solidFill>
+              </a:defRPr>
             </a:pPr>
+            <a:r>
+              <a:rPr sz="900" b="0">
+                <a:solidFill>
+                  <a:srgbClr val="6B7C88"/>
+                </a:solidFill>
+              </a:rPr>
+              <a:t>Source: CFPB public data; monetary relief is a reported outcome, not handling cost.</a:t>
+            </a:r>
             <a:endParaRPr sz="850"/>
           </a:p>
         </p:txBody>

--- a/presentation/round1_pitch.pptx
+++ b/presentation/round1_pitch.pptx
@@ -2903,6 +2903,10 @@
             <a:prstDash val="solid"/>
           </a:ln>
         </p:spPr>
+        <p:txBody xmlns:a="http://schemas.openxmlformats.org/drawingml/2006/main">
+          <a:bodyPr/>
+          <a:p/>
+        </p:txBody>
       </p:sp>
       <p:sp>
         <p:nvSpPr>
@@ -2932,6 +2936,10 @@
             </a:srgbClr>
           </a:solidFill>
         </p:spPr>
+        <p:txBody xmlns:a="http://schemas.openxmlformats.org/drawingml/2006/main">
+          <a:bodyPr/>
+          <a:p/>
+        </p:txBody>
       </p:sp>
       <p:sp>
         <p:nvSpPr>
@@ -3101,6 +3109,10 @@
             <a:prstDash val="solid"/>
           </a:ln>
         </p:spPr>
+        <p:txBody xmlns:a="http://schemas.openxmlformats.org/drawingml/2006/main">
+          <a:bodyPr/>
+          <a:p/>
+        </p:txBody>
       </p:sp>
       <p:sp>
         <p:nvSpPr>
@@ -3270,6 +3282,10 @@
             <a:srgbClr val="1D2A32"/>
           </a:solidFill>
         </p:spPr>
+        <p:txBody xmlns:a="http://schemas.openxmlformats.org/drawingml/2006/main">
+          <a:bodyPr/>
+          <a:p/>
+        </p:txBody>
       </p:sp>
       <p:sp>
         <p:nvSpPr>
@@ -3297,6 +3313,10 @@
             <a:srgbClr val="2A78D6"/>
           </a:solidFill>
         </p:spPr>
+        <p:txBody xmlns:a="http://schemas.openxmlformats.org/drawingml/2006/main">
+          <a:bodyPr/>
+          <a:p/>
+        </p:txBody>
       </p:sp>
       <p:sp>
         <p:nvSpPr>
@@ -3324,6 +3344,10 @@
             <a:srgbClr val="8FBFF0"/>
           </a:solidFill>
         </p:spPr>
+        <p:txBody xmlns:a="http://schemas.openxmlformats.org/drawingml/2006/main">
+          <a:bodyPr/>
+          <a:p/>
+        </p:txBody>
       </p:sp>
     </p:spTree>
     <p:extLst>
@@ -3426,6 +3450,10 @@
             <a:srgbClr val="24343F"/>
           </a:solidFill>
         </p:spPr>
+        <p:txBody xmlns:a="http://schemas.openxmlformats.org/drawingml/2006/main">
+          <a:bodyPr/>
+          <a:p/>
+        </p:txBody>
       </p:sp>
       <p:pic>
         <p:nvPicPr>
@@ -3523,6 +3551,10 @@
             <a:srgbClr val="EFF5F9"/>
           </a:solidFill>
         </p:spPr>
+        <p:txBody xmlns:a="http://schemas.openxmlformats.org/drawingml/2006/main">
+          <a:bodyPr/>
+          <a:p/>
+        </p:txBody>
       </p:sp>
       <p:sp>
         <p:nvSpPr>
@@ -3550,6 +3582,10 @@
             <a:srgbClr val="2A78D6"/>
           </a:solidFill>
         </p:spPr>
+        <p:txBody xmlns:a="http://schemas.openxmlformats.org/drawingml/2006/main">
+          <a:bodyPr/>
+          <a:p/>
+        </p:txBody>
       </p:sp>
       <p:sp>
         <p:nvSpPr>
@@ -3638,6 +3674,10 @@
             <a:prstDash val="solid"/>
           </a:ln>
         </p:spPr>
+        <p:txBody xmlns:a="http://schemas.openxmlformats.org/drawingml/2006/main">
+          <a:bodyPr/>
+          <a:p/>
+        </p:txBody>
       </p:sp>
       <p:sp>
         <p:nvSpPr>
@@ -4281,6 +4321,10 @@
             <a:srgbClr val="24343F"/>
           </a:solidFill>
         </p:spPr>
+        <p:txBody xmlns:a="http://schemas.openxmlformats.org/drawingml/2006/main">
+          <a:bodyPr/>
+          <a:p/>
+        </p:txBody>
       </p:sp>
       <p:sp>
         <p:nvSpPr>
@@ -4308,6 +4352,10 @@
             <a:srgbClr val="2A78D6"/>
           </a:solidFill>
         </p:spPr>
+        <p:txBody xmlns:a="http://schemas.openxmlformats.org/drawingml/2006/main">
+          <a:bodyPr/>
+          <a:p/>
+        </p:txBody>
       </p:sp>
       <p:sp>
         <p:nvSpPr>
@@ -4456,6 +4504,10 @@
             <a:srgbClr val="24343F"/>
           </a:solidFill>
         </p:spPr>
+        <p:txBody xmlns:a="http://schemas.openxmlformats.org/drawingml/2006/main">
+          <a:bodyPr/>
+          <a:p/>
+        </p:txBody>
       </p:sp>
       <p:pic>
         <p:nvPicPr>
@@ -4553,6 +4605,10 @@
             <a:srgbClr val="EFF5F9"/>
           </a:solidFill>
         </p:spPr>
+        <p:txBody xmlns:a="http://schemas.openxmlformats.org/drawingml/2006/main">
+          <a:bodyPr/>
+          <a:p/>
+        </p:txBody>
       </p:sp>
       <p:sp>
         <p:nvSpPr>
@@ -4580,6 +4636,10 @@
             <a:srgbClr val="2A78D6"/>
           </a:solidFill>
         </p:spPr>
+        <p:txBody xmlns:a="http://schemas.openxmlformats.org/drawingml/2006/main">
+          <a:bodyPr/>
+          <a:p/>
+        </p:txBody>
       </p:sp>
       <p:sp>
         <p:nvSpPr>
@@ -4657,6 +4717,10 @@
             <a:prstDash val="solid"/>
           </a:ln>
         </p:spPr>
+        <p:txBody xmlns:a="http://schemas.openxmlformats.org/drawingml/2006/main">
+          <a:bodyPr/>
+          <a:p/>
+        </p:txBody>
       </p:sp>
       <p:sp>
         <p:nvSpPr>
@@ -4791,6 +4855,10 @@
             </a:outerShdw>
           </a:effectLst>
         </p:spPr>
+        <p:txBody xmlns:a="http://schemas.openxmlformats.org/drawingml/2006/main">
+          <a:bodyPr/>
+          <a:p/>
+        </p:txBody>
       </p:sp>
       <p:sp>
         <p:nvSpPr>
@@ -4818,6 +4886,10 @@
             <a:srgbClr val="24343F"/>
           </a:solidFill>
         </p:spPr>
+        <p:txBody xmlns:a="http://schemas.openxmlformats.org/drawingml/2006/main">
+          <a:bodyPr/>
+          <a:p/>
+        </p:txBody>
       </p:sp>
       <p:sp>
         <p:nvSpPr>
@@ -4930,7 +5002,7 @@
                 <a:ea typeface="Calibri"/>
                 <a:cs typeface="Calibri"/>
               </a:rPr>
-              <a:t>A model costing 6× more improved agreement by 4 percentage points</a:t>
+              <a:t>A model costing 17× more improved agreement by 4 percentage points</a:t>
             </a:r>
             <a:endParaRPr sz="1150"/>
           </a:p>
@@ -4996,6 +5068,10 @@
             </a:outerShdw>
           </a:effectLst>
         </p:spPr>
+        <p:txBody xmlns:a="http://schemas.openxmlformats.org/drawingml/2006/main">
+          <a:bodyPr/>
+          <a:p/>
+        </p:txBody>
       </p:sp>
       <p:sp>
         <p:nvSpPr>
@@ -5023,6 +5099,10 @@
             <a:srgbClr val="445A69"/>
           </a:solidFill>
         </p:spPr>
+        <p:txBody xmlns:a="http://schemas.openxmlformats.org/drawingml/2006/main">
+          <a:bodyPr/>
+          <a:p/>
+        </p:txBody>
       </p:sp>
       <p:sp>
         <p:nvSpPr>
@@ -5263,6 +5343,10 @@
             <a:srgbClr val="24343F"/>
           </a:solidFill>
         </p:spPr>
+        <p:txBody xmlns:a="http://schemas.openxmlformats.org/drawingml/2006/main">
+          <a:bodyPr/>
+          <a:p/>
+        </p:txBody>
       </p:sp>
       <p:pic>
         <p:nvPicPr>
@@ -5360,6 +5444,10 @@
             <a:srgbClr val="EFF5F9"/>
           </a:solidFill>
         </p:spPr>
+        <p:txBody xmlns:a="http://schemas.openxmlformats.org/drawingml/2006/main">
+          <a:bodyPr/>
+          <a:p/>
+        </p:txBody>
       </p:sp>
       <p:sp>
         <p:nvSpPr>
@@ -5387,6 +5475,10 @@
             <a:srgbClr val="2A78D6"/>
           </a:solidFill>
         </p:spPr>
+        <p:txBody xmlns:a="http://schemas.openxmlformats.org/drawingml/2006/main">
+          <a:bodyPr/>
+          <a:p/>
+        </p:txBody>
       </p:sp>
       <p:sp>
         <p:nvSpPr>
@@ -5475,6 +5567,10 @@
             <a:prstDash val="solid"/>
           </a:ln>
         </p:spPr>
+        <p:txBody xmlns:a="http://schemas.openxmlformats.org/drawingml/2006/main">
+          <a:bodyPr/>
+          <a:p/>
+        </p:txBody>
       </p:sp>
       <p:sp>
         <p:nvSpPr>
@@ -6093,6 +6189,10 @@
             <a:srgbClr val="24343F"/>
           </a:solidFill>
         </p:spPr>
+        <p:txBody xmlns:a="http://schemas.openxmlformats.org/drawingml/2006/main">
+          <a:bodyPr/>
+          <a:p/>
+        </p:txBody>
       </p:sp>
       <p:pic>
         <p:nvPicPr>
@@ -6190,6 +6290,10 @@
             <a:srgbClr val="EFF5F9"/>
           </a:solidFill>
         </p:spPr>
+        <p:txBody xmlns:a="http://schemas.openxmlformats.org/drawingml/2006/main">
+          <a:bodyPr/>
+          <a:p/>
+        </p:txBody>
       </p:sp>
       <p:sp>
         <p:nvSpPr>
@@ -6217,6 +6321,10 @@
             <a:srgbClr val="2A78D6"/>
           </a:solidFill>
         </p:spPr>
+        <p:txBody xmlns:a="http://schemas.openxmlformats.org/drawingml/2006/main">
+          <a:bodyPr/>
+          <a:p/>
+        </p:txBody>
       </p:sp>
       <p:sp>
         <p:nvSpPr>
@@ -6294,6 +6402,10 @@
             <a:prstDash val="solid"/>
           </a:ln>
         </p:spPr>
+        <p:txBody xmlns:a="http://schemas.openxmlformats.org/drawingml/2006/main">
+          <a:bodyPr/>
+          <a:p/>
+        </p:txBody>
       </p:sp>
       <p:sp>
         <p:nvSpPr>
@@ -7012,6 +7124,10 @@
             <a:srgbClr val="24343F"/>
           </a:solidFill>
         </p:spPr>
+        <p:txBody xmlns:a="http://schemas.openxmlformats.org/drawingml/2006/main">
+          <a:bodyPr/>
+          <a:p/>
+        </p:txBody>
       </p:sp>
       <p:pic>
         <p:nvPicPr>
@@ -7109,6 +7225,10 @@
             <a:srgbClr val="EFF5F9"/>
           </a:solidFill>
         </p:spPr>
+        <p:txBody xmlns:a="http://schemas.openxmlformats.org/drawingml/2006/main">
+          <a:bodyPr/>
+          <a:p/>
+        </p:txBody>
       </p:sp>
       <p:sp>
         <p:nvSpPr>
@@ -7136,6 +7256,10 @@
             <a:srgbClr val="2A78D6"/>
           </a:solidFill>
         </p:spPr>
+        <p:txBody xmlns:a="http://schemas.openxmlformats.org/drawingml/2006/main">
+          <a:bodyPr/>
+          <a:p/>
+        </p:txBody>
       </p:sp>
       <p:sp>
         <p:nvSpPr>
@@ -7213,6 +7337,10 @@
             <a:prstDash val="solid"/>
           </a:ln>
         </p:spPr>
+        <p:txBody xmlns:a="http://schemas.openxmlformats.org/drawingml/2006/main">
+          <a:bodyPr/>
+          <a:p/>
+        </p:txBody>
       </p:sp>
       <p:sp>
         <p:nvSpPr>
@@ -8326,6 +8454,10 @@
             <a:srgbClr val="24343F"/>
           </a:solidFill>
         </p:spPr>
+        <p:txBody xmlns:a="http://schemas.openxmlformats.org/drawingml/2006/main">
+          <a:bodyPr/>
+          <a:p/>
+        </p:txBody>
       </p:sp>
       <p:pic>
         <p:nvPicPr>
@@ -8423,6 +8555,10 @@
             <a:srgbClr val="EFF5F9"/>
           </a:solidFill>
         </p:spPr>
+        <p:txBody xmlns:a="http://schemas.openxmlformats.org/drawingml/2006/main">
+          <a:bodyPr/>
+          <a:p/>
+        </p:txBody>
       </p:sp>
       <p:sp>
         <p:nvSpPr>
@@ -8450,6 +8586,10 @@
             <a:srgbClr val="2A78D6"/>
           </a:solidFill>
         </p:spPr>
+        <p:txBody xmlns:a="http://schemas.openxmlformats.org/drawingml/2006/main">
+          <a:bodyPr/>
+          <a:p/>
+        </p:txBody>
       </p:sp>
       <p:sp>
         <p:nvSpPr>
@@ -8538,6 +8678,10 @@
             <a:prstDash val="solid"/>
           </a:ln>
         </p:spPr>
+        <p:txBody xmlns:a="http://schemas.openxmlformats.org/drawingml/2006/main">
+          <a:bodyPr/>
+          <a:p/>
+        </p:txBody>
       </p:sp>
       <p:sp>
         <p:nvSpPr>
@@ -8659,6 +8803,10 @@
             </a:outerShdw>
           </a:effectLst>
         </p:spPr>
+        <p:txBody xmlns:a="http://schemas.openxmlformats.org/drawingml/2006/main">
+          <a:bodyPr/>
+          <a:p/>
+        </p:txBody>
       </p:sp>
       <p:sp>
         <p:nvSpPr>
@@ -8831,6 +8979,10 @@
             </a:outerShdw>
           </a:effectLst>
         </p:spPr>
+        <p:txBody xmlns:a="http://schemas.openxmlformats.org/drawingml/2006/main">
+          <a:bodyPr/>
+          <a:p/>
+        </p:txBody>
       </p:sp>
       <p:sp>
         <p:nvSpPr>
@@ -9009,6 +9161,10 @@
             </a:outerShdw>
           </a:effectLst>
         </p:spPr>
+        <p:txBody xmlns:a="http://schemas.openxmlformats.org/drawingml/2006/main">
+          <a:bodyPr/>
+          <a:p/>
+        </p:txBody>
       </p:sp>
       <p:sp>
         <p:nvSpPr>
@@ -9174,6 +9330,10 @@
             <a:srgbClr val="EFF5F9"/>
           </a:solidFill>
         </p:spPr>
+        <p:txBody xmlns:a="http://schemas.openxmlformats.org/drawingml/2006/main">
+          <a:bodyPr/>
+          <a:p/>
+        </p:txBody>
       </p:sp>
       <p:sp>
         <p:nvSpPr>
@@ -9201,6 +9361,10 @@
             <a:srgbClr val="2A78D6"/>
           </a:solidFill>
         </p:spPr>
+        <p:txBody xmlns:a="http://schemas.openxmlformats.org/drawingml/2006/main">
+          <a:bodyPr/>
+          <a:p/>
+        </p:txBody>
       </p:sp>
       <p:sp>
         <p:nvSpPr>
@@ -9393,6 +9557,10 @@
             <a:srgbClr val="24343F"/>
           </a:solidFill>
         </p:spPr>
+        <p:txBody xmlns:a="http://schemas.openxmlformats.org/drawingml/2006/main">
+          <a:bodyPr/>
+          <a:p/>
+        </p:txBody>
       </p:sp>
       <p:pic>
         <p:nvPicPr>
@@ -9494,6 +9662,10 @@
             <a:prstDash val="solid"/>
           </a:ln>
         </p:spPr>
+        <p:txBody xmlns:a="http://schemas.openxmlformats.org/drawingml/2006/main">
+          <a:bodyPr/>
+          <a:p/>
+        </p:txBody>
       </p:sp>
       <p:sp>
         <p:nvSpPr>
@@ -9646,6 +9818,10 @@
             </a:outerShdw>
           </a:effectLst>
         </p:spPr>
+        <p:txBody xmlns:a="http://schemas.openxmlformats.org/drawingml/2006/main">
+          <a:bodyPr/>
+          <a:p/>
+        </p:txBody>
       </p:sp>
       <p:sp>
         <p:nvSpPr>
@@ -9924,6 +10100,10 @@
             <a:srgbClr val="24343F"/>
           </a:solidFill>
         </p:spPr>
+        <p:txBody xmlns:a="http://schemas.openxmlformats.org/drawingml/2006/main">
+          <a:bodyPr/>
+          <a:p/>
+        </p:txBody>
       </p:sp>
       <p:pic>
         <p:nvPicPr>
@@ -9989,7 +10169,7 @@
                 <a:ea typeface="Trebuchet MS"/>
                 <a:cs typeface="Trebuchet MS"/>
               </a:rPr>
-              <a:t>Every decision is visible—and uncertain cases stop</a:t>
+              <a:t>Every decision is visible — and uncertain cases stop</a:t>
             </a:r>
             <a:endParaRPr sz="3000"/>
           </a:p>
@@ -10025,6 +10205,10 @@
             <a:prstDash val="solid"/>
           </a:ln>
         </p:spPr>
+        <p:txBody xmlns:a="http://schemas.openxmlformats.org/drawingml/2006/main">
+          <a:bodyPr/>
+          <a:p/>
+        </p:txBody>
       </p:sp>
       <p:sp>
         <p:nvSpPr>
@@ -10286,6 +10470,10 @@
             <a:srgbClr val="2A78D6"/>
           </a:solidFill>
         </p:spPr>
+        <p:txBody xmlns:a="http://schemas.openxmlformats.org/drawingml/2006/main">
+          <a:bodyPr/>
+          <a:p/>
+        </p:txBody>
       </p:sp>
       <p:sp>
         <p:nvSpPr>
@@ -10313,6 +10501,10 @@
             <a:srgbClr val="2A78D6"/>
           </a:solidFill>
         </p:spPr>
+        <p:txBody xmlns:a="http://schemas.openxmlformats.org/drawingml/2006/main">
+          <a:bodyPr/>
+          <a:p/>
+        </p:txBody>
       </p:sp>
       <p:sp>
         <p:nvSpPr>
@@ -10340,6 +10532,10 @@
             <a:srgbClr val="2A78D6"/>
           </a:solidFill>
         </p:spPr>
+        <p:txBody xmlns:a="http://schemas.openxmlformats.org/drawingml/2006/main">
+          <a:bodyPr/>
+          <a:p/>
+        </p:txBody>
       </p:sp>
       <p:sp>
         <p:nvSpPr>
@@ -10367,6 +10563,10 @@
             <a:srgbClr val="2A78D6"/>
           </a:solidFill>
         </p:spPr>
+        <p:txBody xmlns:a="http://schemas.openxmlformats.org/drawingml/2006/main">
+          <a:bodyPr/>
+          <a:p/>
+        </p:txBody>
       </p:sp>
       <p:sp>
         <p:nvSpPr>
@@ -10394,6 +10594,10 @@
             <a:srgbClr val="2A78D6"/>
           </a:solidFill>
         </p:spPr>
+        <p:txBody xmlns:a="http://schemas.openxmlformats.org/drawingml/2006/main">
+          <a:bodyPr/>
+          <a:p/>
+        </p:txBody>
       </p:sp>
       <p:sp>
         <p:nvSpPr>
@@ -10421,6 +10625,10 @@
             <a:srgbClr val="2A78D6"/>
           </a:solidFill>
         </p:spPr>
+        <p:txBody xmlns:a="http://schemas.openxmlformats.org/drawingml/2006/main">
+          <a:bodyPr/>
+          <a:p/>
+        </p:txBody>
       </p:sp>
       <p:sp>
         <p:nvSpPr>
@@ -10448,6 +10656,10 @@
             <a:srgbClr val="2A78D6"/>
           </a:solidFill>
         </p:spPr>
+        <p:txBody xmlns:a="http://schemas.openxmlformats.org/drawingml/2006/main">
+          <a:bodyPr/>
+          <a:p/>
+        </p:txBody>
       </p:sp>
       <p:sp>
         <p:nvSpPr>
@@ -10475,6 +10687,10 @@
             <a:srgbClr val="2A78D6"/>
           </a:solidFill>
         </p:spPr>
+        <p:txBody xmlns:a="http://schemas.openxmlformats.org/drawingml/2006/main">
+          <a:bodyPr/>
+          <a:p/>
+        </p:txBody>
       </p:sp>
       <p:sp>
         <p:nvSpPr>
@@ -10502,6 +10718,10 @@
             <a:srgbClr val="2A78D6"/>
           </a:solidFill>
         </p:spPr>
+        <p:txBody xmlns:a="http://schemas.openxmlformats.org/drawingml/2006/main">
+          <a:bodyPr/>
+          <a:p/>
+        </p:txBody>
       </p:sp>
       <p:sp>
         <p:nvSpPr>
@@ -10529,6 +10749,10 @@
             <a:srgbClr val="2A78D6"/>
           </a:solidFill>
         </p:spPr>
+        <p:txBody xmlns:a="http://schemas.openxmlformats.org/drawingml/2006/main">
+          <a:bodyPr/>
+          <a:p/>
+        </p:txBody>
       </p:sp>
       <p:sp>
         <p:nvSpPr>
@@ -10556,6 +10780,10 @@
             <a:srgbClr val="2A78D6"/>
           </a:solidFill>
         </p:spPr>
+        <p:txBody xmlns:a="http://schemas.openxmlformats.org/drawingml/2006/main">
+          <a:bodyPr/>
+          <a:p/>
+        </p:txBody>
       </p:sp>
       <p:sp>
         <p:nvSpPr>
@@ -10583,6 +10811,10 @@
             <a:srgbClr val="2A78D6"/>
           </a:solidFill>
         </p:spPr>
+        <p:txBody xmlns:a="http://schemas.openxmlformats.org/drawingml/2006/main">
+          <a:bodyPr/>
+          <a:p/>
+        </p:txBody>
       </p:sp>
       <p:sp>
         <p:nvSpPr>
@@ -10610,6 +10842,10 @@
             <a:srgbClr val="2A78D6"/>
           </a:solidFill>
         </p:spPr>
+        <p:txBody xmlns:a="http://schemas.openxmlformats.org/drawingml/2006/main">
+          <a:bodyPr/>
+          <a:p/>
+        </p:txBody>
       </p:sp>
       <p:sp>
         <p:nvSpPr>
@@ -10637,6 +10873,10 @@
             <a:srgbClr val="2A78D6"/>
           </a:solidFill>
         </p:spPr>
+        <p:txBody xmlns:a="http://schemas.openxmlformats.org/drawingml/2006/main">
+          <a:bodyPr/>
+          <a:p/>
+        </p:txBody>
       </p:sp>
       <p:sp>
         <p:nvSpPr>
@@ -10664,6 +10904,10 @@
             <a:srgbClr val="2A78D6"/>
           </a:solidFill>
         </p:spPr>
+        <p:txBody xmlns:a="http://schemas.openxmlformats.org/drawingml/2006/main">
+          <a:bodyPr/>
+          <a:p/>
+        </p:txBody>
       </p:sp>
       <p:sp>
         <p:nvSpPr>
@@ -10691,6 +10935,10 @@
             <a:srgbClr val="2A78D6"/>
           </a:solidFill>
         </p:spPr>
+        <p:txBody xmlns:a="http://schemas.openxmlformats.org/drawingml/2006/main">
+          <a:bodyPr/>
+          <a:p/>
+        </p:txBody>
       </p:sp>
       <p:sp>
         <p:nvSpPr>
@@ -10718,6 +10966,10 @@
             <a:srgbClr val="2A78D6"/>
           </a:solidFill>
         </p:spPr>
+        <p:txBody xmlns:a="http://schemas.openxmlformats.org/drawingml/2006/main">
+          <a:bodyPr/>
+          <a:p/>
+        </p:txBody>
       </p:sp>
       <p:sp>
         <p:nvSpPr>
@@ -10745,6 +10997,10 @@
             <a:srgbClr val="2A78D6"/>
           </a:solidFill>
         </p:spPr>
+        <p:txBody xmlns:a="http://schemas.openxmlformats.org/drawingml/2006/main">
+          <a:bodyPr/>
+          <a:p/>
+        </p:txBody>
       </p:sp>
       <p:sp>
         <p:nvSpPr>
@@ -10772,6 +11028,10 @@
             <a:srgbClr val="2A78D6"/>
           </a:solidFill>
         </p:spPr>
+        <p:txBody xmlns:a="http://schemas.openxmlformats.org/drawingml/2006/main">
+          <a:bodyPr/>
+          <a:p/>
+        </p:txBody>
       </p:sp>
       <p:sp>
         <p:nvSpPr>
@@ -10799,6 +11059,10 @@
             <a:srgbClr val="2A78D6"/>
           </a:solidFill>
         </p:spPr>
+        <p:txBody xmlns:a="http://schemas.openxmlformats.org/drawingml/2006/main">
+          <a:bodyPr/>
+          <a:p/>
+        </p:txBody>
       </p:sp>
       <p:sp>
         <p:nvSpPr>
@@ -10826,6 +11090,10 @@
             <a:srgbClr val="2A78D6"/>
           </a:solidFill>
         </p:spPr>
+        <p:txBody xmlns:a="http://schemas.openxmlformats.org/drawingml/2006/main">
+          <a:bodyPr/>
+          <a:p/>
+        </p:txBody>
       </p:sp>
       <p:sp>
         <p:nvSpPr>
@@ -10853,6 +11121,10 @@
             <a:srgbClr val="2A78D6"/>
           </a:solidFill>
         </p:spPr>
+        <p:txBody xmlns:a="http://schemas.openxmlformats.org/drawingml/2006/main">
+          <a:bodyPr/>
+          <a:p/>
+        </p:txBody>
       </p:sp>
       <p:sp>
         <p:nvSpPr>
@@ -10880,6 +11152,10 @@
             <a:srgbClr val="2A78D6"/>
           </a:solidFill>
         </p:spPr>
+        <p:txBody xmlns:a="http://schemas.openxmlformats.org/drawingml/2006/main">
+          <a:bodyPr/>
+          <a:p/>
+        </p:txBody>
       </p:sp>
       <p:sp>
         <p:nvSpPr>
@@ -10907,6 +11183,10 @@
             <a:srgbClr val="2A78D6"/>
           </a:solidFill>
         </p:spPr>
+        <p:txBody xmlns:a="http://schemas.openxmlformats.org/drawingml/2006/main">
+          <a:bodyPr/>
+          <a:p/>
+        </p:txBody>
       </p:sp>
       <p:sp>
         <p:nvSpPr>
@@ -10934,6 +11214,10 @@
             <a:srgbClr val="2A78D6"/>
           </a:solidFill>
         </p:spPr>
+        <p:txBody xmlns:a="http://schemas.openxmlformats.org/drawingml/2006/main">
+          <a:bodyPr/>
+          <a:p/>
+        </p:txBody>
       </p:sp>
       <p:sp>
         <p:nvSpPr>
@@ -10961,6 +11245,10 @@
             <a:srgbClr val="2A78D6"/>
           </a:solidFill>
         </p:spPr>
+        <p:txBody xmlns:a="http://schemas.openxmlformats.org/drawingml/2006/main">
+          <a:bodyPr/>
+          <a:p/>
+        </p:txBody>
       </p:sp>
       <p:sp>
         <p:nvSpPr>
@@ -10988,6 +11276,10 @@
             <a:srgbClr val="2A78D6"/>
           </a:solidFill>
         </p:spPr>
+        <p:txBody xmlns:a="http://schemas.openxmlformats.org/drawingml/2006/main">
+          <a:bodyPr/>
+          <a:p/>
+        </p:txBody>
       </p:sp>
       <p:sp>
         <p:nvSpPr>
@@ -11015,6 +11307,10 @@
             <a:srgbClr val="2A78D6"/>
           </a:solidFill>
         </p:spPr>
+        <p:txBody xmlns:a="http://schemas.openxmlformats.org/drawingml/2006/main">
+          <a:bodyPr/>
+          <a:p/>
+        </p:txBody>
       </p:sp>
       <p:sp>
         <p:nvSpPr>
@@ -11042,6 +11338,10 @@
             <a:srgbClr val="2A78D6"/>
           </a:solidFill>
         </p:spPr>
+        <p:txBody xmlns:a="http://schemas.openxmlformats.org/drawingml/2006/main">
+          <a:bodyPr/>
+          <a:p/>
+        </p:txBody>
       </p:sp>
       <p:sp>
         <p:nvSpPr>
@@ -11069,6 +11369,10 @@
             <a:srgbClr val="2A78D6"/>
           </a:solidFill>
         </p:spPr>
+        <p:txBody xmlns:a="http://schemas.openxmlformats.org/drawingml/2006/main">
+          <a:bodyPr/>
+          <a:p/>
+        </p:txBody>
       </p:sp>
       <p:sp>
         <p:nvSpPr>
@@ -11096,6 +11400,10 @@
             <a:srgbClr val="2A78D6"/>
           </a:solidFill>
         </p:spPr>
+        <p:txBody xmlns:a="http://schemas.openxmlformats.org/drawingml/2006/main">
+          <a:bodyPr/>
+          <a:p/>
+        </p:txBody>
       </p:sp>
       <p:sp>
         <p:nvSpPr>
@@ -11123,6 +11431,10 @@
             <a:srgbClr val="2A78D6"/>
           </a:solidFill>
         </p:spPr>
+        <p:txBody xmlns:a="http://schemas.openxmlformats.org/drawingml/2006/main">
+          <a:bodyPr/>
+          <a:p/>
+        </p:txBody>
       </p:sp>
       <p:sp>
         <p:nvSpPr>
@@ -11150,6 +11462,10 @@
             <a:srgbClr val="2A78D6"/>
           </a:solidFill>
         </p:spPr>
+        <p:txBody xmlns:a="http://schemas.openxmlformats.org/drawingml/2006/main">
+          <a:bodyPr/>
+          <a:p/>
+        </p:txBody>
       </p:sp>
       <p:sp>
         <p:nvSpPr>
@@ -11177,6 +11493,10 @@
             <a:srgbClr val="2A78D6"/>
           </a:solidFill>
         </p:spPr>
+        <p:txBody xmlns:a="http://schemas.openxmlformats.org/drawingml/2006/main">
+          <a:bodyPr/>
+          <a:p/>
+        </p:txBody>
       </p:sp>
       <p:sp>
         <p:nvSpPr>
@@ -11204,6 +11524,10 @@
             <a:srgbClr val="2A78D6"/>
           </a:solidFill>
         </p:spPr>
+        <p:txBody xmlns:a="http://schemas.openxmlformats.org/drawingml/2006/main">
+          <a:bodyPr/>
+          <a:p/>
+        </p:txBody>
       </p:sp>
       <p:sp>
         <p:nvSpPr>
@@ -11231,6 +11555,10 @@
             <a:srgbClr val="2A78D6"/>
           </a:solidFill>
         </p:spPr>
+        <p:txBody xmlns:a="http://schemas.openxmlformats.org/drawingml/2006/main">
+          <a:bodyPr/>
+          <a:p/>
+        </p:txBody>
       </p:sp>
       <p:sp>
         <p:nvSpPr>
@@ -11258,6 +11586,10 @@
             <a:srgbClr val="2A78D6"/>
           </a:solidFill>
         </p:spPr>
+        <p:txBody xmlns:a="http://schemas.openxmlformats.org/drawingml/2006/main">
+          <a:bodyPr/>
+          <a:p/>
+        </p:txBody>
       </p:sp>
       <p:sp>
         <p:nvSpPr>
@@ -11285,6 +11617,10 @@
             <a:srgbClr val="2A78D6"/>
           </a:solidFill>
         </p:spPr>
+        <p:txBody xmlns:a="http://schemas.openxmlformats.org/drawingml/2006/main">
+          <a:bodyPr/>
+          <a:p/>
+        </p:txBody>
       </p:sp>
       <p:sp>
         <p:nvSpPr>
@@ -11312,6 +11648,10 @@
             <a:srgbClr val="2A78D6"/>
           </a:solidFill>
         </p:spPr>
+        <p:txBody xmlns:a="http://schemas.openxmlformats.org/drawingml/2006/main">
+          <a:bodyPr/>
+          <a:p/>
+        </p:txBody>
       </p:sp>
       <p:sp>
         <p:nvSpPr>
@@ -11339,6 +11679,10 @@
             <a:srgbClr val="2A78D6"/>
           </a:solidFill>
         </p:spPr>
+        <p:txBody xmlns:a="http://schemas.openxmlformats.org/drawingml/2006/main">
+          <a:bodyPr/>
+          <a:p/>
+        </p:txBody>
       </p:sp>
       <p:sp>
         <p:nvSpPr>
@@ -11366,6 +11710,10 @@
             <a:srgbClr val="2A78D6"/>
           </a:solidFill>
         </p:spPr>
+        <p:txBody xmlns:a="http://schemas.openxmlformats.org/drawingml/2006/main">
+          <a:bodyPr/>
+          <a:p/>
+        </p:txBody>
       </p:sp>
       <p:sp>
         <p:nvSpPr>
@@ -11393,6 +11741,10 @@
             <a:srgbClr val="2A78D6"/>
           </a:solidFill>
         </p:spPr>
+        <p:txBody xmlns:a="http://schemas.openxmlformats.org/drawingml/2006/main">
+          <a:bodyPr/>
+          <a:p/>
+        </p:txBody>
       </p:sp>
       <p:sp>
         <p:nvSpPr>
@@ -11420,6 +11772,10 @@
             <a:srgbClr val="2A78D6"/>
           </a:solidFill>
         </p:spPr>
+        <p:txBody xmlns:a="http://schemas.openxmlformats.org/drawingml/2006/main">
+          <a:bodyPr/>
+          <a:p/>
+        </p:txBody>
       </p:sp>
       <p:sp>
         <p:nvSpPr>
@@ -11447,6 +11803,10 @@
             <a:srgbClr val="2A78D6"/>
           </a:solidFill>
         </p:spPr>
+        <p:txBody xmlns:a="http://schemas.openxmlformats.org/drawingml/2006/main">
+          <a:bodyPr/>
+          <a:p/>
+        </p:txBody>
       </p:sp>
       <p:sp>
         <p:nvSpPr>
@@ -11474,6 +11834,10 @@
             <a:srgbClr val="2A78D6"/>
           </a:solidFill>
         </p:spPr>
+        <p:txBody xmlns:a="http://schemas.openxmlformats.org/drawingml/2006/main">
+          <a:bodyPr/>
+          <a:p/>
+        </p:txBody>
       </p:sp>
       <p:sp>
         <p:nvSpPr>
@@ -11501,6 +11865,10 @@
             <a:srgbClr val="2A78D6"/>
           </a:solidFill>
         </p:spPr>
+        <p:txBody xmlns:a="http://schemas.openxmlformats.org/drawingml/2006/main">
+          <a:bodyPr/>
+          <a:p/>
+        </p:txBody>
       </p:sp>
       <p:sp>
         <p:nvSpPr>
@@ -11528,6 +11896,10 @@
             <a:srgbClr val="2A78D6"/>
           </a:solidFill>
         </p:spPr>
+        <p:txBody xmlns:a="http://schemas.openxmlformats.org/drawingml/2006/main">
+          <a:bodyPr/>
+          <a:p/>
+        </p:txBody>
       </p:sp>
       <p:sp>
         <p:nvSpPr>
@@ -11555,6 +11927,10 @@
             <a:srgbClr val="2A78D6"/>
           </a:solidFill>
         </p:spPr>
+        <p:txBody xmlns:a="http://schemas.openxmlformats.org/drawingml/2006/main">
+          <a:bodyPr/>
+          <a:p/>
+        </p:txBody>
       </p:sp>
       <p:sp>
         <p:nvSpPr>
@@ -11582,6 +11958,10 @@
             <a:srgbClr val="2A78D6"/>
           </a:solidFill>
         </p:spPr>
+        <p:txBody xmlns:a="http://schemas.openxmlformats.org/drawingml/2006/main">
+          <a:bodyPr/>
+          <a:p/>
+        </p:txBody>
       </p:sp>
       <p:sp>
         <p:nvSpPr>
@@ -11609,6 +11989,10 @@
             <a:srgbClr val="2A78D6"/>
           </a:solidFill>
         </p:spPr>
+        <p:txBody xmlns:a="http://schemas.openxmlformats.org/drawingml/2006/main">
+          <a:bodyPr/>
+          <a:p/>
+        </p:txBody>
       </p:sp>
       <p:sp>
         <p:nvSpPr>
@@ -11636,6 +12020,10 @@
             <a:srgbClr val="2A78D6"/>
           </a:solidFill>
         </p:spPr>
+        <p:txBody xmlns:a="http://schemas.openxmlformats.org/drawingml/2006/main">
+          <a:bodyPr/>
+          <a:p/>
+        </p:txBody>
       </p:sp>
       <p:sp>
         <p:nvSpPr>
@@ -11663,6 +12051,10 @@
             <a:srgbClr val="2A78D6"/>
           </a:solidFill>
         </p:spPr>
+        <p:txBody xmlns:a="http://schemas.openxmlformats.org/drawingml/2006/main">
+          <a:bodyPr/>
+          <a:p/>
+        </p:txBody>
       </p:sp>
       <p:sp>
         <p:nvSpPr>
@@ -11690,6 +12082,10 @@
             <a:srgbClr val="FAB219"/>
           </a:solidFill>
         </p:spPr>
+        <p:txBody xmlns:a="http://schemas.openxmlformats.org/drawingml/2006/main">
+          <a:bodyPr/>
+          <a:p/>
+        </p:txBody>
       </p:sp>
       <p:sp>
         <p:nvSpPr>
@@ -11717,6 +12113,10 @@
             <a:srgbClr val="FAB219"/>
           </a:solidFill>
         </p:spPr>
+        <p:txBody xmlns:a="http://schemas.openxmlformats.org/drawingml/2006/main">
+          <a:bodyPr/>
+          <a:p/>
+        </p:txBody>
       </p:sp>
       <p:sp>
         <p:nvSpPr>
@@ -11744,6 +12144,10 @@
             <a:srgbClr val="FAB219"/>
           </a:solidFill>
         </p:spPr>
+        <p:txBody xmlns:a="http://schemas.openxmlformats.org/drawingml/2006/main">
+          <a:bodyPr/>
+          <a:p/>
+        </p:txBody>
       </p:sp>
       <p:sp>
         <p:nvSpPr>
@@ -11771,6 +12175,10 @@
             <a:srgbClr val="FAB219"/>
           </a:solidFill>
         </p:spPr>
+        <p:txBody xmlns:a="http://schemas.openxmlformats.org/drawingml/2006/main">
+          <a:bodyPr/>
+          <a:p/>
+        </p:txBody>
       </p:sp>
       <p:sp>
         <p:nvSpPr>
@@ -11798,6 +12206,10 @@
             <a:srgbClr val="D03B3B"/>
           </a:solidFill>
         </p:spPr>
+        <p:txBody xmlns:a="http://schemas.openxmlformats.org/drawingml/2006/main">
+          <a:bodyPr/>
+          <a:p/>
+        </p:txBody>
       </p:sp>
       <p:sp>
         <p:nvSpPr>
@@ -11825,6 +12237,10 @@
             <a:srgbClr val="D03B3B"/>
           </a:solidFill>
         </p:spPr>
+        <p:txBody xmlns:a="http://schemas.openxmlformats.org/drawingml/2006/main">
+          <a:bodyPr/>
+          <a:p/>
+        </p:txBody>
       </p:sp>
       <p:sp>
         <p:nvSpPr>
@@ -11852,6 +12268,10 @@
             <a:srgbClr val="D03B3B"/>
           </a:solidFill>
         </p:spPr>
+        <p:txBody xmlns:a="http://schemas.openxmlformats.org/drawingml/2006/main">
+          <a:bodyPr/>
+          <a:p/>
+        </p:txBody>
       </p:sp>
       <p:sp>
         <p:nvSpPr>
@@ -11879,6 +12299,10 @@
             <a:srgbClr val="D03B3B"/>
           </a:solidFill>
         </p:spPr>
+        <p:txBody xmlns:a="http://schemas.openxmlformats.org/drawingml/2006/main">
+          <a:bodyPr/>
+          <a:p/>
+        </p:txBody>
       </p:sp>
       <p:sp>
         <p:nvSpPr>
@@ -12005,6 +12429,10 @@
             <a:srgbClr val="24343F"/>
           </a:solidFill>
         </p:spPr>
+        <p:txBody xmlns:a="http://schemas.openxmlformats.org/drawingml/2006/main">
+          <a:bodyPr/>
+          <a:p/>
+        </p:txBody>
       </p:sp>
       <p:sp>
         <p:nvSpPr>
@@ -12032,6 +12460,10 @@
             <a:srgbClr val="2A78D6"/>
           </a:solidFill>
         </p:spPr>
+        <p:txBody xmlns:a="http://schemas.openxmlformats.org/drawingml/2006/main">
+          <a:bodyPr/>
+          <a:p/>
+        </p:txBody>
       </p:sp>
       <p:sp>
         <p:nvSpPr>
@@ -12180,6 +12612,10 @@
             <a:srgbClr val="24343F"/>
           </a:solidFill>
         </p:spPr>
+        <p:txBody xmlns:a="http://schemas.openxmlformats.org/drawingml/2006/main">
+          <a:bodyPr/>
+          <a:p/>
+        </p:txBody>
       </p:sp>
       <p:pic>
         <p:nvPicPr>
@@ -12281,6 +12717,10 @@
             <a:prstDash val="solid"/>
           </a:ln>
         </p:spPr>
+        <p:txBody xmlns:a="http://schemas.openxmlformats.org/drawingml/2006/main">
+          <a:bodyPr/>
+          <a:p/>
+        </p:txBody>
       </p:sp>
       <p:sp>
         <p:nvSpPr>
@@ -12402,6 +12842,10 @@
             <a:srgbClr val="24343F"/>
           </a:solidFill>
         </p:spPr>
+        <p:txBody xmlns:a="http://schemas.openxmlformats.org/drawingml/2006/main">
+          <a:bodyPr/>
+          <a:p/>
+        </p:txBody>
       </p:sp>
       <p:sp>
         <p:nvSpPr>
@@ -12429,6 +12873,10 @@
             <a:srgbClr val="445A69"/>
           </a:solidFill>
         </p:spPr>
+        <p:txBody xmlns:a="http://schemas.openxmlformats.org/drawingml/2006/main">
+          <a:bodyPr/>
+          <a:p/>
+        </p:txBody>
       </p:sp>
       <p:sp>
         <p:nvSpPr>
@@ -12456,6 +12904,10 @@
             <a:srgbClr val="2A78D6"/>
           </a:solidFill>
         </p:spPr>
+        <p:txBody xmlns:a="http://schemas.openxmlformats.org/drawingml/2006/main">
+          <a:bodyPr/>
+          <a:p/>
+        </p:txBody>
       </p:sp>
       <p:sp>
         <p:nvSpPr>
@@ -12671,6 +13123,10 @@
             <a:prstDash val="solid"/>
           </a:ln>
         </p:spPr>
+        <p:txBody xmlns:a="http://schemas.openxmlformats.org/drawingml/2006/main">
+          <a:bodyPr/>
+          <a:p/>
+        </p:txBody>
       </p:sp>
       <p:sp>
         <p:nvSpPr>
@@ -12704,6 +13160,10 @@
             <a:prstDash val="solid"/>
           </a:ln>
         </p:spPr>
+        <p:txBody xmlns:a="http://schemas.openxmlformats.org/drawingml/2006/main">
+          <a:bodyPr/>
+          <a:p/>
+        </p:txBody>
       </p:sp>
       <p:sp>
         <p:nvSpPr>
@@ -12790,6 +13250,10 @@
             </a:outerShdw>
           </a:effectLst>
         </p:spPr>
+        <p:txBody xmlns:a="http://schemas.openxmlformats.org/drawingml/2006/main">
+          <a:bodyPr/>
+          <a:p/>
+        </p:txBody>
       </p:sp>
       <p:sp>
         <p:nvSpPr>
@@ -12915,6 +13379,10 @@
             <a:prstDash val="solid"/>
           </a:ln>
         </p:spPr>
+        <p:txBody xmlns:a="http://schemas.openxmlformats.org/drawingml/2006/main">
+          <a:bodyPr/>
+          <a:p/>
+        </p:txBody>
       </p:sp>
       <p:sp>
         <p:nvSpPr>
@@ -13001,6 +13469,10 @@
             </a:outerShdw>
           </a:effectLst>
         </p:spPr>
+        <p:txBody xmlns:a="http://schemas.openxmlformats.org/drawingml/2006/main">
+          <a:bodyPr/>
+          <a:p/>
+        </p:txBody>
       </p:sp>
       <p:sp>
         <p:nvSpPr>
@@ -13126,6 +13598,10 @@
             <a:prstDash val="solid"/>
           </a:ln>
         </p:spPr>
+        <p:txBody xmlns:a="http://schemas.openxmlformats.org/drawingml/2006/main">
+          <a:bodyPr/>
+          <a:p/>
+        </p:txBody>
       </p:sp>
       <p:sp>
         <p:nvSpPr>
@@ -13212,6 +13688,10 @@
             </a:outerShdw>
           </a:effectLst>
         </p:spPr>
+        <p:txBody xmlns:a="http://schemas.openxmlformats.org/drawingml/2006/main">
+          <a:bodyPr/>
+          <a:p/>
+        </p:txBody>
       </p:sp>
       <p:sp>
         <p:nvSpPr>
@@ -13331,6 +13811,10 @@
             <a:srgbClr val="EFF5F9"/>
           </a:solidFill>
         </p:spPr>
+        <p:txBody xmlns:a="http://schemas.openxmlformats.org/drawingml/2006/main">
+          <a:bodyPr/>
+          <a:p/>
+        </p:txBody>
       </p:sp>
       <p:sp>
         <p:nvSpPr>
@@ -13358,6 +13842,10 @@
             <a:srgbClr val="2A78D6"/>
           </a:solidFill>
         </p:spPr>
+        <p:txBody xmlns:a="http://schemas.openxmlformats.org/drawingml/2006/main">
+          <a:bodyPr/>
+          <a:p/>
+        </p:txBody>
       </p:sp>
       <p:sp>
         <p:nvSpPr>
@@ -13528,6 +14016,10 @@
             <a:srgbClr val="24343F"/>
           </a:solidFill>
         </p:spPr>
+        <p:txBody xmlns:a="http://schemas.openxmlformats.org/drawingml/2006/main">
+          <a:bodyPr/>
+          <a:p/>
+        </p:txBody>
       </p:sp>
       <p:pic>
         <p:nvPicPr>
@@ -13752,6 +14244,10 @@
             <a:srgbClr val="24343F"/>
           </a:solidFill>
         </p:spPr>
+        <p:txBody xmlns:a="http://schemas.openxmlformats.org/drawingml/2006/main">
+          <a:bodyPr/>
+          <a:p/>
+        </p:txBody>
       </p:sp>
       <p:pic>
         <p:nvPicPr>
@@ -13849,6 +14345,10 @@
             <a:srgbClr val="EFF5F9"/>
           </a:solidFill>
         </p:spPr>
+        <p:txBody xmlns:a="http://schemas.openxmlformats.org/drawingml/2006/main">
+          <a:bodyPr/>
+          <a:p/>
+        </p:txBody>
       </p:sp>
       <p:sp>
         <p:nvSpPr>
@@ -13876,6 +14376,10 @@
             <a:srgbClr val="2A78D6"/>
           </a:solidFill>
         </p:spPr>
+        <p:txBody xmlns:a="http://schemas.openxmlformats.org/drawingml/2006/main">
+          <a:bodyPr/>
+          <a:p/>
+        </p:txBody>
       </p:sp>
       <p:sp>
         <p:nvSpPr>
@@ -13964,6 +14468,10 @@
             <a:prstDash val="solid"/>
           </a:ln>
         </p:spPr>
+        <p:txBody xmlns:a="http://schemas.openxmlformats.org/drawingml/2006/main">
+          <a:bodyPr/>
+          <a:p/>
+        </p:txBody>
       </p:sp>
       <p:sp>
         <p:nvSpPr>
@@ -14085,6 +14593,10 @@
             </a:outerShdw>
           </a:effectLst>
         </p:spPr>
+        <p:txBody xmlns:a="http://schemas.openxmlformats.org/drawingml/2006/main">
+          <a:bodyPr/>
+          <a:p/>
+        </p:txBody>
       </p:sp>
       <p:sp>
         <p:nvSpPr>
@@ -14112,6 +14624,10 @@
             <a:srgbClr val="24343F"/>
           </a:solidFill>
         </p:spPr>
+        <p:txBody xmlns:a="http://schemas.openxmlformats.org/drawingml/2006/main">
+          <a:bodyPr/>
+          <a:p/>
+        </p:txBody>
       </p:sp>
       <p:sp>
         <p:nvSpPr>
@@ -14290,6 +14806,10 @@
             </a:outerShdw>
           </a:effectLst>
         </p:spPr>
+        <p:txBody xmlns:a="http://schemas.openxmlformats.org/drawingml/2006/main">
+          <a:bodyPr/>
+          <a:p/>
+        </p:txBody>
       </p:sp>
       <p:sp>
         <p:nvSpPr>
@@ -14317,6 +14837,10 @@
             <a:srgbClr val="445A69"/>
           </a:solidFill>
         </p:spPr>
+        <p:txBody xmlns:a="http://schemas.openxmlformats.org/drawingml/2006/main">
+          <a:bodyPr/>
+          <a:p/>
+        </p:txBody>
       </p:sp>
       <p:sp>
         <p:nvSpPr>
@@ -14557,6 +15081,10 @@
             <a:srgbClr val="24343F"/>
           </a:solidFill>
         </p:spPr>
+        <p:txBody xmlns:a="http://schemas.openxmlformats.org/drawingml/2006/main">
+          <a:bodyPr/>
+          <a:p/>
+        </p:txBody>
       </p:sp>
       <p:pic>
         <p:nvPicPr>
@@ -14654,6 +15182,10 @@
             <a:srgbClr val="EFF5F9"/>
           </a:solidFill>
         </p:spPr>
+        <p:txBody xmlns:a="http://schemas.openxmlformats.org/drawingml/2006/main">
+          <a:bodyPr/>
+          <a:p/>
+        </p:txBody>
       </p:sp>
       <p:sp>
         <p:nvSpPr>
@@ -14681,6 +15213,10 @@
             <a:srgbClr val="2A78D6"/>
           </a:solidFill>
         </p:spPr>
+        <p:txBody xmlns:a="http://schemas.openxmlformats.org/drawingml/2006/main">
+          <a:bodyPr/>
+          <a:p/>
+        </p:txBody>
       </p:sp>
       <p:sp>
         <p:nvSpPr>
@@ -14758,6 +15294,10 @@
             <a:prstDash val="solid"/>
           </a:ln>
         </p:spPr>
+        <p:txBody xmlns:a="http://schemas.openxmlformats.org/drawingml/2006/main">
+          <a:bodyPr/>
+          <a:p/>
+        </p:txBody>
       </p:sp>
       <p:sp>
         <p:nvSpPr>
@@ -14879,6 +15419,10 @@
             <a:srgbClr val="24343F"/>
           </a:solidFill>
         </p:spPr>
+        <p:txBody xmlns:a="http://schemas.openxmlformats.org/drawingml/2006/main">
+          <a:bodyPr/>
+          <a:p/>
+        </p:txBody>
       </p:sp>
       <p:sp>
         <p:nvSpPr>
@@ -14954,6 +15498,10 @@
             </a:srgbClr>
           </a:solidFill>
         </p:spPr>
+        <p:txBody xmlns:a="http://schemas.openxmlformats.org/drawingml/2006/main">
+          <a:bodyPr/>
+          <a:p/>
+        </p:txBody>
       </p:sp>
       <p:sp>
         <p:nvSpPr>
@@ -15029,6 +15577,10 @@
             </a:srgbClr>
           </a:solidFill>
         </p:spPr>
+        <p:txBody xmlns:a="http://schemas.openxmlformats.org/drawingml/2006/main">
+          <a:bodyPr/>
+          <a:p/>
+        </p:txBody>
       </p:sp>
       <p:sp>
         <p:nvSpPr>
@@ -15104,6 +15656,10 @@
             </a:srgbClr>
           </a:solidFill>
         </p:spPr>
+        <p:txBody xmlns:a="http://schemas.openxmlformats.org/drawingml/2006/main">
+          <a:bodyPr/>
+          <a:p/>
+        </p:txBody>
       </p:sp>
       <p:sp>
         <p:nvSpPr>
@@ -15179,6 +15735,10 @@
             </a:srgbClr>
           </a:solidFill>
         </p:spPr>
+        <p:txBody xmlns:a="http://schemas.openxmlformats.org/drawingml/2006/main">
+          <a:bodyPr/>
+          <a:p/>
+        </p:txBody>
       </p:sp>
       <p:sp>
         <p:nvSpPr>
@@ -15259,6 +15819,10 @@
             </a:outerShdw>
           </a:effectLst>
         </p:spPr>
+        <p:txBody xmlns:a="http://schemas.openxmlformats.org/drawingml/2006/main">
+          <a:bodyPr/>
+          <a:p/>
+        </p:txBody>
       </p:sp>
       <p:sp>
         <p:nvSpPr>
@@ -15433,6 +15997,10 @@
             <a:srgbClr val="24343F"/>
           </a:solidFill>
         </p:spPr>
+        <p:txBody xmlns:a="http://schemas.openxmlformats.org/drawingml/2006/main">
+          <a:bodyPr/>
+          <a:p/>
+        </p:txBody>
       </p:sp>
       <p:pic>
         <p:nvPicPr>
@@ -15530,6 +16098,10 @@
             <a:srgbClr val="EFF5F9"/>
           </a:solidFill>
         </p:spPr>
+        <p:txBody xmlns:a="http://schemas.openxmlformats.org/drawingml/2006/main">
+          <a:bodyPr/>
+          <a:p/>
+        </p:txBody>
       </p:sp>
       <p:sp>
         <p:nvSpPr>
@@ -15557,6 +16129,10 @@
             <a:srgbClr val="2A78D6"/>
           </a:solidFill>
         </p:spPr>
+        <p:txBody xmlns:a="http://schemas.openxmlformats.org/drawingml/2006/main">
+          <a:bodyPr/>
+          <a:p/>
+        </p:txBody>
       </p:sp>
       <p:sp>
         <p:nvSpPr>
@@ -15634,6 +16210,10 @@
             <a:prstDash val="solid"/>
           </a:ln>
         </p:spPr>
+        <p:txBody xmlns:a="http://schemas.openxmlformats.org/drawingml/2006/main">
+          <a:bodyPr/>
+          <a:p/>
+        </p:txBody>
       </p:sp>
       <p:sp>
         <p:nvSpPr>
@@ -16769,6 +17349,10 @@
             <a:srgbClr val="EFF5F9"/>
           </a:solidFill>
         </p:spPr>
+        <p:txBody xmlns:a="http://schemas.openxmlformats.org/drawingml/2006/main">
+          <a:bodyPr/>
+          <a:p/>
+        </p:txBody>
       </p:sp>
       <p:sp>
         <p:nvSpPr>
@@ -16796,6 +17380,10 @@
             <a:srgbClr val="2A78D6"/>
           </a:solidFill>
         </p:spPr>
+        <p:txBody xmlns:a="http://schemas.openxmlformats.org/drawingml/2006/main">
+          <a:bodyPr/>
+          <a:p/>
+        </p:txBody>
       </p:sp>
       <p:sp>
         <p:nvSpPr>

--- a/presentation/round1_pitch.pptx
+++ b/presentation/round1_pitch.pptx
@@ -1468,61 +1468,37 @@
               <a:t>Here is the demo workflow processing 1 public CFPB complaint. It proposes the Disputes and Fraud team, quotes the customer’s words as evidence, and stops for human review.</a:t>
             </a:r>
           </a:p>
-          <a:p xmlns:a="http://schemas.openxmlformats.org/drawingml/2006/main">
-            <a:r>
-              <a:t/>
-            </a:r>
-          </a:p>
-          <a:p xmlns:a="http://schemas.openxmlformats.org/drawingml/2006/main">
-            <a:r>
-              <a:t>LangSmith records every evaluation outcome. Of 60 cases, 52 produced a proposal; 4 stopped for low confidence and 4 because the quoted evidence was absent from the complaint.</a:t>
-            </a:r>
-          </a:p>
-          <a:p xmlns:a="http://schemas.openxmlformats.org/drawingml/2006/main">
-            <a:r>
-              <a:t/>
-            </a:r>
-          </a:p>
+          <a:p xmlns:a="http://schemas.openxmlformats.org/drawingml/2006/main"/>
+          <a:p xmlns:a="http://schemas.openxmlformats.org/drawingml/2006/main">
+            <a:r>
+              <a:t>On the right is a different case — one of the four the quote check stopped. LangSmith records every evaluation outcome. Of 60 cases, 52 produced a proposal; 4 stopped for low confidence and 4 because the quoted evidence was absent from the complaint.</a:t>
+            </a:r>
+          </a:p>
+          <a:p xmlns:a="http://schemas.openxmlformats.org/drawingml/2006/main"/>
           <a:p xmlns:a="http://schemas.openxmlformats.org/drawingml/2006/main">
             <a:r>
               <a:t>Those fabricated quotations matter most. Validation caught them and sent each case to human review.</a:t>
             </a:r>
           </a:p>
-          <a:p xmlns:a="http://schemas.openxmlformats.org/drawingml/2006/main">
-            <a:r>
-              <a:t/>
-            </a:r>
-          </a:p>
+          <a:p xmlns:a="http://schemas.openxmlformats.org/drawingml/2006/main"/>
           <a:p xmlns:a="http://schemas.openxmlformats.org/drawingml/2006/main">
             <a:r>
               <a:t>The broader evaluation produced 60.5% team-level agreement against consumer-selected CFPB labels. That is not deployment-quality evidence, and those labels are not expert routing decisions.</a:t>
             </a:r>
           </a:p>
-          <a:p xmlns:a="http://schemas.openxmlformats.org/drawingml/2006/main">
-            <a:r>
-              <a:t/>
-            </a:r>
-          </a:p>
+          <a:p xmlns:a="http://schemas.openxmlformats.org/drawingml/2006/main"/>
           <a:p xmlns:a="http://schemas.openxmlformats.org/drawingml/2006/main">
             <a:r>
               <a:t>The demo is observable, but it does not establish deployment accuracy. Phase 0 creates expert labels from your complaints; Phase 1 measures performance in shadow mode. That is why the proposal is staged.</a:t>
             </a:r>
           </a:p>
-          <a:p xmlns:a="http://schemas.openxmlformats.org/drawingml/2006/main">
-            <a:r>
-              <a:t/>
-            </a:r>
-          </a:p>
+          <a:p xmlns:a="http://schemas.openxmlformats.org/drawingml/2006/main"/>
           <a:p xmlns:a="http://schemas.openxmlformats.org/drawingml/2006/main">
             <a:r>
               <a:t>--- END OF SPOKEN NOTES ---</a:t>
             </a:r>
           </a:p>
-          <a:p xmlns:a="http://schemas.openxmlformats.org/drawingml/2006/main">
-            <a:r>
-              <a:t/>
-            </a:r>
-          </a:p>
+          <a:p xmlns:a="http://schemas.openxmlformats.org/drawingml/2006/main"/>
           <a:p xmlns:a="http://schemas.openxmlformats.org/drawingml/2006/main">
             <a:r>
               <a:t>[Sources]</a:t>
@@ -10438,7 +10414,7 @@
                 <a:ea typeface="Calibri"/>
                 <a:cs typeface="Calibri"/>
               </a:rPr>
-              <a:t>The same demo case in LangSmith monitoring</a:t>
+              <a:t>A different case, stopped by the quote check</a:t>
             </a:r>
             <a:endParaRPr sz="1050"/>
           </a:p>

--- a/presentation/round1_pitch.pptx
+++ b/presentation/round1_pitch.pptx
@@ -2,26 +2,26 @@
 <file path=ppt/presentation.xml><?xml version="1.0" encoding="utf-8"?>
 <p:presentation xmlns:p="http://schemas.openxmlformats.org/presentationml/2006/main">
   <p:sldMasterIdLst>
-    <p:sldMasterId xmlns:r="http://schemas.openxmlformats.org/officeDocument/2006/relationships" id="2147483648" r:id="R73b9547b469547b3"/>
+    <p:sldMasterId xmlns:r="http://schemas.openxmlformats.org/officeDocument/2006/relationships" id="2147483648" r:id="R9d2807a06f384cdb"/>
   </p:sldMasterIdLst>
   <p:notesMasterIdLst>
-    <p:notesMasterId xmlns:r="http://schemas.openxmlformats.org/officeDocument/2006/relationships" r:id="R56410e7f2b5445be"/>
+    <p:notesMasterId xmlns:r="http://schemas.openxmlformats.org/officeDocument/2006/relationships" r:id="R403896bc6b084b7d"/>
   </p:notesMasterIdLst>
   <p:sldIdLst>
-    <p:sldId xmlns:r="http://schemas.openxmlformats.org/officeDocument/2006/relationships" id="256" r:id="Rd26def38410049a6"/>
-    <p:sldId xmlns:r="http://schemas.openxmlformats.org/officeDocument/2006/relationships" id="257" r:id="R3b22b0014225498d"/>
-    <p:sldId xmlns:r="http://schemas.openxmlformats.org/officeDocument/2006/relationships" id="258" r:id="R2380e23fe235466c"/>
-    <p:sldId xmlns:r="http://schemas.openxmlformats.org/officeDocument/2006/relationships" id="259" r:id="R71735fc5ac9245f7"/>
-    <p:sldId xmlns:r="http://schemas.openxmlformats.org/officeDocument/2006/relationships" id="260" r:id="R4465b0b26c30493c"/>
-    <p:sldId xmlns:r="http://schemas.openxmlformats.org/officeDocument/2006/relationships" id="261" r:id="Ree76443202e54b62"/>
-    <p:sldId xmlns:r="http://schemas.openxmlformats.org/officeDocument/2006/relationships" id="262" r:id="Re572e4008d7043db"/>
-    <p:sldId xmlns:r="http://schemas.openxmlformats.org/officeDocument/2006/relationships" id="263" r:id="R91b3ac2167354724"/>
-    <p:sldId xmlns:r="http://schemas.openxmlformats.org/officeDocument/2006/relationships" id="264" r:id="R2f801f5078704be1"/>
-    <p:sldId xmlns:r="http://schemas.openxmlformats.org/officeDocument/2006/relationships" id="265" r:id="Reba12b63adad48d7"/>
-    <p:sldId xmlns:r="http://schemas.openxmlformats.org/officeDocument/2006/relationships" id="266" r:id="R752d83818c864954"/>
-    <p:sldId xmlns:r="http://schemas.openxmlformats.org/officeDocument/2006/relationships" id="267" r:id="R05b391fee938463e"/>
-    <p:sldId xmlns:r="http://schemas.openxmlformats.org/officeDocument/2006/relationships" id="268" r:id="R794c731530f349d4"/>
-    <p:sldId xmlns:r="http://schemas.openxmlformats.org/officeDocument/2006/relationships" id="269" r:id="R97516b331451472e"/>
+    <p:sldId xmlns:r="http://schemas.openxmlformats.org/officeDocument/2006/relationships" id="256" r:id="R8d40107ba5074ff6"/>
+    <p:sldId xmlns:r="http://schemas.openxmlformats.org/officeDocument/2006/relationships" id="257" r:id="Re2e44cd82f7c40e7"/>
+    <p:sldId xmlns:r="http://schemas.openxmlformats.org/officeDocument/2006/relationships" id="258" r:id="Rb81caf4f71294b8c"/>
+    <p:sldId xmlns:r="http://schemas.openxmlformats.org/officeDocument/2006/relationships" id="259" r:id="Rb16fa6dcbb634ad1"/>
+    <p:sldId xmlns:r="http://schemas.openxmlformats.org/officeDocument/2006/relationships" id="260" r:id="R157970933d754066"/>
+    <p:sldId xmlns:r="http://schemas.openxmlformats.org/officeDocument/2006/relationships" id="261" r:id="R49900bb5ba91447e"/>
+    <p:sldId xmlns:r="http://schemas.openxmlformats.org/officeDocument/2006/relationships" id="262" r:id="R3dce50c4ee504be7"/>
+    <p:sldId xmlns:r="http://schemas.openxmlformats.org/officeDocument/2006/relationships" id="263" r:id="R6741b140f4c743f6"/>
+    <p:sldId xmlns:r="http://schemas.openxmlformats.org/officeDocument/2006/relationships" id="264" r:id="R407db62e5d234ef3"/>
+    <p:sldId xmlns:r="http://schemas.openxmlformats.org/officeDocument/2006/relationships" id="265" r:id="R0b963aed4d804c3e"/>
+    <p:sldId xmlns:r="http://schemas.openxmlformats.org/officeDocument/2006/relationships" id="266" r:id="Rbab79592a96941b0"/>
+    <p:sldId xmlns:r="http://schemas.openxmlformats.org/officeDocument/2006/relationships" id="267" r:id="R093fe636ed794a0b"/>
+    <p:sldId xmlns:r="http://schemas.openxmlformats.org/officeDocument/2006/relationships" id="268" r:id="R4ba3e3e41e1b474c"/>
+    <p:sldId xmlns:r="http://schemas.openxmlformats.org/officeDocument/2006/relationships" id="269" r:id="R279bdc1448ee450a"/>
   </p:sldIdLst>
   <p:sldSz cx="12192000" cy="6858000"/>
   <p:notesSz cx="6858000" cy="9144000"/>
@@ -620,7 +620,7 @@
           <a:lstStyle xmlns:a="http://schemas.openxmlformats.org/drawingml/2006/main"/>
           <a:p xmlns:a="http://schemas.openxmlformats.org/drawingml/2006/main">
             <a:r>
-              <a:t>The 60.5% result should not be interpreted as a clean measure of model accuracy.</a:t>
+              <a:t>In the 60-case evaluation sample recorded in LangSmith, 52 complaints produced a proposal after passing the configured validation checks. Passing those checks does not prove that the proposed team was correct.</a:t>
             </a:r>
           </a:p>
           <a:p xmlns:a="http://schemas.openxmlformats.org/drawingml/2006/main">
@@ -630,7 +630,7 @@
           </a:p>
           <a:p xmlns:a="http://schemas.openxmlformats.org/drawingml/2006/main">
             <a:r>
-              <a:t>When the same model classified the same complaints again, it selected the same team approximately 89% of the time. It was relatively consistent with itself but disagreed much more often with the CFPB label.</a:t>
+              <a:t>4 were flagged for human review because the model’s evidence quotation was not present verbatim in the complaint. Another 4 were flagged because confidence was below the threshold.</a:t>
             </a:r>
           </a:p>
           <a:p xmlns:a="http://schemas.openxmlformats.org/drawingml/2006/main">
@@ -640,7 +640,7 @@
           </a:p>
           <a:p xmlns:a="http://schemas.openxmlformats.org/drawingml/2006/main">
             <a:r>
-              <a:t>The CFPB issue label is selected by the person filing the complaint, using a product-specific menu. It is not an expert judgement about which internal team should handle the case.</a:t>
+              <a:t>Every case in the sample has a recorded outcome and a reason code. 0 cases lack a recorded outcome.</a:t>
             </a:r>
           </a:p>
           <a:p xmlns:a="http://schemas.openxmlformats.org/drawingml/2006/main">
@@ -650,7 +650,7 @@
           </a:p>
           <a:p xmlns:a="http://schemas.openxmlformats.org/drawingml/2006/main">
             <a:r>
-              <a:t>The 60.5% result therefore mixes model error with label mismatch; it cannot separate them. Phase 0 resolves that uncertainty by asking experienced handlers to create an expert-labelled reference set and by measuring their agreement with one another.</a:t>
+              <a:t>This does not prove that every proposal was correct. It proves that proposals and stops can be traced and discussed.</a:t>
             </a:r>
           </a:p>
           <a:p xmlns:a="http://schemas.openxmlformats.org/drawingml/2006/main">
@@ -675,12 +675,7 @@
           </a:p>
           <a:p xmlns:a="http://schemas.openxmlformats.org/drawingml/2006/main">
             <a:r>
-              <a:t>- Project repository: classifier/eval_results_gpt-4o.json.</a:t>
-            </a:r>
-          </a:p>
-          <a:p xmlns:a="http://schemas.openxmlformats.org/drawingml/2006/main">
-            <a:r>
-              <a:t>- Project repository: classifier/FINDINGS.md.</a:t>
+              <a:t>- Project repository: langsmith/experiment_summary.json.</a:t>
             </a:r>
           </a:p>
           <a:p xmlns:a="http://schemas.openxmlformats.org/drawingml/2006/main">
@@ -755,7 +750,7 @@
           <a:lstStyle xmlns:a="http://schemas.openxmlformats.org/drawingml/2006/main"/>
           <a:p xmlns:a="http://schemas.openxmlformats.org/drawingml/2006/main">
             <a:r>
-              <a:t>3 data problems could have produced confident but misleading conclusions.</a:t>
+              <a:t>The 60.5% result should not be interpreted as a clean measure of model accuracy.</a:t>
             </a:r>
           </a:p>
           <a:p xmlns:a="http://schemas.openxmlformats.org/drawingml/2006/main">
@@ -765,7 +760,7 @@
           </a:p>
           <a:p xmlns:a="http://schemas.openxmlformats.org/drawingml/2006/main">
             <a:r>
-              <a:t>First, recent complaint volume appeared to collapse by 73% because the CFPB publishes complaints only after the company responds or enough time passes. I removed the incomplete period and ended the analysis window on 27 June 2026.</a:t>
+              <a:t>When the same model classified the same complaints again, it selected the same team approximately 89% of the time. It was relatively consistent with itself but disagreed much more often with the CFPB label.</a:t>
             </a:r>
           </a:p>
           <a:p xmlns:a="http://schemas.openxmlformats.org/drawingml/2006/main">
@@ -775,7 +770,7 @@
           </a:p>
           <a:p xmlns:a="http://schemas.openxmlformats.org/drawingml/2006/main">
             <a:r>
-              <a:t>Second, the apparent response-time field was 0 for 96% of records because it measured the regulator’s routing process, not the firm’s handling time. I excluded it.</a:t>
+              <a:t>The CFPB issue label is selected by the person filing the complaint, using a product-specific menu. It is not an expert judgement about which internal team should handle the case.</a:t>
             </a:r>
           </a:p>
           <a:p xmlns:a="http://schemas.openxmlformats.org/drawingml/2006/main">
@@ -785,7 +780,7 @@
           </a:p>
           <a:p xmlns:a="http://schemas.openxmlformats.org/drawingml/2006/main">
             <a:r>
-              <a:t>Third, 2 different timeliness fields created apparently conflicting percentages. I separated their meanings instead of treating them as the same metric.</a:t>
+              <a:t>The 60.5% result therefore mixes model error with label mismatch; it cannot separate them. Phase 0 resolves that uncertainty by asking experienced handlers to create an expert-labelled reference set and by measuring their agreement with one another.</a:t>
             </a:r>
           </a:p>
           <a:p xmlns:a="http://schemas.openxmlformats.org/drawingml/2006/main">
@@ -795,7 +790,7 @@
           </a:p>
           <a:p xmlns:a="http://schemas.openxmlformats.org/drawingml/2006/main">
             <a:r>
-              <a:t>The lesson is that a field can be complete and still mean the wrong thing for the business question.</a:t>
+              <a:t>--- END OF SPOKEN NOTES ---</a:t>
             </a:r>
           </a:p>
           <a:p xmlns:a="http://schemas.openxmlformats.org/drawingml/2006/main">
@@ -805,22 +800,27 @@
           </a:p>
           <a:p xmlns:a="http://schemas.openxmlformats.org/drawingml/2006/main">
             <a:r>
-              <a:t>--- END OF SPOKEN NOTES ---</a:t>
-            </a:r>
-          </a:p>
-          <a:p xmlns:a="http://schemas.openxmlformats.org/drawingml/2006/main">
-            <a:r>
-              <a:t/>
-            </a:r>
-          </a:p>
-          <a:p xmlns:a="http://schemas.openxmlformats.org/drawingml/2006/main">
-            <a:r>
               <a:t>[Sources]</a:t>
             </a:r>
           </a:p>
           <a:p xmlns:a="http://schemas.openxmlformats.org/drawingml/2006/main">
             <a:r>
-              <a:t>- Project repository: README.md and the documented data-quality checks.</a:t>
+              <a:t>- Project repository: classifier/eval_results_gpt-4o.json and classifier/eval_results_gpt-4o-mini.json.</a:t>
+            </a:r>
+          </a:p>
+          <a:p xmlns:a="http://schemas.openxmlformats.org/drawingml/2006/main">
+            <a:r>
+              <a:t>- Project repository: classifier/FINDINGS.md and cost_estimation/cost_model.json.</a:t>
+            </a:r>
+          </a:p>
+          <a:p xmlns:a="http://schemas.openxmlformats.org/drawingml/2006/main">
+            <a:r>
+              <a:t>- OpenAI GPT-4o pricing: https://developers.openai.com/api/docs/models/gpt-4o</a:t>
+            </a:r>
+          </a:p>
+          <a:p xmlns:a="http://schemas.openxmlformats.org/drawingml/2006/main">
+            <a:r>
+              <a:t>- OpenAI GPT-4o-mini pricing: https://developers.openai.com/api/docs/models/gpt-4o-mini</a:t>
             </a:r>
           </a:p>
           <a:p xmlns:a="http://schemas.openxmlformats.org/drawingml/2006/main">
@@ -895,7 +895,7 @@
           <a:lstStyle xmlns:a="http://schemas.openxmlformats.org/drawingml/2006/main"/>
           <a:p xmlns:a="http://schemas.openxmlformats.org/drawingml/2006/main">
             <a:r>
-              <a:t>My Round 1 compliance position is deliberately preliminary. It is not a final legal classification.</a:t>
+              <a:t>3 data problems could have produced confident but misleading conclusions.</a:t>
             </a:r>
           </a:p>
           <a:p xmlns:a="http://schemas.openxmlformats.org/drawingml/2006/main">
@@ -905,7 +905,7 @@
           </a:p>
           <a:p xmlns:a="http://schemas.openxmlformats.org/drawingml/2006/main">
             <a:r>
-              <a:t>This system proposes an internal complaint-routing team. It does not assess creditworthiness, determine access to a financial service, or make the final decision on a customer’s complaint. A human remains responsible for confirming the route and resolving the case.</a:t>
+              <a:t>First, recent complaint volume appeared to collapse by 73% because the CFPB publishes complaints only after the company responds or enough time passes. I removed the incomplete period and ended the analysis window on 27 June 2026.</a:t>
             </a:r>
           </a:p>
           <a:p xmlns:a="http://schemas.openxmlformats.org/drawingml/2006/main">
@@ -915,7 +915,7 @@
           </a:p>
           <a:p xmlns:a="http://schemas.openxmlformats.org/drawingml/2006/main">
             <a:r>
-              <a:t>On that intended use, I have not identified it as matching the Annex III creditworthiness use classified as high-risk. However, classification depends on the exact intended purpose, deployment context, data flows, and degree of human control.</a:t>
+              <a:t>Second, the apparent response-time field was 0 for 96% of records because it measured the regulator’s routing process, not the firm’s handling time. I excluded it.</a:t>
             </a:r>
           </a:p>
           <a:p xmlns:a="http://schemas.openxmlformats.org/drawingml/2006/main">
@@ -925,7 +925,7 @@
           </a:p>
           <a:p xmlns:a="http://schemas.openxmlformats.org/drawingml/2006/main">
             <a:r>
-              <a:t>Round 2 therefore needs a step-by-step classification and obligations assessment. If the system begins routing automatically or influencing substantive customer outcomes, that is a new assessment, not a minor product upgrade.</a:t>
+              <a:t>Third, 2 different timeliness fields created apparently conflicting percentages. I separated their meanings instead of treating them as the same metric.</a:t>
             </a:r>
           </a:p>
           <a:p xmlns:a="http://schemas.openxmlformats.org/drawingml/2006/main">
@@ -935,7 +935,7 @@
           </a:p>
           <a:p xmlns:a="http://schemas.openxmlformats.org/drawingml/2006/main">
             <a:r>
-              <a:t>Round 2 must also establish the GDPR legal basis and retention period, decide whether a DPIA is required, and verify the hosting region and cross-border transfer controls. Those controls are open work, not completed safeguards.</a:t>
+              <a:t>The lesson is that a field can be complete and still mean the wrong thing for the business question.</a:t>
             </a:r>
           </a:p>
           <a:p xmlns:a="http://schemas.openxmlformats.org/drawingml/2006/main">
@@ -960,12 +960,7 @@
           </a:p>
           <a:p xmlns:a="http://schemas.openxmlformats.org/drawingml/2006/main">
             <a:r>
-              <a:t>- Project repository: research/opportunities_risks.md, §4.</a:t>
-            </a:r>
-          </a:p>
-          <a:p xmlns:a="http://schemas.openxmlformats.org/drawingml/2006/main">
-            <a:r>
-              <a:t>- EU AI Act: https://eur-lex.europa.eu/eli/reg/2024/1689/oj</a:t>
+              <a:t>- Project repository: README.md and the documented data-quality checks.</a:t>
             </a:r>
           </a:p>
           <a:p xmlns:a="http://schemas.openxmlformats.org/drawingml/2006/main">
@@ -1040,6 +1035,151 @@
           <a:lstStyle xmlns:a="http://schemas.openxmlformats.org/drawingml/2006/main"/>
           <a:p xmlns:a="http://schemas.openxmlformats.org/drawingml/2006/main">
             <a:r>
+              <a:t>My Round 1 compliance position is deliberately preliminary. It is not a final legal classification.</a:t>
+            </a:r>
+          </a:p>
+          <a:p xmlns:a="http://schemas.openxmlformats.org/drawingml/2006/main">
+            <a:r>
+              <a:t/>
+            </a:r>
+          </a:p>
+          <a:p xmlns:a="http://schemas.openxmlformats.org/drawingml/2006/main">
+            <a:r>
+              <a:t>This system proposes an internal complaint-routing team. It does not assess creditworthiness, determine access to a financial service, or make the final decision on a customer’s complaint. A human remains responsible for confirming the route and resolving the case.</a:t>
+            </a:r>
+          </a:p>
+          <a:p xmlns:a="http://schemas.openxmlformats.org/drawingml/2006/main">
+            <a:r>
+              <a:t/>
+            </a:r>
+          </a:p>
+          <a:p xmlns:a="http://schemas.openxmlformats.org/drawingml/2006/main">
+            <a:r>
+              <a:t>On that intended use, I have not identified it as matching the Annex III creditworthiness use classified as high-risk. However, classification depends on the exact intended purpose, deployment context, data flows, and degree of human control.</a:t>
+            </a:r>
+          </a:p>
+          <a:p xmlns:a="http://schemas.openxmlformats.org/drawingml/2006/main">
+            <a:r>
+              <a:t/>
+            </a:r>
+          </a:p>
+          <a:p xmlns:a="http://schemas.openxmlformats.org/drawingml/2006/main">
+            <a:r>
+              <a:t>Round 2 therefore needs a step-by-step classification and obligations assessment. If the system begins routing automatically or influencing substantive customer outcomes, that is a new assessment, not a minor product upgrade.</a:t>
+            </a:r>
+          </a:p>
+          <a:p xmlns:a="http://schemas.openxmlformats.org/drawingml/2006/main">
+            <a:r>
+              <a:t/>
+            </a:r>
+          </a:p>
+          <a:p xmlns:a="http://schemas.openxmlformats.org/drawingml/2006/main">
+            <a:r>
+              <a:t>Round 2 must also establish the GDPR legal basis and retention period, decide whether a DPIA is required, and verify the hosting region and cross-border transfer controls. Those controls are open work, not completed safeguards.</a:t>
+            </a:r>
+          </a:p>
+          <a:p xmlns:a="http://schemas.openxmlformats.org/drawingml/2006/main">
+            <a:r>
+              <a:t/>
+            </a:r>
+          </a:p>
+          <a:p xmlns:a="http://schemas.openxmlformats.org/drawingml/2006/main">
+            <a:r>
+              <a:t>--- END OF SPOKEN NOTES ---</a:t>
+            </a:r>
+          </a:p>
+          <a:p xmlns:a="http://schemas.openxmlformats.org/drawingml/2006/main">
+            <a:r>
+              <a:t/>
+            </a:r>
+          </a:p>
+          <a:p xmlns:a="http://schemas.openxmlformats.org/drawingml/2006/main">
+            <a:r>
+              <a:t>[Sources]</a:t>
+            </a:r>
+          </a:p>
+          <a:p xmlns:a="http://schemas.openxmlformats.org/drawingml/2006/main">
+            <a:r>
+              <a:t>- Project repository: research/opportunities_risks.md, §4.</a:t>
+            </a:r>
+          </a:p>
+          <a:p xmlns:a="http://schemas.openxmlformats.org/drawingml/2006/main">
+            <a:r>
+              <a:t>- EU AI Act: https://eur-lex.europa.eu/eli/reg/2024/1689/oj</a:t>
+            </a:r>
+          </a:p>
+          <a:p xmlns:a="http://schemas.openxmlformats.org/drawingml/2006/main">
+            <a:r>
+              <a:t>[/Sources]</a:t>
+            </a:r>
+          </a:p>
+        </p:txBody>
+      </p:sp>
+      <p:sp>
+        <p:nvSpPr>
+          <p:cNvPr id="4" name="Slide Number Placeholder 3"/>
+          <p:cNvSpPr>
+            <a:spLocks xmlns:a="http://schemas.openxmlformats.org/drawingml/2006/main" noGrp="1"/>
+          </p:cNvSpPr>
+          <p:nvPr>
+            <p:ph type="sldNum" idx="5"/>
+          </p:nvPr>
+        </p:nvSpPr>
+        <p:spPr/>
+        <p:txBody>
+          <a:bodyPr xmlns:a="http://schemas.openxmlformats.org/drawingml/2006/main"/>
+          <a:lstStyle xmlns:a="http://schemas.openxmlformats.org/drawingml/2006/main"/>
+          <a:p xmlns:a="http://schemas.openxmlformats.org/drawingml/2006/main"/>
+        </p:txBody>
+      </p:sp>
+    </p:spTree>
+  </p:cSld>
+  <p:clrMapOvr>
+    <a:masterClrMapping xmlns:a="http://schemas.openxmlformats.org/drawingml/2006/main"/>
+  </p:clrMapOvr>
+</p:notes>
+</file>
+
+<file path=ppt/notesSlides/notesSlide14.xml><?xml version="1.0" encoding="utf-8"?>
+<p:notes xmlns:p="http://schemas.openxmlformats.org/presentationml/2006/main">
+  <p:cSld>
+    <p:spTree>
+      <p:nvGrpSpPr>
+        <p:cNvPr id="1" name=""/>
+        <p:cNvGrpSpPr/>
+        <p:nvPr/>
+      </p:nvGrpSpPr>
+      <p:grpSpPr>
+        <a:xfrm xmlns:a="http://schemas.openxmlformats.org/drawingml/2006/main"/>
+      </p:grpSpPr>
+      <p:sp>
+        <p:nvSpPr>
+          <p:cNvPr id="2" name="Slide Image Placeholder 1"/>
+          <p:cNvSpPr>
+            <a:spLocks xmlns:a="http://schemas.openxmlformats.org/drawingml/2006/main" noGrp="1"/>
+          </p:cNvSpPr>
+          <p:nvPr>
+            <p:ph type="sldImg" idx="0"/>
+          </p:nvPr>
+        </p:nvSpPr>
+        <p:spPr/>
+      </p:sp>
+      <p:sp>
+        <p:nvSpPr>
+          <p:cNvPr id="3" name="Notes Placeholder 2"/>
+          <p:cNvSpPr>
+            <a:spLocks xmlns:a="http://schemas.openxmlformats.org/drawingml/2006/main" noGrp="1"/>
+          </p:cNvSpPr>
+          <p:nvPr>
+            <p:ph type="body" idx="1"/>
+          </p:nvPr>
+        </p:nvSpPr>
+        <p:spPr/>
+        <p:txBody>
+          <a:bodyPr xmlns:a="http://schemas.openxmlformats.org/drawingml/2006/main"/>
+          <a:lstStyle xmlns:a="http://schemas.openxmlformats.org/drawingml/2006/main"/>
+          <a:p xmlns:a="http://schemas.openxmlformats.org/drawingml/2006/main">
+            <a:r>
               <a:t>Every figure in the pitch fits 1 of 3 categories: measured in this project, taken from a named public source, or explicitly labelled as an assumption or professional judgement.</a:t>
             </a:r>
           </a:p>
@@ -1465,40 +1605,64 @@
           <a:lstStyle xmlns:a="http://schemas.openxmlformats.org/drawingml/2006/main"/>
           <a:p xmlns:a="http://schemas.openxmlformats.org/drawingml/2006/main">
             <a:r>
-              <a:t>Here is the demo workflow processing 1 public CFPB complaint. It proposes the Disputes and Fraud team, quotes the customer’s words as evidence, and stops for human review.</a:t>
-            </a:r>
-          </a:p>
-          <a:p xmlns:a="http://schemas.openxmlformats.org/drawingml/2006/main"/>
-          <a:p xmlns:a="http://schemas.openxmlformats.org/drawingml/2006/main">
-            <a:r>
-              <a:t>On the right is a different case — one of the four the quote check stopped. LangSmith records every evaluation outcome. Of 60 cases, 52 produced a proposal; 4 stopped for low confidence and 4 because the quoted evidence was absent from the complaint.</a:t>
-            </a:r>
-          </a:p>
-          <a:p xmlns:a="http://schemas.openxmlformats.org/drawingml/2006/main"/>
+              <a:t>Here is the demo workflow processing 1 public CFPB complaint. It proposes the Disputes and Fraud team, quotes the customer’s words as evidence, and leaves the routing decision to a person.</a:t>
+            </a:r>
+          </a:p>
+          <a:p xmlns:a="http://schemas.openxmlformats.org/drawingml/2006/main">
+            <a:r>
+              <a:t/>
+            </a:r>
+          </a:p>
+          <a:p xmlns:a="http://schemas.openxmlformats.org/drawingml/2006/main">
+            <a:r>
+              <a:t>On the right is a different case — 1 of the 4 stopped by the quote check. LangSmith records every evaluation outcome. Of 60 cases, 52 produced a proposal; 4 stopped for low confidence and 4 because the quoted evidence was absent from the complaint.</a:t>
+            </a:r>
+          </a:p>
+          <a:p xmlns:a="http://schemas.openxmlformats.org/drawingml/2006/main">
+            <a:r>
+              <a:t/>
+            </a:r>
+          </a:p>
           <a:p xmlns:a="http://schemas.openxmlformats.org/drawingml/2006/main">
             <a:r>
               <a:t>Those fabricated quotations matter most. Validation caught them and sent each case to human review.</a:t>
             </a:r>
           </a:p>
-          <a:p xmlns:a="http://schemas.openxmlformats.org/drawingml/2006/main"/>
+          <a:p xmlns:a="http://schemas.openxmlformats.org/drawingml/2006/main">
+            <a:r>
+              <a:t/>
+            </a:r>
+          </a:p>
           <a:p xmlns:a="http://schemas.openxmlformats.org/drawingml/2006/main">
             <a:r>
               <a:t>The broader evaluation produced 60.5% team-level agreement against consumer-selected CFPB labels. That is not deployment-quality evidence, and those labels are not expert routing decisions.</a:t>
             </a:r>
           </a:p>
-          <a:p xmlns:a="http://schemas.openxmlformats.org/drawingml/2006/main"/>
+          <a:p xmlns:a="http://schemas.openxmlformats.org/drawingml/2006/main">
+            <a:r>
+              <a:t/>
+            </a:r>
+          </a:p>
           <a:p xmlns:a="http://schemas.openxmlformats.org/drawingml/2006/main">
             <a:r>
               <a:t>The demo is observable, but it does not establish deployment accuracy. Phase 0 creates expert labels from your complaints; Phase 1 measures performance in shadow mode. That is why the proposal is staged.</a:t>
             </a:r>
           </a:p>
-          <a:p xmlns:a="http://schemas.openxmlformats.org/drawingml/2006/main"/>
+          <a:p xmlns:a="http://schemas.openxmlformats.org/drawingml/2006/main">
+            <a:r>
+              <a:t/>
+            </a:r>
+          </a:p>
           <a:p xmlns:a="http://schemas.openxmlformats.org/drawingml/2006/main">
             <a:r>
               <a:t>--- END OF SPOKEN NOTES ---</a:t>
             </a:r>
           </a:p>
-          <a:p xmlns:a="http://schemas.openxmlformats.org/drawingml/2006/main"/>
+          <a:p xmlns:a="http://schemas.openxmlformats.org/drawingml/2006/main">
+            <a:r>
+              <a:t/>
+            </a:r>
+          </a:p>
           <a:p xmlns:a="http://schemas.openxmlformats.org/drawingml/2006/main">
             <a:r>
               <a:t>[Sources]</a:t>
@@ -1506,7 +1670,17 @@
           </a:p>
           <a:p xmlns:a="http://schemas.openxmlformats.org/drawingml/2006/main">
             <a:r>
-              <a:t>- Project repository: langsmith/experiment_summary.json.</a:t>
+              <a:t>- Project asset: n8n/screenshots/n8n-execution.png.</a:t>
+            </a:r>
+          </a:p>
+          <a:p xmlns:a="http://schemas.openxmlformats.org/drawingml/2006/main">
+            <a:r>
+              <a:t>- Project asset: langsmith/screenshots/trace-detail-guard-fired.png.</a:t>
+            </a:r>
+          </a:p>
+          <a:p xmlns:a="http://schemas.openxmlformats.org/drawingml/2006/main">
+            <a:r>
+              <a:t>- Project repository: langsmith/traces_export.json and langsmith/experiment_summary.json.</a:t>
             </a:r>
           </a:p>
           <a:p xmlns:a="http://schemas.openxmlformats.org/drawingml/2006/main">
@@ -1686,6 +1860,11 @@
           </a:p>
           <a:p xmlns:a="http://schemas.openxmlformats.org/drawingml/2006/main">
             <a:r>
+              <a:t>- OpenAI GPT-4o-mini pricing: https://developers.openai.com/api/docs/models/gpt-4o-mini</a:t>
+            </a:r>
+          </a:p>
+          <a:p xmlns:a="http://schemas.openxmlformats.org/drawingml/2006/main">
+            <a:r>
               <a:t>- Financial Ombudsman Service case fees: https://www.financial-ombudsman.org.uk/businesses/resolving-complaint/case-fees</a:t>
             </a:r>
           </a:p>
@@ -1759,76 +1938,7 @@
         <p:txBody>
           <a:bodyPr xmlns:a="http://schemas.openxmlformats.org/drawingml/2006/main"/>
           <a:lstStyle xmlns:a="http://schemas.openxmlformats.org/drawingml/2006/main"/>
-          <a:p xmlns:a="http://schemas.openxmlformats.org/drawingml/2006/main">
-            <a:r>
-              <a:t>I ranked 3 candidate use cases by how visible and controllable their reasoning can be. Only complaint triage is proposed for Phase 0 and Phase 1; anomaly flagging and reporting assistance remain later options.</a:t>
-            </a:r>
-          </a:p>
-          <a:p xmlns:a="http://schemas.openxmlformats.org/drawingml/2006/main">
-            <a:r>
-              <a:t/>
-            </a:r>
-          </a:p>
-          <a:p xmlns:a="http://schemas.openxmlformats.org/drawingml/2006/main">
-            <a:r>
-              <a:t>Complaint triage can propose a team and show the exact evidence behind the proposal. Anomaly flagging can identify unusual patterns for one of your investigators to review. Reporting assistance can draft material while leaving approval with a named employee in your firm.</a:t>
-            </a:r>
-          </a:p>
-          <a:p xmlns:a="http://schemas.openxmlformats.org/drawingml/2006/main">
-            <a:r>
-              <a:t/>
-            </a:r>
-          </a:p>
-          <a:p xmlns:a="http://schemas.openxmlformats.org/drawingml/2006/main">
-            <a:r>
-              <a:t>I ruled out 2 uses. A customer-facing chatbot could make public errors in the firm’s voice. Creditworthiness scoring directly affects access to financial services and is classified as high-risk under the EU AI Act. A separate guardrail prevents predicted payout from determining routing priority.</a:t>
-            </a:r>
-          </a:p>
-          <a:p xmlns:a="http://schemas.openxmlformats.org/drawingml/2006/main">
-            <a:r>
-              <a:t/>
-            </a:r>
-          </a:p>
-          <a:p xmlns:a="http://schemas.openxmlformats.org/drawingml/2006/main">
-            <a:r>
-              <a:t>The point is not to find the most impressive use case. It is to choose a use case whose risks can be bounded and whose decisions can be examined.</a:t>
-            </a:r>
-          </a:p>
-          <a:p xmlns:a="http://schemas.openxmlformats.org/drawingml/2006/main">
-            <a:r>
-              <a:t/>
-            </a:r>
-          </a:p>
-          <a:p xmlns:a="http://schemas.openxmlformats.org/drawingml/2006/main">
-            <a:r>
-              <a:t>--- END OF SPOKEN NOTES ---</a:t>
-            </a:r>
-          </a:p>
-          <a:p xmlns:a="http://schemas.openxmlformats.org/drawingml/2006/main">
-            <a:r>
-              <a:t/>
-            </a:r>
-          </a:p>
-          <a:p xmlns:a="http://schemas.openxmlformats.org/drawingml/2006/main">
-            <a:r>
-              <a:t>[Sources]</a:t>
-            </a:r>
-          </a:p>
-          <a:p xmlns:a="http://schemas.openxmlformats.org/drawingml/2006/main">
-            <a:r>
-              <a:t>- Project repository: research/use_cases.md.</a:t>
-            </a:r>
-          </a:p>
-          <a:p xmlns:a="http://schemas.openxmlformats.org/drawingml/2006/main">
-            <a:r>
-              <a:t>- EU AI Act, Annex III: https://eur-lex.europa.eu/eli/reg/2024/1689/oj</a:t>
-            </a:r>
-          </a:p>
-          <a:p xmlns:a="http://schemas.openxmlformats.org/drawingml/2006/main">
-            <a:r>
-              <a:t>[/Sources]</a:t>
-            </a:r>
-          </a:p>
+          <a:p xmlns:a="http://schemas.openxmlformats.org/drawingml/2006/main"/>
         </p:txBody>
       </p:sp>
       <p:sp>
@@ -1896,7 +2006,7 @@
           <a:lstStyle xmlns:a="http://schemas.openxmlformats.org/drawingml/2006/main"/>
           <a:p xmlns:a="http://schemas.openxmlformats.org/drawingml/2006/main">
             <a:r>
-              <a:t>This chart explains how the public data supports a bounded initial test.</a:t>
+              <a:t>I ranked 3 candidate use cases by how visible and controllable their reasoning can be. Only complaint triage is proposed for Phase 0 and Phase 1; anomaly flagging and reporting assistance remain later options.</a:t>
             </a:r>
           </a:p>
           <a:p xmlns:a="http://schemas.openxmlformats.org/drawingml/2006/main">
@@ -1906,7 +2016,7 @@
           </a:p>
           <a:p xmlns:a="http://schemas.openxmlformats.org/drawingml/2006/main">
             <a:r>
-              <a:t>In the public dataset, 5 of 64 issue categories account for 46.1% of complaints. That makes it possible to test a narrow, high-volume starting point instead of pretending the model can handle the entire taxonomy equally well.</a:t>
+              <a:t>Complaint triage can propose a team and show the exact evidence behind the proposal. Anomaly flagging can identify unusual patterns for one of your investigators to review. Reporting assistance can draft material while leaving approval with a named employee in your firm.</a:t>
             </a:r>
           </a:p>
           <a:p xmlns:a="http://schemas.openxmlformats.org/drawingml/2006/main">
@@ -1916,7 +2026,7 @@
           </a:p>
           <a:p xmlns:a="http://schemas.openxmlformats.org/drawingml/2006/main">
             <a:r>
-              <a:t>I would not assume that 46.1% applies to the client. Phase 0 must measure the client’s own concentration and decide which categories belong in the pilot.</a:t>
+              <a:t>I ruled out 2 uses. A customer-facing chatbot could make public errors in the firm’s voice. Creditworthiness scoring directly affects access to financial services and is classified as high-risk under the EU AI Act. A separate guardrail prevents predicted payout from determining routing priority.</a:t>
             </a:r>
           </a:p>
           <a:p xmlns:a="http://schemas.openxmlformats.org/drawingml/2006/main">
@@ -1926,7 +2036,7 @@
           </a:p>
           <a:p xmlns:a="http://schemas.openxmlformats.org/drawingml/2006/main">
             <a:r>
-              <a:t>The public result is a reason to investigate a focused scope, not a forecast of the client’s complaint book.</a:t>
+              <a:t>The point is not to find the most impressive use case. It is to choose a use case whose risks can be bounded and whose decisions can be examined.</a:t>
             </a:r>
           </a:p>
           <a:p xmlns:a="http://schemas.openxmlformats.org/drawingml/2006/main">
@@ -1951,7 +2061,12 @@
           </a:p>
           <a:p xmlns:a="http://schemas.openxmlformats.org/drawingml/2006/main">
             <a:r>
-              <a:t>- Project repository: README.md and research/sector_research.md.</a:t>
+              <a:t>- Project repository: research/use_cases.md.</a:t>
+            </a:r>
+          </a:p>
+          <a:p xmlns:a="http://schemas.openxmlformats.org/drawingml/2006/main">
+            <a:r>
+              <a:t>- EU AI Act, Annex III: https://eur-lex.europa.eu/eli/reg/2024/1689/oj</a:t>
             </a:r>
           </a:p>
           <a:p xmlns:a="http://schemas.openxmlformats.org/drawingml/2006/main">
@@ -2026,7 +2141,7 @@
           <a:lstStyle xmlns:a="http://schemas.openxmlformats.org/drawingml/2006/main"/>
           <a:p xmlns:a="http://schemas.openxmlformats.org/drawingml/2006/main">
             <a:r>
-              <a:t>This public-data slide separates how often complaints occur from how often they end with monetary relief.</a:t>
+              <a:t>This chart explains how the public data supports a bounded initial test.</a:t>
             </a:r>
           </a:p>
           <a:p xmlns:a="http://schemas.openxmlformats.org/drawingml/2006/main">
@@ -2036,7 +2151,7 @@
           </a:p>
           <a:p xmlns:a="http://schemas.openxmlformats.org/drawingml/2006/main">
             <a:r>
-              <a:t>Checking and savings accounts and credit cards produce most of the complaint volume in this dataset. But monetary relief appears in 17.2% of credit-card complaints, compared with 3.0% for vehicle-lending complaints. That is a 5.7× difference.</a:t>
+              <a:t>In the public dataset, 5 of 64 issue categories account for 46.1% of complaints. That makes it possible to test a narrow, high-volume starting point instead of pretending the model can handle the entire taxonomy equally well.</a:t>
             </a:r>
           </a:p>
           <a:p xmlns:a="http://schemas.openxmlformats.org/drawingml/2006/main">
@@ -2046,7 +2161,7 @@
           </a:p>
           <a:p xmlns:a="http://schemas.openxmlformats.org/drawingml/2006/main">
             <a:r>
-              <a:t>The implication is that volume alone does not describe likely monetary relief. That relationship is a hypothesis to test, not a routing rule.</a:t>
+              <a:t>I would not assume that 46.1% applies to the client. Phase 0 must measure the client’s own concentration and decide which categories belong in the pilot.</a:t>
             </a:r>
           </a:p>
           <a:p xmlns:a="http://schemas.openxmlformats.org/drawingml/2006/main">
@@ -2056,7 +2171,7 @@
           </a:p>
           <a:p xmlns:a="http://schemas.openxmlformats.org/drawingml/2006/main">
             <a:r>
-              <a:t>This is a signal from public data, not a forecast for the client. The client’s own product mix, resolution costs, and escalation patterns must be measured during discovery and the pilot.</a:t>
+              <a:t>The public result is a reason to investigate a focused scope, not a forecast of the client’s complaint book.</a:t>
             </a:r>
           </a:p>
           <a:p xmlns:a="http://schemas.openxmlformats.org/drawingml/2006/main">
@@ -2081,7 +2196,7 @@
           </a:p>
           <a:p xmlns:a="http://schemas.openxmlformats.org/drawingml/2006/main">
             <a:r>
-              <a:t>- Project repository: research/sector_research.md and dashboard evidence.</a:t>
+              <a:t>- Project repository: README.md and research/sector_research.md.</a:t>
             </a:r>
           </a:p>
           <a:p xmlns:a="http://schemas.openxmlformats.org/drawingml/2006/main">
@@ -2156,7 +2271,7 @@
           <a:lstStyle xmlns:a="http://schemas.openxmlformats.org/drawingml/2006/main"/>
           <a:p xmlns:a="http://schemas.openxmlformats.org/drawingml/2006/main">
             <a:r>
-              <a:t>In the 60-case evaluation sample recorded in LangSmith, 52 complaints produced a proposal after passing the configured validation checks. Passing those checks does not prove that the proposed team was correct.</a:t>
+              <a:t>This public-data slide separates how often complaints occur from how often they end with monetary relief.</a:t>
             </a:r>
           </a:p>
           <a:p xmlns:a="http://schemas.openxmlformats.org/drawingml/2006/main">
@@ -2166,7 +2281,7 @@
           </a:p>
           <a:p xmlns:a="http://schemas.openxmlformats.org/drawingml/2006/main">
             <a:r>
-              <a:t>4 were flagged for human review because the model’s evidence quotation was not present verbatim in the complaint. Another 4 were flagged because confidence was below the threshold.</a:t>
+              <a:t>Checking and savings accounts and credit cards produce most of the complaint volume in this dataset. But monetary relief appears in 17.2% of credit-card complaints, compared with 3.0% for vehicle-lending complaints. That is a 5.7× difference.</a:t>
             </a:r>
           </a:p>
           <a:p xmlns:a="http://schemas.openxmlformats.org/drawingml/2006/main">
@@ -2176,7 +2291,7 @@
           </a:p>
           <a:p xmlns:a="http://schemas.openxmlformats.org/drawingml/2006/main">
             <a:r>
-              <a:t>Every case in the sample has a recorded outcome and a reason code. 0 cases lack a recorded outcome.</a:t>
+              <a:t>The implication is that volume alone does not describe likely monetary relief. That relationship is a hypothesis to test, not a routing rule.</a:t>
             </a:r>
           </a:p>
           <a:p xmlns:a="http://schemas.openxmlformats.org/drawingml/2006/main">
@@ -2186,7 +2301,7 @@
           </a:p>
           <a:p xmlns:a="http://schemas.openxmlformats.org/drawingml/2006/main">
             <a:r>
-              <a:t>This does not prove that every proposal was correct. It proves that proposals and stops can be traced and discussed.</a:t>
+              <a:t>This is a signal from public data, not a forecast for the client. The client’s own product mix, resolution costs, and escalation patterns must be measured during discovery and the pilot.</a:t>
             </a:r>
           </a:p>
           <a:p xmlns:a="http://schemas.openxmlformats.org/drawingml/2006/main">
@@ -2211,7 +2326,7 @@
           </a:p>
           <a:p xmlns:a="http://schemas.openxmlformats.org/drawingml/2006/main">
             <a:r>
-              <a:t>- Project repository: langsmith/experiment_summary.json.</a:t>
+              <a:t>- Project repository: research/sector_research.md and dashboard evidence.</a:t>
             </a:r>
           </a:p>
           <a:p xmlns:a="http://schemas.openxmlformats.org/drawingml/2006/main">
@@ -2284,7 +2399,7 @@
   </p:cSld>
   <p:clrMap bg1="lt1" tx1="dk1" bg2="lt2" tx2="dk2" accent1="accent1" accent2="accent2" accent3="accent3" accent4="accent4" accent5="accent5" accent6="accent6" hlink="hlink" folHlink="folHlink"/>
   <p:sldLayoutIdLst>
-    <p:sldLayoutId xmlns:r="http://schemas.openxmlformats.org/officeDocument/2006/relationships" id="2147483649" r:id="Rfe782b5d4bde487d"/>
+    <p:sldLayoutId xmlns:r="http://schemas.openxmlformats.org/officeDocument/2006/relationships" id="2147483649" r:id="Re9b0e0efd5d442d5"/>
   </p:sldLayoutIdLst>
   <p:hf sldNum="0" hdr="0" ftr="0" dt="0"/>
   <p:txStyles>
@@ -2879,9 +2994,10 @@
             <a:prstDash val="solid"/>
           </a:ln>
         </p:spPr>
-        <p:txBody xmlns:a="http://schemas.openxmlformats.org/drawingml/2006/main">
-          <a:bodyPr/>
-          <a:p/>
+        <p:txBody>
+          <a:bodyPr xmlns:a="http://schemas.openxmlformats.org/drawingml/2006/main"/>
+          <a:lstStyle xmlns:a="http://schemas.openxmlformats.org/drawingml/2006/main"/>
+          <a:p xmlns:a="http://schemas.openxmlformats.org/drawingml/2006/main"/>
         </p:txBody>
       </p:sp>
       <p:sp>
@@ -2912,9 +3028,10 @@
             </a:srgbClr>
           </a:solidFill>
         </p:spPr>
-        <p:txBody xmlns:a="http://schemas.openxmlformats.org/drawingml/2006/main">
-          <a:bodyPr/>
-          <a:p/>
+        <p:txBody>
+          <a:bodyPr xmlns:a="http://schemas.openxmlformats.org/drawingml/2006/main"/>
+          <a:lstStyle xmlns:a="http://schemas.openxmlformats.org/drawingml/2006/main"/>
+          <a:p xmlns:a="http://schemas.openxmlformats.org/drawingml/2006/main"/>
         </p:txBody>
       </p:sp>
       <p:sp>
@@ -3085,9 +3202,10 @@
             <a:prstDash val="solid"/>
           </a:ln>
         </p:spPr>
-        <p:txBody xmlns:a="http://schemas.openxmlformats.org/drawingml/2006/main">
-          <a:bodyPr/>
-          <a:p/>
+        <p:txBody>
+          <a:bodyPr xmlns:a="http://schemas.openxmlformats.org/drawingml/2006/main"/>
+          <a:lstStyle xmlns:a="http://schemas.openxmlformats.org/drawingml/2006/main"/>
+          <a:p xmlns:a="http://schemas.openxmlformats.org/drawingml/2006/main"/>
         </p:txBody>
       </p:sp>
       <p:sp>
@@ -3258,9 +3376,10 @@
             <a:srgbClr val="1D2A32"/>
           </a:solidFill>
         </p:spPr>
-        <p:txBody xmlns:a="http://schemas.openxmlformats.org/drawingml/2006/main">
-          <a:bodyPr/>
-          <a:p/>
+        <p:txBody>
+          <a:bodyPr xmlns:a="http://schemas.openxmlformats.org/drawingml/2006/main"/>
+          <a:lstStyle xmlns:a="http://schemas.openxmlformats.org/drawingml/2006/main"/>
+          <a:p xmlns:a="http://schemas.openxmlformats.org/drawingml/2006/main"/>
         </p:txBody>
       </p:sp>
       <p:sp>
@@ -3289,9 +3408,10 @@
             <a:srgbClr val="2A78D6"/>
           </a:solidFill>
         </p:spPr>
-        <p:txBody xmlns:a="http://schemas.openxmlformats.org/drawingml/2006/main">
-          <a:bodyPr/>
-          <a:p/>
+        <p:txBody>
+          <a:bodyPr xmlns:a="http://schemas.openxmlformats.org/drawingml/2006/main"/>
+          <a:lstStyle xmlns:a="http://schemas.openxmlformats.org/drawingml/2006/main"/>
+          <a:p xmlns:a="http://schemas.openxmlformats.org/drawingml/2006/main"/>
         </p:txBody>
       </p:sp>
       <p:sp>
@@ -3320,9 +3440,10 @@
             <a:srgbClr val="8FBFF0"/>
           </a:solidFill>
         </p:spPr>
-        <p:txBody xmlns:a="http://schemas.openxmlformats.org/drawingml/2006/main">
-          <a:bodyPr/>
-          <a:p/>
+        <p:txBody>
+          <a:bodyPr xmlns:a="http://schemas.openxmlformats.org/drawingml/2006/main"/>
+          <a:lstStyle xmlns:a="http://schemas.openxmlformats.org/drawingml/2006/main"/>
+          <a:p xmlns:a="http://schemas.openxmlformats.org/drawingml/2006/main"/>
         </p:txBody>
       </p:sp>
     </p:spTree>
@@ -3426,9 +3547,10 @@
             <a:srgbClr val="24343F"/>
           </a:solidFill>
         </p:spPr>
-        <p:txBody xmlns:a="http://schemas.openxmlformats.org/drawingml/2006/main">
-          <a:bodyPr/>
-          <a:p/>
+        <p:txBody>
+          <a:bodyPr xmlns:a="http://schemas.openxmlformats.org/drawingml/2006/main"/>
+          <a:lstStyle xmlns:a="http://schemas.openxmlformats.org/drawingml/2006/main"/>
+          <a:p xmlns:a="http://schemas.openxmlformats.org/drawingml/2006/main"/>
         </p:txBody>
       </p:sp>
       <p:pic>
@@ -3440,7 +3562,7 @@
           <p:nvPr/>
         </p:nvPicPr>
         <p:blipFill>
-          <a:blip xmlns:r="http://schemas.openxmlformats.org/officeDocument/2006/relationships" xmlns:a="http://schemas.openxmlformats.org/drawingml/2006/main" r:embed="R0e4194775f0846d6"/>
+          <a:blip xmlns:r="http://schemas.openxmlformats.org/officeDocument/2006/relationships" xmlns:a="http://schemas.openxmlformats.org/drawingml/2006/main" r:embed="Rc9eb5dcc5abf487f"/>
           <a:stretch xmlns:a="http://schemas.openxmlformats.org/drawingml/2006/main">
             <a:fillRect l="0" t="0" r="0" b="0"/>
           </a:stretch>
@@ -3527,9 +3649,10 @@
             <a:srgbClr val="EFF5F9"/>
           </a:solidFill>
         </p:spPr>
-        <p:txBody xmlns:a="http://schemas.openxmlformats.org/drawingml/2006/main">
-          <a:bodyPr/>
-          <a:p/>
+        <p:txBody>
+          <a:bodyPr xmlns:a="http://schemas.openxmlformats.org/drawingml/2006/main"/>
+          <a:lstStyle xmlns:a="http://schemas.openxmlformats.org/drawingml/2006/main"/>
+          <a:p xmlns:a="http://schemas.openxmlformats.org/drawingml/2006/main"/>
         </p:txBody>
       </p:sp>
       <p:sp>
@@ -3558,9 +3681,10 @@
             <a:srgbClr val="2A78D6"/>
           </a:solidFill>
         </p:spPr>
-        <p:txBody xmlns:a="http://schemas.openxmlformats.org/drawingml/2006/main">
-          <a:bodyPr/>
-          <a:p/>
+        <p:txBody>
+          <a:bodyPr xmlns:a="http://schemas.openxmlformats.org/drawingml/2006/main"/>
+          <a:lstStyle xmlns:a="http://schemas.openxmlformats.org/drawingml/2006/main"/>
+          <a:p xmlns:a="http://schemas.openxmlformats.org/drawingml/2006/main"/>
         </p:txBody>
       </p:sp>
       <p:sp>
@@ -3650,9 +3774,10 @@
             <a:prstDash val="solid"/>
           </a:ln>
         </p:spPr>
-        <p:txBody xmlns:a="http://schemas.openxmlformats.org/drawingml/2006/main">
-          <a:bodyPr/>
-          <a:p/>
+        <p:txBody>
+          <a:bodyPr xmlns:a="http://schemas.openxmlformats.org/drawingml/2006/main"/>
+          <a:lstStyle xmlns:a="http://schemas.openxmlformats.org/drawingml/2006/main"/>
+          <a:p xmlns:a="http://schemas.openxmlformats.org/drawingml/2006/main"/>
         </p:txBody>
       </p:sp>
       <p:sp>
@@ -4297,9 +4422,10 @@
             <a:srgbClr val="24343F"/>
           </a:solidFill>
         </p:spPr>
-        <p:txBody xmlns:a="http://schemas.openxmlformats.org/drawingml/2006/main">
-          <a:bodyPr/>
-          <a:p/>
+        <p:txBody>
+          <a:bodyPr xmlns:a="http://schemas.openxmlformats.org/drawingml/2006/main"/>
+          <a:lstStyle xmlns:a="http://schemas.openxmlformats.org/drawingml/2006/main"/>
+          <a:p xmlns:a="http://schemas.openxmlformats.org/drawingml/2006/main"/>
         </p:txBody>
       </p:sp>
       <p:sp>
@@ -4328,9 +4454,10 @@
             <a:srgbClr val="2A78D6"/>
           </a:solidFill>
         </p:spPr>
-        <p:txBody xmlns:a="http://schemas.openxmlformats.org/drawingml/2006/main">
-          <a:bodyPr/>
-          <a:p/>
+        <p:txBody>
+          <a:bodyPr xmlns:a="http://schemas.openxmlformats.org/drawingml/2006/main"/>
+          <a:lstStyle xmlns:a="http://schemas.openxmlformats.org/drawingml/2006/main"/>
+          <a:p xmlns:a="http://schemas.openxmlformats.org/drawingml/2006/main"/>
         </p:txBody>
       </p:sp>
       <p:sp>
@@ -4480,9 +4607,10 @@
             <a:srgbClr val="24343F"/>
           </a:solidFill>
         </p:spPr>
-        <p:txBody xmlns:a="http://schemas.openxmlformats.org/drawingml/2006/main">
-          <a:bodyPr/>
-          <a:p/>
+        <p:txBody>
+          <a:bodyPr xmlns:a="http://schemas.openxmlformats.org/drawingml/2006/main"/>
+          <a:lstStyle xmlns:a="http://schemas.openxmlformats.org/drawingml/2006/main"/>
+          <a:p xmlns:a="http://schemas.openxmlformats.org/drawingml/2006/main"/>
         </p:txBody>
       </p:sp>
       <p:pic>
@@ -4494,7 +4622,7 @@
           <p:nvPr/>
         </p:nvPicPr>
         <p:blipFill>
-          <a:blip xmlns:r="http://schemas.openxmlformats.org/officeDocument/2006/relationships" xmlns:a="http://schemas.openxmlformats.org/drawingml/2006/main" r:embed="Rf3668b642f14462f"/>
+          <a:blip xmlns:r="http://schemas.openxmlformats.org/officeDocument/2006/relationships" xmlns:a="http://schemas.openxmlformats.org/drawingml/2006/main" r:embed="R6d3366b995054f63"/>
           <a:stretch xmlns:a="http://schemas.openxmlformats.org/drawingml/2006/main">
             <a:fillRect l="0" t="0" r="0" b="0"/>
           </a:stretch>
@@ -4581,9 +4709,10 @@
             <a:srgbClr val="EFF5F9"/>
           </a:solidFill>
         </p:spPr>
-        <p:txBody xmlns:a="http://schemas.openxmlformats.org/drawingml/2006/main">
-          <a:bodyPr/>
-          <a:p/>
+        <p:txBody>
+          <a:bodyPr xmlns:a="http://schemas.openxmlformats.org/drawingml/2006/main"/>
+          <a:lstStyle xmlns:a="http://schemas.openxmlformats.org/drawingml/2006/main"/>
+          <a:p xmlns:a="http://schemas.openxmlformats.org/drawingml/2006/main"/>
         </p:txBody>
       </p:sp>
       <p:sp>
@@ -4612,9 +4741,10 @@
             <a:srgbClr val="2A78D6"/>
           </a:solidFill>
         </p:spPr>
-        <p:txBody xmlns:a="http://schemas.openxmlformats.org/drawingml/2006/main">
-          <a:bodyPr/>
-          <a:p/>
+        <p:txBody>
+          <a:bodyPr xmlns:a="http://schemas.openxmlformats.org/drawingml/2006/main"/>
+          <a:lstStyle xmlns:a="http://schemas.openxmlformats.org/drawingml/2006/main"/>
+          <a:p xmlns:a="http://schemas.openxmlformats.org/drawingml/2006/main"/>
         </p:txBody>
       </p:sp>
       <p:sp>
@@ -4693,9 +4823,10 @@
             <a:prstDash val="solid"/>
           </a:ln>
         </p:spPr>
-        <p:txBody xmlns:a="http://schemas.openxmlformats.org/drawingml/2006/main">
-          <a:bodyPr/>
-          <a:p/>
+        <p:txBody>
+          <a:bodyPr xmlns:a="http://schemas.openxmlformats.org/drawingml/2006/main"/>
+          <a:lstStyle xmlns:a="http://schemas.openxmlformats.org/drawingml/2006/main"/>
+          <a:p xmlns:a="http://schemas.openxmlformats.org/drawingml/2006/main"/>
         </p:txBody>
       </p:sp>
       <p:sp>
@@ -4740,7 +4871,7 @@
                   <a:srgbClr val="6B7C88"/>
                 </a:solidFill>
               </a:rPr>
-              <a:t>Source: Project evaluation vs CFPB-derived labels (gpt-4o, n=240); agreement, not accuracy.</a:t>
+              <a:t>Sources: Project evaluation vs CFPB-derived labels; OpenAI API pricing; agreement, not accuracy.</a:t>
             </a:r>
             <a:endParaRPr sz="850"/>
           </a:p>
@@ -4831,9 +4962,10 @@
             </a:outerShdw>
           </a:effectLst>
         </p:spPr>
-        <p:txBody xmlns:a="http://schemas.openxmlformats.org/drawingml/2006/main">
-          <a:bodyPr/>
-          <a:p/>
+        <p:txBody>
+          <a:bodyPr xmlns:a="http://schemas.openxmlformats.org/drawingml/2006/main"/>
+          <a:lstStyle xmlns:a="http://schemas.openxmlformats.org/drawingml/2006/main"/>
+          <a:p xmlns:a="http://schemas.openxmlformats.org/drawingml/2006/main"/>
         </p:txBody>
       </p:sp>
       <p:sp>
@@ -4862,9 +4994,10 @@
             <a:srgbClr val="24343F"/>
           </a:solidFill>
         </p:spPr>
-        <p:txBody xmlns:a="http://schemas.openxmlformats.org/drawingml/2006/main">
-          <a:bodyPr/>
-          <a:p/>
+        <p:txBody>
+          <a:bodyPr xmlns:a="http://schemas.openxmlformats.org/drawingml/2006/main"/>
+          <a:lstStyle xmlns:a="http://schemas.openxmlformats.org/drawingml/2006/main"/>
+          <a:p xmlns:a="http://schemas.openxmlformats.org/drawingml/2006/main"/>
         </p:txBody>
       </p:sp>
       <p:sp>
@@ -4978,7 +5111,7 @@
                 <a:ea typeface="Calibri"/>
                 <a:cs typeface="Calibri"/>
               </a:rPr>
-              <a:t>A model costing 17× more improved agreement by 4 percentage points</a:t>
+              <a:t>Paying 17× as much improved agreement by 3.7 percentage points</a:t>
             </a:r>
             <a:endParaRPr sz="1150"/>
           </a:p>
@@ -5044,9 +5177,10 @@
             </a:outerShdw>
           </a:effectLst>
         </p:spPr>
-        <p:txBody xmlns:a="http://schemas.openxmlformats.org/drawingml/2006/main">
-          <a:bodyPr/>
-          <a:p/>
+        <p:txBody>
+          <a:bodyPr xmlns:a="http://schemas.openxmlformats.org/drawingml/2006/main"/>
+          <a:lstStyle xmlns:a="http://schemas.openxmlformats.org/drawingml/2006/main"/>
+          <a:p xmlns:a="http://schemas.openxmlformats.org/drawingml/2006/main"/>
         </p:txBody>
       </p:sp>
       <p:sp>
@@ -5075,9 +5209,10 @@
             <a:srgbClr val="445A69"/>
           </a:solidFill>
         </p:spPr>
-        <p:txBody xmlns:a="http://schemas.openxmlformats.org/drawingml/2006/main">
-          <a:bodyPr/>
-          <a:p/>
+        <p:txBody>
+          <a:bodyPr xmlns:a="http://schemas.openxmlformats.org/drawingml/2006/main"/>
+          <a:lstStyle xmlns:a="http://schemas.openxmlformats.org/drawingml/2006/main"/>
+          <a:p xmlns:a="http://schemas.openxmlformats.org/drawingml/2006/main"/>
         </p:txBody>
       </p:sp>
       <p:sp>
@@ -5319,9 +5454,10 @@
             <a:srgbClr val="24343F"/>
           </a:solidFill>
         </p:spPr>
-        <p:txBody xmlns:a="http://schemas.openxmlformats.org/drawingml/2006/main">
-          <a:bodyPr/>
-          <a:p/>
+        <p:txBody>
+          <a:bodyPr xmlns:a="http://schemas.openxmlformats.org/drawingml/2006/main"/>
+          <a:lstStyle xmlns:a="http://schemas.openxmlformats.org/drawingml/2006/main"/>
+          <a:p xmlns:a="http://schemas.openxmlformats.org/drawingml/2006/main"/>
         </p:txBody>
       </p:sp>
       <p:pic>
@@ -5333,7 +5469,7 @@
           <p:nvPr/>
         </p:nvPicPr>
         <p:blipFill>
-          <a:blip xmlns:r="http://schemas.openxmlformats.org/officeDocument/2006/relationships" xmlns:a="http://schemas.openxmlformats.org/drawingml/2006/main" r:embed="R101fb8bc4b45479f"/>
+          <a:blip xmlns:r="http://schemas.openxmlformats.org/officeDocument/2006/relationships" xmlns:a="http://schemas.openxmlformats.org/drawingml/2006/main" r:embed="R48e87c1b6ebf4773"/>
           <a:stretch xmlns:a="http://schemas.openxmlformats.org/drawingml/2006/main">
             <a:fillRect l="0" t="0" r="0" b="0"/>
           </a:stretch>
@@ -5420,9 +5556,10 @@
             <a:srgbClr val="EFF5F9"/>
           </a:solidFill>
         </p:spPr>
-        <p:txBody xmlns:a="http://schemas.openxmlformats.org/drawingml/2006/main">
-          <a:bodyPr/>
-          <a:p/>
+        <p:txBody>
+          <a:bodyPr xmlns:a="http://schemas.openxmlformats.org/drawingml/2006/main"/>
+          <a:lstStyle xmlns:a="http://schemas.openxmlformats.org/drawingml/2006/main"/>
+          <a:p xmlns:a="http://schemas.openxmlformats.org/drawingml/2006/main"/>
         </p:txBody>
       </p:sp>
       <p:sp>
@@ -5451,9 +5588,10 @@
             <a:srgbClr val="2A78D6"/>
           </a:solidFill>
         </p:spPr>
-        <p:txBody xmlns:a="http://schemas.openxmlformats.org/drawingml/2006/main">
-          <a:bodyPr/>
-          <a:p/>
+        <p:txBody>
+          <a:bodyPr xmlns:a="http://schemas.openxmlformats.org/drawingml/2006/main"/>
+          <a:lstStyle xmlns:a="http://schemas.openxmlformats.org/drawingml/2006/main"/>
+          <a:p xmlns:a="http://schemas.openxmlformats.org/drawingml/2006/main"/>
         </p:txBody>
       </p:sp>
       <p:sp>
@@ -5543,9 +5681,10 @@
             <a:prstDash val="solid"/>
           </a:ln>
         </p:spPr>
-        <p:txBody xmlns:a="http://schemas.openxmlformats.org/drawingml/2006/main">
-          <a:bodyPr/>
-          <a:p/>
+        <p:txBody>
+          <a:bodyPr xmlns:a="http://schemas.openxmlformats.org/drawingml/2006/main"/>
+          <a:lstStyle xmlns:a="http://schemas.openxmlformats.org/drawingml/2006/main"/>
+          <a:p xmlns:a="http://schemas.openxmlformats.org/drawingml/2006/main"/>
         </p:txBody>
       </p:sp>
       <p:sp>
@@ -6165,9 +6304,10 @@
             <a:srgbClr val="24343F"/>
           </a:solidFill>
         </p:spPr>
-        <p:txBody xmlns:a="http://schemas.openxmlformats.org/drawingml/2006/main">
-          <a:bodyPr/>
-          <a:p/>
+        <p:txBody>
+          <a:bodyPr xmlns:a="http://schemas.openxmlformats.org/drawingml/2006/main"/>
+          <a:lstStyle xmlns:a="http://schemas.openxmlformats.org/drawingml/2006/main"/>
+          <a:p xmlns:a="http://schemas.openxmlformats.org/drawingml/2006/main"/>
         </p:txBody>
       </p:sp>
       <p:pic>
@@ -6179,7 +6319,7 @@
           <p:nvPr/>
         </p:nvPicPr>
         <p:blipFill>
-          <a:blip xmlns:r="http://schemas.openxmlformats.org/officeDocument/2006/relationships" xmlns:a="http://schemas.openxmlformats.org/drawingml/2006/main" r:embed="R755aed03094c477a"/>
+          <a:blip xmlns:r="http://schemas.openxmlformats.org/officeDocument/2006/relationships" xmlns:a="http://schemas.openxmlformats.org/drawingml/2006/main" r:embed="Re21402268c714a6a"/>
           <a:stretch xmlns:a="http://schemas.openxmlformats.org/drawingml/2006/main">
             <a:fillRect l="0" t="0" r="0" b="0"/>
           </a:stretch>
@@ -6266,9 +6406,10 @@
             <a:srgbClr val="EFF5F9"/>
           </a:solidFill>
         </p:spPr>
-        <p:txBody xmlns:a="http://schemas.openxmlformats.org/drawingml/2006/main">
-          <a:bodyPr/>
-          <a:p/>
+        <p:txBody>
+          <a:bodyPr xmlns:a="http://schemas.openxmlformats.org/drawingml/2006/main"/>
+          <a:lstStyle xmlns:a="http://schemas.openxmlformats.org/drawingml/2006/main"/>
+          <a:p xmlns:a="http://schemas.openxmlformats.org/drawingml/2006/main"/>
         </p:txBody>
       </p:sp>
       <p:sp>
@@ -6297,9 +6438,10 @@
             <a:srgbClr val="2A78D6"/>
           </a:solidFill>
         </p:spPr>
-        <p:txBody xmlns:a="http://schemas.openxmlformats.org/drawingml/2006/main">
-          <a:bodyPr/>
-          <a:p/>
+        <p:txBody>
+          <a:bodyPr xmlns:a="http://schemas.openxmlformats.org/drawingml/2006/main"/>
+          <a:lstStyle xmlns:a="http://schemas.openxmlformats.org/drawingml/2006/main"/>
+          <a:p xmlns:a="http://schemas.openxmlformats.org/drawingml/2006/main"/>
         </p:txBody>
       </p:sp>
       <p:sp>
@@ -6378,9 +6520,10 @@
             <a:prstDash val="solid"/>
           </a:ln>
         </p:spPr>
-        <p:txBody xmlns:a="http://schemas.openxmlformats.org/drawingml/2006/main">
-          <a:bodyPr/>
-          <a:p/>
+        <p:txBody>
+          <a:bodyPr xmlns:a="http://schemas.openxmlformats.org/drawingml/2006/main"/>
+          <a:lstStyle xmlns:a="http://schemas.openxmlformats.org/drawingml/2006/main"/>
+          <a:p xmlns:a="http://schemas.openxmlformats.org/drawingml/2006/main"/>
         </p:txBody>
       </p:sp>
       <p:sp>
@@ -7100,9 +7243,10 @@
             <a:srgbClr val="24343F"/>
           </a:solidFill>
         </p:spPr>
-        <p:txBody xmlns:a="http://schemas.openxmlformats.org/drawingml/2006/main">
-          <a:bodyPr/>
-          <a:p/>
+        <p:txBody>
+          <a:bodyPr xmlns:a="http://schemas.openxmlformats.org/drawingml/2006/main"/>
+          <a:lstStyle xmlns:a="http://schemas.openxmlformats.org/drawingml/2006/main"/>
+          <a:p xmlns:a="http://schemas.openxmlformats.org/drawingml/2006/main"/>
         </p:txBody>
       </p:sp>
       <p:pic>
@@ -7114,7 +7258,7 @@
           <p:nvPr/>
         </p:nvPicPr>
         <p:blipFill>
-          <a:blip xmlns:r="http://schemas.openxmlformats.org/officeDocument/2006/relationships" xmlns:a="http://schemas.openxmlformats.org/drawingml/2006/main" r:embed="Ree2210f3f94f46c4"/>
+          <a:blip xmlns:r="http://schemas.openxmlformats.org/officeDocument/2006/relationships" xmlns:a="http://schemas.openxmlformats.org/drawingml/2006/main" r:embed="R7cabf1e43f93427b"/>
           <a:stretch xmlns:a="http://schemas.openxmlformats.org/drawingml/2006/main">
             <a:fillRect l="0" t="0" r="0" b="0"/>
           </a:stretch>
@@ -7201,9 +7345,10 @@
             <a:srgbClr val="EFF5F9"/>
           </a:solidFill>
         </p:spPr>
-        <p:txBody xmlns:a="http://schemas.openxmlformats.org/drawingml/2006/main">
-          <a:bodyPr/>
-          <a:p/>
+        <p:txBody>
+          <a:bodyPr xmlns:a="http://schemas.openxmlformats.org/drawingml/2006/main"/>
+          <a:lstStyle xmlns:a="http://schemas.openxmlformats.org/drawingml/2006/main"/>
+          <a:p xmlns:a="http://schemas.openxmlformats.org/drawingml/2006/main"/>
         </p:txBody>
       </p:sp>
       <p:sp>
@@ -7232,9 +7377,10 @@
             <a:srgbClr val="2A78D6"/>
           </a:solidFill>
         </p:spPr>
-        <p:txBody xmlns:a="http://schemas.openxmlformats.org/drawingml/2006/main">
-          <a:bodyPr/>
-          <a:p/>
+        <p:txBody>
+          <a:bodyPr xmlns:a="http://schemas.openxmlformats.org/drawingml/2006/main"/>
+          <a:lstStyle xmlns:a="http://schemas.openxmlformats.org/drawingml/2006/main"/>
+          <a:p xmlns:a="http://schemas.openxmlformats.org/drawingml/2006/main"/>
         </p:txBody>
       </p:sp>
       <p:sp>
@@ -7313,9 +7459,10 @@
             <a:prstDash val="solid"/>
           </a:ln>
         </p:spPr>
-        <p:txBody xmlns:a="http://schemas.openxmlformats.org/drawingml/2006/main">
-          <a:bodyPr/>
-          <a:p/>
+        <p:txBody>
+          <a:bodyPr xmlns:a="http://schemas.openxmlformats.org/drawingml/2006/main"/>
+          <a:lstStyle xmlns:a="http://schemas.openxmlformats.org/drawingml/2006/main"/>
+          <a:p xmlns:a="http://schemas.openxmlformats.org/drawingml/2006/main"/>
         </p:txBody>
       </p:sp>
       <p:sp>
@@ -8430,9 +8577,10 @@
             <a:srgbClr val="24343F"/>
           </a:solidFill>
         </p:spPr>
-        <p:txBody xmlns:a="http://schemas.openxmlformats.org/drawingml/2006/main">
-          <a:bodyPr/>
-          <a:p/>
+        <p:txBody>
+          <a:bodyPr xmlns:a="http://schemas.openxmlformats.org/drawingml/2006/main"/>
+          <a:lstStyle xmlns:a="http://schemas.openxmlformats.org/drawingml/2006/main"/>
+          <a:p xmlns:a="http://schemas.openxmlformats.org/drawingml/2006/main"/>
         </p:txBody>
       </p:sp>
       <p:pic>
@@ -8444,7 +8592,7 @@
           <p:nvPr/>
         </p:nvPicPr>
         <p:blipFill>
-          <a:blip xmlns:r="http://schemas.openxmlformats.org/officeDocument/2006/relationships" xmlns:a="http://schemas.openxmlformats.org/drawingml/2006/main" r:embed="R90326f3209cd47fa"/>
+          <a:blip xmlns:r="http://schemas.openxmlformats.org/officeDocument/2006/relationships" xmlns:a="http://schemas.openxmlformats.org/drawingml/2006/main" r:embed="Ra182ad2b4ff249bc"/>
           <a:stretch xmlns:a="http://schemas.openxmlformats.org/drawingml/2006/main">
             <a:fillRect l="0" t="0" r="0" b="0"/>
           </a:stretch>
@@ -8531,9 +8679,10 @@
             <a:srgbClr val="EFF5F9"/>
           </a:solidFill>
         </p:spPr>
-        <p:txBody xmlns:a="http://schemas.openxmlformats.org/drawingml/2006/main">
-          <a:bodyPr/>
-          <a:p/>
+        <p:txBody>
+          <a:bodyPr xmlns:a="http://schemas.openxmlformats.org/drawingml/2006/main"/>
+          <a:lstStyle xmlns:a="http://schemas.openxmlformats.org/drawingml/2006/main"/>
+          <a:p xmlns:a="http://schemas.openxmlformats.org/drawingml/2006/main"/>
         </p:txBody>
       </p:sp>
       <p:sp>
@@ -8562,9 +8711,10 @@
             <a:srgbClr val="2A78D6"/>
           </a:solidFill>
         </p:spPr>
-        <p:txBody xmlns:a="http://schemas.openxmlformats.org/drawingml/2006/main">
-          <a:bodyPr/>
-          <a:p/>
+        <p:txBody>
+          <a:bodyPr xmlns:a="http://schemas.openxmlformats.org/drawingml/2006/main"/>
+          <a:lstStyle xmlns:a="http://schemas.openxmlformats.org/drawingml/2006/main"/>
+          <a:p xmlns:a="http://schemas.openxmlformats.org/drawingml/2006/main"/>
         </p:txBody>
       </p:sp>
       <p:sp>
@@ -8654,9 +8804,10 @@
             <a:prstDash val="solid"/>
           </a:ln>
         </p:spPr>
-        <p:txBody xmlns:a="http://schemas.openxmlformats.org/drawingml/2006/main">
-          <a:bodyPr/>
-          <a:p/>
+        <p:txBody>
+          <a:bodyPr xmlns:a="http://schemas.openxmlformats.org/drawingml/2006/main"/>
+          <a:lstStyle xmlns:a="http://schemas.openxmlformats.org/drawingml/2006/main"/>
+          <a:p xmlns:a="http://schemas.openxmlformats.org/drawingml/2006/main"/>
         </p:txBody>
       </p:sp>
       <p:sp>
@@ -8779,9 +8930,10 @@
             </a:outerShdw>
           </a:effectLst>
         </p:spPr>
-        <p:txBody xmlns:a="http://schemas.openxmlformats.org/drawingml/2006/main">
-          <a:bodyPr/>
-          <a:p/>
+        <p:txBody>
+          <a:bodyPr xmlns:a="http://schemas.openxmlformats.org/drawingml/2006/main"/>
+          <a:lstStyle xmlns:a="http://schemas.openxmlformats.org/drawingml/2006/main"/>
+          <a:p xmlns:a="http://schemas.openxmlformats.org/drawingml/2006/main"/>
         </p:txBody>
       </p:sp>
       <p:sp>
@@ -8955,9 +9107,10 @@
             </a:outerShdw>
           </a:effectLst>
         </p:spPr>
-        <p:txBody xmlns:a="http://schemas.openxmlformats.org/drawingml/2006/main">
-          <a:bodyPr/>
-          <a:p/>
+        <p:txBody>
+          <a:bodyPr xmlns:a="http://schemas.openxmlformats.org/drawingml/2006/main"/>
+          <a:lstStyle xmlns:a="http://schemas.openxmlformats.org/drawingml/2006/main"/>
+          <a:p xmlns:a="http://schemas.openxmlformats.org/drawingml/2006/main"/>
         </p:txBody>
       </p:sp>
       <p:sp>
@@ -9137,9 +9290,10 @@
             </a:outerShdw>
           </a:effectLst>
         </p:spPr>
-        <p:txBody xmlns:a="http://schemas.openxmlformats.org/drawingml/2006/main">
-          <a:bodyPr/>
-          <a:p/>
+        <p:txBody>
+          <a:bodyPr xmlns:a="http://schemas.openxmlformats.org/drawingml/2006/main"/>
+          <a:lstStyle xmlns:a="http://schemas.openxmlformats.org/drawingml/2006/main"/>
+          <a:p xmlns:a="http://schemas.openxmlformats.org/drawingml/2006/main"/>
         </p:txBody>
       </p:sp>
       <p:sp>
@@ -9306,9 +9460,10 @@
             <a:srgbClr val="EFF5F9"/>
           </a:solidFill>
         </p:spPr>
-        <p:txBody xmlns:a="http://schemas.openxmlformats.org/drawingml/2006/main">
-          <a:bodyPr/>
-          <a:p/>
+        <p:txBody>
+          <a:bodyPr xmlns:a="http://schemas.openxmlformats.org/drawingml/2006/main"/>
+          <a:lstStyle xmlns:a="http://schemas.openxmlformats.org/drawingml/2006/main"/>
+          <a:p xmlns:a="http://schemas.openxmlformats.org/drawingml/2006/main"/>
         </p:txBody>
       </p:sp>
       <p:sp>
@@ -9337,9 +9492,10 @@
             <a:srgbClr val="2A78D6"/>
           </a:solidFill>
         </p:spPr>
-        <p:txBody xmlns:a="http://schemas.openxmlformats.org/drawingml/2006/main">
-          <a:bodyPr/>
-          <a:p/>
+        <p:txBody>
+          <a:bodyPr xmlns:a="http://schemas.openxmlformats.org/drawingml/2006/main"/>
+          <a:lstStyle xmlns:a="http://schemas.openxmlformats.org/drawingml/2006/main"/>
+          <a:p xmlns:a="http://schemas.openxmlformats.org/drawingml/2006/main"/>
         </p:txBody>
       </p:sp>
       <p:sp>
@@ -9533,9 +9689,10 @@
             <a:srgbClr val="24343F"/>
           </a:solidFill>
         </p:spPr>
-        <p:txBody xmlns:a="http://schemas.openxmlformats.org/drawingml/2006/main">
-          <a:bodyPr/>
-          <a:p/>
+        <p:txBody>
+          <a:bodyPr xmlns:a="http://schemas.openxmlformats.org/drawingml/2006/main"/>
+          <a:lstStyle xmlns:a="http://schemas.openxmlformats.org/drawingml/2006/main"/>
+          <a:p xmlns:a="http://schemas.openxmlformats.org/drawingml/2006/main"/>
         </p:txBody>
       </p:sp>
       <p:pic>
@@ -9547,7 +9704,7 @@
           <p:nvPr/>
         </p:nvPicPr>
         <p:blipFill>
-          <a:blip xmlns:r="http://schemas.openxmlformats.org/officeDocument/2006/relationships" xmlns:a="http://schemas.openxmlformats.org/drawingml/2006/main" r:embed="R810e605741cb4c66"/>
+          <a:blip xmlns:r="http://schemas.openxmlformats.org/officeDocument/2006/relationships" xmlns:a="http://schemas.openxmlformats.org/drawingml/2006/main" r:embed="R2542d8ee38e84001"/>
           <a:stretch xmlns:a="http://schemas.openxmlformats.org/drawingml/2006/main">
             <a:fillRect l="0" t="0" r="0" b="0"/>
           </a:stretch>
@@ -9638,9 +9795,10 @@
             <a:prstDash val="solid"/>
           </a:ln>
         </p:spPr>
-        <p:txBody xmlns:a="http://schemas.openxmlformats.org/drawingml/2006/main">
-          <a:bodyPr/>
-          <a:p/>
+        <p:txBody>
+          <a:bodyPr xmlns:a="http://schemas.openxmlformats.org/drawingml/2006/main"/>
+          <a:lstStyle xmlns:a="http://schemas.openxmlformats.org/drawingml/2006/main"/>
+          <a:p xmlns:a="http://schemas.openxmlformats.org/drawingml/2006/main"/>
         </p:txBody>
       </p:sp>
       <p:sp>
@@ -9746,7 +9904,7 @@
           <p:nvPr/>
         </p:nvPicPr>
         <p:blipFill>
-          <a:blip xmlns:r="http://schemas.openxmlformats.org/officeDocument/2006/relationships" xmlns:a="http://schemas.openxmlformats.org/drawingml/2006/main" r:embed="R84080be2017a4bce"/>
+          <a:blip xmlns:r="http://schemas.openxmlformats.org/officeDocument/2006/relationships" xmlns:a="http://schemas.openxmlformats.org/drawingml/2006/main" r:embed="Rc2f1206326674045"/>
           <a:stretch xmlns:a="http://schemas.openxmlformats.org/drawingml/2006/main">
             <a:fillRect l="0" t="0" r="0" b="0"/>
           </a:stretch>
@@ -9794,9 +9952,10 @@
             </a:outerShdw>
           </a:effectLst>
         </p:spPr>
-        <p:txBody xmlns:a="http://schemas.openxmlformats.org/drawingml/2006/main">
-          <a:bodyPr/>
-          <a:p/>
+        <p:txBody>
+          <a:bodyPr xmlns:a="http://schemas.openxmlformats.org/drawingml/2006/main"/>
+          <a:lstStyle xmlns:a="http://schemas.openxmlformats.org/drawingml/2006/main"/>
+          <a:p xmlns:a="http://schemas.openxmlformats.org/drawingml/2006/main"/>
         </p:txBody>
       </p:sp>
       <p:sp>
@@ -10076,9 +10235,10 @@
             <a:srgbClr val="24343F"/>
           </a:solidFill>
         </p:spPr>
-        <p:txBody xmlns:a="http://schemas.openxmlformats.org/drawingml/2006/main">
-          <a:bodyPr/>
-          <a:p/>
+        <p:txBody>
+          <a:bodyPr xmlns:a="http://schemas.openxmlformats.org/drawingml/2006/main"/>
+          <a:lstStyle xmlns:a="http://schemas.openxmlformats.org/drawingml/2006/main"/>
+          <a:p xmlns:a="http://schemas.openxmlformats.org/drawingml/2006/main"/>
         </p:txBody>
       </p:sp>
       <p:pic>
@@ -10090,7 +10250,7 @@
           <p:nvPr/>
         </p:nvPicPr>
         <p:blipFill>
-          <a:blip xmlns:r="http://schemas.openxmlformats.org/officeDocument/2006/relationships" xmlns:a="http://schemas.openxmlformats.org/drawingml/2006/main" r:embed="Rbecef9ec958e49ea"/>
+          <a:blip xmlns:r="http://schemas.openxmlformats.org/officeDocument/2006/relationships" xmlns:a="http://schemas.openxmlformats.org/drawingml/2006/main" r:embed="R5c40637e669f4e2b"/>
           <a:stretch xmlns:a="http://schemas.openxmlformats.org/drawingml/2006/main">
             <a:fillRect l="0" t="0" r="0" b="0"/>
           </a:stretch>
@@ -10181,9 +10341,10 @@
             <a:prstDash val="solid"/>
           </a:ln>
         </p:spPr>
-        <p:txBody xmlns:a="http://schemas.openxmlformats.org/drawingml/2006/main">
-          <a:bodyPr/>
-          <a:p/>
+        <p:txBody>
+          <a:bodyPr xmlns:a="http://schemas.openxmlformats.org/drawingml/2006/main"/>
+          <a:lstStyle xmlns:a="http://schemas.openxmlformats.org/drawingml/2006/main"/>
+          <a:p xmlns:a="http://schemas.openxmlformats.org/drawingml/2006/main"/>
         </p:txBody>
       </p:sp>
       <p:sp>
@@ -10289,7 +10450,7 @@
           <p:nvPr/>
         </p:nvPicPr>
         <p:blipFill>
-          <a:blip xmlns:r="http://schemas.openxmlformats.org/officeDocument/2006/relationships" xmlns:a="http://schemas.openxmlformats.org/drawingml/2006/main" r:embed="Rb63f16244bda4fa8"/>
+          <a:blip xmlns:r="http://schemas.openxmlformats.org/officeDocument/2006/relationships" xmlns:a="http://schemas.openxmlformats.org/drawingml/2006/main" r:embed="R6c8422b1605d4a4e"/>
           <a:stretch xmlns:a="http://schemas.openxmlformats.org/drawingml/2006/main">
             <a:fillRect l="0" t="0" r="0" b="0"/>
           </a:stretch>
@@ -10313,7 +10474,7 @@
           <p:nvPr/>
         </p:nvPicPr>
         <p:blipFill>
-          <a:blip xmlns:r="http://schemas.openxmlformats.org/officeDocument/2006/relationships" xmlns:a="http://schemas.openxmlformats.org/drawingml/2006/main" r:embed="Rfb0a7e79a69d41d1"/>
+          <a:blip xmlns:r="http://schemas.openxmlformats.org/officeDocument/2006/relationships" xmlns:a="http://schemas.openxmlformats.org/drawingml/2006/main" r:embed="R2ceb03b144fc4639"/>
           <a:stretch xmlns:a="http://schemas.openxmlformats.org/drawingml/2006/main">
             <a:fillRect l="0" t="0" r="0" b="0"/>
           </a:stretch>
@@ -10446,9 +10607,10 @@
             <a:srgbClr val="2A78D6"/>
           </a:solidFill>
         </p:spPr>
-        <p:txBody xmlns:a="http://schemas.openxmlformats.org/drawingml/2006/main">
-          <a:bodyPr/>
-          <a:p/>
+        <p:txBody>
+          <a:bodyPr xmlns:a="http://schemas.openxmlformats.org/drawingml/2006/main"/>
+          <a:lstStyle xmlns:a="http://schemas.openxmlformats.org/drawingml/2006/main"/>
+          <a:p xmlns:a="http://schemas.openxmlformats.org/drawingml/2006/main"/>
         </p:txBody>
       </p:sp>
       <p:sp>
@@ -10477,9 +10639,10 @@
             <a:srgbClr val="2A78D6"/>
           </a:solidFill>
         </p:spPr>
-        <p:txBody xmlns:a="http://schemas.openxmlformats.org/drawingml/2006/main">
-          <a:bodyPr/>
-          <a:p/>
+        <p:txBody>
+          <a:bodyPr xmlns:a="http://schemas.openxmlformats.org/drawingml/2006/main"/>
+          <a:lstStyle xmlns:a="http://schemas.openxmlformats.org/drawingml/2006/main"/>
+          <a:p xmlns:a="http://schemas.openxmlformats.org/drawingml/2006/main"/>
         </p:txBody>
       </p:sp>
       <p:sp>
@@ -10508,9 +10671,10 @@
             <a:srgbClr val="2A78D6"/>
           </a:solidFill>
         </p:spPr>
-        <p:txBody xmlns:a="http://schemas.openxmlformats.org/drawingml/2006/main">
-          <a:bodyPr/>
-          <a:p/>
+        <p:txBody>
+          <a:bodyPr xmlns:a="http://schemas.openxmlformats.org/drawingml/2006/main"/>
+          <a:lstStyle xmlns:a="http://schemas.openxmlformats.org/drawingml/2006/main"/>
+          <a:p xmlns:a="http://schemas.openxmlformats.org/drawingml/2006/main"/>
         </p:txBody>
       </p:sp>
       <p:sp>
@@ -10539,9 +10703,10 @@
             <a:srgbClr val="2A78D6"/>
           </a:solidFill>
         </p:spPr>
-        <p:txBody xmlns:a="http://schemas.openxmlformats.org/drawingml/2006/main">
-          <a:bodyPr/>
-          <a:p/>
+        <p:txBody>
+          <a:bodyPr xmlns:a="http://schemas.openxmlformats.org/drawingml/2006/main"/>
+          <a:lstStyle xmlns:a="http://schemas.openxmlformats.org/drawingml/2006/main"/>
+          <a:p xmlns:a="http://schemas.openxmlformats.org/drawingml/2006/main"/>
         </p:txBody>
       </p:sp>
       <p:sp>
@@ -10570,9 +10735,10 @@
             <a:srgbClr val="2A78D6"/>
           </a:solidFill>
         </p:spPr>
-        <p:txBody xmlns:a="http://schemas.openxmlformats.org/drawingml/2006/main">
-          <a:bodyPr/>
-          <a:p/>
+        <p:txBody>
+          <a:bodyPr xmlns:a="http://schemas.openxmlformats.org/drawingml/2006/main"/>
+          <a:lstStyle xmlns:a="http://schemas.openxmlformats.org/drawingml/2006/main"/>
+          <a:p xmlns:a="http://schemas.openxmlformats.org/drawingml/2006/main"/>
         </p:txBody>
       </p:sp>
       <p:sp>
@@ -10601,9 +10767,10 @@
             <a:srgbClr val="2A78D6"/>
           </a:solidFill>
         </p:spPr>
-        <p:txBody xmlns:a="http://schemas.openxmlformats.org/drawingml/2006/main">
-          <a:bodyPr/>
-          <a:p/>
+        <p:txBody>
+          <a:bodyPr xmlns:a="http://schemas.openxmlformats.org/drawingml/2006/main"/>
+          <a:lstStyle xmlns:a="http://schemas.openxmlformats.org/drawingml/2006/main"/>
+          <a:p xmlns:a="http://schemas.openxmlformats.org/drawingml/2006/main"/>
         </p:txBody>
       </p:sp>
       <p:sp>
@@ -10632,9 +10799,10 @@
             <a:srgbClr val="2A78D6"/>
           </a:solidFill>
         </p:spPr>
-        <p:txBody xmlns:a="http://schemas.openxmlformats.org/drawingml/2006/main">
-          <a:bodyPr/>
-          <a:p/>
+        <p:txBody>
+          <a:bodyPr xmlns:a="http://schemas.openxmlformats.org/drawingml/2006/main"/>
+          <a:lstStyle xmlns:a="http://schemas.openxmlformats.org/drawingml/2006/main"/>
+          <a:p xmlns:a="http://schemas.openxmlformats.org/drawingml/2006/main"/>
         </p:txBody>
       </p:sp>
       <p:sp>
@@ -10663,9 +10831,10 @@
             <a:srgbClr val="2A78D6"/>
           </a:solidFill>
         </p:spPr>
-        <p:txBody xmlns:a="http://schemas.openxmlformats.org/drawingml/2006/main">
-          <a:bodyPr/>
-          <a:p/>
+        <p:txBody>
+          <a:bodyPr xmlns:a="http://schemas.openxmlformats.org/drawingml/2006/main"/>
+          <a:lstStyle xmlns:a="http://schemas.openxmlformats.org/drawingml/2006/main"/>
+          <a:p xmlns:a="http://schemas.openxmlformats.org/drawingml/2006/main"/>
         </p:txBody>
       </p:sp>
       <p:sp>
@@ -10694,9 +10863,10 @@
             <a:srgbClr val="2A78D6"/>
           </a:solidFill>
         </p:spPr>
-        <p:txBody xmlns:a="http://schemas.openxmlformats.org/drawingml/2006/main">
-          <a:bodyPr/>
-          <a:p/>
+        <p:txBody>
+          <a:bodyPr xmlns:a="http://schemas.openxmlformats.org/drawingml/2006/main"/>
+          <a:lstStyle xmlns:a="http://schemas.openxmlformats.org/drawingml/2006/main"/>
+          <a:p xmlns:a="http://schemas.openxmlformats.org/drawingml/2006/main"/>
         </p:txBody>
       </p:sp>
       <p:sp>
@@ -10725,9 +10895,10 @@
             <a:srgbClr val="2A78D6"/>
           </a:solidFill>
         </p:spPr>
-        <p:txBody xmlns:a="http://schemas.openxmlformats.org/drawingml/2006/main">
-          <a:bodyPr/>
-          <a:p/>
+        <p:txBody>
+          <a:bodyPr xmlns:a="http://schemas.openxmlformats.org/drawingml/2006/main"/>
+          <a:lstStyle xmlns:a="http://schemas.openxmlformats.org/drawingml/2006/main"/>
+          <a:p xmlns:a="http://schemas.openxmlformats.org/drawingml/2006/main"/>
         </p:txBody>
       </p:sp>
       <p:sp>
@@ -10756,9 +10927,10 @@
             <a:srgbClr val="2A78D6"/>
           </a:solidFill>
         </p:spPr>
-        <p:txBody xmlns:a="http://schemas.openxmlformats.org/drawingml/2006/main">
-          <a:bodyPr/>
-          <a:p/>
+        <p:txBody>
+          <a:bodyPr xmlns:a="http://schemas.openxmlformats.org/drawingml/2006/main"/>
+          <a:lstStyle xmlns:a="http://schemas.openxmlformats.org/drawingml/2006/main"/>
+          <a:p xmlns:a="http://schemas.openxmlformats.org/drawingml/2006/main"/>
         </p:txBody>
       </p:sp>
       <p:sp>
@@ -10787,9 +10959,10 @@
             <a:srgbClr val="2A78D6"/>
           </a:solidFill>
         </p:spPr>
-        <p:txBody xmlns:a="http://schemas.openxmlformats.org/drawingml/2006/main">
-          <a:bodyPr/>
-          <a:p/>
+        <p:txBody>
+          <a:bodyPr xmlns:a="http://schemas.openxmlformats.org/drawingml/2006/main"/>
+          <a:lstStyle xmlns:a="http://schemas.openxmlformats.org/drawingml/2006/main"/>
+          <a:p xmlns:a="http://schemas.openxmlformats.org/drawingml/2006/main"/>
         </p:txBody>
       </p:sp>
       <p:sp>
@@ -10818,9 +10991,10 @@
             <a:srgbClr val="2A78D6"/>
           </a:solidFill>
         </p:spPr>
-        <p:txBody xmlns:a="http://schemas.openxmlformats.org/drawingml/2006/main">
-          <a:bodyPr/>
-          <a:p/>
+        <p:txBody>
+          <a:bodyPr xmlns:a="http://schemas.openxmlformats.org/drawingml/2006/main"/>
+          <a:lstStyle xmlns:a="http://schemas.openxmlformats.org/drawingml/2006/main"/>
+          <a:p xmlns:a="http://schemas.openxmlformats.org/drawingml/2006/main"/>
         </p:txBody>
       </p:sp>
       <p:sp>
@@ -10849,9 +11023,10 @@
             <a:srgbClr val="2A78D6"/>
           </a:solidFill>
         </p:spPr>
-        <p:txBody xmlns:a="http://schemas.openxmlformats.org/drawingml/2006/main">
-          <a:bodyPr/>
-          <a:p/>
+        <p:txBody>
+          <a:bodyPr xmlns:a="http://schemas.openxmlformats.org/drawingml/2006/main"/>
+          <a:lstStyle xmlns:a="http://schemas.openxmlformats.org/drawingml/2006/main"/>
+          <a:p xmlns:a="http://schemas.openxmlformats.org/drawingml/2006/main"/>
         </p:txBody>
       </p:sp>
       <p:sp>
@@ -10880,9 +11055,10 @@
             <a:srgbClr val="2A78D6"/>
           </a:solidFill>
         </p:spPr>
-        <p:txBody xmlns:a="http://schemas.openxmlformats.org/drawingml/2006/main">
-          <a:bodyPr/>
-          <a:p/>
+        <p:txBody>
+          <a:bodyPr xmlns:a="http://schemas.openxmlformats.org/drawingml/2006/main"/>
+          <a:lstStyle xmlns:a="http://schemas.openxmlformats.org/drawingml/2006/main"/>
+          <a:p xmlns:a="http://schemas.openxmlformats.org/drawingml/2006/main"/>
         </p:txBody>
       </p:sp>
       <p:sp>
@@ -10911,9 +11087,10 @@
             <a:srgbClr val="2A78D6"/>
           </a:solidFill>
         </p:spPr>
-        <p:txBody xmlns:a="http://schemas.openxmlformats.org/drawingml/2006/main">
-          <a:bodyPr/>
-          <a:p/>
+        <p:txBody>
+          <a:bodyPr xmlns:a="http://schemas.openxmlformats.org/drawingml/2006/main"/>
+          <a:lstStyle xmlns:a="http://schemas.openxmlformats.org/drawingml/2006/main"/>
+          <a:p xmlns:a="http://schemas.openxmlformats.org/drawingml/2006/main"/>
         </p:txBody>
       </p:sp>
       <p:sp>
@@ -10942,9 +11119,10 @@
             <a:srgbClr val="2A78D6"/>
           </a:solidFill>
         </p:spPr>
-        <p:txBody xmlns:a="http://schemas.openxmlformats.org/drawingml/2006/main">
-          <a:bodyPr/>
-          <a:p/>
+        <p:txBody>
+          <a:bodyPr xmlns:a="http://schemas.openxmlformats.org/drawingml/2006/main"/>
+          <a:lstStyle xmlns:a="http://schemas.openxmlformats.org/drawingml/2006/main"/>
+          <a:p xmlns:a="http://schemas.openxmlformats.org/drawingml/2006/main"/>
         </p:txBody>
       </p:sp>
       <p:sp>
@@ -10973,9 +11151,10 @@
             <a:srgbClr val="2A78D6"/>
           </a:solidFill>
         </p:spPr>
-        <p:txBody xmlns:a="http://schemas.openxmlformats.org/drawingml/2006/main">
-          <a:bodyPr/>
-          <a:p/>
+        <p:txBody>
+          <a:bodyPr xmlns:a="http://schemas.openxmlformats.org/drawingml/2006/main"/>
+          <a:lstStyle xmlns:a="http://schemas.openxmlformats.org/drawingml/2006/main"/>
+          <a:p xmlns:a="http://schemas.openxmlformats.org/drawingml/2006/main"/>
         </p:txBody>
       </p:sp>
       <p:sp>
@@ -11004,9 +11183,10 @@
             <a:srgbClr val="2A78D6"/>
           </a:solidFill>
         </p:spPr>
-        <p:txBody xmlns:a="http://schemas.openxmlformats.org/drawingml/2006/main">
-          <a:bodyPr/>
-          <a:p/>
+        <p:txBody>
+          <a:bodyPr xmlns:a="http://schemas.openxmlformats.org/drawingml/2006/main"/>
+          <a:lstStyle xmlns:a="http://schemas.openxmlformats.org/drawingml/2006/main"/>
+          <a:p xmlns:a="http://schemas.openxmlformats.org/drawingml/2006/main"/>
         </p:txBody>
       </p:sp>
       <p:sp>
@@ -11035,9 +11215,10 @@
             <a:srgbClr val="2A78D6"/>
           </a:solidFill>
         </p:spPr>
-        <p:txBody xmlns:a="http://schemas.openxmlformats.org/drawingml/2006/main">
-          <a:bodyPr/>
-          <a:p/>
+        <p:txBody>
+          <a:bodyPr xmlns:a="http://schemas.openxmlformats.org/drawingml/2006/main"/>
+          <a:lstStyle xmlns:a="http://schemas.openxmlformats.org/drawingml/2006/main"/>
+          <a:p xmlns:a="http://schemas.openxmlformats.org/drawingml/2006/main"/>
         </p:txBody>
       </p:sp>
       <p:sp>
@@ -11066,9 +11247,10 @@
             <a:srgbClr val="2A78D6"/>
           </a:solidFill>
         </p:spPr>
-        <p:txBody xmlns:a="http://schemas.openxmlformats.org/drawingml/2006/main">
-          <a:bodyPr/>
-          <a:p/>
+        <p:txBody>
+          <a:bodyPr xmlns:a="http://schemas.openxmlformats.org/drawingml/2006/main"/>
+          <a:lstStyle xmlns:a="http://schemas.openxmlformats.org/drawingml/2006/main"/>
+          <a:p xmlns:a="http://schemas.openxmlformats.org/drawingml/2006/main"/>
         </p:txBody>
       </p:sp>
       <p:sp>
@@ -11097,9 +11279,10 @@
             <a:srgbClr val="2A78D6"/>
           </a:solidFill>
         </p:spPr>
-        <p:txBody xmlns:a="http://schemas.openxmlformats.org/drawingml/2006/main">
-          <a:bodyPr/>
-          <a:p/>
+        <p:txBody>
+          <a:bodyPr xmlns:a="http://schemas.openxmlformats.org/drawingml/2006/main"/>
+          <a:lstStyle xmlns:a="http://schemas.openxmlformats.org/drawingml/2006/main"/>
+          <a:p xmlns:a="http://schemas.openxmlformats.org/drawingml/2006/main"/>
         </p:txBody>
       </p:sp>
       <p:sp>
@@ -11128,9 +11311,10 @@
             <a:srgbClr val="2A78D6"/>
           </a:solidFill>
         </p:spPr>
-        <p:txBody xmlns:a="http://schemas.openxmlformats.org/drawingml/2006/main">
-          <a:bodyPr/>
-          <a:p/>
+        <p:txBody>
+          <a:bodyPr xmlns:a="http://schemas.openxmlformats.org/drawingml/2006/main"/>
+          <a:lstStyle xmlns:a="http://schemas.openxmlformats.org/drawingml/2006/main"/>
+          <a:p xmlns:a="http://schemas.openxmlformats.org/drawingml/2006/main"/>
         </p:txBody>
       </p:sp>
       <p:sp>
@@ -11159,9 +11343,10 @@
             <a:srgbClr val="2A78D6"/>
           </a:solidFill>
         </p:spPr>
-        <p:txBody xmlns:a="http://schemas.openxmlformats.org/drawingml/2006/main">
-          <a:bodyPr/>
-          <a:p/>
+        <p:txBody>
+          <a:bodyPr xmlns:a="http://schemas.openxmlformats.org/drawingml/2006/main"/>
+          <a:lstStyle xmlns:a="http://schemas.openxmlformats.org/drawingml/2006/main"/>
+          <a:p xmlns:a="http://schemas.openxmlformats.org/drawingml/2006/main"/>
         </p:txBody>
       </p:sp>
       <p:sp>
@@ -11190,9 +11375,10 @@
             <a:srgbClr val="2A78D6"/>
           </a:solidFill>
         </p:spPr>
-        <p:txBody xmlns:a="http://schemas.openxmlformats.org/drawingml/2006/main">
-          <a:bodyPr/>
-          <a:p/>
+        <p:txBody>
+          <a:bodyPr xmlns:a="http://schemas.openxmlformats.org/drawingml/2006/main"/>
+          <a:lstStyle xmlns:a="http://schemas.openxmlformats.org/drawingml/2006/main"/>
+          <a:p xmlns:a="http://schemas.openxmlformats.org/drawingml/2006/main"/>
         </p:txBody>
       </p:sp>
       <p:sp>
@@ -11221,9 +11407,10 @@
             <a:srgbClr val="2A78D6"/>
           </a:solidFill>
         </p:spPr>
-        <p:txBody xmlns:a="http://schemas.openxmlformats.org/drawingml/2006/main">
-          <a:bodyPr/>
-          <a:p/>
+        <p:txBody>
+          <a:bodyPr xmlns:a="http://schemas.openxmlformats.org/drawingml/2006/main"/>
+          <a:lstStyle xmlns:a="http://schemas.openxmlformats.org/drawingml/2006/main"/>
+          <a:p xmlns:a="http://schemas.openxmlformats.org/drawingml/2006/main"/>
         </p:txBody>
       </p:sp>
       <p:sp>
@@ -11252,9 +11439,10 @@
             <a:srgbClr val="2A78D6"/>
           </a:solidFill>
         </p:spPr>
-        <p:txBody xmlns:a="http://schemas.openxmlformats.org/drawingml/2006/main">
-          <a:bodyPr/>
-          <a:p/>
+        <p:txBody>
+          <a:bodyPr xmlns:a="http://schemas.openxmlformats.org/drawingml/2006/main"/>
+          <a:lstStyle xmlns:a="http://schemas.openxmlformats.org/drawingml/2006/main"/>
+          <a:p xmlns:a="http://schemas.openxmlformats.org/drawingml/2006/main"/>
         </p:txBody>
       </p:sp>
       <p:sp>
@@ -11283,9 +11471,10 @@
             <a:srgbClr val="2A78D6"/>
           </a:solidFill>
         </p:spPr>
-        <p:txBody xmlns:a="http://schemas.openxmlformats.org/drawingml/2006/main">
-          <a:bodyPr/>
-          <a:p/>
+        <p:txBody>
+          <a:bodyPr xmlns:a="http://schemas.openxmlformats.org/drawingml/2006/main"/>
+          <a:lstStyle xmlns:a="http://schemas.openxmlformats.org/drawingml/2006/main"/>
+          <a:p xmlns:a="http://schemas.openxmlformats.org/drawingml/2006/main"/>
         </p:txBody>
       </p:sp>
       <p:sp>
@@ -11314,9 +11503,10 @@
             <a:srgbClr val="2A78D6"/>
           </a:solidFill>
         </p:spPr>
-        <p:txBody xmlns:a="http://schemas.openxmlformats.org/drawingml/2006/main">
-          <a:bodyPr/>
-          <a:p/>
+        <p:txBody>
+          <a:bodyPr xmlns:a="http://schemas.openxmlformats.org/drawingml/2006/main"/>
+          <a:lstStyle xmlns:a="http://schemas.openxmlformats.org/drawingml/2006/main"/>
+          <a:p xmlns:a="http://schemas.openxmlformats.org/drawingml/2006/main"/>
         </p:txBody>
       </p:sp>
       <p:sp>
@@ -11345,9 +11535,10 @@
             <a:srgbClr val="2A78D6"/>
           </a:solidFill>
         </p:spPr>
-        <p:txBody xmlns:a="http://schemas.openxmlformats.org/drawingml/2006/main">
-          <a:bodyPr/>
-          <a:p/>
+        <p:txBody>
+          <a:bodyPr xmlns:a="http://schemas.openxmlformats.org/drawingml/2006/main"/>
+          <a:lstStyle xmlns:a="http://schemas.openxmlformats.org/drawingml/2006/main"/>
+          <a:p xmlns:a="http://schemas.openxmlformats.org/drawingml/2006/main"/>
         </p:txBody>
       </p:sp>
       <p:sp>
@@ -11376,9 +11567,10 @@
             <a:srgbClr val="2A78D6"/>
           </a:solidFill>
         </p:spPr>
-        <p:txBody xmlns:a="http://schemas.openxmlformats.org/drawingml/2006/main">
-          <a:bodyPr/>
-          <a:p/>
+        <p:txBody>
+          <a:bodyPr xmlns:a="http://schemas.openxmlformats.org/drawingml/2006/main"/>
+          <a:lstStyle xmlns:a="http://schemas.openxmlformats.org/drawingml/2006/main"/>
+          <a:p xmlns:a="http://schemas.openxmlformats.org/drawingml/2006/main"/>
         </p:txBody>
       </p:sp>
       <p:sp>
@@ -11407,9 +11599,10 @@
             <a:srgbClr val="2A78D6"/>
           </a:solidFill>
         </p:spPr>
-        <p:txBody xmlns:a="http://schemas.openxmlformats.org/drawingml/2006/main">
-          <a:bodyPr/>
-          <a:p/>
+        <p:txBody>
+          <a:bodyPr xmlns:a="http://schemas.openxmlformats.org/drawingml/2006/main"/>
+          <a:lstStyle xmlns:a="http://schemas.openxmlformats.org/drawingml/2006/main"/>
+          <a:p xmlns:a="http://schemas.openxmlformats.org/drawingml/2006/main"/>
         </p:txBody>
       </p:sp>
       <p:sp>
@@ -11438,9 +11631,10 @@
             <a:srgbClr val="2A78D6"/>
           </a:solidFill>
         </p:spPr>
-        <p:txBody xmlns:a="http://schemas.openxmlformats.org/drawingml/2006/main">
-          <a:bodyPr/>
-          <a:p/>
+        <p:txBody>
+          <a:bodyPr xmlns:a="http://schemas.openxmlformats.org/drawingml/2006/main"/>
+          <a:lstStyle xmlns:a="http://schemas.openxmlformats.org/drawingml/2006/main"/>
+          <a:p xmlns:a="http://schemas.openxmlformats.org/drawingml/2006/main"/>
         </p:txBody>
       </p:sp>
       <p:sp>
@@ -11469,9 +11663,10 @@
             <a:srgbClr val="2A78D6"/>
           </a:solidFill>
         </p:spPr>
-        <p:txBody xmlns:a="http://schemas.openxmlformats.org/drawingml/2006/main">
-          <a:bodyPr/>
-          <a:p/>
+        <p:txBody>
+          <a:bodyPr xmlns:a="http://schemas.openxmlformats.org/drawingml/2006/main"/>
+          <a:lstStyle xmlns:a="http://schemas.openxmlformats.org/drawingml/2006/main"/>
+          <a:p xmlns:a="http://schemas.openxmlformats.org/drawingml/2006/main"/>
         </p:txBody>
       </p:sp>
       <p:sp>
@@ -11500,9 +11695,10 @@
             <a:srgbClr val="2A78D6"/>
           </a:solidFill>
         </p:spPr>
-        <p:txBody xmlns:a="http://schemas.openxmlformats.org/drawingml/2006/main">
-          <a:bodyPr/>
-          <a:p/>
+        <p:txBody>
+          <a:bodyPr xmlns:a="http://schemas.openxmlformats.org/drawingml/2006/main"/>
+          <a:lstStyle xmlns:a="http://schemas.openxmlformats.org/drawingml/2006/main"/>
+          <a:p xmlns:a="http://schemas.openxmlformats.org/drawingml/2006/main"/>
         </p:txBody>
       </p:sp>
       <p:sp>
@@ -11531,9 +11727,10 @@
             <a:srgbClr val="2A78D6"/>
           </a:solidFill>
         </p:spPr>
-        <p:txBody xmlns:a="http://schemas.openxmlformats.org/drawingml/2006/main">
-          <a:bodyPr/>
-          <a:p/>
+        <p:txBody>
+          <a:bodyPr xmlns:a="http://schemas.openxmlformats.org/drawingml/2006/main"/>
+          <a:lstStyle xmlns:a="http://schemas.openxmlformats.org/drawingml/2006/main"/>
+          <a:p xmlns:a="http://schemas.openxmlformats.org/drawingml/2006/main"/>
         </p:txBody>
       </p:sp>
       <p:sp>
@@ -11562,9 +11759,10 @@
             <a:srgbClr val="2A78D6"/>
           </a:solidFill>
         </p:spPr>
-        <p:txBody xmlns:a="http://schemas.openxmlformats.org/drawingml/2006/main">
-          <a:bodyPr/>
-          <a:p/>
+        <p:txBody>
+          <a:bodyPr xmlns:a="http://schemas.openxmlformats.org/drawingml/2006/main"/>
+          <a:lstStyle xmlns:a="http://schemas.openxmlformats.org/drawingml/2006/main"/>
+          <a:p xmlns:a="http://schemas.openxmlformats.org/drawingml/2006/main"/>
         </p:txBody>
       </p:sp>
       <p:sp>
@@ -11593,9 +11791,10 @@
             <a:srgbClr val="2A78D6"/>
           </a:solidFill>
         </p:spPr>
-        <p:txBody xmlns:a="http://schemas.openxmlformats.org/drawingml/2006/main">
-          <a:bodyPr/>
-          <a:p/>
+        <p:txBody>
+          <a:bodyPr xmlns:a="http://schemas.openxmlformats.org/drawingml/2006/main"/>
+          <a:lstStyle xmlns:a="http://schemas.openxmlformats.org/drawingml/2006/main"/>
+          <a:p xmlns:a="http://schemas.openxmlformats.org/drawingml/2006/main"/>
         </p:txBody>
       </p:sp>
       <p:sp>
@@ -11624,9 +11823,10 @@
             <a:srgbClr val="2A78D6"/>
           </a:solidFill>
         </p:spPr>
-        <p:txBody xmlns:a="http://schemas.openxmlformats.org/drawingml/2006/main">
-          <a:bodyPr/>
-          <a:p/>
+        <p:txBody>
+          <a:bodyPr xmlns:a="http://schemas.openxmlformats.org/drawingml/2006/main"/>
+          <a:lstStyle xmlns:a="http://schemas.openxmlformats.org/drawingml/2006/main"/>
+          <a:p xmlns:a="http://schemas.openxmlformats.org/drawingml/2006/main"/>
         </p:txBody>
       </p:sp>
       <p:sp>
@@ -11655,9 +11855,10 @@
             <a:srgbClr val="2A78D6"/>
           </a:solidFill>
         </p:spPr>
-        <p:txBody xmlns:a="http://schemas.openxmlformats.org/drawingml/2006/main">
-          <a:bodyPr/>
-          <a:p/>
+        <p:txBody>
+          <a:bodyPr xmlns:a="http://schemas.openxmlformats.org/drawingml/2006/main"/>
+          <a:lstStyle xmlns:a="http://schemas.openxmlformats.org/drawingml/2006/main"/>
+          <a:p xmlns:a="http://schemas.openxmlformats.org/drawingml/2006/main"/>
         </p:txBody>
       </p:sp>
       <p:sp>
@@ -11686,9 +11887,10 @@
             <a:srgbClr val="2A78D6"/>
           </a:solidFill>
         </p:spPr>
-        <p:txBody xmlns:a="http://schemas.openxmlformats.org/drawingml/2006/main">
-          <a:bodyPr/>
-          <a:p/>
+        <p:txBody>
+          <a:bodyPr xmlns:a="http://schemas.openxmlformats.org/drawingml/2006/main"/>
+          <a:lstStyle xmlns:a="http://schemas.openxmlformats.org/drawingml/2006/main"/>
+          <a:p xmlns:a="http://schemas.openxmlformats.org/drawingml/2006/main"/>
         </p:txBody>
       </p:sp>
       <p:sp>
@@ -11717,9 +11919,10 @@
             <a:srgbClr val="2A78D6"/>
           </a:solidFill>
         </p:spPr>
-        <p:txBody xmlns:a="http://schemas.openxmlformats.org/drawingml/2006/main">
-          <a:bodyPr/>
-          <a:p/>
+        <p:txBody>
+          <a:bodyPr xmlns:a="http://schemas.openxmlformats.org/drawingml/2006/main"/>
+          <a:lstStyle xmlns:a="http://schemas.openxmlformats.org/drawingml/2006/main"/>
+          <a:p xmlns:a="http://schemas.openxmlformats.org/drawingml/2006/main"/>
         </p:txBody>
       </p:sp>
       <p:sp>
@@ -11748,9 +11951,10 @@
             <a:srgbClr val="2A78D6"/>
           </a:solidFill>
         </p:spPr>
-        <p:txBody xmlns:a="http://schemas.openxmlformats.org/drawingml/2006/main">
-          <a:bodyPr/>
-          <a:p/>
+        <p:txBody>
+          <a:bodyPr xmlns:a="http://schemas.openxmlformats.org/drawingml/2006/main"/>
+          <a:lstStyle xmlns:a="http://schemas.openxmlformats.org/drawingml/2006/main"/>
+          <a:p xmlns:a="http://schemas.openxmlformats.org/drawingml/2006/main"/>
         </p:txBody>
       </p:sp>
       <p:sp>
@@ -11779,9 +11983,10 @@
             <a:srgbClr val="2A78D6"/>
           </a:solidFill>
         </p:spPr>
-        <p:txBody xmlns:a="http://schemas.openxmlformats.org/drawingml/2006/main">
-          <a:bodyPr/>
-          <a:p/>
+        <p:txBody>
+          <a:bodyPr xmlns:a="http://schemas.openxmlformats.org/drawingml/2006/main"/>
+          <a:lstStyle xmlns:a="http://schemas.openxmlformats.org/drawingml/2006/main"/>
+          <a:p xmlns:a="http://schemas.openxmlformats.org/drawingml/2006/main"/>
         </p:txBody>
       </p:sp>
       <p:sp>
@@ -11810,9 +12015,10 @@
             <a:srgbClr val="2A78D6"/>
           </a:solidFill>
         </p:spPr>
-        <p:txBody xmlns:a="http://schemas.openxmlformats.org/drawingml/2006/main">
-          <a:bodyPr/>
-          <a:p/>
+        <p:txBody>
+          <a:bodyPr xmlns:a="http://schemas.openxmlformats.org/drawingml/2006/main"/>
+          <a:lstStyle xmlns:a="http://schemas.openxmlformats.org/drawingml/2006/main"/>
+          <a:p xmlns:a="http://schemas.openxmlformats.org/drawingml/2006/main"/>
         </p:txBody>
       </p:sp>
       <p:sp>
@@ -11841,9 +12047,10 @@
             <a:srgbClr val="2A78D6"/>
           </a:solidFill>
         </p:spPr>
-        <p:txBody xmlns:a="http://schemas.openxmlformats.org/drawingml/2006/main">
-          <a:bodyPr/>
-          <a:p/>
+        <p:txBody>
+          <a:bodyPr xmlns:a="http://schemas.openxmlformats.org/drawingml/2006/main"/>
+          <a:lstStyle xmlns:a="http://schemas.openxmlformats.org/drawingml/2006/main"/>
+          <a:p xmlns:a="http://schemas.openxmlformats.org/drawingml/2006/main"/>
         </p:txBody>
       </p:sp>
       <p:sp>
@@ -11872,9 +12079,10 @@
             <a:srgbClr val="2A78D6"/>
           </a:solidFill>
         </p:spPr>
-        <p:txBody xmlns:a="http://schemas.openxmlformats.org/drawingml/2006/main">
-          <a:bodyPr/>
-          <a:p/>
+        <p:txBody>
+          <a:bodyPr xmlns:a="http://schemas.openxmlformats.org/drawingml/2006/main"/>
+          <a:lstStyle xmlns:a="http://schemas.openxmlformats.org/drawingml/2006/main"/>
+          <a:p xmlns:a="http://schemas.openxmlformats.org/drawingml/2006/main"/>
         </p:txBody>
       </p:sp>
       <p:sp>
@@ -11903,9 +12111,10 @@
             <a:srgbClr val="2A78D6"/>
           </a:solidFill>
         </p:spPr>
-        <p:txBody xmlns:a="http://schemas.openxmlformats.org/drawingml/2006/main">
-          <a:bodyPr/>
-          <a:p/>
+        <p:txBody>
+          <a:bodyPr xmlns:a="http://schemas.openxmlformats.org/drawingml/2006/main"/>
+          <a:lstStyle xmlns:a="http://schemas.openxmlformats.org/drawingml/2006/main"/>
+          <a:p xmlns:a="http://schemas.openxmlformats.org/drawingml/2006/main"/>
         </p:txBody>
       </p:sp>
       <p:sp>
@@ -11934,9 +12143,10 @@
             <a:srgbClr val="2A78D6"/>
           </a:solidFill>
         </p:spPr>
-        <p:txBody xmlns:a="http://schemas.openxmlformats.org/drawingml/2006/main">
-          <a:bodyPr/>
-          <a:p/>
+        <p:txBody>
+          <a:bodyPr xmlns:a="http://schemas.openxmlformats.org/drawingml/2006/main"/>
+          <a:lstStyle xmlns:a="http://schemas.openxmlformats.org/drawingml/2006/main"/>
+          <a:p xmlns:a="http://schemas.openxmlformats.org/drawingml/2006/main"/>
         </p:txBody>
       </p:sp>
       <p:sp>
@@ -11965,9 +12175,10 @@
             <a:srgbClr val="2A78D6"/>
           </a:solidFill>
         </p:spPr>
-        <p:txBody xmlns:a="http://schemas.openxmlformats.org/drawingml/2006/main">
-          <a:bodyPr/>
-          <a:p/>
+        <p:txBody>
+          <a:bodyPr xmlns:a="http://schemas.openxmlformats.org/drawingml/2006/main"/>
+          <a:lstStyle xmlns:a="http://schemas.openxmlformats.org/drawingml/2006/main"/>
+          <a:p xmlns:a="http://schemas.openxmlformats.org/drawingml/2006/main"/>
         </p:txBody>
       </p:sp>
       <p:sp>
@@ -11996,9 +12207,10 @@
             <a:srgbClr val="2A78D6"/>
           </a:solidFill>
         </p:spPr>
-        <p:txBody xmlns:a="http://schemas.openxmlformats.org/drawingml/2006/main">
-          <a:bodyPr/>
-          <a:p/>
+        <p:txBody>
+          <a:bodyPr xmlns:a="http://schemas.openxmlformats.org/drawingml/2006/main"/>
+          <a:lstStyle xmlns:a="http://schemas.openxmlformats.org/drawingml/2006/main"/>
+          <a:p xmlns:a="http://schemas.openxmlformats.org/drawingml/2006/main"/>
         </p:txBody>
       </p:sp>
       <p:sp>
@@ -12027,9 +12239,10 @@
             <a:srgbClr val="2A78D6"/>
           </a:solidFill>
         </p:spPr>
-        <p:txBody xmlns:a="http://schemas.openxmlformats.org/drawingml/2006/main">
-          <a:bodyPr/>
-          <a:p/>
+        <p:txBody>
+          <a:bodyPr xmlns:a="http://schemas.openxmlformats.org/drawingml/2006/main"/>
+          <a:lstStyle xmlns:a="http://schemas.openxmlformats.org/drawingml/2006/main"/>
+          <a:p xmlns:a="http://schemas.openxmlformats.org/drawingml/2006/main"/>
         </p:txBody>
       </p:sp>
       <p:sp>
@@ -12058,9 +12271,10 @@
             <a:srgbClr val="FAB219"/>
           </a:solidFill>
         </p:spPr>
-        <p:txBody xmlns:a="http://schemas.openxmlformats.org/drawingml/2006/main">
-          <a:bodyPr/>
-          <a:p/>
+        <p:txBody>
+          <a:bodyPr xmlns:a="http://schemas.openxmlformats.org/drawingml/2006/main"/>
+          <a:lstStyle xmlns:a="http://schemas.openxmlformats.org/drawingml/2006/main"/>
+          <a:p xmlns:a="http://schemas.openxmlformats.org/drawingml/2006/main"/>
         </p:txBody>
       </p:sp>
       <p:sp>
@@ -12089,9 +12303,10 @@
             <a:srgbClr val="FAB219"/>
           </a:solidFill>
         </p:spPr>
-        <p:txBody xmlns:a="http://schemas.openxmlformats.org/drawingml/2006/main">
-          <a:bodyPr/>
-          <a:p/>
+        <p:txBody>
+          <a:bodyPr xmlns:a="http://schemas.openxmlformats.org/drawingml/2006/main"/>
+          <a:lstStyle xmlns:a="http://schemas.openxmlformats.org/drawingml/2006/main"/>
+          <a:p xmlns:a="http://schemas.openxmlformats.org/drawingml/2006/main"/>
         </p:txBody>
       </p:sp>
       <p:sp>
@@ -12120,9 +12335,10 @@
             <a:srgbClr val="FAB219"/>
           </a:solidFill>
         </p:spPr>
-        <p:txBody xmlns:a="http://schemas.openxmlformats.org/drawingml/2006/main">
-          <a:bodyPr/>
-          <a:p/>
+        <p:txBody>
+          <a:bodyPr xmlns:a="http://schemas.openxmlformats.org/drawingml/2006/main"/>
+          <a:lstStyle xmlns:a="http://schemas.openxmlformats.org/drawingml/2006/main"/>
+          <a:p xmlns:a="http://schemas.openxmlformats.org/drawingml/2006/main"/>
         </p:txBody>
       </p:sp>
       <p:sp>
@@ -12151,9 +12367,10 @@
             <a:srgbClr val="FAB219"/>
           </a:solidFill>
         </p:spPr>
-        <p:txBody xmlns:a="http://schemas.openxmlformats.org/drawingml/2006/main">
-          <a:bodyPr/>
-          <a:p/>
+        <p:txBody>
+          <a:bodyPr xmlns:a="http://schemas.openxmlformats.org/drawingml/2006/main"/>
+          <a:lstStyle xmlns:a="http://schemas.openxmlformats.org/drawingml/2006/main"/>
+          <a:p xmlns:a="http://schemas.openxmlformats.org/drawingml/2006/main"/>
         </p:txBody>
       </p:sp>
       <p:sp>
@@ -12182,9 +12399,10 @@
             <a:srgbClr val="D03B3B"/>
           </a:solidFill>
         </p:spPr>
-        <p:txBody xmlns:a="http://schemas.openxmlformats.org/drawingml/2006/main">
-          <a:bodyPr/>
-          <a:p/>
+        <p:txBody>
+          <a:bodyPr xmlns:a="http://schemas.openxmlformats.org/drawingml/2006/main"/>
+          <a:lstStyle xmlns:a="http://schemas.openxmlformats.org/drawingml/2006/main"/>
+          <a:p xmlns:a="http://schemas.openxmlformats.org/drawingml/2006/main"/>
         </p:txBody>
       </p:sp>
       <p:sp>
@@ -12213,9 +12431,10 @@
             <a:srgbClr val="D03B3B"/>
           </a:solidFill>
         </p:spPr>
-        <p:txBody xmlns:a="http://schemas.openxmlformats.org/drawingml/2006/main">
-          <a:bodyPr/>
-          <a:p/>
+        <p:txBody>
+          <a:bodyPr xmlns:a="http://schemas.openxmlformats.org/drawingml/2006/main"/>
+          <a:lstStyle xmlns:a="http://schemas.openxmlformats.org/drawingml/2006/main"/>
+          <a:p xmlns:a="http://schemas.openxmlformats.org/drawingml/2006/main"/>
         </p:txBody>
       </p:sp>
       <p:sp>
@@ -12244,9 +12463,10 @@
             <a:srgbClr val="D03B3B"/>
           </a:solidFill>
         </p:spPr>
-        <p:txBody xmlns:a="http://schemas.openxmlformats.org/drawingml/2006/main">
-          <a:bodyPr/>
-          <a:p/>
+        <p:txBody>
+          <a:bodyPr xmlns:a="http://schemas.openxmlformats.org/drawingml/2006/main"/>
+          <a:lstStyle xmlns:a="http://schemas.openxmlformats.org/drawingml/2006/main"/>
+          <a:p xmlns:a="http://schemas.openxmlformats.org/drawingml/2006/main"/>
         </p:txBody>
       </p:sp>
       <p:sp>
@@ -12275,9 +12495,10 @@
             <a:srgbClr val="D03B3B"/>
           </a:solidFill>
         </p:spPr>
-        <p:txBody xmlns:a="http://schemas.openxmlformats.org/drawingml/2006/main">
-          <a:bodyPr/>
-          <a:p/>
+        <p:txBody>
+          <a:bodyPr xmlns:a="http://schemas.openxmlformats.org/drawingml/2006/main"/>
+          <a:lstStyle xmlns:a="http://schemas.openxmlformats.org/drawingml/2006/main"/>
+          <a:p xmlns:a="http://schemas.openxmlformats.org/drawingml/2006/main"/>
         </p:txBody>
       </p:sp>
       <p:sp>
@@ -12405,9 +12626,10 @@
             <a:srgbClr val="24343F"/>
           </a:solidFill>
         </p:spPr>
-        <p:txBody xmlns:a="http://schemas.openxmlformats.org/drawingml/2006/main">
-          <a:bodyPr/>
-          <a:p/>
+        <p:txBody>
+          <a:bodyPr xmlns:a="http://schemas.openxmlformats.org/drawingml/2006/main"/>
+          <a:lstStyle xmlns:a="http://schemas.openxmlformats.org/drawingml/2006/main"/>
+          <a:p xmlns:a="http://schemas.openxmlformats.org/drawingml/2006/main"/>
         </p:txBody>
       </p:sp>
       <p:sp>
@@ -12436,9 +12658,10 @@
             <a:srgbClr val="2A78D6"/>
           </a:solidFill>
         </p:spPr>
-        <p:txBody xmlns:a="http://schemas.openxmlformats.org/drawingml/2006/main">
-          <a:bodyPr/>
-          <a:p/>
+        <p:txBody>
+          <a:bodyPr xmlns:a="http://schemas.openxmlformats.org/drawingml/2006/main"/>
+          <a:lstStyle xmlns:a="http://schemas.openxmlformats.org/drawingml/2006/main"/>
+          <a:p xmlns:a="http://schemas.openxmlformats.org/drawingml/2006/main"/>
         </p:txBody>
       </p:sp>
       <p:sp>
@@ -12481,7 +12704,7 @@
                 <a:ea typeface="Calibri"/>
                 <a:cs typeface="Calibri"/>
               </a:rPr>
-              <a:t>Demo, not production. Agreement with consumer-selected CFPB labels is 60.5% — not deployment accuracy. The demo stops for human review; Phase 1 runs in shadow, with no action on suggestions.</a:t>
+              <a:t>Demo, not production. Agreement with consumer-selected CFPB labels is 60.5% — not deployment accuracy. The demo never routes autonomously; Phase 1 runs in shadow, with no action on suggestions.</a:t>
             </a:r>
             <a:endParaRPr sz="1250"/>
           </a:p>
@@ -12588,9 +12811,10 @@
             <a:srgbClr val="24343F"/>
           </a:solidFill>
         </p:spPr>
-        <p:txBody xmlns:a="http://schemas.openxmlformats.org/drawingml/2006/main">
-          <a:bodyPr/>
-          <a:p/>
+        <p:txBody>
+          <a:bodyPr xmlns:a="http://schemas.openxmlformats.org/drawingml/2006/main"/>
+          <a:lstStyle xmlns:a="http://schemas.openxmlformats.org/drawingml/2006/main"/>
+          <a:p xmlns:a="http://schemas.openxmlformats.org/drawingml/2006/main"/>
         </p:txBody>
       </p:sp>
       <p:pic>
@@ -12602,7 +12826,7 @@
           <p:nvPr/>
         </p:nvPicPr>
         <p:blipFill>
-          <a:blip xmlns:r="http://schemas.openxmlformats.org/officeDocument/2006/relationships" xmlns:a="http://schemas.openxmlformats.org/drawingml/2006/main" r:embed="R1cec721bd7c54551"/>
+          <a:blip xmlns:r="http://schemas.openxmlformats.org/officeDocument/2006/relationships" xmlns:a="http://schemas.openxmlformats.org/drawingml/2006/main" r:embed="R31612a76c9134ad6"/>
           <a:stretch xmlns:a="http://schemas.openxmlformats.org/drawingml/2006/main">
             <a:fillRect l="0" t="0" r="0" b="0"/>
           </a:stretch>
@@ -12693,9 +12917,10 @@
             <a:prstDash val="solid"/>
           </a:ln>
         </p:spPr>
-        <p:txBody xmlns:a="http://schemas.openxmlformats.org/drawingml/2006/main">
-          <a:bodyPr/>
-          <a:p/>
+        <p:txBody>
+          <a:bodyPr xmlns:a="http://schemas.openxmlformats.org/drawingml/2006/main"/>
+          <a:lstStyle xmlns:a="http://schemas.openxmlformats.org/drawingml/2006/main"/>
+          <a:p xmlns:a="http://schemas.openxmlformats.org/drawingml/2006/main"/>
         </p:txBody>
       </p:sp>
       <p:sp>
@@ -12740,7 +12965,7 @@
                   <a:srgbClr val="6B7C88"/>
                 </a:solidFill>
               </a:rPr>
-              <a:t>Sources: FCA complaint benchmark; Financial Ombudsman Service case fee; project cost model.</a:t>
+              <a:t>Sources: FCA and FOS benchmarks; OpenAI API pricing; project cost model.</a:t>
             </a:r>
             <a:endParaRPr sz="850"/>
           </a:p>
@@ -12818,9 +13043,10 @@
             <a:srgbClr val="24343F"/>
           </a:solidFill>
         </p:spPr>
-        <p:txBody xmlns:a="http://schemas.openxmlformats.org/drawingml/2006/main">
-          <a:bodyPr/>
-          <a:p/>
+        <p:txBody>
+          <a:bodyPr xmlns:a="http://schemas.openxmlformats.org/drawingml/2006/main"/>
+          <a:lstStyle xmlns:a="http://schemas.openxmlformats.org/drawingml/2006/main"/>
+          <a:p xmlns:a="http://schemas.openxmlformats.org/drawingml/2006/main"/>
         </p:txBody>
       </p:sp>
       <p:sp>
@@ -12849,9 +13075,10 @@
             <a:srgbClr val="445A69"/>
           </a:solidFill>
         </p:spPr>
-        <p:txBody xmlns:a="http://schemas.openxmlformats.org/drawingml/2006/main">
-          <a:bodyPr/>
-          <a:p/>
+        <p:txBody>
+          <a:bodyPr xmlns:a="http://schemas.openxmlformats.org/drawingml/2006/main"/>
+          <a:lstStyle xmlns:a="http://schemas.openxmlformats.org/drawingml/2006/main"/>
+          <a:p xmlns:a="http://schemas.openxmlformats.org/drawingml/2006/main"/>
         </p:txBody>
       </p:sp>
       <p:sp>
@@ -12880,9 +13107,10 @@
             <a:srgbClr val="2A78D6"/>
           </a:solidFill>
         </p:spPr>
-        <p:txBody xmlns:a="http://schemas.openxmlformats.org/drawingml/2006/main">
-          <a:bodyPr/>
-          <a:p/>
+        <p:txBody>
+          <a:bodyPr xmlns:a="http://schemas.openxmlformats.org/drawingml/2006/main"/>
+          <a:lstStyle xmlns:a="http://schemas.openxmlformats.org/drawingml/2006/main"/>
+          <a:p xmlns:a="http://schemas.openxmlformats.org/drawingml/2006/main"/>
         </p:txBody>
       </p:sp>
       <p:sp>
@@ -13099,9 +13327,10 @@
             <a:prstDash val="solid"/>
           </a:ln>
         </p:spPr>
-        <p:txBody xmlns:a="http://schemas.openxmlformats.org/drawingml/2006/main">
-          <a:bodyPr/>
-          <a:p/>
+        <p:txBody>
+          <a:bodyPr xmlns:a="http://schemas.openxmlformats.org/drawingml/2006/main"/>
+          <a:lstStyle xmlns:a="http://schemas.openxmlformats.org/drawingml/2006/main"/>
+          <a:p xmlns:a="http://schemas.openxmlformats.org/drawingml/2006/main"/>
         </p:txBody>
       </p:sp>
       <p:sp>
@@ -13136,9 +13365,10 @@
             <a:prstDash val="solid"/>
           </a:ln>
         </p:spPr>
-        <p:txBody xmlns:a="http://schemas.openxmlformats.org/drawingml/2006/main">
-          <a:bodyPr/>
-          <a:p/>
+        <p:txBody>
+          <a:bodyPr xmlns:a="http://schemas.openxmlformats.org/drawingml/2006/main"/>
+          <a:lstStyle xmlns:a="http://schemas.openxmlformats.org/drawingml/2006/main"/>
+          <a:p xmlns:a="http://schemas.openxmlformats.org/drawingml/2006/main"/>
         </p:txBody>
       </p:sp>
       <p:sp>
@@ -13226,9 +13456,10 @@
             </a:outerShdw>
           </a:effectLst>
         </p:spPr>
-        <p:txBody xmlns:a="http://schemas.openxmlformats.org/drawingml/2006/main">
-          <a:bodyPr/>
-          <a:p/>
+        <p:txBody>
+          <a:bodyPr xmlns:a="http://schemas.openxmlformats.org/drawingml/2006/main"/>
+          <a:lstStyle xmlns:a="http://schemas.openxmlformats.org/drawingml/2006/main"/>
+          <a:p xmlns:a="http://schemas.openxmlformats.org/drawingml/2006/main"/>
         </p:txBody>
       </p:sp>
       <p:sp>
@@ -13355,9 +13586,10 @@
             <a:prstDash val="solid"/>
           </a:ln>
         </p:spPr>
-        <p:txBody xmlns:a="http://schemas.openxmlformats.org/drawingml/2006/main">
-          <a:bodyPr/>
-          <a:p/>
+        <p:txBody>
+          <a:bodyPr xmlns:a="http://schemas.openxmlformats.org/drawingml/2006/main"/>
+          <a:lstStyle xmlns:a="http://schemas.openxmlformats.org/drawingml/2006/main"/>
+          <a:p xmlns:a="http://schemas.openxmlformats.org/drawingml/2006/main"/>
         </p:txBody>
       </p:sp>
       <p:sp>
@@ -13445,9 +13677,10 @@
             </a:outerShdw>
           </a:effectLst>
         </p:spPr>
-        <p:txBody xmlns:a="http://schemas.openxmlformats.org/drawingml/2006/main">
-          <a:bodyPr/>
-          <a:p/>
+        <p:txBody>
+          <a:bodyPr xmlns:a="http://schemas.openxmlformats.org/drawingml/2006/main"/>
+          <a:lstStyle xmlns:a="http://schemas.openxmlformats.org/drawingml/2006/main"/>
+          <a:p xmlns:a="http://schemas.openxmlformats.org/drawingml/2006/main"/>
         </p:txBody>
       </p:sp>
       <p:sp>
@@ -13574,9 +13807,10 @@
             <a:prstDash val="solid"/>
           </a:ln>
         </p:spPr>
-        <p:txBody xmlns:a="http://schemas.openxmlformats.org/drawingml/2006/main">
-          <a:bodyPr/>
-          <a:p/>
+        <p:txBody>
+          <a:bodyPr xmlns:a="http://schemas.openxmlformats.org/drawingml/2006/main"/>
+          <a:lstStyle xmlns:a="http://schemas.openxmlformats.org/drawingml/2006/main"/>
+          <a:p xmlns:a="http://schemas.openxmlformats.org/drawingml/2006/main"/>
         </p:txBody>
       </p:sp>
       <p:sp>
@@ -13664,9 +13898,10 @@
             </a:outerShdw>
           </a:effectLst>
         </p:spPr>
-        <p:txBody xmlns:a="http://schemas.openxmlformats.org/drawingml/2006/main">
-          <a:bodyPr/>
-          <a:p/>
+        <p:txBody>
+          <a:bodyPr xmlns:a="http://schemas.openxmlformats.org/drawingml/2006/main"/>
+          <a:lstStyle xmlns:a="http://schemas.openxmlformats.org/drawingml/2006/main"/>
+          <a:p xmlns:a="http://schemas.openxmlformats.org/drawingml/2006/main"/>
         </p:txBody>
       </p:sp>
       <p:sp>
@@ -13787,9 +14022,10 @@
             <a:srgbClr val="EFF5F9"/>
           </a:solidFill>
         </p:spPr>
-        <p:txBody xmlns:a="http://schemas.openxmlformats.org/drawingml/2006/main">
-          <a:bodyPr/>
-          <a:p/>
+        <p:txBody>
+          <a:bodyPr xmlns:a="http://schemas.openxmlformats.org/drawingml/2006/main"/>
+          <a:lstStyle xmlns:a="http://schemas.openxmlformats.org/drawingml/2006/main"/>
+          <a:p xmlns:a="http://schemas.openxmlformats.org/drawingml/2006/main"/>
         </p:txBody>
       </p:sp>
       <p:sp>
@@ -13818,9 +14054,10 @@
             <a:srgbClr val="2A78D6"/>
           </a:solidFill>
         </p:spPr>
-        <p:txBody xmlns:a="http://schemas.openxmlformats.org/drawingml/2006/main">
-          <a:bodyPr/>
-          <a:p/>
+        <p:txBody>
+          <a:bodyPr xmlns:a="http://schemas.openxmlformats.org/drawingml/2006/main"/>
+          <a:lstStyle xmlns:a="http://schemas.openxmlformats.org/drawingml/2006/main"/>
+          <a:p xmlns:a="http://schemas.openxmlformats.org/drawingml/2006/main"/>
         </p:txBody>
       </p:sp>
       <p:sp>
@@ -13992,9 +14229,10 @@
             <a:srgbClr val="24343F"/>
           </a:solidFill>
         </p:spPr>
-        <p:txBody xmlns:a="http://schemas.openxmlformats.org/drawingml/2006/main">
-          <a:bodyPr/>
-          <a:p/>
+        <p:txBody>
+          <a:bodyPr xmlns:a="http://schemas.openxmlformats.org/drawingml/2006/main"/>
+          <a:lstStyle xmlns:a="http://schemas.openxmlformats.org/drawingml/2006/main"/>
+          <a:p xmlns:a="http://schemas.openxmlformats.org/drawingml/2006/main"/>
         </p:txBody>
       </p:sp>
       <p:pic>
@@ -14006,7 +14244,7 @@
           <p:nvPr/>
         </p:nvPicPr>
         <p:blipFill>
-          <a:blip xmlns:r="http://schemas.openxmlformats.org/officeDocument/2006/relationships" xmlns:a="http://schemas.openxmlformats.org/drawingml/2006/main" r:embed="Rf6c7ee433bda429f"/>
+          <a:blip xmlns:r="http://schemas.openxmlformats.org/officeDocument/2006/relationships" xmlns:a="http://schemas.openxmlformats.org/drawingml/2006/main" r:embed="R153459dcced24c1a"/>
           <a:stretch xmlns:a="http://schemas.openxmlformats.org/drawingml/2006/main">
             <a:fillRect l="0" t="0" r="0" b="0"/>
           </a:stretch>
@@ -14220,9 +14458,10 @@
             <a:srgbClr val="24343F"/>
           </a:solidFill>
         </p:spPr>
-        <p:txBody xmlns:a="http://schemas.openxmlformats.org/drawingml/2006/main">
-          <a:bodyPr/>
-          <a:p/>
+        <p:txBody>
+          <a:bodyPr xmlns:a="http://schemas.openxmlformats.org/drawingml/2006/main"/>
+          <a:lstStyle xmlns:a="http://schemas.openxmlformats.org/drawingml/2006/main"/>
+          <a:p xmlns:a="http://schemas.openxmlformats.org/drawingml/2006/main"/>
         </p:txBody>
       </p:sp>
       <p:pic>
@@ -14234,7 +14473,7 @@
           <p:nvPr/>
         </p:nvPicPr>
         <p:blipFill>
-          <a:blip xmlns:r="http://schemas.openxmlformats.org/officeDocument/2006/relationships" xmlns:a="http://schemas.openxmlformats.org/drawingml/2006/main" r:embed="R380e739bb4934b50"/>
+          <a:blip xmlns:r="http://schemas.openxmlformats.org/officeDocument/2006/relationships" xmlns:a="http://schemas.openxmlformats.org/drawingml/2006/main" r:embed="R38364d0519e84076"/>
           <a:stretch xmlns:a="http://schemas.openxmlformats.org/drawingml/2006/main">
             <a:fillRect l="0" t="0" r="0" b="0"/>
           </a:stretch>
@@ -14321,9 +14560,10 @@
             <a:srgbClr val="EFF5F9"/>
           </a:solidFill>
         </p:spPr>
-        <p:txBody xmlns:a="http://schemas.openxmlformats.org/drawingml/2006/main">
-          <a:bodyPr/>
-          <a:p/>
+        <p:txBody>
+          <a:bodyPr xmlns:a="http://schemas.openxmlformats.org/drawingml/2006/main"/>
+          <a:lstStyle xmlns:a="http://schemas.openxmlformats.org/drawingml/2006/main"/>
+          <a:p xmlns:a="http://schemas.openxmlformats.org/drawingml/2006/main"/>
         </p:txBody>
       </p:sp>
       <p:sp>
@@ -14352,9 +14592,10 @@
             <a:srgbClr val="2A78D6"/>
           </a:solidFill>
         </p:spPr>
-        <p:txBody xmlns:a="http://schemas.openxmlformats.org/drawingml/2006/main">
-          <a:bodyPr/>
-          <a:p/>
+        <p:txBody>
+          <a:bodyPr xmlns:a="http://schemas.openxmlformats.org/drawingml/2006/main"/>
+          <a:lstStyle xmlns:a="http://schemas.openxmlformats.org/drawingml/2006/main"/>
+          <a:p xmlns:a="http://schemas.openxmlformats.org/drawingml/2006/main"/>
         </p:txBody>
       </p:sp>
       <p:sp>
@@ -14444,9 +14685,10 @@
             <a:prstDash val="solid"/>
           </a:ln>
         </p:spPr>
-        <p:txBody xmlns:a="http://schemas.openxmlformats.org/drawingml/2006/main">
-          <a:bodyPr/>
-          <a:p/>
+        <p:txBody>
+          <a:bodyPr xmlns:a="http://schemas.openxmlformats.org/drawingml/2006/main"/>
+          <a:lstStyle xmlns:a="http://schemas.openxmlformats.org/drawingml/2006/main"/>
+          <a:p xmlns:a="http://schemas.openxmlformats.org/drawingml/2006/main"/>
         </p:txBody>
       </p:sp>
       <p:sp>
@@ -14569,9 +14811,10 @@
             </a:outerShdw>
           </a:effectLst>
         </p:spPr>
-        <p:txBody xmlns:a="http://schemas.openxmlformats.org/drawingml/2006/main">
-          <a:bodyPr/>
-          <a:p/>
+        <p:txBody>
+          <a:bodyPr xmlns:a="http://schemas.openxmlformats.org/drawingml/2006/main"/>
+          <a:lstStyle xmlns:a="http://schemas.openxmlformats.org/drawingml/2006/main"/>
+          <a:p xmlns:a="http://schemas.openxmlformats.org/drawingml/2006/main"/>
         </p:txBody>
       </p:sp>
       <p:sp>
@@ -14600,9 +14843,10 @@
             <a:srgbClr val="24343F"/>
           </a:solidFill>
         </p:spPr>
-        <p:txBody xmlns:a="http://schemas.openxmlformats.org/drawingml/2006/main">
-          <a:bodyPr/>
-          <a:p/>
+        <p:txBody>
+          <a:bodyPr xmlns:a="http://schemas.openxmlformats.org/drawingml/2006/main"/>
+          <a:lstStyle xmlns:a="http://schemas.openxmlformats.org/drawingml/2006/main"/>
+          <a:p xmlns:a="http://schemas.openxmlformats.org/drawingml/2006/main"/>
         </p:txBody>
       </p:sp>
       <p:sp>
@@ -14782,9 +15026,10 @@
             </a:outerShdw>
           </a:effectLst>
         </p:spPr>
-        <p:txBody xmlns:a="http://schemas.openxmlformats.org/drawingml/2006/main">
-          <a:bodyPr/>
-          <a:p/>
+        <p:txBody>
+          <a:bodyPr xmlns:a="http://schemas.openxmlformats.org/drawingml/2006/main"/>
+          <a:lstStyle xmlns:a="http://schemas.openxmlformats.org/drawingml/2006/main"/>
+          <a:p xmlns:a="http://schemas.openxmlformats.org/drawingml/2006/main"/>
         </p:txBody>
       </p:sp>
       <p:sp>
@@ -14813,9 +15058,10 @@
             <a:srgbClr val="445A69"/>
           </a:solidFill>
         </p:spPr>
-        <p:txBody xmlns:a="http://schemas.openxmlformats.org/drawingml/2006/main">
-          <a:bodyPr/>
-          <a:p/>
+        <p:txBody>
+          <a:bodyPr xmlns:a="http://schemas.openxmlformats.org/drawingml/2006/main"/>
+          <a:lstStyle xmlns:a="http://schemas.openxmlformats.org/drawingml/2006/main"/>
+          <a:p xmlns:a="http://schemas.openxmlformats.org/drawingml/2006/main"/>
         </p:txBody>
       </p:sp>
       <p:sp>
@@ -15057,9 +15303,10 @@
             <a:srgbClr val="24343F"/>
           </a:solidFill>
         </p:spPr>
-        <p:txBody xmlns:a="http://schemas.openxmlformats.org/drawingml/2006/main">
-          <a:bodyPr/>
-          <a:p/>
+        <p:txBody>
+          <a:bodyPr xmlns:a="http://schemas.openxmlformats.org/drawingml/2006/main"/>
+          <a:lstStyle xmlns:a="http://schemas.openxmlformats.org/drawingml/2006/main"/>
+          <a:p xmlns:a="http://schemas.openxmlformats.org/drawingml/2006/main"/>
         </p:txBody>
       </p:sp>
       <p:pic>
@@ -15071,7 +15318,7 @@
           <p:nvPr/>
         </p:nvPicPr>
         <p:blipFill>
-          <a:blip xmlns:r="http://schemas.openxmlformats.org/officeDocument/2006/relationships" xmlns:a="http://schemas.openxmlformats.org/drawingml/2006/main" r:embed="R6f2841d48071433e"/>
+          <a:blip xmlns:r="http://schemas.openxmlformats.org/officeDocument/2006/relationships" xmlns:a="http://schemas.openxmlformats.org/drawingml/2006/main" r:embed="Rc0edef589ac64453"/>
           <a:stretch xmlns:a="http://schemas.openxmlformats.org/drawingml/2006/main">
             <a:fillRect l="0" t="0" r="0" b="0"/>
           </a:stretch>
@@ -15158,9 +15405,10 @@
             <a:srgbClr val="EFF5F9"/>
           </a:solidFill>
         </p:spPr>
-        <p:txBody xmlns:a="http://schemas.openxmlformats.org/drawingml/2006/main">
-          <a:bodyPr/>
-          <a:p/>
+        <p:txBody>
+          <a:bodyPr xmlns:a="http://schemas.openxmlformats.org/drawingml/2006/main"/>
+          <a:lstStyle xmlns:a="http://schemas.openxmlformats.org/drawingml/2006/main"/>
+          <a:p xmlns:a="http://schemas.openxmlformats.org/drawingml/2006/main"/>
         </p:txBody>
       </p:sp>
       <p:sp>
@@ -15189,9 +15437,10 @@
             <a:srgbClr val="2A78D6"/>
           </a:solidFill>
         </p:spPr>
-        <p:txBody xmlns:a="http://schemas.openxmlformats.org/drawingml/2006/main">
-          <a:bodyPr/>
-          <a:p/>
+        <p:txBody>
+          <a:bodyPr xmlns:a="http://schemas.openxmlformats.org/drawingml/2006/main"/>
+          <a:lstStyle xmlns:a="http://schemas.openxmlformats.org/drawingml/2006/main"/>
+          <a:p xmlns:a="http://schemas.openxmlformats.org/drawingml/2006/main"/>
         </p:txBody>
       </p:sp>
       <p:sp>
@@ -15270,9 +15519,10 @@
             <a:prstDash val="solid"/>
           </a:ln>
         </p:spPr>
-        <p:txBody xmlns:a="http://schemas.openxmlformats.org/drawingml/2006/main">
-          <a:bodyPr/>
-          <a:p/>
+        <p:txBody>
+          <a:bodyPr xmlns:a="http://schemas.openxmlformats.org/drawingml/2006/main"/>
+          <a:lstStyle xmlns:a="http://schemas.openxmlformats.org/drawingml/2006/main"/>
+          <a:p xmlns:a="http://schemas.openxmlformats.org/drawingml/2006/main"/>
         </p:txBody>
       </p:sp>
       <p:sp>
@@ -15395,9 +15645,10 @@
             <a:srgbClr val="24343F"/>
           </a:solidFill>
         </p:spPr>
-        <p:txBody xmlns:a="http://schemas.openxmlformats.org/drawingml/2006/main">
-          <a:bodyPr/>
-          <a:p/>
+        <p:txBody>
+          <a:bodyPr xmlns:a="http://schemas.openxmlformats.org/drawingml/2006/main"/>
+          <a:lstStyle xmlns:a="http://schemas.openxmlformats.org/drawingml/2006/main"/>
+          <a:p xmlns:a="http://schemas.openxmlformats.org/drawingml/2006/main"/>
         </p:txBody>
       </p:sp>
       <p:sp>
@@ -15474,9 +15725,10 @@
             </a:srgbClr>
           </a:solidFill>
         </p:spPr>
-        <p:txBody xmlns:a="http://schemas.openxmlformats.org/drawingml/2006/main">
-          <a:bodyPr/>
-          <a:p/>
+        <p:txBody>
+          <a:bodyPr xmlns:a="http://schemas.openxmlformats.org/drawingml/2006/main"/>
+          <a:lstStyle xmlns:a="http://schemas.openxmlformats.org/drawingml/2006/main"/>
+          <a:p xmlns:a="http://schemas.openxmlformats.org/drawingml/2006/main"/>
         </p:txBody>
       </p:sp>
       <p:sp>
@@ -15553,9 +15805,10 @@
             </a:srgbClr>
           </a:solidFill>
         </p:spPr>
-        <p:txBody xmlns:a="http://schemas.openxmlformats.org/drawingml/2006/main">
-          <a:bodyPr/>
-          <a:p/>
+        <p:txBody>
+          <a:bodyPr xmlns:a="http://schemas.openxmlformats.org/drawingml/2006/main"/>
+          <a:lstStyle xmlns:a="http://schemas.openxmlformats.org/drawingml/2006/main"/>
+          <a:p xmlns:a="http://schemas.openxmlformats.org/drawingml/2006/main"/>
         </p:txBody>
       </p:sp>
       <p:sp>
@@ -15632,9 +15885,10 @@
             </a:srgbClr>
           </a:solidFill>
         </p:spPr>
-        <p:txBody xmlns:a="http://schemas.openxmlformats.org/drawingml/2006/main">
-          <a:bodyPr/>
-          <a:p/>
+        <p:txBody>
+          <a:bodyPr xmlns:a="http://schemas.openxmlformats.org/drawingml/2006/main"/>
+          <a:lstStyle xmlns:a="http://schemas.openxmlformats.org/drawingml/2006/main"/>
+          <a:p xmlns:a="http://schemas.openxmlformats.org/drawingml/2006/main"/>
         </p:txBody>
       </p:sp>
       <p:sp>
@@ -15711,9 +15965,10 @@
             </a:srgbClr>
           </a:solidFill>
         </p:spPr>
-        <p:txBody xmlns:a="http://schemas.openxmlformats.org/drawingml/2006/main">
-          <a:bodyPr/>
-          <a:p/>
+        <p:txBody>
+          <a:bodyPr xmlns:a="http://schemas.openxmlformats.org/drawingml/2006/main"/>
+          <a:lstStyle xmlns:a="http://schemas.openxmlformats.org/drawingml/2006/main"/>
+          <a:p xmlns:a="http://schemas.openxmlformats.org/drawingml/2006/main"/>
         </p:txBody>
       </p:sp>
       <p:sp>
@@ -15795,9 +16050,10 @@
             </a:outerShdw>
           </a:effectLst>
         </p:spPr>
-        <p:txBody xmlns:a="http://schemas.openxmlformats.org/drawingml/2006/main">
-          <a:bodyPr/>
-          <a:p/>
+        <p:txBody>
+          <a:bodyPr xmlns:a="http://schemas.openxmlformats.org/drawingml/2006/main"/>
+          <a:lstStyle xmlns:a="http://schemas.openxmlformats.org/drawingml/2006/main"/>
+          <a:p xmlns:a="http://schemas.openxmlformats.org/drawingml/2006/main"/>
         </p:txBody>
       </p:sp>
       <p:sp>
@@ -15973,9 +16229,10 @@
             <a:srgbClr val="24343F"/>
           </a:solidFill>
         </p:spPr>
-        <p:txBody xmlns:a="http://schemas.openxmlformats.org/drawingml/2006/main">
-          <a:bodyPr/>
-          <a:p/>
+        <p:txBody>
+          <a:bodyPr xmlns:a="http://schemas.openxmlformats.org/drawingml/2006/main"/>
+          <a:lstStyle xmlns:a="http://schemas.openxmlformats.org/drawingml/2006/main"/>
+          <a:p xmlns:a="http://schemas.openxmlformats.org/drawingml/2006/main"/>
         </p:txBody>
       </p:sp>
       <p:pic>
@@ -15987,7 +16244,7 @@
           <p:nvPr/>
         </p:nvPicPr>
         <p:blipFill>
-          <a:blip xmlns:r="http://schemas.openxmlformats.org/officeDocument/2006/relationships" xmlns:a="http://schemas.openxmlformats.org/drawingml/2006/main" r:embed="R13c84005b60948cb"/>
+          <a:blip xmlns:r="http://schemas.openxmlformats.org/officeDocument/2006/relationships" xmlns:a="http://schemas.openxmlformats.org/drawingml/2006/main" r:embed="Ra7c4747d959f484c"/>
           <a:stretch xmlns:a="http://schemas.openxmlformats.org/drawingml/2006/main">
             <a:fillRect l="0" t="0" r="0" b="0"/>
           </a:stretch>
@@ -16074,9 +16331,10 @@
             <a:srgbClr val="EFF5F9"/>
           </a:solidFill>
         </p:spPr>
-        <p:txBody xmlns:a="http://schemas.openxmlformats.org/drawingml/2006/main">
-          <a:bodyPr/>
-          <a:p/>
+        <p:txBody>
+          <a:bodyPr xmlns:a="http://schemas.openxmlformats.org/drawingml/2006/main"/>
+          <a:lstStyle xmlns:a="http://schemas.openxmlformats.org/drawingml/2006/main"/>
+          <a:p xmlns:a="http://schemas.openxmlformats.org/drawingml/2006/main"/>
         </p:txBody>
       </p:sp>
       <p:sp>
@@ -16105,9 +16363,10 @@
             <a:srgbClr val="2A78D6"/>
           </a:solidFill>
         </p:spPr>
-        <p:txBody xmlns:a="http://schemas.openxmlformats.org/drawingml/2006/main">
-          <a:bodyPr/>
-          <a:p/>
+        <p:txBody>
+          <a:bodyPr xmlns:a="http://schemas.openxmlformats.org/drawingml/2006/main"/>
+          <a:lstStyle xmlns:a="http://schemas.openxmlformats.org/drawingml/2006/main"/>
+          <a:p xmlns:a="http://schemas.openxmlformats.org/drawingml/2006/main"/>
         </p:txBody>
       </p:sp>
       <p:sp>
@@ -16186,9 +16445,10 @@
             <a:prstDash val="solid"/>
           </a:ln>
         </p:spPr>
-        <p:txBody xmlns:a="http://schemas.openxmlformats.org/drawingml/2006/main">
-          <a:bodyPr/>
-          <a:p/>
+        <p:txBody>
+          <a:bodyPr xmlns:a="http://schemas.openxmlformats.org/drawingml/2006/main"/>
+          <a:lstStyle xmlns:a="http://schemas.openxmlformats.org/drawingml/2006/main"/>
+          <a:p xmlns:a="http://schemas.openxmlformats.org/drawingml/2006/main"/>
         </p:txBody>
       </p:sp>
       <p:sp>
@@ -17325,9 +17585,10 @@
             <a:srgbClr val="EFF5F9"/>
           </a:solidFill>
         </p:spPr>
-        <p:txBody xmlns:a="http://schemas.openxmlformats.org/drawingml/2006/main">
-          <a:bodyPr/>
-          <a:p/>
+        <p:txBody>
+          <a:bodyPr xmlns:a="http://schemas.openxmlformats.org/drawingml/2006/main"/>
+          <a:lstStyle xmlns:a="http://schemas.openxmlformats.org/drawingml/2006/main"/>
+          <a:p xmlns:a="http://schemas.openxmlformats.org/drawingml/2006/main"/>
         </p:txBody>
       </p:sp>
       <p:sp>
@@ -17356,9 +17617,10 @@
             <a:srgbClr val="2A78D6"/>
           </a:solidFill>
         </p:spPr>
-        <p:txBody xmlns:a="http://schemas.openxmlformats.org/drawingml/2006/main">
-          <a:bodyPr/>
-          <a:p/>
+        <p:txBody>
+          <a:bodyPr xmlns:a="http://schemas.openxmlformats.org/drawingml/2006/main"/>
+          <a:lstStyle xmlns:a="http://schemas.openxmlformats.org/drawingml/2006/main"/>
+          <a:p xmlns:a="http://schemas.openxmlformats.org/drawingml/2006/main"/>
         </p:txBody>
       </p:sp>
       <p:sp>

--- a/presentation/round1_pitch.pptx
+++ b/presentation/round1_pitch.pptx
@@ -1521,64 +1521,40 @@
           <a:lstStyle xmlns:a="http://schemas.openxmlformats.org/drawingml/2006/main"/>
           <a:p xmlns:a="http://schemas.openxmlformats.org/drawingml/2006/main">
             <a:r>
-              <a:t>Chloe, your firm receives customer complaints that have to be reviewed and routed to the right team, and today that is largely a manual process. That gives us a practical, low-risk way to test whether AI can create real value.</a:t>
-            </a:r>
-          </a:p>
-          <a:p xmlns:a="http://schemas.openxmlformats.org/drawingml/2006/main">
-            <a:r>
-              <a:t/>
-            </a:r>
-          </a:p>
+              <a:t>Chleo, your firm receives customer complaints that have to be reviewed and routed to the right team, and today that is largely a manual process. That gives us a practical, low-risk way to test whether AI can create real value.</a:t>
+            </a:r>
+          </a:p>
+          <a:p xmlns:a="http://schemas.openxmlformats.org/drawingml/2006/main"/>
           <a:p xmlns:a="http://schemas.openxmlformats.org/drawingml/2006/main">
             <a:r>
               <a:t>The assistant would read each complaint, suggest which team should handle it, and show the customer’s own words behind its recommendation. Your staff would still make every final decision.</a:t>
             </a:r>
           </a:p>
-          <a:p xmlns:a="http://schemas.openxmlformats.org/drawingml/2006/main">
-            <a:r>
-              <a:t/>
-            </a:r>
-          </a:p>
+          <a:p xmlns:a="http://schemas.openxmlformats.org/drawingml/2006/main"/>
           <a:p xmlns:a="http://schemas.openxmlformats.org/drawingml/2006/main">
             <a:r>
               <a:t>I have already tested the approach on public complaint data. It showed enough promise to justify a proper test, and importantly, it stopped rather than forcing an answer when its checks failed. But public labels are not a substitute for decisions made by your own experienced handlers.</a:t>
             </a:r>
           </a:p>
-          <a:p xmlns:a="http://schemas.openxmlformats.org/drawingml/2006/main">
-            <a:r>
-              <a:t/>
-            </a:r>
-          </a:p>
+          <a:p xmlns:a="http://schemas.openxmlformats.org/drawingml/2006/main"/>
           <a:p xmlns:a="http://schemas.openxmlformats.org/drawingml/2006/main">
             <a:r>
               <a:t>So the next step is to test it against a representative sample of 300 of your historical complaints, then, if the results justify it, run a 60-day shadow pilot where nobody acts on the AI’s recommendations.</a:t>
             </a:r>
           </a:p>
-          <a:p xmlns:a="http://schemas.openxmlformats.org/drawingml/2006/main">
-            <a:r>
-              <a:t/>
-            </a:r>
-          </a:p>
+          <a:p xmlns:a="http://schemas.openxmlformats.org/drawingml/2006/main"/>
           <a:p xmlns:a="http://schemas.openxmlformats.org/drawingml/2006/main">
             <a:r>
               <a:t>What I am asking you to approve today is that controlled test—not an AI deployment.</a:t>
             </a:r>
           </a:p>
-          <a:p xmlns:a="http://schemas.openxmlformats.org/drawingml/2006/main">
-            <a:r>
-              <a:t/>
-            </a:r>
-          </a:p>
+          <a:p xmlns:a="http://schemas.openxmlformats.org/drawingml/2006/main"/>
           <a:p xmlns:a="http://schemas.openxmlformats.org/drawingml/2006/main">
             <a:r>
               <a:t>--- END OF SPOKEN NOTES ---</a:t>
             </a:r>
           </a:p>
-          <a:p xmlns:a="http://schemas.openxmlformats.org/drawingml/2006/main">
-            <a:r>
-              <a:t/>
-            </a:r>
-          </a:p>
+          <a:p xmlns:a="http://schemas.openxmlformats.org/drawingml/2006/main"/>
           <a:p xmlns:a="http://schemas.openxmlformats.org/drawingml/2006/main">
             <a:r>
               <a:t>[Sources]</a:t>
@@ -11317,30 +11293,6 @@
           <a:p xmlns:a="http://schemas.openxmlformats.org/drawingml/2006/main"/>
         </p:txBody>
       </p:sp>
-      <p:pic>
-        <p:nvPicPr>
-          <p:cNvPr id="23" name="Image 0"/>
-          <p:cNvPicPr>
-            <a:picLocks xmlns:a="http://schemas.openxmlformats.org/drawingml/2006/main" noChangeAspect="1"/>
-          </p:cNvPicPr>
-          <p:nvPr/>
-        </p:nvPicPr>
-        <p:blipFill>
-          <a:blip xmlns:r="http://schemas.openxmlformats.org/officeDocument/2006/relationships" xmlns:a="http://schemas.openxmlformats.org/drawingml/2006/main" r:embed="Rd1466d843e1d46b8"/>
-          <a:stretch xmlns:a="http://schemas.openxmlformats.org/drawingml/2006/main">
-            <a:fillRect l="0" t="0" r="0" b="0"/>
-          </a:stretch>
-        </p:blipFill>
-        <p:spPr>
-          <a:xfrm xmlns:a="http://schemas.openxmlformats.org/drawingml/2006/main">
-            <a:off x="708660" y="800100"/>
-            <a:ext cx="283464" cy="283464"/>
-          </a:xfrm>
-          <a:prstGeom xmlns:a="http://schemas.openxmlformats.org/drawingml/2006/main" prst="rect">
-            <a:avLst/>
-          </a:prstGeom>
-        </p:spPr>
-      </p:pic>
       <p:sp>
         <p:nvSpPr>
           <p:cNvPr id="5" name="Text 2">
@@ -12111,6 +12063,30 @@
           </a:p>
         </p:txBody>
       </p:sp>
+      <p:pic xmlns:a="http://schemas.openxmlformats.org/drawingml/2006/main" xmlns:r="http://schemas.openxmlformats.org/officeDocument/2006/relationships">
+        <p:nvPicPr>
+          <p:cNvPr id="24" name="Picture 23" descr="icon_scope.png"/>
+          <p:cNvPicPr>
+            <a:picLocks noChangeAspect="1"/>
+          </p:cNvPicPr>
+          <p:nvPr/>
+        </p:nvPicPr>
+        <p:blipFill>
+          <a:blip r:embed="rId4"/>
+          <a:stretch>
+            <a:fillRect/>
+          </a:stretch>
+        </p:blipFill>
+        <p:spPr>
+          <a:xfrm>
+            <a:off x="708660" y="800100"/>
+            <a:ext cx="283464" cy="283464"/>
+          </a:xfrm>
+          <a:prstGeom prst="rect">
+            <a:avLst/>
+          </a:prstGeom>
+        </p:spPr>
+      </p:pic>
     </p:spTree>
     <p:extLst>
       <p:ext uri="{BB962C8B-B14F-4D97-AF65-F5344CB8AC3E}">

--- a/presentation/round1_pitch.pptx
+++ b/presentation/round1_pitch.pptx
@@ -16734,30 +16734,6 @@
           <a:p xmlns:a="http://schemas.openxmlformats.org/drawingml/2006/main"/>
         </p:txBody>
       </p:sp>
-      <p:pic>
-        <p:nvPicPr>
-          <p:cNvPr id="10" name="Image 0"/>
-          <p:cNvPicPr>
-            <a:picLocks xmlns:a="http://schemas.openxmlformats.org/drawingml/2006/main" noChangeAspect="1"/>
-          </p:cNvPicPr>
-          <p:nvPr/>
-        </p:nvPicPr>
-        <p:blipFill>
-          <a:blip xmlns:r="http://schemas.openxmlformats.org/officeDocument/2006/relationships" xmlns:a="http://schemas.openxmlformats.org/drawingml/2006/main" r:embed="R148d0ca6a8884e2f"/>
-          <a:stretch xmlns:a="http://schemas.openxmlformats.org/drawingml/2006/main">
-            <a:fillRect l="0" t="0" r="0" b="0"/>
-          </a:stretch>
-        </p:blipFill>
-        <p:spPr>
-          <a:xfrm xmlns:a="http://schemas.openxmlformats.org/drawingml/2006/main">
-            <a:off x="708660" y="800100"/>
-            <a:ext cx="283464" cy="283464"/>
-          </a:xfrm>
-          <a:prstGeom xmlns:a="http://schemas.openxmlformats.org/drawingml/2006/main" prst="rect">
-            <a:avLst/>
-          </a:prstGeom>
-        </p:spPr>
-      </p:pic>
       <p:sp>
         <p:nvSpPr>
           <p:cNvPr id="5" name="Text 2">
@@ -16856,6 +16832,30 @@
           </a:p>
         </p:txBody>
       </p:sp>
+      <p:pic xmlns:a="http://schemas.openxmlformats.org/drawingml/2006/main" xmlns:r="http://schemas.openxmlformats.org/officeDocument/2006/relationships">
+        <p:nvPicPr>
+          <p:cNvPr id="11" name="Picture 10" descr="image.png"/>
+          <p:cNvPicPr>
+            <a:picLocks noChangeAspect="1"/>
+          </p:cNvPicPr>
+          <p:nvPr/>
+        </p:nvPicPr>
+        <p:blipFill>
+          <a:blip r:embed="rId4"/>
+          <a:stretch>
+            <a:fillRect/>
+          </a:stretch>
+        </p:blipFill>
+        <p:spPr>
+          <a:xfrm>
+            <a:off x="708660" y="800100"/>
+            <a:ext cx="283464" cy="283464"/>
+          </a:xfrm>
+          <a:prstGeom prst="rect">
+            <a:avLst/>
+          </a:prstGeom>
+        </p:spPr>
+      </p:pic>
     </p:spTree>
     <p:extLst>
       <p:ext uri="{BB962C8B-B14F-4D97-AF65-F5344CB8AC3E}">
